--- a/video/deck/Serve_Meta_deck.pptx
+++ b/video/deck/Serve_Meta_deck.pptx
@@ -23,9 +23,10 @@
     <p:sldId id="271" r:id="rId17"/>
     <p:sldId id="272" r:id="rId18"/>
     <p:sldId id="273" r:id="rId19"/>
+    <p:sldId id="274" r:id="rId20"/>
   </p:sldIdLst>
   <p:notesMasterIdLst>
-    <p:notesMasterId r:id="rId20"/>
+    <p:notesMasterId r:id="rId21"/>
   </p:notesMasterIdLst>
   <p:sldSz cx="12192000" cy="6858000"/>
   <p:notesSz cx="6858000" cy="12192000"/>
@@ -124,50 +125,51 @@
   <p:extLst>
     <p:ext uri="{521415D9-36F7-43E2-AB2F-B90AF26B5E84}">
       <p14:sectionLst xmlns:p14="http://schemas.microsoft.com/office/powerpoint/2010/main">
-        <p14:section name="Opening" id="{85235994-8f3a-0696-c72b-eca16749e301}">
+        <p14:section name="Opening" id="{57e9e2b3-b295-9c3f-f7a5-599f44672d26}">
           <p14:sldIdLst>
             <p14:sldId id="256"/>
             <p14:sldId id="257"/>
           </p14:sldIdLst>
         </p14:section>
-        <p14:section name="Impact" id="{5b07bfd6-3858-db31-59fb-78d2623de44a}">
+        <p14:section name="Impact" id="{df9d2a10-1fb9-9ab7-5580-b2d27b6de9fa}">
           <p14:sldIdLst>
             <p14:sldId id="258"/>
             <p14:sldId id="259"/>
           </p14:sldIdLst>
         </p14:section>
-        <p14:section name="Demo" id="{0aa71185-b0cb-d90d-2242-7fdf98be28f1}">
+        <p14:section name="Demo" id="{d072a8ec-25ec-feae-d318-72e752a4f11c}">
           <p14:sldIdLst>
             <p14:sldId id="260"/>
             <p14:sldId id="261"/>
             <p14:sldId id="262"/>
           </p14:sldIdLst>
         </p14:section>
-        <p14:section name="Use of Meta AI" id="{c3bc9d30-2177-a499-c62f-a76a6d3bb875}">
+        <p14:section name="Use of Meta AI" id="{4ac3854c-0375-5879-906e-0c85a637ae6c}">
           <p14:sldIdLst>
             <p14:sldId id="263"/>
             <p14:sldId id="264"/>
             <p14:sldId id="265"/>
             <p14:sldId id="266"/>
+            <p14:sldId id="267"/>
           </p14:sldIdLst>
         </p14:section>
-        <p14:section name="Technical depth" id="{e8f487c2-9bf9-af72-ada1-04bfb81967bd}">
+        <p14:section name="Technical depth" id="{38c51e6c-6e84-7b4b-d76f-73e0c6b0333d}">
           <p14:sldIdLst>
-            <p14:sldId id="267"/>
             <p14:sldId id="268"/>
             <p14:sldId id="269"/>
             <p14:sldId id="270"/>
             <p14:sldId id="271"/>
-          </p14:sldIdLst>
-        </p14:section>
-        <p14:section name="Architecture" id="{d2e779df-8f1d-df80-4304-807396f542ae}">
-          <p14:sldIdLst>
             <p14:sldId id="272"/>
           </p14:sldIdLst>
         </p14:section>
-        <p14:section name="Close" id="{0c2bea47-edf3-3e29-a258-06209a04602c}">
+        <p14:section name="Architecture" id="{dff77e1a-b24f-8dcf-4a47-9182efd8fdec}">
           <p14:sldIdLst>
             <p14:sldId id="273"/>
+          </p14:sldIdLst>
+        </p14:section>
+        <p14:section name="Close" id="{fddc273b-21ee-c40f-f372-ae252651c1fe}">
+          <p14:sldIdLst>
+            <p14:sldId id="274"/>
           </p14:sldIdLst>
         </p14:section>
       </p14:sectionLst>
@@ -1002,8 +1004,8 @@
           <a:p>
             <a:r>
               <a:rPr lang="en-US" dirty="0"/>
-              <a:t>Highlight 管線：DETR 找人 → Sapiens2 讀姿勢、找最快的揮拍 → SAM 2.1 把你切出來 → MapAnything 算深度和相機，時間暫停、鏡頭繞 20° → Muse Glimmer 寫說明，程式核對 → 一鍵分享到 Instagram。影片不離開伺服器。
-旁白：Thursday, game done. I upload a phone clip… With MapAnything, time stops and the camera turns around the smash.</a:t>
+              <a:t>AI Trust：像 Messenger 一樣的「Agent 對話」頁。你的 agent 在右邊（綠色），其他會員的 agent 在左邊，一輪一輪，每則訊息下面標示意思（提案、同意、反提案、拒絕），以及程式是否已經用大家的行事曆檢查過（fits everyone）。標題列顯示對方的 Agent Card 已驗證。談成後出現「Agreed」，但要你按 yes 才訂。
+這些就是 agent 之間透過 A2A 真的送出的訊息，不是摘要。</a:t>
             </a:r>
             <a:endParaRPr lang="en-US" dirty="0"/>
           </a:p>
@@ -1091,8 +1093,8 @@
           <a:p>
             <a:r>
               <a:rPr lang="en-US" dirty="0"/>
-              <a:t>Glimmer 的帳本：記錄 2,755 次呼叫，84% 的 token 是推理；就算關掉 thinking，它還是在隱藏通道推理，預算不夠時 9% 回空白。所以每次呼叫用 think:"low" 並留推理空間。再來是三層決策：能用程式就用程式 → 1B 學生模型有把握才答（54–67%）→ 真的需要才叫 Glimmer。
-旁白：Logging 2,755 calls, I found that 84% of Glimmer's tokens are reasoning…</a:t>
+              <a:t>Highlight 管線：DETR 找人 → Sapiens2 讀姿勢、找最快的揮拍 → SAM 2.1 把你切出來 → MapAnything 算深度和相機，時間暫停、鏡頭繞 20° → Muse Glimmer 寫說明，程式核對 → 一鍵分享到 Instagram。影片不離開伺服器。
+旁白：Thursday, game done. I upload a phone clip… With MapAnything, time stops and the camera turns around the smash.</a:t>
             </a:r>
             <a:endParaRPr lang="en-US" dirty="0"/>
           </a:p>
@@ -1180,10 +1182,8 @@
           <a:p>
             <a:r>
               <a:rPr lang="en-US" dirty="0"/>
-              <a:t>兩張實驗圖（技術報告裡的）：
-左：把整個社團塞進 prompt，token 隨人數線性成長；Serve 先用程式篩選候選人，每次呼叫的 token 幾乎不變。
-右：一個會員的決策，每一層的成本 vs. 和完整答案一致的比例：程式 → Llama 3.2 1B → Muse Glimmer（FrugalGPT 式分層）。
-這頁讓評審三秒看出工程上有量測。</a:t>
+              <a:t>Glimmer 的帳本：記錄 2,755 次呼叫，84% 的 token 是推理；就算關掉 thinking，它還是在隱藏通道推理，預算不夠時 9% 回空白。所以每次呼叫用 think:"low" 並留推理空間。再來是三層決策：能用程式就用程式 → 1B 學生模型有把握才答（54–67%）→ 真的需要才叫 Glimmer。
+旁白：Logging 2,755 calls, I found that 84% of Glimmer's tokens are reasoning…</a:t>
             </a:r>
             <a:endParaRPr lang="en-US" dirty="0"/>
           </a:p>
@@ -1271,8 +1271,10 @@
           <a:p>
             <a:r>
               <a:rPr lang="en-US" dirty="0"/>
-              <a:t>安全：每個 agent 都遵守 Meta 的 Agents Rule of Two（不可信輸入、私人資料、行動能力，最多同時兩個）。揭露預算：一直約球的 agent 能拼出你一週的行程，有預算時從 97.6% 降到 32.4%（模擬的探測者）。65 個攻擊全部擋下。
-旁白：Every agent follows Meta's Agents Rule of Two. And a disclosure budget cuts how much of your week a snooping agent can pin down, from 97.6% to 32.4%.</a:t>
+              <a:t>兩張實驗圖（技術報告裡的）：
+左：把整個社團塞進 prompt，token 隨人數線性成長；Serve 先用程式篩選候選人，每次呼叫的 token 幾乎不變。
+右：一個會員的決策，每一層的成本 vs. 和完整答案一致的比例：程式 → Llama 3.2 1B → Muse Glimmer（FrugalGPT 式分層）。
+這頁讓評審三秒看出工程上有量測。</a:t>
             </a:r>
             <a:endParaRPr lang="en-US" dirty="0"/>
           </a:p>
@@ -1360,8 +1362,8 @@
           <a:p>
             <a:r>
               <a:rPr lang="en-US" dirty="0"/>
-              <a:t>自我演化的社團：會員在 Messenger 打 /idea 或按讚 → DRAMA 依語意分群，5 人提到才出現 → 二次方投票 → Muse Glimmer 寫規格、人工核准 → coding agent 在自己的分支上實作（從不讀社群文字）→ 九道關卡，第一個失敗就停 → 小規模上線，倒讚變多就自己關掉。永遠不能改的清單。這段是模擬社團（seed 7），但管線、關卡和回滾是真的。
-旁白：And the club evolves itself…</a:t>
+              <a:t>安全：每個 agent 都遵守 Meta 的 Agents Rule of Two（不可信輸入、私人資料、行動能力，最多同時兩個）。揭露預算：一直約球的 agent 能拼出你一週的行程，有預算時從 97.6% 降到 32.4%（模擬的探測者）。65 個攻擊全部擋下。
+旁白：Every agent follows Meta's Agents Rule of Two. And a disclosure budget cuts how much of your week a snooping agent can pin down, from 97.6% to 32.4%.</a:t>
             </a:r>
             <a:endParaRPr lang="en-US" dirty="0"/>
           </a:p>
@@ -1449,7 +1451,8 @@
           <a:p>
             <a:r>
               <a:rPr lang="en-US" dirty="0"/>
-              <a:t>證據頁：每個數字都有 log。e2e、攻擊測試在雲端 A100 上用同一個 Muse Glimmer（同一個 model digest）跑。可以快速帶過，或只在影片片尾字卡出現。</a:t>
+              <a:t>自我演化的社團：會員在 Messenger 打 /idea 或按讚 → DRAMA 依語意分群，5 人提到才出現 → 二次方投票 → Muse Glimmer 寫規格、人工核准 → coding agent 在自己的分支上實作（從不讀社群文字）→ 九道關卡，第一個失敗就停 → 小規模上線，倒讚變多就自己關掉。永遠不能改的清單。這段是模擬社團（seed 7），但管線、關卡和回滾是真的。
+旁白：And the club evolves itself…</a:t>
             </a:r>
             <a:endParaRPr lang="en-US" dirty="0"/>
           </a:p>
@@ -1537,7 +1540,7 @@
           <a:p>
             <a:r>
               <a:rPr lang="en-US" dirty="0"/>
-              <a:t>完整技術架構（放最後給想深入的評審）：左邊是使用者的入口；中間是 Node.js gateway 上的各個模組；右邊是 Meta 模型實際跑在哪（GPU 1 Muse Glimmer、GPU 0 視覺、CPU 上的小模型），以及外部開放資料。底下是「給人看之前先由程式檢查」與帳本/追蹤。</a:t>
+              <a:t>證據頁：每個數字都有 log。e2e、攻擊測試在雲端 A100 上用同一個 Muse Glimmer（同一個 model digest）跑。可以快速帶過，或只在影片片尾字卡出現。</a:t>
             </a:r>
             <a:endParaRPr lang="en-US" dirty="0"/>
           </a:p>
@@ -1625,8 +1628,7 @@
           <a:p>
             <a:r>
               <a:rPr lang="en-US" dirty="0"/>
-              <a:t>片尾：Play more, manage less. 黑客松期間開發聲明（TrackNetV5 除外）、repo 連結、Built on Muse Glimmer。
-旁白：That's Serve. Play more, manage less.</a:t>
+              <a:t>完整技術架構（放最後給想深入的評審）：左邊是使用者的入口；中間是 Node.js gateway 上的各個模組；右邊是 Meta 模型實際跑在哪（GPU 1 Muse Glimmer、GPU 0 視覺、CPU 上的小模型），以及外部開放資料。底下是「給人看之前先由程式檢查」與帳本/追蹤。</a:t>
             </a:r>
             <a:endParaRPr lang="en-US" dirty="0"/>
           </a:p>
@@ -1650,6 +1652,95 @@
             <a:fld id="{F7021451-1387-4CA6-816F-3879F97B5CBC}" type="slidenum">
               <a:rPr lang="en-US"/>
               <a:t>18</a:t>
+            </a:fld>
+            <a:endParaRPr lang="en-US"/>
+          </a:p>
+        </p:txBody>
+      </p:sp>
+    </p:spTree>
+    <p:extLst>
+      <p:ext uri="{BB962C8B-B14F-4D97-AF65-F5344CB8AC3E}">
+        <p14:creationId xmlns:p14="http://schemas.microsoft.com/office/powerpoint/2010/main" val="1024086991"/>
+      </p:ext>
+    </p:extLst>
+  </p:cSld>
+  <p:clrMapOvr>
+    <a:masterClrMapping/>
+  </p:clrMapOvr>
+</p:notes>
+</file>
+
+<file path=ppt/notesSlides/notesSlide19.xml><?xml version="1.0" encoding="utf-8"?>
+<p:notes xmlns:a="http://schemas.openxmlformats.org/drawingml/2006/main" xmlns:r="http://schemas.openxmlformats.org/officeDocument/2006/relationships" xmlns:p="http://schemas.openxmlformats.org/presentationml/2006/main">
+  <p:cSld>
+    <p:spTree>
+      <p:nvGrpSpPr>
+        <p:cNvPr id="1" name=""/>
+        <p:cNvGrpSpPr/>
+        <p:nvPr/>
+      </p:nvGrpSpPr>
+      <p:grpSpPr>
+        <a:xfrm>
+          <a:off x="0" y="0"/>
+          <a:ext cx="0" cy="0"/>
+          <a:chOff x="0" y="0"/>
+          <a:chExt cx="0" cy="0"/>
+        </a:xfrm>
+      </p:grpSpPr>
+      <p:sp>
+        <p:nvSpPr>
+          <p:cNvPr id="2" name="Slide Image Placeholder 1"/>
+          <p:cNvSpPr>
+            <a:spLocks noGrp="1" noRot="1" noChangeAspect="1"/>
+          </p:cNvSpPr>
+          <p:nvPr>
+            <p:ph type="sldImg"/>
+          </p:nvPr>
+        </p:nvSpPr>
+        <p:spPr/>
+      </p:sp>
+      <p:sp>
+        <p:nvSpPr>
+          <p:cNvPr id="3" name="Notes Placeholder 2"/>
+          <p:cNvSpPr>
+            <a:spLocks noGrp="1"/>
+          </p:cNvSpPr>
+          <p:nvPr>
+            <p:ph type="body" idx="1"/>
+          </p:nvPr>
+        </p:nvSpPr>
+        <p:spPr/>
+        <p:txBody>
+          <a:bodyPr/>
+          <a:lstStyle/>
+          <a:p>
+            <a:r>
+              <a:rPr lang="en-US" dirty="0"/>
+              <a:t>片尾：Play more, manage less. 黑客松期間開發聲明（TrackNetV5 除外）、repo 連結、Built on Muse Glimmer。
+旁白：That's Serve. Play more, manage less.</a:t>
+            </a:r>
+            <a:endParaRPr lang="en-US" dirty="0"/>
+          </a:p>
+        </p:txBody>
+      </p:sp>
+      <p:sp>
+        <p:nvSpPr>
+          <p:cNvPr id="4" name="Slide Number Placeholder 3"/>
+          <p:cNvSpPr>
+            <a:spLocks noGrp="1"/>
+          </p:cNvSpPr>
+          <p:nvPr>
+            <p:ph type="sldNum" sz="quarter" idx="10"/>
+          </p:nvPr>
+        </p:nvSpPr>
+        <p:spPr/>
+        <p:txBody>
+          <a:bodyPr/>
+          <a:lstStyle/>
+          <a:p>
+            <a:fld id="{F7021451-1387-4CA6-816F-3879F97B5CBC}" type="slidenum">
+              <a:rPr lang="en-US"/>
+              <a:t>19</a:t>
             </a:fld>
             <a:endParaRPr lang="en-US"/>
           </a:p>
@@ -4547,7 +4638,7 @@
                   <a:srgbClr val="0A7F44"/>
                 </a:solidFill>
               </a:rPr>
-              <a:t>HIGHLIGHTS · FOUR META VISION MODELS</a:t>
+              <a:t>AI TRUST</a:t>
             </a:r>
             <a:endParaRPr lang="en-US" sz="1300" dirty="0"/>
           </a:p>
@@ -4585,7 +4676,7 @@
                   <a:srgbClr val="0A0A0B"/>
                 </a:solidFill>
               </a:rPr>
-              <a:t>Your phone clip becomes your moment, on my GPU</a:t>
+              <a:t>See exactly what your agent said to theirs</a:t>
             </a:r>
             <a:endParaRPr lang="en-US" sz="3200" dirty="0"/>
           </a:p>
@@ -4599,592 +4690,28 @@
         </p:nvSpPr>
         <p:spPr>
           <a:xfrm>
-            <a:off x="548640" y="1691640"/>
-            <a:ext cx="2011680" cy="1143000"/>
+            <a:off x="621792" y="1627632"/>
+            <a:ext cx="2113911" cy="4425696"/>
           </a:xfrm>
           <a:prstGeom prst="roundRect">
             <a:avLst>
-              <a:gd name="adj" fmla="val 9600"/>
+              <a:gd name="adj" fmla="val 8651"/>
             </a:avLst>
           </a:prstGeom>
           <a:solidFill>
-            <a:srgbClr val="E8F1FD"/>
+            <a:srgbClr val="0A0A0B"/>
           </a:solidFill>
           <a:ln w="12700">
             <a:solidFill>
-              <a:srgbClr val="E8F1FD"/>
+              <a:srgbClr val="0A0A0B"/>
             </a:solidFill>
             <a:prstDash val="solid"/>
           </a:ln>
         </p:spPr>
       </p:sp>
-      <p:sp>
-        <p:nvSpPr>
-          <p:cNvPr id="6" name="Text 3"/>
-          <p:cNvSpPr txBox="1"/>
-          <p:nvPr/>
-        </p:nvSpPr>
-        <p:spPr>
-          <a:xfrm>
-            <a:off x="713232" y="1810512"/>
-            <a:ext cx="1737360" cy="320040"/>
-          </a:xfrm>
-          <a:prstGeom prst="rect">
-            <a:avLst/>
-          </a:prstGeom>
-          <a:noFill/>
-          <a:ln/>
-        </p:spPr>
-        <p:txBody>
-          <a:bodyPr wrap="square" lIns="0" tIns="0" rIns="0" bIns="0" rtlCol="0" anchor="t"/>
-          <a:lstStyle/>
-          <a:p>
-            <a:pPr indent="0" marL="0">
-              <a:buNone/>
-            </a:pPr>
-            <a:r>
-              <a:rPr lang="en-US" sz="1500" b="1" dirty="0">
-                <a:solidFill>
-                  <a:srgbClr val="0064E0"/>
-                </a:solidFill>
-              </a:rPr>
-              <a:t>DETR</a:t>
-            </a:r>
-            <a:endParaRPr lang="en-US" sz="1500" dirty="0"/>
-          </a:p>
-        </p:txBody>
-      </p:sp>
-      <p:sp>
-        <p:nvSpPr>
-          <p:cNvPr id="7" name="Text 4"/>
-          <p:cNvSpPr txBox="1"/>
-          <p:nvPr/>
-        </p:nvSpPr>
-        <p:spPr>
-          <a:xfrm>
-            <a:off x="713232" y="2148840"/>
-            <a:ext cx="1737360" cy="640080"/>
-          </a:xfrm>
-          <a:prstGeom prst="rect">
-            <a:avLst/>
-          </a:prstGeom>
-          <a:noFill/>
-          <a:ln/>
-        </p:spPr>
-        <p:txBody>
-          <a:bodyPr wrap="square" lIns="0" tIns="0" rIns="0" bIns="0" rtlCol="0" anchor="t"/>
-          <a:lstStyle/>
-          <a:p>
-            <a:pPr indent="0" marL="0">
-              <a:buNone/>
-            </a:pPr>
-            <a:r>
-              <a:rPr lang="en-US" sz="1150" dirty="0">
-                <a:solidFill>
-                  <a:srgbClr val="0A0A0B"/>
-                </a:solidFill>
-              </a:rPr>
-              <a:t>finds the players</a:t>
-            </a:r>
-            <a:endParaRPr lang="en-US" sz="1150" dirty="0"/>
-          </a:p>
-        </p:txBody>
-      </p:sp>
-      <p:sp>
-        <p:nvSpPr>
-          <p:cNvPr id="8" name="Shape 5"/>
-          <p:cNvSpPr/>
-          <p:nvPr/>
-        </p:nvSpPr>
-        <p:spPr>
-          <a:xfrm>
-            <a:off x="2578608" y="2258568"/>
-            <a:ext cx="192024" cy="0"/>
-          </a:xfrm>
-          <a:prstGeom prst="line">
-            <a:avLst/>
-          </a:prstGeom>
-          <a:noFill/>
-          <a:ln w="22225">
-            <a:solidFill>
-              <a:srgbClr val="8A8A92"/>
-            </a:solidFill>
-            <a:prstDash val="solid"/>
-            <a:tailEnd type="triangle"/>
-          </a:ln>
-        </p:spPr>
-      </p:sp>
-      <p:sp>
-        <p:nvSpPr>
-          <p:cNvPr id="9" name="Shape 6"/>
-          <p:cNvSpPr/>
-          <p:nvPr/>
-        </p:nvSpPr>
-        <p:spPr>
-          <a:xfrm>
-            <a:off x="2788920" y="1691640"/>
-            <a:ext cx="2011680" cy="1143000"/>
-          </a:xfrm>
-          <a:prstGeom prst="roundRect">
-            <a:avLst>
-              <a:gd name="adj" fmla="val 9600"/>
-            </a:avLst>
-          </a:prstGeom>
-          <a:solidFill>
-            <a:srgbClr val="E8F1FD"/>
-          </a:solidFill>
-          <a:ln w="12700">
-            <a:solidFill>
-              <a:srgbClr val="E8F1FD"/>
-            </a:solidFill>
-            <a:prstDash val="solid"/>
-          </a:ln>
-        </p:spPr>
-      </p:sp>
-      <p:sp>
-        <p:nvSpPr>
-          <p:cNvPr id="10" name="Text 7"/>
-          <p:cNvSpPr txBox="1"/>
-          <p:nvPr/>
-        </p:nvSpPr>
-        <p:spPr>
-          <a:xfrm>
-            <a:off x="2953512" y="1810512"/>
-            <a:ext cx="1737360" cy="320040"/>
-          </a:xfrm>
-          <a:prstGeom prst="rect">
-            <a:avLst/>
-          </a:prstGeom>
-          <a:noFill/>
-          <a:ln/>
-        </p:spPr>
-        <p:txBody>
-          <a:bodyPr wrap="square" lIns="0" tIns="0" rIns="0" bIns="0" rtlCol="0" anchor="t"/>
-          <a:lstStyle/>
-          <a:p>
-            <a:pPr indent="0" marL="0">
-              <a:buNone/>
-            </a:pPr>
-            <a:r>
-              <a:rPr lang="en-US" sz="1500" b="1" dirty="0">
-                <a:solidFill>
-                  <a:srgbClr val="0064E0"/>
-                </a:solidFill>
-              </a:rPr>
-              <a:t>Sapiens2</a:t>
-            </a:r>
-            <a:endParaRPr lang="en-US" sz="1500" dirty="0"/>
-          </a:p>
-        </p:txBody>
-      </p:sp>
-      <p:sp>
-        <p:nvSpPr>
-          <p:cNvPr id="11" name="Text 8"/>
-          <p:cNvSpPr txBox="1"/>
-          <p:nvPr/>
-        </p:nvSpPr>
-        <p:spPr>
-          <a:xfrm>
-            <a:off x="2953512" y="2148840"/>
-            <a:ext cx="1737360" cy="640080"/>
-          </a:xfrm>
-          <a:prstGeom prst="rect">
-            <a:avLst/>
-          </a:prstGeom>
-          <a:noFill/>
-          <a:ln/>
-        </p:spPr>
-        <p:txBody>
-          <a:bodyPr wrap="square" lIns="0" tIns="0" rIns="0" bIns="0" rtlCol="0" anchor="t"/>
-          <a:lstStyle/>
-          <a:p>
-            <a:pPr indent="0" marL="0">
-              <a:buNone/>
-            </a:pPr>
-            <a:r>
-              <a:rPr lang="en-US" sz="1150" dirty="0">
-                <a:solidFill>
-                  <a:srgbClr val="0A0A0B"/>
-                </a:solidFill>
-              </a:rPr>
-              <a:t>reads the pose, finds the fastest swing</a:t>
-            </a:r>
-            <a:endParaRPr lang="en-US" sz="1150" dirty="0"/>
-          </a:p>
-        </p:txBody>
-      </p:sp>
-      <p:sp>
-        <p:nvSpPr>
-          <p:cNvPr id="12" name="Shape 9"/>
-          <p:cNvSpPr/>
-          <p:nvPr/>
-        </p:nvSpPr>
-        <p:spPr>
-          <a:xfrm>
-            <a:off x="4818888" y="2258568"/>
-            <a:ext cx="192024" cy="0"/>
-          </a:xfrm>
-          <a:prstGeom prst="line">
-            <a:avLst/>
-          </a:prstGeom>
-          <a:noFill/>
-          <a:ln w="22225">
-            <a:solidFill>
-              <a:srgbClr val="8A8A92"/>
-            </a:solidFill>
-            <a:prstDash val="solid"/>
-            <a:tailEnd type="triangle"/>
-          </a:ln>
-        </p:spPr>
-      </p:sp>
-      <p:sp>
-        <p:nvSpPr>
-          <p:cNvPr id="13" name="Shape 10"/>
-          <p:cNvSpPr/>
-          <p:nvPr/>
-        </p:nvSpPr>
-        <p:spPr>
-          <a:xfrm>
-            <a:off x="5029200" y="1691640"/>
-            <a:ext cx="2011680" cy="1143000"/>
-          </a:xfrm>
-          <a:prstGeom prst="roundRect">
-            <a:avLst>
-              <a:gd name="adj" fmla="val 9600"/>
-            </a:avLst>
-          </a:prstGeom>
-          <a:solidFill>
-            <a:srgbClr val="E8F1FD"/>
-          </a:solidFill>
-          <a:ln w="12700">
-            <a:solidFill>
-              <a:srgbClr val="E8F1FD"/>
-            </a:solidFill>
-            <a:prstDash val="solid"/>
-          </a:ln>
-        </p:spPr>
-      </p:sp>
-      <p:sp>
-        <p:nvSpPr>
-          <p:cNvPr id="14" name="Text 11"/>
-          <p:cNvSpPr txBox="1"/>
-          <p:nvPr/>
-        </p:nvSpPr>
-        <p:spPr>
-          <a:xfrm>
-            <a:off x="5193792" y="1810512"/>
-            <a:ext cx="1737360" cy="320040"/>
-          </a:xfrm>
-          <a:prstGeom prst="rect">
-            <a:avLst/>
-          </a:prstGeom>
-          <a:noFill/>
-          <a:ln/>
-        </p:spPr>
-        <p:txBody>
-          <a:bodyPr wrap="square" lIns="0" tIns="0" rIns="0" bIns="0" rtlCol="0" anchor="t"/>
-          <a:lstStyle/>
-          <a:p>
-            <a:pPr indent="0" marL="0">
-              <a:buNone/>
-            </a:pPr>
-            <a:r>
-              <a:rPr lang="en-US" sz="1500" b="1" dirty="0">
-                <a:solidFill>
-                  <a:srgbClr val="0064E0"/>
-                </a:solidFill>
-              </a:rPr>
-              <a:t>SAM 2.1</a:t>
-            </a:r>
-            <a:endParaRPr lang="en-US" sz="1500" dirty="0"/>
-          </a:p>
-        </p:txBody>
-      </p:sp>
-      <p:sp>
-        <p:nvSpPr>
-          <p:cNvPr id="15" name="Text 12"/>
-          <p:cNvSpPr txBox="1"/>
-          <p:nvPr/>
-        </p:nvSpPr>
-        <p:spPr>
-          <a:xfrm>
-            <a:off x="5193792" y="2148840"/>
-            <a:ext cx="1737360" cy="640080"/>
-          </a:xfrm>
-          <a:prstGeom prst="rect">
-            <a:avLst/>
-          </a:prstGeom>
-          <a:noFill/>
-          <a:ln/>
-        </p:spPr>
-        <p:txBody>
-          <a:bodyPr wrap="square" lIns="0" tIns="0" rIns="0" bIns="0" rtlCol="0" anchor="t"/>
-          <a:lstStyle/>
-          <a:p>
-            <a:pPr indent="0" marL="0">
-              <a:buNone/>
-            </a:pPr>
-            <a:r>
-              <a:rPr lang="en-US" sz="1150" dirty="0">
-                <a:solidFill>
-                  <a:srgbClr val="0A0A0B"/>
-                </a:solidFill>
-              </a:rPr>
-              <a:t>cuts you out</a:t>
-            </a:r>
-            <a:endParaRPr lang="en-US" sz="1150" dirty="0"/>
-          </a:p>
-        </p:txBody>
-      </p:sp>
-      <p:sp>
-        <p:nvSpPr>
-          <p:cNvPr id="16" name="Shape 13"/>
-          <p:cNvSpPr/>
-          <p:nvPr/>
-        </p:nvSpPr>
-        <p:spPr>
-          <a:xfrm>
-            <a:off x="7059168" y="2258568"/>
-            <a:ext cx="192024" cy="0"/>
-          </a:xfrm>
-          <a:prstGeom prst="line">
-            <a:avLst/>
-          </a:prstGeom>
-          <a:noFill/>
-          <a:ln w="22225">
-            <a:solidFill>
-              <a:srgbClr val="8A8A92"/>
-            </a:solidFill>
-            <a:prstDash val="solid"/>
-            <a:tailEnd type="triangle"/>
-          </a:ln>
-        </p:spPr>
-      </p:sp>
-      <p:sp>
-        <p:nvSpPr>
-          <p:cNvPr id="17" name="Shape 14"/>
-          <p:cNvSpPr/>
-          <p:nvPr/>
-        </p:nvSpPr>
-        <p:spPr>
-          <a:xfrm>
-            <a:off x="7269480" y="1691640"/>
-            <a:ext cx="2011680" cy="1143000"/>
-          </a:xfrm>
-          <a:prstGeom prst="roundRect">
-            <a:avLst>
-              <a:gd name="adj" fmla="val 9600"/>
-            </a:avLst>
-          </a:prstGeom>
-          <a:solidFill>
-            <a:srgbClr val="E8F1FD"/>
-          </a:solidFill>
-          <a:ln w="12700">
-            <a:solidFill>
-              <a:srgbClr val="E8F1FD"/>
-            </a:solidFill>
-            <a:prstDash val="solid"/>
-          </a:ln>
-        </p:spPr>
-      </p:sp>
-      <p:sp>
-        <p:nvSpPr>
-          <p:cNvPr id="18" name="Text 15"/>
-          <p:cNvSpPr txBox="1"/>
-          <p:nvPr/>
-        </p:nvSpPr>
-        <p:spPr>
-          <a:xfrm>
-            <a:off x="7434072" y="1810512"/>
-            <a:ext cx="1737360" cy="320040"/>
-          </a:xfrm>
-          <a:prstGeom prst="rect">
-            <a:avLst/>
-          </a:prstGeom>
-          <a:noFill/>
-          <a:ln/>
-        </p:spPr>
-        <p:txBody>
-          <a:bodyPr wrap="square" lIns="0" tIns="0" rIns="0" bIns="0" rtlCol="0" anchor="t"/>
-          <a:lstStyle/>
-          <a:p>
-            <a:pPr indent="0" marL="0">
-              <a:buNone/>
-            </a:pPr>
-            <a:r>
-              <a:rPr lang="en-US" sz="1500" b="1" dirty="0">
-                <a:solidFill>
-                  <a:srgbClr val="0064E0"/>
-                </a:solidFill>
-              </a:rPr>
-              <a:t>MapAnything</a:t>
-            </a:r>
-            <a:endParaRPr lang="en-US" sz="1500" dirty="0"/>
-          </a:p>
-        </p:txBody>
-      </p:sp>
-      <p:sp>
-        <p:nvSpPr>
-          <p:cNvPr id="19" name="Text 16"/>
-          <p:cNvSpPr txBox="1"/>
-          <p:nvPr/>
-        </p:nvSpPr>
-        <p:spPr>
-          <a:xfrm>
-            <a:off x="7434072" y="2148840"/>
-            <a:ext cx="1737360" cy="640080"/>
-          </a:xfrm>
-          <a:prstGeom prst="rect">
-            <a:avLst/>
-          </a:prstGeom>
-          <a:noFill/>
-          <a:ln/>
-        </p:spPr>
-        <p:txBody>
-          <a:bodyPr wrap="square" lIns="0" tIns="0" rIns="0" bIns="0" rtlCol="0" anchor="t"/>
-          <a:lstStyle/>
-          <a:p>
-            <a:pPr indent="0" marL="0">
-              <a:buNone/>
-            </a:pPr>
-            <a:r>
-              <a:rPr lang="en-US" sz="1150" dirty="0">
-                <a:solidFill>
-                  <a:srgbClr val="0A0A0B"/>
-                </a:solidFill>
-              </a:rPr>
-              <a:t>depth and camera: time stops, the camera turns 20°</a:t>
-            </a:r>
-            <a:endParaRPr lang="en-US" sz="1150" dirty="0"/>
-          </a:p>
-        </p:txBody>
-      </p:sp>
-      <p:sp>
-        <p:nvSpPr>
-          <p:cNvPr id="20" name="Shape 17"/>
-          <p:cNvSpPr/>
-          <p:nvPr/>
-        </p:nvSpPr>
-        <p:spPr>
-          <a:xfrm>
-            <a:off x="9299448" y="2258568"/>
-            <a:ext cx="192024" cy="0"/>
-          </a:xfrm>
-          <a:prstGeom prst="line">
-            <a:avLst/>
-          </a:prstGeom>
-          <a:noFill/>
-          <a:ln w="22225">
-            <a:solidFill>
-              <a:srgbClr val="8A8A92"/>
-            </a:solidFill>
-            <a:prstDash val="solid"/>
-            <a:tailEnd type="triangle"/>
-          </a:ln>
-        </p:spPr>
-      </p:sp>
-      <p:sp>
-        <p:nvSpPr>
-          <p:cNvPr id="21" name="Shape 18"/>
-          <p:cNvSpPr/>
-          <p:nvPr/>
-        </p:nvSpPr>
-        <p:spPr>
-          <a:xfrm>
-            <a:off x="9509760" y="1691640"/>
-            <a:ext cx="2011680" cy="1143000"/>
-          </a:xfrm>
-          <a:prstGeom prst="roundRect">
-            <a:avLst>
-              <a:gd name="adj" fmla="val 9600"/>
-            </a:avLst>
-          </a:prstGeom>
-          <a:solidFill>
-            <a:srgbClr val="E9F3EC"/>
-          </a:solidFill>
-          <a:ln w="12700">
-            <a:solidFill>
-              <a:srgbClr val="E9F3EC"/>
-            </a:solidFill>
-            <a:prstDash val="solid"/>
-          </a:ln>
-        </p:spPr>
-      </p:sp>
-      <p:sp>
-        <p:nvSpPr>
-          <p:cNvPr id="22" name="Text 19"/>
-          <p:cNvSpPr txBox="1"/>
-          <p:nvPr/>
-        </p:nvSpPr>
-        <p:spPr>
-          <a:xfrm>
-            <a:off x="9674352" y="1810512"/>
-            <a:ext cx="1737360" cy="320040"/>
-          </a:xfrm>
-          <a:prstGeom prst="rect">
-            <a:avLst/>
-          </a:prstGeom>
-          <a:noFill/>
-          <a:ln/>
-        </p:spPr>
-        <p:txBody>
-          <a:bodyPr wrap="square" lIns="0" tIns="0" rIns="0" bIns="0" rtlCol="0" anchor="t"/>
-          <a:lstStyle/>
-          <a:p>
-            <a:pPr indent="0" marL="0">
-              <a:buNone/>
-            </a:pPr>
-            <a:r>
-              <a:rPr lang="en-US" sz="1500" b="1" dirty="0">
-                <a:solidFill>
-                  <a:srgbClr val="0A7F44"/>
-                </a:solidFill>
-              </a:rPr>
-              <a:t>Muse Glimmer</a:t>
-            </a:r>
-            <a:endParaRPr lang="en-US" sz="1500" dirty="0"/>
-          </a:p>
-        </p:txBody>
-      </p:sp>
-      <p:sp>
-        <p:nvSpPr>
-          <p:cNvPr id="23" name="Text 20"/>
-          <p:cNvSpPr txBox="1"/>
-          <p:nvPr/>
-        </p:nvSpPr>
-        <p:spPr>
-          <a:xfrm>
-            <a:off x="9674352" y="2148840"/>
-            <a:ext cx="1737360" cy="640080"/>
-          </a:xfrm>
-          <a:prstGeom prst="rect">
-            <a:avLst/>
-          </a:prstGeom>
-          <a:noFill/>
-          <a:ln/>
-        </p:spPr>
-        <p:txBody>
-          <a:bodyPr wrap="square" lIns="0" tIns="0" rIns="0" bIns="0" rtlCol="0" anchor="t"/>
-          <a:lstStyle/>
-          <a:p>
-            <a:pPr indent="0" marL="0">
-              <a:buNone/>
-            </a:pPr>
-            <a:r>
-              <a:rPr lang="en-US" sz="1150" dirty="0">
-                <a:solidFill>
-                  <a:srgbClr val="0A0A0B"/>
-                </a:solidFill>
-              </a:rPr>
-              <a:t>writes the caption, checked by code</a:t>
-            </a:r>
-            <a:endParaRPr lang="en-US" sz="1150" dirty="0"/>
-          </a:p>
-        </p:txBody>
-      </p:sp>
       <p:pic>
         <p:nvPicPr>
-          <p:cNvPr id="24" name="Image 0" descr="preencoded.png">    </p:cNvPr>
+          <p:cNvPr id="6" name="Image 0" descr="preencoded.png">    </p:cNvPr>
           <p:cNvPicPr>
             <a:picLocks noChangeAspect="1"/>
           </p:cNvPicPr>
@@ -5198,8 +4725,8 @@
         </p:blipFill>
         <p:spPr>
           <a:xfrm>
-            <a:off x="548640" y="3108960"/>
-            <a:ext cx="5394960" cy="3035808"/>
+            <a:off x="685800" y="1691640"/>
+            <a:ext cx="1985895" cy="4297680"/>
           </a:xfrm>
           <a:prstGeom prst="rect">
             <a:avLst/>
@@ -5208,43 +4735,70 @@
       </p:pic>
       <p:sp>
         <p:nvSpPr>
-          <p:cNvPr id="25" name="Text 21"/>
-          <p:cNvSpPr txBox="1"/>
-          <p:nvPr/>
-        </p:nvSpPr>
-        <p:spPr>
-          <a:xfrm>
-            <a:off x="548640" y="6181344"/>
-            <a:ext cx="5394960" cy="228600"/>
-          </a:xfrm>
-          <a:prstGeom prst="rect">
-            <a:avLst/>
-          </a:prstGeom>
-          <a:noFill/>
-          <a:ln/>
-        </p:spPr>
-        <p:txBody>
-          <a:bodyPr wrap="square" lIns="0" tIns="0" rIns="0" bIns="0" rtlCol="0" anchor="t"/>
-          <a:lstStyle/>
-          <a:p>
-            <a:pPr indent="0" marL="0">
-              <a:buNone/>
-            </a:pPr>
-            <a:r>
-              <a:rPr lang="en-US" sz="1000" dirty="0">
+          <p:cNvPr id="7" name="Text 3"/>
+          <p:cNvSpPr txBox="1"/>
+          <p:nvPr/>
+        </p:nvSpPr>
+        <p:spPr>
+          <a:xfrm>
+            <a:off x="411480" y="6108192"/>
+            <a:ext cx="2534535" cy="256032"/>
+          </a:xfrm>
+          <a:prstGeom prst="rect">
+            <a:avLst/>
+          </a:prstGeom>
+          <a:noFill/>
+          <a:ln/>
+        </p:spPr>
+        <p:txBody>
+          <a:bodyPr wrap="square" lIns="0" tIns="0" rIns="0" bIns="0" rtlCol="0" anchor="t"/>
+          <a:lstStyle/>
+          <a:p>
+            <a:pPr algn="ctr" indent="0" marL="0">
+              <a:buNone/>
+            </a:pPr>
+            <a:r>
+              <a:rPr lang="en-US" sz="1050" dirty="0">
                 <a:solidFill>
                   <a:srgbClr val="55555C"/>
                 </a:solidFill>
               </a:rPr>
-              <a:t>A CC BY 3.0 clip from Wikimedia Commons, as filmed</a:t>
-            </a:r>
-            <a:endParaRPr lang="en-US" sz="1000" dirty="0"/>
-          </a:p>
-        </p:txBody>
+              <a:t>Agent chats</a:t>
+            </a:r>
+            <a:endParaRPr lang="en-US" sz="1050" dirty="0"/>
+          </a:p>
+        </p:txBody>
+      </p:sp>
+      <p:sp>
+        <p:nvSpPr>
+          <p:cNvPr id="8" name="Shape 4"/>
+          <p:cNvSpPr/>
+          <p:nvPr/>
+        </p:nvSpPr>
+        <p:spPr>
+          <a:xfrm>
+            <a:off x="2999232" y="1627632"/>
+            <a:ext cx="2113911" cy="4425696"/>
+          </a:xfrm>
+          <a:prstGeom prst="roundRect">
+            <a:avLst>
+              <a:gd name="adj" fmla="val 8651"/>
+            </a:avLst>
+          </a:prstGeom>
+          <a:solidFill>
+            <a:srgbClr val="0A0A0B"/>
+          </a:solidFill>
+          <a:ln w="12700">
+            <a:solidFill>
+              <a:srgbClr val="0A0A0B"/>
+            </a:solidFill>
+            <a:prstDash val="solid"/>
+          </a:ln>
+        </p:spPr>
       </p:sp>
       <p:pic>
         <p:nvPicPr>
-          <p:cNvPr id="26" name="Image 1" descr="preencoded.png">    </p:cNvPr>
+          <p:cNvPr id="9" name="Image 1" descr="preencoded.png">    </p:cNvPr>
           <p:cNvPicPr>
             <a:picLocks noChangeAspect="1"/>
           </p:cNvPicPr>
@@ -5258,8 +4812,8 @@
         </p:blipFill>
         <p:spPr>
           <a:xfrm>
-            <a:off x="6172200" y="3108960"/>
-            <a:ext cx="5440680" cy="1527048"/>
+            <a:off x="3063240" y="1691640"/>
+            <a:ext cx="1985895" cy="4297680"/>
           </a:xfrm>
           <a:prstGeom prst="rect">
             <a:avLst/>
@@ -5268,140 +4822,517 @@
       </p:pic>
       <p:sp>
         <p:nvSpPr>
-          <p:cNvPr id="27" name="Text 22"/>
-          <p:cNvSpPr txBox="1"/>
-          <p:nvPr/>
-        </p:nvSpPr>
-        <p:spPr>
-          <a:xfrm>
-            <a:off x="6172200" y="4663440"/>
-            <a:ext cx="5440680" cy="228600"/>
-          </a:xfrm>
-          <a:prstGeom prst="rect">
-            <a:avLst/>
-          </a:prstGeom>
-          <a:noFill/>
-          <a:ln/>
-        </p:spPr>
-        <p:txBody>
-          <a:bodyPr wrap="square" lIns="0" tIns="0" rIns="0" bIns="0" rtlCol="0" anchor="t"/>
-          <a:lstStyle/>
-          <a:p>
-            <a:pPr indent="0" marL="0">
-              <a:buNone/>
-            </a:pPr>
-            <a:r>
-              <a:rPr lang="en-US" sz="1000" dirty="0">
+          <p:cNvPr id="10" name="Text 5"/>
+          <p:cNvSpPr txBox="1"/>
+          <p:nvPr/>
+        </p:nvSpPr>
+        <p:spPr>
+          <a:xfrm>
+            <a:off x="2788920" y="6108192"/>
+            <a:ext cx="2534535" cy="256032"/>
+          </a:xfrm>
+          <a:prstGeom prst="rect">
+            <a:avLst/>
+          </a:prstGeom>
+          <a:noFill/>
+          <a:ln/>
+        </p:spPr>
+        <p:txBody>
+          <a:bodyPr wrap="square" lIns="0" tIns="0" rIns="0" bIns="0" rtlCol="0" anchor="t"/>
+          <a:lstStyle/>
+          <a:p>
+            <a:pPr algn="ctr" indent="0" marL="0">
+              <a:buNone/>
+            </a:pPr>
+            <a:r>
+              <a:rPr lang="en-US" sz="1050" dirty="0">
                 <a:solidFill>
                   <a:srgbClr val="55555C"/>
                 </a:solidFill>
               </a:rPr>
-              <a:t>SAM 2.1 cut-out and MapAnything depth</a:t>
-            </a:r>
-            <a:endParaRPr lang="en-US" sz="1000" dirty="0"/>
-          </a:p>
-        </p:txBody>
-      </p:sp>
-      <p:sp>
-        <p:nvSpPr>
-          <p:cNvPr id="28" name="Shape 23"/>
-          <p:cNvSpPr/>
-          <p:nvPr/>
-        </p:nvSpPr>
-        <p:spPr>
-          <a:xfrm>
-            <a:off x="6172200" y="5029200"/>
-            <a:ext cx="5440680" cy="1143000"/>
-          </a:xfrm>
-          <a:prstGeom prst="roundRect">
-            <a:avLst>
-              <a:gd name="adj" fmla="val 9600"/>
-            </a:avLst>
-          </a:prstGeom>
-          <a:solidFill>
-            <a:srgbClr val="F6F7F8"/>
-          </a:solidFill>
-          <a:ln w="12700">
-            <a:solidFill>
-              <a:srgbClr val="F6F7F8"/>
-            </a:solidFill>
-            <a:prstDash val="solid"/>
-          </a:ln>
-        </p:spPr>
-      </p:sp>
-      <p:sp>
-        <p:nvSpPr>
-          <p:cNvPr id="29" name="Text 24"/>
-          <p:cNvSpPr txBox="1"/>
-          <p:nvPr/>
-        </p:nvSpPr>
-        <p:spPr>
-          <a:xfrm>
-            <a:off x="6355080" y="5138928"/>
-            <a:ext cx="5120640" cy="1005840"/>
-          </a:xfrm>
-          <a:prstGeom prst="rect">
-            <a:avLst/>
-          </a:prstGeom>
-          <a:noFill/>
-          <a:ln/>
-        </p:spPr>
-        <p:txBody>
-          <a:bodyPr wrap="square" lIns="0" tIns="0" rIns="0" bIns="0" rtlCol="0" anchor="t"/>
-          <a:lstStyle/>
-          <a:p>
-            <a:pPr marL="177800" indent="-177800">
-              <a:spcAft>
-                <a:spcPts val="300"/>
-              </a:spcAft>
-              <a:buSzPct val="100000"/>
-              <a:buChar char="•"/>
-            </a:pPr>
-            <a:r>
-              <a:rPr lang="en-US" sz="1250" dirty="0">
+              <a:t>Then it asks you</a:t>
+            </a:r>
+            <a:endParaRPr lang="en-US" sz="1050" dirty="0"/>
+          </a:p>
+        </p:txBody>
+      </p:sp>
+      <p:pic>
+        <p:nvPicPr>
+          <p:cNvPr id="11" name="Image 2" descr="preencoded.png">    </p:cNvPr>
+          <p:cNvPicPr>
+            <a:picLocks noChangeAspect="1"/>
+          </p:cNvPicPr>
+          <p:nvPr/>
+        </p:nvPicPr>
+        <p:blipFill>
+          <a:blip r:embed="rId3"/>
+          <a:stretch>
+            <a:fillRect/>
+          </a:stretch>
+        </p:blipFill>
+        <p:spPr>
+          <a:xfrm>
+            <a:off x="5669280" y="1783080"/>
+            <a:ext cx="292608" cy="292608"/>
+          </a:xfrm>
+          <a:prstGeom prst="rect">
+            <a:avLst/>
+          </a:prstGeom>
+        </p:spPr>
+      </p:pic>
+      <p:sp>
+        <p:nvSpPr>
+          <p:cNvPr id="12" name="Text 6"/>
+          <p:cNvSpPr txBox="1"/>
+          <p:nvPr/>
+        </p:nvSpPr>
+        <p:spPr>
+          <a:xfrm>
+            <a:off x="6126480" y="1737360"/>
+            <a:ext cx="5486400" cy="292608"/>
+          </a:xfrm>
+          <a:prstGeom prst="rect">
+            <a:avLst/>
+          </a:prstGeom>
+          <a:noFill/>
+          <a:ln/>
+        </p:spPr>
+        <p:txBody>
+          <a:bodyPr wrap="square" lIns="0" tIns="0" rIns="0" bIns="0" rtlCol="0" anchor="t"/>
+          <a:lstStyle/>
+          <a:p>
+            <a:pPr indent="0" marL="0">
+              <a:buNone/>
+            </a:pPr>
+            <a:r>
+              <a:rPr lang="en-US" sz="1500" b="1" dirty="0">
                 <a:solidFill>
                   <a:srgbClr val="0A0A0B"/>
                 </a:solidFill>
               </a:rPr>
-              <a:t>Any ball sport; batched, bf16, about 0.3 s a frame</a:t>
-            </a:r>
-            <a:endParaRPr lang="en-US" sz="1250" dirty="0"/>
-          </a:p>
-          <a:p>
-            <a:pPr marL="177800" indent="-177800">
-              <a:spcAft>
-                <a:spcPts val="300"/>
-              </a:spcAft>
-              <a:buSzPct val="100000"/>
-              <a:buChar char="•"/>
-            </a:pPr>
-            <a:r>
-              <a:rPr lang="en-US" sz="1250" dirty="0">
+              <a:t>Every message, word for word</a:t>
+            </a:r>
+            <a:endParaRPr lang="en-US" sz="1500" dirty="0"/>
+          </a:p>
+        </p:txBody>
+      </p:sp>
+      <p:sp>
+        <p:nvSpPr>
+          <p:cNvPr id="13" name="Text 7"/>
+          <p:cNvSpPr txBox="1"/>
+          <p:nvPr/>
+        </p:nvSpPr>
+        <p:spPr>
+          <a:xfrm>
+            <a:off x="6126480" y="2039112"/>
+            <a:ext cx="5486400" cy="548640"/>
+          </a:xfrm>
+          <a:prstGeom prst="rect">
+            <a:avLst/>
+          </a:prstGeom>
+          <a:noFill/>
+          <a:ln/>
+        </p:spPr>
+        <p:txBody>
+          <a:bodyPr wrap="square" lIns="0" tIns="0" rIns="0" bIns="0" rtlCol="0" anchor="t"/>
+          <a:lstStyle/>
+          <a:p>
+            <a:pPr indent="0" marL="0">
+              <a:buNone/>
+            </a:pPr>
+            <a:r>
+              <a:rPr lang="en-US" sz="1200" dirty="0">
+                <a:solidFill>
+                  <a:srgbClr val="55555C"/>
+                </a:solidFill>
+              </a:rPr>
+              <a:t>The messages the agents sent each other over A2A, round by round. Not a summary.</a:t>
+            </a:r>
+            <a:endParaRPr lang="en-US" sz="1200" dirty="0"/>
+          </a:p>
+        </p:txBody>
+      </p:sp>
+      <p:pic>
+        <p:nvPicPr>
+          <p:cNvPr id="14" name="Image 3" descr="preencoded.png">    </p:cNvPr>
+          <p:cNvPicPr>
+            <a:picLocks noChangeAspect="1"/>
+          </p:cNvPicPr>
+          <p:nvPr/>
+        </p:nvPicPr>
+        <p:blipFill>
+          <a:blip r:embed="rId4"/>
+          <a:stretch>
+            <a:fillRect/>
+          </a:stretch>
+        </p:blipFill>
+        <p:spPr>
+          <a:xfrm>
+            <a:off x="5669280" y="2670048"/>
+            <a:ext cx="292608" cy="292608"/>
+          </a:xfrm>
+          <a:prstGeom prst="rect">
+            <a:avLst/>
+          </a:prstGeom>
+        </p:spPr>
+      </p:pic>
+      <p:sp>
+        <p:nvSpPr>
+          <p:cNvPr id="15" name="Text 8"/>
+          <p:cNvSpPr txBox="1"/>
+          <p:nvPr/>
+        </p:nvSpPr>
+        <p:spPr>
+          <a:xfrm>
+            <a:off x="6126480" y="2624328"/>
+            <a:ext cx="5486400" cy="292608"/>
+          </a:xfrm>
+          <a:prstGeom prst="rect">
+            <a:avLst/>
+          </a:prstGeom>
+          <a:noFill/>
+          <a:ln/>
+        </p:spPr>
+        <p:txBody>
+          <a:bodyPr wrap="square" lIns="0" tIns="0" rIns="0" bIns="0" rtlCol="0" anchor="t"/>
+          <a:lstStyle/>
+          <a:p>
+            <a:pPr indent="0" marL="0">
+              <a:buNone/>
+            </a:pPr>
+            <a:r>
+              <a:rPr lang="en-US" sz="1500" b="1" dirty="0">
                 <a:solidFill>
                   <a:srgbClr val="0A0A0B"/>
                 </a:solidFill>
               </a:rPr>
-              <a:t>The orbit is an optional camera effect in the app</a:t>
-            </a:r>
-            <a:endParaRPr lang="en-US" sz="1250" dirty="0"/>
-          </a:p>
-          <a:p>
-            <a:pPr marL="177800" indent="-177800">
-              <a:spcAft>
-                <a:spcPts val="300"/>
-              </a:spcAft>
-              <a:buSzPct val="100000"/>
-              <a:buChar char="•"/>
-            </a:pPr>
-            <a:r>
-              <a:rPr lang="en-US" sz="1250" dirty="0">
+              <a:t>What each one meant</a:t>
+            </a:r>
+            <a:endParaRPr lang="en-US" sz="1500" dirty="0"/>
+          </a:p>
+        </p:txBody>
+      </p:sp>
+      <p:sp>
+        <p:nvSpPr>
+          <p:cNvPr id="16" name="Text 9"/>
+          <p:cNvSpPr txBox="1"/>
+          <p:nvPr/>
+        </p:nvSpPr>
+        <p:spPr>
+          <a:xfrm>
+            <a:off x="6126480" y="2926080"/>
+            <a:ext cx="5486400" cy="548640"/>
+          </a:xfrm>
+          <a:prstGeom prst="rect">
+            <a:avLst/>
+          </a:prstGeom>
+          <a:noFill/>
+          <a:ln/>
+        </p:spPr>
+        <p:txBody>
+          <a:bodyPr wrap="square" lIns="0" tIns="0" rIns="0" bIns="0" rtlCol="0" anchor="t"/>
+          <a:lstStyle/>
+          <a:p>
+            <a:pPr indent="0" marL="0">
+              <a:buNone/>
+            </a:pPr>
+            <a:r>
+              <a:rPr lang="en-US" sz="1200" dirty="0">
+                <a:solidFill>
+                  <a:srgbClr val="55555C"/>
+                </a:solidFill>
+              </a:rPr>
+              <a:t>Proposes, agrees, a counter-offer or declines, under every bubble.</a:t>
+            </a:r>
+            <a:endParaRPr lang="en-US" sz="1200" dirty="0"/>
+          </a:p>
+        </p:txBody>
+      </p:sp>
+      <p:pic>
+        <p:nvPicPr>
+          <p:cNvPr id="17" name="Image 4" descr="preencoded.png">    </p:cNvPr>
+          <p:cNvPicPr>
+            <a:picLocks noChangeAspect="1"/>
+          </p:cNvPicPr>
+          <p:nvPr/>
+        </p:nvPicPr>
+        <p:blipFill>
+          <a:blip r:embed="rId5"/>
+          <a:stretch>
+            <a:fillRect/>
+          </a:stretch>
+        </p:blipFill>
+        <p:spPr>
+          <a:xfrm>
+            <a:off x="5669280" y="3557016"/>
+            <a:ext cx="292608" cy="292608"/>
+          </a:xfrm>
+          <a:prstGeom prst="rect">
+            <a:avLst/>
+          </a:prstGeom>
+        </p:spPr>
+      </p:pic>
+      <p:sp>
+        <p:nvSpPr>
+          <p:cNvPr id="18" name="Text 10"/>
+          <p:cNvSpPr txBox="1"/>
+          <p:nvPr/>
+        </p:nvSpPr>
+        <p:spPr>
+          <a:xfrm>
+            <a:off x="6126480" y="3511296"/>
+            <a:ext cx="5486400" cy="292608"/>
+          </a:xfrm>
+          <a:prstGeom prst="rect">
+            <a:avLst/>
+          </a:prstGeom>
+          <a:noFill/>
+          <a:ln/>
+        </p:spPr>
+        <p:txBody>
+          <a:bodyPr wrap="square" lIns="0" tIns="0" rIns="0" bIns="0" rtlCol="0" anchor="t"/>
+          <a:lstStyle/>
+          <a:p>
+            <a:pPr indent="0" marL="0">
+              <a:buNone/>
+            </a:pPr>
+            <a:r>
+              <a:rPr lang="en-US" sz="1500" b="1" dirty="0">
                 <a:solidFill>
                   <a:srgbClr val="0A0A0B"/>
                 </a:solidFill>
               </a:rPr>
-              <a:t>Your video is read on the server and nowhere else</a:t>
-            </a:r>
-            <a:endParaRPr lang="en-US" sz="1250" dirty="0"/>
+              <a:t>Checked by code</a:t>
+            </a:r>
+            <a:endParaRPr lang="en-US" sz="1500" dirty="0"/>
+          </a:p>
+        </p:txBody>
+      </p:sp>
+      <p:sp>
+        <p:nvSpPr>
+          <p:cNvPr id="19" name="Text 11"/>
+          <p:cNvSpPr txBox="1"/>
+          <p:nvPr/>
+        </p:nvSpPr>
+        <p:spPr>
+          <a:xfrm>
+            <a:off x="6126480" y="3813048"/>
+            <a:ext cx="5486400" cy="548640"/>
+          </a:xfrm>
+          <a:prstGeom prst="rect">
+            <a:avLst/>
+          </a:prstGeom>
+          <a:noFill/>
+          <a:ln/>
+        </p:spPr>
+        <p:txBody>
+          <a:bodyPr wrap="square" lIns="0" tIns="0" rIns="0" bIns="0" rtlCol="0" anchor="t"/>
+          <a:lstStyle/>
+          <a:p>
+            <a:pPr indent="0" marL="0">
+              <a:buNone/>
+            </a:pPr>
+            <a:r>
+              <a:rPr lang="en-US" sz="1200" dirty="0">
+                <a:solidFill>
+                  <a:srgbClr val="55555C"/>
+                </a:solidFill>
+              </a:rPr>
+              <a:t>"Fits everyone" means code checked it against every calendar before your agent moved on.</a:t>
+            </a:r>
+            <a:endParaRPr lang="en-US" sz="1200" dirty="0"/>
+          </a:p>
+        </p:txBody>
+      </p:sp>
+      <p:pic>
+        <p:nvPicPr>
+          <p:cNvPr id="20" name="Image 5" descr="preencoded.png">    </p:cNvPr>
+          <p:cNvPicPr>
+            <a:picLocks noChangeAspect="1"/>
+          </p:cNvPicPr>
+          <p:nvPr/>
+        </p:nvPicPr>
+        <p:blipFill>
+          <a:blip r:embed="rId6"/>
+          <a:stretch>
+            <a:fillRect/>
+          </a:stretch>
+        </p:blipFill>
+        <p:spPr>
+          <a:xfrm>
+            <a:off x="5669280" y="4443984"/>
+            <a:ext cx="292608" cy="292608"/>
+          </a:xfrm>
+          <a:prstGeom prst="rect">
+            <a:avLst/>
+          </a:prstGeom>
+        </p:spPr>
+      </p:pic>
+      <p:sp>
+        <p:nvSpPr>
+          <p:cNvPr id="21" name="Text 12"/>
+          <p:cNvSpPr txBox="1"/>
+          <p:nvPr/>
+        </p:nvSpPr>
+        <p:spPr>
+          <a:xfrm>
+            <a:off x="6126480" y="4398264"/>
+            <a:ext cx="5486400" cy="292608"/>
+          </a:xfrm>
+          <a:prstGeom prst="rect">
+            <a:avLst/>
+          </a:prstGeom>
+          <a:noFill/>
+          <a:ln/>
+        </p:spPr>
+        <p:txBody>
+          <a:bodyPr wrap="square" lIns="0" tIns="0" rIns="0" bIns="0" rtlCol="0" anchor="t"/>
+          <a:lstStyle/>
+          <a:p>
+            <a:pPr indent="0" marL="0">
+              <a:buNone/>
+            </a:pPr>
+            <a:r>
+              <a:rPr lang="en-US" sz="1500" b="1" dirty="0">
+                <a:solidFill>
+                  <a:srgbClr val="0A0A0B"/>
+                </a:solidFill>
+              </a:rPr>
+              <a:t>Whose agent, verified</a:t>
+            </a:r>
+            <a:endParaRPr lang="en-US" sz="1500" dirty="0"/>
+          </a:p>
+        </p:txBody>
+      </p:sp>
+      <p:sp>
+        <p:nvSpPr>
+          <p:cNvPr id="22" name="Text 13"/>
+          <p:cNvSpPr txBox="1"/>
+          <p:nvPr/>
+        </p:nvSpPr>
+        <p:spPr>
+          <a:xfrm>
+            <a:off x="6126480" y="4700016"/>
+            <a:ext cx="5486400" cy="548640"/>
+          </a:xfrm>
+          <a:prstGeom prst="rect">
+            <a:avLst/>
+          </a:prstGeom>
+          <a:noFill/>
+          <a:ln/>
+        </p:spPr>
+        <p:txBody>
+          <a:bodyPr wrap="square" lIns="0" tIns="0" rIns="0" bIns="0" rtlCol="0" anchor="t"/>
+          <a:lstStyle/>
+          <a:p>
+            <a:pPr indent="0" marL="0">
+              <a:buNone/>
+            </a:pPr>
+            <a:r>
+              <a:rPr lang="en-US" sz="1200" dirty="0">
+                <a:solidFill>
+                  <a:srgbClr val="55555C"/>
+                </a:solidFill>
+              </a:rPr>
+              <a:t>Each member's Agent Card is signed and checked before your agent talks to it.</a:t>
+            </a:r>
+            <a:endParaRPr lang="en-US" sz="1200" dirty="0"/>
+          </a:p>
+        </p:txBody>
+      </p:sp>
+      <p:pic>
+        <p:nvPicPr>
+          <p:cNvPr id="23" name="Image 6" descr="preencoded.png">    </p:cNvPr>
+          <p:cNvPicPr>
+            <a:picLocks noChangeAspect="1"/>
+          </p:cNvPicPr>
+          <p:nvPr/>
+        </p:nvPicPr>
+        <p:blipFill>
+          <a:blip r:embed="rId7"/>
+          <a:stretch>
+            <a:fillRect/>
+          </a:stretch>
+        </p:blipFill>
+        <p:spPr>
+          <a:xfrm>
+            <a:off x="5669280" y="5330952"/>
+            <a:ext cx="292608" cy="292608"/>
+          </a:xfrm>
+          <a:prstGeom prst="rect">
+            <a:avLst/>
+          </a:prstGeom>
+        </p:spPr>
+      </p:pic>
+      <p:sp>
+        <p:nvSpPr>
+          <p:cNvPr id="24" name="Text 14"/>
+          <p:cNvSpPr txBox="1"/>
+          <p:nvPr/>
+        </p:nvSpPr>
+        <p:spPr>
+          <a:xfrm>
+            <a:off x="6126480" y="5285232"/>
+            <a:ext cx="5486400" cy="292608"/>
+          </a:xfrm>
+          <a:prstGeom prst="rect">
+            <a:avLst/>
+          </a:prstGeom>
+          <a:noFill/>
+          <a:ln/>
+        </p:spPr>
+        <p:txBody>
+          <a:bodyPr wrap="square" lIns="0" tIns="0" rIns="0" bIns="0" rtlCol="0" anchor="t"/>
+          <a:lstStyle/>
+          <a:p>
+            <a:pPr indent="0" marL="0">
+              <a:buNone/>
+            </a:pPr>
+            <a:r>
+              <a:rPr lang="en-US" sz="1500" b="1" dirty="0">
+                <a:solidFill>
+                  <a:srgbClr val="0A0A0B"/>
+                </a:solidFill>
+              </a:rPr>
+              <a:t>You decide</a:t>
+            </a:r>
+            <a:endParaRPr lang="en-US" sz="1500" dirty="0"/>
+          </a:p>
+        </p:txBody>
+      </p:sp>
+      <p:sp>
+        <p:nvSpPr>
+          <p:cNvPr id="25" name="Text 15"/>
+          <p:cNvSpPr txBox="1"/>
+          <p:nvPr/>
+        </p:nvSpPr>
+        <p:spPr>
+          <a:xfrm>
+            <a:off x="6126480" y="5586984"/>
+            <a:ext cx="5486400" cy="548640"/>
+          </a:xfrm>
+          <a:prstGeom prst="rect">
+            <a:avLst/>
+          </a:prstGeom>
+          <a:noFill/>
+          <a:ln/>
+        </p:spPr>
+        <p:txBody>
+          <a:bodyPr wrap="square" lIns="0" tIns="0" rIns="0" bIns="0" rtlCol="0" anchor="t"/>
+          <a:lstStyle/>
+          <a:p>
+            <a:pPr indent="0" marL="0">
+              <a:buNone/>
+            </a:pPr>
+            <a:r>
+              <a:rPr lang="en-US" sz="1200" dirty="0">
+                <a:solidFill>
+                  <a:srgbClr val="55555C"/>
+                </a:solidFill>
+              </a:rPr>
+              <a:t>Agreed by every agent, then it waits for your yes.</a:t>
+            </a:r>
+            <a:endParaRPr lang="en-US" sz="1200" dirty="0"/>
           </a:p>
         </p:txBody>
       </p:sp>
@@ -5507,7 +5438,7 @@
                   <a:srgbClr val="0A7F44"/>
                 </a:solidFill>
               </a:rPr>
-              <a:t>TECHNICAL DEPTH · 20%</a:t>
+              <a:t>HIGHLIGHTS · FOUR META VISION MODELS</a:t>
             </a:r>
             <a:endParaRPr lang="en-US" sz="1300" dirty="0"/>
           </a:p>
@@ -5545,7 +5476,7 @@
                   <a:srgbClr val="0A0A0B"/>
                 </a:solidFill>
               </a:rPr>
-              <a:t>What running Muse Glimmer taught me</a:t>
+              <a:t>Your phone clip becomes your moment, on my GPU</a:t>
             </a:r>
             <a:endParaRPr lang="en-US" sz="3200" dirty="0"/>
           </a:p>
@@ -5560,19 +5491,19 @@
         <p:spPr>
           <a:xfrm>
             <a:off x="548640" y="1691640"/>
-            <a:ext cx="4023360" cy="896112"/>
+            <a:ext cx="2011680" cy="1143000"/>
           </a:xfrm>
           <a:prstGeom prst="roundRect">
             <a:avLst>
-              <a:gd name="adj" fmla="val 12245"/>
+              <a:gd name="adj" fmla="val 9600"/>
             </a:avLst>
           </a:prstGeom>
           <a:solidFill>
-            <a:srgbClr val="FFFFFF"/>
+            <a:srgbClr val="E8F1FD"/>
           </a:solidFill>
           <a:ln w="12700">
             <a:solidFill>
-              <a:srgbClr val="DCDCE0"/>
+              <a:srgbClr val="E8F1FD"/>
             </a:solidFill>
             <a:prstDash val="solid"/>
           </a:ln>
@@ -5586,67 +5517,67 @@
         </p:nvSpPr>
         <p:spPr>
           <a:xfrm>
-            <a:off x="731520" y="1691640"/>
-            <a:ext cx="1737360" cy="896112"/>
-          </a:xfrm>
-          <a:prstGeom prst="rect">
-            <a:avLst/>
-          </a:prstGeom>
-          <a:noFill/>
-          <a:ln/>
-        </p:spPr>
-        <p:txBody>
-          <a:bodyPr wrap="square" lIns="0" tIns="0" rIns="0" bIns="0" rtlCol="0" anchor="ctr"/>
-          <a:lstStyle/>
-          <a:p>
-            <a:pPr indent="0" marL="0">
-              <a:buNone/>
-            </a:pPr>
-            <a:r>
-              <a:rPr lang="en-US" sz="3400" b="1" dirty="0">
+            <a:off x="713232" y="1810512"/>
+            <a:ext cx="1737360" cy="320040"/>
+          </a:xfrm>
+          <a:prstGeom prst="rect">
+            <a:avLst/>
+          </a:prstGeom>
+          <a:noFill/>
+          <a:ln/>
+        </p:spPr>
+        <p:txBody>
+          <a:bodyPr wrap="square" lIns="0" tIns="0" rIns="0" bIns="0" rtlCol="0" anchor="t"/>
+          <a:lstStyle/>
+          <a:p>
+            <a:pPr indent="0" marL="0">
+              <a:buNone/>
+            </a:pPr>
+            <a:r>
+              <a:rPr lang="en-US" sz="1500" b="1" dirty="0">
+                <a:solidFill>
+                  <a:srgbClr val="0064E0"/>
+                </a:solidFill>
+              </a:rPr>
+              <a:t>DETR</a:t>
+            </a:r>
+            <a:endParaRPr lang="en-US" sz="1500" dirty="0"/>
+          </a:p>
+        </p:txBody>
+      </p:sp>
+      <p:sp>
+        <p:nvSpPr>
+          <p:cNvPr id="7" name="Text 4"/>
+          <p:cNvSpPr txBox="1"/>
+          <p:nvPr/>
+        </p:nvSpPr>
+        <p:spPr>
+          <a:xfrm>
+            <a:off x="713232" y="2148840"/>
+            <a:ext cx="1737360" cy="640080"/>
+          </a:xfrm>
+          <a:prstGeom prst="rect">
+            <a:avLst/>
+          </a:prstGeom>
+          <a:noFill/>
+          <a:ln/>
+        </p:spPr>
+        <p:txBody>
+          <a:bodyPr wrap="square" lIns="0" tIns="0" rIns="0" bIns="0" rtlCol="0" anchor="t"/>
+          <a:lstStyle/>
+          <a:p>
+            <a:pPr indent="0" marL="0">
+              <a:buNone/>
+            </a:pPr>
+            <a:r>
+              <a:rPr lang="en-US" sz="1150" dirty="0">
                 <a:solidFill>
                   <a:srgbClr val="0A0A0B"/>
                 </a:solidFill>
               </a:rPr>
-              <a:t>2,755</a:t>
-            </a:r>
-            <a:endParaRPr lang="en-US" sz="3400" dirty="0"/>
-          </a:p>
-        </p:txBody>
-      </p:sp>
-      <p:sp>
-        <p:nvSpPr>
-          <p:cNvPr id="7" name="Text 4"/>
-          <p:cNvSpPr txBox="1"/>
-          <p:nvPr/>
-        </p:nvSpPr>
-        <p:spPr>
-          <a:xfrm>
-            <a:off x="2468880" y="1691640"/>
-            <a:ext cx="2011680" cy="896112"/>
-          </a:xfrm>
-          <a:prstGeom prst="rect">
-            <a:avLst/>
-          </a:prstGeom>
-          <a:noFill/>
-          <a:ln/>
-        </p:spPr>
-        <p:txBody>
-          <a:bodyPr wrap="square" lIns="0" tIns="0" rIns="0" bIns="0" rtlCol="0" anchor="ctr"/>
-          <a:lstStyle/>
-          <a:p>
-            <a:pPr indent="0" marL="0">
-              <a:buNone/>
-            </a:pPr>
-            <a:r>
-              <a:rPr lang="en-US" sz="1200" dirty="0">
-                <a:solidFill>
-                  <a:srgbClr val="0A0A0B"/>
-                </a:solidFill>
-              </a:rPr>
-              <a:t>calls logged in the evaluations' ledgers</a:t>
-            </a:r>
-            <a:endParaRPr lang="en-US" sz="1200" dirty="0"/>
+              <a:t>finds the players</a:t>
+            </a:r>
+            <a:endParaRPr lang="en-US" sz="1150" dirty="0"/>
           </a:p>
         </p:txBody>
       </p:sp>
@@ -5658,20 +5589,44 @@
         </p:nvSpPr>
         <p:spPr>
           <a:xfrm>
-            <a:off x="548640" y="2697480"/>
-            <a:ext cx="4023360" cy="896112"/>
+            <a:off x="2578608" y="2258568"/>
+            <a:ext cx="192024" cy="0"/>
+          </a:xfrm>
+          <a:prstGeom prst="line">
+            <a:avLst/>
+          </a:prstGeom>
+          <a:noFill/>
+          <a:ln w="22225">
+            <a:solidFill>
+              <a:srgbClr val="8A8A92"/>
+            </a:solidFill>
+            <a:prstDash val="solid"/>
+            <a:tailEnd type="triangle"/>
+          </a:ln>
+        </p:spPr>
+      </p:sp>
+      <p:sp>
+        <p:nvSpPr>
+          <p:cNvPr id="9" name="Shape 6"/>
+          <p:cNvSpPr/>
+          <p:nvPr/>
+        </p:nvSpPr>
+        <p:spPr>
+          <a:xfrm>
+            <a:off x="2788920" y="1691640"/>
+            <a:ext cx="2011680" cy="1143000"/>
           </a:xfrm>
           <a:prstGeom prst="roundRect">
             <a:avLst>
-              <a:gd name="adj" fmla="val 12245"/>
+              <a:gd name="adj" fmla="val 9600"/>
             </a:avLst>
           </a:prstGeom>
           <a:solidFill>
-            <a:srgbClr val="FFFFFF"/>
+            <a:srgbClr val="E8F1FD"/>
           </a:solidFill>
           <a:ln w="12700">
             <a:solidFill>
-              <a:srgbClr val="DCDCE0"/>
+              <a:srgbClr val="E8F1FD"/>
             </a:solidFill>
             <a:prstDash val="solid"/>
           </a:ln>
@@ -5679,98 +5634,122 @@
       </p:sp>
       <p:sp>
         <p:nvSpPr>
-          <p:cNvPr id="9" name="Text 6"/>
-          <p:cNvSpPr txBox="1"/>
-          <p:nvPr/>
-        </p:nvSpPr>
-        <p:spPr>
-          <a:xfrm>
-            <a:off x="731520" y="2697480"/>
-            <a:ext cx="1737360" cy="896112"/>
-          </a:xfrm>
-          <a:prstGeom prst="rect">
-            <a:avLst/>
-          </a:prstGeom>
-          <a:noFill/>
-          <a:ln/>
-        </p:spPr>
-        <p:txBody>
-          <a:bodyPr wrap="square" lIns="0" tIns="0" rIns="0" bIns="0" rtlCol="0" anchor="ctr"/>
-          <a:lstStyle/>
-          <a:p>
-            <a:pPr indent="0" marL="0">
-              <a:buNone/>
-            </a:pPr>
-            <a:r>
-              <a:rPr lang="en-US" sz="3400" b="1" dirty="0">
-                <a:solidFill>
-                  <a:srgbClr val="0A7F44"/>
-                </a:solidFill>
-              </a:rPr>
-              <a:t>84%</a:t>
-            </a:r>
-            <a:endParaRPr lang="en-US" sz="3400" dirty="0"/>
-          </a:p>
-        </p:txBody>
-      </p:sp>
-      <p:sp>
-        <p:nvSpPr>
           <p:cNvPr id="10" name="Text 7"/>
           <p:cNvSpPr txBox="1"/>
           <p:nvPr/>
         </p:nvSpPr>
         <p:spPr>
           <a:xfrm>
-            <a:off x="2468880" y="2697480"/>
-            <a:ext cx="2011680" cy="896112"/>
-          </a:xfrm>
-          <a:prstGeom prst="rect">
-            <a:avLst/>
-          </a:prstGeom>
-          <a:noFill/>
-          <a:ln/>
-        </p:spPr>
-        <p:txBody>
-          <a:bodyPr wrap="square" lIns="0" tIns="0" rIns="0" bIns="0" rtlCol="0" anchor="ctr"/>
-          <a:lstStyle/>
-          <a:p>
-            <a:pPr indent="0" marL="0">
-              <a:buNone/>
-            </a:pPr>
-            <a:r>
-              <a:rPr lang="en-US" sz="1200" dirty="0">
+            <a:off x="2953512" y="1810512"/>
+            <a:ext cx="1737360" cy="320040"/>
+          </a:xfrm>
+          <a:prstGeom prst="rect">
+            <a:avLst/>
+          </a:prstGeom>
+          <a:noFill/>
+          <a:ln/>
+        </p:spPr>
+        <p:txBody>
+          <a:bodyPr wrap="square" lIns="0" tIns="0" rIns="0" bIns="0" rtlCol="0" anchor="t"/>
+          <a:lstStyle/>
+          <a:p>
+            <a:pPr indent="0" marL="0">
+              <a:buNone/>
+            </a:pPr>
+            <a:r>
+              <a:rPr lang="en-US" sz="1500" b="1" dirty="0">
+                <a:solidFill>
+                  <a:srgbClr val="0064E0"/>
+                </a:solidFill>
+              </a:rPr>
+              <a:t>Sapiens2</a:t>
+            </a:r>
+            <a:endParaRPr lang="en-US" sz="1500" dirty="0"/>
+          </a:p>
+        </p:txBody>
+      </p:sp>
+      <p:sp>
+        <p:nvSpPr>
+          <p:cNvPr id="11" name="Text 8"/>
+          <p:cNvSpPr txBox="1"/>
+          <p:nvPr/>
+        </p:nvSpPr>
+        <p:spPr>
+          <a:xfrm>
+            <a:off x="2953512" y="2148840"/>
+            <a:ext cx="1737360" cy="640080"/>
+          </a:xfrm>
+          <a:prstGeom prst="rect">
+            <a:avLst/>
+          </a:prstGeom>
+          <a:noFill/>
+          <a:ln/>
+        </p:spPr>
+        <p:txBody>
+          <a:bodyPr wrap="square" lIns="0" tIns="0" rIns="0" bIns="0" rtlCol="0" anchor="t"/>
+          <a:lstStyle/>
+          <a:p>
+            <a:pPr indent="0" marL="0">
+              <a:buNone/>
+            </a:pPr>
+            <a:r>
+              <a:rPr lang="en-US" sz="1150" dirty="0">
                 <a:solidFill>
                   <a:srgbClr val="0A0A0B"/>
                 </a:solidFill>
               </a:rPr>
-              <a:t>of the tokens it wrote were reasoning</a:t>
-            </a:r>
-            <a:endParaRPr lang="en-US" sz="1200" dirty="0"/>
-          </a:p>
-        </p:txBody>
-      </p:sp>
-      <p:sp>
-        <p:nvSpPr>
-          <p:cNvPr id="11" name="Shape 8"/>
+              <a:t>reads the pose, finds the fastest swing</a:t>
+            </a:r>
+            <a:endParaRPr lang="en-US" sz="1150" dirty="0"/>
+          </a:p>
+        </p:txBody>
+      </p:sp>
+      <p:sp>
+        <p:nvSpPr>
+          <p:cNvPr id="12" name="Shape 9"/>
           <p:cNvSpPr/>
           <p:nvPr/>
         </p:nvSpPr>
         <p:spPr>
           <a:xfrm>
-            <a:off x="548640" y="3703320"/>
-            <a:ext cx="4023360" cy="896112"/>
+            <a:off x="4818888" y="2258568"/>
+            <a:ext cx="192024" cy="0"/>
+          </a:xfrm>
+          <a:prstGeom prst="line">
+            <a:avLst/>
+          </a:prstGeom>
+          <a:noFill/>
+          <a:ln w="22225">
+            <a:solidFill>
+              <a:srgbClr val="8A8A92"/>
+            </a:solidFill>
+            <a:prstDash val="solid"/>
+            <a:tailEnd type="triangle"/>
+          </a:ln>
+        </p:spPr>
+      </p:sp>
+      <p:sp>
+        <p:nvSpPr>
+          <p:cNvPr id="13" name="Shape 10"/>
+          <p:cNvSpPr/>
+          <p:nvPr/>
+        </p:nvSpPr>
+        <p:spPr>
+          <a:xfrm>
+            <a:off x="5029200" y="1691640"/>
+            <a:ext cx="2011680" cy="1143000"/>
           </a:xfrm>
           <a:prstGeom prst="roundRect">
             <a:avLst>
-              <a:gd name="adj" fmla="val 12245"/>
+              <a:gd name="adj" fmla="val 9600"/>
             </a:avLst>
           </a:prstGeom>
           <a:solidFill>
-            <a:srgbClr val="FFFFFF"/>
+            <a:srgbClr val="E8F1FD"/>
           </a:solidFill>
           <a:ln w="12700">
             <a:solidFill>
-              <a:srgbClr val="DCDCE0"/>
+              <a:srgbClr val="E8F1FD"/>
             </a:solidFill>
             <a:prstDash val="solid"/>
           </a:ln>
@@ -5778,90 +5757,456 @@
       </p:sp>
       <p:sp>
         <p:nvSpPr>
-          <p:cNvPr id="12" name="Text 9"/>
-          <p:cNvSpPr txBox="1"/>
-          <p:nvPr/>
-        </p:nvSpPr>
-        <p:spPr>
-          <a:xfrm>
-            <a:off x="731520" y="3703320"/>
-            <a:ext cx="1737360" cy="896112"/>
-          </a:xfrm>
-          <a:prstGeom prst="rect">
-            <a:avLst/>
-          </a:prstGeom>
-          <a:noFill/>
-          <a:ln/>
-        </p:spPr>
-        <p:txBody>
-          <a:bodyPr wrap="square" lIns="0" tIns="0" rIns="0" bIns="0" rtlCol="0" anchor="ctr"/>
-          <a:lstStyle/>
-          <a:p>
-            <a:pPr indent="0" marL="0">
-              <a:buNone/>
-            </a:pPr>
-            <a:r>
-              <a:rPr lang="en-US" sz="3400" b="1" dirty="0">
-                <a:solidFill>
-                  <a:srgbClr val="D1352B"/>
-                </a:solidFill>
-              </a:rPr>
-              <a:t>9%</a:t>
-            </a:r>
-            <a:endParaRPr lang="en-US" sz="3400" dirty="0"/>
-          </a:p>
-        </p:txBody>
-      </p:sp>
-      <p:sp>
-        <p:nvSpPr>
-          <p:cNvPr id="13" name="Text 10"/>
-          <p:cNvSpPr txBox="1"/>
-          <p:nvPr/>
-        </p:nvSpPr>
-        <p:spPr>
-          <a:xfrm>
-            <a:off x="2468880" y="3703320"/>
-            <a:ext cx="2011680" cy="896112"/>
-          </a:xfrm>
-          <a:prstGeom prst="rect">
-            <a:avLst/>
-          </a:prstGeom>
-          <a:noFill/>
-          <a:ln/>
-        </p:spPr>
-        <p:txBody>
-          <a:bodyPr wrap="square" lIns="0" tIns="0" rIns="0" bIns="0" rtlCol="0" anchor="ctr"/>
-          <a:lstStyle/>
-          <a:p>
-            <a:pPr indent="0" marL="0">
-              <a:buNone/>
-            </a:pPr>
-            <a:r>
-              <a:rPr lang="en-US" sz="1200" dirty="0">
+          <p:cNvPr id="14" name="Text 11"/>
+          <p:cNvSpPr txBox="1"/>
+          <p:nvPr/>
+        </p:nvSpPr>
+        <p:spPr>
+          <a:xfrm>
+            <a:off x="5193792" y="1810512"/>
+            <a:ext cx="1737360" cy="320040"/>
+          </a:xfrm>
+          <a:prstGeom prst="rect">
+            <a:avLst/>
+          </a:prstGeom>
+          <a:noFill/>
+          <a:ln/>
+        </p:spPr>
+        <p:txBody>
+          <a:bodyPr wrap="square" lIns="0" tIns="0" rIns="0" bIns="0" rtlCol="0" anchor="t"/>
+          <a:lstStyle/>
+          <a:p>
+            <a:pPr indent="0" marL="0">
+              <a:buNone/>
+            </a:pPr>
+            <a:r>
+              <a:rPr lang="en-US" sz="1500" b="1" dirty="0">
+                <a:solidFill>
+                  <a:srgbClr val="0064E0"/>
+                </a:solidFill>
+              </a:rPr>
+              <a:t>SAM 2.1</a:t>
+            </a:r>
+            <a:endParaRPr lang="en-US" sz="1500" dirty="0"/>
+          </a:p>
+        </p:txBody>
+      </p:sp>
+      <p:sp>
+        <p:nvSpPr>
+          <p:cNvPr id="15" name="Text 12"/>
+          <p:cNvSpPr txBox="1"/>
+          <p:nvPr/>
+        </p:nvSpPr>
+        <p:spPr>
+          <a:xfrm>
+            <a:off x="5193792" y="2148840"/>
+            <a:ext cx="1737360" cy="640080"/>
+          </a:xfrm>
+          <a:prstGeom prst="rect">
+            <a:avLst/>
+          </a:prstGeom>
+          <a:noFill/>
+          <a:ln/>
+        </p:spPr>
+        <p:txBody>
+          <a:bodyPr wrap="square" lIns="0" tIns="0" rIns="0" bIns="0" rtlCol="0" anchor="t"/>
+          <a:lstStyle/>
+          <a:p>
+            <a:pPr indent="0" marL="0">
+              <a:buNone/>
+            </a:pPr>
+            <a:r>
+              <a:rPr lang="en-US" sz="1150" dirty="0">
                 <a:solidFill>
                   <a:srgbClr val="0A0A0B"/>
                 </a:solidFill>
               </a:rPr>
-              <a:t>came back empty: a small budget ran out mid-thought</a:t>
-            </a:r>
-            <a:endParaRPr lang="en-US" sz="1200" dirty="0"/>
-          </a:p>
-        </p:txBody>
-      </p:sp>
-      <p:sp>
-        <p:nvSpPr>
-          <p:cNvPr id="14" name="Shape 11"/>
+              <a:t>cuts you out</a:t>
+            </a:r>
+            <a:endParaRPr lang="en-US" sz="1150" dirty="0"/>
+          </a:p>
+        </p:txBody>
+      </p:sp>
+      <p:sp>
+        <p:nvSpPr>
+          <p:cNvPr id="16" name="Shape 13"/>
           <p:cNvSpPr/>
           <p:nvPr/>
         </p:nvSpPr>
         <p:spPr>
           <a:xfrm>
-            <a:off x="548640" y="4754880"/>
-            <a:ext cx="4023360" cy="1463040"/>
+            <a:off x="7059168" y="2258568"/>
+            <a:ext cx="192024" cy="0"/>
+          </a:xfrm>
+          <a:prstGeom prst="line">
+            <a:avLst/>
+          </a:prstGeom>
+          <a:noFill/>
+          <a:ln w="22225">
+            <a:solidFill>
+              <a:srgbClr val="8A8A92"/>
+            </a:solidFill>
+            <a:prstDash val="solid"/>
+            <a:tailEnd type="triangle"/>
+          </a:ln>
+        </p:spPr>
+      </p:sp>
+      <p:sp>
+        <p:nvSpPr>
+          <p:cNvPr id="17" name="Shape 14"/>
+          <p:cNvSpPr/>
+          <p:nvPr/>
+        </p:nvSpPr>
+        <p:spPr>
+          <a:xfrm>
+            <a:off x="7269480" y="1691640"/>
+            <a:ext cx="2011680" cy="1143000"/>
           </a:xfrm>
           <a:prstGeom prst="roundRect">
             <a:avLst>
-              <a:gd name="adj" fmla="val 7500"/>
+              <a:gd name="adj" fmla="val 9600"/>
+            </a:avLst>
+          </a:prstGeom>
+          <a:solidFill>
+            <a:srgbClr val="E8F1FD"/>
+          </a:solidFill>
+          <a:ln w="12700">
+            <a:solidFill>
+              <a:srgbClr val="E8F1FD"/>
+            </a:solidFill>
+            <a:prstDash val="solid"/>
+          </a:ln>
+        </p:spPr>
+      </p:sp>
+      <p:sp>
+        <p:nvSpPr>
+          <p:cNvPr id="18" name="Text 15"/>
+          <p:cNvSpPr txBox="1"/>
+          <p:nvPr/>
+        </p:nvSpPr>
+        <p:spPr>
+          <a:xfrm>
+            <a:off x="7434072" y="1810512"/>
+            <a:ext cx="1737360" cy="320040"/>
+          </a:xfrm>
+          <a:prstGeom prst="rect">
+            <a:avLst/>
+          </a:prstGeom>
+          <a:noFill/>
+          <a:ln/>
+        </p:spPr>
+        <p:txBody>
+          <a:bodyPr wrap="square" lIns="0" tIns="0" rIns="0" bIns="0" rtlCol="0" anchor="t"/>
+          <a:lstStyle/>
+          <a:p>
+            <a:pPr indent="0" marL="0">
+              <a:buNone/>
+            </a:pPr>
+            <a:r>
+              <a:rPr lang="en-US" sz="1500" b="1" dirty="0">
+                <a:solidFill>
+                  <a:srgbClr val="0064E0"/>
+                </a:solidFill>
+              </a:rPr>
+              <a:t>MapAnything</a:t>
+            </a:r>
+            <a:endParaRPr lang="en-US" sz="1500" dirty="0"/>
+          </a:p>
+        </p:txBody>
+      </p:sp>
+      <p:sp>
+        <p:nvSpPr>
+          <p:cNvPr id="19" name="Text 16"/>
+          <p:cNvSpPr txBox="1"/>
+          <p:nvPr/>
+        </p:nvSpPr>
+        <p:spPr>
+          <a:xfrm>
+            <a:off x="7434072" y="2148840"/>
+            <a:ext cx="1737360" cy="640080"/>
+          </a:xfrm>
+          <a:prstGeom prst="rect">
+            <a:avLst/>
+          </a:prstGeom>
+          <a:noFill/>
+          <a:ln/>
+        </p:spPr>
+        <p:txBody>
+          <a:bodyPr wrap="square" lIns="0" tIns="0" rIns="0" bIns="0" rtlCol="0" anchor="t"/>
+          <a:lstStyle/>
+          <a:p>
+            <a:pPr indent="0" marL="0">
+              <a:buNone/>
+            </a:pPr>
+            <a:r>
+              <a:rPr lang="en-US" sz="1150" dirty="0">
+                <a:solidFill>
+                  <a:srgbClr val="0A0A0B"/>
+                </a:solidFill>
+              </a:rPr>
+              <a:t>depth and camera: time stops, the camera turns 20°</a:t>
+            </a:r>
+            <a:endParaRPr lang="en-US" sz="1150" dirty="0"/>
+          </a:p>
+        </p:txBody>
+      </p:sp>
+      <p:sp>
+        <p:nvSpPr>
+          <p:cNvPr id="20" name="Shape 17"/>
+          <p:cNvSpPr/>
+          <p:nvPr/>
+        </p:nvSpPr>
+        <p:spPr>
+          <a:xfrm>
+            <a:off x="9299448" y="2258568"/>
+            <a:ext cx="192024" cy="0"/>
+          </a:xfrm>
+          <a:prstGeom prst="line">
+            <a:avLst/>
+          </a:prstGeom>
+          <a:noFill/>
+          <a:ln w="22225">
+            <a:solidFill>
+              <a:srgbClr val="8A8A92"/>
+            </a:solidFill>
+            <a:prstDash val="solid"/>
+            <a:tailEnd type="triangle"/>
+          </a:ln>
+        </p:spPr>
+      </p:sp>
+      <p:sp>
+        <p:nvSpPr>
+          <p:cNvPr id="21" name="Shape 18"/>
+          <p:cNvSpPr/>
+          <p:nvPr/>
+        </p:nvSpPr>
+        <p:spPr>
+          <a:xfrm>
+            <a:off x="9509760" y="1691640"/>
+            <a:ext cx="2011680" cy="1143000"/>
+          </a:xfrm>
+          <a:prstGeom prst="roundRect">
+            <a:avLst>
+              <a:gd name="adj" fmla="val 9600"/>
+            </a:avLst>
+          </a:prstGeom>
+          <a:solidFill>
+            <a:srgbClr val="E9F3EC"/>
+          </a:solidFill>
+          <a:ln w="12700">
+            <a:solidFill>
+              <a:srgbClr val="E9F3EC"/>
+            </a:solidFill>
+            <a:prstDash val="solid"/>
+          </a:ln>
+        </p:spPr>
+      </p:sp>
+      <p:sp>
+        <p:nvSpPr>
+          <p:cNvPr id="22" name="Text 19"/>
+          <p:cNvSpPr txBox="1"/>
+          <p:nvPr/>
+        </p:nvSpPr>
+        <p:spPr>
+          <a:xfrm>
+            <a:off x="9674352" y="1810512"/>
+            <a:ext cx="1737360" cy="320040"/>
+          </a:xfrm>
+          <a:prstGeom prst="rect">
+            <a:avLst/>
+          </a:prstGeom>
+          <a:noFill/>
+          <a:ln/>
+        </p:spPr>
+        <p:txBody>
+          <a:bodyPr wrap="square" lIns="0" tIns="0" rIns="0" bIns="0" rtlCol="0" anchor="t"/>
+          <a:lstStyle/>
+          <a:p>
+            <a:pPr indent="0" marL="0">
+              <a:buNone/>
+            </a:pPr>
+            <a:r>
+              <a:rPr lang="en-US" sz="1500" b="1" dirty="0">
+                <a:solidFill>
+                  <a:srgbClr val="0A7F44"/>
+                </a:solidFill>
+              </a:rPr>
+              <a:t>Muse Glimmer</a:t>
+            </a:r>
+            <a:endParaRPr lang="en-US" sz="1500" dirty="0"/>
+          </a:p>
+        </p:txBody>
+      </p:sp>
+      <p:sp>
+        <p:nvSpPr>
+          <p:cNvPr id="23" name="Text 20"/>
+          <p:cNvSpPr txBox="1"/>
+          <p:nvPr/>
+        </p:nvSpPr>
+        <p:spPr>
+          <a:xfrm>
+            <a:off x="9674352" y="2148840"/>
+            <a:ext cx="1737360" cy="640080"/>
+          </a:xfrm>
+          <a:prstGeom prst="rect">
+            <a:avLst/>
+          </a:prstGeom>
+          <a:noFill/>
+          <a:ln/>
+        </p:spPr>
+        <p:txBody>
+          <a:bodyPr wrap="square" lIns="0" tIns="0" rIns="0" bIns="0" rtlCol="0" anchor="t"/>
+          <a:lstStyle/>
+          <a:p>
+            <a:pPr indent="0" marL="0">
+              <a:buNone/>
+            </a:pPr>
+            <a:r>
+              <a:rPr lang="en-US" sz="1150" dirty="0">
+                <a:solidFill>
+                  <a:srgbClr val="0A0A0B"/>
+                </a:solidFill>
+              </a:rPr>
+              <a:t>writes the caption, checked by code</a:t>
+            </a:r>
+            <a:endParaRPr lang="en-US" sz="1150" dirty="0"/>
+          </a:p>
+        </p:txBody>
+      </p:sp>
+      <p:pic>
+        <p:nvPicPr>
+          <p:cNvPr id="24" name="Image 0" descr="preencoded.png">    </p:cNvPr>
+          <p:cNvPicPr>
+            <a:picLocks noChangeAspect="1"/>
+          </p:cNvPicPr>
+          <p:nvPr/>
+        </p:nvPicPr>
+        <p:blipFill>
+          <a:blip r:embed="rId1"/>
+          <a:stretch>
+            <a:fillRect/>
+          </a:stretch>
+        </p:blipFill>
+        <p:spPr>
+          <a:xfrm>
+            <a:off x="548640" y="3108960"/>
+            <a:ext cx="5394960" cy="3035808"/>
+          </a:xfrm>
+          <a:prstGeom prst="rect">
+            <a:avLst/>
+          </a:prstGeom>
+        </p:spPr>
+      </p:pic>
+      <p:sp>
+        <p:nvSpPr>
+          <p:cNvPr id="25" name="Text 21"/>
+          <p:cNvSpPr txBox="1"/>
+          <p:nvPr/>
+        </p:nvSpPr>
+        <p:spPr>
+          <a:xfrm>
+            <a:off x="548640" y="6181344"/>
+            <a:ext cx="5394960" cy="228600"/>
+          </a:xfrm>
+          <a:prstGeom prst="rect">
+            <a:avLst/>
+          </a:prstGeom>
+          <a:noFill/>
+          <a:ln/>
+        </p:spPr>
+        <p:txBody>
+          <a:bodyPr wrap="square" lIns="0" tIns="0" rIns="0" bIns="0" rtlCol="0" anchor="t"/>
+          <a:lstStyle/>
+          <a:p>
+            <a:pPr indent="0" marL="0">
+              <a:buNone/>
+            </a:pPr>
+            <a:r>
+              <a:rPr lang="en-US" sz="1000" dirty="0">
+                <a:solidFill>
+                  <a:srgbClr val="55555C"/>
+                </a:solidFill>
+              </a:rPr>
+              <a:t>A CC BY 3.0 clip from Wikimedia Commons, as filmed</a:t>
+            </a:r>
+            <a:endParaRPr lang="en-US" sz="1000" dirty="0"/>
+          </a:p>
+        </p:txBody>
+      </p:sp>
+      <p:pic>
+        <p:nvPicPr>
+          <p:cNvPr id="26" name="Image 1" descr="preencoded.png">    </p:cNvPr>
+          <p:cNvPicPr>
+            <a:picLocks noChangeAspect="1"/>
+          </p:cNvPicPr>
+          <p:nvPr/>
+        </p:nvPicPr>
+        <p:blipFill>
+          <a:blip r:embed="rId2"/>
+          <a:stretch>
+            <a:fillRect/>
+          </a:stretch>
+        </p:blipFill>
+        <p:spPr>
+          <a:xfrm>
+            <a:off x="6172200" y="3108960"/>
+            <a:ext cx="5440680" cy="1527048"/>
+          </a:xfrm>
+          <a:prstGeom prst="rect">
+            <a:avLst/>
+          </a:prstGeom>
+        </p:spPr>
+      </p:pic>
+      <p:sp>
+        <p:nvSpPr>
+          <p:cNvPr id="27" name="Text 22"/>
+          <p:cNvSpPr txBox="1"/>
+          <p:nvPr/>
+        </p:nvSpPr>
+        <p:spPr>
+          <a:xfrm>
+            <a:off x="6172200" y="4663440"/>
+            <a:ext cx="5440680" cy="228600"/>
+          </a:xfrm>
+          <a:prstGeom prst="rect">
+            <a:avLst/>
+          </a:prstGeom>
+          <a:noFill/>
+          <a:ln/>
+        </p:spPr>
+        <p:txBody>
+          <a:bodyPr wrap="square" lIns="0" tIns="0" rIns="0" bIns="0" rtlCol="0" anchor="t"/>
+          <a:lstStyle/>
+          <a:p>
+            <a:pPr indent="0" marL="0">
+              <a:buNone/>
+            </a:pPr>
+            <a:r>
+              <a:rPr lang="en-US" sz="1000" dirty="0">
+                <a:solidFill>
+                  <a:srgbClr val="55555C"/>
+                </a:solidFill>
+              </a:rPr>
+              <a:t>SAM 2.1 cut-out and MapAnything depth</a:t>
+            </a:r>
+            <a:endParaRPr lang="en-US" sz="1000" dirty="0"/>
+          </a:p>
+        </p:txBody>
+      </p:sp>
+      <p:sp>
+        <p:nvSpPr>
+          <p:cNvPr id="28" name="Shape 23"/>
+          <p:cNvSpPr/>
+          <p:nvPr/>
+        </p:nvSpPr>
+        <p:spPr>
+          <a:xfrm>
+            <a:off x="6172200" y="5029200"/>
+            <a:ext cx="5440680" cy="1143000"/>
+          </a:xfrm>
+          <a:prstGeom prst="roundRect">
+            <a:avLst>
+              <a:gd name="adj" fmla="val 9600"/>
             </a:avLst>
           </a:prstGeom>
           <a:solidFill>
@@ -5877,645 +6222,77 @@
       </p:sp>
       <p:sp>
         <p:nvSpPr>
-          <p:cNvPr id="15" name="Text 12"/>
-          <p:cNvSpPr txBox="1"/>
-          <p:nvPr/>
-        </p:nvSpPr>
-        <p:spPr>
-          <a:xfrm>
-            <a:off x="731520" y="4892040"/>
-            <a:ext cx="3703320" cy="1234440"/>
-          </a:xfrm>
-          <a:prstGeom prst="rect">
-            <a:avLst/>
-          </a:prstGeom>
-          <a:noFill/>
-          <a:ln/>
-        </p:spPr>
-        <p:txBody>
-          <a:bodyPr wrap="square" lIns="0" tIns="0" rIns="0" bIns="0" rtlCol="0" anchor="t"/>
-          <a:lstStyle/>
-          <a:p>
-            <a:pPr indent="0" marL="0">
-              <a:buNone/>
-            </a:pPr>
-            <a:r>
-              <a:rPr lang="en-US" sz="1300" dirty="0">
+          <p:cNvPr id="29" name="Text 24"/>
+          <p:cNvSpPr txBox="1"/>
+          <p:nvPr/>
+        </p:nvSpPr>
+        <p:spPr>
+          <a:xfrm>
+            <a:off x="6355080" y="5138928"/>
+            <a:ext cx="5120640" cy="1005840"/>
+          </a:xfrm>
+          <a:prstGeom prst="rect">
+            <a:avLst/>
+          </a:prstGeom>
+          <a:noFill/>
+          <a:ln/>
+        </p:spPr>
+        <p:txBody>
+          <a:bodyPr wrap="square" lIns="0" tIns="0" rIns="0" bIns="0" rtlCol="0" anchor="t"/>
+          <a:lstStyle/>
+          <a:p>
+            <a:pPr marL="177800" indent="-177800">
+              <a:spcAft>
+                <a:spcPts val="300"/>
+              </a:spcAft>
+              <a:buSzPct val="100000"/>
+              <a:buChar char="•"/>
+            </a:pPr>
+            <a:r>
+              <a:rPr lang="en-US" sz="1250" dirty="0">
                 <a:solidFill>
                   <a:srgbClr val="0A0A0B"/>
                 </a:solidFill>
               </a:rPr>
-              <a:t>Thinking switched off? It still reasoned in a hidden channel. </a:t>
-            </a:r>
-            <a:pPr indent="0" marL="0">
-              <a:buNone/>
-            </a:pPr>
-            <a:r>
-              <a:rPr lang="en-US" sz="1300" b="1" dirty="0">
+              <a:t>Any ball sport; batched, bf16, about 0.3 s a frame</a:t>
+            </a:r>
+            <a:endParaRPr lang="en-US" sz="1250" dirty="0"/>
+          </a:p>
+          <a:p>
+            <a:pPr marL="177800" indent="-177800">
+              <a:spcAft>
+                <a:spcPts val="300"/>
+              </a:spcAft>
+              <a:buSzPct val="100000"/>
+              <a:buChar char="•"/>
+            </a:pPr>
+            <a:r>
+              <a:rPr lang="en-US" sz="1250" dirty="0">
                 <a:solidFill>
                   <a:srgbClr val="0A0A0B"/>
                 </a:solidFill>
               </a:rPr>
-              <a:t>So every call asks for think: "low" and leaves room to think.</a:t>
-            </a:r>
-            <a:endParaRPr lang="en-US" sz="1300" dirty="0"/>
-          </a:p>
-        </p:txBody>
-      </p:sp>
-      <p:sp>
-        <p:nvSpPr>
-          <p:cNvPr id="16" name="Text 13"/>
-          <p:cNvSpPr txBox="1"/>
-          <p:nvPr/>
-        </p:nvSpPr>
-        <p:spPr>
-          <a:xfrm>
-            <a:off x="4937760" y="1691640"/>
-            <a:ext cx="3657600" cy="274320"/>
-          </a:xfrm>
-          <a:prstGeom prst="rect">
-            <a:avLst/>
-          </a:prstGeom>
-          <a:noFill/>
-          <a:ln/>
-        </p:spPr>
-        <p:txBody>
-          <a:bodyPr wrap="square" lIns="0" tIns="0" rIns="0" bIns="0" rtlCol="0" anchor="t"/>
-          <a:lstStyle/>
-          <a:p>
-            <a:pPr indent="0" marL="0">
-              <a:buNone/>
-            </a:pPr>
-            <a:r>
-              <a:rPr lang="en-US" sz="1100" b="1" spc="100" kern="0" dirty="0">
-                <a:solidFill>
-                  <a:srgbClr val="0A7F44"/>
-                </a:solidFill>
-              </a:rPr>
-              <a:t>WHO DECIDES</a:t>
-            </a:r>
-            <a:endParaRPr lang="en-US" sz="1100" dirty="0"/>
-          </a:p>
-        </p:txBody>
-      </p:sp>
-      <p:sp>
-        <p:nvSpPr>
-          <p:cNvPr id="17" name="Shape 14"/>
-          <p:cNvSpPr/>
-          <p:nvPr/>
-        </p:nvSpPr>
-        <p:spPr>
-          <a:xfrm>
-            <a:off x="4937760" y="2057400"/>
-            <a:ext cx="6675120" cy="1207008"/>
-          </a:xfrm>
-          <a:prstGeom prst="roundRect">
-            <a:avLst>
-              <a:gd name="adj" fmla="val 9091"/>
-            </a:avLst>
-          </a:prstGeom>
-          <a:solidFill>
-            <a:srgbClr val="FFFFFF"/>
-          </a:solidFill>
-          <a:ln w="12700">
-            <a:solidFill>
-              <a:srgbClr val="DCDCE0"/>
-            </a:solidFill>
-            <a:prstDash val="solid"/>
-          </a:ln>
-        </p:spPr>
-      </p:sp>
-      <p:sp>
-        <p:nvSpPr>
-          <p:cNvPr id="18" name="Text 15"/>
-          <p:cNvSpPr txBox="1"/>
-          <p:nvPr/>
-        </p:nvSpPr>
-        <p:spPr>
-          <a:xfrm>
-            <a:off x="5138928" y="2194560"/>
-            <a:ext cx="1828800" cy="228600"/>
-          </a:xfrm>
-          <a:prstGeom prst="rect">
-            <a:avLst/>
-          </a:prstGeom>
-          <a:noFill/>
-          <a:ln/>
-        </p:spPr>
-        <p:txBody>
-          <a:bodyPr wrap="square" lIns="0" tIns="0" rIns="0" bIns="0" rtlCol="0" anchor="t"/>
-          <a:lstStyle/>
-          <a:p>
-            <a:pPr indent="0" marL="0">
-              <a:buNone/>
-            </a:pPr>
-            <a:r>
-              <a:rPr lang="en-US" sz="1000" b="1" spc="100" kern="0" dirty="0">
-                <a:solidFill>
-                  <a:srgbClr val="55555C"/>
-                </a:solidFill>
-              </a:rPr>
-              <a:t>FIRST</a:t>
-            </a:r>
-            <a:endParaRPr lang="en-US" sz="1000" dirty="0"/>
-          </a:p>
-        </p:txBody>
-      </p:sp>
-      <p:sp>
-        <p:nvSpPr>
-          <p:cNvPr id="19" name="Text 16"/>
-          <p:cNvSpPr txBox="1"/>
-          <p:nvPr/>
-        </p:nvSpPr>
-        <p:spPr>
-          <a:xfrm>
-            <a:off x="5138928" y="2441448"/>
-            <a:ext cx="4206240" cy="347472"/>
-          </a:xfrm>
-          <a:prstGeom prst="rect">
-            <a:avLst/>
-          </a:prstGeom>
-          <a:noFill/>
-          <a:ln/>
-        </p:spPr>
-        <p:txBody>
-          <a:bodyPr wrap="square" lIns="0" tIns="0" rIns="0" bIns="0" rtlCol="0" anchor="t"/>
-          <a:lstStyle/>
-          <a:p>
-            <a:pPr indent="0" marL="0">
-              <a:buNone/>
-            </a:pPr>
-            <a:r>
-              <a:rPr lang="en-US" sz="1600" b="1" dirty="0">
+              <a:t>The orbit is an optional camera effect in the app</a:t>
+            </a:r>
+            <a:endParaRPr lang="en-US" sz="1250" dirty="0"/>
+          </a:p>
+          <a:p>
+            <a:pPr marL="177800" indent="-177800">
+              <a:spcAft>
+                <a:spcPts val="300"/>
+              </a:spcAft>
+              <a:buSzPct val="100000"/>
+              <a:buChar char="•"/>
+            </a:pPr>
+            <a:r>
+              <a:rPr lang="en-US" sz="1250" dirty="0">
                 <a:solidFill>
                   <a:srgbClr val="0A0A0B"/>
                 </a:solidFill>
               </a:rPr>
-              <a:t>Code</a:t>
-            </a:r>
-            <a:endParaRPr lang="en-US" sz="1600" dirty="0"/>
-          </a:p>
-        </p:txBody>
-      </p:sp>
-      <p:sp>
-        <p:nvSpPr>
-          <p:cNvPr id="20" name="Text 17"/>
-          <p:cNvSpPr txBox="1"/>
-          <p:nvPr/>
-        </p:nvSpPr>
-        <p:spPr>
-          <a:xfrm>
-            <a:off x="5138928" y="2788920"/>
-            <a:ext cx="4480560" cy="457200"/>
-          </a:xfrm>
-          <a:prstGeom prst="rect">
-            <a:avLst/>
-          </a:prstGeom>
-          <a:noFill/>
-          <a:ln/>
-        </p:spPr>
-        <p:txBody>
-          <a:bodyPr wrap="square" lIns="0" tIns="0" rIns="0" bIns="0" rtlCol="0" anchor="t"/>
-          <a:lstStyle/>
-          <a:p>
-            <a:pPr indent="0" marL="0">
-              <a:buNone/>
-            </a:pPr>
-            <a:r>
-              <a:rPr lang="en-US" sz="1150" dirty="0">
-                <a:solidFill>
-                  <a:srgbClr val="55555C"/>
-                </a:solidFill>
-              </a:rPr>
-              <a:t>Every fact and every hard rule: free times, trips, limits. No model call when the facts decide.</a:t>
-            </a:r>
-            <a:endParaRPr lang="en-US" sz="1150" dirty="0"/>
-          </a:p>
-        </p:txBody>
-      </p:sp>
-      <p:sp>
-        <p:nvSpPr>
-          <p:cNvPr id="21" name="Shape 18"/>
-          <p:cNvSpPr/>
-          <p:nvPr/>
-        </p:nvSpPr>
-        <p:spPr>
-          <a:xfrm>
-            <a:off x="8275320" y="3273552"/>
-            <a:ext cx="0" cy="146304"/>
-          </a:xfrm>
-          <a:prstGeom prst="line">
-            <a:avLst/>
-          </a:prstGeom>
-          <a:noFill/>
-          <a:ln w="22225">
-            <a:solidFill>
-              <a:srgbClr val="8A8A92"/>
-            </a:solidFill>
-            <a:prstDash val="solid"/>
-            <a:tailEnd type="triangle"/>
-          </a:ln>
-        </p:spPr>
-      </p:sp>
-      <p:sp>
-        <p:nvSpPr>
-          <p:cNvPr id="22" name="Shape 19"/>
-          <p:cNvSpPr/>
-          <p:nvPr/>
-        </p:nvSpPr>
-        <p:spPr>
-          <a:xfrm>
-            <a:off x="4937760" y="3429000"/>
-            <a:ext cx="6675120" cy="1207008"/>
-          </a:xfrm>
-          <a:prstGeom prst="roundRect">
-            <a:avLst>
-              <a:gd name="adj" fmla="val 9091"/>
-            </a:avLst>
-          </a:prstGeom>
-          <a:solidFill>
-            <a:srgbClr val="E9F3EC"/>
-          </a:solidFill>
-          <a:ln w="25400">
-            <a:solidFill>
-              <a:srgbClr val="0A7F44"/>
-            </a:solidFill>
-            <a:prstDash val="solid"/>
-          </a:ln>
-        </p:spPr>
-      </p:sp>
-      <p:sp>
-        <p:nvSpPr>
-          <p:cNvPr id="23" name="Text 20"/>
-          <p:cNvSpPr txBox="1"/>
-          <p:nvPr/>
-        </p:nvSpPr>
-        <p:spPr>
-          <a:xfrm>
-            <a:off x="5138928" y="3566160"/>
-            <a:ext cx="1828800" cy="228600"/>
-          </a:xfrm>
-          <a:prstGeom prst="rect">
-            <a:avLst/>
-          </a:prstGeom>
-          <a:noFill/>
-          <a:ln/>
-        </p:spPr>
-        <p:txBody>
-          <a:bodyPr wrap="square" lIns="0" tIns="0" rIns="0" bIns="0" rtlCol="0" anchor="t"/>
-          <a:lstStyle/>
-          <a:p>
-            <a:pPr indent="0" marL="0">
-              <a:buNone/>
-            </a:pPr>
-            <a:r>
-              <a:rPr lang="en-US" sz="1000" b="1" spc="100" kern="0" dirty="0">
-                <a:solidFill>
-                  <a:srgbClr val="55555C"/>
-                </a:solidFill>
-              </a:rPr>
-              <a:t>THEN</a:t>
-            </a:r>
-            <a:endParaRPr lang="en-US" sz="1000" dirty="0"/>
-          </a:p>
-        </p:txBody>
-      </p:sp>
-      <p:sp>
-        <p:nvSpPr>
-          <p:cNvPr id="24" name="Text 21"/>
-          <p:cNvSpPr txBox="1"/>
-          <p:nvPr/>
-        </p:nvSpPr>
-        <p:spPr>
-          <a:xfrm>
-            <a:off x="5138928" y="3813048"/>
-            <a:ext cx="4206240" cy="347472"/>
-          </a:xfrm>
-          <a:prstGeom prst="rect">
-            <a:avLst/>
-          </a:prstGeom>
-          <a:noFill/>
-          <a:ln/>
-        </p:spPr>
-        <p:txBody>
-          <a:bodyPr wrap="square" lIns="0" tIns="0" rIns="0" bIns="0" rtlCol="0" anchor="t"/>
-          <a:lstStyle/>
-          <a:p>
-            <a:pPr indent="0" marL="0">
-              <a:buNone/>
-            </a:pPr>
-            <a:r>
-              <a:rPr lang="en-US" sz="1600" b="1" dirty="0">
-                <a:solidFill>
-                  <a:srgbClr val="0A0A0B"/>
-                </a:solidFill>
-              </a:rPr>
-              <a:t>Llama 3.2 1B, distilled from Glimmer</a:t>
-            </a:r>
-            <a:endParaRPr lang="en-US" sz="1600" dirty="0"/>
-          </a:p>
-        </p:txBody>
-      </p:sp>
-      <p:sp>
-        <p:nvSpPr>
-          <p:cNvPr id="25" name="Text 22"/>
-          <p:cNvSpPr txBox="1"/>
-          <p:nvPr/>
-        </p:nvSpPr>
-        <p:spPr>
-          <a:xfrm>
-            <a:off x="5138928" y="4160520"/>
-            <a:ext cx="4480560" cy="457200"/>
-          </a:xfrm>
-          <a:prstGeom prst="rect">
-            <a:avLst/>
-          </a:prstGeom>
-          <a:noFill/>
-          <a:ln/>
-        </p:spPr>
-        <p:txBody>
-          <a:bodyPr wrap="square" lIns="0" tIns="0" rIns="0" bIns="0" rtlCol="0" anchor="t"/>
-          <a:lstStyle/>
-          <a:p>
-            <a:pPr indent="0" marL="0">
-              <a:buNone/>
-            </a:pPr>
-            <a:r>
-              <a:rPr lang="en-US" sz="1150" dirty="0">
-                <a:solidFill>
-                  <a:srgbClr val="55555C"/>
-                </a:solidFill>
-              </a:rPr>
-              <a:t>On the CPU. Answers only when sure, and only from times that keep every rule.</a:t>
-            </a:r>
-            <a:endParaRPr lang="en-US" sz="1150" dirty="0"/>
-          </a:p>
-        </p:txBody>
-      </p:sp>
-      <p:sp>
-        <p:nvSpPr>
-          <p:cNvPr id="26" name="Text 23"/>
-          <p:cNvSpPr txBox="1"/>
-          <p:nvPr/>
-        </p:nvSpPr>
-        <p:spPr>
-          <a:xfrm>
-            <a:off x="9555480" y="3611880"/>
-            <a:ext cx="1920240" cy="502920"/>
-          </a:xfrm>
-          <a:prstGeom prst="rect">
-            <a:avLst/>
-          </a:prstGeom>
-          <a:noFill/>
-          <a:ln/>
-        </p:spPr>
-        <p:txBody>
-          <a:bodyPr wrap="square" lIns="0" tIns="0" rIns="0" bIns="0" rtlCol="0" anchor="t"/>
-          <a:lstStyle/>
-          <a:p>
-            <a:pPr algn="r" indent="0" marL="0">
-              <a:buNone/>
-            </a:pPr>
-            <a:r>
-              <a:rPr lang="en-US" sz="2800" b="1" dirty="0">
-                <a:solidFill>
-                  <a:srgbClr val="0A7F44"/>
-                </a:solidFill>
-              </a:rPr>
-              <a:t>54–67%</a:t>
-            </a:r>
-            <a:endParaRPr lang="en-US" sz="2800" dirty="0"/>
-          </a:p>
-        </p:txBody>
-      </p:sp>
-      <p:sp>
-        <p:nvSpPr>
-          <p:cNvPr id="27" name="Text 24"/>
-          <p:cNvSpPr txBox="1"/>
-          <p:nvPr/>
-        </p:nvSpPr>
-        <p:spPr>
-          <a:xfrm>
-            <a:off x="9418320" y="4114800"/>
-            <a:ext cx="2057400" cy="457200"/>
-          </a:xfrm>
-          <a:prstGeom prst="rect">
-            <a:avLst/>
-          </a:prstGeom>
-          <a:noFill/>
-          <a:ln/>
-        </p:spPr>
-        <p:txBody>
-          <a:bodyPr wrap="square" lIns="0" tIns="0" rIns="0" bIns="0" rtlCol="0" anchor="t"/>
-          <a:lstStyle/>
-          <a:p>
-            <a:pPr algn="r" indent="0" marL="0">
-              <a:buNone/>
-            </a:pPr>
-            <a:r>
-              <a:rPr lang="en-US" sz="1000" dirty="0">
-                <a:solidFill>
-                  <a:srgbClr val="55555C"/>
-                </a:solidFill>
-              </a:rPr>
-              <a:t>of members' answers, no rule broken (simulated club)</a:t>
-            </a:r>
-            <a:endParaRPr lang="en-US" sz="1000" dirty="0"/>
-          </a:p>
-        </p:txBody>
-      </p:sp>
-      <p:sp>
-        <p:nvSpPr>
-          <p:cNvPr id="28" name="Shape 25"/>
-          <p:cNvSpPr/>
-          <p:nvPr/>
-        </p:nvSpPr>
-        <p:spPr>
-          <a:xfrm>
-            <a:off x="8275320" y="4645152"/>
-            <a:ext cx="0" cy="146304"/>
-          </a:xfrm>
-          <a:prstGeom prst="line">
-            <a:avLst/>
-          </a:prstGeom>
-          <a:noFill/>
-          <a:ln w="22225">
-            <a:solidFill>
-              <a:srgbClr val="8A8A92"/>
-            </a:solidFill>
-            <a:prstDash val="solid"/>
-            <a:tailEnd type="triangle"/>
-          </a:ln>
-        </p:spPr>
-      </p:sp>
-      <p:sp>
-        <p:nvSpPr>
-          <p:cNvPr id="29" name="Shape 26"/>
-          <p:cNvSpPr/>
-          <p:nvPr/>
-        </p:nvSpPr>
-        <p:spPr>
-          <a:xfrm>
-            <a:off x="4937760" y="4800600"/>
-            <a:ext cx="6675120" cy="1207008"/>
-          </a:xfrm>
-          <a:prstGeom prst="roundRect">
-            <a:avLst>
-              <a:gd name="adj" fmla="val 9091"/>
-            </a:avLst>
-          </a:prstGeom>
-          <a:solidFill>
-            <a:srgbClr val="FFFFFF"/>
-          </a:solidFill>
-          <a:ln w="12700">
-            <a:solidFill>
-              <a:srgbClr val="DCDCE0"/>
-            </a:solidFill>
-            <a:prstDash val="solid"/>
-          </a:ln>
-        </p:spPr>
-      </p:sp>
-      <p:sp>
-        <p:nvSpPr>
-          <p:cNvPr id="30" name="Text 27"/>
-          <p:cNvSpPr txBox="1"/>
-          <p:nvPr/>
-        </p:nvSpPr>
-        <p:spPr>
-          <a:xfrm>
-            <a:off x="5138928" y="4937760"/>
-            <a:ext cx="1828800" cy="228600"/>
-          </a:xfrm>
-          <a:prstGeom prst="rect">
-            <a:avLst/>
-          </a:prstGeom>
-          <a:noFill/>
-          <a:ln/>
-        </p:spPr>
-        <p:txBody>
-          <a:bodyPr wrap="square" lIns="0" tIns="0" rIns="0" bIns="0" rtlCol="0" anchor="t"/>
-          <a:lstStyle/>
-          <a:p>
-            <a:pPr indent="0" marL="0">
-              <a:buNone/>
-            </a:pPr>
-            <a:r>
-              <a:rPr lang="en-US" sz="1000" b="1" spc="100" kern="0" dirty="0">
-                <a:solidFill>
-                  <a:srgbClr val="55555C"/>
-                </a:solidFill>
-              </a:rPr>
-              <a:t>ONLY IF NEEDED</a:t>
-            </a:r>
-            <a:endParaRPr lang="en-US" sz="1000" dirty="0"/>
-          </a:p>
-        </p:txBody>
-      </p:sp>
-      <p:sp>
-        <p:nvSpPr>
-          <p:cNvPr id="31" name="Text 28"/>
-          <p:cNvSpPr txBox="1"/>
-          <p:nvPr/>
-        </p:nvSpPr>
-        <p:spPr>
-          <a:xfrm>
-            <a:off x="5138928" y="5184648"/>
-            <a:ext cx="4206240" cy="347472"/>
-          </a:xfrm>
-          <a:prstGeom prst="rect">
-            <a:avLst/>
-          </a:prstGeom>
-          <a:noFill/>
-          <a:ln/>
-        </p:spPr>
-        <p:txBody>
-          <a:bodyPr wrap="square" lIns="0" tIns="0" rIns="0" bIns="0" rtlCol="0" anchor="t"/>
-          <a:lstStyle/>
-          <a:p>
-            <a:pPr indent="0" marL="0">
-              <a:buNone/>
-            </a:pPr>
-            <a:r>
-              <a:rPr lang="en-US" sz="1600" b="1" dirty="0">
-                <a:solidFill>
-                  <a:srgbClr val="0A0A0B"/>
-                </a:solidFill>
-              </a:rPr>
-              <a:t>Muse Glimmer</a:t>
-            </a:r>
-            <a:endParaRPr lang="en-US" sz="1600" dirty="0"/>
-          </a:p>
-        </p:txBody>
-      </p:sp>
-      <p:sp>
-        <p:nvSpPr>
-          <p:cNvPr id="32" name="Text 29"/>
-          <p:cNvSpPr txBox="1"/>
-          <p:nvPr/>
-        </p:nvSpPr>
-        <p:spPr>
-          <a:xfrm>
-            <a:off x="5138928" y="5532120"/>
-            <a:ext cx="4480560" cy="457200"/>
-          </a:xfrm>
-          <a:prstGeom prst="rect">
-            <a:avLst/>
-          </a:prstGeom>
-          <a:noFill/>
-          <a:ln/>
-        </p:spPr>
-        <p:txBody>
-          <a:bodyPr wrap="square" lIns="0" tIns="0" rIns="0" bIns="0" rtlCol="0" anchor="t"/>
-          <a:lstStyle/>
-          <a:p>
-            <a:pPr indent="0" marL="0">
-              <a:buNone/>
-            </a:pPr>
-            <a:r>
-              <a:rPr lang="en-US" sz="1150" dirty="0">
-                <a:solidFill>
-                  <a:srgbClr val="55555C"/>
-                </a:solidFill>
-              </a:rPr>
-              <a:t>The real choices: planning the week, judging courts, reading photos, writing.</a:t>
-            </a:r>
-            <a:endParaRPr lang="en-US" sz="1150" dirty="0"/>
-          </a:p>
-        </p:txBody>
-      </p:sp>
-      <p:sp>
-        <p:nvSpPr>
-          <p:cNvPr id="33" name="Text 30"/>
-          <p:cNvSpPr txBox="1"/>
-          <p:nvPr/>
-        </p:nvSpPr>
-        <p:spPr>
-          <a:xfrm>
-            <a:off x="4937760" y="6126480"/>
-            <a:ext cx="6675120" cy="228600"/>
-          </a:xfrm>
-          <a:prstGeom prst="rect">
-            <a:avLst/>
-          </a:prstGeom>
-          <a:noFill/>
-          <a:ln/>
-        </p:spPr>
-        <p:txBody>
-          <a:bodyPr wrap="square" lIns="0" tIns="0" rIns="0" bIns="0" rtlCol="0" anchor="t"/>
-          <a:lstStyle/>
-          <a:p>
-            <a:pPr indent="0" marL="0">
-              <a:buNone/>
-            </a:pPr>
-            <a:r>
-              <a:rPr lang="en-US" sz="1000" dirty="0">
-                <a:solidFill>
-                  <a:srgbClr val="8A8A92"/>
-                </a:solidFill>
-              </a:rPr>
-              <a:t>submission/results/glimmer_in_practice.json · technical report 3.12, 5.10</a:t>
-            </a:r>
-            <a:endParaRPr lang="en-US" sz="1000" dirty="0"/>
+              <a:t>Your video is read on the server and nowhere else</a:t>
+            </a:r>
+            <a:endParaRPr lang="en-US" sz="1250" dirty="0"/>
           </a:p>
         </p:txBody>
       </p:sp>
@@ -6621,7 +6398,7 @@
                   <a:srgbClr val="0A7F44"/>
                 </a:solidFill>
               </a:rPr>
-              <a:t>MEASURED</a:t>
+              <a:t>TECHNICAL DEPTH · 20%</a:t>
             </a:r>
             <a:endParaRPr lang="en-US" sz="1300" dirty="0"/>
           </a:p>
@@ -6659,129 +6436,977 @@
                   <a:srgbClr val="0A0A0B"/>
                 </a:solidFill>
               </a:rPr>
-              <a:t>Two charts behind two design choices</a:t>
+              <a:t>What running Muse Glimmer taught me</a:t>
             </a:r>
             <a:endParaRPr lang="en-US" sz="3200" dirty="0"/>
           </a:p>
         </p:txBody>
       </p:sp>
-      <p:pic>
-        <p:nvPicPr>
-          <p:cNvPr id="5" name="Image 0" descr="preencoded.png">    </p:cNvPr>
-          <p:cNvPicPr>
-            <a:picLocks noChangeAspect="1"/>
-          </p:cNvPicPr>
-          <p:nvPr/>
-        </p:nvPicPr>
-        <p:blipFill>
-          <a:blip r:embed="rId1"/>
-          <a:stretch>
-            <a:fillRect/>
-          </a:stretch>
-        </p:blipFill>
+      <p:sp>
+        <p:nvSpPr>
+          <p:cNvPr id="5" name="Shape 2"/>
+          <p:cNvSpPr/>
+          <p:nvPr/>
+        </p:nvSpPr>
         <p:spPr>
           <a:xfrm>
             <a:off x="548640" y="1691640"/>
-            <a:ext cx="5440680" cy="2863516"/>
-          </a:xfrm>
-          <a:prstGeom prst="rect">
-            <a:avLst/>
-          </a:prstGeom>
-        </p:spPr>
-      </p:pic>
-      <p:sp>
-        <p:nvSpPr>
-          <p:cNvPr id="6" name="Text 2"/>
-          <p:cNvSpPr txBox="1"/>
-          <p:nvPr/>
-        </p:nvSpPr>
-        <p:spPr>
-          <a:xfrm>
-            <a:off x="548640" y="4646596"/>
-            <a:ext cx="5440680" cy="548640"/>
-          </a:xfrm>
-          <a:prstGeom prst="rect">
-            <a:avLst/>
-          </a:prstGeom>
-          <a:noFill/>
-          <a:ln/>
-        </p:spPr>
-        <p:txBody>
-          <a:bodyPr wrap="square" lIns="0" tIns="0" rIns="0" bIns="0" rtlCol="0" anchor="t"/>
-          <a:lstStyle/>
-          <a:p>
-            <a:pPr indent="0" marL="0">
-              <a:buNone/>
-            </a:pPr>
-            <a:r>
-              <a:rPr lang="en-US" sz="1100" dirty="0">
+            <a:ext cx="4023360" cy="896112"/>
+          </a:xfrm>
+          <a:prstGeom prst="roundRect">
+            <a:avLst>
+              <a:gd name="adj" fmla="val 12245"/>
+            </a:avLst>
+          </a:prstGeom>
+          <a:solidFill>
+            <a:srgbClr val="FFFFFF"/>
+          </a:solidFill>
+          <a:ln w="12700">
+            <a:solidFill>
+              <a:srgbClr val="DCDCE0"/>
+            </a:solidFill>
+            <a:prstDash val="solid"/>
+          </a:ln>
+        </p:spPr>
+      </p:sp>
+      <p:sp>
+        <p:nvSpPr>
+          <p:cNvPr id="6" name="Text 3"/>
+          <p:cNvSpPr txBox="1"/>
+          <p:nvPr/>
+        </p:nvSpPr>
+        <p:spPr>
+          <a:xfrm>
+            <a:off x="731520" y="1691640"/>
+            <a:ext cx="1737360" cy="896112"/>
+          </a:xfrm>
+          <a:prstGeom prst="rect">
+            <a:avLst/>
+          </a:prstGeom>
+          <a:noFill/>
+          <a:ln/>
+        </p:spPr>
+        <p:txBody>
+          <a:bodyPr wrap="square" lIns="0" tIns="0" rIns="0" bIns="0" rtlCol="0" anchor="ctr"/>
+          <a:lstStyle/>
+          <a:p>
+            <a:pPr indent="0" marL="0">
+              <a:buNone/>
+            </a:pPr>
+            <a:r>
+              <a:rPr lang="en-US" sz="3400" b="1" dirty="0">
+                <a:solidFill>
+                  <a:srgbClr val="0A0A0B"/>
+                </a:solidFill>
+              </a:rPr>
+              <a:t>2,755</a:t>
+            </a:r>
+            <a:endParaRPr lang="en-US" sz="3400" dirty="0"/>
+          </a:p>
+        </p:txBody>
+      </p:sp>
+      <p:sp>
+        <p:nvSpPr>
+          <p:cNvPr id="7" name="Text 4"/>
+          <p:cNvSpPr txBox="1"/>
+          <p:nvPr/>
+        </p:nvSpPr>
+        <p:spPr>
+          <a:xfrm>
+            <a:off x="2468880" y="1691640"/>
+            <a:ext cx="2011680" cy="896112"/>
+          </a:xfrm>
+          <a:prstGeom prst="rect">
+            <a:avLst/>
+          </a:prstGeom>
+          <a:noFill/>
+          <a:ln/>
+        </p:spPr>
+        <p:txBody>
+          <a:bodyPr wrap="square" lIns="0" tIns="0" rIns="0" bIns="0" rtlCol="0" anchor="ctr"/>
+          <a:lstStyle/>
+          <a:p>
+            <a:pPr indent="0" marL="0">
+              <a:buNone/>
+            </a:pPr>
+            <a:r>
+              <a:rPr lang="en-US" sz="1200" dirty="0">
+                <a:solidFill>
+                  <a:srgbClr val="0A0A0B"/>
+                </a:solidFill>
+              </a:rPr>
+              <a:t>calls logged in the evaluations' ledgers</a:t>
+            </a:r>
+            <a:endParaRPr lang="en-US" sz="1200" dirty="0"/>
+          </a:p>
+        </p:txBody>
+      </p:sp>
+      <p:sp>
+        <p:nvSpPr>
+          <p:cNvPr id="8" name="Shape 5"/>
+          <p:cNvSpPr/>
+          <p:nvPr/>
+        </p:nvSpPr>
+        <p:spPr>
+          <a:xfrm>
+            <a:off x="548640" y="2697480"/>
+            <a:ext cx="4023360" cy="896112"/>
+          </a:xfrm>
+          <a:prstGeom prst="roundRect">
+            <a:avLst>
+              <a:gd name="adj" fmla="val 12245"/>
+            </a:avLst>
+          </a:prstGeom>
+          <a:solidFill>
+            <a:srgbClr val="FFFFFF"/>
+          </a:solidFill>
+          <a:ln w="12700">
+            <a:solidFill>
+              <a:srgbClr val="DCDCE0"/>
+            </a:solidFill>
+            <a:prstDash val="solid"/>
+          </a:ln>
+        </p:spPr>
+      </p:sp>
+      <p:sp>
+        <p:nvSpPr>
+          <p:cNvPr id="9" name="Text 6"/>
+          <p:cNvSpPr txBox="1"/>
+          <p:nvPr/>
+        </p:nvSpPr>
+        <p:spPr>
+          <a:xfrm>
+            <a:off x="731520" y="2697480"/>
+            <a:ext cx="1737360" cy="896112"/>
+          </a:xfrm>
+          <a:prstGeom prst="rect">
+            <a:avLst/>
+          </a:prstGeom>
+          <a:noFill/>
+          <a:ln/>
+        </p:spPr>
+        <p:txBody>
+          <a:bodyPr wrap="square" lIns="0" tIns="0" rIns="0" bIns="0" rtlCol="0" anchor="ctr"/>
+          <a:lstStyle/>
+          <a:p>
+            <a:pPr indent="0" marL="0">
+              <a:buNone/>
+            </a:pPr>
+            <a:r>
+              <a:rPr lang="en-US" sz="3400" b="1" dirty="0">
+                <a:solidFill>
+                  <a:srgbClr val="0A7F44"/>
+                </a:solidFill>
+              </a:rPr>
+              <a:t>84%</a:t>
+            </a:r>
+            <a:endParaRPr lang="en-US" sz="3400" dirty="0"/>
+          </a:p>
+        </p:txBody>
+      </p:sp>
+      <p:sp>
+        <p:nvSpPr>
+          <p:cNvPr id="10" name="Text 7"/>
+          <p:cNvSpPr txBox="1"/>
+          <p:nvPr/>
+        </p:nvSpPr>
+        <p:spPr>
+          <a:xfrm>
+            <a:off x="2468880" y="2697480"/>
+            <a:ext cx="2011680" cy="896112"/>
+          </a:xfrm>
+          <a:prstGeom prst="rect">
+            <a:avLst/>
+          </a:prstGeom>
+          <a:noFill/>
+          <a:ln/>
+        </p:spPr>
+        <p:txBody>
+          <a:bodyPr wrap="square" lIns="0" tIns="0" rIns="0" bIns="0" rtlCol="0" anchor="ctr"/>
+          <a:lstStyle/>
+          <a:p>
+            <a:pPr indent="0" marL="0">
+              <a:buNone/>
+            </a:pPr>
+            <a:r>
+              <a:rPr lang="en-US" sz="1200" dirty="0">
+                <a:solidFill>
+                  <a:srgbClr val="0A0A0B"/>
+                </a:solidFill>
+              </a:rPr>
+              <a:t>of the tokens it wrote were reasoning</a:t>
+            </a:r>
+            <a:endParaRPr lang="en-US" sz="1200" dirty="0"/>
+          </a:p>
+        </p:txBody>
+      </p:sp>
+      <p:sp>
+        <p:nvSpPr>
+          <p:cNvPr id="11" name="Shape 8"/>
+          <p:cNvSpPr/>
+          <p:nvPr/>
+        </p:nvSpPr>
+        <p:spPr>
+          <a:xfrm>
+            <a:off x="548640" y="3703320"/>
+            <a:ext cx="4023360" cy="896112"/>
+          </a:xfrm>
+          <a:prstGeom prst="roundRect">
+            <a:avLst>
+              <a:gd name="adj" fmla="val 12245"/>
+            </a:avLst>
+          </a:prstGeom>
+          <a:solidFill>
+            <a:srgbClr val="FFFFFF"/>
+          </a:solidFill>
+          <a:ln w="12700">
+            <a:solidFill>
+              <a:srgbClr val="DCDCE0"/>
+            </a:solidFill>
+            <a:prstDash val="solid"/>
+          </a:ln>
+        </p:spPr>
+      </p:sp>
+      <p:sp>
+        <p:nvSpPr>
+          <p:cNvPr id="12" name="Text 9"/>
+          <p:cNvSpPr txBox="1"/>
+          <p:nvPr/>
+        </p:nvSpPr>
+        <p:spPr>
+          <a:xfrm>
+            <a:off x="731520" y="3703320"/>
+            <a:ext cx="1737360" cy="896112"/>
+          </a:xfrm>
+          <a:prstGeom prst="rect">
+            <a:avLst/>
+          </a:prstGeom>
+          <a:noFill/>
+          <a:ln/>
+        </p:spPr>
+        <p:txBody>
+          <a:bodyPr wrap="square" lIns="0" tIns="0" rIns="0" bIns="0" rtlCol="0" anchor="ctr"/>
+          <a:lstStyle/>
+          <a:p>
+            <a:pPr indent="0" marL="0">
+              <a:buNone/>
+            </a:pPr>
+            <a:r>
+              <a:rPr lang="en-US" sz="3400" b="1" dirty="0">
+                <a:solidFill>
+                  <a:srgbClr val="D1352B"/>
+                </a:solidFill>
+              </a:rPr>
+              <a:t>9%</a:t>
+            </a:r>
+            <a:endParaRPr lang="en-US" sz="3400" dirty="0"/>
+          </a:p>
+        </p:txBody>
+      </p:sp>
+      <p:sp>
+        <p:nvSpPr>
+          <p:cNvPr id="13" name="Text 10"/>
+          <p:cNvSpPr txBox="1"/>
+          <p:nvPr/>
+        </p:nvSpPr>
+        <p:spPr>
+          <a:xfrm>
+            <a:off x="2468880" y="3703320"/>
+            <a:ext cx="2011680" cy="896112"/>
+          </a:xfrm>
+          <a:prstGeom prst="rect">
+            <a:avLst/>
+          </a:prstGeom>
+          <a:noFill/>
+          <a:ln/>
+        </p:spPr>
+        <p:txBody>
+          <a:bodyPr wrap="square" lIns="0" tIns="0" rIns="0" bIns="0" rtlCol="0" anchor="ctr"/>
+          <a:lstStyle/>
+          <a:p>
+            <a:pPr indent="0" marL="0">
+              <a:buNone/>
+            </a:pPr>
+            <a:r>
+              <a:rPr lang="en-US" sz="1200" dirty="0">
+                <a:solidFill>
+                  <a:srgbClr val="0A0A0B"/>
+                </a:solidFill>
+              </a:rPr>
+              <a:t>came back empty: a small budget ran out mid-thought</a:t>
+            </a:r>
+            <a:endParaRPr lang="en-US" sz="1200" dirty="0"/>
+          </a:p>
+        </p:txBody>
+      </p:sp>
+      <p:sp>
+        <p:nvSpPr>
+          <p:cNvPr id="14" name="Shape 11"/>
+          <p:cNvSpPr/>
+          <p:nvPr/>
+        </p:nvSpPr>
+        <p:spPr>
+          <a:xfrm>
+            <a:off x="548640" y="4754880"/>
+            <a:ext cx="4023360" cy="1463040"/>
+          </a:xfrm>
+          <a:prstGeom prst="roundRect">
+            <a:avLst>
+              <a:gd name="adj" fmla="val 7500"/>
+            </a:avLst>
+          </a:prstGeom>
+          <a:solidFill>
+            <a:srgbClr val="F6F7F8"/>
+          </a:solidFill>
+          <a:ln w="12700">
+            <a:solidFill>
+              <a:srgbClr val="F6F7F8"/>
+            </a:solidFill>
+            <a:prstDash val="solid"/>
+          </a:ln>
+        </p:spPr>
+      </p:sp>
+      <p:sp>
+        <p:nvSpPr>
+          <p:cNvPr id="15" name="Text 12"/>
+          <p:cNvSpPr txBox="1"/>
+          <p:nvPr/>
+        </p:nvSpPr>
+        <p:spPr>
+          <a:xfrm>
+            <a:off x="731520" y="4892040"/>
+            <a:ext cx="3703320" cy="1234440"/>
+          </a:xfrm>
+          <a:prstGeom prst="rect">
+            <a:avLst/>
+          </a:prstGeom>
+          <a:noFill/>
+          <a:ln/>
+        </p:spPr>
+        <p:txBody>
+          <a:bodyPr wrap="square" lIns="0" tIns="0" rIns="0" bIns="0" rtlCol="0" anchor="t"/>
+          <a:lstStyle/>
+          <a:p>
+            <a:pPr indent="0" marL="0">
+              <a:buNone/>
+            </a:pPr>
+            <a:r>
+              <a:rPr lang="en-US" sz="1300" dirty="0">
+                <a:solidFill>
+                  <a:srgbClr val="0A0A0B"/>
+                </a:solidFill>
+              </a:rPr>
+              <a:t>Thinking switched off? It still reasoned in a hidden channel. </a:t>
+            </a:r>
+            <a:pPr indent="0" marL="0">
+              <a:buNone/>
+            </a:pPr>
+            <a:r>
+              <a:rPr lang="en-US" sz="1300" b="1" dirty="0">
+                <a:solidFill>
+                  <a:srgbClr val="0A0A0B"/>
+                </a:solidFill>
+              </a:rPr>
+              <a:t>So every call asks for think: "low" and leaves room to think.</a:t>
+            </a:r>
+            <a:endParaRPr lang="en-US" sz="1300" dirty="0"/>
+          </a:p>
+        </p:txBody>
+      </p:sp>
+      <p:sp>
+        <p:nvSpPr>
+          <p:cNvPr id="16" name="Text 13"/>
+          <p:cNvSpPr txBox="1"/>
+          <p:nvPr/>
+        </p:nvSpPr>
+        <p:spPr>
+          <a:xfrm>
+            <a:off x="4937760" y="1691640"/>
+            <a:ext cx="3657600" cy="274320"/>
+          </a:xfrm>
+          <a:prstGeom prst="rect">
+            <a:avLst/>
+          </a:prstGeom>
+          <a:noFill/>
+          <a:ln/>
+        </p:spPr>
+        <p:txBody>
+          <a:bodyPr wrap="square" lIns="0" tIns="0" rIns="0" bIns="0" rtlCol="0" anchor="t"/>
+          <a:lstStyle/>
+          <a:p>
+            <a:pPr indent="0" marL="0">
+              <a:buNone/>
+            </a:pPr>
+            <a:r>
+              <a:rPr lang="en-US" sz="1100" b="1" spc="100" kern="0" dirty="0">
+                <a:solidFill>
+                  <a:srgbClr val="0A7F44"/>
+                </a:solidFill>
+              </a:rPr>
+              <a:t>WHO DECIDES</a:t>
+            </a:r>
+            <a:endParaRPr lang="en-US" sz="1100" dirty="0"/>
+          </a:p>
+        </p:txBody>
+      </p:sp>
+      <p:sp>
+        <p:nvSpPr>
+          <p:cNvPr id="17" name="Shape 14"/>
+          <p:cNvSpPr/>
+          <p:nvPr/>
+        </p:nvSpPr>
+        <p:spPr>
+          <a:xfrm>
+            <a:off x="4937760" y="2057400"/>
+            <a:ext cx="6675120" cy="1207008"/>
+          </a:xfrm>
+          <a:prstGeom prst="roundRect">
+            <a:avLst>
+              <a:gd name="adj" fmla="val 9091"/>
+            </a:avLst>
+          </a:prstGeom>
+          <a:solidFill>
+            <a:srgbClr val="FFFFFF"/>
+          </a:solidFill>
+          <a:ln w="12700">
+            <a:solidFill>
+              <a:srgbClr val="DCDCE0"/>
+            </a:solidFill>
+            <a:prstDash val="solid"/>
+          </a:ln>
+        </p:spPr>
+      </p:sp>
+      <p:sp>
+        <p:nvSpPr>
+          <p:cNvPr id="18" name="Text 15"/>
+          <p:cNvSpPr txBox="1"/>
+          <p:nvPr/>
+        </p:nvSpPr>
+        <p:spPr>
+          <a:xfrm>
+            <a:off x="5138928" y="2194560"/>
+            <a:ext cx="1828800" cy="228600"/>
+          </a:xfrm>
+          <a:prstGeom prst="rect">
+            <a:avLst/>
+          </a:prstGeom>
+          <a:noFill/>
+          <a:ln/>
+        </p:spPr>
+        <p:txBody>
+          <a:bodyPr wrap="square" lIns="0" tIns="0" rIns="0" bIns="0" rtlCol="0" anchor="t"/>
+          <a:lstStyle/>
+          <a:p>
+            <a:pPr indent="0" marL="0">
+              <a:buNone/>
+            </a:pPr>
+            <a:r>
+              <a:rPr lang="en-US" sz="1000" b="1" spc="100" kern="0" dirty="0">
                 <a:solidFill>
                   <a:srgbClr val="55555C"/>
                 </a:solidFill>
               </a:rPr>
-              <a:t>Tokens per model call, by club size: the whole club in the prompt grows with it; Serve's calls stay about 1,500 tokens from 11 to 301 members</a:t>
-            </a:r>
-            <a:endParaRPr lang="en-US" sz="1100" dirty="0"/>
-          </a:p>
-        </p:txBody>
-      </p:sp>
-      <p:pic>
-        <p:nvPicPr>
-          <p:cNvPr id="7" name="Image 1" descr="preencoded.png">    </p:cNvPr>
-          <p:cNvPicPr>
-            <a:picLocks noChangeAspect="1"/>
-          </p:cNvPicPr>
-          <p:nvPr/>
-        </p:nvPicPr>
-        <p:blipFill>
-          <a:blip r:embed="rId2"/>
-          <a:stretch>
-            <a:fillRect/>
-          </a:stretch>
-        </p:blipFill>
-        <p:spPr>
-          <a:xfrm>
-            <a:off x="6263640" y="1691640"/>
-            <a:ext cx="5349240" cy="3429000"/>
-          </a:xfrm>
-          <a:prstGeom prst="rect">
-            <a:avLst/>
-          </a:prstGeom>
-        </p:spPr>
-      </p:pic>
-      <p:sp>
-        <p:nvSpPr>
-          <p:cNvPr id="8" name="Text 3"/>
-          <p:cNvSpPr txBox="1"/>
-          <p:nvPr/>
-        </p:nvSpPr>
-        <p:spPr>
-          <a:xfrm>
-            <a:off x="6263640" y="5212080"/>
-            <a:ext cx="5349240" cy="548640"/>
-          </a:xfrm>
-          <a:prstGeom prst="rect">
-            <a:avLst/>
-          </a:prstGeom>
-          <a:noFill/>
-          <a:ln/>
-        </p:spPr>
-        <p:txBody>
-          <a:bodyPr wrap="square" lIns="0" tIns="0" rIns="0" bIns="0" rtlCol="0" anchor="t"/>
-          <a:lstStyle/>
-          <a:p>
-            <a:pPr indent="0" marL="0">
-              <a:buNone/>
-            </a:pPr>
-            <a:r>
-              <a:rPr lang="en-US" sz="1100" dirty="0">
+              <a:t>FIRST</a:t>
+            </a:r>
+            <a:endParaRPr lang="en-US" sz="1000" dirty="0"/>
+          </a:p>
+        </p:txBody>
+      </p:sp>
+      <p:sp>
+        <p:nvSpPr>
+          <p:cNvPr id="19" name="Text 16"/>
+          <p:cNvSpPr txBox="1"/>
+          <p:nvPr/>
+        </p:nvSpPr>
+        <p:spPr>
+          <a:xfrm>
+            <a:off x="5138928" y="2441448"/>
+            <a:ext cx="4206240" cy="347472"/>
+          </a:xfrm>
+          <a:prstGeom prst="rect">
+            <a:avLst/>
+          </a:prstGeom>
+          <a:noFill/>
+          <a:ln/>
+        </p:spPr>
+        <p:txBody>
+          <a:bodyPr wrap="square" lIns="0" tIns="0" rIns="0" bIns="0" rtlCol="0" anchor="t"/>
+          <a:lstStyle/>
+          <a:p>
+            <a:pPr indent="0" marL="0">
+              <a:buNone/>
+            </a:pPr>
+            <a:r>
+              <a:rPr lang="en-US" sz="1600" b="1" dirty="0">
+                <a:solidFill>
+                  <a:srgbClr val="0A0A0B"/>
+                </a:solidFill>
+              </a:rPr>
+              <a:t>Code</a:t>
+            </a:r>
+            <a:endParaRPr lang="en-US" sz="1600" dirty="0"/>
+          </a:p>
+        </p:txBody>
+      </p:sp>
+      <p:sp>
+        <p:nvSpPr>
+          <p:cNvPr id="20" name="Text 17"/>
+          <p:cNvSpPr txBox="1"/>
+          <p:nvPr/>
+        </p:nvSpPr>
+        <p:spPr>
+          <a:xfrm>
+            <a:off x="5138928" y="2788920"/>
+            <a:ext cx="4480560" cy="457200"/>
+          </a:xfrm>
+          <a:prstGeom prst="rect">
+            <a:avLst/>
+          </a:prstGeom>
+          <a:noFill/>
+          <a:ln/>
+        </p:spPr>
+        <p:txBody>
+          <a:bodyPr wrap="square" lIns="0" tIns="0" rIns="0" bIns="0" rtlCol="0" anchor="t"/>
+          <a:lstStyle/>
+          <a:p>
+            <a:pPr indent="0" marL="0">
+              <a:buNone/>
+            </a:pPr>
+            <a:r>
+              <a:rPr lang="en-US" sz="1150" dirty="0">
                 <a:solidFill>
                   <a:srgbClr val="55555C"/>
                 </a:solidFill>
               </a:rPr>
-              <a:t>One member's decision: what each tier costs, and how often it matches the full answer (code, then Llama 3.2 1B, then Muse Glimmer)</a:t>
-            </a:r>
-            <a:endParaRPr lang="en-US" sz="1100" dirty="0"/>
+              <a:t>Every fact and every hard rule: free times, trips, limits. No model call when the facts decide.</a:t>
+            </a:r>
+            <a:endParaRPr lang="en-US" sz="1150" dirty="0"/>
+          </a:p>
+        </p:txBody>
+      </p:sp>
+      <p:sp>
+        <p:nvSpPr>
+          <p:cNvPr id="21" name="Shape 18"/>
+          <p:cNvSpPr/>
+          <p:nvPr/>
+        </p:nvSpPr>
+        <p:spPr>
+          <a:xfrm>
+            <a:off x="8275320" y="3273552"/>
+            <a:ext cx="0" cy="146304"/>
+          </a:xfrm>
+          <a:prstGeom prst="line">
+            <a:avLst/>
+          </a:prstGeom>
+          <a:noFill/>
+          <a:ln w="22225">
+            <a:solidFill>
+              <a:srgbClr val="8A8A92"/>
+            </a:solidFill>
+            <a:prstDash val="solid"/>
+            <a:tailEnd type="triangle"/>
+          </a:ln>
+        </p:spPr>
+      </p:sp>
+      <p:sp>
+        <p:nvSpPr>
+          <p:cNvPr id="22" name="Shape 19"/>
+          <p:cNvSpPr/>
+          <p:nvPr/>
+        </p:nvSpPr>
+        <p:spPr>
+          <a:xfrm>
+            <a:off x="4937760" y="3429000"/>
+            <a:ext cx="6675120" cy="1207008"/>
+          </a:xfrm>
+          <a:prstGeom prst="roundRect">
+            <a:avLst>
+              <a:gd name="adj" fmla="val 9091"/>
+            </a:avLst>
+          </a:prstGeom>
+          <a:solidFill>
+            <a:srgbClr val="E9F3EC"/>
+          </a:solidFill>
+          <a:ln w="25400">
+            <a:solidFill>
+              <a:srgbClr val="0A7F44"/>
+            </a:solidFill>
+            <a:prstDash val="solid"/>
+          </a:ln>
+        </p:spPr>
+      </p:sp>
+      <p:sp>
+        <p:nvSpPr>
+          <p:cNvPr id="23" name="Text 20"/>
+          <p:cNvSpPr txBox="1"/>
+          <p:nvPr/>
+        </p:nvSpPr>
+        <p:spPr>
+          <a:xfrm>
+            <a:off x="5138928" y="3566160"/>
+            <a:ext cx="1828800" cy="228600"/>
+          </a:xfrm>
+          <a:prstGeom prst="rect">
+            <a:avLst/>
+          </a:prstGeom>
+          <a:noFill/>
+          <a:ln/>
+        </p:spPr>
+        <p:txBody>
+          <a:bodyPr wrap="square" lIns="0" tIns="0" rIns="0" bIns="0" rtlCol="0" anchor="t"/>
+          <a:lstStyle/>
+          <a:p>
+            <a:pPr indent="0" marL="0">
+              <a:buNone/>
+            </a:pPr>
+            <a:r>
+              <a:rPr lang="en-US" sz="1000" b="1" spc="100" kern="0" dirty="0">
+                <a:solidFill>
+                  <a:srgbClr val="55555C"/>
+                </a:solidFill>
+              </a:rPr>
+              <a:t>THEN</a:t>
+            </a:r>
+            <a:endParaRPr lang="en-US" sz="1000" dirty="0"/>
+          </a:p>
+        </p:txBody>
+      </p:sp>
+      <p:sp>
+        <p:nvSpPr>
+          <p:cNvPr id="24" name="Text 21"/>
+          <p:cNvSpPr txBox="1"/>
+          <p:nvPr/>
+        </p:nvSpPr>
+        <p:spPr>
+          <a:xfrm>
+            <a:off x="5138928" y="3813048"/>
+            <a:ext cx="4206240" cy="347472"/>
+          </a:xfrm>
+          <a:prstGeom prst="rect">
+            <a:avLst/>
+          </a:prstGeom>
+          <a:noFill/>
+          <a:ln/>
+        </p:spPr>
+        <p:txBody>
+          <a:bodyPr wrap="square" lIns="0" tIns="0" rIns="0" bIns="0" rtlCol="0" anchor="t"/>
+          <a:lstStyle/>
+          <a:p>
+            <a:pPr indent="0" marL="0">
+              <a:buNone/>
+            </a:pPr>
+            <a:r>
+              <a:rPr lang="en-US" sz="1600" b="1" dirty="0">
+                <a:solidFill>
+                  <a:srgbClr val="0A0A0B"/>
+                </a:solidFill>
+              </a:rPr>
+              <a:t>Llama 3.2 1B, distilled from Glimmer</a:t>
+            </a:r>
+            <a:endParaRPr lang="en-US" sz="1600" dirty="0"/>
+          </a:p>
+        </p:txBody>
+      </p:sp>
+      <p:sp>
+        <p:nvSpPr>
+          <p:cNvPr id="25" name="Text 22"/>
+          <p:cNvSpPr txBox="1"/>
+          <p:nvPr/>
+        </p:nvSpPr>
+        <p:spPr>
+          <a:xfrm>
+            <a:off x="5138928" y="4160520"/>
+            <a:ext cx="4480560" cy="457200"/>
+          </a:xfrm>
+          <a:prstGeom prst="rect">
+            <a:avLst/>
+          </a:prstGeom>
+          <a:noFill/>
+          <a:ln/>
+        </p:spPr>
+        <p:txBody>
+          <a:bodyPr wrap="square" lIns="0" tIns="0" rIns="0" bIns="0" rtlCol="0" anchor="t"/>
+          <a:lstStyle/>
+          <a:p>
+            <a:pPr indent="0" marL="0">
+              <a:buNone/>
+            </a:pPr>
+            <a:r>
+              <a:rPr lang="en-US" sz="1150" dirty="0">
+                <a:solidFill>
+                  <a:srgbClr val="55555C"/>
+                </a:solidFill>
+              </a:rPr>
+              <a:t>On the CPU. Answers only when sure, and only from times that keep every rule.</a:t>
+            </a:r>
+            <a:endParaRPr lang="en-US" sz="1150" dirty="0"/>
+          </a:p>
+        </p:txBody>
+      </p:sp>
+      <p:sp>
+        <p:nvSpPr>
+          <p:cNvPr id="26" name="Text 23"/>
+          <p:cNvSpPr txBox="1"/>
+          <p:nvPr/>
+        </p:nvSpPr>
+        <p:spPr>
+          <a:xfrm>
+            <a:off x="9555480" y="3611880"/>
+            <a:ext cx="1920240" cy="502920"/>
+          </a:xfrm>
+          <a:prstGeom prst="rect">
+            <a:avLst/>
+          </a:prstGeom>
+          <a:noFill/>
+          <a:ln/>
+        </p:spPr>
+        <p:txBody>
+          <a:bodyPr wrap="square" lIns="0" tIns="0" rIns="0" bIns="0" rtlCol="0" anchor="t"/>
+          <a:lstStyle/>
+          <a:p>
+            <a:pPr algn="r" indent="0" marL="0">
+              <a:buNone/>
+            </a:pPr>
+            <a:r>
+              <a:rPr lang="en-US" sz="2800" b="1" dirty="0">
+                <a:solidFill>
+                  <a:srgbClr val="0A7F44"/>
+                </a:solidFill>
+              </a:rPr>
+              <a:t>54–67%</a:t>
+            </a:r>
+            <a:endParaRPr lang="en-US" sz="2800" dirty="0"/>
+          </a:p>
+        </p:txBody>
+      </p:sp>
+      <p:sp>
+        <p:nvSpPr>
+          <p:cNvPr id="27" name="Text 24"/>
+          <p:cNvSpPr txBox="1"/>
+          <p:nvPr/>
+        </p:nvSpPr>
+        <p:spPr>
+          <a:xfrm>
+            <a:off x="9418320" y="4114800"/>
+            <a:ext cx="2057400" cy="457200"/>
+          </a:xfrm>
+          <a:prstGeom prst="rect">
+            <a:avLst/>
+          </a:prstGeom>
+          <a:noFill/>
+          <a:ln/>
+        </p:spPr>
+        <p:txBody>
+          <a:bodyPr wrap="square" lIns="0" tIns="0" rIns="0" bIns="0" rtlCol="0" anchor="t"/>
+          <a:lstStyle/>
+          <a:p>
+            <a:pPr algn="r" indent="0" marL="0">
+              <a:buNone/>
+            </a:pPr>
+            <a:r>
+              <a:rPr lang="en-US" sz="1000" dirty="0">
+                <a:solidFill>
+                  <a:srgbClr val="55555C"/>
+                </a:solidFill>
+              </a:rPr>
+              <a:t>of members' answers, no rule broken (simulated club)</a:t>
+            </a:r>
+            <a:endParaRPr lang="en-US" sz="1000" dirty="0"/>
+          </a:p>
+        </p:txBody>
+      </p:sp>
+      <p:sp>
+        <p:nvSpPr>
+          <p:cNvPr id="28" name="Shape 25"/>
+          <p:cNvSpPr/>
+          <p:nvPr/>
+        </p:nvSpPr>
+        <p:spPr>
+          <a:xfrm>
+            <a:off x="8275320" y="4645152"/>
+            <a:ext cx="0" cy="146304"/>
+          </a:xfrm>
+          <a:prstGeom prst="line">
+            <a:avLst/>
+          </a:prstGeom>
+          <a:noFill/>
+          <a:ln w="22225">
+            <a:solidFill>
+              <a:srgbClr val="8A8A92"/>
+            </a:solidFill>
+            <a:prstDash val="solid"/>
+            <a:tailEnd type="triangle"/>
+          </a:ln>
+        </p:spPr>
+      </p:sp>
+      <p:sp>
+        <p:nvSpPr>
+          <p:cNvPr id="29" name="Shape 26"/>
+          <p:cNvSpPr/>
+          <p:nvPr/>
+        </p:nvSpPr>
+        <p:spPr>
+          <a:xfrm>
+            <a:off x="4937760" y="4800600"/>
+            <a:ext cx="6675120" cy="1207008"/>
+          </a:xfrm>
+          <a:prstGeom prst="roundRect">
+            <a:avLst>
+              <a:gd name="adj" fmla="val 9091"/>
+            </a:avLst>
+          </a:prstGeom>
+          <a:solidFill>
+            <a:srgbClr val="FFFFFF"/>
+          </a:solidFill>
+          <a:ln w="12700">
+            <a:solidFill>
+              <a:srgbClr val="DCDCE0"/>
+            </a:solidFill>
+            <a:prstDash val="solid"/>
+          </a:ln>
+        </p:spPr>
+      </p:sp>
+      <p:sp>
+        <p:nvSpPr>
+          <p:cNvPr id="30" name="Text 27"/>
+          <p:cNvSpPr txBox="1"/>
+          <p:nvPr/>
+        </p:nvSpPr>
+        <p:spPr>
+          <a:xfrm>
+            <a:off x="5138928" y="4937760"/>
+            <a:ext cx="1828800" cy="228600"/>
+          </a:xfrm>
+          <a:prstGeom prst="rect">
+            <a:avLst/>
+          </a:prstGeom>
+          <a:noFill/>
+          <a:ln/>
+        </p:spPr>
+        <p:txBody>
+          <a:bodyPr wrap="square" lIns="0" tIns="0" rIns="0" bIns="0" rtlCol="0" anchor="t"/>
+          <a:lstStyle/>
+          <a:p>
+            <a:pPr indent="0" marL="0">
+              <a:buNone/>
+            </a:pPr>
+            <a:r>
+              <a:rPr lang="en-US" sz="1000" b="1" spc="100" kern="0" dirty="0">
+                <a:solidFill>
+                  <a:srgbClr val="55555C"/>
+                </a:solidFill>
+              </a:rPr>
+              <a:t>ONLY IF NEEDED</a:t>
+            </a:r>
+            <a:endParaRPr lang="en-US" sz="1000" dirty="0"/>
+          </a:p>
+        </p:txBody>
+      </p:sp>
+      <p:sp>
+        <p:nvSpPr>
+          <p:cNvPr id="31" name="Text 28"/>
+          <p:cNvSpPr txBox="1"/>
+          <p:nvPr/>
+        </p:nvSpPr>
+        <p:spPr>
+          <a:xfrm>
+            <a:off x="5138928" y="5184648"/>
+            <a:ext cx="4206240" cy="347472"/>
+          </a:xfrm>
+          <a:prstGeom prst="rect">
+            <a:avLst/>
+          </a:prstGeom>
+          <a:noFill/>
+          <a:ln/>
+        </p:spPr>
+        <p:txBody>
+          <a:bodyPr wrap="square" lIns="0" tIns="0" rIns="0" bIns="0" rtlCol="0" anchor="t"/>
+          <a:lstStyle/>
+          <a:p>
+            <a:pPr indent="0" marL="0">
+              <a:buNone/>
+            </a:pPr>
+            <a:r>
+              <a:rPr lang="en-US" sz="1600" b="1" dirty="0">
+                <a:solidFill>
+                  <a:srgbClr val="0A0A0B"/>
+                </a:solidFill>
+              </a:rPr>
+              <a:t>Muse Glimmer</a:t>
+            </a:r>
+            <a:endParaRPr lang="en-US" sz="1600" dirty="0"/>
+          </a:p>
+        </p:txBody>
+      </p:sp>
+      <p:sp>
+        <p:nvSpPr>
+          <p:cNvPr id="32" name="Text 29"/>
+          <p:cNvSpPr txBox="1"/>
+          <p:nvPr/>
+        </p:nvSpPr>
+        <p:spPr>
+          <a:xfrm>
+            <a:off x="5138928" y="5532120"/>
+            <a:ext cx="4480560" cy="457200"/>
+          </a:xfrm>
+          <a:prstGeom prst="rect">
+            <a:avLst/>
+          </a:prstGeom>
+          <a:noFill/>
+          <a:ln/>
+        </p:spPr>
+        <p:txBody>
+          <a:bodyPr wrap="square" lIns="0" tIns="0" rIns="0" bIns="0" rtlCol="0" anchor="t"/>
+          <a:lstStyle/>
+          <a:p>
+            <a:pPr indent="0" marL="0">
+              <a:buNone/>
+            </a:pPr>
+            <a:r>
+              <a:rPr lang="en-US" sz="1150" dirty="0">
+                <a:solidFill>
+                  <a:srgbClr val="55555C"/>
+                </a:solidFill>
+              </a:rPr>
+              <a:t>The real choices: planning the week, judging courts, reading photos, writing.</a:t>
+            </a:r>
+            <a:endParaRPr lang="en-US" sz="1150" dirty="0"/>
+          </a:p>
+        </p:txBody>
+      </p:sp>
+      <p:sp>
+        <p:nvSpPr>
+          <p:cNvPr id="33" name="Text 30"/>
+          <p:cNvSpPr txBox="1"/>
+          <p:nvPr/>
+        </p:nvSpPr>
+        <p:spPr>
+          <a:xfrm>
+            <a:off x="4937760" y="6126480"/>
+            <a:ext cx="6675120" cy="228600"/>
+          </a:xfrm>
+          <a:prstGeom prst="rect">
+            <a:avLst/>
+          </a:prstGeom>
+          <a:noFill/>
+          <a:ln/>
+        </p:spPr>
+        <p:txBody>
+          <a:bodyPr wrap="square" lIns="0" tIns="0" rIns="0" bIns="0" rtlCol="0" anchor="t"/>
+          <a:lstStyle/>
+          <a:p>
+            <a:pPr indent="0" marL="0">
+              <a:buNone/>
+            </a:pPr>
+            <a:r>
+              <a:rPr lang="en-US" sz="1000" dirty="0">
+                <a:solidFill>
+                  <a:srgbClr val="8A8A92"/>
+                </a:solidFill>
+              </a:rPr>
+              <a:t>submission/results/glimmer_in_practice.json · technical report 3.12, 5.10</a:t>
+            </a:r>
+            <a:endParaRPr lang="en-US" sz="1000" dirty="0"/>
           </a:p>
         </p:txBody>
       </p:sp>
@@ -6887,7 +7512,7 @@
                   <a:srgbClr val="0A7F44"/>
                 </a:solidFill>
               </a:rPr>
-              <a:t>SAFE BY DESIGN</a:t>
+              <a:t>MEASURED</a:t>
             </a:r>
             <a:endParaRPr lang="en-US" sz="1300" dirty="0"/>
           </a:p>
@@ -6925,587 +7550,129 @@
                   <a:srgbClr val="0A0A0B"/>
                 </a:solidFill>
               </a:rPr>
-              <a:t>No agent holds all three at once</a:t>
+              <a:t>Two charts behind two design choices</a:t>
             </a:r>
             <a:endParaRPr lang="en-US" sz="3200" dirty="0"/>
           </a:p>
         </p:txBody>
       </p:sp>
-      <p:sp>
-        <p:nvSpPr>
-          <p:cNvPr id="5" name="Shape 2"/>
-          <p:cNvSpPr/>
-          <p:nvPr/>
-        </p:nvSpPr>
-        <p:spPr>
-          <a:xfrm>
-            <a:off x="822960" y="1737360"/>
-            <a:ext cx="2286000" cy="2286000"/>
-          </a:xfrm>
-          <a:prstGeom prst="ellipse">
-            <a:avLst/>
-          </a:prstGeom>
-          <a:solidFill>
-            <a:srgbClr val="FBEAE9">
-              <a:alpha val="65000"/>
-            </a:srgbClr>
-          </a:solidFill>
-          <a:ln w="25400">
-            <a:solidFill>
-              <a:srgbClr val="D1352B"/>
-            </a:solidFill>
-            <a:prstDash val="solid"/>
-          </a:ln>
-        </p:spPr>
-      </p:sp>
-      <p:sp>
-        <p:nvSpPr>
-          <p:cNvPr id="6" name="Shape 3"/>
-          <p:cNvSpPr/>
-          <p:nvPr/>
-        </p:nvSpPr>
-        <p:spPr>
-          <a:xfrm>
-            <a:off x="2606040" y="1737360"/>
-            <a:ext cx="2286000" cy="2286000"/>
-          </a:xfrm>
-          <a:prstGeom prst="ellipse">
-            <a:avLst/>
-          </a:prstGeom>
-          <a:solidFill>
-            <a:srgbClr val="E8F1FD">
-              <a:alpha val="65000"/>
-            </a:srgbClr>
-          </a:solidFill>
-          <a:ln w="25400">
-            <a:solidFill>
-              <a:srgbClr val="0064E0"/>
-            </a:solidFill>
-            <a:prstDash val="solid"/>
-          </a:ln>
-        </p:spPr>
-      </p:sp>
-      <p:sp>
-        <p:nvSpPr>
-          <p:cNvPr id="7" name="Shape 4"/>
-          <p:cNvSpPr/>
-          <p:nvPr/>
-        </p:nvSpPr>
-        <p:spPr>
-          <a:xfrm>
-            <a:off x="1719072" y="3246120"/>
-            <a:ext cx="2286000" cy="2286000"/>
-          </a:xfrm>
-          <a:prstGeom prst="ellipse">
-            <a:avLst/>
-          </a:prstGeom>
-          <a:solidFill>
-            <a:srgbClr val="E9F3EC">
-              <a:alpha val="65000"/>
-            </a:srgbClr>
-          </a:solidFill>
-          <a:ln w="25400">
-            <a:solidFill>
-              <a:srgbClr val="0A7F44"/>
-            </a:solidFill>
-            <a:prstDash val="solid"/>
-          </a:ln>
-        </p:spPr>
-      </p:sp>
-      <p:sp>
-        <p:nvSpPr>
-          <p:cNvPr id="8" name="Text 5"/>
-          <p:cNvSpPr txBox="1"/>
-          <p:nvPr/>
-        </p:nvSpPr>
-        <p:spPr>
-          <a:xfrm>
-            <a:off x="1051560" y="2331720"/>
-            <a:ext cx="1280160" cy="731520"/>
-          </a:xfrm>
-          <a:prstGeom prst="rect">
-            <a:avLst/>
-          </a:prstGeom>
-          <a:noFill/>
-          <a:ln/>
-        </p:spPr>
-        <p:txBody>
-          <a:bodyPr wrap="square" lIns="0" tIns="0" rIns="0" bIns="0" rtlCol="0" anchor="t"/>
-          <a:lstStyle/>
-          <a:p>
-            <a:pPr algn="ctr" indent="0" marL="0">
-              <a:buNone/>
-            </a:pPr>
-            <a:r>
-              <a:rPr lang="en-US" sz="1500" b="1" dirty="0">
-                <a:solidFill>
-                  <a:srgbClr val="0A0A0B"/>
-                </a:solidFill>
-              </a:rPr>
-              <a:t>Untrusted</a:t>
-            </a:r>
-            <a:endParaRPr lang="en-US" sz="1500" dirty="0"/>
-          </a:p>
-          <a:p>
-            <a:pPr algn="ctr" indent="0" marL="0">
-              <a:buNone/>
-            </a:pPr>
-            <a:r>
-              <a:rPr lang="en-US" sz="1500" b="1" dirty="0">
-                <a:solidFill>
-                  <a:srgbClr val="0A0A0B"/>
-                </a:solidFill>
-              </a:rPr>
-              <a:t>input</a:t>
-            </a:r>
-            <a:endParaRPr lang="en-US" sz="1500" dirty="0"/>
-          </a:p>
-        </p:txBody>
-      </p:sp>
-      <p:sp>
-        <p:nvSpPr>
-          <p:cNvPr id="9" name="Text 6"/>
-          <p:cNvSpPr txBox="1"/>
-          <p:nvPr/>
-        </p:nvSpPr>
-        <p:spPr>
-          <a:xfrm>
-            <a:off x="3520440" y="2331720"/>
-            <a:ext cx="1280160" cy="731520"/>
-          </a:xfrm>
-          <a:prstGeom prst="rect">
-            <a:avLst/>
-          </a:prstGeom>
-          <a:noFill/>
-          <a:ln/>
-        </p:spPr>
-        <p:txBody>
-          <a:bodyPr wrap="square" lIns="0" tIns="0" rIns="0" bIns="0" rtlCol="0" anchor="t"/>
-          <a:lstStyle/>
-          <a:p>
-            <a:pPr algn="ctr" indent="0" marL="0">
-              <a:buNone/>
-            </a:pPr>
-            <a:r>
-              <a:rPr lang="en-US" sz="1500" b="1" dirty="0">
-                <a:solidFill>
-                  <a:srgbClr val="0A0A0B"/>
-                </a:solidFill>
-              </a:rPr>
-              <a:t>Private</a:t>
-            </a:r>
-            <a:endParaRPr lang="en-US" sz="1500" dirty="0"/>
-          </a:p>
-          <a:p>
-            <a:pPr algn="ctr" indent="0" marL="0">
-              <a:buNone/>
-            </a:pPr>
-            <a:r>
-              <a:rPr lang="en-US" sz="1500" b="1" dirty="0">
-                <a:solidFill>
-                  <a:srgbClr val="0A0A0B"/>
-                </a:solidFill>
-              </a:rPr>
-              <a:t>data</a:t>
-            </a:r>
-            <a:endParaRPr lang="en-US" sz="1500" dirty="0"/>
-          </a:p>
-        </p:txBody>
-      </p:sp>
-      <p:sp>
-        <p:nvSpPr>
-          <p:cNvPr id="10" name="Text 7"/>
-          <p:cNvSpPr txBox="1"/>
-          <p:nvPr/>
-        </p:nvSpPr>
-        <p:spPr>
-          <a:xfrm>
-            <a:off x="2221992" y="4617720"/>
-            <a:ext cx="1280160" cy="731520"/>
-          </a:xfrm>
-          <a:prstGeom prst="rect">
-            <a:avLst/>
-          </a:prstGeom>
-          <a:noFill/>
-          <a:ln/>
-        </p:spPr>
-        <p:txBody>
-          <a:bodyPr wrap="square" lIns="0" tIns="0" rIns="0" bIns="0" rtlCol="0" anchor="t"/>
-          <a:lstStyle/>
-          <a:p>
-            <a:pPr algn="ctr" indent="0" marL="0">
-              <a:buNone/>
-            </a:pPr>
-            <a:r>
-              <a:rPr lang="en-US" sz="1500" b="1" dirty="0">
-                <a:solidFill>
-                  <a:srgbClr val="0A0A0B"/>
-                </a:solidFill>
-              </a:rPr>
-              <a:t>The power</a:t>
-            </a:r>
-            <a:endParaRPr lang="en-US" sz="1500" dirty="0"/>
-          </a:p>
-          <a:p>
-            <a:pPr algn="ctr" indent="0" marL="0">
-              <a:buNone/>
-            </a:pPr>
-            <a:r>
-              <a:rPr lang="en-US" sz="1500" b="1" dirty="0">
-                <a:solidFill>
-                  <a:srgbClr val="0A0A0B"/>
-                </a:solidFill>
-              </a:rPr>
-              <a:t>to act</a:t>
-            </a:r>
-            <a:endParaRPr lang="en-US" sz="1500" dirty="0"/>
-          </a:p>
-        </p:txBody>
-      </p:sp>
-      <p:sp>
-        <p:nvSpPr>
-          <p:cNvPr id="11" name="Shape 8"/>
-          <p:cNvSpPr/>
-          <p:nvPr/>
-        </p:nvSpPr>
-        <p:spPr>
-          <a:xfrm>
-            <a:off x="2542032" y="2971800"/>
-            <a:ext cx="658368" cy="658368"/>
-          </a:xfrm>
-          <a:prstGeom prst="ellipse">
-            <a:avLst/>
-          </a:prstGeom>
-          <a:solidFill>
-            <a:srgbClr val="FFFFFF"/>
-          </a:solidFill>
-          <a:ln w="38100">
-            <a:solidFill>
-              <a:srgbClr val="D1352B"/>
-            </a:solidFill>
-            <a:prstDash val="solid"/>
-          </a:ln>
-        </p:spPr>
-      </p:sp>
-      <p:sp>
-        <p:nvSpPr>
-          <p:cNvPr id="12" name="Text 9"/>
-          <p:cNvSpPr txBox="1"/>
-          <p:nvPr/>
-        </p:nvSpPr>
-        <p:spPr>
-          <a:xfrm>
-            <a:off x="2542032" y="2971800"/>
-            <a:ext cx="658368" cy="658368"/>
-          </a:xfrm>
-          <a:prstGeom prst="rect">
-            <a:avLst/>
-          </a:prstGeom>
-          <a:noFill/>
-          <a:ln/>
-        </p:spPr>
-        <p:txBody>
-          <a:bodyPr wrap="square" lIns="0" tIns="0" rIns="0" bIns="0" rtlCol="0" anchor="ctr"/>
-          <a:lstStyle/>
-          <a:p>
-            <a:pPr algn="ctr" indent="0" marL="0">
-              <a:buNone/>
-            </a:pPr>
-            <a:r>
-              <a:rPr lang="en-US" sz="3000" b="1" dirty="0">
-                <a:solidFill>
-                  <a:srgbClr val="D1352B"/>
-                </a:solidFill>
-              </a:rPr>
-              <a:t>×</a:t>
-            </a:r>
-            <a:endParaRPr lang="en-US" sz="3000" dirty="0"/>
-          </a:p>
-        </p:txBody>
-      </p:sp>
-      <p:sp>
-        <p:nvSpPr>
-          <p:cNvPr id="13" name="Text 10"/>
-          <p:cNvSpPr txBox="1"/>
-          <p:nvPr/>
-        </p:nvSpPr>
-        <p:spPr>
-          <a:xfrm>
-            <a:off x="548640" y="5715000"/>
-            <a:ext cx="4937760" cy="548640"/>
-          </a:xfrm>
-          <a:prstGeom prst="rect">
-            <a:avLst/>
-          </a:prstGeom>
-          <a:noFill/>
-          <a:ln/>
-        </p:spPr>
-        <p:txBody>
-          <a:bodyPr wrap="square" lIns="0" tIns="0" rIns="0" bIns="0" rtlCol="0" anchor="t"/>
-          <a:lstStyle/>
-          <a:p>
-            <a:pPr indent="0" marL="0">
-              <a:buNone/>
-            </a:pPr>
-            <a:r>
-              <a:rPr lang="en-US" sz="1200" dirty="0">
+      <p:pic>
+        <p:nvPicPr>
+          <p:cNvPr id="5" name="Image 0" descr="preencoded.png">    </p:cNvPr>
+          <p:cNvPicPr>
+            <a:picLocks noChangeAspect="1"/>
+          </p:cNvPicPr>
+          <p:nvPr/>
+        </p:nvPicPr>
+        <p:blipFill>
+          <a:blip r:embed="rId1"/>
+          <a:stretch>
+            <a:fillRect/>
+          </a:stretch>
+        </p:blipFill>
+        <p:spPr>
+          <a:xfrm>
+            <a:off x="548640" y="1691640"/>
+            <a:ext cx="5440680" cy="2863516"/>
+          </a:xfrm>
+          <a:prstGeom prst="rect">
+            <a:avLst/>
+          </a:prstGeom>
+        </p:spPr>
+      </p:pic>
+      <p:sp>
+        <p:nvSpPr>
+          <p:cNvPr id="6" name="Text 2"/>
+          <p:cNvSpPr txBox="1"/>
+          <p:nvPr/>
+        </p:nvSpPr>
+        <p:spPr>
+          <a:xfrm>
+            <a:off x="548640" y="4646596"/>
+            <a:ext cx="5440680" cy="548640"/>
+          </a:xfrm>
+          <a:prstGeom prst="rect">
+            <a:avLst/>
+          </a:prstGeom>
+          <a:noFill/>
+          <a:ln/>
+        </p:spPr>
+        <p:txBody>
+          <a:bodyPr wrap="square" lIns="0" tIns="0" rIns="0" bIns="0" rtlCol="0" anchor="t"/>
+          <a:lstStyle/>
+          <a:p>
+            <a:pPr indent="0" marL="0">
+              <a:buNone/>
+            </a:pPr>
+            <a:r>
+              <a:rPr lang="en-US" sz="1100" dirty="0">
                 <a:solidFill>
                   <a:srgbClr val="55555C"/>
                 </a:solidFill>
               </a:rPr>
-              <a:t>Meta's Agents Rule of Two, on every agent: the Autopilot, members' agents, the photo reader and the community loop.</a:t>
-            </a:r>
-            <a:endParaRPr lang="en-US" sz="1200" dirty="0"/>
-          </a:p>
-        </p:txBody>
-      </p:sp>
-      <p:sp>
-        <p:nvSpPr>
-          <p:cNvPr id="14" name="Text 11"/>
-          <p:cNvSpPr txBox="1"/>
-          <p:nvPr/>
-        </p:nvSpPr>
-        <p:spPr>
-          <a:xfrm>
-            <a:off x="6172200" y="1691640"/>
-            <a:ext cx="5486400" cy="411480"/>
-          </a:xfrm>
-          <a:prstGeom prst="rect">
-            <a:avLst/>
-          </a:prstGeom>
-          <a:noFill/>
-          <a:ln/>
-        </p:spPr>
-        <p:txBody>
-          <a:bodyPr wrap="square" lIns="0" tIns="0" rIns="0" bIns="0" rtlCol="0" anchor="t"/>
-          <a:lstStyle/>
-          <a:p>
-            <a:pPr indent="0" marL="0">
-              <a:buNone/>
-            </a:pPr>
-            <a:r>
-              <a:rPr lang="en-US" sz="2000" b="1" dirty="0">
-                <a:solidFill>
-                  <a:srgbClr val="0A0A0B"/>
-                </a:solidFill>
-              </a:rPr>
-              <a:t>A disclosure budget</a:t>
-            </a:r>
-            <a:endParaRPr lang="en-US" sz="2000" dirty="0"/>
-          </a:p>
-        </p:txBody>
-      </p:sp>
-      <p:sp>
-        <p:nvSpPr>
-          <p:cNvPr id="15" name="Text 12"/>
-          <p:cNvSpPr txBox="1"/>
-          <p:nvPr/>
-        </p:nvSpPr>
-        <p:spPr>
-          <a:xfrm>
-            <a:off x="6172200" y="2103120"/>
-            <a:ext cx="5394960" cy="548640"/>
-          </a:xfrm>
-          <a:prstGeom prst="rect">
-            <a:avLst/>
-          </a:prstGeom>
-          <a:noFill/>
-          <a:ln/>
-        </p:spPr>
-        <p:txBody>
-          <a:bodyPr wrap="square" lIns="0" tIns="0" rIns="0" bIns="0" rtlCol="0" anchor="t"/>
-          <a:lstStyle/>
-          <a:p>
-            <a:pPr indent="0" marL="0">
-              <a:buNone/>
-            </a:pPr>
-            <a:r>
-              <a:rPr lang="en-US" sz="1250" dirty="0">
+              <a:t>Tokens per model call, by club size: the whole club in the prompt grows with it; Serve's calls stay about 1,500 tokens from 11 to 301 members</a:t>
+            </a:r>
+            <a:endParaRPr lang="en-US" sz="1100" dirty="0"/>
+          </a:p>
+        </p:txBody>
+      </p:sp>
+      <p:pic>
+        <p:nvPicPr>
+          <p:cNvPr id="7" name="Image 1" descr="preencoded.png">    </p:cNvPr>
+          <p:cNvPicPr>
+            <a:picLocks noChangeAspect="1"/>
+          </p:cNvPicPr>
+          <p:nvPr/>
+        </p:nvPicPr>
+        <p:blipFill>
+          <a:blip r:embed="rId2"/>
+          <a:stretch>
+            <a:fillRect/>
+          </a:stretch>
+        </p:blipFill>
+        <p:spPr>
+          <a:xfrm>
+            <a:off x="6263640" y="1691640"/>
+            <a:ext cx="5349240" cy="3429000"/>
+          </a:xfrm>
+          <a:prstGeom prst="rect">
+            <a:avLst/>
+          </a:prstGeom>
+        </p:spPr>
+      </p:pic>
+      <p:sp>
+        <p:nvSpPr>
+          <p:cNvPr id="8" name="Text 3"/>
+          <p:cNvSpPr txBox="1"/>
+          <p:nvPr/>
+        </p:nvSpPr>
+        <p:spPr>
+          <a:xfrm>
+            <a:off x="6263640" y="5212080"/>
+            <a:ext cx="5349240" cy="548640"/>
+          </a:xfrm>
+          <a:prstGeom prst="rect">
+            <a:avLst/>
+          </a:prstGeom>
+          <a:noFill/>
+          <a:ln/>
+        </p:spPr>
+        <p:txBody>
+          <a:bodyPr wrap="square" lIns="0" tIns="0" rIns="0" bIns="0" rtlCol="0" anchor="t"/>
+          <a:lstStyle/>
+          <a:p>
+            <a:pPr indent="0" marL="0">
+              <a:buNone/>
+            </a:pPr>
+            <a:r>
+              <a:rPr lang="en-US" sz="1100" dirty="0">
                 <a:solidFill>
                   <a:srgbClr val="55555C"/>
                 </a:solidFill>
               </a:rPr>
-              <a:t>An agent that keeps asking for games can map out your week. How many of your weekdays it pins down exactly:</a:t>
-            </a:r>
-            <a:endParaRPr lang="en-US" sz="1250" dirty="0"/>
-          </a:p>
-        </p:txBody>
-      </p:sp>
-      <p:graphicFrame>
-        <p:nvGraphicFramePr>
-          <p:cNvPr id="16" name="Chart 0" descr=""/>
-          <p:cNvGraphicFramePr/>
-          <p:nvPr/>
-        </p:nvGraphicFramePr>
-        <p:xfrm>
-          <a:off x="6080760" y="2697480"/>
-          <a:ext cx="5577840" cy="1828800"/>
-        </p:xfrm>
-        <a:graphic xmlns:a="http://schemas.openxmlformats.org/drawingml/2006/main">
-          <a:graphicData uri="http://schemas.openxmlformats.org/drawingml/2006/chart">
-            <c:chart xmlns:c="http://schemas.openxmlformats.org/drawingml/2006/chart" r:id="rId1"/>
-          </a:graphicData>
-        </a:graphic>
-      </p:graphicFrame>
-      <p:sp>
-        <p:nvSpPr>
-          <p:cNvPr id="17" name="Shape 13"/>
-          <p:cNvSpPr/>
-          <p:nvPr/>
-        </p:nvSpPr>
-        <p:spPr>
-          <a:xfrm>
-            <a:off x="6172200" y="4553712"/>
-            <a:ext cx="3291840" cy="329184"/>
-          </a:xfrm>
-          <a:prstGeom prst="roundRect">
-            <a:avLst>
-              <a:gd name="adj" fmla="val 50000"/>
-            </a:avLst>
-          </a:prstGeom>
-          <a:solidFill>
-            <a:srgbClr val="FFFFFF"/>
-          </a:solidFill>
-          <a:ln w="12700">
-            <a:solidFill>
-              <a:srgbClr val="DCDCE0"/>
-            </a:solidFill>
-            <a:prstDash val="solid"/>
-          </a:ln>
-        </p:spPr>
-      </p:sp>
-      <p:sp>
-        <p:nvSpPr>
-          <p:cNvPr id="18" name="Text 14"/>
-          <p:cNvSpPr txBox="1"/>
-          <p:nvPr/>
-        </p:nvSpPr>
-        <p:spPr>
-          <a:xfrm>
-            <a:off x="6172200" y="4553712"/>
-            <a:ext cx="3291840" cy="329184"/>
-          </a:xfrm>
-          <a:prstGeom prst="rect">
-            <a:avLst/>
-          </a:prstGeom>
-          <a:noFill/>
-          <a:ln/>
-        </p:spPr>
-        <p:txBody>
-          <a:bodyPr wrap="square" lIns="0" tIns="0" rIns="0" bIns="0" rtlCol="0" anchor="ctr"/>
-          <a:lstStyle/>
-          <a:p>
-            <a:pPr algn="ctr" indent="0" marL="0">
-              <a:buNone/>
-            </a:pPr>
-            <a:r>
-              <a:rPr lang="en-US" sz="1050" b="1" dirty="0">
-                <a:solidFill>
-                  <a:srgbClr val="55555C"/>
-                </a:solidFill>
-              </a:rPr>
-              <a:t>Simulated prober · technical report 3.13</a:t>
-            </a:r>
-            <a:endParaRPr lang="en-US" sz="1050" dirty="0"/>
-          </a:p>
-        </p:txBody>
-      </p:sp>
-      <p:sp>
-        <p:nvSpPr>
-          <p:cNvPr id="19" name="Shape 15"/>
-          <p:cNvSpPr/>
-          <p:nvPr/>
-        </p:nvSpPr>
-        <p:spPr>
-          <a:xfrm>
-            <a:off x="6172200" y="5074920"/>
-            <a:ext cx="5440680" cy="1143000"/>
-          </a:xfrm>
-          <a:prstGeom prst="roundRect">
-            <a:avLst>
-              <a:gd name="adj" fmla="val 9600"/>
-            </a:avLst>
-          </a:prstGeom>
-          <a:solidFill>
-            <a:srgbClr val="F6F7F8"/>
-          </a:solidFill>
-          <a:ln w="12700">
-            <a:solidFill>
-              <a:srgbClr val="F6F7F8"/>
-            </a:solidFill>
-            <a:prstDash val="solid"/>
-          </a:ln>
-        </p:spPr>
-      </p:sp>
-      <p:sp>
-        <p:nvSpPr>
-          <p:cNvPr id="20" name="Text 16"/>
-          <p:cNvSpPr txBox="1"/>
-          <p:nvPr/>
-        </p:nvSpPr>
-        <p:spPr>
-          <a:xfrm>
-            <a:off x="6355080" y="5074920"/>
-            <a:ext cx="1737360" cy="1143000"/>
-          </a:xfrm>
-          <a:prstGeom prst="rect">
-            <a:avLst/>
-          </a:prstGeom>
-          <a:noFill/>
-          <a:ln/>
-        </p:spPr>
-        <p:txBody>
-          <a:bodyPr wrap="square" lIns="0" tIns="0" rIns="0" bIns="0" rtlCol="0" anchor="ctr"/>
-          <a:lstStyle/>
-          <a:p>
-            <a:pPr indent="0" marL="0">
-              <a:buNone/>
-            </a:pPr>
-            <a:r>
-              <a:rPr lang="en-US" sz="3000" b="1" dirty="0">
-                <a:solidFill>
-                  <a:srgbClr val="0A7F44"/>
-                </a:solidFill>
-              </a:rPr>
-              <a:t>65 / 65</a:t>
-            </a:r>
-            <a:endParaRPr lang="en-US" sz="3000" dirty="0"/>
-          </a:p>
-        </p:txBody>
-      </p:sp>
-      <p:sp>
-        <p:nvSpPr>
-          <p:cNvPr id="21" name="Text 17"/>
-          <p:cNvSpPr txBox="1"/>
-          <p:nvPr/>
-        </p:nvSpPr>
-        <p:spPr>
-          <a:xfrm>
-            <a:off x="8092440" y="5074920"/>
-            <a:ext cx="3383280" cy="1143000"/>
-          </a:xfrm>
-          <a:prstGeom prst="rect">
-            <a:avLst/>
-          </a:prstGeom>
-          <a:noFill/>
-          <a:ln/>
-        </p:spPr>
-        <p:txBody>
-          <a:bodyPr wrap="square" lIns="0" tIns="0" rIns="0" bIns="0" rtlCol="0" anchor="ctr"/>
-          <a:lstStyle/>
-          <a:p>
-            <a:pPr indent="0" marL="0">
-              <a:buNone/>
-            </a:pPr>
-            <a:r>
-              <a:rPr lang="en-US" sz="1150" dirty="0">
-                <a:solidFill>
-                  <a:srgbClr val="0A0A0B"/>
-                </a:solidFill>
-              </a:rPr>
-              <a:t>attacks stopped: injected instructions, poisoned reviews, forged Agent Cards, sock-puppet votes, diffs that book without a yes</a:t>
-            </a:r>
-            <a:endParaRPr lang="en-US" sz="1150" dirty="0"/>
+              <a:t>One member's decision: what each tier costs, and how often it matches the full answer (code, then Llama 3.2 1B, then Muse Glimmer)</a:t>
+            </a:r>
+            <a:endParaRPr lang="en-US" sz="1100" dirty="0"/>
           </a:p>
         </p:txBody>
       </p:sp>
@@ -7611,7 +7778,7 @@
                   <a:srgbClr val="0A7F44"/>
                 </a:solidFill>
               </a:rPr>
-              <a:t>SELF-EVOLVING</a:t>
+              <a:t>SAFE BY DESIGN</a:t>
             </a:r>
             <a:endParaRPr lang="en-US" sz="1300" dirty="0"/>
           </a:p>
@@ -7649,7 +7816,7 @@
                   <a:srgbClr val="0A0A0B"/>
                 </a:solidFill>
               </a:rPr>
-              <a:t>The club makes itself better, safely</a:t>
+              <a:t>No agent holds all three at once</a:t>
             </a:r>
             <a:endParaRPr lang="en-US" sz="3200" dirty="0"/>
           </a:p>
@@ -7663,8 +7830,424 @@
         </p:nvSpPr>
         <p:spPr>
           <a:xfrm>
-            <a:off x="6400800" y="384048"/>
-            <a:ext cx="5212080" cy="329184"/>
+            <a:off x="822960" y="1737360"/>
+            <a:ext cx="2286000" cy="2286000"/>
+          </a:xfrm>
+          <a:prstGeom prst="ellipse">
+            <a:avLst/>
+          </a:prstGeom>
+          <a:solidFill>
+            <a:srgbClr val="FBEAE9">
+              <a:alpha val="65000"/>
+            </a:srgbClr>
+          </a:solidFill>
+          <a:ln w="25400">
+            <a:solidFill>
+              <a:srgbClr val="D1352B"/>
+            </a:solidFill>
+            <a:prstDash val="solid"/>
+          </a:ln>
+        </p:spPr>
+      </p:sp>
+      <p:sp>
+        <p:nvSpPr>
+          <p:cNvPr id="6" name="Shape 3"/>
+          <p:cNvSpPr/>
+          <p:nvPr/>
+        </p:nvSpPr>
+        <p:spPr>
+          <a:xfrm>
+            <a:off x="2606040" y="1737360"/>
+            <a:ext cx="2286000" cy="2286000"/>
+          </a:xfrm>
+          <a:prstGeom prst="ellipse">
+            <a:avLst/>
+          </a:prstGeom>
+          <a:solidFill>
+            <a:srgbClr val="E8F1FD">
+              <a:alpha val="65000"/>
+            </a:srgbClr>
+          </a:solidFill>
+          <a:ln w="25400">
+            <a:solidFill>
+              <a:srgbClr val="0064E0"/>
+            </a:solidFill>
+            <a:prstDash val="solid"/>
+          </a:ln>
+        </p:spPr>
+      </p:sp>
+      <p:sp>
+        <p:nvSpPr>
+          <p:cNvPr id="7" name="Shape 4"/>
+          <p:cNvSpPr/>
+          <p:nvPr/>
+        </p:nvSpPr>
+        <p:spPr>
+          <a:xfrm>
+            <a:off x="1719072" y="3246120"/>
+            <a:ext cx="2286000" cy="2286000"/>
+          </a:xfrm>
+          <a:prstGeom prst="ellipse">
+            <a:avLst/>
+          </a:prstGeom>
+          <a:solidFill>
+            <a:srgbClr val="E9F3EC">
+              <a:alpha val="65000"/>
+            </a:srgbClr>
+          </a:solidFill>
+          <a:ln w="25400">
+            <a:solidFill>
+              <a:srgbClr val="0A7F44"/>
+            </a:solidFill>
+            <a:prstDash val="solid"/>
+          </a:ln>
+        </p:spPr>
+      </p:sp>
+      <p:sp>
+        <p:nvSpPr>
+          <p:cNvPr id="8" name="Text 5"/>
+          <p:cNvSpPr txBox="1"/>
+          <p:nvPr/>
+        </p:nvSpPr>
+        <p:spPr>
+          <a:xfrm>
+            <a:off x="1051560" y="2331720"/>
+            <a:ext cx="1280160" cy="731520"/>
+          </a:xfrm>
+          <a:prstGeom prst="rect">
+            <a:avLst/>
+          </a:prstGeom>
+          <a:noFill/>
+          <a:ln/>
+        </p:spPr>
+        <p:txBody>
+          <a:bodyPr wrap="square" lIns="0" tIns="0" rIns="0" bIns="0" rtlCol="0" anchor="t"/>
+          <a:lstStyle/>
+          <a:p>
+            <a:pPr algn="ctr" indent="0" marL="0">
+              <a:buNone/>
+            </a:pPr>
+            <a:r>
+              <a:rPr lang="en-US" sz="1500" b="1" dirty="0">
+                <a:solidFill>
+                  <a:srgbClr val="0A0A0B"/>
+                </a:solidFill>
+              </a:rPr>
+              <a:t>Untrusted</a:t>
+            </a:r>
+            <a:endParaRPr lang="en-US" sz="1500" dirty="0"/>
+          </a:p>
+          <a:p>
+            <a:pPr algn="ctr" indent="0" marL="0">
+              <a:buNone/>
+            </a:pPr>
+            <a:r>
+              <a:rPr lang="en-US" sz="1500" b="1" dirty="0">
+                <a:solidFill>
+                  <a:srgbClr val="0A0A0B"/>
+                </a:solidFill>
+              </a:rPr>
+              <a:t>input</a:t>
+            </a:r>
+            <a:endParaRPr lang="en-US" sz="1500" dirty="0"/>
+          </a:p>
+        </p:txBody>
+      </p:sp>
+      <p:sp>
+        <p:nvSpPr>
+          <p:cNvPr id="9" name="Text 6"/>
+          <p:cNvSpPr txBox="1"/>
+          <p:nvPr/>
+        </p:nvSpPr>
+        <p:spPr>
+          <a:xfrm>
+            <a:off x="3520440" y="2331720"/>
+            <a:ext cx="1280160" cy="731520"/>
+          </a:xfrm>
+          <a:prstGeom prst="rect">
+            <a:avLst/>
+          </a:prstGeom>
+          <a:noFill/>
+          <a:ln/>
+        </p:spPr>
+        <p:txBody>
+          <a:bodyPr wrap="square" lIns="0" tIns="0" rIns="0" bIns="0" rtlCol="0" anchor="t"/>
+          <a:lstStyle/>
+          <a:p>
+            <a:pPr algn="ctr" indent="0" marL="0">
+              <a:buNone/>
+            </a:pPr>
+            <a:r>
+              <a:rPr lang="en-US" sz="1500" b="1" dirty="0">
+                <a:solidFill>
+                  <a:srgbClr val="0A0A0B"/>
+                </a:solidFill>
+              </a:rPr>
+              <a:t>Private</a:t>
+            </a:r>
+            <a:endParaRPr lang="en-US" sz="1500" dirty="0"/>
+          </a:p>
+          <a:p>
+            <a:pPr algn="ctr" indent="0" marL="0">
+              <a:buNone/>
+            </a:pPr>
+            <a:r>
+              <a:rPr lang="en-US" sz="1500" b="1" dirty="0">
+                <a:solidFill>
+                  <a:srgbClr val="0A0A0B"/>
+                </a:solidFill>
+              </a:rPr>
+              <a:t>data</a:t>
+            </a:r>
+            <a:endParaRPr lang="en-US" sz="1500" dirty="0"/>
+          </a:p>
+        </p:txBody>
+      </p:sp>
+      <p:sp>
+        <p:nvSpPr>
+          <p:cNvPr id="10" name="Text 7"/>
+          <p:cNvSpPr txBox="1"/>
+          <p:nvPr/>
+        </p:nvSpPr>
+        <p:spPr>
+          <a:xfrm>
+            <a:off x="2221992" y="4617720"/>
+            <a:ext cx="1280160" cy="731520"/>
+          </a:xfrm>
+          <a:prstGeom prst="rect">
+            <a:avLst/>
+          </a:prstGeom>
+          <a:noFill/>
+          <a:ln/>
+        </p:spPr>
+        <p:txBody>
+          <a:bodyPr wrap="square" lIns="0" tIns="0" rIns="0" bIns="0" rtlCol="0" anchor="t"/>
+          <a:lstStyle/>
+          <a:p>
+            <a:pPr algn="ctr" indent="0" marL="0">
+              <a:buNone/>
+            </a:pPr>
+            <a:r>
+              <a:rPr lang="en-US" sz="1500" b="1" dirty="0">
+                <a:solidFill>
+                  <a:srgbClr val="0A0A0B"/>
+                </a:solidFill>
+              </a:rPr>
+              <a:t>The power</a:t>
+            </a:r>
+            <a:endParaRPr lang="en-US" sz="1500" dirty="0"/>
+          </a:p>
+          <a:p>
+            <a:pPr algn="ctr" indent="0" marL="0">
+              <a:buNone/>
+            </a:pPr>
+            <a:r>
+              <a:rPr lang="en-US" sz="1500" b="1" dirty="0">
+                <a:solidFill>
+                  <a:srgbClr val="0A0A0B"/>
+                </a:solidFill>
+              </a:rPr>
+              <a:t>to act</a:t>
+            </a:r>
+            <a:endParaRPr lang="en-US" sz="1500" dirty="0"/>
+          </a:p>
+        </p:txBody>
+      </p:sp>
+      <p:sp>
+        <p:nvSpPr>
+          <p:cNvPr id="11" name="Shape 8"/>
+          <p:cNvSpPr/>
+          <p:nvPr/>
+        </p:nvSpPr>
+        <p:spPr>
+          <a:xfrm>
+            <a:off x="2542032" y="2971800"/>
+            <a:ext cx="658368" cy="658368"/>
+          </a:xfrm>
+          <a:prstGeom prst="ellipse">
+            <a:avLst/>
+          </a:prstGeom>
+          <a:solidFill>
+            <a:srgbClr val="FFFFFF"/>
+          </a:solidFill>
+          <a:ln w="38100">
+            <a:solidFill>
+              <a:srgbClr val="D1352B"/>
+            </a:solidFill>
+            <a:prstDash val="solid"/>
+          </a:ln>
+        </p:spPr>
+      </p:sp>
+      <p:sp>
+        <p:nvSpPr>
+          <p:cNvPr id="12" name="Text 9"/>
+          <p:cNvSpPr txBox="1"/>
+          <p:nvPr/>
+        </p:nvSpPr>
+        <p:spPr>
+          <a:xfrm>
+            <a:off x="2542032" y="2971800"/>
+            <a:ext cx="658368" cy="658368"/>
+          </a:xfrm>
+          <a:prstGeom prst="rect">
+            <a:avLst/>
+          </a:prstGeom>
+          <a:noFill/>
+          <a:ln/>
+        </p:spPr>
+        <p:txBody>
+          <a:bodyPr wrap="square" lIns="0" tIns="0" rIns="0" bIns="0" rtlCol="0" anchor="ctr"/>
+          <a:lstStyle/>
+          <a:p>
+            <a:pPr algn="ctr" indent="0" marL="0">
+              <a:buNone/>
+            </a:pPr>
+            <a:r>
+              <a:rPr lang="en-US" sz="3000" b="1" dirty="0">
+                <a:solidFill>
+                  <a:srgbClr val="D1352B"/>
+                </a:solidFill>
+              </a:rPr>
+              <a:t>×</a:t>
+            </a:r>
+            <a:endParaRPr lang="en-US" sz="3000" dirty="0"/>
+          </a:p>
+        </p:txBody>
+      </p:sp>
+      <p:sp>
+        <p:nvSpPr>
+          <p:cNvPr id="13" name="Text 10"/>
+          <p:cNvSpPr txBox="1"/>
+          <p:nvPr/>
+        </p:nvSpPr>
+        <p:spPr>
+          <a:xfrm>
+            <a:off x="548640" y="5715000"/>
+            <a:ext cx="4937760" cy="548640"/>
+          </a:xfrm>
+          <a:prstGeom prst="rect">
+            <a:avLst/>
+          </a:prstGeom>
+          <a:noFill/>
+          <a:ln/>
+        </p:spPr>
+        <p:txBody>
+          <a:bodyPr wrap="square" lIns="0" tIns="0" rIns="0" bIns="0" rtlCol="0" anchor="t"/>
+          <a:lstStyle/>
+          <a:p>
+            <a:pPr indent="0" marL="0">
+              <a:buNone/>
+            </a:pPr>
+            <a:r>
+              <a:rPr lang="en-US" sz="1200" dirty="0">
+                <a:solidFill>
+                  <a:srgbClr val="55555C"/>
+                </a:solidFill>
+              </a:rPr>
+              <a:t>Meta's Agents Rule of Two, on every agent: the Autopilot, members' agents, the photo reader and the community loop.</a:t>
+            </a:r>
+            <a:endParaRPr lang="en-US" sz="1200" dirty="0"/>
+          </a:p>
+        </p:txBody>
+      </p:sp>
+      <p:sp>
+        <p:nvSpPr>
+          <p:cNvPr id="14" name="Text 11"/>
+          <p:cNvSpPr txBox="1"/>
+          <p:nvPr/>
+        </p:nvSpPr>
+        <p:spPr>
+          <a:xfrm>
+            <a:off x="6172200" y="1691640"/>
+            <a:ext cx="5486400" cy="411480"/>
+          </a:xfrm>
+          <a:prstGeom prst="rect">
+            <a:avLst/>
+          </a:prstGeom>
+          <a:noFill/>
+          <a:ln/>
+        </p:spPr>
+        <p:txBody>
+          <a:bodyPr wrap="square" lIns="0" tIns="0" rIns="0" bIns="0" rtlCol="0" anchor="t"/>
+          <a:lstStyle/>
+          <a:p>
+            <a:pPr indent="0" marL="0">
+              <a:buNone/>
+            </a:pPr>
+            <a:r>
+              <a:rPr lang="en-US" sz="2000" b="1" dirty="0">
+                <a:solidFill>
+                  <a:srgbClr val="0A0A0B"/>
+                </a:solidFill>
+              </a:rPr>
+              <a:t>A disclosure budget</a:t>
+            </a:r>
+            <a:endParaRPr lang="en-US" sz="2000" dirty="0"/>
+          </a:p>
+        </p:txBody>
+      </p:sp>
+      <p:sp>
+        <p:nvSpPr>
+          <p:cNvPr id="15" name="Text 12"/>
+          <p:cNvSpPr txBox="1"/>
+          <p:nvPr/>
+        </p:nvSpPr>
+        <p:spPr>
+          <a:xfrm>
+            <a:off x="6172200" y="2103120"/>
+            <a:ext cx="5394960" cy="548640"/>
+          </a:xfrm>
+          <a:prstGeom prst="rect">
+            <a:avLst/>
+          </a:prstGeom>
+          <a:noFill/>
+          <a:ln/>
+        </p:spPr>
+        <p:txBody>
+          <a:bodyPr wrap="square" lIns="0" tIns="0" rIns="0" bIns="0" rtlCol="0" anchor="t"/>
+          <a:lstStyle/>
+          <a:p>
+            <a:pPr indent="0" marL="0">
+              <a:buNone/>
+            </a:pPr>
+            <a:r>
+              <a:rPr lang="en-US" sz="1250" dirty="0">
+                <a:solidFill>
+                  <a:srgbClr val="55555C"/>
+                </a:solidFill>
+              </a:rPr>
+              <a:t>An agent that keeps asking for games can map out your week. How many of your weekdays it pins down exactly:</a:t>
+            </a:r>
+            <a:endParaRPr lang="en-US" sz="1250" dirty="0"/>
+          </a:p>
+        </p:txBody>
+      </p:sp>
+      <p:graphicFrame>
+        <p:nvGraphicFramePr>
+          <p:cNvPr id="16" name="Chart 0" descr=""/>
+          <p:cNvGraphicFramePr/>
+          <p:nvPr/>
+        </p:nvGraphicFramePr>
+        <p:xfrm>
+          <a:off x="6080760" y="2697480"/>
+          <a:ext cx="5577840" cy="1828800"/>
+        </p:xfrm>
+        <a:graphic xmlns:a="http://schemas.openxmlformats.org/drawingml/2006/main">
+          <a:graphicData uri="http://schemas.openxmlformats.org/drawingml/2006/chart">
+            <c:chart xmlns:c="http://schemas.openxmlformats.org/drawingml/2006/chart" r:id="rId1"/>
+          </a:graphicData>
+        </a:graphic>
+      </p:graphicFrame>
+      <p:sp>
+        <p:nvSpPr>
+          <p:cNvPr id="17" name="Shape 13"/>
+          <p:cNvSpPr/>
+          <p:nvPr/>
+        </p:nvSpPr>
+        <p:spPr>
+          <a:xfrm>
+            <a:off x="6172200" y="4553712"/>
+            <a:ext cx="3291840" cy="329184"/>
           </a:xfrm>
           <a:prstGeom prst="roundRect">
             <a:avLst>
@@ -7684,14 +8267,14 @@
       </p:sp>
       <p:sp>
         <p:nvSpPr>
-          <p:cNvPr id="6" name="Text 3"/>
-          <p:cNvSpPr txBox="1"/>
-          <p:nvPr/>
-        </p:nvSpPr>
-        <p:spPr>
-          <a:xfrm>
-            <a:off x="6400800" y="384048"/>
-            <a:ext cx="5212080" cy="329184"/>
+          <p:cNvPr id="18" name="Text 14"/>
+          <p:cNvSpPr txBox="1"/>
+          <p:nvPr/>
+        </p:nvSpPr>
+        <p:spPr>
+          <a:xfrm>
+            <a:off x="6172200" y="4553712"/>
+            <a:ext cx="3291840" cy="329184"/>
           </a:xfrm>
           <a:prstGeom prst="rect">
             <a:avLst/>
@@ -7712,7 +8295,7 @@
                   <a:srgbClr val="55555C"/>
                 </a:solidFill>
               </a:rPr>
-              <a:t>Simulated club (seed 7) · the pipeline, gates and rollback are real</a:t>
+              <a:t>Simulated prober · technical report 3.13</a:t>
             </a:r>
             <a:endParaRPr lang="en-US" sz="1050" dirty="0"/>
           </a:p>
@@ -7720,26 +8303,26 @@
       </p:sp>
       <p:sp>
         <p:nvSpPr>
-          <p:cNvPr id="7" name="Shape 4"/>
+          <p:cNvPr id="19" name="Shape 15"/>
           <p:cNvSpPr/>
           <p:nvPr/>
         </p:nvSpPr>
         <p:spPr>
           <a:xfrm>
-            <a:off x="548640" y="1691640"/>
-            <a:ext cx="2057400" cy="1600200"/>
+            <a:off x="6172200" y="5074920"/>
+            <a:ext cx="5440680" cy="1143000"/>
           </a:xfrm>
           <a:prstGeom prst="roundRect">
             <a:avLst>
-              <a:gd name="adj" fmla="val 6857"/>
+              <a:gd name="adj" fmla="val 9600"/>
             </a:avLst>
           </a:prstGeom>
           <a:solidFill>
-            <a:srgbClr val="FFFFFF"/>
+            <a:srgbClr val="F6F7F8"/>
           </a:solidFill>
           <a:ln w="12700">
             <a:solidFill>
-              <a:srgbClr val="DCDCE0"/>
+              <a:srgbClr val="F6F7F8"/>
             </a:solidFill>
             <a:prstDash val="solid"/>
           </a:ln>
@@ -7747,1669 +8330,73 @@
       </p:sp>
       <p:sp>
         <p:nvSpPr>
-          <p:cNvPr id="8" name="Text 5"/>
-          <p:cNvSpPr txBox="1"/>
-          <p:nvPr/>
-        </p:nvSpPr>
-        <p:spPr>
-          <a:xfrm>
-            <a:off x="713232" y="1828800"/>
-            <a:ext cx="1737360" cy="228600"/>
-          </a:xfrm>
-          <a:prstGeom prst="rect">
-            <a:avLst/>
-          </a:prstGeom>
-          <a:noFill/>
-          <a:ln/>
-        </p:spPr>
-        <p:txBody>
-          <a:bodyPr wrap="square" lIns="0" tIns="0" rIns="0" bIns="0" rtlCol="0" anchor="t"/>
-          <a:lstStyle/>
-          <a:p>
-            <a:pPr indent="0" marL="0">
-              <a:buNone/>
-            </a:pPr>
-            <a:r>
-              <a:rPr lang="en-US" sz="1050" b="1" dirty="0">
+          <p:cNvPr id="20" name="Text 16"/>
+          <p:cNvSpPr txBox="1"/>
+          <p:nvPr/>
+        </p:nvSpPr>
+        <p:spPr>
+          <a:xfrm>
+            <a:off x="6355080" y="5074920"/>
+            <a:ext cx="1737360" cy="1143000"/>
+          </a:xfrm>
+          <a:prstGeom prst="rect">
+            <a:avLst/>
+          </a:prstGeom>
+          <a:noFill/>
+          <a:ln/>
+        </p:spPr>
+        <p:txBody>
+          <a:bodyPr wrap="square" lIns="0" tIns="0" rIns="0" bIns="0" rtlCol="0" anchor="ctr"/>
+          <a:lstStyle/>
+          <a:p>
+            <a:pPr indent="0" marL="0">
+              <a:buNone/>
+            </a:pPr>
+            <a:r>
+              <a:rPr lang="en-US" sz="3000" b="1" dirty="0">
                 <a:solidFill>
                   <a:srgbClr val="0A7F44"/>
                 </a:solidFill>
               </a:rPr>
-              <a:t>1 · ASK</a:t>
-            </a:r>
-            <a:endParaRPr lang="en-US" sz="1050" dirty="0"/>
-          </a:p>
-        </p:txBody>
-      </p:sp>
-      <p:sp>
-        <p:nvSpPr>
-          <p:cNvPr id="9" name="Text 6"/>
-          <p:cNvSpPr txBox="1"/>
-          <p:nvPr/>
-        </p:nvSpPr>
-        <p:spPr>
-          <a:xfrm>
-            <a:off x="713232" y="2084832"/>
-            <a:ext cx="1783080" cy="566928"/>
-          </a:xfrm>
-          <a:prstGeom prst="rect">
-            <a:avLst/>
-          </a:prstGeom>
-          <a:noFill/>
-          <a:ln/>
-        </p:spPr>
-        <p:txBody>
-          <a:bodyPr wrap="square" lIns="0" tIns="0" rIns="0" bIns="0" rtlCol="0" anchor="t"/>
-          <a:lstStyle/>
-          <a:p>
-            <a:pPr indent="0" marL="0">
-              <a:buNone/>
-            </a:pPr>
-            <a:r>
-              <a:rPr lang="en-US" sz="1500" b="1" dirty="0">
+              <a:t>65 / 65</a:t>
+            </a:r>
+            <a:endParaRPr lang="en-US" sz="3000" dirty="0"/>
+          </a:p>
+        </p:txBody>
+      </p:sp>
+      <p:sp>
+        <p:nvSpPr>
+          <p:cNvPr id="21" name="Text 17"/>
+          <p:cNvSpPr txBox="1"/>
+          <p:nvPr/>
+        </p:nvSpPr>
+        <p:spPr>
+          <a:xfrm>
+            <a:off x="8092440" y="5074920"/>
+            <a:ext cx="3383280" cy="1143000"/>
+          </a:xfrm>
+          <a:prstGeom prst="rect">
+            <a:avLst/>
+          </a:prstGeom>
+          <a:noFill/>
+          <a:ln/>
+        </p:spPr>
+        <p:txBody>
+          <a:bodyPr wrap="square" lIns="0" tIns="0" rIns="0" bIns="0" rtlCol="0" anchor="ctr"/>
+          <a:lstStyle/>
+          <a:p>
+            <a:pPr indent="0" marL="0">
+              <a:buNone/>
+            </a:pPr>
+            <a:r>
+              <a:rPr lang="en-US" sz="1150" dirty="0">
                 <a:solidFill>
                   <a:srgbClr val="0A0A0B"/>
                 </a:solidFill>
               </a:rPr>
-              <a:t>Members' ideas</a:t>
-            </a:r>
-            <a:endParaRPr lang="en-US" sz="1500" dirty="0"/>
-          </a:p>
-        </p:txBody>
-      </p:sp>
-      <p:sp>
-        <p:nvSpPr>
-          <p:cNvPr id="10" name="Text 7"/>
-          <p:cNvSpPr txBox="1"/>
-          <p:nvPr/>
-        </p:nvSpPr>
-        <p:spPr>
-          <a:xfrm>
-            <a:off x="713232" y="2651760"/>
-            <a:ext cx="1783080" cy="594360"/>
-          </a:xfrm>
-          <a:prstGeom prst="rect">
-            <a:avLst/>
-          </a:prstGeom>
-          <a:noFill/>
-          <a:ln/>
-        </p:spPr>
-        <p:txBody>
-          <a:bodyPr wrap="square" lIns="0" tIns="0" rIns="0" bIns="0" rtlCol="0" anchor="t"/>
-          <a:lstStyle/>
-          <a:p>
-            <a:pPr indent="0" marL="0">
-              <a:buNone/>
-            </a:pPr>
-            <a:r>
-              <a:rPr lang="en-US" sz="1100" dirty="0">
-                <a:solidFill>
-                  <a:srgbClr val="55555C"/>
-                </a:solidFill>
-              </a:rPr>
-              <a:t>"/idea" in Messenger, or thumbs up and down</a:t>
-            </a:r>
-            <a:endParaRPr lang="en-US" sz="1100" dirty="0"/>
-          </a:p>
-        </p:txBody>
-      </p:sp>
-      <p:sp>
-        <p:nvSpPr>
-          <p:cNvPr id="11" name="Shape 8"/>
-          <p:cNvSpPr/>
-          <p:nvPr/>
-        </p:nvSpPr>
-        <p:spPr>
-          <a:xfrm>
-            <a:off x="2624328" y="2487168"/>
-            <a:ext cx="146304" cy="0"/>
-          </a:xfrm>
-          <a:prstGeom prst="line">
-            <a:avLst/>
-          </a:prstGeom>
-          <a:noFill/>
-          <a:ln w="22225">
-            <a:solidFill>
-              <a:srgbClr val="8A8A92"/>
-            </a:solidFill>
-            <a:prstDash val="solid"/>
-            <a:tailEnd type="triangle"/>
-          </a:ln>
-        </p:spPr>
-      </p:sp>
-      <p:sp>
-        <p:nvSpPr>
-          <p:cNvPr id="12" name="Shape 9"/>
-          <p:cNvSpPr/>
-          <p:nvPr/>
-        </p:nvSpPr>
-        <p:spPr>
-          <a:xfrm>
-            <a:off x="2788920" y="1691640"/>
-            <a:ext cx="2057400" cy="1600200"/>
-          </a:xfrm>
-          <a:prstGeom prst="roundRect">
-            <a:avLst>
-              <a:gd name="adj" fmla="val 6857"/>
-            </a:avLst>
-          </a:prstGeom>
-          <a:solidFill>
-            <a:srgbClr val="FFFFFF"/>
-          </a:solidFill>
-          <a:ln w="12700">
-            <a:solidFill>
-              <a:srgbClr val="DCDCE0"/>
-            </a:solidFill>
-            <a:prstDash val="solid"/>
-          </a:ln>
-        </p:spPr>
-      </p:sp>
-      <p:sp>
-        <p:nvSpPr>
-          <p:cNvPr id="13" name="Text 10"/>
-          <p:cNvSpPr txBox="1"/>
-          <p:nvPr/>
-        </p:nvSpPr>
-        <p:spPr>
-          <a:xfrm>
-            <a:off x="2953512" y="1828800"/>
-            <a:ext cx="1737360" cy="228600"/>
-          </a:xfrm>
-          <a:prstGeom prst="rect">
-            <a:avLst/>
-          </a:prstGeom>
-          <a:noFill/>
-          <a:ln/>
-        </p:spPr>
-        <p:txBody>
-          <a:bodyPr wrap="square" lIns="0" tIns="0" rIns="0" bIns="0" rtlCol="0" anchor="t"/>
-          <a:lstStyle/>
-          <a:p>
-            <a:pPr indent="0" marL="0">
-              <a:buNone/>
-            </a:pPr>
-            <a:r>
-              <a:rPr lang="en-US" sz="1050" b="1" dirty="0">
-                <a:solidFill>
-                  <a:srgbClr val="0A7F44"/>
-                </a:solidFill>
-              </a:rPr>
-              <a:t>2 · GROUP</a:t>
-            </a:r>
-            <a:endParaRPr lang="en-US" sz="1050" dirty="0"/>
-          </a:p>
-        </p:txBody>
-      </p:sp>
-      <p:sp>
-        <p:nvSpPr>
-          <p:cNvPr id="14" name="Text 11"/>
-          <p:cNvSpPr txBox="1"/>
-          <p:nvPr/>
-        </p:nvSpPr>
-        <p:spPr>
-          <a:xfrm>
-            <a:off x="2953512" y="2084832"/>
-            <a:ext cx="1783080" cy="566928"/>
-          </a:xfrm>
-          <a:prstGeom prst="rect">
-            <a:avLst/>
-          </a:prstGeom>
-          <a:noFill/>
-          <a:ln/>
-        </p:spPr>
-        <p:txBody>
-          <a:bodyPr wrap="square" lIns="0" tIns="0" rIns="0" bIns="0" rtlCol="0" anchor="t"/>
-          <a:lstStyle/>
-          <a:p>
-            <a:pPr indent="0" marL="0">
-              <a:buNone/>
-            </a:pPr>
-            <a:r>
-              <a:rPr lang="en-US" sz="1500" b="1" dirty="0">
-                <a:solidFill>
-                  <a:srgbClr val="0A0A0B"/>
-                </a:solidFill>
-              </a:rPr>
-              <a:t>Meta's DRAMA</a:t>
-            </a:r>
-            <a:endParaRPr lang="en-US" sz="1500" dirty="0"/>
-          </a:p>
-        </p:txBody>
-      </p:sp>
-      <p:sp>
-        <p:nvSpPr>
-          <p:cNvPr id="15" name="Text 12"/>
-          <p:cNvSpPr txBox="1"/>
-          <p:nvPr/>
-        </p:nvSpPr>
-        <p:spPr>
-          <a:xfrm>
-            <a:off x="2953512" y="2651760"/>
-            <a:ext cx="1783080" cy="594360"/>
-          </a:xfrm>
-          <a:prstGeom prst="rect">
-            <a:avLst/>
-          </a:prstGeom>
-          <a:noFill/>
-          <a:ln/>
-        </p:spPr>
-        <p:txBody>
-          <a:bodyPr wrap="square" lIns="0" tIns="0" rIns="0" bIns="0" rtlCol="0" anchor="t"/>
-          <a:lstStyle/>
-          <a:p>
-            <a:pPr indent="0" marL="0">
-              <a:buNone/>
-            </a:pPr>
-            <a:r>
-              <a:rPr lang="en-US" sz="1100" dirty="0">
-                <a:solidFill>
-                  <a:srgbClr val="55555C"/>
-                </a:solidFill>
-              </a:rPr>
-              <a:t>Groups ideas by meaning; an idea shows at 5 members</a:t>
-            </a:r>
-            <a:endParaRPr lang="en-US" sz="1100" dirty="0"/>
-          </a:p>
-        </p:txBody>
-      </p:sp>
-      <p:sp>
-        <p:nvSpPr>
-          <p:cNvPr id="16" name="Shape 13"/>
-          <p:cNvSpPr/>
-          <p:nvPr/>
-        </p:nvSpPr>
-        <p:spPr>
-          <a:xfrm>
-            <a:off x="4864608" y="2487168"/>
-            <a:ext cx="146304" cy="0"/>
-          </a:xfrm>
-          <a:prstGeom prst="line">
-            <a:avLst/>
-          </a:prstGeom>
-          <a:noFill/>
-          <a:ln w="22225">
-            <a:solidFill>
-              <a:srgbClr val="8A8A92"/>
-            </a:solidFill>
-            <a:prstDash val="solid"/>
-            <a:tailEnd type="triangle"/>
-          </a:ln>
-        </p:spPr>
-      </p:sp>
-      <p:sp>
-        <p:nvSpPr>
-          <p:cNvPr id="17" name="Shape 14"/>
-          <p:cNvSpPr/>
-          <p:nvPr/>
-        </p:nvSpPr>
-        <p:spPr>
-          <a:xfrm>
-            <a:off x="5029200" y="1691640"/>
-            <a:ext cx="2057400" cy="1600200"/>
-          </a:xfrm>
-          <a:prstGeom prst="roundRect">
-            <a:avLst>
-              <a:gd name="adj" fmla="val 6857"/>
-            </a:avLst>
-          </a:prstGeom>
-          <a:solidFill>
-            <a:srgbClr val="FFFFFF"/>
-          </a:solidFill>
-          <a:ln w="12700">
-            <a:solidFill>
-              <a:srgbClr val="DCDCE0"/>
-            </a:solidFill>
-            <a:prstDash val="solid"/>
-          </a:ln>
-        </p:spPr>
-      </p:sp>
-      <p:sp>
-        <p:nvSpPr>
-          <p:cNvPr id="18" name="Text 15"/>
-          <p:cNvSpPr txBox="1"/>
-          <p:nvPr/>
-        </p:nvSpPr>
-        <p:spPr>
-          <a:xfrm>
-            <a:off x="5193792" y="1828800"/>
-            <a:ext cx="1737360" cy="228600"/>
-          </a:xfrm>
-          <a:prstGeom prst="rect">
-            <a:avLst/>
-          </a:prstGeom>
-          <a:noFill/>
-          <a:ln/>
-        </p:spPr>
-        <p:txBody>
-          <a:bodyPr wrap="square" lIns="0" tIns="0" rIns="0" bIns="0" rtlCol="0" anchor="t"/>
-          <a:lstStyle/>
-          <a:p>
-            <a:pPr indent="0" marL="0">
-              <a:buNone/>
-            </a:pPr>
-            <a:r>
-              <a:rPr lang="en-US" sz="1050" b="1" dirty="0">
-                <a:solidFill>
-                  <a:srgbClr val="0A7F44"/>
-                </a:solidFill>
-              </a:rPr>
-              <a:t>3 · VOTE</a:t>
-            </a:r>
-            <a:endParaRPr lang="en-US" sz="1050" dirty="0"/>
-          </a:p>
-        </p:txBody>
-      </p:sp>
-      <p:sp>
-        <p:nvSpPr>
-          <p:cNvPr id="19" name="Text 16"/>
-          <p:cNvSpPr txBox="1"/>
-          <p:nvPr/>
-        </p:nvSpPr>
-        <p:spPr>
-          <a:xfrm>
-            <a:off x="5193792" y="2084832"/>
-            <a:ext cx="1783080" cy="566928"/>
-          </a:xfrm>
-          <a:prstGeom prst="rect">
-            <a:avLst/>
-          </a:prstGeom>
-          <a:noFill/>
-          <a:ln/>
-        </p:spPr>
-        <p:txBody>
-          <a:bodyPr wrap="square" lIns="0" tIns="0" rIns="0" bIns="0" rtlCol="0" anchor="t"/>
-          <a:lstStyle/>
-          <a:p>
-            <a:pPr indent="0" marL="0">
-              <a:buNone/>
-            </a:pPr>
-            <a:r>
-              <a:rPr lang="en-US" sz="1500" b="1" dirty="0">
-                <a:solidFill>
-                  <a:srgbClr val="0A0A0B"/>
-                </a:solidFill>
-              </a:rPr>
-              <a:t>Quadratic votes</a:t>
-            </a:r>
-            <a:endParaRPr lang="en-US" sz="1500" dirty="0"/>
-          </a:p>
-        </p:txBody>
-      </p:sp>
-      <p:sp>
-        <p:nvSpPr>
-          <p:cNvPr id="20" name="Text 17"/>
-          <p:cNvSpPr txBox="1"/>
-          <p:nvPr/>
-        </p:nvSpPr>
-        <p:spPr>
-          <a:xfrm>
-            <a:off x="5193792" y="2651760"/>
-            <a:ext cx="1783080" cy="594360"/>
-          </a:xfrm>
-          <a:prstGeom prst="rect">
-            <a:avLst/>
-          </a:prstGeom>
-          <a:noFill/>
-          <a:ln/>
-        </p:spPr>
-        <p:txBody>
-          <a:bodyPr wrap="square" lIns="0" tIns="0" rIns="0" bIns="0" rtlCol="0" anchor="t"/>
-          <a:lstStyle/>
-          <a:p>
-            <a:pPr indent="0" marL="0">
-              <a:buNone/>
-            </a:pPr>
-            <a:r>
-              <a:rPr lang="en-US" sz="1100" dirty="0">
-                <a:solidFill>
-                  <a:srgbClr val="55555C"/>
-                </a:solidFill>
-              </a:rPr>
-              <a:t>9 credits a month; n votes cost n²</a:t>
-            </a:r>
-            <a:endParaRPr lang="en-US" sz="1100" dirty="0"/>
-          </a:p>
-        </p:txBody>
-      </p:sp>
-      <p:sp>
-        <p:nvSpPr>
-          <p:cNvPr id="21" name="Shape 18"/>
-          <p:cNvSpPr/>
-          <p:nvPr/>
-        </p:nvSpPr>
-        <p:spPr>
-          <a:xfrm>
-            <a:off x="7104888" y="2487168"/>
-            <a:ext cx="146304" cy="0"/>
-          </a:xfrm>
-          <a:prstGeom prst="line">
-            <a:avLst/>
-          </a:prstGeom>
-          <a:noFill/>
-          <a:ln w="22225">
-            <a:solidFill>
-              <a:srgbClr val="8A8A92"/>
-            </a:solidFill>
-            <a:prstDash val="solid"/>
-            <a:tailEnd type="triangle"/>
-          </a:ln>
-        </p:spPr>
-      </p:sp>
-      <p:sp>
-        <p:nvSpPr>
-          <p:cNvPr id="22" name="Shape 19"/>
-          <p:cNvSpPr/>
-          <p:nvPr/>
-        </p:nvSpPr>
-        <p:spPr>
-          <a:xfrm>
-            <a:off x="7269480" y="1691640"/>
-            <a:ext cx="2057400" cy="1600200"/>
-          </a:xfrm>
-          <a:prstGeom prst="roundRect">
-            <a:avLst>
-              <a:gd name="adj" fmla="val 6857"/>
-            </a:avLst>
-          </a:prstGeom>
-          <a:solidFill>
-            <a:srgbClr val="FFFFFF"/>
-          </a:solidFill>
-          <a:ln w="12700">
-            <a:solidFill>
-              <a:srgbClr val="DCDCE0"/>
-            </a:solidFill>
-            <a:prstDash val="solid"/>
-          </a:ln>
-        </p:spPr>
-      </p:sp>
-      <p:sp>
-        <p:nvSpPr>
-          <p:cNvPr id="23" name="Text 20"/>
-          <p:cNvSpPr txBox="1"/>
-          <p:nvPr/>
-        </p:nvSpPr>
-        <p:spPr>
-          <a:xfrm>
-            <a:off x="7434072" y="1828800"/>
-            <a:ext cx="1737360" cy="228600"/>
-          </a:xfrm>
-          <a:prstGeom prst="rect">
-            <a:avLst/>
-          </a:prstGeom>
-          <a:noFill/>
-          <a:ln/>
-        </p:spPr>
-        <p:txBody>
-          <a:bodyPr wrap="square" lIns="0" tIns="0" rIns="0" bIns="0" rtlCol="0" anchor="t"/>
-          <a:lstStyle/>
-          <a:p>
-            <a:pPr indent="0" marL="0">
-              <a:buNone/>
-            </a:pPr>
-            <a:r>
-              <a:rPr lang="en-US" sz="1050" b="1" dirty="0">
-                <a:solidFill>
-                  <a:srgbClr val="0A7F44"/>
-                </a:solidFill>
-              </a:rPr>
-              <a:t>4 · SPEC</a:t>
-            </a:r>
-            <a:endParaRPr lang="en-US" sz="1050" dirty="0"/>
-          </a:p>
-        </p:txBody>
-      </p:sp>
-      <p:sp>
-        <p:nvSpPr>
-          <p:cNvPr id="24" name="Text 21"/>
-          <p:cNvSpPr txBox="1"/>
-          <p:nvPr/>
-        </p:nvSpPr>
-        <p:spPr>
-          <a:xfrm>
-            <a:off x="7434072" y="2084832"/>
-            <a:ext cx="1783080" cy="566928"/>
-          </a:xfrm>
-          <a:prstGeom prst="rect">
-            <a:avLst/>
-          </a:prstGeom>
-          <a:noFill/>
-          <a:ln/>
-        </p:spPr>
-        <p:txBody>
-          <a:bodyPr wrap="square" lIns="0" tIns="0" rIns="0" bIns="0" rtlCol="0" anchor="t"/>
-          <a:lstStyle/>
-          <a:p>
-            <a:pPr indent="0" marL="0">
-              <a:buNone/>
-            </a:pPr>
-            <a:r>
-              <a:rPr lang="en-US" sz="1500" b="1" dirty="0">
-                <a:solidFill>
-                  <a:srgbClr val="0A0A0B"/>
-                </a:solidFill>
-              </a:rPr>
-              <a:t>Muse Glimmer drafts it</a:t>
-            </a:r>
-            <a:endParaRPr lang="en-US" sz="1500" dirty="0"/>
-          </a:p>
-        </p:txBody>
-      </p:sp>
-      <p:sp>
-        <p:nvSpPr>
-          <p:cNvPr id="25" name="Text 22"/>
-          <p:cNvSpPr txBox="1"/>
-          <p:nvPr/>
-        </p:nvSpPr>
-        <p:spPr>
-          <a:xfrm>
-            <a:off x="7434072" y="2651760"/>
-            <a:ext cx="1783080" cy="594360"/>
-          </a:xfrm>
-          <a:prstGeom prst="rect">
-            <a:avLst/>
-          </a:prstGeom>
-          <a:noFill/>
-          <a:ln/>
-        </p:spPr>
-        <p:txBody>
-          <a:bodyPr wrap="square" lIns="0" tIns="0" rIns="0" bIns="0" rtlCol="0" anchor="t"/>
-          <a:lstStyle/>
-          <a:p>
-            <a:pPr indent="0" marL="0">
-              <a:buNone/>
-            </a:pPr>
-            <a:r>
-              <a:rPr lang="en-US" sz="1100" dirty="0">
-                <a:solidFill>
-                  <a:srgbClr val="55555C"/>
-                </a:solidFill>
-              </a:rPr>
-              <a:t>A person approves the spec</a:t>
-            </a:r>
-            <a:endParaRPr lang="en-US" sz="1100" dirty="0"/>
-          </a:p>
-        </p:txBody>
-      </p:sp>
-      <p:sp>
-        <p:nvSpPr>
-          <p:cNvPr id="26" name="Shape 23"/>
-          <p:cNvSpPr/>
-          <p:nvPr/>
-        </p:nvSpPr>
-        <p:spPr>
-          <a:xfrm>
-            <a:off x="9345168" y="2487168"/>
-            <a:ext cx="146304" cy="0"/>
-          </a:xfrm>
-          <a:prstGeom prst="line">
-            <a:avLst/>
-          </a:prstGeom>
-          <a:noFill/>
-          <a:ln w="22225">
-            <a:solidFill>
-              <a:srgbClr val="8A8A92"/>
-            </a:solidFill>
-            <a:prstDash val="solid"/>
-            <a:tailEnd type="triangle"/>
-          </a:ln>
-        </p:spPr>
-      </p:sp>
-      <p:sp>
-        <p:nvSpPr>
-          <p:cNvPr id="27" name="Shape 24"/>
-          <p:cNvSpPr/>
-          <p:nvPr/>
-        </p:nvSpPr>
-        <p:spPr>
-          <a:xfrm>
-            <a:off x="9509760" y="1691640"/>
-            <a:ext cx="2057400" cy="1600200"/>
-          </a:xfrm>
-          <a:prstGeom prst="roundRect">
-            <a:avLst>
-              <a:gd name="adj" fmla="val 6857"/>
-            </a:avLst>
-          </a:prstGeom>
-          <a:solidFill>
-            <a:srgbClr val="FFFFFF"/>
-          </a:solidFill>
-          <a:ln w="12700">
-            <a:solidFill>
-              <a:srgbClr val="DCDCE0"/>
-            </a:solidFill>
-            <a:prstDash val="solid"/>
-          </a:ln>
-        </p:spPr>
-      </p:sp>
-      <p:sp>
-        <p:nvSpPr>
-          <p:cNvPr id="28" name="Text 25"/>
-          <p:cNvSpPr txBox="1"/>
-          <p:nvPr/>
-        </p:nvSpPr>
-        <p:spPr>
-          <a:xfrm>
-            <a:off x="9674352" y="1828800"/>
-            <a:ext cx="1737360" cy="228600"/>
-          </a:xfrm>
-          <a:prstGeom prst="rect">
-            <a:avLst/>
-          </a:prstGeom>
-          <a:noFill/>
-          <a:ln/>
-        </p:spPr>
-        <p:txBody>
-          <a:bodyPr wrap="square" lIns="0" tIns="0" rIns="0" bIns="0" rtlCol="0" anchor="t"/>
-          <a:lstStyle/>
-          <a:p>
-            <a:pPr indent="0" marL="0">
-              <a:buNone/>
-            </a:pPr>
-            <a:r>
-              <a:rPr lang="en-US" sz="1050" b="1" dirty="0">
-                <a:solidFill>
-                  <a:srgbClr val="0A7F44"/>
-                </a:solidFill>
-              </a:rPr>
-              <a:t>5 · BUILD</a:t>
-            </a:r>
-            <a:endParaRPr lang="en-US" sz="1050" dirty="0"/>
-          </a:p>
-        </p:txBody>
-      </p:sp>
-      <p:sp>
-        <p:nvSpPr>
-          <p:cNvPr id="29" name="Text 26"/>
-          <p:cNvSpPr txBox="1"/>
-          <p:nvPr/>
-        </p:nvSpPr>
-        <p:spPr>
-          <a:xfrm>
-            <a:off x="9674352" y="2084832"/>
-            <a:ext cx="1783080" cy="566928"/>
-          </a:xfrm>
-          <a:prstGeom prst="rect">
-            <a:avLst/>
-          </a:prstGeom>
-          <a:noFill/>
-          <a:ln/>
-        </p:spPr>
-        <p:txBody>
-          <a:bodyPr wrap="square" lIns="0" tIns="0" rIns="0" bIns="0" rtlCol="0" anchor="t"/>
-          <a:lstStyle/>
-          <a:p>
-            <a:pPr indent="0" marL="0">
-              <a:buNone/>
-            </a:pPr>
-            <a:r>
-              <a:rPr lang="en-US" sz="1500" b="1" dirty="0">
-                <a:solidFill>
-                  <a:srgbClr val="0A0A0B"/>
-                </a:solidFill>
-              </a:rPr>
-              <a:t>A coding agent</a:t>
-            </a:r>
-            <a:endParaRPr lang="en-US" sz="1500" dirty="0"/>
-          </a:p>
-        </p:txBody>
-      </p:sp>
-      <p:sp>
-        <p:nvSpPr>
-          <p:cNvPr id="30" name="Text 27"/>
-          <p:cNvSpPr txBox="1"/>
-          <p:nvPr/>
-        </p:nvSpPr>
-        <p:spPr>
-          <a:xfrm>
-            <a:off x="9674352" y="2651760"/>
-            <a:ext cx="1783080" cy="594360"/>
-          </a:xfrm>
-          <a:prstGeom prst="rect">
-            <a:avLst/>
-          </a:prstGeom>
-          <a:noFill/>
-          <a:ln/>
-        </p:spPr>
-        <p:txBody>
-          <a:bodyPr wrap="square" lIns="0" tIns="0" rIns="0" bIns="0" rtlCol="0" anchor="t"/>
-          <a:lstStyle/>
-          <a:p>
-            <a:pPr indent="0" marL="0">
-              <a:buNone/>
-            </a:pPr>
-            <a:r>
-              <a:rPr lang="en-US" sz="1100" dirty="0">
-                <a:solidFill>
-                  <a:srgbClr val="55555C"/>
-                </a:solidFill>
-              </a:rPr>
-              <a:t>On its own branch; it never reads community text</a:t>
-            </a:r>
-            <a:endParaRPr lang="en-US" sz="1100" dirty="0"/>
-          </a:p>
-        </p:txBody>
-      </p:sp>
-      <p:sp>
-        <p:nvSpPr>
-          <p:cNvPr id="31" name="Shape 28"/>
-          <p:cNvSpPr/>
-          <p:nvPr/>
-        </p:nvSpPr>
-        <p:spPr>
-          <a:xfrm>
-            <a:off x="548640" y="3566160"/>
-            <a:ext cx="6949440" cy="1783080"/>
-          </a:xfrm>
-          <a:prstGeom prst="roundRect">
-            <a:avLst>
-              <a:gd name="adj" fmla="val 6154"/>
-            </a:avLst>
-          </a:prstGeom>
-          <a:solidFill>
-            <a:srgbClr val="E9F3EC"/>
-          </a:solidFill>
-          <a:ln w="12700">
-            <a:solidFill>
-              <a:srgbClr val="E9F3EC"/>
-            </a:solidFill>
-            <a:prstDash val="solid"/>
-          </a:ln>
-        </p:spPr>
-      </p:sp>
-      <p:sp>
-        <p:nvSpPr>
-          <p:cNvPr id="32" name="Text 29"/>
-          <p:cNvSpPr txBox="1"/>
-          <p:nvPr/>
-        </p:nvSpPr>
-        <p:spPr>
-          <a:xfrm>
-            <a:off x="749808" y="3703320"/>
-            <a:ext cx="2743200" cy="228600"/>
-          </a:xfrm>
-          <a:prstGeom prst="rect">
-            <a:avLst/>
-          </a:prstGeom>
-          <a:noFill/>
-          <a:ln/>
-        </p:spPr>
-        <p:txBody>
-          <a:bodyPr wrap="square" lIns="0" tIns="0" rIns="0" bIns="0" rtlCol="0" anchor="t"/>
-          <a:lstStyle/>
-          <a:p>
-            <a:pPr indent="0" marL="0">
-              <a:buNone/>
-            </a:pPr>
-            <a:r>
-              <a:rPr lang="en-US" sz="1050" b="1" dirty="0">
-                <a:solidFill>
-                  <a:srgbClr val="0A7F44"/>
-                </a:solidFill>
-              </a:rPr>
-              <a:t>6 · NINE GATES</a:t>
-            </a:r>
-            <a:endParaRPr lang="en-US" sz="1050" dirty="0"/>
-          </a:p>
-        </p:txBody>
-      </p:sp>
-      <p:sp>
-        <p:nvSpPr>
-          <p:cNvPr id="33" name="Text 30"/>
-          <p:cNvSpPr txBox="1"/>
-          <p:nvPr/>
-        </p:nvSpPr>
-        <p:spPr>
-          <a:xfrm>
-            <a:off x="749808" y="3950208"/>
-            <a:ext cx="4572000" cy="347472"/>
-          </a:xfrm>
-          <a:prstGeom prst="rect">
-            <a:avLst/>
-          </a:prstGeom>
-          <a:noFill/>
-          <a:ln/>
-        </p:spPr>
-        <p:txBody>
-          <a:bodyPr wrap="square" lIns="0" tIns="0" rIns="0" bIns="0" rtlCol="0" anchor="t"/>
-          <a:lstStyle/>
-          <a:p>
-            <a:pPr indent="0" marL="0">
-              <a:buNone/>
-            </a:pPr>
-            <a:r>
-              <a:rPr lang="en-US" sz="1600" b="1" dirty="0">
-                <a:solidFill>
-                  <a:srgbClr val="0A0A0B"/>
-                </a:solidFill>
-              </a:rPr>
-              <a:t>Stops at the first failure</a:t>
-            </a:r>
-            <a:endParaRPr lang="en-US" sz="1600" dirty="0"/>
-          </a:p>
-        </p:txBody>
-      </p:sp>
-      <p:sp>
-        <p:nvSpPr>
-          <p:cNvPr id="34" name="Shape 31"/>
-          <p:cNvSpPr/>
-          <p:nvPr/>
-        </p:nvSpPr>
-        <p:spPr>
-          <a:xfrm>
-            <a:off x="749808" y="4434840"/>
-            <a:ext cx="1298448" cy="310896"/>
-          </a:xfrm>
-          <a:prstGeom prst="roundRect">
-            <a:avLst>
-              <a:gd name="adj" fmla="val 50000"/>
-            </a:avLst>
-          </a:prstGeom>
-          <a:solidFill>
-            <a:srgbClr val="FFFFFF"/>
-          </a:solidFill>
-          <a:ln w="12700">
-            <a:solidFill>
-              <a:srgbClr val="FFFFFF"/>
-            </a:solidFill>
-            <a:prstDash val="solid"/>
-          </a:ln>
-        </p:spPr>
-      </p:sp>
-      <p:sp>
-        <p:nvSpPr>
-          <p:cNvPr id="35" name="Text 32"/>
-          <p:cNvSpPr txBox="1"/>
-          <p:nvPr/>
-        </p:nvSpPr>
-        <p:spPr>
-          <a:xfrm>
-            <a:off x="749808" y="4434840"/>
-            <a:ext cx="1298448" cy="310896"/>
-          </a:xfrm>
-          <a:prstGeom prst="rect">
-            <a:avLst/>
-          </a:prstGeom>
-          <a:noFill/>
-          <a:ln/>
-        </p:spPr>
-        <p:txBody>
-          <a:bodyPr wrap="square" lIns="0" tIns="0" rIns="0" bIns="0" rtlCol="0" anchor="ctr"/>
-          <a:lstStyle/>
-          <a:p>
-            <a:pPr algn="ctr" indent="0" marL="0">
-              <a:buNone/>
-            </a:pPr>
-            <a:r>
-              <a:rPr lang="en-US" sz="950" b="1" dirty="0">
-                <a:solidFill>
-                  <a:srgbClr val="0A7F44"/>
-                </a:solidFill>
-              </a:rPr>
-              <a:t>policy</a:t>
-            </a:r>
-            <a:endParaRPr lang="en-US" sz="950" dirty="0"/>
-          </a:p>
-        </p:txBody>
-      </p:sp>
-      <p:sp>
-        <p:nvSpPr>
-          <p:cNvPr id="36" name="Shape 33"/>
-          <p:cNvSpPr/>
-          <p:nvPr/>
-        </p:nvSpPr>
-        <p:spPr>
-          <a:xfrm>
-            <a:off x="2093976" y="4434840"/>
-            <a:ext cx="1298448" cy="310896"/>
-          </a:xfrm>
-          <a:prstGeom prst="roundRect">
-            <a:avLst>
-              <a:gd name="adj" fmla="val 50000"/>
-            </a:avLst>
-          </a:prstGeom>
-          <a:solidFill>
-            <a:srgbClr val="FFFFFF"/>
-          </a:solidFill>
-          <a:ln w="12700">
-            <a:solidFill>
-              <a:srgbClr val="FFFFFF"/>
-            </a:solidFill>
-            <a:prstDash val="solid"/>
-          </a:ln>
-        </p:spPr>
-      </p:sp>
-      <p:sp>
-        <p:nvSpPr>
-          <p:cNvPr id="37" name="Text 34"/>
-          <p:cNvSpPr txBox="1"/>
-          <p:nvPr/>
-        </p:nvSpPr>
-        <p:spPr>
-          <a:xfrm>
-            <a:off x="2093976" y="4434840"/>
-            <a:ext cx="1298448" cy="310896"/>
-          </a:xfrm>
-          <a:prstGeom prst="rect">
-            <a:avLst/>
-          </a:prstGeom>
-          <a:noFill/>
-          <a:ln/>
-        </p:spPr>
-        <p:txBody>
-          <a:bodyPr wrap="square" lIns="0" tIns="0" rIns="0" bIns="0" rtlCol="0" anchor="ctr"/>
-          <a:lstStyle/>
-          <a:p>
-            <a:pPr algn="ctr" indent="0" marL="0">
-              <a:buNone/>
-            </a:pPr>
-            <a:r>
-              <a:rPr lang="en-US" sz="950" b="1" dirty="0">
-                <a:solidFill>
-                  <a:srgbClr val="0A7F44"/>
-                </a:solidFill>
-              </a:rPr>
-              <a:t>code scan</a:t>
-            </a:r>
-            <a:endParaRPr lang="en-US" sz="950" dirty="0"/>
-          </a:p>
-        </p:txBody>
-      </p:sp>
-      <p:sp>
-        <p:nvSpPr>
-          <p:cNvPr id="38" name="Shape 35"/>
-          <p:cNvSpPr/>
-          <p:nvPr/>
-        </p:nvSpPr>
-        <p:spPr>
-          <a:xfrm>
-            <a:off x="3438144" y="4434840"/>
-            <a:ext cx="1298448" cy="310896"/>
-          </a:xfrm>
-          <a:prstGeom prst="roundRect">
-            <a:avLst>
-              <a:gd name="adj" fmla="val 50000"/>
-            </a:avLst>
-          </a:prstGeom>
-          <a:solidFill>
-            <a:srgbClr val="FFFFFF"/>
-          </a:solidFill>
-          <a:ln w="12700">
-            <a:solidFill>
-              <a:srgbClr val="FFFFFF"/>
-            </a:solidFill>
-            <a:prstDash val="solid"/>
-          </a:ln>
-        </p:spPr>
-      </p:sp>
-      <p:sp>
-        <p:nvSpPr>
-          <p:cNvPr id="39" name="Text 36"/>
-          <p:cNvSpPr txBox="1"/>
-          <p:nvPr/>
-        </p:nvSpPr>
-        <p:spPr>
-          <a:xfrm>
-            <a:off x="3438144" y="4434840"/>
-            <a:ext cx="1298448" cy="310896"/>
-          </a:xfrm>
-          <a:prstGeom prst="rect">
-            <a:avLst/>
-          </a:prstGeom>
-          <a:noFill/>
-          <a:ln/>
-        </p:spPr>
-        <p:txBody>
-          <a:bodyPr wrap="square" lIns="0" tIns="0" rIns="0" bIns="0" rtlCol="0" anchor="ctr"/>
-          <a:lstStyle/>
-          <a:p>
-            <a:pPr algn="ctr" indent="0" marL="0">
-              <a:buNone/>
-            </a:pPr>
-            <a:r>
-              <a:rPr lang="en-US" sz="950" b="1" dirty="0">
-                <a:solidFill>
-                  <a:srgbClr val="0A7F44"/>
-                </a:solidFill>
-              </a:rPr>
-              <a:t>unit tests</a:t>
-            </a:r>
-            <a:endParaRPr lang="en-US" sz="950" dirty="0"/>
-          </a:p>
-        </p:txBody>
-      </p:sp>
-      <p:sp>
-        <p:nvSpPr>
-          <p:cNvPr id="40" name="Shape 37"/>
-          <p:cNvSpPr/>
-          <p:nvPr/>
-        </p:nvSpPr>
-        <p:spPr>
-          <a:xfrm>
-            <a:off x="4782312" y="4434840"/>
-            <a:ext cx="1298448" cy="310896"/>
-          </a:xfrm>
-          <a:prstGeom prst="roundRect">
-            <a:avLst>
-              <a:gd name="adj" fmla="val 50000"/>
-            </a:avLst>
-          </a:prstGeom>
-          <a:solidFill>
-            <a:srgbClr val="FFFFFF"/>
-          </a:solidFill>
-          <a:ln w="12700">
-            <a:solidFill>
-              <a:srgbClr val="FFFFFF"/>
-            </a:solidFill>
-            <a:prstDash val="solid"/>
-          </a:ln>
-        </p:spPr>
-      </p:sp>
-      <p:sp>
-        <p:nvSpPr>
-          <p:cNvPr id="41" name="Text 38"/>
-          <p:cNvSpPr txBox="1"/>
-          <p:nvPr/>
-        </p:nvSpPr>
-        <p:spPr>
-          <a:xfrm>
-            <a:off x="4782312" y="4434840"/>
-            <a:ext cx="1298448" cy="310896"/>
-          </a:xfrm>
-          <a:prstGeom prst="rect">
-            <a:avLst/>
-          </a:prstGeom>
-          <a:noFill/>
-          <a:ln/>
-        </p:spPr>
-        <p:txBody>
-          <a:bodyPr wrap="square" lIns="0" tIns="0" rIns="0" bIns="0" rtlCol="0" anchor="ctr"/>
-          <a:lstStyle/>
-          <a:p>
-            <a:pPr algn="ctr" indent="0" marL="0">
-              <a:buNone/>
-            </a:pPr>
-            <a:r>
-              <a:rPr lang="en-US" sz="950" b="1" dirty="0">
-                <a:solidFill>
-                  <a:srgbClr val="0A7F44"/>
-                </a:solidFill>
-              </a:rPr>
-              <a:t>crash matrix</a:t>
-            </a:r>
-            <a:endParaRPr lang="en-US" sz="950" dirty="0"/>
-          </a:p>
-        </p:txBody>
-      </p:sp>
-      <p:sp>
-        <p:nvSpPr>
-          <p:cNvPr id="42" name="Shape 39"/>
-          <p:cNvSpPr/>
-          <p:nvPr/>
-        </p:nvSpPr>
-        <p:spPr>
-          <a:xfrm>
-            <a:off x="6126480" y="4434840"/>
-            <a:ext cx="1298448" cy="310896"/>
-          </a:xfrm>
-          <a:prstGeom prst="roundRect">
-            <a:avLst>
-              <a:gd name="adj" fmla="val 50000"/>
-            </a:avLst>
-          </a:prstGeom>
-          <a:solidFill>
-            <a:srgbClr val="FFFFFF"/>
-          </a:solidFill>
-          <a:ln w="12700">
-            <a:solidFill>
-              <a:srgbClr val="FFFFFF"/>
-            </a:solidFill>
-            <a:prstDash val="solid"/>
-          </a:ln>
-        </p:spPr>
-      </p:sp>
-      <p:sp>
-        <p:nvSpPr>
-          <p:cNvPr id="43" name="Text 40"/>
-          <p:cNvSpPr txBox="1"/>
-          <p:nvPr/>
-        </p:nvSpPr>
-        <p:spPr>
-          <a:xfrm>
-            <a:off x="6126480" y="4434840"/>
-            <a:ext cx="1298448" cy="310896"/>
-          </a:xfrm>
-          <a:prstGeom prst="rect">
-            <a:avLst/>
-          </a:prstGeom>
-          <a:noFill/>
-          <a:ln/>
-        </p:spPr>
-        <p:txBody>
-          <a:bodyPr wrap="square" lIns="0" tIns="0" rIns="0" bIns="0" rtlCol="0" anchor="ctr"/>
-          <a:lstStyle/>
-          <a:p>
-            <a:pPr algn="ctr" indent="0" marL="0">
-              <a:buNone/>
-            </a:pPr>
-            <a:r>
-              <a:rPr lang="en-US" sz="950" b="1" dirty="0">
-                <a:solidFill>
-                  <a:srgbClr val="0A7F44"/>
-                </a:solidFill>
-              </a:rPr>
-              <a:t>red team</a:t>
-            </a:r>
-            <a:endParaRPr lang="en-US" sz="950" dirty="0"/>
-          </a:p>
-        </p:txBody>
-      </p:sp>
-      <p:sp>
-        <p:nvSpPr>
-          <p:cNvPr id="44" name="Shape 41"/>
-          <p:cNvSpPr/>
-          <p:nvPr/>
-        </p:nvSpPr>
-        <p:spPr>
-          <a:xfrm>
-            <a:off x="749808" y="4855464"/>
-            <a:ext cx="1298448" cy="310896"/>
-          </a:xfrm>
-          <a:prstGeom prst="roundRect">
-            <a:avLst>
-              <a:gd name="adj" fmla="val 50000"/>
-            </a:avLst>
-          </a:prstGeom>
-          <a:solidFill>
-            <a:srgbClr val="FFFFFF"/>
-          </a:solidFill>
-          <a:ln w="12700">
-            <a:solidFill>
-              <a:srgbClr val="FFFFFF"/>
-            </a:solidFill>
-            <a:prstDash val="solid"/>
-          </a:ln>
-        </p:spPr>
-      </p:sp>
-      <p:sp>
-        <p:nvSpPr>
-          <p:cNvPr id="45" name="Text 42"/>
-          <p:cNvSpPr txBox="1"/>
-          <p:nvPr/>
-        </p:nvSpPr>
-        <p:spPr>
-          <a:xfrm>
-            <a:off x="749808" y="4855464"/>
-            <a:ext cx="1298448" cy="310896"/>
-          </a:xfrm>
-          <a:prstGeom prst="rect">
-            <a:avLst/>
-          </a:prstGeom>
-          <a:noFill/>
-          <a:ln/>
-        </p:spPr>
-        <p:txBody>
-          <a:bodyPr wrap="square" lIns="0" tIns="0" rIns="0" bIns="0" rtlCol="0" anchor="ctr"/>
-          <a:lstStyle/>
-          <a:p>
-            <a:pPr algn="ctr" indent="0" marL="0">
-              <a:buNone/>
-            </a:pPr>
-            <a:r>
-              <a:rPr lang="en-US" sz="950" b="1" dirty="0">
-                <a:solidFill>
-                  <a:srgbClr val="0A7F44"/>
-                </a:solidFill>
-              </a:rPr>
-              <a:t>Messenger end to end</a:t>
-            </a:r>
-            <a:endParaRPr lang="en-US" sz="950" dirty="0"/>
-          </a:p>
-        </p:txBody>
-      </p:sp>
-      <p:sp>
-        <p:nvSpPr>
-          <p:cNvPr id="46" name="Shape 43"/>
-          <p:cNvSpPr/>
-          <p:nvPr/>
-        </p:nvSpPr>
-        <p:spPr>
-          <a:xfrm>
-            <a:off x="2093976" y="4855464"/>
-            <a:ext cx="1298448" cy="310896"/>
-          </a:xfrm>
-          <a:prstGeom prst="roundRect">
-            <a:avLst>
-              <a:gd name="adj" fmla="val 50000"/>
-            </a:avLst>
-          </a:prstGeom>
-          <a:solidFill>
-            <a:srgbClr val="FFFFFF"/>
-          </a:solidFill>
-          <a:ln w="12700">
-            <a:solidFill>
-              <a:srgbClr val="FFFFFF"/>
-            </a:solidFill>
-            <a:prstDash val="solid"/>
-          </a:ln>
-        </p:spPr>
-      </p:sp>
-      <p:sp>
-        <p:nvSpPr>
-          <p:cNvPr id="47" name="Text 44"/>
-          <p:cNvSpPr txBox="1"/>
-          <p:nvPr/>
-        </p:nvSpPr>
-        <p:spPr>
-          <a:xfrm>
-            <a:off x="2093976" y="4855464"/>
-            <a:ext cx="1298448" cy="310896"/>
-          </a:xfrm>
-          <a:prstGeom prst="rect">
-            <a:avLst/>
-          </a:prstGeom>
-          <a:noFill/>
-          <a:ln/>
-        </p:spPr>
-        <p:txBody>
-          <a:bodyPr wrap="square" lIns="0" tIns="0" rIns="0" bIns="0" rtlCol="0" anchor="ctr"/>
-          <a:lstStyle/>
-          <a:p>
-            <a:pPr algn="ctr" indent="0" marL="0">
-              <a:buNone/>
-            </a:pPr>
-            <a:r>
-              <a:rPr lang="en-US" sz="950" b="1" dirty="0">
-                <a:solidFill>
-                  <a:srgbClr val="0A7F44"/>
-                </a:solidFill>
-              </a:rPr>
-              <a:t>Autopilot pass^3</a:t>
-            </a:r>
-            <a:endParaRPr lang="en-US" sz="950" dirty="0"/>
-          </a:p>
-        </p:txBody>
-      </p:sp>
-      <p:sp>
-        <p:nvSpPr>
-          <p:cNvPr id="48" name="Shape 45"/>
-          <p:cNvSpPr/>
-          <p:nvPr/>
-        </p:nvSpPr>
-        <p:spPr>
-          <a:xfrm>
-            <a:off x="3438144" y="4855464"/>
-            <a:ext cx="1298448" cy="310896"/>
-          </a:xfrm>
-          <a:prstGeom prst="roundRect">
-            <a:avLst>
-              <a:gd name="adj" fmla="val 50000"/>
-            </a:avLst>
-          </a:prstGeom>
-          <a:solidFill>
-            <a:srgbClr val="FFFFFF"/>
-          </a:solidFill>
-          <a:ln w="12700">
-            <a:solidFill>
-              <a:srgbClr val="FFFFFF"/>
-            </a:solidFill>
-            <a:prstDash val="solid"/>
-          </a:ln>
-        </p:spPr>
-      </p:sp>
-      <p:sp>
-        <p:nvSpPr>
-          <p:cNvPr id="49" name="Text 46"/>
-          <p:cNvSpPr txBox="1"/>
-          <p:nvPr/>
-        </p:nvSpPr>
-        <p:spPr>
-          <a:xfrm>
-            <a:off x="3438144" y="4855464"/>
-            <a:ext cx="1298448" cy="310896"/>
-          </a:xfrm>
-          <a:prstGeom prst="rect">
-            <a:avLst/>
-          </a:prstGeom>
-          <a:noFill/>
-          <a:ln/>
-        </p:spPr>
-        <p:txBody>
-          <a:bodyPr wrap="square" lIns="0" tIns="0" rIns="0" bIns="0" rtlCol="0" anchor="ctr"/>
-          <a:lstStyle/>
-          <a:p>
-            <a:pPr algn="ctr" indent="0" marL="0">
-              <a:buNone/>
-            </a:pPr>
-            <a:r>
-              <a:rPr lang="en-US" sz="950" b="1" dirty="0">
-                <a:solidFill>
-                  <a:srgbClr val="0A7F44"/>
-                </a:solidFill>
-              </a:rPr>
-              <a:t>oracle</a:t>
-            </a:r>
-            <a:endParaRPr lang="en-US" sz="950" dirty="0"/>
-          </a:p>
-        </p:txBody>
-      </p:sp>
-      <p:sp>
-        <p:nvSpPr>
-          <p:cNvPr id="50" name="Shape 47"/>
-          <p:cNvSpPr/>
-          <p:nvPr/>
-        </p:nvSpPr>
-        <p:spPr>
-          <a:xfrm>
-            <a:off x="4782312" y="4855464"/>
-            <a:ext cx="1298448" cy="310896"/>
-          </a:xfrm>
-          <a:prstGeom prst="roundRect">
-            <a:avLst>
-              <a:gd name="adj" fmla="val 50000"/>
-            </a:avLst>
-          </a:prstGeom>
-          <a:solidFill>
-            <a:srgbClr val="FFFFFF"/>
-          </a:solidFill>
-          <a:ln w="12700">
-            <a:solidFill>
-              <a:srgbClr val="FFFFFF"/>
-            </a:solidFill>
-            <a:prstDash val="solid"/>
-          </a:ln>
-        </p:spPr>
-      </p:sp>
-      <p:sp>
-        <p:nvSpPr>
-          <p:cNvPr id="51" name="Text 48"/>
-          <p:cNvSpPr txBox="1"/>
-          <p:nvPr/>
-        </p:nvSpPr>
-        <p:spPr>
-          <a:xfrm>
-            <a:off x="4782312" y="4855464"/>
-            <a:ext cx="1298448" cy="310896"/>
-          </a:xfrm>
-          <a:prstGeom prst="rect">
-            <a:avLst/>
-          </a:prstGeom>
-          <a:noFill/>
-          <a:ln/>
-        </p:spPr>
-        <p:txBody>
-          <a:bodyPr wrap="square" lIns="0" tIns="0" rIns="0" bIns="0" rtlCol="0" anchor="ctr"/>
-          <a:lstStyle/>
-          <a:p>
-            <a:pPr algn="ctr" indent="0" marL="0">
-              <a:buNone/>
-            </a:pPr>
-            <a:r>
-              <a:rPr lang="en-US" sz="950" b="1" dirty="0">
-                <a:solidFill>
-                  <a:srgbClr val="0A7F44"/>
-                </a:solidFill>
-              </a:rPr>
-              <a:t>privacy canary</a:t>
-            </a:r>
-            <a:endParaRPr lang="en-US" sz="950" dirty="0"/>
-          </a:p>
-        </p:txBody>
-      </p:sp>
-      <p:sp>
-        <p:nvSpPr>
-          <p:cNvPr id="52" name="Shape 49"/>
-          <p:cNvSpPr/>
-          <p:nvPr/>
-        </p:nvSpPr>
-        <p:spPr>
-          <a:xfrm>
-            <a:off x="7543800" y="4453128"/>
-            <a:ext cx="274320" cy="0"/>
-          </a:xfrm>
-          <a:prstGeom prst="line">
-            <a:avLst/>
-          </a:prstGeom>
-          <a:noFill/>
-          <a:ln w="22225">
-            <a:solidFill>
-              <a:srgbClr val="8A8A92"/>
-            </a:solidFill>
-            <a:prstDash val="solid"/>
-            <a:tailEnd type="triangle"/>
-          </a:ln>
-        </p:spPr>
-      </p:sp>
-      <p:sp>
-        <p:nvSpPr>
-          <p:cNvPr id="53" name="Shape 50"/>
-          <p:cNvSpPr/>
-          <p:nvPr/>
-        </p:nvSpPr>
-        <p:spPr>
-          <a:xfrm>
-            <a:off x="7863840" y="3566160"/>
-            <a:ext cx="3749040" cy="1783080"/>
-          </a:xfrm>
-          <a:prstGeom prst="roundRect">
-            <a:avLst>
-              <a:gd name="adj" fmla="val 6154"/>
-            </a:avLst>
-          </a:prstGeom>
-          <a:solidFill>
-            <a:srgbClr val="FFFFFF"/>
-          </a:solidFill>
-          <a:ln w="25400">
-            <a:solidFill>
-              <a:srgbClr val="D1352B"/>
-            </a:solidFill>
-            <a:prstDash val="solid"/>
-          </a:ln>
-        </p:spPr>
-      </p:sp>
-      <p:sp>
-        <p:nvSpPr>
-          <p:cNvPr id="54" name="Text 51"/>
-          <p:cNvSpPr txBox="1"/>
-          <p:nvPr/>
-        </p:nvSpPr>
-        <p:spPr>
-          <a:xfrm>
-            <a:off x="8065008" y="3703320"/>
-            <a:ext cx="3291840" cy="228600"/>
-          </a:xfrm>
-          <a:prstGeom prst="rect">
-            <a:avLst/>
-          </a:prstGeom>
-          <a:noFill/>
-          <a:ln/>
-        </p:spPr>
-        <p:txBody>
-          <a:bodyPr wrap="square" lIns="0" tIns="0" rIns="0" bIns="0" rtlCol="0" anchor="t"/>
-          <a:lstStyle/>
-          <a:p>
-            <a:pPr indent="0" marL="0">
-              <a:buNone/>
-            </a:pPr>
-            <a:r>
-              <a:rPr lang="en-US" sz="1050" b="1" dirty="0">
-                <a:solidFill>
-                  <a:srgbClr val="D1352B"/>
-                </a:solidFill>
-              </a:rPr>
-              <a:t>7 · SHIP, OR ROLL BACK</a:t>
-            </a:r>
-            <a:endParaRPr lang="en-US" sz="1050" dirty="0"/>
-          </a:p>
-        </p:txBody>
-      </p:sp>
-      <p:sp>
-        <p:nvSpPr>
-          <p:cNvPr id="55" name="Text 52"/>
-          <p:cNvSpPr txBox="1"/>
-          <p:nvPr/>
-        </p:nvSpPr>
-        <p:spPr>
-          <a:xfrm>
-            <a:off x="8065008" y="3950208"/>
-            <a:ext cx="3291840" cy="347472"/>
-          </a:xfrm>
-          <a:prstGeom prst="rect">
-            <a:avLst/>
-          </a:prstGeom>
-          <a:noFill/>
-          <a:ln/>
-        </p:spPr>
-        <p:txBody>
-          <a:bodyPr wrap="square" lIns="0" tIns="0" rIns="0" bIns="0" rtlCol="0" anchor="t"/>
-          <a:lstStyle/>
-          <a:p>
-            <a:pPr indent="0" marL="0">
-              <a:buNone/>
-            </a:pPr>
-            <a:r>
-              <a:rPr lang="en-US" sz="1600" b="1" dirty="0">
-                <a:solidFill>
-                  <a:srgbClr val="0A0A0B"/>
-                </a:solidFill>
-              </a:rPr>
-              <a:t>A small canary</a:t>
-            </a:r>
-            <a:endParaRPr lang="en-US" sz="1600" dirty="0"/>
-          </a:p>
-        </p:txBody>
-      </p:sp>
-      <p:sp>
-        <p:nvSpPr>
-          <p:cNvPr id="56" name="Text 53"/>
-          <p:cNvSpPr txBox="1"/>
-          <p:nvPr/>
-        </p:nvSpPr>
-        <p:spPr>
-          <a:xfrm>
-            <a:off x="8065008" y="4370832"/>
-            <a:ext cx="3383280" cy="868680"/>
-          </a:xfrm>
-          <a:prstGeom prst="rect">
-            <a:avLst/>
-          </a:prstGeom>
-          <a:noFill/>
-          <a:ln/>
-        </p:spPr>
-        <p:txBody>
-          <a:bodyPr wrap="square" lIns="0" tIns="0" rIns="0" bIns="0" rtlCol="0" anchor="t"/>
-          <a:lstStyle/>
-          <a:p>
-            <a:pPr indent="0" marL="0">
-              <a:buNone/>
-            </a:pPr>
-            <a:r>
-              <a:rPr lang="en-US" sz="1200" dirty="0">
-                <a:solidFill>
-                  <a:srgbClr val="55555C"/>
-                </a:solidFill>
-              </a:rPr>
-              <a:t>Turns itself off if thumbs down rise. Anything beyond a safe setting waits for a person.</a:t>
-            </a:r>
-            <a:endParaRPr lang="en-US" sz="1200" dirty="0"/>
-          </a:p>
-        </p:txBody>
-      </p:sp>
-      <p:sp>
-        <p:nvSpPr>
-          <p:cNvPr id="57" name="Shape 54"/>
-          <p:cNvSpPr/>
-          <p:nvPr/>
-        </p:nvSpPr>
-        <p:spPr>
-          <a:xfrm>
-            <a:off x="548640" y="5577840"/>
-            <a:ext cx="11064240" cy="658368"/>
-          </a:xfrm>
-          <a:prstGeom prst="roundRect">
-            <a:avLst>
-              <a:gd name="adj" fmla="val 16667"/>
-            </a:avLst>
-          </a:prstGeom>
-          <a:solidFill>
-            <a:srgbClr val="0A0A0B"/>
-          </a:solidFill>
-          <a:ln w="12700">
-            <a:solidFill>
-              <a:srgbClr val="0A0A0B"/>
-            </a:solidFill>
-            <a:prstDash val="solid"/>
-          </a:ln>
-        </p:spPr>
-      </p:sp>
-      <p:sp>
-        <p:nvSpPr>
-          <p:cNvPr id="58" name="Text 55"/>
-          <p:cNvSpPr txBox="1"/>
-          <p:nvPr/>
-        </p:nvSpPr>
-        <p:spPr>
-          <a:xfrm>
-            <a:off x="777240" y="5577840"/>
-            <a:ext cx="1463040" cy="658368"/>
-          </a:xfrm>
-          <a:prstGeom prst="rect">
-            <a:avLst/>
-          </a:prstGeom>
-          <a:noFill/>
-          <a:ln/>
-        </p:spPr>
-        <p:txBody>
-          <a:bodyPr wrap="square" lIns="0" tIns="0" rIns="0" bIns="0" rtlCol="0" anchor="ctr"/>
-          <a:lstStyle/>
-          <a:p>
-            <a:pPr indent="0" marL="0">
-              <a:buNone/>
-            </a:pPr>
-            <a:r>
-              <a:rPr lang="en-US" sz="1200" b="1" dirty="0">
-                <a:solidFill>
-                  <a:srgbClr val="FFFFFF"/>
-                </a:solidFill>
-              </a:rPr>
-              <a:t>NEVER-LIST</a:t>
-            </a:r>
-            <a:endParaRPr lang="en-US" sz="1200" dirty="0"/>
-          </a:p>
-        </p:txBody>
-      </p:sp>
-      <p:sp>
-        <p:nvSpPr>
-          <p:cNvPr id="59" name="Text 56"/>
-          <p:cNvSpPr txBox="1"/>
-          <p:nvPr/>
-        </p:nvSpPr>
-        <p:spPr>
-          <a:xfrm>
-            <a:off x="2240280" y="5577840"/>
-            <a:ext cx="9235440" cy="658368"/>
-          </a:xfrm>
-          <a:prstGeom prst="rect">
-            <a:avLst/>
-          </a:prstGeom>
-          <a:noFill/>
-          <a:ln/>
-        </p:spPr>
-        <p:txBody>
-          <a:bodyPr wrap="square" lIns="0" tIns="0" rIns="0" bIns="0" rtlCol="0" anchor="ctr"/>
-          <a:lstStyle/>
-          <a:p>
-            <a:pPr indent="0" marL="0">
-              <a:buNone/>
-            </a:pPr>
-            <a:r>
-              <a:rPr lang="en-US" sz="1300" dirty="0">
-                <a:solidFill>
-                  <a:srgbClr val="FFFFFF"/>
-                </a:solidFill>
-              </a:rPr>
-              <a:t>Booking without a yes · data off the server · a diagnosis or a dose · the guards · the tests · A2A · deployment</a:t>
-            </a:r>
-            <a:endParaRPr lang="en-US" sz="1300" dirty="0"/>
+              <a:t>attacks stopped: injected instructions, poisoned reviews, forged Agent Cards, sock-puppet votes, diffs that book without a yes</a:t>
+            </a:r>
+            <a:endParaRPr lang="en-US" sz="1150" dirty="0"/>
           </a:p>
         </p:txBody>
       </p:sp>
@@ -9515,7 +8502,7 @@
                   <a:srgbClr val="0A7F44"/>
                 </a:solidFill>
               </a:rPr>
-              <a:t>MEASURED</a:t>
+              <a:t>SELF-EVOLVING</a:t>
             </a:r>
             <a:endParaRPr lang="en-US" sz="1300" dirty="0"/>
           </a:p>
@@ -9553,7 +8540,7 @@
                   <a:srgbClr val="0A0A0B"/>
                 </a:solidFill>
               </a:rPr>
-              <a:t>Every claim has a log behind it</a:t>
+              <a:t>The club makes itself better, safely</a:t>
             </a:r>
             <a:endParaRPr lang="en-US" sz="3200" dirty="0"/>
           </a:p>
@@ -9567,12 +8554,846 @@
         </p:nvSpPr>
         <p:spPr>
           <a:xfrm>
-            <a:off x="548640" y="1691640"/>
-            <a:ext cx="2670048" cy="1234440"/>
+            <a:off x="6400800" y="384048"/>
+            <a:ext cx="5212080" cy="329184"/>
           </a:xfrm>
           <a:prstGeom prst="roundRect">
             <a:avLst>
-              <a:gd name="adj" fmla="val 8889"/>
+              <a:gd name="adj" fmla="val 50000"/>
+            </a:avLst>
+          </a:prstGeom>
+          <a:solidFill>
+            <a:srgbClr val="FFFFFF"/>
+          </a:solidFill>
+          <a:ln w="12700">
+            <a:solidFill>
+              <a:srgbClr val="DCDCE0"/>
+            </a:solidFill>
+            <a:prstDash val="solid"/>
+          </a:ln>
+        </p:spPr>
+      </p:sp>
+      <p:sp>
+        <p:nvSpPr>
+          <p:cNvPr id="6" name="Text 3"/>
+          <p:cNvSpPr txBox="1"/>
+          <p:nvPr/>
+        </p:nvSpPr>
+        <p:spPr>
+          <a:xfrm>
+            <a:off x="6400800" y="384048"/>
+            <a:ext cx="5212080" cy="329184"/>
+          </a:xfrm>
+          <a:prstGeom prst="rect">
+            <a:avLst/>
+          </a:prstGeom>
+          <a:noFill/>
+          <a:ln/>
+        </p:spPr>
+        <p:txBody>
+          <a:bodyPr wrap="square" lIns="0" tIns="0" rIns="0" bIns="0" rtlCol="0" anchor="ctr"/>
+          <a:lstStyle/>
+          <a:p>
+            <a:pPr algn="ctr" indent="0" marL="0">
+              <a:buNone/>
+            </a:pPr>
+            <a:r>
+              <a:rPr lang="en-US" sz="1050" b="1" dirty="0">
+                <a:solidFill>
+                  <a:srgbClr val="55555C"/>
+                </a:solidFill>
+              </a:rPr>
+              <a:t>Simulated club (seed 7) · the pipeline, gates and rollback are real</a:t>
+            </a:r>
+            <a:endParaRPr lang="en-US" sz="1050" dirty="0"/>
+          </a:p>
+        </p:txBody>
+      </p:sp>
+      <p:sp>
+        <p:nvSpPr>
+          <p:cNvPr id="7" name="Shape 4"/>
+          <p:cNvSpPr/>
+          <p:nvPr/>
+        </p:nvSpPr>
+        <p:spPr>
+          <a:xfrm>
+            <a:off x="548640" y="1691640"/>
+            <a:ext cx="2057400" cy="1600200"/>
+          </a:xfrm>
+          <a:prstGeom prst="roundRect">
+            <a:avLst>
+              <a:gd name="adj" fmla="val 6857"/>
+            </a:avLst>
+          </a:prstGeom>
+          <a:solidFill>
+            <a:srgbClr val="FFFFFF"/>
+          </a:solidFill>
+          <a:ln w="12700">
+            <a:solidFill>
+              <a:srgbClr val="DCDCE0"/>
+            </a:solidFill>
+            <a:prstDash val="solid"/>
+          </a:ln>
+        </p:spPr>
+      </p:sp>
+      <p:sp>
+        <p:nvSpPr>
+          <p:cNvPr id="8" name="Text 5"/>
+          <p:cNvSpPr txBox="1"/>
+          <p:nvPr/>
+        </p:nvSpPr>
+        <p:spPr>
+          <a:xfrm>
+            <a:off x="713232" y="1828800"/>
+            <a:ext cx="1737360" cy="228600"/>
+          </a:xfrm>
+          <a:prstGeom prst="rect">
+            <a:avLst/>
+          </a:prstGeom>
+          <a:noFill/>
+          <a:ln/>
+        </p:spPr>
+        <p:txBody>
+          <a:bodyPr wrap="square" lIns="0" tIns="0" rIns="0" bIns="0" rtlCol="0" anchor="t"/>
+          <a:lstStyle/>
+          <a:p>
+            <a:pPr indent="0" marL="0">
+              <a:buNone/>
+            </a:pPr>
+            <a:r>
+              <a:rPr lang="en-US" sz="1050" b="1" dirty="0">
+                <a:solidFill>
+                  <a:srgbClr val="0A7F44"/>
+                </a:solidFill>
+              </a:rPr>
+              <a:t>1 · ASK</a:t>
+            </a:r>
+            <a:endParaRPr lang="en-US" sz="1050" dirty="0"/>
+          </a:p>
+        </p:txBody>
+      </p:sp>
+      <p:sp>
+        <p:nvSpPr>
+          <p:cNvPr id="9" name="Text 6"/>
+          <p:cNvSpPr txBox="1"/>
+          <p:nvPr/>
+        </p:nvSpPr>
+        <p:spPr>
+          <a:xfrm>
+            <a:off x="713232" y="2084832"/>
+            <a:ext cx="1783080" cy="566928"/>
+          </a:xfrm>
+          <a:prstGeom prst="rect">
+            <a:avLst/>
+          </a:prstGeom>
+          <a:noFill/>
+          <a:ln/>
+        </p:spPr>
+        <p:txBody>
+          <a:bodyPr wrap="square" lIns="0" tIns="0" rIns="0" bIns="0" rtlCol="0" anchor="t"/>
+          <a:lstStyle/>
+          <a:p>
+            <a:pPr indent="0" marL="0">
+              <a:buNone/>
+            </a:pPr>
+            <a:r>
+              <a:rPr lang="en-US" sz="1500" b="1" dirty="0">
+                <a:solidFill>
+                  <a:srgbClr val="0A0A0B"/>
+                </a:solidFill>
+              </a:rPr>
+              <a:t>Members' ideas</a:t>
+            </a:r>
+            <a:endParaRPr lang="en-US" sz="1500" dirty="0"/>
+          </a:p>
+        </p:txBody>
+      </p:sp>
+      <p:sp>
+        <p:nvSpPr>
+          <p:cNvPr id="10" name="Text 7"/>
+          <p:cNvSpPr txBox="1"/>
+          <p:nvPr/>
+        </p:nvSpPr>
+        <p:spPr>
+          <a:xfrm>
+            <a:off x="713232" y="2651760"/>
+            <a:ext cx="1783080" cy="594360"/>
+          </a:xfrm>
+          <a:prstGeom prst="rect">
+            <a:avLst/>
+          </a:prstGeom>
+          <a:noFill/>
+          <a:ln/>
+        </p:spPr>
+        <p:txBody>
+          <a:bodyPr wrap="square" lIns="0" tIns="0" rIns="0" bIns="0" rtlCol="0" anchor="t"/>
+          <a:lstStyle/>
+          <a:p>
+            <a:pPr indent="0" marL="0">
+              <a:buNone/>
+            </a:pPr>
+            <a:r>
+              <a:rPr lang="en-US" sz="1100" dirty="0">
+                <a:solidFill>
+                  <a:srgbClr val="55555C"/>
+                </a:solidFill>
+              </a:rPr>
+              <a:t>"/idea" in Messenger, or thumbs up and down</a:t>
+            </a:r>
+            <a:endParaRPr lang="en-US" sz="1100" dirty="0"/>
+          </a:p>
+        </p:txBody>
+      </p:sp>
+      <p:sp>
+        <p:nvSpPr>
+          <p:cNvPr id="11" name="Shape 8"/>
+          <p:cNvSpPr/>
+          <p:nvPr/>
+        </p:nvSpPr>
+        <p:spPr>
+          <a:xfrm>
+            <a:off x="2624328" y="2487168"/>
+            <a:ext cx="146304" cy="0"/>
+          </a:xfrm>
+          <a:prstGeom prst="line">
+            <a:avLst/>
+          </a:prstGeom>
+          <a:noFill/>
+          <a:ln w="22225">
+            <a:solidFill>
+              <a:srgbClr val="8A8A92"/>
+            </a:solidFill>
+            <a:prstDash val="solid"/>
+            <a:tailEnd type="triangle"/>
+          </a:ln>
+        </p:spPr>
+      </p:sp>
+      <p:sp>
+        <p:nvSpPr>
+          <p:cNvPr id="12" name="Shape 9"/>
+          <p:cNvSpPr/>
+          <p:nvPr/>
+        </p:nvSpPr>
+        <p:spPr>
+          <a:xfrm>
+            <a:off x="2788920" y="1691640"/>
+            <a:ext cx="2057400" cy="1600200"/>
+          </a:xfrm>
+          <a:prstGeom prst="roundRect">
+            <a:avLst>
+              <a:gd name="adj" fmla="val 6857"/>
+            </a:avLst>
+          </a:prstGeom>
+          <a:solidFill>
+            <a:srgbClr val="FFFFFF"/>
+          </a:solidFill>
+          <a:ln w="12700">
+            <a:solidFill>
+              <a:srgbClr val="DCDCE0"/>
+            </a:solidFill>
+            <a:prstDash val="solid"/>
+          </a:ln>
+        </p:spPr>
+      </p:sp>
+      <p:sp>
+        <p:nvSpPr>
+          <p:cNvPr id="13" name="Text 10"/>
+          <p:cNvSpPr txBox="1"/>
+          <p:nvPr/>
+        </p:nvSpPr>
+        <p:spPr>
+          <a:xfrm>
+            <a:off x="2953512" y="1828800"/>
+            <a:ext cx="1737360" cy="228600"/>
+          </a:xfrm>
+          <a:prstGeom prst="rect">
+            <a:avLst/>
+          </a:prstGeom>
+          <a:noFill/>
+          <a:ln/>
+        </p:spPr>
+        <p:txBody>
+          <a:bodyPr wrap="square" lIns="0" tIns="0" rIns="0" bIns="0" rtlCol="0" anchor="t"/>
+          <a:lstStyle/>
+          <a:p>
+            <a:pPr indent="0" marL="0">
+              <a:buNone/>
+            </a:pPr>
+            <a:r>
+              <a:rPr lang="en-US" sz="1050" b="1" dirty="0">
+                <a:solidFill>
+                  <a:srgbClr val="0A7F44"/>
+                </a:solidFill>
+              </a:rPr>
+              <a:t>2 · GROUP</a:t>
+            </a:r>
+            <a:endParaRPr lang="en-US" sz="1050" dirty="0"/>
+          </a:p>
+        </p:txBody>
+      </p:sp>
+      <p:sp>
+        <p:nvSpPr>
+          <p:cNvPr id="14" name="Text 11"/>
+          <p:cNvSpPr txBox="1"/>
+          <p:nvPr/>
+        </p:nvSpPr>
+        <p:spPr>
+          <a:xfrm>
+            <a:off x="2953512" y="2084832"/>
+            <a:ext cx="1783080" cy="566928"/>
+          </a:xfrm>
+          <a:prstGeom prst="rect">
+            <a:avLst/>
+          </a:prstGeom>
+          <a:noFill/>
+          <a:ln/>
+        </p:spPr>
+        <p:txBody>
+          <a:bodyPr wrap="square" lIns="0" tIns="0" rIns="0" bIns="0" rtlCol="0" anchor="t"/>
+          <a:lstStyle/>
+          <a:p>
+            <a:pPr indent="0" marL="0">
+              <a:buNone/>
+            </a:pPr>
+            <a:r>
+              <a:rPr lang="en-US" sz="1500" b="1" dirty="0">
+                <a:solidFill>
+                  <a:srgbClr val="0A0A0B"/>
+                </a:solidFill>
+              </a:rPr>
+              <a:t>Meta's DRAMA</a:t>
+            </a:r>
+            <a:endParaRPr lang="en-US" sz="1500" dirty="0"/>
+          </a:p>
+        </p:txBody>
+      </p:sp>
+      <p:sp>
+        <p:nvSpPr>
+          <p:cNvPr id="15" name="Text 12"/>
+          <p:cNvSpPr txBox="1"/>
+          <p:nvPr/>
+        </p:nvSpPr>
+        <p:spPr>
+          <a:xfrm>
+            <a:off x="2953512" y="2651760"/>
+            <a:ext cx="1783080" cy="594360"/>
+          </a:xfrm>
+          <a:prstGeom prst="rect">
+            <a:avLst/>
+          </a:prstGeom>
+          <a:noFill/>
+          <a:ln/>
+        </p:spPr>
+        <p:txBody>
+          <a:bodyPr wrap="square" lIns="0" tIns="0" rIns="0" bIns="0" rtlCol="0" anchor="t"/>
+          <a:lstStyle/>
+          <a:p>
+            <a:pPr indent="0" marL="0">
+              <a:buNone/>
+            </a:pPr>
+            <a:r>
+              <a:rPr lang="en-US" sz="1100" dirty="0">
+                <a:solidFill>
+                  <a:srgbClr val="55555C"/>
+                </a:solidFill>
+              </a:rPr>
+              <a:t>Groups ideas by meaning; an idea shows at 5 members</a:t>
+            </a:r>
+            <a:endParaRPr lang="en-US" sz="1100" dirty="0"/>
+          </a:p>
+        </p:txBody>
+      </p:sp>
+      <p:sp>
+        <p:nvSpPr>
+          <p:cNvPr id="16" name="Shape 13"/>
+          <p:cNvSpPr/>
+          <p:nvPr/>
+        </p:nvSpPr>
+        <p:spPr>
+          <a:xfrm>
+            <a:off x="4864608" y="2487168"/>
+            <a:ext cx="146304" cy="0"/>
+          </a:xfrm>
+          <a:prstGeom prst="line">
+            <a:avLst/>
+          </a:prstGeom>
+          <a:noFill/>
+          <a:ln w="22225">
+            <a:solidFill>
+              <a:srgbClr val="8A8A92"/>
+            </a:solidFill>
+            <a:prstDash val="solid"/>
+            <a:tailEnd type="triangle"/>
+          </a:ln>
+        </p:spPr>
+      </p:sp>
+      <p:sp>
+        <p:nvSpPr>
+          <p:cNvPr id="17" name="Shape 14"/>
+          <p:cNvSpPr/>
+          <p:nvPr/>
+        </p:nvSpPr>
+        <p:spPr>
+          <a:xfrm>
+            <a:off x="5029200" y="1691640"/>
+            <a:ext cx="2057400" cy="1600200"/>
+          </a:xfrm>
+          <a:prstGeom prst="roundRect">
+            <a:avLst>
+              <a:gd name="adj" fmla="val 6857"/>
+            </a:avLst>
+          </a:prstGeom>
+          <a:solidFill>
+            <a:srgbClr val="FFFFFF"/>
+          </a:solidFill>
+          <a:ln w="12700">
+            <a:solidFill>
+              <a:srgbClr val="DCDCE0"/>
+            </a:solidFill>
+            <a:prstDash val="solid"/>
+          </a:ln>
+        </p:spPr>
+      </p:sp>
+      <p:sp>
+        <p:nvSpPr>
+          <p:cNvPr id="18" name="Text 15"/>
+          <p:cNvSpPr txBox="1"/>
+          <p:nvPr/>
+        </p:nvSpPr>
+        <p:spPr>
+          <a:xfrm>
+            <a:off x="5193792" y="1828800"/>
+            <a:ext cx="1737360" cy="228600"/>
+          </a:xfrm>
+          <a:prstGeom prst="rect">
+            <a:avLst/>
+          </a:prstGeom>
+          <a:noFill/>
+          <a:ln/>
+        </p:spPr>
+        <p:txBody>
+          <a:bodyPr wrap="square" lIns="0" tIns="0" rIns="0" bIns="0" rtlCol="0" anchor="t"/>
+          <a:lstStyle/>
+          <a:p>
+            <a:pPr indent="0" marL="0">
+              <a:buNone/>
+            </a:pPr>
+            <a:r>
+              <a:rPr lang="en-US" sz="1050" b="1" dirty="0">
+                <a:solidFill>
+                  <a:srgbClr val="0A7F44"/>
+                </a:solidFill>
+              </a:rPr>
+              <a:t>3 · VOTE</a:t>
+            </a:r>
+            <a:endParaRPr lang="en-US" sz="1050" dirty="0"/>
+          </a:p>
+        </p:txBody>
+      </p:sp>
+      <p:sp>
+        <p:nvSpPr>
+          <p:cNvPr id="19" name="Text 16"/>
+          <p:cNvSpPr txBox="1"/>
+          <p:nvPr/>
+        </p:nvSpPr>
+        <p:spPr>
+          <a:xfrm>
+            <a:off x="5193792" y="2084832"/>
+            <a:ext cx="1783080" cy="566928"/>
+          </a:xfrm>
+          <a:prstGeom prst="rect">
+            <a:avLst/>
+          </a:prstGeom>
+          <a:noFill/>
+          <a:ln/>
+        </p:spPr>
+        <p:txBody>
+          <a:bodyPr wrap="square" lIns="0" tIns="0" rIns="0" bIns="0" rtlCol="0" anchor="t"/>
+          <a:lstStyle/>
+          <a:p>
+            <a:pPr indent="0" marL="0">
+              <a:buNone/>
+            </a:pPr>
+            <a:r>
+              <a:rPr lang="en-US" sz="1500" b="1" dirty="0">
+                <a:solidFill>
+                  <a:srgbClr val="0A0A0B"/>
+                </a:solidFill>
+              </a:rPr>
+              <a:t>Quadratic votes</a:t>
+            </a:r>
+            <a:endParaRPr lang="en-US" sz="1500" dirty="0"/>
+          </a:p>
+        </p:txBody>
+      </p:sp>
+      <p:sp>
+        <p:nvSpPr>
+          <p:cNvPr id="20" name="Text 17"/>
+          <p:cNvSpPr txBox="1"/>
+          <p:nvPr/>
+        </p:nvSpPr>
+        <p:spPr>
+          <a:xfrm>
+            <a:off x="5193792" y="2651760"/>
+            <a:ext cx="1783080" cy="594360"/>
+          </a:xfrm>
+          <a:prstGeom prst="rect">
+            <a:avLst/>
+          </a:prstGeom>
+          <a:noFill/>
+          <a:ln/>
+        </p:spPr>
+        <p:txBody>
+          <a:bodyPr wrap="square" lIns="0" tIns="0" rIns="0" bIns="0" rtlCol="0" anchor="t"/>
+          <a:lstStyle/>
+          <a:p>
+            <a:pPr indent="0" marL="0">
+              <a:buNone/>
+            </a:pPr>
+            <a:r>
+              <a:rPr lang="en-US" sz="1100" dirty="0">
+                <a:solidFill>
+                  <a:srgbClr val="55555C"/>
+                </a:solidFill>
+              </a:rPr>
+              <a:t>9 credits a month; n votes cost n²</a:t>
+            </a:r>
+            <a:endParaRPr lang="en-US" sz="1100" dirty="0"/>
+          </a:p>
+        </p:txBody>
+      </p:sp>
+      <p:sp>
+        <p:nvSpPr>
+          <p:cNvPr id="21" name="Shape 18"/>
+          <p:cNvSpPr/>
+          <p:nvPr/>
+        </p:nvSpPr>
+        <p:spPr>
+          <a:xfrm>
+            <a:off x="7104888" y="2487168"/>
+            <a:ext cx="146304" cy="0"/>
+          </a:xfrm>
+          <a:prstGeom prst="line">
+            <a:avLst/>
+          </a:prstGeom>
+          <a:noFill/>
+          <a:ln w="22225">
+            <a:solidFill>
+              <a:srgbClr val="8A8A92"/>
+            </a:solidFill>
+            <a:prstDash val="solid"/>
+            <a:tailEnd type="triangle"/>
+          </a:ln>
+        </p:spPr>
+      </p:sp>
+      <p:sp>
+        <p:nvSpPr>
+          <p:cNvPr id="22" name="Shape 19"/>
+          <p:cNvSpPr/>
+          <p:nvPr/>
+        </p:nvSpPr>
+        <p:spPr>
+          <a:xfrm>
+            <a:off x="7269480" y="1691640"/>
+            <a:ext cx="2057400" cy="1600200"/>
+          </a:xfrm>
+          <a:prstGeom prst="roundRect">
+            <a:avLst>
+              <a:gd name="adj" fmla="val 6857"/>
+            </a:avLst>
+          </a:prstGeom>
+          <a:solidFill>
+            <a:srgbClr val="FFFFFF"/>
+          </a:solidFill>
+          <a:ln w="12700">
+            <a:solidFill>
+              <a:srgbClr val="DCDCE0"/>
+            </a:solidFill>
+            <a:prstDash val="solid"/>
+          </a:ln>
+        </p:spPr>
+      </p:sp>
+      <p:sp>
+        <p:nvSpPr>
+          <p:cNvPr id="23" name="Text 20"/>
+          <p:cNvSpPr txBox="1"/>
+          <p:nvPr/>
+        </p:nvSpPr>
+        <p:spPr>
+          <a:xfrm>
+            <a:off x="7434072" y="1828800"/>
+            <a:ext cx="1737360" cy="228600"/>
+          </a:xfrm>
+          <a:prstGeom prst="rect">
+            <a:avLst/>
+          </a:prstGeom>
+          <a:noFill/>
+          <a:ln/>
+        </p:spPr>
+        <p:txBody>
+          <a:bodyPr wrap="square" lIns="0" tIns="0" rIns="0" bIns="0" rtlCol="0" anchor="t"/>
+          <a:lstStyle/>
+          <a:p>
+            <a:pPr indent="0" marL="0">
+              <a:buNone/>
+            </a:pPr>
+            <a:r>
+              <a:rPr lang="en-US" sz="1050" b="1" dirty="0">
+                <a:solidFill>
+                  <a:srgbClr val="0A7F44"/>
+                </a:solidFill>
+              </a:rPr>
+              <a:t>4 · SPEC</a:t>
+            </a:r>
+            <a:endParaRPr lang="en-US" sz="1050" dirty="0"/>
+          </a:p>
+        </p:txBody>
+      </p:sp>
+      <p:sp>
+        <p:nvSpPr>
+          <p:cNvPr id="24" name="Text 21"/>
+          <p:cNvSpPr txBox="1"/>
+          <p:nvPr/>
+        </p:nvSpPr>
+        <p:spPr>
+          <a:xfrm>
+            <a:off x="7434072" y="2084832"/>
+            <a:ext cx="1783080" cy="566928"/>
+          </a:xfrm>
+          <a:prstGeom prst="rect">
+            <a:avLst/>
+          </a:prstGeom>
+          <a:noFill/>
+          <a:ln/>
+        </p:spPr>
+        <p:txBody>
+          <a:bodyPr wrap="square" lIns="0" tIns="0" rIns="0" bIns="0" rtlCol="0" anchor="t"/>
+          <a:lstStyle/>
+          <a:p>
+            <a:pPr indent="0" marL="0">
+              <a:buNone/>
+            </a:pPr>
+            <a:r>
+              <a:rPr lang="en-US" sz="1500" b="1" dirty="0">
+                <a:solidFill>
+                  <a:srgbClr val="0A0A0B"/>
+                </a:solidFill>
+              </a:rPr>
+              <a:t>Muse Glimmer drafts it</a:t>
+            </a:r>
+            <a:endParaRPr lang="en-US" sz="1500" dirty="0"/>
+          </a:p>
+        </p:txBody>
+      </p:sp>
+      <p:sp>
+        <p:nvSpPr>
+          <p:cNvPr id="25" name="Text 22"/>
+          <p:cNvSpPr txBox="1"/>
+          <p:nvPr/>
+        </p:nvSpPr>
+        <p:spPr>
+          <a:xfrm>
+            <a:off x="7434072" y="2651760"/>
+            <a:ext cx="1783080" cy="594360"/>
+          </a:xfrm>
+          <a:prstGeom prst="rect">
+            <a:avLst/>
+          </a:prstGeom>
+          <a:noFill/>
+          <a:ln/>
+        </p:spPr>
+        <p:txBody>
+          <a:bodyPr wrap="square" lIns="0" tIns="0" rIns="0" bIns="0" rtlCol="0" anchor="t"/>
+          <a:lstStyle/>
+          <a:p>
+            <a:pPr indent="0" marL="0">
+              <a:buNone/>
+            </a:pPr>
+            <a:r>
+              <a:rPr lang="en-US" sz="1100" dirty="0">
+                <a:solidFill>
+                  <a:srgbClr val="55555C"/>
+                </a:solidFill>
+              </a:rPr>
+              <a:t>A person approves the spec</a:t>
+            </a:r>
+            <a:endParaRPr lang="en-US" sz="1100" dirty="0"/>
+          </a:p>
+        </p:txBody>
+      </p:sp>
+      <p:sp>
+        <p:nvSpPr>
+          <p:cNvPr id="26" name="Shape 23"/>
+          <p:cNvSpPr/>
+          <p:nvPr/>
+        </p:nvSpPr>
+        <p:spPr>
+          <a:xfrm>
+            <a:off x="9345168" y="2487168"/>
+            <a:ext cx="146304" cy="0"/>
+          </a:xfrm>
+          <a:prstGeom prst="line">
+            <a:avLst/>
+          </a:prstGeom>
+          <a:noFill/>
+          <a:ln w="22225">
+            <a:solidFill>
+              <a:srgbClr val="8A8A92"/>
+            </a:solidFill>
+            <a:prstDash val="solid"/>
+            <a:tailEnd type="triangle"/>
+          </a:ln>
+        </p:spPr>
+      </p:sp>
+      <p:sp>
+        <p:nvSpPr>
+          <p:cNvPr id="27" name="Shape 24"/>
+          <p:cNvSpPr/>
+          <p:nvPr/>
+        </p:nvSpPr>
+        <p:spPr>
+          <a:xfrm>
+            <a:off x="9509760" y="1691640"/>
+            <a:ext cx="2057400" cy="1600200"/>
+          </a:xfrm>
+          <a:prstGeom prst="roundRect">
+            <a:avLst>
+              <a:gd name="adj" fmla="val 6857"/>
+            </a:avLst>
+          </a:prstGeom>
+          <a:solidFill>
+            <a:srgbClr val="FFFFFF"/>
+          </a:solidFill>
+          <a:ln w="12700">
+            <a:solidFill>
+              <a:srgbClr val="DCDCE0"/>
+            </a:solidFill>
+            <a:prstDash val="solid"/>
+          </a:ln>
+        </p:spPr>
+      </p:sp>
+      <p:sp>
+        <p:nvSpPr>
+          <p:cNvPr id="28" name="Text 25"/>
+          <p:cNvSpPr txBox="1"/>
+          <p:nvPr/>
+        </p:nvSpPr>
+        <p:spPr>
+          <a:xfrm>
+            <a:off x="9674352" y="1828800"/>
+            <a:ext cx="1737360" cy="228600"/>
+          </a:xfrm>
+          <a:prstGeom prst="rect">
+            <a:avLst/>
+          </a:prstGeom>
+          <a:noFill/>
+          <a:ln/>
+        </p:spPr>
+        <p:txBody>
+          <a:bodyPr wrap="square" lIns="0" tIns="0" rIns="0" bIns="0" rtlCol="0" anchor="t"/>
+          <a:lstStyle/>
+          <a:p>
+            <a:pPr indent="0" marL="0">
+              <a:buNone/>
+            </a:pPr>
+            <a:r>
+              <a:rPr lang="en-US" sz="1050" b="1" dirty="0">
+                <a:solidFill>
+                  <a:srgbClr val="0A7F44"/>
+                </a:solidFill>
+              </a:rPr>
+              <a:t>5 · BUILD</a:t>
+            </a:r>
+            <a:endParaRPr lang="en-US" sz="1050" dirty="0"/>
+          </a:p>
+        </p:txBody>
+      </p:sp>
+      <p:sp>
+        <p:nvSpPr>
+          <p:cNvPr id="29" name="Text 26"/>
+          <p:cNvSpPr txBox="1"/>
+          <p:nvPr/>
+        </p:nvSpPr>
+        <p:spPr>
+          <a:xfrm>
+            <a:off x="9674352" y="2084832"/>
+            <a:ext cx="1783080" cy="566928"/>
+          </a:xfrm>
+          <a:prstGeom prst="rect">
+            <a:avLst/>
+          </a:prstGeom>
+          <a:noFill/>
+          <a:ln/>
+        </p:spPr>
+        <p:txBody>
+          <a:bodyPr wrap="square" lIns="0" tIns="0" rIns="0" bIns="0" rtlCol="0" anchor="t"/>
+          <a:lstStyle/>
+          <a:p>
+            <a:pPr indent="0" marL="0">
+              <a:buNone/>
+            </a:pPr>
+            <a:r>
+              <a:rPr lang="en-US" sz="1500" b="1" dirty="0">
+                <a:solidFill>
+                  <a:srgbClr val="0A0A0B"/>
+                </a:solidFill>
+              </a:rPr>
+              <a:t>A coding agent</a:t>
+            </a:r>
+            <a:endParaRPr lang="en-US" sz="1500" dirty="0"/>
+          </a:p>
+        </p:txBody>
+      </p:sp>
+      <p:sp>
+        <p:nvSpPr>
+          <p:cNvPr id="30" name="Text 27"/>
+          <p:cNvSpPr txBox="1"/>
+          <p:nvPr/>
+        </p:nvSpPr>
+        <p:spPr>
+          <a:xfrm>
+            <a:off x="9674352" y="2651760"/>
+            <a:ext cx="1783080" cy="594360"/>
+          </a:xfrm>
+          <a:prstGeom prst="rect">
+            <a:avLst/>
+          </a:prstGeom>
+          <a:noFill/>
+          <a:ln/>
+        </p:spPr>
+        <p:txBody>
+          <a:bodyPr wrap="square" lIns="0" tIns="0" rIns="0" bIns="0" rtlCol="0" anchor="t"/>
+          <a:lstStyle/>
+          <a:p>
+            <a:pPr indent="0" marL="0">
+              <a:buNone/>
+            </a:pPr>
+            <a:r>
+              <a:rPr lang="en-US" sz="1100" dirty="0">
+                <a:solidFill>
+                  <a:srgbClr val="55555C"/>
+                </a:solidFill>
+              </a:rPr>
+              <a:t>On its own branch; it never reads community text</a:t>
+            </a:r>
+            <a:endParaRPr lang="en-US" sz="1100" dirty="0"/>
+          </a:p>
+        </p:txBody>
+      </p:sp>
+      <p:sp>
+        <p:nvSpPr>
+          <p:cNvPr id="31" name="Shape 28"/>
+          <p:cNvSpPr/>
+          <p:nvPr/>
+        </p:nvSpPr>
+        <p:spPr>
+          <a:xfrm>
+            <a:off x="548640" y="3566160"/>
+            <a:ext cx="6949440" cy="1783080"/>
+          </a:xfrm>
+          <a:prstGeom prst="roundRect">
+            <a:avLst>
+              <a:gd name="adj" fmla="val 6154"/>
             </a:avLst>
           </a:prstGeom>
           <a:solidFill>
@@ -9588,6 +9409,1076 @@
       </p:sp>
       <p:sp>
         <p:nvSpPr>
+          <p:cNvPr id="32" name="Text 29"/>
+          <p:cNvSpPr txBox="1"/>
+          <p:nvPr/>
+        </p:nvSpPr>
+        <p:spPr>
+          <a:xfrm>
+            <a:off x="749808" y="3703320"/>
+            <a:ext cx="2743200" cy="228600"/>
+          </a:xfrm>
+          <a:prstGeom prst="rect">
+            <a:avLst/>
+          </a:prstGeom>
+          <a:noFill/>
+          <a:ln/>
+        </p:spPr>
+        <p:txBody>
+          <a:bodyPr wrap="square" lIns="0" tIns="0" rIns="0" bIns="0" rtlCol="0" anchor="t"/>
+          <a:lstStyle/>
+          <a:p>
+            <a:pPr indent="0" marL="0">
+              <a:buNone/>
+            </a:pPr>
+            <a:r>
+              <a:rPr lang="en-US" sz="1050" b="1" dirty="0">
+                <a:solidFill>
+                  <a:srgbClr val="0A7F44"/>
+                </a:solidFill>
+              </a:rPr>
+              <a:t>6 · NINE GATES</a:t>
+            </a:r>
+            <a:endParaRPr lang="en-US" sz="1050" dirty="0"/>
+          </a:p>
+        </p:txBody>
+      </p:sp>
+      <p:sp>
+        <p:nvSpPr>
+          <p:cNvPr id="33" name="Text 30"/>
+          <p:cNvSpPr txBox="1"/>
+          <p:nvPr/>
+        </p:nvSpPr>
+        <p:spPr>
+          <a:xfrm>
+            <a:off x="749808" y="3950208"/>
+            <a:ext cx="4572000" cy="347472"/>
+          </a:xfrm>
+          <a:prstGeom prst="rect">
+            <a:avLst/>
+          </a:prstGeom>
+          <a:noFill/>
+          <a:ln/>
+        </p:spPr>
+        <p:txBody>
+          <a:bodyPr wrap="square" lIns="0" tIns="0" rIns="0" bIns="0" rtlCol="0" anchor="t"/>
+          <a:lstStyle/>
+          <a:p>
+            <a:pPr indent="0" marL="0">
+              <a:buNone/>
+            </a:pPr>
+            <a:r>
+              <a:rPr lang="en-US" sz="1600" b="1" dirty="0">
+                <a:solidFill>
+                  <a:srgbClr val="0A0A0B"/>
+                </a:solidFill>
+              </a:rPr>
+              <a:t>Stops at the first failure</a:t>
+            </a:r>
+            <a:endParaRPr lang="en-US" sz="1600" dirty="0"/>
+          </a:p>
+        </p:txBody>
+      </p:sp>
+      <p:sp>
+        <p:nvSpPr>
+          <p:cNvPr id="34" name="Shape 31"/>
+          <p:cNvSpPr/>
+          <p:nvPr/>
+        </p:nvSpPr>
+        <p:spPr>
+          <a:xfrm>
+            <a:off x="749808" y="4434840"/>
+            <a:ext cx="1298448" cy="310896"/>
+          </a:xfrm>
+          <a:prstGeom prst="roundRect">
+            <a:avLst>
+              <a:gd name="adj" fmla="val 50000"/>
+            </a:avLst>
+          </a:prstGeom>
+          <a:solidFill>
+            <a:srgbClr val="FFFFFF"/>
+          </a:solidFill>
+          <a:ln w="12700">
+            <a:solidFill>
+              <a:srgbClr val="FFFFFF"/>
+            </a:solidFill>
+            <a:prstDash val="solid"/>
+          </a:ln>
+        </p:spPr>
+      </p:sp>
+      <p:sp>
+        <p:nvSpPr>
+          <p:cNvPr id="35" name="Text 32"/>
+          <p:cNvSpPr txBox="1"/>
+          <p:nvPr/>
+        </p:nvSpPr>
+        <p:spPr>
+          <a:xfrm>
+            <a:off x="749808" y="4434840"/>
+            <a:ext cx="1298448" cy="310896"/>
+          </a:xfrm>
+          <a:prstGeom prst="rect">
+            <a:avLst/>
+          </a:prstGeom>
+          <a:noFill/>
+          <a:ln/>
+        </p:spPr>
+        <p:txBody>
+          <a:bodyPr wrap="square" lIns="0" tIns="0" rIns="0" bIns="0" rtlCol="0" anchor="ctr"/>
+          <a:lstStyle/>
+          <a:p>
+            <a:pPr algn="ctr" indent="0" marL="0">
+              <a:buNone/>
+            </a:pPr>
+            <a:r>
+              <a:rPr lang="en-US" sz="950" b="1" dirty="0">
+                <a:solidFill>
+                  <a:srgbClr val="0A7F44"/>
+                </a:solidFill>
+              </a:rPr>
+              <a:t>policy</a:t>
+            </a:r>
+            <a:endParaRPr lang="en-US" sz="950" dirty="0"/>
+          </a:p>
+        </p:txBody>
+      </p:sp>
+      <p:sp>
+        <p:nvSpPr>
+          <p:cNvPr id="36" name="Shape 33"/>
+          <p:cNvSpPr/>
+          <p:nvPr/>
+        </p:nvSpPr>
+        <p:spPr>
+          <a:xfrm>
+            <a:off x="2093976" y="4434840"/>
+            <a:ext cx="1298448" cy="310896"/>
+          </a:xfrm>
+          <a:prstGeom prst="roundRect">
+            <a:avLst>
+              <a:gd name="adj" fmla="val 50000"/>
+            </a:avLst>
+          </a:prstGeom>
+          <a:solidFill>
+            <a:srgbClr val="FFFFFF"/>
+          </a:solidFill>
+          <a:ln w="12700">
+            <a:solidFill>
+              <a:srgbClr val="FFFFFF"/>
+            </a:solidFill>
+            <a:prstDash val="solid"/>
+          </a:ln>
+        </p:spPr>
+      </p:sp>
+      <p:sp>
+        <p:nvSpPr>
+          <p:cNvPr id="37" name="Text 34"/>
+          <p:cNvSpPr txBox="1"/>
+          <p:nvPr/>
+        </p:nvSpPr>
+        <p:spPr>
+          <a:xfrm>
+            <a:off x="2093976" y="4434840"/>
+            <a:ext cx="1298448" cy="310896"/>
+          </a:xfrm>
+          <a:prstGeom prst="rect">
+            <a:avLst/>
+          </a:prstGeom>
+          <a:noFill/>
+          <a:ln/>
+        </p:spPr>
+        <p:txBody>
+          <a:bodyPr wrap="square" lIns="0" tIns="0" rIns="0" bIns="0" rtlCol="0" anchor="ctr"/>
+          <a:lstStyle/>
+          <a:p>
+            <a:pPr algn="ctr" indent="0" marL="0">
+              <a:buNone/>
+            </a:pPr>
+            <a:r>
+              <a:rPr lang="en-US" sz="950" b="1" dirty="0">
+                <a:solidFill>
+                  <a:srgbClr val="0A7F44"/>
+                </a:solidFill>
+              </a:rPr>
+              <a:t>code scan</a:t>
+            </a:r>
+            <a:endParaRPr lang="en-US" sz="950" dirty="0"/>
+          </a:p>
+        </p:txBody>
+      </p:sp>
+      <p:sp>
+        <p:nvSpPr>
+          <p:cNvPr id="38" name="Shape 35"/>
+          <p:cNvSpPr/>
+          <p:nvPr/>
+        </p:nvSpPr>
+        <p:spPr>
+          <a:xfrm>
+            <a:off x="3438144" y="4434840"/>
+            <a:ext cx="1298448" cy="310896"/>
+          </a:xfrm>
+          <a:prstGeom prst="roundRect">
+            <a:avLst>
+              <a:gd name="adj" fmla="val 50000"/>
+            </a:avLst>
+          </a:prstGeom>
+          <a:solidFill>
+            <a:srgbClr val="FFFFFF"/>
+          </a:solidFill>
+          <a:ln w="12700">
+            <a:solidFill>
+              <a:srgbClr val="FFFFFF"/>
+            </a:solidFill>
+            <a:prstDash val="solid"/>
+          </a:ln>
+        </p:spPr>
+      </p:sp>
+      <p:sp>
+        <p:nvSpPr>
+          <p:cNvPr id="39" name="Text 36"/>
+          <p:cNvSpPr txBox="1"/>
+          <p:nvPr/>
+        </p:nvSpPr>
+        <p:spPr>
+          <a:xfrm>
+            <a:off x="3438144" y="4434840"/>
+            <a:ext cx="1298448" cy="310896"/>
+          </a:xfrm>
+          <a:prstGeom prst="rect">
+            <a:avLst/>
+          </a:prstGeom>
+          <a:noFill/>
+          <a:ln/>
+        </p:spPr>
+        <p:txBody>
+          <a:bodyPr wrap="square" lIns="0" tIns="0" rIns="0" bIns="0" rtlCol="0" anchor="ctr"/>
+          <a:lstStyle/>
+          <a:p>
+            <a:pPr algn="ctr" indent="0" marL="0">
+              <a:buNone/>
+            </a:pPr>
+            <a:r>
+              <a:rPr lang="en-US" sz="950" b="1" dirty="0">
+                <a:solidFill>
+                  <a:srgbClr val="0A7F44"/>
+                </a:solidFill>
+              </a:rPr>
+              <a:t>unit tests</a:t>
+            </a:r>
+            <a:endParaRPr lang="en-US" sz="950" dirty="0"/>
+          </a:p>
+        </p:txBody>
+      </p:sp>
+      <p:sp>
+        <p:nvSpPr>
+          <p:cNvPr id="40" name="Shape 37"/>
+          <p:cNvSpPr/>
+          <p:nvPr/>
+        </p:nvSpPr>
+        <p:spPr>
+          <a:xfrm>
+            <a:off x="4782312" y="4434840"/>
+            <a:ext cx="1298448" cy="310896"/>
+          </a:xfrm>
+          <a:prstGeom prst="roundRect">
+            <a:avLst>
+              <a:gd name="adj" fmla="val 50000"/>
+            </a:avLst>
+          </a:prstGeom>
+          <a:solidFill>
+            <a:srgbClr val="FFFFFF"/>
+          </a:solidFill>
+          <a:ln w="12700">
+            <a:solidFill>
+              <a:srgbClr val="FFFFFF"/>
+            </a:solidFill>
+            <a:prstDash val="solid"/>
+          </a:ln>
+        </p:spPr>
+      </p:sp>
+      <p:sp>
+        <p:nvSpPr>
+          <p:cNvPr id="41" name="Text 38"/>
+          <p:cNvSpPr txBox="1"/>
+          <p:nvPr/>
+        </p:nvSpPr>
+        <p:spPr>
+          <a:xfrm>
+            <a:off x="4782312" y="4434840"/>
+            <a:ext cx="1298448" cy="310896"/>
+          </a:xfrm>
+          <a:prstGeom prst="rect">
+            <a:avLst/>
+          </a:prstGeom>
+          <a:noFill/>
+          <a:ln/>
+        </p:spPr>
+        <p:txBody>
+          <a:bodyPr wrap="square" lIns="0" tIns="0" rIns="0" bIns="0" rtlCol="0" anchor="ctr"/>
+          <a:lstStyle/>
+          <a:p>
+            <a:pPr algn="ctr" indent="0" marL="0">
+              <a:buNone/>
+            </a:pPr>
+            <a:r>
+              <a:rPr lang="en-US" sz="950" b="1" dirty="0">
+                <a:solidFill>
+                  <a:srgbClr val="0A7F44"/>
+                </a:solidFill>
+              </a:rPr>
+              <a:t>crash matrix</a:t>
+            </a:r>
+            <a:endParaRPr lang="en-US" sz="950" dirty="0"/>
+          </a:p>
+        </p:txBody>
+      </p:sp>
+      <p:sp>
+        <p:nvSpPr>
+          <p:cNvPr id="42" name="Shape 39"/>
+          <p:cNvSpPr/>
+          <p:nvPr/>
+        </p:nvSpPr>
+        <p:spPr>
+          <a:xfrm>
+            <a:off x="6126480" y="4434840"/>
+            <a:ext cx="1298448" cy="310896"/>
+          </a:xfrm>
+          <a:prstGeom prst="roundRect">
+            <a:avLst>
+              <a:gd name="adj" fmla="val 50000"/>
+            </a:avLst>
+          </a:prstGeom>
+          <a:solidFill>
+            <a:srgbClr val="FFFFFF"/>
+          </a:solidFill>
+          <a:ln w="12700">
+            <a:solidFill>
+              <a:srgbClr val="FFFFFF"/>
+            </a:solidFill>
+            <a:prstDash val="solid"/>
+          </a:ln>
+        </p:spPr>
+      </p:sp>
+      <p:sp>
+        <p:nvSpPr>
+          <p:cNvPr id="43" name="Text 40"/>
+          <p:cNvSpPr txBox="1"/>
+          <p:nvPr/>
+        </p:nvSpPr>
+        <p:spPr>
+          <a:xfrm>
+            <a:off x="6126480" y="4434840"/>
+            <a:ext cx="1298448" cy="310896"/>
+          </a:xfrm>
+          <a:prstGeom prst="rect">
+            <a:avLst/>
+          </a:prstGeom>
+          <a:noFill/>
+          <a:ln/>
+        </p:spPr>
+        <p:txBody>
+          <a:bodyPr wrap="square" lIns="0" tIns="0" rIns="0" bIns="0" rtlCol="0" anchor="ctr"/>
+          <a:lstStyle/>
+          <a:p>
+            <a:pPr algn="ctr" indent="0" marL="0">
+              <a:buNone/>
+            </a:pPr>
+            <a:r>
+              <a:rPr lang="en-US" sz="950" b="1" dirty="0">
+                <a:solidFill>
+                  <a:srgbClr val="0A7F44"/>
+                </a:solidFill>
+              </a:rPr>
+              <a:t>red team</a:t>
+            </a:r>
+            <a:endParaRPr lang="en-US" sz="950" dirty="0"/>
+          </a:p>
+        </p:txBody>
+      </p:sp>
+      <p:sp>
+        <p:nvSpPr>
+          <p:cNvPr id="44" name="Shape 41"/>
+          <p:cNvSpPr/>
+          <p:nvPr/>
+        </p:nvSpPr>
+        <p:spPr>
+          <a:xfrm>
+            <a:off x="749808" y="4855464"/>
+            <a:ext cx="1298448" cy="310896"/>
+          </a:xfrm>
+          <a:prstGeom prst="roundRect">
+            <a:avLst>
+              <a:gd name="adj" fmla="val 50000"/>
+            </a:avLst>
+          </a:prstGeom>
+          <a:solidFill>
+            <a:srgbClr val="FFFFFF"/>
+          </a:solidFill>
+          <a:ln w="12700">
+            <a:solidFill>
+              <a:srgbClr val="FFFFFF"/>
+            </a:solidFill>
+            <a:prstDash val="solid"/>
+          </a:ln>
+        </p:spPr>
+      </p:sp>
+      <p:sp>
+        <p:nvSpPr>
+          <p:cNvPr id="45" name="Text 42"/>
+          <p:cNvSpPr txBox="1"/>
+          <p:nvPr/>
+        </p:nvSpPr>
+        <p:spPr>
+          <a:xfrm>
+            <a:off x="749808" y="4855464"/>
+            <a:ext cx="1298448" cy="310896"/>
+          </a:xfrm>
+          <a:prstGeom prst="rect">
+            <a:avLst/>
+          </a:prstGeom>
+          <a:noFill/>
+          <a:ln/>
+        </p:spPr>
+        <p:txBody>
+          <a:bodyPr wrap="square" lIns="0" tIns="0" rIns="0" bIns="0" rtlCol="0" anchor="ctr"/>
+          <a:lstStyle/>
+          <a:p>
+            <a:pPr algn="ctr" indent="0" marL="0">
+              <a:buNone/>
+            </a:pPr>
+            <a:r>
+              <a:rPr lang="en-US" sz="950" b="1" dirty="0">
+                <a:solidFill>
+                  <a:srgbClr val="0A7F44"/>
+                </a:solidFill>
+              </a:rPr>
+              <a:t>Messenger end to end</a:t>
+            </a:r>
+            <a:endParaRPr lang="en-US" sz="950" dirty="0"/>
+          </a:p>
+        </p:txBody>
+      </p:sp>
+      <p:sp>
+        <p:nvSpPr>
+          <p:cNvPr id="46" name="Shape 43"/>
+          <p:cNvSpPr/>
+          <p:nvPr/>
+        </p:nvSpPr>
+        <p:spPr>
+          <a:xfrm>
+            <a:off x="2093976" y="4855464"/>
+            <a:ext cx="1298448" cy="310896"/>
+          </a:xfrm>
+          <a:prstGeom prst="roundRect">
+            <a:avLst>
+              <a:gd name="adj" fmla="val 50000"/>
+            </a:avLst>
+          </a:prstGeom>
+          <a:solidFill>
+            <a:srgbClr val="FFFFFF"/>
+          </a:solidFill>
+          <a:ln w="12700">
+            <a:solidFill>
+              <a:srgbClr val="FFFFFF"/>
+            </a:solidFill>
+            <a:prstDash val="solid"/>
+          </a:ln>
+        </p:spPr>
+      </p:sp>
+      <p:sp>
+        <p:nvSpPr>
+          <p:cNvPr id="47" name="Text 44"/>
+          <p:cNvSpPr txBox="1"/>
+          <p:nvPr/>
+        </p:nvSpPr>
+        <p:spPr>
+          <a:xfrm>
+            <a:off x="2093976" y="4855464"/>
+            <a:ext cx="1298448" cy="310896"/>
+          </a:xfrm>
+          <a:prstGeom prst="rect">
+            <a:avLst/>
+          </a:prstGeom>
+          <a:noFill/>
+          <a:ln/>
+        </p:spPr>
+        <p:txBody>
+          <a:bodyPr wrap="square" lIns="0" tIns="0" rIns="0" bIns="0" rtlCol="0" anchor="ctr"/>
+          <a:lstStyle/>
+          <a:p>
+            <a:pPr algn="ctr" indent="0" marL="0">
+              <a:buNone/>
+            </a:pPr>
+            <a:r>
+              <a:rPr lang="en-US" sz="950" b="1" dirty="0">
+                <a:solidFill>
+                  <a:srgbClr val="0A7F44"/>
+                </a:solidFill>
+              </a:rPr>
+              <a:t>Autopilot pass^3</a:t>
+            </a:r>
+            <a:endParaRPr lang="en-US" sz="950" dirty="0"/>
+          </a:p>
+        </p:txBody>
+      </p:sp>
+      <p:sp>
+        <p:nvSpPr>
+          <p:cNvPr id="48" name="Shape 45"/>
+          <p:cNvSpPr/>
+          <p:nvPr/>
+        </p:nvSpPr>
+        <p:spPr>
+          <a:xfrm>
+            <a:off x="3438144" y="4855464"/>
+            <a:ext cx="1298448" cy="310896"/>
+          </a:xfrm>
+          <a:prstGeom prst="roundRect">
+            <a:avLst>
+              <a:gd name="adj" fmla="val 50000"/>
+            </a:avLst>
+          </a:prstGeom>
+          <a:solidFill>
+            <a:srgbClr val="FFFFFF"/>
+          </a:solidFill>
+          <a:ln w="12700">
+            <a:solidFill>
+              <a:srgbClr val="FFFFFF"/>
+            </a:solidFill>
+            <a:prstDash val="solid"/>
+          </a:ln>
+        </p:spPr>
+      </p:sp>
+      <p:sp>
+        <p:nvSpPr>
+          <p:cNvPr id="49" name="Text 46"/>
+          <p:cNvSpPr txBox="1"/>
+          <p:nvPr/>
+        </p:nvSpPr>
+        <p:spPr>
+          <a:xfrm>
+            <a:off x="3438144" y="4855464"/>
+            <a:ext cx="1298448" cy="310896"/>
+          </a:xfrm>
+          <a:prstGeom prst="rect">
+            <a:avLst/>
+          </a:prstGeom>
+          <a:noFill/>
+          <a:ln/>
+        </p:spPr>
+        <p:txBody>
+          <a:bodyPr wrap="square" lIns="0" tIns="0" rIns="0" bIns="0" rtlCol="0" anchor="ctr"/>
+          <a:lstStyle/>
+          <a:p>
+            <a:pPr algn="ctr" indent="0" marL="0">
+              <a:buNone/>
+            </a:pPr>
+            <a:r>
+              <a:rPr lang="en-US" sz="950" b="1" dirty="0">
+                <a:solidFill>
+                  <a:srgbClr val="0A7F44"/>
+                </a:solidFill>
+              </a:rPr>
+              <a:t>oracle</a:t>
+            </a:r>
+            <a:endParaRPr lang="en-US" sz="950" dirty="0"/>
+          </a:p>
+        </p:txBody>
+      </p:sp>
+      <p:sp>
+        <p:nvSpPr>
+          <p:cNvPr id="50" name="Shape 47"/>
+          <p:cNvSpPr/>
+          <p:nvPr/>
+        </p:nvSpPr>
+        <p:spPr>
+          <a:xfrm>
+            <a:off x="4782312" y="4855464"/>
+            <a:ext cx="1298448" cy="310896"/>
+          </a:xfrm>
+          <a:prstGeom prst="roundRect">
+            <a:avLst>
+              <a:gd name="adj" fmla="val 50000"/>
+            </a:avLst>
+          </a:prstGeom>
+          <a:solidFill>
+            <a:srgbClr val="FFFFFF"/>
+          </a:solidFill>
+          <a:ln w="12700">
+            <a:solidFill>
+              <a:srgbClr val="FFFFFF"/>
+            </a:solidFill>
+            <a:prstDash val="solid"/>
+          </a:ln>
+        </p:spPr>
+      </p:sp>
+      <p:sp>
+        <p:nvSpPr>
+          <p:cNvPr id="51" name="Text 48"/>
+          <p:cNvSpPr txBox="1"/>
+          <p:nvPr/>
+        </p:nvSpPr>
+        <p:spPr>
+          <a:xfrm>
+            <a:off x="4782312" y="4855464"/>
+            <a:ext cx="1298448" cy="310896"/>
+          </a:xfrm>
+          <a:prstGeom prst="rect">
+            <a:avLst/>
+          </a:prstGeom>
+          <a:noFill/>
+          <a:ln/>
+        </p:spPr>
+        <p:txBody>
+          <a:bodyPr wrap="square" lIns="0" tIns="0" rIns="0" bIns="0" rtlCol="0" anchor="ctr"/>
+          <a:lstStyle/>
+          <a:p>
+            <a:pPr algn="ctr" indent="0" marL="0">
+              <a:buNone/>
+            </a:pPr>
+            <a:r>
+              <a:rPr lang="en-US" sz="950" b="1" dirty="0">
+                <a:solidFill>
+                  <a:srgbClr val="0A7F44"/>
+                </a:solidFill>
+              </a:rPr>
+              <a:t>privacy canary</a:t>
+            </a:r>
+            <a:endParaRPr lang="en-US" sz="950" dirty="0"/>
+          </a:p>
+        </p:txBody>
+      </p:sp>
+      <p:sp>
+        <p:nvSpPr>
+          <p:cNvPr id="52" name="Shape 49"/>
+          <p:cNvSpPr/>
+          <p:nvPr/>
+        </p:nvSpPr>
+        <p:spPr>
+          <a:xfrm>
+            <a:off x="7543800" y="4453128"/>
+            <a:ext cx="274320" cy="0"/>
+          </a:xfrm>
+          <a:prstGeom prst="line">
+            <a:avLst/>
+          </a:prstGeom>
+          <a:noFill/>
+          <a:ln w="22225">
+            <a:solidFill>
+              <a:srgbClr val="8A8A92"/>
+            </a:solidFill>
+            <a:prstDash val="solid"/>
+            <a:tailEnd type="triangle"/>
+          </a:ln>
+        </p:spPr>
+      </p:sp>
+      <p:sp>
+        <p:nvSpPr>
+          <p:cNvPr id="53" name="Shape 50"/>
+          <p:cNvSpPr/>
+          <p:nvPr/>
+        </p:nvSpPr>
+        <p:spPr>
+          <a:xfrm>
+            <a:off x="7863840" y="3566160"/>
+            <a:ext cx="3749040" cy="1783080"/>
+          </a:xfrm>
+          <a:prstGeom prst="roundRect">
+            <a:avLst>
+              <a:gd name="adj" fmla="val 6154"/>
+            </a:avLst>
+          </a:prstGeom>
+          <a:solidFill>
+            <a:srgbClr val="FFFFFF"/>
+          </a:solidFill>
+          <a:ln w="25400">
+            <a:solidFill>
+              <a:srgbClr val="D1352B"/>
+            </a:solidFill>
+            <a:prstDash val="solid"/>
+          </a:ln>
+        </p:spPr>
+      </p:sp>
+      <p:sp>
+        <p:nvSpPr>
+          <p:cNvPr id="54" name="Text 51"/>
+          <p:cNvSpPr txBox="1"/>
+          <p:nvPr/>
+        </p:nvSpPr>
+        <p:spPr>
+          <a:xfrm>
+            <a:off x="8065008" y="3703320"/>
+            <a:ext cx="3291840" cy="228600"/>
+          </a:xfrm>
+          <a:prstGeom prst="rect">
+            <a:avLst/>
+          </a:prstGeom>
+          <a:noFill/>
+          <a:ln/>
+        </p:spPr>
+        <p:txBody>
+          <a:bodyPr wrap="square" lIns="0" tIns="0" rIns="0" bIns="0" rtlCol="0" anchor="t"/>
+          <a:lstStyle/>
+          <a:p>
+            <a:pPr indent="0" marL="0">
+              <a:buNone/>
+            </a:pPr>
+            <a:r>
+              <a:rPr lang="en-US" sz="1050" b="1" dirty="0">
+                <a:solidFill>
+                  <a:srgbClr val="D1352B"/>
+                </a:solidFill>
+              </a:rPr>
+              <a:t>7 · SHIP, OR ROLL BACK</a:t>
+            </a:r>
+            <a:endParaRPr lang="en-US" sz="1050" dirty="0"/>
+          </a:p>
+        </p:txBody>
+      </p:sp>
+      <p:sp>
+        <p:nvSpPr>
+          <p:cNvPr id="55" name="Text 52"/>
+          <p:cNvSpPr txBox="1"/>
+          <p:nvPr/>
+        </p:nvSpPr>
+        <p:spPr>
+          <a:xfrm>
+            <a:off x="8065008" y="3950208"/>
+            <a:ext cx="3291840" cy="347472"/>
+          </a:xfrm>
+          <a:prstGeom prst="rect">
+            <a:avLst/>
+          </a:prstGeom>
+          <a:noFill/>
+          <a:ln/>
+        </p:spPr>
+        <p:txBody>
+          <a:bodyPr wrap="square" lIns="0" tIns="0" rIns="0" bIns="0" rtlCol="0" anchor="t"/>
+          <a:lstStyle/>
+          <a:p>
+            <a:pPr indent="0" marL="0">
+              <a:buNone/>
+            </a:pPr>
+            <a:r>
+              <a:rPr lang="en-US" sz="1600" b="1" dirty="0">
+                <a:solidFill>
+                  <a:srgbClr val="0A0A0B"/>
+                </a:solidFill>
+              </a:rPr>
+              <a:t>A small canary</a:t>
+            </a:r>
+            <a:endParaRPr lang="en-US" sz="1600" dirty="0"/>
+          </a:p>
+        </p:txBody>
+      </p:sp>
+      <p:sp>
+        <p:nvSpPr>
+          <p:cNvPr id="56" name="Text 53"/>
+          <p:cNvSpPr txBox="1"/>
+          <p:nvPr/>
+        </p:nvSpPr>
+        <p:spPr>
+          <a:xfrm>
+            <a:off x="8065008" y="4370832"/>
+            <a:ext cx="3383280" cy="868680"/>
+          </a:xfrm>
+          <a:prstGeom prst="rect">
+            <a:avLst/>
+          </a:prstGeom>
+          <a:noFill/>
+          <a:ln/>
+        </p:spPr>
+        <p:txBody>
+          <a:bodyPr wrap="square" lIns="0" tIns="0" rIns="0" bIns="0" rtlCol="0" anchor="t"/>
+          <a:lstStyle/>
+          <a:p>
+            <a:pPr indent="0" marL="0">
+              <a:buNone/>
+            </a:pPr>
+            <a:r>
+              <a:rPr lang="en-US" sz="1200" dirty="0">
+                <a:solidFill>
+                  <a:srgbClr val="55555C"/>
+                </a:solidFill>
+              </a:rPr>
+              <a:t>Turns itself off if thumbs down rise. Anything beyond a safe setting waits for a person.</a:t>
+            </a:r>
+            <a:endParaRPr lang="en-US" sz="1200" dirty="0"/>
+          </a:p>
+        </p:txBody>
+      </p:sp>
+      <p:sp>
+        <p:nvSpPr>
+          <p:cNvPr id="57" name="Shape 54"/>
+          <p:cNvSpPr/>
+          <p:nvPr/>
+        </p:nvSpPr>
+        <p:spPr>
+          <a:xfrm>
+            <a:off x="548640" y="5577840"/>
+            <a:ext cx="11064240" cy="658368"/>
+          </a:xfrm>
+          <a:prstGeom prst="roundRect">
+            <a:avLst>
+              <a:gd name="adj" fmla="val 16667"/>
+            </a:avLst>
+          </a:prstGeom>
+          <a:solidFill>
+            <a:srgbClr val="0A0A0B"/>
+          </a:solidFill>
+          <a:ln w="12700">
+            <a:solidFill>
+              <a:srgbClr val="0A0A0B"/>
+            </a:solidFill>
+            <a:prstDash val="solid"/>
+          </a:ln>
+        </p:spPr>
+      </p:sp>
+      <p:sp>
+        <p:nvSpPr>
+          <p:cNvPr id="58" name="Text 55"/>
+          <p:cNvSpPr txBox="1"/>
+          <p:nvPr/>
+        </p:nvSpPr>
+        <p:spPr>
+          <a:xfrm>
+            <a:off x="777240" y="5577840"/>
+            <a:ext cx="1463040" cy="658368"/>
+          </a:xfrm>
+          <a:prstGeom prst="rect">
+            <a:avLst/>
+          </a:prstGeom>
+          <a:noFill/>
+          <a:ln/>
+        </p:spPr>
+        <p:txBody>
+          <a:bodyPr wrap="square" lIns="0" tIns="0" rIns="0" bIns="0" rtlCol="0" anchor="ctr"/>
+          <a:lstStyle/>
+          <a:p>
+            <a:pPr indent="0" marL="0">
+              <a:buNone/>
+            </a:pPr>
+            <a:r>
+              <a:rPr lang="en-US" sz="1200" b="1" dirty="0">
+                <a:solidFill>
+                  <a:srgbClr val="FFFFFF"/>
+                </a:solidFill>
+              </a:rPr>
+              <a:t>NEVER-LIST</a:t>
+            </a:r>
+            <a:endParaRPr lang="en-US" sz="1200" dirty="0"/>
+          </a:p>
+        </p:txBody>
+      </p:sp>
+      <p:sp>
+        <p:nvSpPr>
+          <p:cNvPr id="59" name="Text 56"/>
+          <p:cNvSpPr txBox="1"/>
+          <p:nvPr/>
+        </p:nvSpPr>
+        <p:spPr>
+          <a:xfrm>
+            <a:off x="2240280" y="5577840"/>
+            <a:ext cx="9235440" cy="658368"/>
+          </a:xfrm>
+          <a:prstGeom prst="rect">
+            <a:avLst/>
+          </a:prstGeom>
+          <a:noFill/>
+          <a:ln/>
+        </p:spPr>
+        <p:txBody>
+          <a:bodyPr wrap="square" lIns="0" tIns="0" rIns="0" bIns="0" rtlCol="0" anchor="ctr"/>
+          <a:lstStyle/>
+          <a:p>
+            <a:pPr indent="0" marL="0">
+              <a:buNone/>
+            </a:pPr>
+            <a:r>
+              <a:rPr lang="en-US" sz="1300" dirty="0">
+                <a:solidFill>
+                  <a:srgbClr val="FFFFFF"/>
+                </a:solidFill>
+              </a:rPr>
+              <a:t>Booking without a yes · data off the server · a diagnosis or a dose · the guards · the tests · A2A · deployment</a:t>
+            </a:r>
+            <a:endParaRPr lang="en-US" sz="1300" dirty="0"/>
+          </a:p>
+        </p:txBody>
+      </p:sp>
+      <p:sp>
+        <p:nvSpPr>
+          <p:cNvPr id="25" name="Slide Number Placeholder 0"/>
+          <p:cNvSpPr>
+            <a:spLocks noGrp="1"/>
+          </p:cNvSpPr>
+          <p:nvPr>
+            <p:ph type="sldNum" sz="quarter" idx="4294967295"/>
+          </p:nvPr>
+        </p:nvSpPr>
+        <p:spPr>
+          <a:xfrm>
+            <a:off x="11247120" y="6446520"/>
+            <a:ext cx="411480" cy="228600"/>
+          </a:xfrm>
+          <a:prstGeom prst="rect">
+            <a:avLst/>
+          </a:prstGeom>
+          <a:extLst>
+            <a:ext uri="{C572A759-6A51-4108-AA02-DFA0A04FC94B}">
+              <ma14:wrappingTextBoxFlag xmlns:ma14="http://schemas.microsoft.com/office/mac/drawingml/2011/main" val="0"/>
+            </a:ext>
+          </a:extLst>
+        </p:spPr>
+        <p:txBody>
+          <a:bodyPr/>
+          <a:lstStyle>
+            <a:lvl1pPr>
+              <a:defRPr sz="1000">
+                <a:solidFill>
+                  <a:srgbClr val="8A8A92"/>
+                </a:solidFill>
+              </a:defRPr>
+            </a:lvl1pPr>
+          </a:lstStyle>
+          <a:p>
+            <a:pPr algn="r"/>
+            <a:fld id="{F7021451-1387-4CA6-816F-3879F97B5CBC}" type="slidenum">
+              <a:rPr b="0" lang="en-US"/>
+              <a:t>16</a:t>
+            </a:fld>
+            <a:endParaRPr lang="en-US"/>
+          </a:p>
+        </p:txBody>
+      </p:sp>
+    </p:spTree>
+  </p:cSld>
+  <p:clrMapOvr>
+    <a:masterClrMapping/>
+  </p:clrMapOvr>
+</p:sld>
+</file>
+
+<file path=ppt/slides/slide17.xml><?xml version="1.0" encoding="utf-8"?>
+<p:sld xmlns:a="http://schemas.openxmlformats.org/drawingml/2006/main" xmlns:r="http://schemas.openxmlformats.org/officeDocument/2006/relationships" xmlns:p="http://schemas.openxmlformats.org/presentationml/2006/main">
+  <p:cSld name="Slide 17">
+    <p:spTree>
+      <p:nvGrpSpPr>
+        <p:cNvPr id="1" name=""/>
+        <p:cNvGrpSpPr/>
+        <p:nvPr/>
+      </p:nvGrpSpPr>
+      <p:grpSpPr>
+        <a:xfrm>
+          <a:off x="0" y="0"/>
+          <a:ext cx="0" cy="0"/>
+          <a:chOff x="0" y="0"/>
+          <a:chExt cx="0" cy="0"/>
+        </a:xfrm>
+      </p:grpSpPr>
+      <p:sp>
+        <p:nvSpPr>
+          <p:cNvPr id="2" name="Text 0"/>
+          <p:cNvSpPr/>
+          <p:nvPr>
+            <p:ph idx="100" type="body" hasCustomPrompt="1"/>
+          </p:nvPr>
+        </p:nvSpPr>
+        <p:spPr>
+          <a:xfrm>
+            <a:off x="548640" y="384048"/>
+            <a:ext cx="11064240" cy="310896"/>
+          </a:xfrm>
+          <a:prstGeom prst="rect">
+            <a:avLst/>
+          </a:prstGeom>
+          <a:noFill/>
+          <a:ln/>
+        </p:spPr>
+        <p:txBody>
+          <a:bodyPr wrap="square" lIns="0" tIns="0" rIns="0" bIns="0" rtlCol="0" anchor="t"/>
+          <a:lstStyle/>
+          <a:p>
+            <a:pPr indent="0" marL="0">
+              <a:buNone/>
+            </a:pPr>
+            <a:r>
+              <a:rPr lang="en-US" sz="1300" b="1" spc="100" kern="0" dirty="0">
+                <a:solidFill>
+                  <a:srgbClr val="0A7F44"/>
+                </a:solidFill>
+              </a:rPr>
+              <a:t>MEASURED</a:t>
+            </a:r>
+            <a:endParaRPr lang="en-US" sz="1300" dirty="0"/>
+          </a:p>
+        </p:txBody>
+      </p:sp>
+      <p:sp>
+        <p:nvSpPr>
+          <p:cNvPr id="3" name="Text 0"/>
+          <p:cNvSpPr/>
+          <p:nvPr>
+            <p:ph idx="101" type="title" hasCustomPrompt="1"/>
+          </p:nvPr>
+        </p:nvSpPr>
+        <p:spPr>
+          <a:xfrm>
+            <a:off x="548640" y="713232"/>
+            <a:ext cx="11064240" cy="685800"/>
+          </a:xfrm>
+          <a:prstGeom prst="rect">
+            <a:avLst/>
+          </a:prstGeom>
+          <a:noFill/>
+          <a:ln/>
+        </p:spPr>
+        <p:txBody>
+          <a:bodyPr wrap="square" lIns="0" tIns="0" rIns="0" bIns="0" rtlCol="0" anchor="t"/>
+          <a:lstStyle/>
+          <a:p>
+            <a:pPr algn="l" indent="0" marL="0">
+              <a:buNone/>
+            </a:pPr>
+            <a:r>
+              <a:rPr lang="en-US" sz="3200" b="1" dirty="0">
+                <a:solidFill>
+                  <a:srgbClr val="0A0A0B"/>
+                </a:solidFill>
+              </a:rPr>
+              <a:t>Every claim has a log behind it</a:t>
+            </a:r>
+            <a:endParaRPr lang="en-US" sz="3200" dirty="0"/>
+          </a:p>
+        </p:txBody>
+      </p:sp>
+      <p:sp>
+        <p:nvSpPr>
+          <p:cNvPr id="5" name="Shape 2"/>
+          <p:cNvSpPr/>
+          <p:nvPr/>
+        </p:nvSpPr>
+        <p:spPr>
+          <a:xfrm>
+            <a:off x="548640" y="1691640"/>
+            <a:ext cx="2670048" cy="1234440"/>
+          </a:xfrm>
+          <a:prstGeom prst="roundRect">
+            <a:avLst>
+              <a:gd name="adj" fmla="val 8889"/>
+            </a:avLst>
+          </a:prstGeom>
+          <a:solidFill>
+            <a:srgbClr val="E9F3EC"/>
+          </a:solidFill>
+          <a:ln w="12700">
+            <a:solidFill>
+              <a:srgbClr val="E9F3EC"/>
+            </a:solidFill>
+            <a:prstDash val="solid"/>
+          </a:ln>
+        </p:spPr>
+      </p:sp>
+      <p:sp>
+        <p:nvSpPr>
           <p:cNvPr id="6" name="Text 3"/>
           <p:cNvSpPr txBox="1"/>
           <p:nvPr/>
@@ -9957,7 +10848,7 @@
       </p:sp>
       <p:graphicFrame>
         <p:nvGraphicFramePr>
-          <p:cNvPr id="17" name="Table 0"/>
+          <p:cNvPr id="18" name="Table 0"/>
           <p:cNvGraphicFramePr>
             <a:graphicFrameLocks noGrp="1"/>
           </p:cNvGraphicFramePr>
@@ -11610,7 +12501,7 @@
             <a:pPr algn="r"/>
             <a:fld id="{F7021451-1387-4CA6-816F-3879F97B5CBC}" type="slidenum">
               <a:rPr b="0" lang="en-US"/>
-              <a:t>16</a:t>
+              <a:t>17</a:t>
             </a:fld>
             <a:endParaRPr lang="en-US"/>
           </a:p>
@@ -11624,9 +12515,9 @@
 </p:sld>
 </file>
 
-<file path=ppt/slides/slide17.xml><?xml version="1.0" encoding="utf-8"?>
+<file path=ppt/slides/slide18.xml><?xml version="1.0" encoding="utf-8"?>
 <p:sld xmlns:a="http://schemas.openxmlformats.org/drawingml/2006/main" xmlns:r="http://schemas.openxmlformats.org/officeDocument/2006/relationships" xmlns:p="http://schemas.openxmlformats.org/presentationml/2006/main">
-  <p:cSld name="Slide 17">
+  <p:cSld name="Slide 18">
     <p:spTree>
       <p:nvGrpSpPr>
         <p:cNvPr id="1" name=""/>
@@ -14135,7 +15026,7 @@
             <a:pPr algn="r"/>
             <a:fld id="{F7021451-1387-4CA6-816F-3879F97B5CBC}" type="slidenum">
               <a:rPr b="0" lang="en-US"/>
-              <a:t>17</a:t>
+              <a:t>18</a:t>
             </a:fld>
             <a:endParaRPr lang="en-US"/>
           </a:p>
@@ -14149,9 +15040,9 @@
 </p:sld>
 </file>
 
-<file path=ppt/slides/slide18.xml><?xml version="1.0" encoding="utf-8"?>
+<file path=ppt/slides/slide19.xml><?xml version="1.0" encoding="utf-8"?>
 <p:sld xmlns:a="http://schemas.openxmlformats.org/drawingml/2006/main" xmlns:r="http://schemas.openxmlformats.org/officeDocument/2006/relationships" xmlns:p="http://schemas.openxmlformats.org/presentationml/2006/main">
-  <p:cSld name="Slide 18">
+  <p:cSld name="Slide 19">
     <p:spTree>
       <p:nvGrpSpPr>
         <p:cNvPr id="1" name=""/>

--- a/video/deck/Serve_Meta_deck.pptx
+++ b/video/deck/Serve_Meta_deck.pptx
@@ -127,26 +127,26 @@
   <p:extLst>
     <p:ext uri="{521415D9-36F7-43E2-AB2F-B90AF26B5E84}">
       <p14:sectionLst xmlns:p14="http://schemas.microsoft.com/office/powerpoint/2010/main">
-        <p14:section name="Opening" id="{f5d3bd8b-e95f-031b-164a-a97a7afdc849}">
+        <p14:section name="Opening" id="{5ec2f8fe-0c47-5742-1e59-24baaff3efc9}">
           <p14:sldIdLst>
             <p14:sldId id="256"/>
             <p14:sldId id="257"/>
           </p14:sldIdLst>
         </p14:section>
-        <p14:section name="Impact" id="{8cb1c167-f83f-3b7f-d318-20b177406a9c}">
+        <p14:section name="Impact" id="{7f8d7693-8a41-b8d3-c378-e21ad245bce1}">
           <p14:sldIdLst>
             <p14:sldId id="258"/>
             <p14:sldId id="259"/>
           </p14:sldIdLst>
         </p14:section>
-        <p14:section name="Demo" id="{ddd2c8c9-1e2e-3cd9-e877-4a6a9a0429e7}">
+        <p14:section name="Demo" id="{197d026d-b350-25f1-7ad8-e28772db9e03}">
           <p14:sldIdLst>
             <p14:sldId id="260"/>
             <p14:sldId id="261"/>
             <p14:sldId id="262"/>
           </p14:sldIdLst>
         </p14:section>
-        <p14:section name="Use of Meta AI" id="{2cdb41f6-4cd6-0919-a964-cc63a362ff1d}">
+        <p14:section name="Use of Meta AI" id="{ed4cc494-3e64-46a4-1249-5eb67f4beceb}">
           <p14:sldIdLst>
             <p14:sldId id="263"/>
             <p14:sldId id="264"/>
@@ -155,7 +155,7 @@
             <p14:sldId id="267"/>
           </p14:sldIdLst>
         </p14:section>
-        <p14:section name="Technical depth" id="{45f12e07-451d-dc3a-b9b0-f4327dad4a5f}">
+        <p14:section name="Technical depth" id="{071b5c9d-14c0-d257-4f96-fb959bb6778e}">
           <p14:sldIdLst>
             <p14:sldId id="268"/>
             <p14:sldId id="269"/>
@@ -166,12 +166,12 @@
             <p14:sldId id="274"/>
           </p14:sldIdLst>
         </p14:section>
-        <p14:section name="Architecture" id="{47c009e6-e3e1-c2e0-721c-229fa3a4d82a}">
+        <p14:section name="Architecture" id="{44fc56a7-9a58-cc57-531f-1f31c260be51}">
           <p14:sldIdLst>
             <p14:sldId id="275"/>
           </p14:sldIdLst>
         </p14:section>
-        <p14:section name="Close" id="{23d1dcbc-6e90-5b73-b92c-ee3e0f5b8d73}">
+        <p14:section name="Close" id="{4d5c1209-1fe8-d2bf-e0fa-1feb8b961345}">
           <p14:sldIdLst>
             <p14:sldId id="276"/>
           </p14:sldIdLst>
@@ -1893,7 +1893,7 @@
           <a:p>
             <a:r>
               <a:rPr lang="en-US" dirty="0"/>
-              <a:t>Highlight 管線：DETR 找人 → Sapiens2 讀姿勢、找最快的揮拍 → SAM 2.1 把你切出來 → MapAnything 算深度和相機，時間暫停、鏡頭繞 20° → Muse Glimmer 寫說明，程式核對 → 一鍵分享到 Instagram。影片不離開伺服器。
+              <a:t>Highlight 管線（右邊都是同一記殺球：SAM 2.1 去背、MapAnything 深度、俯視環繞圖和沿弧線算繪出的三格）：DETR 找人 → Sapiens2 讀姿勢、找最快的揮拍 → SAM 2.1 把你切出來 → MapAnything 算深度和相機，時間暫停、鏡頭繞 20° → Muse Glimmer 寫說明，程式核對 → 一鍵分享到 Instagram。影片不離開伺服器。
 旁白：Thursday, game done. I upload a phone clip… With MapAnything, time stops and the camera turns around the smash.</a:t>
             </a:r>
             <a:endParaRPr lang="en-US" dirty="0"/>
@@ -7181,7 +7181,7 @@
                   <a:srgbClr val="55555C"/>
                 </a:solidFill>
               </a:rPr>
-              <a:t>SAM 2.1 cut-out and MapAnything depth</a:t>
+              <a:t>SAM 2.1 cuts her out (magenta); MapAnything reads the depth (near warm, far cool)</a:t>
             </a:r>
             <a:endParaRPr lang="en-US" sz="1000" dirty="0"/>
           </a:p>
@@ -7195,20 +7195,20 @@
         </p:nvSpPr>
         <p:spPr>
           <a:xfrm>
-            <a:off x="6172200" y="5029200"/>
-            <a:ext cx="5440680" cy="1143000"/>
+            <a:off x="6172200" y="4937760"/>
+            <a:ext cx="1600200" cy="1371600"/>
           </a:xfrm>
           <a:prstGeom prst="roundRect">
             <a:avLst>
-              <a:gd name="adj" fmla="val 9600"/>
+              <a:gd name="adj" fmla="val 8000"/>
             </a:avLst>
           </a:prstGeom>
           <a:solidFill>
-            <a:srgbClr val="F6F7F8"/>
+            <a:srgbClr val="0A0A0B"/>
           </a:solidFill>
           <a:ln w="12700">
             <a:solidFill>
-              <a:srgbClr val="F6F7F8"/>
+              <a:srgbClr val="0A0A0B"/>
             </a:solidFill>
             <a:prstDash val="solid"/>
           </a:ln>
@@ -7216,77 +7216,1117 @@
       </p:sp>
       <p:sp>
         <p:nvSpPr>
-          <p:cNvPr id="29" name="Text 24"/>
-          <p:cNvSpPr txBox="1"/>
-          <p:nvPr/>
-        </p:nvSpPr>
-        <p:spPr>
-          <a:xfrm>
-            <a:off x="6355080" y="5138928"/>
-            <a:ext cx="5120640" cy="1005840"/>
-          </a:xfrm>
-          <a:prstGeom prst="rect">
-            <a:avLst/>
-          </a:prstGeom>
-          <a:noFill/>
-          <a:ln/>
-        </p:spPr>
-        <p:txBody>
-          <a:bodyPr wrap="square" lIns="0" tIns="0" rIns="0" bIns="0" rtlCol="0" anchor="t"/>
-          <a:lstStyle/>
-          <a:p>
-            <a:pPr marL="177800" indent="-177800">
-              <a:spcAft>
-                <a:spcPts val="300"/>
-              </a:spcAft>
-              <a:buSzPct val="100000"/>
-              <a:buChar char="•"/>
-            </a:pPr>
-            <a:r>
-              <a:rPr lang="en-US" sz="1250" dirty="0">
+          <p:cNvPr id="29" name="Shape 24"/>
+          <p:cNvSpPr/>
+          <p:nvPr/>
+        </p:nvSpPr>
+        <p:spPr>
+          <a:xfrm>
+            <a:off x="7211375" y="5794028"/>
+            <a:ext cx="54864" cy="54864"/>
+          </a:xfrm>
+          <a:prstGeom prst="ellipse">
+            <a:avLst/>
+          </a:prstGeom>
+          <a:solidFill>
+            <a:srgbClr val="5FD39A"/>
+          </a:solidFill>
+          <a:ln w="12700">
+            <a:solidFill>
+              <a:srgbClr val="5FD39A"/>
+            </a:solidFill>
+            <a:prstDash val="solid"/>
+          </a:ln>
+        </p:spPr>
+      </p:sp>
+      <p:sp>
+        <p:nvSpPr>
+          <p:cNvPr id="30" name="Shape 25"/>
+          <p:cNvSpPr/>
+          <p:nvPr/>
+        </p:nvSpPr>
+        <p:spPr>
+          <a:xfrm>
+            <a:off x="7180975" y="5811580"/>
+            <a:ext cx="54864" cy="54864"/>
+          </a:xfrm>
+          <a:prstGeom prst="ellipse">
+            <a:avLst/>
+          </a:prstGeom>
+          <a:solidFill>
+            <a:srgbClr val="5FD39A"/>
+          </a:solidFill>
+          <a:ln w="12700">
+            <a:solidFill>
+              <a:srgbClr val="5FD39A"/>
+            </a:solidFill>
+            <a:prstDash val="solid"/>
+          </a:ln>
+        </p:spPr>
+      </p:sp>
+      <p:sp>
+        <p:nvSpPr>
+          <p:cNvPr id="31" name="Shape 26"/>
+          <p:cNvSpPr/>
+          <p:nvPr/>
+        </p:nvSpPr>
+        <p:spPr>
+          <a:xfrm>
+            <a:off x="7149424" y="5826968"/>
+            <a:ext cx="54864" cy="54864"/>
+          </a:xfrm>
+          <a:prstGeom prst="ellipse">
+            <a:avLst/>
+          </a:prstGeom>
+          <a:solidFill>
+            <a:srgbClr val="5FD39A"/>
+          </a:solidFill>
+          <a:ln w="12700">
+            <a:solidFill>
+              <a:srgbClr val="5FD39A"/>
+            </a:solidFill>
+            <a:prstDash val="solid"/>
+          </a:ln>
+        </p:spPr>
+      </p:sp>
+      <p:sp>
+        <p:nvSpPr>
+          <p:cNvPr id="32" name="Shape 27"/>
+          <p:cNvSpPr/>
+          <p:nvPr/>
+        </p:nvSpPr>
+        <p:spPr>
+          <a:xfrm>
+            <a:off x="7116877" y="5840118"/>
+            <a:ext cx="54864" cy="54864"/>
+          </a:xfrm>
+          <a:prstGeom prst="ellipse">
+            <a:avLst/>
+          </a:prstGeom>
+          <a:solidFill>
+            <a:srgbClr val="5FD39A"/>
+          </a:solidFill>
+          <a:ln w="12700">
+            <a:solidFill>
+              <a:srgbClr val="5FD39A"/>
+            </a:solidFill>
+            <a:prstDash val="solid"/>
+          </a:ln>
+        </p:spPr>
+      </p:sp>
+      <p:sp>
+        <p:nvSpPr>
+          <p:cNvPr id="33" name="Shape 28"/>
+          <p:cNvSpPr/>
+          <p:nvPr/>
+        </p:nvSpPr>
+        <p:spPr>
+          <a:xfrm>
+            <a:off x="7083492" y="5850966"/>
+            <a:ext cx="54864" cy="54864"/>
+          </a:xfrm>
+          <a:prstGeom prst="ellipse">
+            <a:avLst/>
+          </a:prstGeom>
+          <a:solidFill>
+            <a:srgbClr val="5FD39A"/>
+          </a:solidFill>
+          <a:ln w="12700">
+            <a:solidFill>
+              <a:srgbClr val="5FD39A"/>
+            </a:solidFill>
+            <a:prstDash val="solid"/>
+          </a:ln>
+        </p:spPr>
+      </p:sp>
+      <p:sp>
+        <p:nvSpPr>
+          <p:cNvPr id="34" name="Shape 29"/>
+          <p:cNvSpPr/>
+          <p:nvPr/>
+        </p:nvSpPr>
+        <p:spPr>
+          <a:xfrm>
+            <a:off x="7049431" y="5859458"/>
+            <a:ext cx="54864" cy="54864"/>
+          </a:xfrm>
+          <a:prstGeom prst="ellipse">
+            <a:avLst/>
+          </a:prstGeom>
+          <a:solidFill>
+            <a:srgbClr val="5FD39A"/>
+          </a:solidFill>
+          <a:ln w="12700">
+            <a:solidFill>
+              <a:srgbClr val="5FD39A"/>
+            </a:solidFill>
+            <a:prstDash val="solid"/>
+          </a:ln>
+        </p:spPr>
+      </p:sp>
+      <p:sp>
+        <p:nvSpPr>
+          <p:cNvPr id="35" name="Shape 30"/>
+          <p:cNvSpPr/>
+          <p:nvPr/>
+        </p:nvSpPr>
+        <p:spPr>
+          <a:xfrm>
+            <a:off x="7014861" y="5865554"/>
+            <a:ext cx="54864" cy="54864"/>
+          </a:xfrm>
+          <a:prstGeom prst="ellipse">
+            <a:avLst/>
+          </a:prstGeom>
+          <a:solidFill>
+            <a:srgbClr val="5FD39A"/>
+          </a:solidFill>
+          <a:ln w="12700">
+            <a:solidFill>
+              <a:srgbClr val="5FD39A"/>
+            </a:solidFill>
+            <a:prstDash val="solid"/>
+          </a:ln>
+        </p:spPr>
+      </p:sp>
+      <p:sp>
+        <p:nvSpPr>
+          <p:cNvPr id="36" name="Shape 31"/>
+          <p:cNvSpPr/>
+          <p:nvPr/>
+        </p:nvSpPr>
+        <p:spPr>
+          <a:xfrm>
+            <a:off x="6979950" y="5869223"/>
+            <a:ext cx="54864" cy="54864"/>
+          </a:xfrm>
+          <a:prstGeom prst="ellipse">
+            <a:avLst/>
+          </a:prstGeom>
+          <a:solidFill>
+            <a:srgbClr val="5FD39A"/>
+          </a:solidFill>
+          <a:ln w="12700">
+            <a:solidFill>
+              <a:srgbClr val="5FD39A"/>
+            </a:solidFill>
+            <a:prstDash val="solid"/>
+          </a:ln>
+        </p:spPr>
+      </p:sp>
+      <p:sp>
+        <p:nvSpPr>
+          <p:cNvPr id="37" name="Shape 32"/>
+          <p:cNvSpPr/>
+          <p:nvPr/>
+        </p:nvSpPr>
+        <p:spPr>
+          <a:xfrm>
+            <a:off x="6944868" y="5870448"/>
+            <a:ext cx="54864" cy="54864"/>
+          </a:xfrm>
+          <a:prstGeom prst="ellipse">
+            <a:avLst/>
+          </a:prstGeom>
+          <a:solidFill>
+            <a:srgbClr val="5FD39A"/>
+          </a:solidFill>
+          <a:ln w="12700">
+            <a:solidFill>
+              <a:srgbClr val="5FD39A"/>
+            </a:solidFill>
+            <a:prstDash val="solid"/>
+          </a:ln>
+        </p:spPr>
+      </p:sp>
+      <p:sp>
+        <p:nvSpPr>
+          <p:cNvPr id="38" name="Shape 33"/>
+          <p:cNvSpPr/>
+          <p:nvPr/>
+        </p:nvSpPr>
+        <p:spPr>
+          <a:xfrm>
+            <a:off x="6909786" y="5869223"/>
+            <a:ext cx="54864" cy="54864"/>
+          </a:xfrm>
+          <a:prstGeom prst="ellipse">
+            <a:avLst/>
+          </a:prstGeom>
+          <a:solidFill>
+            <a:srgbClr val="5FD39A"/>
+          </a:solidFill>
+          <a:ln w="12700">
+            <a:solidFill>
+              <a:srgbClr val="5FD39A"/>
+            </a:solidFill>
+            <a:prstDash val="solid"/>
+          </a:ln>
+        </p:spPr>
+      </p:sp>
+      <p:sp>
+        <p:nvSpPr>
+          <p:cNvPr id="39" name="Shape 34"/>
+          <p:cNvSpPr/>
+          <p:nvPr/>
+        </p:nvSpPr>
+        <p:spPr>
+          <a:xfrm>
+            <a:off x="6874875" y="5865554"/>
+            <a:ext cx="54864" cy="54864"/>
+          </a:xfrm>
+          <a:prstGeom prst="ellipse">
+            <a:avLst/>
+          </a:prstGeom>
+          <a:solidFill>
+            <a:srgbClr val="5FD39A"/>
+          </a:solidFill>
+          <a:ln w="12700">
+            <a:solidFill>
+              <a:srgbClr val="5FD39A"/>
+            </a:solidFill>
+            <a:prstDash val="solid"/>
+          </a:ln>
+        </p:spPr>
+      </p:sp>
+      <p:sp>
+        <p:nvSpPr>
+          <p:cNvPr id="40" name="Shape 35"/>
+          <p:cNvSpPr/>
+          <p:nvPr/>
+        </p:nvSpPr>
+        <p:spPr>
+          <a:xfrm>
+            <a:off x="6840305" y="5859458"/>
+            <a:ext cx="54864" cy="54864"/>
+          </a:xfrm>
+          <a:prstGeom prst="ellipse">
+            <a:avLst/>
+          </a:prstGeom>
+          <a:solidFill>
+            <a:srgbClr val="5FD39A"/>
+          </a:solidFill>
+          <a:ln w="12700">
+            <a:solidFill>
+              <a:srgbClr val="5FD39A"/>
+            </a:solidFill>
+            <a:prstDash val="solid"/>
+          </a:ln>
+        </p:spPr>
+      </p:sp>
+      <p:sp>
+        <p:nvSpPr>
+          <p:cNvPr id="41" name="Shape 36"/>
+          <p:cNvSpPr/>
+          <p:nvPr/>
+        </p:nvSpPr>
+        <p:spPr>
+          <a:xfrm>
+            <a:off x="6806244" y="5850966"/>
+            <a:ext cx="54864" cy="54864"/>
+          </a:xfrm>
+          <a:prstGeom prst="ellipse">
+            <a:avLst/>
+          </a:prstGeom>
+          <a:solidFill>
+            <a:srgbClr val="5FD39A"/>
+          </a:solidFill>
+          <a:ln w="12700">
+            <a:solidFill>
+              <a:srgbClr val="5FD39A"/>
+            </a:solidFill>
+            <a:prstDash val="solid"/>
+          </a:ln>
+        </p:spPr>
+      </p:sp>
+      <p:sp>
+        <p:nvSpPr>
+          <p:cNvPr id="42" name="Shape 37"/>
+          <p:cNvSpPr/>
+          <p:nvPr/>
+        </p:nvSpPr>
+        <p:spPr>
+          <a:xfrm>
+            <a:off x="6772859" y="5840118"/>
+            <a:ext cx="54864" cy="54864"/>
+          </a:xfrm>
+          <a:prstGeom prst="ellipse">
+            <a:avLst/>
+          </a:prstGeom>
+          <a:solidFill>
+            <a:srgbClr val="5FD39A"/>
+          </a:solidFill>
+          <a:ln w="12700">
+            <a:solidFill>
+              <a:srgbClr val="5FD39A"/>
+            </a:solidFill>
+            <a:prstDash val="solid"/>
+          </a:ln>
+        </p:spPr>
+      </p:sp>
+      <p:sp>
+        <p:nvSpPr>
+          <p:cNvPr id="43" name="Shape 38"/>
+          <p:cNvSpPr/>
+          <p:nvPr/>
+        </p:nvSpPr>
+        <p:spPr>
+          <a:xfrm>
+            <a:off x="6740312" y="5826968"/>
+            <a:ext cx="54864" cy="54864"/>
+          </a:xfrm>
+          <a:prstGeom prst="ellipse">
+            <a:avLst/>
+          </a:prstGeom>
+          <a:solidFill>
+            <a:srgbClr val="5FD39A"/>
+          </a:solidFill>
+          <a:ln w="12700">
+            <a:solidFill>
+              <a:srgbClr val="5FD39A"/>
+            </a:solidFill>
+            <a:prstDash val="solid"/>
+          </a:ln>
+        </p:spPr>
+      </p:sp>
+      <p:sp>
+        <p:nvSpPr>
+          <p:cNvPr id="44" name="Shape 39"/>
+          <p:cNvSpPr/>
+          <p:nvPr/>
+        </p:nvSpPr>
+        <p:spPr>
+          <a:xfrm>
+            <a:off x="6708761" y="5811580"/>
+            <a:ext cx="54864" cy="54864"/>
+          </a:xfrm>
+          <a:prstGeom prst="ellipse">
+            <a:avLst/>
+          </a:prstGeom>
+          <a:solidFill>
+            <a:srgbClr val="5FD39A"/>
+          </a:solidFill>
+          <a:ln w="12700">
+            <a:solidFill>
+              <a:srgbClr val="5FD39A"/>
+            </a:solidFill>
+            <a:prstDash val="solid"/>
+          </a:ln>
+        </p:spPr>
+      </p:sp>
+      <p:sp>
+        <p:nvSpPr>
+          <p:cNvPr id="45" name="Shape 40"/>
+          <p:cNvSpPr/>
+          <p:nvPr/>
+        </p:nvSpPr>
+        <p:spPr>
+          <a:xfrm>
+            <a:off x="6678361" y="5794028"/>
+            <a:ext cx="54864" cy="54864"/>
+          </a:xfrm>
+          <a:prstGeom prst="ellipse">
+            <a:avLst/>
+          </a:prstGeom>
+          <a:solidFill>
+            <a:srgbClr val="5FD39A"/>
+          </a:solidFill>
+          <a:ln w="12700">
+            <a:solidFill>
+              <a:srgbClr val="5FD39A"/>
+            </a:solidFill>
+            <a:prstDash val="solid"/>
+          </a:ln>
+        </p:spPr>
+      </p:sp>
+      <p:sp>
+        <p:nvSpPr>
+          <p:cNvPr id="46" name="Shape 41"/>
+          <p:cNvSpPr/>
+          <p:nvPr/>
+        </p:nvSpPr>
+        <p:spPr>
+          <a:xfrm>
+            <a:off x="6649259" y="5774399"/>
+            <a:ext cx="54864" cy="54864"/>
+          </a:xfrm>
+          <a:prstGeom prst="ellipse">
+            <a:avLst/>
+          </a:prstGeom>
+          <a:solidFill>
+            <a:srgbClr val="5FD39A"/>
+          </a:solidFill>
+          <a:ln w="12700">
+            <a:solidFill>
+              <a:srgbClr val="5FD39A"/>
+            </a:solidFill>
+            <a:prstDash val="solid"/>
+          </a:ln>
+        </p:spPr>
+      </p:sp>
+      <p:sp>
+        <p:nvSpPr>
+          <p:cNvPr id="47" name="Shape 42"/>
+          <p:cNvSpPr/>
+          <p:nvPr/>
+        </p:nvSpPr>
+        <p:spPr>
+          <a:xfrm>
+            <a:off x="6621597" y="5752787"/>
+            <a:ext cx="54864" cy="54864"/>
+          </a:xfrm>
+          <a:prstGeom prst="ellipse">
+            <a:avLst/>
+          </a:prstGeom>
+          <a:solidFill>
+            <a:srgbClr val="5FD39A"/>
+          </a:solidFill>
+          <a:ln w="12700">
+            <a:solidFill>
+              <a:srgbClr val="5FD39A"/>
+            </a:solidFill>
+            <a:prstDash val="solid"/>
+          </a:ln>
+        </p:spPr>
+      </p:sp>
+      <p:sp>
+        <p:nvSpPr>
+          <p:cNvPr id="48" name="Shape 43"/>
+          <p:cNvSpPr/>
+          <p:nvPr/>
+        </p:nvSpPr>
+        <p:spPr>
+          <a:xfrm>
+            <a:off x="6595510" y="5729298"/>
+            <a:ext cx="54864" cy="54864"/>
+          </a:xfrm>
+          <a:prstGeom prst="ellipse">
+            <a:avLst/>
+          </a:prstGeom>
+          <a:solidFill>
+            <a:srgbClr val="5FD39A"/>
+          </a:solidFill>
+          <a:ln w="12700">
+            <a:solidFill>
+              <a:srgbClr val="5FD39A"/>
+            </a:solidFill>
+            <a:prstDash val="solid"/>
+          </a:ln>
+        </p:spPr>
+      </p:sp>
+      <p:sp>
+        <p:nvSpPr>
+          <p:cNvPr id="49" name="Shape 44"/>
+          <p:cNvSpPr/>
+          <p:nvPr/>
+        </p:nvSpPr>
+        <p:spPr>
+          <a:xfrm>
+            <a:off x="6571126" y="5704047"/>
+            <a:ext cx="54864" cy="54864"/>
+          </a:xfrm>
+          <a:prstGeom prst="ellipse">
+            <a:avLst/>
+          </a:prstGeom>
+          <a:solidFill>
+            <a:srgbClr val="5FD39A"/>
+          </a:solidFill>
+          <a:ln w="12700">
+            <a:solidFill>
+              <a:srgbClr val="5FD39A"/>
+            </a:solidFill>
+            <a:prstDash val="solid"/>
+          </a:ln>
+        </p:spPr>
+      </p:sp>
+      <p:sp>
+        <p:nvSpPr>
+          <p:cNvPr id="50" name="Shape 45"/>
+          <p:cNvSpPr/>
+          <p:nvPr/>
+        </p:nvSpPr>
+        <p:spPr>
+          <a:xfrm>
+            <a:off x="6972300" y="5394960"/>
+            <a:ext cx="914" cy="521208"/>
+          </a:xfrm>
+          <a:prstGeom prst="line">
+            <a:avLst/>
+          </a:prstGeom>
+          <a:noFill/>
+          <a:ln w="9525">
+            <a:solidFill>
+              <a:srgbClr val="8A8A92"/>
+            </a:solidFill>
+            <a:prstDash val="dash"/>
+          </a:ln>
+        </p:spPr>
+      </p:sp>
+      <p:sp>
+        <p:nvSpPr>
+          <p:cNvPr id="51" name="Shape 46"/>
+          <p:cNvSpPr/>
+          <p:nvPr/>
+        </p:nvSpPr>
+        <p:spPr>
+          <a:xfrm>
+            <a:off x="6908292" y="5330952"/>
+            <a:ext cx="128016" cy="128016"/>
+          </a:xfrm>
+          <a:prstGeom prst="ellipse">
+            <a:avLst/>
+          </a:prstGeom>
+          <a:solidFill>
+            <a:srgbClr val="FF4FA3"/>
+          </a:solidFill>
+          <a:ln w="15875">
+            <a:solidFill>
+              <a:srgbClr val="FFFFFF"/>
+            </a:solidFill>
+            <a:prstDash val="solid"/>
+          </a:ln>
+        </p:spPr>
+      </p:sp>
+      <p:sp>
+        <p:nvSpPr>
+          <p:cNvPr id="52" name="Text 47"/>
+          <p:cNvSpPr txBox="1"/>
+          <p:nvPr/>
+        </p:nvSpPr>
+        <p:spPr>
+          <a:xfrm>
+            <a:off x="7063740" y="5312664"/>
+            <a:ext cx="365760" cy="164592"/>
+          </a:xfrm>
+          <a:prstGeom prst="rect">
+            <a:avLst/>
+          </a:prstGeom>
+          <a:noFill/>
+          <a:ln/>
+        </p:spPr>
+        <p:txBody>
+          <a:bodyPr wrap="square" lIns="0" tIns="0" rIns="0" bIns="0" rtlCol="0" anchor="t"/>
+          <a:lstStyle/>
+          <a:p>
+            <a:pPr indent="0" marL="0">
+              <a:buNone/>
+            </a:pPr>
+            <a:r>
+              <a:rPr lang="en-US" sz="800" dirty="0">
+                <a:solidFill>
+                  <a:srgbClr val="FFFFFF"/>
+                </a:solidFill>
+              </a:rPr>
+              <a:t>her</a:t>
+            </a:r>
+            <a:endParaRPr lang="en-US" sz="800" dirty="0"/>
+          </a:p>
+        </p:txBody>
+      </p:sp>
+      <p:sp>
+        <p:nvSpPr>
+          <p:cNvPr id="53" name="Shape 48"/>
+          <p:cNvSpPr/>
+          <p:nvPr/>
+        </p:nvSpPr>
+        <p:spPr>
+          <a:xfrm>
+            <a:off x="7156511" y="5739164"/>
+            <a:ext cx="164592" cy="164592"/>
+          </a:xfrm>
+          <a:prstGeom prst="ellipse">
+            <a:avLst/>
+          </a:prstGeom>
+          <a:solidFill>
+            <a:srgbClr val="FFFFFF"/>
+          </a:solidFill>
+          <a:ln w="12700">
+            <a:solidFill>
+              <a:srgbClr val="FFFFFF"/>
+            </a:solidFill>
+            <a:prstDash val="solid"/>
+          </a:ln>
+        </p:spPr>
+      </p:sp>
+      <p:sp>
+        <p:nvSpPr>
+          <p:cNvPr id="54" name="Text 49"/>
+          <p:cNvSpPr txBox="1"/>
+          <p:nvPr/>
+        </p:nvSpPr>
+        <p:spPr>
+          <a:xfrm>
+            <a:off x="7156511" y="5739164"/>
+            <a:ext cx="164592" cy="164592"/>
+          </a:xfrm>
+          <a:prstGeom prst="rect">
+            <a:avLst/>
+          </a:prstGeom>
+          <a:noFill/>
+          <a:ln/>
+        </p:spPr>
+        <p:txBody>
+          <a:bodyPr wrap="square" lIns="0" tIns="0" rIns="0" bIns="0" rtlCol="0" anchor="ctr"/>
+          <a:lstStyle/>
+          <a:p>
+            <a:pPr algn="ctr" indent="0" marL="0">
+              <a:buNone/>
+            </a:pPr>
+            <a:r>
+              <a:rPr lang="en-US" sz="800" b="1" dirty="0">
                 <a:solidFill>
                   <a:srgbClr val="0A0A0B"/>
                 </a:solidFill>
               </a:rPr>
-              <a:t>Any ball sport; batched, bf16, about 0.3 s a frame</a:t>
-            </a:r>
-            <a:endParaRPr lang="en-US" sz="1250" dirty="0"/>
-          </a:p>
-          <a:p>
-            <a:pPr marL="177800" indent="-177800">
-              <a:spcAft>
-                <a:spcPts val="300"/>
-              </a:spcAft>
-              <a:buSzPct val="100000"/>
-              <a:buChar char="•"/>
-            </a:pPr>
-            <a:r>
-              <a:rPr lang="en-US" sz="1250" dirty="0">
+              <a:t>1</a:t>
+            </a:r>
+            <a:endParaRPr lang="en-US" sz="800" dirty="0"/>
+          </a:p>
+        </p:txBody>
+      </p:sp>
+      <p:sp>
+        <p:nvSpPr>
+          <p:cNvPr id="55" name="Shape 50"/>
+          <p:cNvSpPr/>
+          <p:nvPr/>
+        </p:nvSpPr>
+        <p:spPr>
+          <a:xfrm>
+            <a:off x="6820011" y="5810690"/>
+            <a:ext cx="164592" cy="164592"/>
+          </a:xfrm>
+          <a:prstGeom prst="ellipse">
+            <a:avLst/>
+          </a:prstGeom>
+          <a:solidFill>
+            <a:srgbClr val="FFFFFF"/>
+          </a:solidFill>
+          <a:ln w="12700">
+            <a:solidFill>
+              <a:srgbClr val="FFFFFF"/>
+            </a:solidFill>
+            <a:prstDash val="solid"/>
+          </a:ln>
+        </p:spPr>
+      </p:sp>
+      <p:sp>
+        <p:nvSpPr>
+          <p:cNvPr id="56" name="Text 51"/>
+          <p:cNvSpPr txBox="1"/>
+          <p:nvPr/>
+        </p:nvSpPr>
+        <p:spPr>
+          <a:xfrm>
+            <a:off x="6820011" y="5810690"/>
+            <a:ext cx="164592" cy="164592"/>
+          </a:xfrm>
+          <a:prstGeom prst="rect">
+            <a:avLst/>
+          </a:prstGeom>
+          <a:noFill/>
+          <a:ln/>
+        </p:spPr>
+        <p:txBody>
+          <a:bodyPr wrap="square" lIns="0" tIns="0" rIns="0" bIns="0" rtlCol="0" anchor="ctr"/>
+          <a:lstStyle/>
+          <a:p>
+            <a:pPr algn="ctr" indent="0" marL="0">
+              <a:buNone/>
+            </a:pPr>
+            <a:r>
+              <a:rPr lang="en-US" sz="800" b="1" dirty="0">
                 <a:solidFill>
                   <a:srgbClr val="0A0A0B"/>
                 </a:solidFill>
               </a:rPr>
-              <a:t>The orbit is an optional camera effect in the app</a:t>
-            </a:r>
-            <a:endParaRPr lang="en-US" sz="1250" dirty="0"/>
-          </a:p>
-          <a:p>
-            <a:pPr marL="177800" indent="-177800">
-              <a:spcAft>
-                <a:spcPts val="300"/>
-              </a:spcAft>
-              <a:buSzPct val="100000"/>
-              <a:buChar char="•"/>
-            </a:pPr>
-            <a:r>
-              <a:rPr lang="en-US" sz="1250" dirty="0">
+              <a:t>2</a:t>
+            </a:r>
+            <a:endParaRPr lang="en-US" sz="800" dirty="0"/>
+          </a:p>
+        </p:txBody>
+      </p:sp>
+      <p:sp>
+        <p:nvSpPr>
+          <p:cNvPr id="57" name="Shape 52"/>
+          <p:cNvSpPr/>
+          <p:nvPr/>
+        </p:nvSpPr>
+        <p:spPr>
+          <a:xfrm>
+            <a:off x="6516262" y="5649183"/>
+            <a:ext cx="164592" cy="164592"/>
+          </a:xfrm>
+          <a:prstGeom prst="ellipse">
+            <a:avLst/>
+          </a:prstGeom>
+          <a:solidFill>
+            <a:srgbClr val="FFFFFF"/>
+          </a:solidFill>
+          <a:ln w="12700">
+            <a:solidFill>
+              <a:srgbClr val="FFFFFF"/>
+            </a:solidFill>
+            <a:prstDash val="solid"/>
+          </a:ln>
+        </p:spPr>
+      </p:sp>
+      <p:sp>
+        <p:nvSpPr>
+          <p:cNvPr id="58" name="Text 53"/>
+          <p:cNvSpPr txBox="1"/>
+          <p:nvPr/>
+        </p:nvSpPr>
+        <p:spPr>
+          <a:xfrm>
+            <a:off x="6516262" y="5649183"/>
+            <a:ext cx="164592" cy="164592"/>
+          </a:xfrm>
+          <a:prstGeom prst="rect">
+            <a:avLst/>
+          </a:prstGeom>
+          <a:noFill/>
+          <a:ln/>
+        </p:spPr>
+        <p:txBody>
+          <a:bodyPr wrap="square" lIns="0" tIns="0" rIns="0" bIns="0" rtlCol="0" anchor="ctr"/>
+          <a:lstStyle/>
+          <a:p>
+            <a:pPr algn="ctr" indent="0" marL="0">
+              <a:buNone/>
+            </a:pPr>
+            <a:r>
+              <a:rPr lang="en-US" sz="800" b="1" dirty="0">
                 <a:solidFill>
                   <a:srgbClr val="0A0A0B"/>
                 </a:solidFill>
               </a:rPr>
-              <a:t>Your video is read on the server and nowhere else</a:t>
-            </a:r>
-            <a:endParaRPr lang="en-US" sz="1250" dirty="0"/>
+              <a:t>3</a:t>
+            </a:r>
+            <a:endParaRPr lang="en-US" sz="800" dirty="0"/>
+          </a:p>
+        </p:txBody>
+      </p:sp>
+      <p:sp>
+        <p:nvSpPr>
+          <p:cNvPr id="59" name="Text 54"/>
+          <p:cNvSpPr txBox="1"/>
+          <p:nvPr/>
+        </p:nvSpPr>
+        <p:spPr>
+          <a:xfrm>
+            <a:off x="7172221" y="5934418"/>
+            <a:ext cx="457200" cy="146304"/>
+          </a:xfrm>
+          <a:prstGeom prst="rect">
+            <a:avLst/>
+          </a:prstGeom>
+          <a:noFill/>
+          <a:ln/>
+        </p:spPr>
+        <p:txBody>
+          <a:bodyPr wrap="square" lIns="0" tIns="0" rIns="0" bIns="0" rtlCol="0" anchor="t"/>
+          <a:lstStyle/>
+          <a:p>
+            <a:pPr algn="ctr" indent="0" marL="0">
+              <a:buNone/>
+            </a:pPr>
+            <a:r>
+              <a:rPr lang="en-US" sz="800" dirty="0">
+                <a:solidFill>
+                  <a:srgbClr val="FFFFFF"/>
+                </a:solidFill>
+              </a:rPr>
+              <a:t>+8°</a:t>
+            </a:r>
+            <a:endParaRPr lang="en-US" sz="800" dirty="0"/>
+          </a:p>
+        </p:txBody>
+      </p:sp>
+      <p:sp>
+        <p:nvSpPr>
+          <p:cNvPr id="60" name="Text 55"/>
+          <p:cNvSpPr txBox="1"/>
+          <p:nvPr/>
+        </p:nvSpPr>
+        <p:spPr>
+          <a:xfrm>
+            <a:off x="6161150" y="5805172"/>
+            <a:ext cx="457200" cy="146304"/>
+          </a:xfrm>
+          <a:prstGeom prst="rect">
+            <a:avLst/>
+          </a:prstGeom>
+          <a:noFill/>
+          <a:ln/>
+        </p:spPr>
+        <p:txBody>
+          <a:bodyPr wrap="square" lIns="0" tIns="0" rIns="0" bIns="0" rtlCol="0" anchor="t"/>
+          <a:lstStyle/>
+          <a:p>
+            <a:pPr algn="ctr" indent="0" marL="0">
+              <a:buNone/>
+            </a:pPr>
+            <a:r>
+              <a:rPr lang="en-US" sz="800" dirty="0">
+                <a:solidFill>
+                  <a:srgbClr val="FFFFFF"/>
+                </a:solidFill>
+              </a:rPr>
+              <a:t>−12°</a:t>
+            </a:r>
+            <a:endParaRPr lang="en-US" sz="800" dirty="0"/>
+          </a:p>
+        </p:txBody>
+      </p:sp>
+      <p:sp>
+        <p:nvSpPr>
+          <p:cNvPr id="61" name="Text 56"/>
+          <p:cNvSpPr txBox="1"/>
+          <p:nvPr/>
+        </p:nvSpPr>
+        <p:spPr>
+          <a:xfrm>
+            <a:off x="6263640" y="5001768"/>
+            <a:ext cx="914400" cy="164592"/>
+          </a:xfrm>
+          <a:prstGeom prst="rect">
+            <a:avLst/>
+          </a:prstGeom>
+          <a:noFill/>
+          <a:ln/>
+        </p:spPr>
+        <p:txBody>
+          <a:bodyPr wrap="square" lIns="0" tIns="0" rIns="0" bIns="0" rtlCol="0" anchor="t"/>
+          <a:lstStyle/>
+          <a:p>
+            <a:pPr indent="0" marL="0">
+              <a:buNone/>
+            </a:pPr>
+            <a:r>
+              <a:rPr lang="en-US" sz="800" dirty="0">
+                <a:solidFill>
+                  <a:srgbClr val="B0B0B8"/>
+                </a:solidFill>
+              </a:rPr>
+              <a:t>From above</a:t>
+            </a:r>
+            <a:endParaRPr lang="en-US" sz="800" dirty="0"/>
+          </a:p>
+        </p:txBody>
+      </p:sp>
+      <p:pic>
+        <p:nvPicPr>
+          <p:cNvPr id="62" name="Image 1" descr="preencoded.png">    </p:cNvPr>
+          <p:cNvPicPr>
+            <a:picLocks noChangeAspect="1"/>
+          </p:cNvPicPr>
+          <p:nvPr/>
+        </p:nvPicPr>
+        <p:blipFill>
+          <a:blip r:embed="rId5"/>
+          <a:stretch>
+            <a:fillRect/>
+          </a:stretch>
+        </p:blipFill>
+        <p:spPr>
+          <a:xfrm>
+            <a:off x="7927848" y="4937760"/>
+            <a:ext cx="1197864" cy="673913"/>
+          </a:xfrm>
+          <a:prstGeom prst="rect">
+            <a:avLst/>
+          </a:prstGeom>
+        </p:spPr>
+      </p:pic>
+      <p:sp>
+        <p:nvSpPr>
+          <p:cNvPr id="63" name="Text 57"/>
+          <p:cNvSpPr txBox="1"/>
+          <p:nvPr/>
+        </p:nvSpPr>
+        <p:spPr>
+          <a:xfrm>
+            <a:off x="7927848" y="5650992"/>
+            <a:ext cx="1197864" cy="201168"/>
+          </a:xfrm>
+          <a:prstGeom prst="rect">
+            <a:avLst/>
+          </a:prstGeom>
+          <a:noFill/>
+          <a:ln/>
+        </p:spPr>
+        <p:txBody>
+          <a:bodyPr wrap="square" lIns="0" tIns="0" rIns="0" bIns="0" rtlCol="0" anchor="t"/>
+          <a:lstStyle/>
+          <a:p>
+            <a:pPr algn="ctr" indent="0" marL="0">
+              <a:buNone/>
+            </a:pPr>
+            <a:r>
+              <a:rPr lang="en-US" sz="1000" b="1" dirty="0">
+                <a:solidFill>
+                  <a:srgbClr val="0A0A0B"/>
+                </a:solidFill>
+              </a:rPr>
+              <a:t>1 · +8°</a:t>
+            </a:r>
+            <a:endParaRPr lang="en-US" sz="1000" dirty="0"/>
+          </a:p>
+        </p:txBody>
+      </p:sp>
+      <p:pic>
+        <p:nvPicPr>
+          <p:cNvPr id="64" name="Image 2" descr="preencoded.png">    </p:cNvPr>
+          <p:cNvPicPr>
+            <a:picLocks noChangeAspect="1"/>
+          </p:cNvPicPr>
+          <p:nvPr/>
+        </p:nvPicPr>
+        <p:blipFill>
+          <a:blip r:embed="rId6"/>
+          <a:stretch>
+            <a:fillRect/>
+          </a:stretch>
+        </p:blipFill>
+        <p:spPr>
+          <a:xfrm>
+            <a:off x="9171432" y="4937760"/>
+            <a:ext cx="1197864" cy="673913"/>
+          </a:xfrm>
+          <a:prstGeom prst="rect">
+            <a:avLst/>
+          </a:prstGeom>
+        </p:spPr>
+      </p:pic>
+      <p:sp>
+        <p:nvSpPr>
+          <p:cNvPr id="65" name="Text 58"/>
+          <p:cNvSpPr txBox="1"/>
+          <p:nvPr/>
+        </p:nvSpPr>
+        <p:spPr>
+          <a:xfrm>
+            <a:off x="9171432" y="5650992"/>
+            <a:ext cx="1197864" cy="201168"/>
+          </a:xfrm>
+          <a:prstGeom prst="rect">
+            <a:avLst/>
+          </a:prstGeom>
+          <a:noFill/>
+          <a:ln/>
+        </p:spPr>
+        <p:txBody>
+          <a:bodyPr wrap="square" lIns="0" tIns="0" rIns="0" bIns="0" rtlCol="0" anchor="t"/>
+          <a:lstStyle/>
+          <a:p>
+            <a:pPr algn="ctr" indent="0" marL="0">
+              <a:buNone/>
+            </a:pPr>
+            <a:r>
+              <a:rPr lang="en-US" sz="1000" b="1" dirty="0">
+                <a:solidFill>
+                  <a:srgbClr val="0A0A0B"/>
+                </a:solidFill>
+              </a:rPr>
+              <a:t>2 · −2°</a:t>
+            </a:r>
+            <a:endParaRPr lang="en-US" sz="1000" dirty="0"/>
+          </a:p>
+        </p:txBody>
+      </p:sp>
+      <p:pic>
+        <p:nvPicPr>
+          <p:cNvPr id="66" name="Image 3" descr="preencoded.png">    </p:cNvPr>
+          <p:cNvPicPr>
+            <a:picLocks noChangeAspect="1"/>
+          </p:cNvPicPr>
+          <p:nvPr/>
+        </p:nvPicPr>
+        <p:blipFill>
+          <a:blip r:embed="rId7"/>
+          <a:stretch>
+            <a:fillRect/>
+          </a:stretch>
+        </p:blipFill>
+        <p:spPr>
+          <a:xfrm>
+            <a:off x="10415016" y="4937760"/>
+            <a:ext cx="1197864" cy="673913"/>
+          </a:xfrm>
+          <a:prstGeom prst="rect">
+            <a:avLst/>
+          </a:prstGeom>
+        </p:spPr>
+      </p:pic>
+      <p:sp>
+        <p:nvSpPr>
+          <p:cNvPr id="67" name="Text 59"/>
+          <p:cNvSpPr txBox="1"/>
+          <p:nvPr/>
+        </p:nvSpPr>
+        <p:spPr>
+          <a:xfrm>
+            <a:off x="10415016" y="5650992"/>
+            <a:ext cx="1197864" cy="201168"/>
+          </a:xfrm>
+          <a:prstGeom prst="rect">
+            <a:avLst/>
+          </a:prstGeom>
+          <a:noFill/>
+          <a:ln/>
+        </p:spPr>
+        <p:txBody>
+          <a:bodyPr wrap="square" lIns="0" tIns="0" rIns="0" bIns="0" rtlCol="0" anchor="t"/>
+          <a:lstStyle/>
+          <a:p>
+            <a:pPr algn="ctr" indent="0" marL="0">
+              <a:buNone/>
+            </a:pPr>
+            <a:r>
+              <a:rPr lang="en-US" sz="1000" b="1" dirty="0">
+                <a:solidFill>
+                  <a:srgbClr val="0A0A0B"/>
+                </a:solidFill>
+              </a:rPr>
+              <a:t>3 · −12°</a:t>
+            </a:r>
+            <a:endParaRPr lang="en-US" sz="1000" dirty="0"/>
+          </a:p>
+        </p:txBody>
+      </p:sp>
+      <p:sp>
+        <p:nvSpPr>
+          <p:cNvPr id="68" name="Text 60"/>
+          <p:cNvSpPr txBox="1"/>
+          <p:nvPr/>
+        </p:nvSpPr>
+        <p:spPr>
+          <a:xfrm>
+            <a:off x="7927848" y="5897880"/>
+            <a:ext cx="3685032" cy="365760"/>
+          </a:xfrm>
+          <a:prstGeom prst="rect">
+            <a:avLst/>
+          </a:prstGeom>
+          <a:noFill/>
+          <a:ln/>
+        </p:spPr>
+        <p:txBody>
+          <a:bodyPr wrap="square" lIns="0" tIns="0" rIns="0" bIns="0" rtlCol="0" anchor="t"/>
+          <a:lstStyle/>
+          <a:p>
+            <a:pPr indent="0" marL="0">
+              <a:buNone/>
+            </a:pPr>
+            <a:r>
+              <a:rPr lang="en-US" sz="1000" dirty="0">
+                <a:solidFill>
+                  <a:srgbClr val="55555C"/>
+                </a:solidFill>
+              </a:rPr>
+              <a:t>Three frames rendered along the arc, time stopped</a:t>
+            </a:r>
+            <a:endParaRPr lang="en-US" sz="1000" dirty="0"/>
           </a:p>
         </p:txBody>
       </p:sp>

--- a/video/deck/Serve_Meta_deck.pptx
+++ b/video/deck/Serve_Meta_deck.pptx
@@ -130,19 +130,19 @@
   <p:extLst>
     <p:ext uri="{521415D9-36F7-43E2-AB2F-B90AF26B5E84}">
       <p14:sectionLst xmlns:p14="http://schemas.microsoft.com/office/powerpoint/2010/main">
-        <p14:section name="Opening" id="{b9fc3e17-ceb6-af94-317c-468940ab3d7d}">
+        <p14:section name="Opening" id="{a6ff87b4-ac63-6631-7d1d-167ef124248b}">
           <p14:sldIdLst>
             <p14:sldId id="256"/>
             <p14:sldId id="257"/>
           </p14:sldIdLst>
         </p14:section>
-        <p14:section name="Impact" id="{548f9691-c026-e6ef-1749-57d4208c6222}">
+        <p14:section name="Impact" id="{bbca0a7b-0dab-1fc8-d2f8-7499e4b838ed}">
           <p14:sldIdLst>
             <p14:sldId id="258"/>
             <p14:sldId id="259"/>
           </p14:sldIdLst>
         </p14:section>
-        <p14:section name="Demo" id="{b591ae83-82e4-57e1-165c-2aac6890f8f0}">
+        <p14:section name="Demo" id="{9048e9d6-cf3c-0325-1b80-d6b5e9764ff1}">
           <p14:sldIdLst>
             <p14:sldId id="260"/>
             <p14:sldId id="261"/>
@@ -152,7 +152,7 @@
             <p14:sldId id="265"/>
           </p14:sldIdLst>
         </p14:section>
-        <p14:section name="Use of Meta AI" id="{491f6e84-cb9f-5f75-3fea-acbc507fd38b}">
+        <p14:section name="Use of Meta AI" id="{b8bf62c0-0206-933d-f278-054ec75914f8}">
           <p14:sldIdLst>
             <p14:sldId id="266"/>
             <p14:sldId id="267"/>
@@ -160,7 +160,7 @@
             <p14:sldId id="269"/>
           </p14:sldIdLst>
         </p14:section>
-        <p14:section name="Technical depth" id="{816b3f8f-7457-359e-2e02-bba6ce6737bd}">
+        <p14:section name="Technical depth" id="{45da17ab-6d1b-192f-ee8b-53b3aa3cfc0e}">
           <p14:sldIdLst>
             <p14:sldId id="270"/>
             <p14:sldId id="271"/>
@@ -172,12 +172,12 @@
             <p14:sldId id="277"/>
           </p14:sldIdLst>
         </p14:section>
-        <p14:section name="Architecture" id="{2dc9c8fc-fd38-e91d-5286-bf13c481d775}">
+        <p14:section name="Architecture" id="{f7e64737-9b9a-7200-d0db-9df7ba3f51d5}">
           <p14:sldIdLst>
             <p14:sldId id="278"/>
           </p14:sldIdLst>
         </p14:section>
-        <p14:section name="Close" id="{db2d7269-206c-5d1b-124c-e3a55888a693}">
+        <p14:section name="Close" id="{9b6dfd3a-cd2d-5d18-6aa9-f65476e44dba}">
           <p14:sldIdLst>
             <p14:sldId id="279"/>
           </p14:sldIdLst>
@@ -2154,7 +2154,7 @@
           <a:p>
             <a:r>
               <a:rPr lang="en-US" dirty="0"/>
-              <a:t>這頁讓評審一眼看到用了哪些 Meta 的東西：10 個 Meta 模型（全部開放權重、在我自己的伺服器上跑）＋ Messenger、Instagram/Facebook，再加上 Meta 的 Agents Rule of Two 框架。
+              <a:t>這頁讓評審一眼看到用了哪些 Meta 的東西：14 個 Meta 模型（10 個開放權重在我自己的伺服器上跑，4 個走 Meta Model API）＋ Messenger、Instagram/Facebook，再加上 Meta 的 Agents Rule of Two 框架。
 說法：Muse Glimmer 是大腦；1B 學生模型分擔簡單決策；兩個 guard 把關進出；DRAMA 是記憶；四個視覺模型做 highlight；Messenger 是入口。</a:t>
             </a:r>
             <a:endParaRPr lang="en-US" dirty="0"/>
@@ -5941,7 +5941,7 @@
                   <a:srgbClr val="0A0A0B"/>
                 </a:solidFill>
               </a:rPr>
-              <a:t>13 Meta models and 2 Meta products, each with a job</a:t>
+              <a:t>14 Meta models and Meta's apps, each with a job</a:t>
             </a:r>
             <a:endParaRPr lang="en-US" sz="3200" dirty="0"/>
           </a:p>
@@ -8128,7 +8128,7 @@
                   <a:srgbClr val="0A0A0B"/>
                 </a:solidFill>
               </a:rPr>
-              <a:t>A face for every member's agent, made once</a:t>
+              <a:t>Rematch poster art; a face for every agent, made once</a:t>
             </a:r>
             <a:endParaRPr lang="en-US" sz="950" dirty="0"/>
           </a:p>
@@ -8164,7 +8164,7 @@
                   <a:srgbClr val="55555C"/>
                 </a:solidFill>
               </a:rPr>
-              <a:t>Meta Model API · 12 images</a:t>
+              <a:t>Meta Model API · $0.01 an image</a:t>
             </a:r>
             <a:endParaRPr lang="en-US" sz="900" dirty="0"/>
           </a:p>
@@ -8179,6 +8179,177 @@
         <p:spPr>
           <a:xfrm>
             <a:off x="7242048" y="4572000"/>
+            <a:ext cx="2121408" cy="1353312"/>
+          </a:xfrm>
+          <a:prstGeom prst="roundRect">
+            <a:avLst>
+              <a:gd name="adj" fmla="val 8108"/>
+            </a:avLst>
+          </a:prstGeom>
+          <a:solidFill>
+            <a:srgbClr val="FBF3E6"/>
+          </a:solidFill>
+          <a:ln w="12700">
+            <a:solidFill>
+              <a:srgbClr val="FBF3E6"/>
+            </a:solidFill>
+            <a:prstDash val="solid"/>
+          </a:ln>
+        </p:spPr>
+      </p:sp>
+      <p:sp>
+        <p:nvSpPr>
+          <p:cNvPr id="71" name="Text 68"/>
+          <p:cNvSpPr txBox="1"/>
+          <p:nvPr/>
+        </p:nvSpPr>
+        <p:spPr>
+          <a:xfrm>
+            <a:off x="7388352" y="4690872"/>
+            <a:ext cx="1554480" cy="228600"/>
+          </a:xfrm>
+          <a:prstGeom prst="rect">
+            <a:avLst/>
+          </a:prstGeom>
+          <a:noFill/>
+          <a:ln/>
+        </p:spPr>
+        <p:txBody>
+          <a:bodyPr wrap="square" lIns="0" tIns="0" rIns="0" bIns="0" rtlCol="0" anchor="t"/>
+          <a:lstStyle/>
+          <a:p>
+            <a:pPr indent="0" marL="0">
+              <a:buNone/>
+            </a:pPr>
+            <a:r>
+              <a:rPr lang="en-US" sz="950" b="1" spc="100" kern="0" dirty="0">
+                <a:solidFill>
+                  <a:srgbClr val="B26A00"/>
+                </a:solidFill>
+              </a:rPr>
+              <a:t>META MODEL API</a:t>
+            </a:r>
+            <a:endParaRPr lang="en-US" sz="950" dirty="0"/>
+          </a:p>
+        </p:txBody>
+      </p:sp>
+      <p:sp>
+        <p:nvSpPr>
+          <p:cNvPr id="72" name="Text 69"/>
+          <p:cNvSpPr txBox="1"/>
+          <p:nvPr/>
+        </p:nvSpPr>
+        <p:spPr>
+          <a:xfrm>
+            <a:off x="7388352" y="4919472"/>
+            <a:ext cx="1664208" cy="292608"/>
+          </a:xfrm>
+          <a:prstGeom prst="rect">
+            <a:avLst/>
+          </a:prstGeom>
+          <a:noFill/>
+          <a:ln/>
+        </p:spPr>
+        <p:txBody>
+          <a:bodyPr wrap="square" lIns="0" tIns="0" rIns="0" bIns="0" rtlCol="0" anchor="t"/>
+          <a:lstStyle/>
+          <a:p>
+            <a:pPr indent="0" marL="0">
+              <a:buNone/>
+            </a:pPr>
+            <a:r>
+              <a:rPr lang="en-US" sz="1400" b="1" dirty="0">
+                <a:solidFill>
+                  <a:srgbClr val="0A0A0B"/>
+                </a:solidFill>
+              </a:rPr>
+              <a:t>Muse Voice</a:t>
+            </a:r>
+            <a:endParaRPr lang="en-US" sz="1400" dirty="0"/>
+          </a:p>
+        </p:txBody>
+      </p:sp>
+      <p:sp>
+        <p:nvSpPr>
+          <p:cNvPr id="73" name="Text 70"/>
+          <p:cNvSpPr txBox="1"/>
+          <p:nvPr/>
+        </p:nvSpPr>
+        <p:spPr>
+          <a:xfrm>
+            <a:off x="7388352" y="5212080"/>
+            <a:ext cx="1865376" cy="457200"/>
+          </a:xfrm>
+          <a:prstGeom prst="rect">
+            <a:avLst/>
+          </a:prstGeom>
+          <a:noFill/>
+          <a:ln/>
+        </p:spPr>
+        <p:txBody>
+          <a:bodyPr wrap="square" lIns="0" tIns="0" rIns="0" bIns="0" rtlCol="0" anchor="t"/>
+          <a:lstStyle/>
+          <a:p>
+            <a:pPr indent="0" marL="0">
+              <a:buNone/>
+            </a:pPr>
+            <a:r>
+              <a:rPr lang="en-US" sz="950" dirty="0">
+                <a:solidFill>
+                  <a:srgbClr val="0A0A0B"/>
+                </a:solidFill>
+              </a:rPr>
+              <a:t>Transcribe, realtime: talk with your agent and cut in when you like</a:t>
+            </a:r>
+            <a:endParaRPr lang="en-US" sz="950" dirty="0"/>
+          </a:p>
+        </p:txBody>
+      </p:sp>
+      <p:sp>
+        <p:nvSpPr>
+          <p:cNvPr id="74" name="Text 71"/>
+          <p:cNvSpPr txBox="1"/>
+          <p:nvPr/>
+        </p:nvSpPr>
+        <p:spPr>
+          <a:xfrm>
+            <a:off x="7388352" y="5669280"/>
+            <a:ext cx="1883664" cy="201168"/>
+          </a:xfrm>
+          <a:prstGeom prst="rect">
+            <a:avLst/>
+          </a:prstGeom>
+          <a:noFill/>
+          <a:ln/>
+        </p:spPr>
+        <p:txBody>
+          <a:bodyPr wrap="square" lIns="0" tIns="0" rIns="0" bIns="0" rtlCol="0" anchor="t"/>
+          <a:lstStyle/>
+          <a:p>
+            <a:pPr indent="0" marL="0">
+              <a:buNone/>
+            </a:pPr>
+            <a:r>
+              <a:rPr lang="en-US" sz="900" dirty="0">
+                <a:solidFill>
+                  <a:srgbClr val="55555C"/>
+                </a:solidFill>
+              </a:rPr>
+              <a:t>Meta Model API · Transcribe</a:t>
+            </a:r>
+            <a:endParaRPr lang="en-US" sz="900" dirty="0"/>
+          </a:p>
+        </p:txBody>
+      </p:sp>
+      <p:sp>
+        <p:nvSpPr>
+          <p:cNvPr id="75" name="Shape 72"/>
+          <p:cNvSpPr/>
+          <p:nvPr/>
+        </p:nvSpPr>
+        <p:spPr>
+          <a:xfrm>
+            <a:off x="9473184" y="4572000"/>
             <a:ext cx="2121408" cy="1353312"/>
           </a:xfrm>
           <a:prstGeom prst="roundRect">
@@ -8199,13 +8370,13 @@
       </p:sp>
       <p:sp>
         <p:nvSpPr>
-          <p:cNvPr id="71" name="Text 68"/>
-          <p:cNvSpPr txBox="1"/>
-          <p:nvPr/>
-        </p:nvSpPr>
-        <p:spPr>
-          <a:xfrm>
-            <a:off x="7388352" y="4690872"/>
+          <p:cNvPr id="76" name="Text 73"/>
+          <p:cNvSpPr txBox="1"/>
+          <p:nvPr/>
+        </p:nvSpPr>
+        <p:spPr>
+          <a:xfrm>
+            <a:off x="9619488" y="4690872"/>
             <a:ext cx="1554480" cy="228600"/>
           </a:xfrm>
           <a:prstGeom prst="rect">
@@ -8235,7 +8406,7 @@
       </p:sp>
       <p:pic>
         <p:nvPicPr>
-          <p:cNvPr id="72" name="Image 0" descr="preencoded.png">    </p:cNvPr>
+          <p:cNvPr id="77" name="Image 0" descr="preencoded.png">    </p:cNvPr>
           <p:cNvPicPr>
             <a:picLocks noChangeAspect="1"/>
           </p:cNvPicPr>
@@ -8249,7 +8420,7 @@
         </p:blipFill>
         <p:spPr>
           <a:xfrm>
-            <a:off x="8951976" y="4681728"/>
+            <a:off x="11183112" y="4681728"/>
             <a:ext cx="256032" cy="256032"/>
           </a:xfrm>
           <a:prstGeom prst="rect">
@@ -8259,13 +8430,13 @@
       </p:pic>
       <p:sp>
         <p:nvSpPr>
-          <p:cNvPr id="73" name="Text 69"/>
-          <p:cNvSpPr txBox="1"/>
-          <p:nvPr/>
-        </p:nvSpPr>
-        <p:spPr>
-          <a:xfrm>
-            <a:off x="7388352" y="4919472"/>
+          <p:cNvPr id="78" name="Text 74"/>
+          <p:cNvSpPr txBox="1"/>
+          <p:nvPr/>
+        </p:nvSpPr>
+        <p:spPr>
+          <a:xfrm>
+            <a:off x="9619488" y="4919472"/>
             <a:ext cx="1664208" cy="292608"/>
           </a:xfrm>
           <a:prstGeom prst="rect">
@@ -8287,7 +8458,7 @@
                   <a:srgbClr val="0A0A0B"/>
                 </a:solidFill>
               </a:rPr>
-              <a:t>Messenger</a:t>
+              <a:t>Messenger · FB · IG</a:t>
             </a:r>
             <a:endParaRPr lang="en-US" sz="1400" dirty="0"/>
           </a:p>
@@ -8295,13 +8466,13 @@
       </p:sp>
       <p:sp>
         <p:nvSpPr>
-          <p:cNvPr id="74" name="Text 70"/>
-          <p:cNvSpPr txBox="1"/>
-          <p:nvPr/>
-        </p:nvSpPr>
-        <p:spPr>
-          <a:xfrm>
-            <a:off x="7388352" y="5212080"/>
+          <p:cNvPr id="79" name="Text 75"/>
+          <p:cNvSpPr txBox="1"/>
+          <p:nvPr/>
+        </p:nvSpPr>
+        <p:spPr>
+          <a:xfrm>
+            <a:off x="9619488" y="5212080"/>
             <a:ext cx="1865376" cy="457200"/>
           </a:xfrm>
           <a:prstGeom prst="rect">
@@ -8323,7 +8494,7 @@
                   <a:srgbClr val="0A0A0B"/>
                 </a:solidFill>
               </a:rPr>
-              <a:t>Your agent in your chats: plans, a tap to approve, check-ins</a:t>
+              <a:t>Your agent in your chats; join with Facebook or IG; share reels</a:t>
             </a:r>
             <a:endParaRPr lang="en-US" sz="950" dirty="0"/>
           </a:p>
@@ -8331,13 +8502,13 @@
       </p:sp>
       <p:sp>
         <p:nvSpPr>
-          <p:cNvPr id="75" name="Text 71"/>
-          <p:cNvSpPr txBox="1"/>
-          <p:nvPr/>
-        </p:nvSpPr>
-        <p:spPr>
-          <a:xfrm>
-            <a:off x="7388352" y="5669280"/>
+          <p:cNvPr id="80" name="Text 76"/>
+          <p:cNvSpPr txBox="1"/>
+          <p:nvPr/>
+        </p:nvSpPr>
+        <p:spPr>
+          <a:xfrm>
+            <a:off x="9619488" y="5669280"/>
             <a:ext cx="1883664" cy="201168"/>
           </a:xfrm>
           <a:prstGeom prst="rect">
@@ -8359,78 +8530,15 @@
                   <a:srgbClr val="55555C"/>
                 </a:solidFill>
               </a:rPr>
-              <a:t>Signed webhook · Send API</a:t>
+              <a:t>Webhook · Send API · Login</a:t>
             </a:r>
             <a:endParaRPr lang="en-US" sz="900" dirty="0"/>
-          </a:p>
-        </p:txBody>
-      </p:sp>
-      <p:sp>
-        <p:nvSpPr>
-          <p:cNvPr id="76" name="Shape 72"/>
-          <p:cNvSpPr/>
-          <p:nvPr/>
-        </p:nvSpPr>
-        <p:spPr>
-          <a:xfrm>
-            <a:off x="9473184" y="4572000"/>
-            <a:ext cx="2121408" cy="1353312"/>
-          </a:xfrm>
-          <a:prstGeom prst="roundRect">
-            <a:avLst>
-              <a:gd name="adj" fmla="val 8108"/>
-            </a:avLst>
-          </a:prstGeom>
-          <a:solidFill>
-            <a:srgbClr val="FFFFFF"/>
-          </a:solidFill>
-          <a:ln w="12700">
-            <a:solidFill>
-              <a:srgbClr val="DCDCE0"/>
-            </a:solidFill>
-            <a:prstDash val="solid"/>
-          </a:ln>
-        </p:spPr>
-      </p:sp>
-      <p:sp>
-        <p:nvSpPr>
-          <p:cNvPr id="77" name="Text 73"/>
-          <p:cNvSpPr txBox="1"/>
-          <p:nvPr/>
-        </p:nvSpPr>
-        <p:spPr>
-          <a:xfrm>
-            <a:off x="9619488" y="4690872"/>
-            <a:ext cx="1554480" cy="228600"/>
-          </a:xfrm>
-          <a:prstGeom prst="rect">
-            <a:avLst/>
-          </a:prstGeom>
-          <a:noFill/>
-          <a:ln/>
-        </p:spPr>
-        <p:txBody>
-          <a:bodyPr wrap="square" lIns="0" tIns="0" rIns="0" bIns="0" rtlCol="0" anchor="t"/>
-          <a:lstStyle/>
-          <a:p>
-            <a:pPr indent="0" marL="0">
-              <a:buNone/>
-            </a:pPr>
-            <a:r>
-              <a:rPr lang="en-US" sz="950" b="1" spc="100" kern="0" dirty="0">
-                <a:solidFill>
-                  <a:srgbClr val="0064E0"/>
-                </a:solidFill>
-              </a:rPr>
-              <a:t>PRODUCT</a:t>
-            </a:r>
-            <a:endParaRPr lang="en-US" sz="950" dirty="0"/>
           </a:p>
         </p:txBody>
       </p:sp>
       <p:pic>
         <p:nvPicPr>
-          <p:cNvPr id="78" name="Image 1" descr="preencoded.png">    </p:cNvPr>
+          <p:cNvPr id="81" name="Image 1" descr="preencoded.png">    </p:cNvPr>
           <p:cNvPicPr>
             <a:picLocks noChangeAspect="1"/>
           </p:cNvPicPr>
@@ -8444,138 +8552,6 @@
         </p:blipFill>
         <p:spPr>
           <a:xfrm>
-            <a:off x="11183112" y="4681728"/>
-            <a:ext cx="256032" cy="256032"/>
-          </a:xfrm>
-          <a:prstGeom prst="rect">
-            <a:avLst/>
-          </a:prstGeom>
-        </p:spPr>
-      </p:pic>
-      <p:sp>
-        <p:nvSpPr>
-          <p:cNvPr id="79" name="Text 74"/>
-          <p:cNvSpPr txBox="1"/>
-          <p:nvPr/>
-        </p:nvSpPr>
-        <p:spPr>
-          <a:xfrm>
-            <a:off x="9619488" y="4919472"/>
-            <a:ext cx="1664208" cy="292608"/>
-          </a:xfrm>
-          <a:prstGeom prst="rect">
-            <a:avLst/>
-          </a:prstGeom>
-          <a:noFill/>
-          <a:ln/>
-        </p:spPr>
-        <p:txBody>
-          <a:bodyPr wrap="square" lIns="0" tIns="0" rIns="0" bIns="0" rtlCol="0" anchor="t"/>
-          <a:lstStyle/>
-          <a:p>
-            <a:pPr indent="0" marL="0">
-              <a:buNone/>
-            </a:pPr>
-            <a:r>
-              <a:rPr lang="en-US" sz="1400" b="1" dirty="0">
-                <a:solidFill>
-                  <a:srgbClr val="0A0A0B"/>
-                </a:solidFill>
-              </a:rPr>
-              <a:t>Facebook · IG</a:t>
-            </a:r>
-            <a:endParaRPr lang="en-US" sz="1400" dirty="0"/>
-          </a:p>
-        </p:txBody>
-      </p:sp>
-      <p:sp>
-        <p:nvSpPr>
-          <p:cNvPr id="80" name="Text 75"/>
-          <p:cNvSpPr txBox="1"/>
-          <p:nvPr/>
-        </p:nvSpPr>
-        <p:spPr>
-          <a:xfrm>
-            <a:off x="9619488" y="5212080"/>
-            <a:ext cx="1865376" cy="457200"/>
-          </a:xfrm>
-          <a:prstGeom prst="rect">
-            <a:avLst/>
-          </a:prstGeom>
-          <a:noFill/>
-          <a:ln/>
-        </p:spPr>
-        <p:txBody>
-          <a:bodyPr wrap="square" lIns="0" tIns="0" rIns="0" bIns="0" rtlCol="0" anchor="t"/>
-          <a:lstStyle/>
-          <a:p>
-            <a:pPr indent="0" marL="0">
-              <a:buNone/>
-            </a:pPr>
-            <a:r>
-              <a:rPr lang="en-US" sz="950" dirty="0">
-                <a:solidFill>
-                  <a:srgbClr val="0A0A0B"/>
-                </a:solidFill>
-              </a:rPr>
-              <a:t>Join the club with your account; share your reel</a:t>
-            </a:r>
-            <a:endParaRPr lang="en-US" sz="950" dirty="0"/>
-          </a:p>
-        </p:txBody>
-      </p:sp>
-      <p:sp>
-        <p:nvSpPr>
-          <p:cNvPr id="81" name="Text 76"/>
-          <p:cNvSpPr txBox="1"/>
-          <p:nvPr/>
-        </p:nvSpPr>
-        <p:spPr>
-          <a:xfrm>
-            <a:off x="9619488" y="5669280"/>
-            <a:ext cx="1883664" cy="201168"/>
-          </a:xfrm>
-          <a:prstGeom prst="rect">
-            <a:avLst/>
-          </a:prstGeom>
-          <a:noFill/>
-          <a:ln/>
-        </p:spPr>
-        <p:txBody>
-          <a:bodyPr wrap="square" lIns="0" tIns="0" rIns="0" bIns="0" rtlCol="0" anchor="t"/>
-          <a:lstStyle/>
-          <a:p>
-            <a:pPr indent="0" marL="0">
-              <a:buNone/>
-            </a:pPr>
-            <a:r>
-              <a:rPr lang="en-US" sz="900" dirty="0">
-                <a:solidFill>
-                  <a:srgbClr val="55555C"/>
-                </a:solidFill>
-              </a:rPr>
-              <a:t>Facebook Login · Instagram Login</a:t>
-            </a:r>
-            <a:endParaRPr lang="en-US" sz="900" dirty="0"/>
-          </a:p>
-        </p:txBody>
-      </p:sp>
-      <p:pic>
-        <p:nvPicPr>
-          <p:cNvPr id="82" name="Image 2" descr="preencoded.png">    </p:cNvPr>
-          <p:cNvPicPr>
-            <a:picLocks noChangeAspect="1"/>
-          </p:cNvPicPr>
-          <p:nvPr/>
-        </p:nvPicPr>
-        <p:blipFill>
-          <a:blip r:embed="rId3"/>
-          <a:stretch>
-            <a:fillRect/>
-          </a:stretch>
-        </p:blipFill>
-        <p:spPr>
-          <a:xfrm>
             <a:off x="548640" y="6089904"/>
             <a:ext cx="274320" cy="274320"/>
           </a:xfrm>
@@ -8586,7 +8562,7 @@
       </p:pic>
       <p:sp>
         <p:nvSpPr>
-          <p:cNvPr id="83" name="Text 77"/>
+          <p:cNvPr id="82" name="Text 77"/>
           <p:cNvSpPr txBox="1"/>
           <p:nvPr/>
         </p:nvSpPr>
@@ -8614,7 +8590,7 @@
                   <a:srgbClr val="0A0A0B"/>
                 </a:solidFill>
               </a:rPr>
-              <a:t>Ten open-weights models on hardware I own; three on the Meta Model API. Every agent follows Meta's Agents Rule of Two.</a:t>
+              <a:t>Ten open-weights models on hardware I own; four on the Meta Model API. Every agent follows Meta's Agents Rule of Two.</a:t>
             </a:r>
             <a:endParaRPr lang="en-US" sz="1200" dirty="0"/>
           </a:p>
@@ -11137,7 +11113,7 @@
                   <a:srgbClr val="0A7F44"/>
                 </a:solidFill>
               </a:rPr>
-              <a:t>FULL-DUPLEX VOICE · MUSE VOICE TRANSCRIBE</a:t>
+              <a:t>ON THE COURT · HANDS-FREE VOICE</a:t>
             </a:r>
             <a:endParaRPr lang="en-US" sz="1300" dirty="0"/>
           </a:p>
@@ -11175,7 +11151,7 @@
                   <a:srgbClr val="0A0A0B"/>
                 </a:solidFill>
               </a:rPr>
-              <a:t>Talk to your agent, and cut in when you like</a:t>
+              <a:t>Sweaty hands after a game? Just ask, and cut in</a:t>
             </a:r>
             <a:endParaRPr lang="en-US" sz="3200" dirty="0"/>
           </a:p>
@@ -12390,7 +12366,7 @@
                   <a:srgbClr val="0A7F44"/>
                 </a:solidFill>
               </a:rPr>
-              <a:t>FEDERATED A2A</a:t>
+              <a:t>INTER-CLUB CHALLENGES · FEDERATED A2A</a:t>
             </a:r>
             <a:endParaRPr lang="en-US" sz="1300" dirty="0"/>
           </a:p>
@@ -12428,7 +12404,7 @@
                   <a:srgbClr val="0A0A0B"/>
                 </a:solidFill>
               </a:rPr>
-              <a:t>Clubs find each other, and keys can change</a:t>
+              <a:t>Challenge the club next door, nothing merged</a:t>
             </a:r>
             <a:endParaRPr lang="en-US" sz="3200" dirty="0"/>
           </a:p>
@@ -12824,7 +12800,7 @@
                   <a:srgbClr val="55555C"/>
                 </a:solidFill>
               </a:rPr>
-              <a:t>Only addresses in the config: names, members and keys come from each club's own card</a:t>
+              <a:t>Bored of the same faces? Your club's agents can ask the university club's. Each club keeps its own server; the config holds only addresses, and names, members and keys come from each club's card</a:t>
             </a:r>
             <a:endParaRPr lang="en-US" sz="1100" dirty="0"/>
           </a:p>
@@ -17820,7 +17796,7 @@
                   <a:srgbClr val="0A0A0B"/>
                 </a:solidFill>
               </a:rPr>
-              <a:t>Ten Meta models on hardware I own</a:t>
+              <a:t>14 Meta models, 10 on hardware I own</a:t>
             </a:r>
             <a:endParaRPr lang="en-US" sz="1400" dirty="0"/>
           </a:p>
@@ -21274,9 +21250,9 @@
             <a:tbl>
               <a:tblPr/>
               <a:tblGrid>
-                <a:gridCol w="4206240"/>
+                <a:gridCol w="4572000"/>
                 <a:gridCol w="3566160"/>
-                <a:gridCol w="3291840"/>
+                <a:gridCol w="2926080"/>
               </a:tblGrid>
               <a:tr h="347472">
                 <a:tc>
@@ -21502,7 +21478,7 @@
                           <a:ea typeface="Segoe UI" pitchFamily="34" charset="-122"/>
                           <a:cs typeface="Segoe UI" pitchFamily="34" charset="-120"/>
                         </a:rPr>
-                        <a:t>npm test, seventeen offline suites</a:t>
+                        <a:t>npm test, 21 offline suites</a:t>
                       </a:r>
                       <a:endParaRPr lang="en-US" sz="1200" dirty="0">
                         <a:latin typeface="Segoe UI" charset="0"/>
@@ -21567,7 +21543,7 @@
                           <a:ea typeface="Segoe UI" pitchFamily="34" charset="-122"/>
                           <a:cs typeface="Segoe UI" pitchFamily="34" charset="-120"/>
                         </a:rPr>
-                        <a:t>239 of 240, 1 skipped</a:t>
+                        <a:t>257 of 258, 1 skipped (no LlamaFirewall venv)</a:t>
                       </a:r>
                       <a:endParaRPr lang="en-US" sz="1200" dirty="0">
                         <a:latin typeface="Segoe UI" charset="0"/>
@@ -22684,6 +22660,203 @@
                           <a:ea typeface="Segoe UI" pitchFamily="34" charset="-122"/>
                           <a:cs typeface="Segoe UI" pitchFamily="34" charset="-120"/>
                         </a:rPr>
+                        <a:t>A federation of three clubs (test/federation_unit.mjs)</a:t>
+                      </a:r>
+                      <a:endParaRPr lang="en-US" sz="1200" dirty="0">
+                        <a:latin typeface="Segoe UI" charset="0"/>
+                        <a:ea typeface="Segoe UI" charset="0"/>
+                        <a:cs typeface="Segoe UI" charset="0"/>
+                      </a:endParaRPr>
+                    </a:p>
+                  </a:txBody>
+                  <a:tcPr marL="91440" marR="91440" marT="0" marB="0" anchor="ctr">
+                    <a:lnL w="9525" cap="flat" cmpd="sng" algn="ctr">
+                      <a:solidFill>
+                        <a:srgbClr val="DCDCE0"/>
+                      </a:solidFill>
+                      <a:prstDash val="solid"/>
+                      <a:round/>
+                      <a:headEnd type="none" w="med" len="med"/>
+                      <a:tailEnd type="none" w="med" len="med"/>
+                    </a:lnL>
+                    <a:lnR w="9525" cap="flat" cmpd="sng" algn="ctr">
+                      <a:solidFill>
+                        <a:srgbClr val="DCDCE0"/>
+                      </a:solidFill>
+                      <a:prstDash val="solid"/>
+                      <a:round/>
+                      <a:headEnd type="none" w="med" len="med"/>
+                      <a:tailEnd type="none" w="med" len="med"/>
+                    </a:lnR>
+                    <a:lnT w="9525" cap="flat" cmpd="sng" algn="ctr">
+                      <a:solidFill>
+                        <a:srgbClr val="DCDCE0"/>
+                      </a:solidFill>
+                      <a:prstDash val="solid"/>
+                      <a:round/>
+                      <a:headEnd type="none" w="med" len="med"/>
+                      <a:tailEnd type="none" w="med" len="med"/>
+                    </a:lnT>
+                    <a:lnB w="9525" cap="flat" cmpd="sng" algn="ctr">
+                      <a:solidFill>
+                        <a:srgbClr val="DCDCE0"/>
+                      </a:solidFill>
+                      <a:prstDash val="solid"/>
+                      <a:round/>
+                      <a:headEnd type="none" w="med" len="med"/>
+                      <a:tailEnd type="none" w="med" len="med"/>
+                    </a:lnB>
+                  </a:tcPr>
+                </a:tc>
+                <a:tc>
+                  <a:txBody>
+                    <a:bodyPr/>
+                    <a:lstStyle/>
+                    <a:p>
+                      <a:pPr indent="0" marL="0">
+                        <a:buNone/>
+                      </a:pPr>
+                      <a:r>
+                        <a:rPr lang="en-US" sz="1200" dirty="0">
+                          <a:solidFill>
+                            <a:srgbClr val="0A0A0B"/>
+                          </a:solidFill>
+                          <a:latin typeface="Segoe UI" pitchFamily="34" charset="0"/>
+                          <a:ea typeface="Segoe UI" pitchFamily="34" charset="-122"/>
+                          <a:cs typeface="Segoe UI" pitchFamily="34" charset="-120"/>
+                        </a:rPr>
+                        <a:t>4 of 4: found, signed, rotated, forgery refused</a:t>
+                      </a:r>
+                      <a:endParaRPr lang="en-US" sz="1200" dirty="0">
+                        <a:latin typeface="Segoe UI" charset="0"/>
+                        <a:ea typeface="Segoe UI" charset="0"/>
+                        <a:cs typeface="Segoe UI" charset="0"/>
+                      </a:endParaRPr>
+                    </a:p>
+                  </a:txBody>
+                  <a:tcPr marL="91440" marR="91440" marT="0" marB="0" anchor="ctr">
+                    <a:lnL w="9525" cap="flat" cmpd="sng" algn="ctr">
+                      <a:solidFill>
+                        <a:srgbClr val="DCDCE0"/>
+                      </a:solidFill>
+                      <a:prstDash val="solid"/>
+                      <a:round/>
+                      <a:headEnd type="none" w="med" len="med"/>
+                      <a:tailEnd type="none" w="med" len="med"/>
+                    </a:lnL>
+                    <a:lnR w="9525" cap="flat" cmpd="sng" algn="ctr">
+                      <a:solidFill>
+                        <a:srgbClr val="DCDCE0"/>
+                      </a:solidFill>
+                      <a:prstDash val="solid"/>
+                      <a:round/>
+                      <a:headEnd type="none" w="med" len="med"/>
+                      <a:tailEnd type="none" w="med" len="med"/>
+                    </a:lnR>
+                    <a:lnT w="9525" cap="flat" cmpd="sng" algn="ctr">
+                      <a:solidFill>
+                        <a:srgbClr val="DCDCE0"/>
+                      </a:solidFill>
+                      <a:prstDash val="solid"/>
+                      <a:round/>
+                      <a:headEnd type="none" w="med" len="med"/>
+                      <a:tailEnd type="none" w="med" len="med"/>
+                    </a:lnT>
+                    <a:lnB w="9525" cap="flat" cmpd="sng" algn="ctr">
+                      <a:solidFill>
+                        <a:srgbClr val="DCDCE0"/>
+                      </a:solidFill>
+                      <a:prstDash val="solid"/>
+                      <a:round/>
+                      <a:headEnd type="none" w="med" len="med"/>
+                      <a:tailEnd type="none" w="med" len="med"/>
+                    </a:lnB>
+                  </a:tcPr>
+                </a:tc>
+                <a:tc>
+                  <a:txBody>
+                    <a:bodyPr/>
+                    <a:lstStyle/>
+                    <a:p>
+                      <a:pPr indent="0" marL="0">
+                        <a:buNone/>
+                      </a:pPr>
+                      <a:r>
+                        <a:rPr lang="en-US" sz="1200" dirty="0">
+                          <a:solidFill>
+                            <a:srgbClr val="0A0A0B"/>
+                          </a:solidFill>
+                          <a:latin typeface="Segoe UI" pitchFamily="34" charset="0"/>
+                          <a:ea typeface="Segoe UI" pitchFamily="34" charset="-122"/>
+                          <a:cs typeface="Segoe UI" pitchFamily="34" charset="-120"/>
+                        </a:rPr>
+                        <a:t>Real HTTP, one host</a:t>
+                      </a:r>
+                      <a:endParaRPr lang="en-US" sz="1200" dirty="0">
+                        <a:latin typeface="Segoe UI" charset="0"/>
+                        <a:ea typeface="Segoe UI" charset="0"/>
+                        <a:cs typeface="Segoe UI" charset="0"/>
+                      </a:endParaRPr>
+                    </a:p>
+                  </a:txBody>
+                  <a:tcPr marL="91440" marR="91440" marT="0" marB="0" anchor="ctr">
+                    <a:lnL w="9525" cap="flat" cmpd="sng" algn="ctr">
+                      <a:solidFill>
+                        <a:srgbClr val="DCDCE0"/>
+                      </a:solidFill>
+                      <a:prstDash val="solid"/>
+                      <a:round/>
+                      <a:headEnd type="none" w="med" len="med"/>
+                      <a:tailEnd type="none" w="med" len="med"/>
+                    </a:lnL>
+                    <a:lnR w="9525" cap="flat" cmpd="sng" algn="ctr">
+                      <a:solidFill>
+                        <a:srgbClr val="DCDCE0"/>
+                      </a:solidFill>
+                      <a:prstDash val="solid"/>
+                      <a:round/>
+                      <a:headEnd type="none" w="med" len="med"/>
+                      <a:tailEnd type="none" w="med" len="med"/>
+                    </a:lnR>
+                    <a:lnT w="9525" cap="flat" cmpd="sng" algn="ctr">
+                      <a:solidFill>
+                        <a:srgbClr val="DCDCE0"/>
+                      </a:solidFill>
+                      <a:prstDash val="solid"/>
+                      <a:round/>
+                      <a:headEnd type="none" w="med" len="med"/>
+                      <a:tailEnd type="none" w="med" len="med"/>
+                    </a:lnT>
+                    <a:lnB w="9525" cap="flat" cmpd="sng" algn="ctr">
+                      <a:solidFill>
+                        <a:srgbClr val="DCDCE0"/>
+                      </a:solidFill>
+                      <a:prstDash val="solid"/>
+                      <a:round/>
+                      <a:headEnd type="none" w="med" len="med"/>
+                      <a:tailEnd type="none" w="med" len="med"/>
+                    </a:lnB>
+                  </a:tcPr>
+                </a:tc>
+              </a:tr>
+              <a:tr h="347472">
+                <a:tc>
+                  <a:txBody>
+                    <a:bodyPr/>
+                    <a:lstStyle/>
+                    <a:p>
+                      <a:pPr indent="0" marL="0">
+                        <a:buNone/>
+                      </a:pPr>
+                      <a:r>
+                        <a:rPr lang="en-US" sz="1200" dirty="0">
+                          <a:solidFill>
+                            <a:srgbClr val="0A0A0B"/>
+                          </a:solidFill>
+                          <a:latin typeface="Segoe UI" pitchFamily="34" charset="0"/>
+                          <a:ea typeface="Segoe UI" pitchFamily="34" charset="-122"/>
+                          <a:cs typeface="Segoe UI" pitchFamily="34" charset="-120"/>
+                        </a:rPr>
                         <a:t>"I want to play" in Messenger</a:t>
                       </a:r>
                       <a:endParaRPr lang="en-US" sz="1200" dirty="0">
@@ -23007,7 +23180,7 @@
                   <a:srgbClr val="0A0A0B"/>
                 </a:solidFill>
               </a:rPr>
-              <a:t>Everything runs on one GPU server I own</a:t>
+              <a:t>One GPU server I own, the Meta Model API where it helps</a:t>
             </a:r>
             <a:endParaRPr lang="en-US" sz="3200" dirty="0"/>
           </a:p>
@@ -23735,12 +23908,12 @@
         </p:nvSpPr>
         <p:spPr>
           <a:xfrm>
-            <a:off x="2999232" y="1828800"/>
-            <a:ext cx="2724912" cy="731520"/>
+            <a:off x="2999232" y="1810512"/>
+            <a:ext cx="2724912" cy="603504"/>
           </a:xfrm>
           <a:prstGeom prst="roundRect">
             <a:avLst>
-              <a:gd name="adj" fmla="val 15000"/>
+              <a:gd name="adj" fmla="val 18182"/>
             </a:avLst>
           </a:prstGeom>
           <a:solidFill>
@@ -23762,31 +23935,31 @@
         </p:nvSpPr>
         <p:spPr>
           <a:xfrm>
-            <a:off x="3127248" y="1892808"/>
-            <a:ext cx="2468880" cy="246888"/>
-          </a:xfrm>
-          <a:prstGeom prst="rect">
-            <a:avLst/>
-          </a:prstGeom>
-          <a:noFill/>
-          <a:ln/>
-        </p:spPr>
-        <p:txBody>
-          <a:bodyPr wrap="square" lIns="0" tIns="0" rIns="0" bIns="0" rtlCol="0" anchor="t"/>
-          <a:lstStyle/>
-          <a:p>
-            <a:pPr indent="0" marL="0">
-              <a:buNone/>
-            </a:pPr>
-            <a:r>
-              <a:rPr lang="en-US" sz="1150" b="1" dirty="0">
+            <a:off x="3127248" y="1847088"/>
+            <a:ext cx="2468880" cy="237744"/>
+          </a:xfrm>
+          <a:prstGeom prst="rect">
+            <a:avLst/>
+          </a:prstGeom>
+          <a:noFill/>
+          <a:ln/>
+        </p:spPr>
+        <p:txBody>
+          <a:bodyPr wrap="square" lIns="0" tIns="0" rIns="0" bIns="0" rtlCol="0" anchor="t"/>
+          <a:lstStyle/>
+          <a:p>
+            <a:pPr indent="0" marL="0">
+              <a:buNone/>
+            </a:pPr>
+            <a:r>
+              <a:rPr lang="en-US" sz="1100" b="1" dirty="0">
                 <a:solidFill>
                   <a:srgbClr val="0A0A0B"/>
                 </a:solidFill>
               </a:rPr>
               <a:t>Planner agent</a:t>
             </a:r>
-            <a:endParaRPr lang="en-US" sz="1150" dirty="0"/>
+            <a:endParaRPr lang="en-US" sz="1100" dirty="0"/>
           </a:p>
         </p:txBody>
       </p:sp>
@@ -23798,31 +23971,31 @@
         </p:nvSpPr>
         <p:spPr>
           <a:xfrm>
-            <a:off x="3127248" y="2148840"/>
-            <a:ext cx="2514600" cy="384048"/>
-          </a:xfrm>
-          <a:prstGeom prst="rect">
-            <a:avLst/>
-          </a:prstGeom>
-          <a:noFill/>
-          <a:ln/>
-        </p:spPr>
-        <p:txBody>
-          <a:bodyPr wrap="square" lIns="0" tIns="0" rIns="0" bIns="0" rtlCol="0" anchor="t"/>
-          <a:lstStyle/>
-          <a:p>
-            <a:pPr indent="0" marL="0">
-              <a:buNone/>
-            </a:pPr>
-            <a:r>
-              <a:rPr lang="en-US" sz="950" dirty="0">
+            <a:off x="3127248" y="2066544"/>
+            <a:ext cx="2514600" cy="329184"/>
+          </a:xfrm>
+          <a:prstGeom prst="rect">
+            <a:avLst/>
+          </a:prstGeom>
+          <a:noFill/>
+          <a:ln/>
+        </p:spPr>
+        <p:txBody>
+          <a:bodyPr wrap="square" lIns="0" tIns="0" rIns="0" bIns="0" rtlCol="0" anchor="t"/>
+          <a:lstStyle/>
+          <a:p>
+            <a:pPr indent="0" marL="0">
+              <a:buNone/>
+            </a:pPr>
+            <a:r>
+              <a:rPr lang="en-US" sz="900" dirty="0">
                 <a:solidFill>
                   <a:srgbClr val="55555C"/>
                 </a:solidFill>
               </a:rPr>
               <a:t>tool loop · native tool calling · 12 steps max · rules finish if it stalls</a:t>
             </a:r>
-            <a:endParaRPr lang="en-US" sz="950" dirty="0"/>
+            <a:endParaRPr lang="en-US" sz="900" dirty="0"/>
           </a:p>
         </p:txBody>
       </p:sp>
@@ -23834,12 +24007,12 @@
         </p:nvSpPr>
         <p:spPr>
           <a:xfrm>
-            <a:off x="5833872" y="1828800"/>
-            <a:ext cx="2724912" cy="731520"/>
+            <a:off x="5833872" y="1810512"/>
+            <a:ext cx="2724912" cy="603504"/>
           </a:xfrm>
           <a:prstGeom prst="roundRect">
             <a:avLst>
-              <a:gd name="adj" fmla="val 15000"/>
+              <a:gd name="adj" fmla="val 18182"/>
             </a:avLst>
           </a:prstGeom>
           <a:solidFill>
@@ -23861,31 +24034,31 @@
         </p:nvSpPr>
         <p:spPr>
           <a:xfrm>
-            <a:off x="5961888" y="1892808"/>
-            <a:ext cx="2468880" cy="246888"/>
-          </a:xfrm>
-          <a:prstGeom prst="rect">
-            <a:avLst/>
-          </a:prstGeom>
-          <a:noFill/>
-          <a:ln/>
-        </p:spPr>
-        <p:txBody>
-          <a:bodyPr wrap="square" lIns="0" tIns="0" rIns="0" bIns="0" rtlCol="0" anchor="t"/>
-          <a:lstStyle/>
-          <a:p>
-            <a:pPr indent="0" marL="0">
-              <a:buNone/>
-            </a:pPr>
-            <a:r>
-              <a:rPr lang="en-US" sz="1150" b="1" dirty="0">
+            <a:off x="5961888" y="1847088"/>
+            <a:ext cx="2468880" cy="237744"/>
+          </a:xfrm>
+          <a:prstGeom prst="rect">
+            <a:avLst/>
+          </a:prstGeom>
+          <a:noFill/>
+          <a:ln/>
+        </p:spPr>
+        <p:txBody>
+          <a:bodyPr wrap="square" lIns="0" tIns="0" rIns="0" bIns="0" rtlCol="0" anchor="t"/>
+          <a:lstStyle/>
+          <a:p>
+            <a:pPr indent="0" marL="0">
+              <a:buNone/>
+            </a:pPr>
+            <a:r>
+              <a:rPr lang="en-US" sz="1100" b="1" dirty="0">
                 <a:solidFill>
                   <a:srgbClr val="0A0A0B"/>
                 </a:solidFill>
               </a:rPr>
               <a:t>Agent to agent</a:t>
             </a:r>
-            <a:endParaRPr lang="en-US" sz="1150" dirty="0"/>
+            <a:endParaRPr lang="en-US" sz="1100" dirty="0"/>
           </a:p>
         </p:txBody>
       </p:sp>
@@ -23897,31 +24070,31 @@
         </p:nvSpPr>
         <p:spPr>
           <a:xfrm>
-            <a:off x="5961888" y="2148840"/>
-            <a:ext cx="2514600" cy="384048"/>
-          </a:xfrm>
-          <a:prstGeom prst="rect">
-            <a:avLst/>
-          </a:prstGeom>
-          <a:noFill/>
-          <a:ln/>
-        </p:spPr>
-        <p:txBody>
-          <a:bodyPr wrap="square" lIns="0" tIns="0" rIns="0" bIns="0" rtlCol="0" anchor="t"/>
-          <a:lstStyle/>
-          <a:p>
-            <a:pPr indent="0" marL="0">
-              <a:buNone/>
-            </a:pPr>
-            <a:r>
-              <a:rPr lang="en-US" sz="950" dirty="0">
+            <a:off x="5961888" y="2066544"/>
+            <a:ext cx="2514600" cy="329184"/>
+          </a:xfrm>
+          <a:prstGeom prst="rect">
+            <a:avLst/>
+          </a:prstGeom>
+          <a:noFill/>
+          <a:ln/>
+        </p:spPr>
+        <p:txBody>
+          <a:bodyPr wrap="square" lIns="0" tIns="0" rIns="0" bIns="0" rtlCol="0" anchor="t"/>
+          <a:lstStyle/>
+          <a:p>
+            <a:pPr indent="0" marL="0">
+              <a:buNone/>
+            </a:pPr>
+            <a:r>
+              <a:rPr lang="en-US" sz="900" dirty="0">
                 <a:solidFill>
                   <a:srgbClr val="55555C"/>
                 </a:solidFill>
               </a:rPr>
-              <a:t>A2A v1.0 · signed Agent Cards · one round · held times · checkpoints</a:t>
-            </a:r>
-            <a:endParaRPr lang="en-US" sz="950" dirty="0"/>
+              <a:t>A2A v1.0 · signed requests · held times · a federation of clubs, keys rotated</a:t>
+            </a:r>
+            <a:endParaRPr lang="en-US" sz="900" dirty="0"/>
           </a:p>
         </p:txBody>
       </p:sp>
@@ -23933,12 +24106,12 @@
         </p:nvSpPr>
         <p:spPr>
           <a:xfrm>
-            <a:off x="2999232" y="2651760"/>
-            <a:ext cx="2724912" cy="731520"/>
+            <a:off x="2999232" y="2468880"/>
+            <a:ext cx="2724912" cy="603504"/>
           </a:xfrm>
           <a:prstGeom prst="roundRect">
             <a:avLst>
-              <a:gd name="adj" fmla="val 15000"/>
+              <a:gd name="adj" fmla="val 18182"/>
             </a:avLst>
           </a:prstGeom>
           <a:solidFill>
@@ -23960,31 +24133,31 @@
         </p:nvSpPr>
         <p:spPr>
           <a:xfrm>
-            <a:off x="3127248" y="2715768"/>
-            <a:ext cx="2468880" cy="246888"/>
-          </a:xfrm>
-          <a:prstGeom prst="rect">
-            <a:avLst/>
-          </a:prstGeom>
-          <a:noFill/>
-          <a:ln/>
-        </p:spPr>
-        <p:txBody>
-          <a:bodyPr wrap="square" lIns="0" tIns="0" rIns="0" bIns="0" rtlCol="0" anchor="t"/>
-          <a:lstStyle/>
-          <a:p>
-            <a:pPr indent="0" marL="0">
-              <a:buNone/>
-            </a:pPr>
-            <a:r>
-              <a:rPr lang="en-US" sz="1150" b="1" dirty="0">
+            <a:off x="3127248" y="2505456"/>
+            <a:ext cx="2468880" cy="237744"/>
+          </a:xfrm>
+          <a:prstGeom prst="rect">
+            <a:avLst/>
+          </a:prstGeom>
+          <a:noFill/>
+          <a:ln/>
+        </p:spPr>
+        <p:txBody>
+          <a:bodyPr wrap="square" lIns="0" tIns="0" rIns="0" bIns="0" rtlCol="0" anchor="t"/>
+          <a:lstStyle/>
+          <a:p>
+            <a:pPr indent="0" marL="0">
+              <a:buNone/>
+            </a:pPr>
+            <a:r>
+              <a:rPr lang="en-US" sz="1100" b="1" dirty="0">
                 <a:solidFill>
                   <a:srgbClr val="0A0A0B"/>
                 </a:solidFill>
               </a:rPr>
               <a:t>Body context</a:t>
             </a:r>
-            <a:endParaRPr lang="en-US" sz="1150" dirty="0"/>
+            <a:endParaRPr lang="en-US" sz="1100" dirty="0"/>
           </a:p>
         </p:txBody>
       </p:sp>
@@ -23996,31 +24169,31 @@
         </p:nvSpPr>
         <p:spPr>
           <a:xfrm>
-            <a:off x="3127248" y="2971800"/>
-            <a:ext cx="2514600" cy="384048"/>
-          </a:xfrm>
-          <a:prstGeom prst="rect">
-            <a:avLst/>
-          </a:prstGeom>
-          <a:noFill/>
-          <a:ln/>
-        </p:spPr>
-        <p:txBody>
-          <a:bodyPr wrap="square" lIns="0" tIns="0" rIns="0" bIns="0" rtlCol="0" anchor="t"/>
-          <a:lstStyle/>
-          <a:p>
-            <a:pPr indent="0" marL="0">
-              <a:buNone/>
-            </a:pPr>
-            <a:r>
-              <a:rPr lang="en-US" sz="950" dirty="0">
+            <a:off x="3127248" y="2724912"/>
+            <a:ext cx="2514600" cy="329184"/>
+          </a:xfrm>
+          <a:prstGeom prst="rect">
+            <a:avLst/>
+          </a:prstGeom>
+          <a:noFill/>
+          <a:ln/>
+        </p:spPr>
+        <p:txBody>
+          <a:bodyPr wrap="square" lIns="0" tIns="0" rIns="0" bIns="0" rtlCol="0" anchor="t"/>
+          <a:lstStyle/>
+          <a:p>
+            <a:pPr indent="0" marL="0">
+              <a:buNone/>
+            </a:pPr>
+            <a:r>
+              <a:rPr lang="en-US" sz="900" dirty="0">
                 <a:solidFill>
                   <a:srgbClr val="55555C"/>
                 </a:solidFill>
               </a:rPr>
               <a:t>your words, games, health app · found by DRAMA · rules cite notes</a:t>
             </a:r>
-            <a:endParaRPr lang="en-US" sz="950" dirty="0"/>
+            <a:endParaRPr lang="en-US" sz="900" dirty="0"/>
           </a:p>
         </p:txBody>
       </p:sp>
@@ -24032,12 +24205,12 @@
         </p:nvSpPr>
         <p:spPr>
           <a:xfrm>
-            <a:off x="5833872" y="2651760"/>
-            <a:ext cx="2724912" cy="731520"/>
+            <a:off x="5833872" y="2468880"/>
+            <a:ext cx="2724912" cy="603504"/>
           </a:xfrm>
           <a:prstGeom prst="roundRect">
             <a:avLst>
-              <a:gd name="adj" fmla="val 15000"/>
+              <a:gd name="adj" fmla="val 18182"/>
             </a:avLst>
           </a:prstGeom>
           <a:solidFill>
@@ -24059,31 +24232,31 @@
         </p:nvSpPr>
         <p:spPr>
           <a:xfrm>
-            <a:off x="5961888" y="2715768"/>
-            <a:ext cx="2468880" cy="246888"/>
-          </a:xfrm>
-          <a:prstGeom prst="rect">
-            <a:avLst/>
-          </a:prstGeom>
-          <a:noFill/>
-          <a:ln/>
-        </p:spPr>
-        <p:txBody>
-          <a:bodyPr wrap="square" lIns="0" tIns="0" rIns="0" bIns="0" rtlCol="0" anchor="t"/>
-          <a:lstStyle/>
-          <a:p>
-            <a:pPr indent="0" marL="0">
-              <a:buNone/>
-            </a:pPr>
-            <a:r>
-              <a:rPr lang="en-US" sz="1150" b="1" dirty="0">
+            <a:off x="5961888" y="2505456"/>
+            <a:ext cx="2468880" cy="237744"/>
+          </a:xfrm>
+          <a:prstGeom prst="rect">
+            <a:avLst/>
+          </a:prstGeom>
+          <a:noFill/>
+          <a:ln/>
+        </p:spPr>
+        <p:txBody>
+          <a:bodyPr wrap="square" lIns="0" tIns="0" rIns="0" bIns="0" rtlCol="0" anchor="t"/>
+          <a:lstStyle/>
+          <a:p>
+            <a:pPr indent="0" marL="0">
+              <a:buNone/>
+            </a:pPr>
+            <a:r>
+              <a:rPr lang="en-US" sz="1100" b="1" dirty="0">
                 <a:solidFill>
                   <a:srgbClr val="0A0A0B"/>
                 </a:solidFill>
               </a:rPr>
               <a:t>Courts near you</a:t>
             </a:r>
-            <a:endParaRPr lang="en-US" sz="1150" dirty="0"/>
+            <a:endParaRPr lang="en-US" sz="1100" dirty="0"/>
           </a:p>
         </p:txBody>
       </p:sp>
@@ -24095,31 +24268,31 @@
         </p:nvSpPr>
         <p:spPr>
           <a:xfrm>
-            <a:off x="5961888" y="2971800"/>
-            <a:ext cx="2514600" cy="384048"/>
-          </a:xfrm>
-          <a:prstGeom prst="rect">
-            <a:avLst/>
-          </a:prstGeom>
-          <a:noFill/>
-          <a:ln/>
-        </p:spPr>
-        <p:txBody>
-          <a:bodyPr wrap="square" lIns="0" tIns="0" rIns="0" bIns="0" rtlCol="0" anchor="t"/>
-          <a:lstStyle/>
-          <a:p>
-            <a:pPr indent="0" marL="0">
-              <a:buNone/>
-            </a:pPr>
-            <a:r>
-              <a:rPr lang="en-US" sz="950" dirty="0">
+            <a:off x="5961888" y="2724912"/>
+            <a:ext cx="2514600" cy="329184"/>
+          </a:xfrm>
+          <a:prstGeom prst="rect">
+            <a:avLst/>
+          </a:prstGeom>
+          <a:noFill/>
+          <a:ln/>
+        </p:spPr>
+        <p:txBody>
+          <a:bodyPr wrap="square" lIns="0" tIns="0" rIns="0" bIns="0" rtlCol="0" anchor="t"/>
+          <a:lstStyle/>
+          <a:p>
+            <a:pPr indent="0" marL="0">
+              <a:buNone/>
+            </a:pPr>
+            <a:r>
+              <a:rPr lang="en-US" sz="900" dirty="0">
                 <a:solidFill>
                   <a:srgbClr val="55555C"/>
                 </a:solidFill>
               </a:rPr>
               <a:t>map, reviews, forecast · 4 judged at once · reasons cited</a:t>
             </a:r>
-            <a:endParaRPr lang="en-US" sz="950" dirty="0"/>
+            <a:endParaRPr lang="en-US" sz="900" dirty="0"/>
           </a:p>
         </p:txBody>
       </p:sp>
@@ -24131,12 +24304,12 @@
         </p:nvSpPr>
         <p:spPr>
           <a:xfrm>
-            <a:off x="2999232" y="3474720"/>
-            <a:ext cx="2724912" cy="731520"/>
+            <a:off x="2999232" y="3127248"/>
+            <a:ext cx="2724912" cy="603504"/>
           </a:xfrm>
           <a:prstGeom prst="roundRect">
             <a:avLst>
-              <a:gd name="adj" fmla="val 15000"/>
+              <a:gd name="adj" fmla="val 18182"/>
             </a:avLst>
           </a:prstGeom>
           <a:solidFill>
@@ -24158,31 +24331,31 @@
         </p:nvSpPr>
         <p:spPr>
           <a:xfrm>
-            <a:off x="3127248" y="3538728"/>
-            <a:ext cx="2468880" cy="246888"/>
-          </a:xfrm>
-          <a:prstGeom prst="rect">
-            <a:avLst/>
-          </a:prstGeom>
-          <a:noFill/>
-          <a:ln/>
-        </p:spPr>
-        <p:txBody>
-          <a:bodyPr wrap="square" lIns="0" tIns="0" rIns="0" bIns="0" rtlCol="0" anchor="t"/>
-          <a:lstStyle/>
-          <a:p>
-            <a:pPr indent="0" marL="0">
-              <a:buNone/>
-            </a:pPr>
-            <a:r>
-              <a:rPr lang="en-US" sz="1150" b="1" dirty="0">
+            <a:off x="3127248" y="3163824"/>
+            <a:ext cx="2468880" cy="237744"/>
+          </a:xfrm>
+          <a:prstGeom prst="rect">
+            <a:avLst/>
+          </a:prstGeom>
+          <a:noFill/>
+          <a:ln/>
+        </p:spPr>
+        <p:txBody>
+          <a:bodyPr wrap="square" lIns="0" tIns="0" rIns="0" bIns="0" rtlCol="0" anchor="t"/>
+          <a:lstStyle/>
+          <a:p>
+            <a:pPr indent="0" marL="0">
+              <a:buNone/>
+            </a:pPr>
+            <a:r>
+              <a:rPr lang="en-US" sz="1100" b="1" dirty="0">
                 <a:solidFill>
                   <a:srgbClr val="0A0A0B"/>
                 </a:solidFill>
               </a:rPr>
               <a:t>Social feed and members</a:t>
             </a:r>
-            <a:endParaRPr lang="en-US" sz="1150" dirty="0"/>
+            <a:endParaRPr lang="en-US" sz="1100" dirty="0"/>
           </a:p>
         </p:txBody>
       </p:sp>
@@ -24194,31 +24367,31 @@
         </p:nvSpPr>
         <p:spPr>
           <a:xfrm>
-            <a:off x="3127248" y="3794760"/>
-            <a:ext cx="2514600" cy="384048"/>
-          </a:xfrm>
-          <a:prstGeom prst="rect">
-            <a:avLst/>
-          </a:prstGeom>
-          <a:noFill/>
-          <a:ln/>
-        </p:spPr>
-        <p:txBody>
-          <a:bodyPr wrap="square" lIns="0" tIns="0" rIns="0" bIns="0" rtlCol="0" anchor="t"/>
-          <a:lstStyle/>
-          <a:p>
-            <a:pPr indent="0" marL="0">
-              <a:buNone/>
-            </a:pPr>
-            <a:r>
-              <a:rPr lang="en-US" sz="950" dirty="0">
+            <a:off x="3127248" y="3383280"/>
+            <a:ext cx="2514600" cy="329184"/>
+          </a:xfrm>
+          <a:prstGeom prst="rect">
+            <a:avLst/>
+          </a:prstGeom>
+          <a:noFill/>
+          <a:ln/>
+        </p:spPr>
+        <p:txBody>
+          <a:bodyPr wrap="square" lIns="0" tIns="0" rIns="0" bIns="0" rtlCol="0" anchor="t"/>
+          <a:lstStyle/>
+          <a:p>
+            <a:pPr indent="0" marL="0">
+              <a:buNone/>
+            </a:pPr>
+            <a:r>
+              <a:rPr lang="en-US" sz="900" dirty="0">
                 <a:solidFill>
                   <a:srgbClr val="55555C"/>
                 </a:solidFill>
               </a:rPr>
               <a:t>Facebook / Instagram login · invites · stories · signed agent channel</a:t>
             </a:r>
-            <a:endParaRPr lang="en-US" sz="950" dirty="0"/>
+            <a:endParaRPr lang="en-US" sz="900" dirty="0"/>
           </a:p>
         </p:txBody>
       </p:sp>
@@ -24230,12 +24403,12 @@
         </p:nvSpPr>
         <p:spPr>
           <a:xfrm>
-            <a:off x="5833872" y="3474720"/>
-            <a:ext cx="2724912" cy="731520"/>
+            <a:off x="5833872" y="3127248"/>
+            <a:ext cx="2724912" cy="603504"/>
           </a:xfrm>
           <a:prstGeom prst="roundRect">
             <a:avLst>
-              <a:gd name="adj" fmla="val 15000"/>
+              <a:gd name="adj" fmla="val 18182"/>
             </a:avLst>
           </a:prstGeom>
           <a:solidFill>
@@ -24257,31 +24430,31 @@
         </p:nvSpPr>
         <p:spPr>
           <a:xfrm>
-            <a:off x="5961888" y="3538728"/>
-            <a:ext cx="2468880" cy="246888"/>
-          </a:xfrm>
-          <a:prstGeom prst="rect">
-            <a:avLst/>
-          </a:prstGeom>
-          <a:noFill/>
-          <a:ln/>
-        </p:spPr>
-        <p:txBody>
-          <a:bodyPr wrap="square" lIns="0" tIns="0" rIns="0" bIns="0" rtlCol="0" anchor="t"/>
-          <a:lstStyle/>
-          <a:p>
-            <a:pPr indent="0" marL="0">
-              <a:buNone/>
-            </a:pPr>
-            <a:r>
-              <a:rPr lang="en-US" sz="1150" b="1" dirty="0">
+            <a:off x="5961888" y="3163824"/>
+            <a:ext cx="2468880" cy="237744"/>
+          </a:xfrm>
+          <a:prstGeom prst="rect">
+            <a:avLst/>
+          </a:prstGeom>
+          <a:noFill/>
+          <a:ln/>
+        </p:spPr>
+        <p:txBody>
+          <a:bodyPr wrap="square" lIns="0" tIns="0" rIns="0" bIns="0" rtlCol="0" anchor="t"/>
+          <a:lstStyle/>
+          <a:p>
+            <a:pPr indent="0" marL="0">
+              <a:buNone/>
+            </a:pPr>
+            <a:r>
+              <a:rPr lang="en-US" sz="1100" b="1" dirty="0">
                 <a:solidFill>
                   <a:srgbClr val="0A0A0B"/>
                 </a:solidFill>
               </a:rPr>
               <a:t>Highlights</a:t>
             </a:r>
-            <a:endParaRPr lang="en-US" sz="1150" dirty="0"/>
+            <a:endParaRPr lang="en-US" sz="1100" dirty="0"/>
           </a:p>
         </p:txBody>
       </p:sp>
@@ -24293,31 +24466,31 @@
         </p:nvSpPr>
         <p:spPr>
           <a:xfrm>
-            <a:off x="5961888" y="3794760"/>
-            <a:ext cx="2514600" cy="384048"/>
-          </a:xfrm>
-          <a:prstGeom prst="rect">
-            <a:avLst/>
-          </a:prstGeom>
-          <a:noFill/>
-          <a:ln/>
-        </p:spPr>
-        <p:txBody>
-          <a:bodyPr wrap="square" lIns="0" tIns="0" rIns="0" bIns="0" rtlCol="0" anchor="t"/>
-          <a:lstStyle/>
-          <a:p>
-            <a:pPr indent="0" marL="0">
-              <a:buNone/>
-            </a:pPr>
-            <a:r>
-              <a:rPr lang="en-US" sz="950" dirty="0">
+            <a:off x="5961888" y="3383280"/>
+            <a:ext cx="2514600" cy="329184"/>
+          </a:xfrm>
+          <a:prstGeom prst="rect">
+            <a:avLst/>
+          </a:prstGeom>
+          <a:noFill/>
+          <a:ln/>
+        </p:spPr>
+        <p:txBody>
+          <a:bodyPr wrap="square" lIns="0" tIns="0" rIns="0" bIns="0" rtlCol="0" anchor="t"/>
+          <a:lstStyle/>
+          <a:p>
+            <a:pPr indent="0" marL="0">
+              <a:buNone/>
+            </a:pPr>
+            <a:r>
+              <a:rPr lang="en-US" sz="900" dirty="0">
                 <a:solidFill>
                   <a:srgbClr val="55555C"/>
                 </a:solidFill>
               </a:rPr>
               <a:t>find you, read your pose, cut you out · orbit effect · caption</a:t>
             </a:r>
-            <a:endParaRPr lang="en-US" sz="950" dirty="0"/>
+            <a:endParaRPr lang="en-US" sz="900" dirty="0"/>
           </a:p>
         </p:txBody>
       </p:sp>
@@ -24329,12 +24502,12 @@
         </p:nvSpPr>
         <p:spPr>
           <a:xfrm>
-            <a:off x="2999232" y="4297680"/>
-            <a:ext cx="2724912" cy="731520"/>
+            <a:off x="2999232" y="3785616"/>
+            <a:ext cx="2724912" cy="603504"/>
           </a:xfrm>
           <a:prstGeom prst="roundRect">
             <a:avLst>
-              <a:gd name="adj" fmla="val 15000"/>
+              <a:gd name="adj" fmla="val 18182"/>
             </a:avLst>
           </a:prstGeom>
           <a:solidFill>
@@ -24356,31 +24529,31 @@
         </p:nvSpPr>
         <p:spPr>
           <a:xfrm>
-            <a:off x="3127248" y="4361688"/>
-            <a:ext cx="2468880" cy="246888"/>
-          </a:xfrm>
-          <a:prstGeom prst="rect">
-            <a:avLst/>
-          </a:prstGeom>
-          <a:noFill/>
-          <a:ln/>
-        </p:spPr>
-        <p:txBody>
-          <a:bodyPr wrap="square" lIns="0" tIns="0" rIns="0" bIns="0" rtlCol="0" anchor="t"/>
-          <a:lstStyle/>
-          <a:p>
-            <a:pPr indent="0" marL="0">
-              <a:buNone/>
-            </a:pPr>
-            <a:r>
-              <a:rPr lang="en-US" sz="1150" b="1" dirty="0">
+            <a:off x="3127248" y="3822192"/>
+            <a:ext cx="2468880" cy="237744"/>
+          </a:xfrm>
+          <a:prstGeom prst="rect">
+            <a:avLst/>
+          </a:prstGeom>
+          <a:noFill/>
+          <a:ln/>
+        </p:spPr>
+        <p:txBody>
+          <a:bodyPr wrap="square" lIns="0" tIns="0" rIns="0" bIns="0" rtlCol="0" anchor="t"/>
+          <a:lstStyle/>
+          <a:p>
+            <a:pPr indent="0" marL="0">
+              <a:buNone/>
+            </a:pPr>
+            <a:r>
+              <a:rPr lang="en-US" sz="1100" b="1" dirty="0">
                 <a:solidFill>
                   <a:srgbClr val="0A0A0B"/>
                 </a:solidFill>
               </a:rPr>
               <a:t>Community loop</a:t>
             </a:r>
-            <a:endParaRPr lang="en-US" sz="1150" dirty="0"/>
+            <a:endParaRPr lang="en-US" sz="1100" dirty="0"/>
           </a:p>
         </p:txBody>
       </p:sp>
@@ -24392,31 +24565,31 @@
         </p:nvSpPr>
         <p:spPr>
           <a:xfrm>
-            <a:off x="3127248" y="4617720"/>
-            <a:ext cx="2514600" cy="384048"/>
-          </a:xfrm>
-          <a:prstGeom prst="rect">
-            <a:avLst/>
-          </a:prstGeom>
-          <a:noFill/>
-          <a:ln/>
-        </p:spPr>
-        <p:txBody>
-          <a:bodyPr wrap="square" lIns="0" tIns="0" rIns="0" bIns="0" rtlCol="0" anchor="t"/>
-          <a:lstStyle/>
-          <a:p>
-            <a:pPr indent="0" marL="0">
-              <a:buNone/>
-            </a:pPr>
-            <a:r>
-              <a:rPr lang="en-US" sz="950" dirty="0">
+            <a:off x="3127248" y="4041648"/>
+            <a:ext cx="2514600" cy="329184"/>
+          </a:xfrm>
+          <a:prstGeom prst="rect">
+            <a:avLst/>
+          </a:prstGeom>
+          <a:noFill/>
+          <a:ln/>
+        </p:spPr>
+        <p:txBody>
+          <a:bodyPr wrap="square" lIns="0" tIns="0" rIns="0" bIns="0" rtlCol="0" anchor="t"/>
+          <a:lstStyle/>
+          <a:p>
+            <a:pPr indent="0" marL="0">
+              <a:buNone/>
+            </a:pPr>
+            <a:r>
+              <a:rPr lang="en-US" sz="900" dirty="0">
                 <a:solidFill>
                   <a:srgbClr val="55555C"/>
                 </a:solidFill>
               </a:rPr>
               <a:t>ideas · DRAMA · votes · spec · coding agent · 9 gates · canary</a:t>
             </a:r>
-            <a:endParaRPr lang="en-US" sz="950" dirty="0"/>
+            <a:endParaRPr lang="en-US" sz="900" dirty="0"/>
           </a:p>
         </p:txBody>
       </p:sp>
@@ -24428,12 +24601,12 @@
         </p:nvSpPr>
         <p:spPr>
           <a:xfrm>
-            <a:off x="5833872" y="4297680"/>
-            <a:ext cx="2724912" cy="731520"/>
+            <a:off x="5833872" y="3785616"/>
+            <a:ext cx="2724912" cy="603504"/>
           </a:xfrm>
           <a:prstGeom prst="roundRect">
             <a:avLst>
-              <a:gd name="adj" fmla="val 15000"/>
+              <a:gd name="adj" fmla="val 18182"/>
             </a:avLst>
           </a:prstGeom>
           <a:solidFill>
@@ -24455,31 +24628,31 @@
         </p:nvSpPr>
         <p:spPr>
           <a:xfrm>
-            <a:off x="5961888" y="4361688"/>
-            <a:ext cx="2468880" cy="246888"/>
-          </a:xfrm>
-          <a:prstGeom prst="rect">
-            <a:avLst/>
-          </a:prstGeom>
-          <a:noFill/>
-          <a:ln/>
-        </p:spPr>
-        <p:txBody>
-          <a:bodyPr wrap="square" lIns="0" tIns="0" rIns="0" bIns="0" rtlCol="0" anchor="t"/>
-          <a:lstStyle/>
-          <a:p>
-            <a:pPr indent="0" marL="0">
-              <a:buNone/>
-            </a:pPr>
-            <a:r>
-              <a:rPr lang="en-US" sz="1150" b="1" dirty="0">
+            <a:off x="5961888" y="3822192"/>
+            <a:ext cx="2468880" cy="237744"/>
+          </a:xfrm>
+          <a:prstGeom prst="rect">
+            <a:avLst/>
+          </a:prstGeom>
+          <a:noFill/>
+          <a:ln/>
+        </p:spPr>
+        <p:txBody>
+          <a:bodyPr wrap="square" lIns="0" tIns="0" rIns="0" bIns="0" rtlCol="0" anchor="t"/>
+          <a:lstStyle/>
+          <a:p>
+            <a:pPr indent="0" marL="0">
+              <a:buNone/>
+            </a:pPr>
+            <a:r>
+              <a:rPr lang="en-US" sz="1100" b="1" dirty="0">
                 <a:solidFill>
                   <a:srgbClr val="0A0A0B"/>
                 </a:solidFill>
               </a:rPr>
               <a:t>Decision tiers</a:t>
             </a:r>
-            <a:endParaRPr lang="en-US" sz="1150" dirty="0"/>
+            <a:endParaRPr lang="en-US" sz="1100" dirty="0"/>
           </a:p>
         </p:txBody>
       </p:sp>
@@ -24491,37 +24664,235 @@
         </p:nvSpPr>
         <p:spPr>
           <a:xfrm>
-            <a:off x="5961888" y="4617720"/>
-            <a:ext cx="2514600" cy="384048"/>
-          </a:xfrm>
-          <a:prstGeom prst="rect">
-            <a:avLst/>
-          </a:prstGeom>
-          <a:noFill/>
-          <a:ln/>
-        </p:spPr>
-        <p:txBody>
-          <a:bodyPr wrap="square" lIns="0" tIns="0" rIns="0" bIns="0" rtlCol="0" anchor="t"/>
-          <a:lstStyle/>
-          <a:p>
-            <a:pPr indent="0" marL="0">
-              <a:buNone/>
-            </a:pPr>
-            <a:r>
-              <a:rPr lang="en-US" sz="950" dirty="0">
+            <a:off x="5961888" y="4041648"/>
+            <a:ext cx="2514600" cy="329184"/>
+          </a:xfrm>
+          <a:prstGeom prst="rect">
+            <a:avLst/>
+          </a:prstGeom>
+          <a:noFill/>
+          <a:ln/>
+        </p:spPr>
+        <p:txBody>
+          <a:bodyPr wrap="square" lIns="0" tIns="0" rIns="0" bIns="0" rtlCol="0" anchor="t"/>
+          <a:lstStyle/>
+          <a:p>
+            <a:pPr indent="0" marL="0">
+              <a:buNone/>
+            </a:pPr>
+            <a:r>
+              <a:rPr lang="en-US" sz="900" dirty="0">
                 <a:solidFill>
                   <a:srgbClr val="55555C"/>
                 </a:solidFill>
               </a:rPr>
               <a:t>code first · Llama 3.2 1B when sure · Muse Glimmer if needed</a:t>
             </a:r>
-            <a:endParaRPr lang="en-US" sz="950" dirty="0"/>
+            <a:endParaRPr lang="en-US" sz="900" dirty="0"/>
           </a:p>
         </p:txBody>
       </p:sp>
       <p:sp>
         <p:nvSpPr>
           <p:cNvPr id="52" name="Shape 49"/>
+          <p:cNvSpPr/>
+          <p:nvPr/>
+        </p:nvSpPr>
+        <p:spPr>
+          <a:xfrm>
+            <a:off x="2999232" y="4443984"/>
+            <a:ext cx="2724912" cy="603504"/>
+          </a:xfrm>
+          <a:prstGeom prst="roundRect">
+            <a:avLst>
+              <a:gd name="adj" fmla="val 18182"/>
+            </a:avLst>
+          </a:prstGeom>
+          <a:solidFill>
+            <a:srgbClr val="F6F7F8"/>
+          </a:solidFill>
+          <a:ln w="12700">
+            <a:solidFill>
+              <a:srgbClr val="F6F7F8"/>
+            </a:solidFill>
+            <a:prstDash val="solid"/>
+          </a:ln>
+        </p:spPr>
+      </p:sp>
+      <p:sp>
+        <p:nvSpPr>
+          <p:cNvPr id="53" name="Text 50"/>
+          <p:cNvSpPr txBox="1"/>
+          <p:nvPr/>
+        </p:nvSpPr>
+        <p:spPr>
+          <a:xfrm>
+            <a:off x="3127248" y="4480560"/>
+            <a:ext cx="2468880" cy="237744"/>
+          </a:xfrm>
+          <a:prstGeom prst="rect">
+            <a:avLst/>
+          </a:prstGeom>
+          <a:noFill/>
+          <a:ln/>
+        </p:spPr>
+        <p:txBody>
+          <a:bodyPr wrap="square" lIns="0" tIns="0" rIns="0" bIns="0" rtlCol="0" anchor="t"/>
+          <a:lstStyle/>
+          <a:p>
+            <a:pPr indent="0" marL="0">
+              <a:buNone/>
+            </a:pPr>
+            <a:r>
+              <a:rPr lang="en-US" sz="1100" b="1" dirty="0">
+                <a:solidFill>
+                  <a:srgbClr val="0A0A0B"/>
+                </a:solidFill>
+              </a:rPr>
+              <a:t>Live voice</a:t>
+            </a:r>
+            <a:endParaRPr lang="en-US" sz="1100" dirty="0"/>
+          </a:p>
+        </p:txBody>
+      </p:sp>
+      <p:sp>
+        <p:nvSpPr>
+          <p:cNvPr id="54" name="Text 51"/>
+          <p:cNvSpPr txBox="1"/>
+          <p:nvPr/>
+        </p:nvSpPr>
+        <p:spPr>
+          <a:xfrm>
+            <a:off x="3127248" y="4700016"/>
+            <a:ext cx="2514600" cy="329184"/>
+          </a:xfrm>
+          <a:prstGeom prst="rect">
+            <a:avLst/>
+          </a:prstGeom>
+          <a:noFill/>
+          <a:ln/>
+        </p:spPr>
+        <p:txBody>
+          <a:bodyPr wrap="square" lIns="0" tIns="0" rIns="0" bIns="0" rtlCol="0" anchor="t"/>
+          <a:lstStyle/>
+          <a:p>
+            <a:pPr indent="0" marL="0">
+              <a:buNone/>
+            </a:pPr>
+            <a:r>
+              <a:rPr lang="en-US" sz="900" dirty="0">
+                <a:solidFill>
+                  <a:srgbClr val="55555C"/>
+                </a:solidFill>
+              </a:rPr>
+              <a:t>mic relayed to Muse Voice Transcribe · barge-in · Kokoro speaks</a:t>
+            </a:r>
+            <a:endParaRPr lang="en-US" sz="900" dirty="0"/>
+          </a:p>
+        </p:txBody>
+      </p:sp>
+      <p:sp>
+        <p:nvSpPr>
+          <p:cNvPr id="55" name="Shape 52"/>
+          <p:cNvSpPr/>
+          <p:nvPr/>
+        </p:nvSpPr>
+        <p:spPr>
+          <a:xfrm>
+            <a:off x="5833872" y="4443984"/>
+            <a:ext cx="2724912" cy="603504"/>
+          </a:xfrm>
+          <a:prstGeom prst="roundRect">
+            <a:avLst>
+              <a:gd name="adj" fmla="val 18182"/>
+            </a:avLst>
+          </a:prstGeom>
+          <a:solidFill>
+            <a:srgbClr val="F6F7F8"/>
+          </a:solidFill>
+          <a:ln w="12700">
+            <a:solidFill>
+              <a:srgbClr val="F6F7F8"/>
+            </a:solidFill>
+            <a:prstDash val="solid"/>
+          </a:ln>
+        </p:spPr>
+      </p:sp>
+      <p:sp>
+        <p:nvSpPr>
+          <p:cNvPr id="56" name="Text 53"/>
+          <p:cNvSpPr txBox="1"/>
+          <p:nvPr/>
+        </p:nvSpPr>
+        <p:spPr>
+          <a:xfrm>
+            <a:off x="5961888" y="4480560"/>
+            <a:ext cx="2468880" cy="237744"/>
+          </a:xfrm>
+          <a:prstGeom prst="rect">
+            <a:avLst/>
+          </a:prstGeom>
+          <a:noFill/>
+          <a:ln/>
+        </p:spPr>
+        <p:txBody>
+          <a:bodyPr wrap="square" lIns="0" tIns="0" rIns="0" bIns="0" rtlCol="0" anchor="t"/>
+          <a:lstStyle/>
+          <a:p>
+            <a:pPr indent="0" marL="0">
+              <a:buNone/>
+            </a:pPr>
+            <a:r>
+              <a:rPr lang="en-US" sz="1100" b="1" dirty="0">
+                <a:solidFill>
+                  <a:srgbClr val="0A0A0B"/>
+                </a:solidFill>
+              </a:rPr>
+              <a:t>Posters and faces</a:t>
+            </a:r>
+            <a:endParaRPr lang="en-US" sz="1100" dirty="0"/>
+          </a:p>
+        </p:txBody>
+      </p:sp>
+      <p:sp>
+        <p:nvSpPr>
+          <p:cNvPr id="57" name="Text 54"/>
+          <p:cNvSpPr txBox="1"/>
+          <p:nvPr/>
+        </p:nvSpPr>
+        <p:spPr>
+          <a:xfrm>
+            <a:off x="5961888" y="4700016"/>
+            <a:ext cx="2514600" cy="329184"/>
+          </a:xfrm>
+          <a:prstGeom prst="rect">
+            <a:avLst/>
+          </a:prstGeom>
+          <a:noFill/>
+          <a:ln/>
+        </p:spPr>
+        <p:txBody>
+          <a:bodyPr wrap="square" lIns="0" tIns="0" rIns="0" bIns="0" rtlCol="0" anchor="t"/>
+          <a:lstStyle/>
+          <a:p>
+            <a:pPr indent="0" marL="0">
+              <a:buNone/>
+            </a:pPr>
+            <a:r>
+              <a:rPr lang="en-US" sz="900" dirty="0">
+                <a:solidFill>
+                  <a:srgbClr val="55555C"/>
+                </a:solidFill>
+              </a:rPr>
+              <a:t>Muse Image art, made once and cached · names drawn by the app</a:t>
+            </a:r>
+            <a:endParaRPr lang="en-US" sz="900" dirty="0"/>
+          </a:p>
+        </p:txBody>
+      </p:sp>
+      <p:sp>
+        <p:nvSpPr>
+          <p:cNvPr id="58" name="Shape 55"/>
           <p:cNvSpPr/>
           <p:nvPr/>
         </p:nvSpPr>
@@ -24548,7 +24919,7 @@
       </p:sp>
       <p:sp>
         <p:nvSpPr>
-          <p:cNvPr id="53" name="Text 50"/>
+          <p:cNvPr id="59" name="Text 56"/>
           <p:cNvSpPr txBox="1"/>
           <p:nvPr/>
         </p:nvSpPr>
@@ -24584,7 +24955,7 @@
       </p:sp>
       <p:sp>
         <p:nvSpPr>
-          <p:cNvPr id="54" name="Text 51"/>
+          <p:cNvPr id="60" name="Text 57"/>
           <p:cNvSpPr txBox="1"/>
           <p:nvPr/>
         </p:nvSpPr>
@@ -24620,7 +24991,7 @@
       </p:sp>
       <p:sp>
         <p:nvSpPr>
-          <p:cNvPr id="55" name="Text 52"/>
+          <p:cNvPr id="61" name="Text 58"/>
           <p:cNvSpPr txBox="1"/>
           <p:nvPr/>
         </p:nvSpPr>
@@ -24656,13 +25027,13 @@
       </p:sp>
       <p:sp>
         <p:nvSpPr>
-          <p:cNvPr id="56" name="Shape 53"/>
+          <p:cNvPr id="62" name="Shape 59"/>
           <p:cNvSpPr/>
           <p:nvPr/>
         </p:nvSpPr>
         <p:spPr>
           <a:xfrm>
-            <a:off x="8750808" y="2468880"/>
+            <a:off x="8750808" y="2103120"/>
             <a:ext cx="274320" cy="0"/>
           </a:xfrm>
           <a:prstGeom prst="line">
@@ -24680,13 +25051,13 @@
       </p:sp>
       <p:sp>
         <p:nvSpPr>
-          <p:cNvPr id="57" name="Shape 54"/>
+          <p:cNvPr id="63" name="Shape 60"/>
           <p:cNvSpPr/>
           <p:nvPr/>
         </p:nvSpPr>
         <p:spPr>
           <a:xfrm>
-            <a:off x="8750808" y="3794760"/>
+            <a:off x="8750808" y="2926080"/>
             <a:ext cx="274320" cy="0"/>
           </a:xfrm>
           <a:prstGeom prst="line">
@@ -24704,7 +25075,31 @@
       </p:sp>
       <p:sp>
         <p:nvSpPr>
-          <p:cNvPr id="58" name="Text 55"/>
+          <p:cNvPr id="64" name="Shape 61"/>
+          <p:cNvSpPr/>
+          <p:nvPr/>
+        </p:nvSpPr>
+        <p:spPr>
+          <a:xfrm>
+            <a:off x="8750808" y="4572000"/>
+            <a:ext cx="274320" cy="0"/>
+          </a:xfrm>
+          <a:prstGeom prst="line">
+            <a:avLst/>
+          </a:prstGeom>
+          <a:noFill/>
+          <a:ln w="22225">
+            <a:solidFill>
+              <a:srgbClr val="B26A00"/>
+            </a:solidFill>
+            <a:prstDash val="solid"/>
+            <a:tailEnd type="triangle"/>
+          </a:ln>
+        </p:spPr>
+      </p:sp>
+      <p:sp>
+        <p:nvSpPr>
+          <p:cNvPr id="65" name="Text 62"/>
           <p:cNvSpPr txBox="1"/>
           <p:nvPr/>
         </p:nvSpPr>
@@ -24740,18 +25135,18 @@
       </p:sp>
       <p:sp>
         <p:nvSpPr>
-          <p:cNvPr id="59" name="Shape 56"/>
+          <p:cNvPr id="66" name="Shape 63"/>
           <p:cNvSpPr/>
           <p:nvPr/>
         </p:nvSpPr>
         <p:spPr>
           <a:xfrm>
             <a:off x="9070848" y="1755648"/>
-            <a:ext cx="2697480" cy="914400"/>
+            <a:ext cx="2697480" cy="713232"/>
           </a:xfrm>
           <a:prstGeom prst="roundRect">
             <a:avLst>
-              <a:gd name="adj" fmla="val 12000"/>
+              <a:gd name="adj" fmla="val 15385"/>
             </a:avLst>
           </a:prstGeom>
           <a:solidFill>
@@ -24767,7 +25162,7 @@
       </p:sp>
       <p:sp>
         <p:nvSpPr>
-          <p:cNvPr id="60" name="Text 57"/>
+          <p:cNvPr id="67" name="Text 64"/>
           <p:cNvSpPr txBox="1"/>
           <p:nvPr/>
         </p:nvSpPr>
@@ -24803,14 +25198,14 @@
       </p:sp>
       <p:sp>
         <p:nvSpPr>
-          <p:cNvPr id="61" name="Text 58"/>
+          <p:cNvPr id="68" name="Text 65"/>
           <p:cNvSpPr txBox="1"/>
           <p:nvPr/>
         </p:nvSpPr>
         <p:spPr>
           <a:xfrm>
             <a:off x="9198864" y="2084832"/>
-            <a:ext cx="2487168" cy="548640"/>
+            <a:ext cx="2487168" cy="347472"/>
           </a:xfrm>
           <a:prstGeom prst="rect">
             <a:avLst/>
@@ -24831,7 +25226,7 @@
                   <a:srgbClr val="0A0A0B"/>
                 </a:solidFill>
               </a:rPr>
-              <a:t>GPU 1 · RTX 3090 · 4 in parallel · tools, JSON Schemas, vision · fallback: Muse Spark 1.3 (Meta Model API)</a:t>
+              <a:t>GPU 1 · RTX 3090 · 4 in parallel · tools, JSON Schemas, vision</a:t>
             </a:r>
             <a:endParaRPr lang="en-US" sz="950" dirty="0"/>
           </a:p>
@@ -24839,18 +25234,18 @@
       </p:sp>
       <p:sp>
         <p:nvSpPr>
-          <p:cNvPr id="62" name="Shape 59"/>
+          <p:cNvPr id="69" name="Shape 66"/>
           <p:cNvSpPr/>
           <p:nvPr/>
         </p:nvSpPr>
         <p:spPr>
           <a:xfrm>
-            <a:off x="9070848" y="2779776"/>
-            <a:ext cx="2697480" cy="777240"/>
+            <a:off x="9070848" y="2578608"/>
+            <a:ext cx="2697480" cy="713232"/>
           </a:xfrm>
           <a:prstGeom prst="roundRect">
             <a:avLst>
-              <a:gd name="adj" fmla="val 14118"/>
+              <a:gd name="adj" fmla="val 15385"/>
             </a:avLst>
           </a:prstGeom>
           <a:solidFill>
@@ -24866,13 +25261,13 @@
       </p:sp>
       <p:sp>
         <p:nvSpPr>
-          <p:cNvPr id="63" name="Text 60"/>
-          <p:cNvSpPr txBox="1"/>
-          <p:nvPr/>
-        </p:nvSpPr>
-        <p:spPr>
-          <a:xfrm>
-            <a:off x="9198864" y="2852928"/>
+          <p:cNvPr id="70" name="Text 67"/>
+          <p:cNvSpPr txBox="1"/>
+          <p:nvPr/>
+        </p:nvSpPr>
+        <p:spPr>
+          <a:xfrm>
+            <a:off x="9198864" y="2651760"/>
             <a:ext cx="2468880" cy="246888"/>
           </a:xfrm>
           <a:prstGeom prst="rect">
@@ -24902,14 +25297,14 @@
       </p:sp>
       <p:sp>
         <p:nvSpPr>
-          <p:cNvPr id="64" name="Text 61"/>
-          <p:cNvSpPr txBox="1"/>
-          <p:nvPr/>
-        </p:nvSpPr>
-        <p:spPr>
-          <a:xfrm>
-            <a:off x="9198864" y="3108960"/>
-            <a:ext cx="2487168" cy="411480"/>
+          <p:cNvPr id="71" name="Text 68"/>
+          <p:cNvSpPr txBox="1"/>
+          <p:nvPr/>
+        </p:nvSpPr>
+        <p:spPr>
+          <a:xfrm>
+            <a:off x="9198864" y="2907792"/>
+            <a:ext cx="2487168" cy="347472"/>
           </a:xfrm>
           <a:prstGeom prst="rect">
             <a:avLst/>
@@ -24938,13 +25333,13 @@
       </p:sp>
       <p:sp>
         <p:nvSpPr>
-          <p:cNvPr id="65" name="Shape 62"/>
+          <p:cNvPr id="72" name="Shape 69"/>
           <p:cNvSpPr/>
           <p:nvPr/>
         </p:nvSpPr>
         <p:spPr>
           <a:xfrm>
-            <a:off x="9070848" y="3666744"/>
+            <a:off x="9070848" y="3401568"/>
             <a:ext cx="2697480" cy="914400"/>
           </a:xfrm>
           <a:prstGeom prst="roundRect">
@@ -24965,13 +25360,13 @@
       </p:sp>
       <p:sp>
         <p:nvSpPr>
-          <p:cNvPr id="66" name="Text 63"/>
-          <p:cNvSpPr txBox="1"/>
-          <p:nvPr/>
-        </p:nvSpPr>
-        <p:spPr>
-          <a:xfrm>
-            <a:off x="9198864" y="3739896"/>
+          <p:cNvPr id="73" name="Text 70"/>
+          <p:cNvSpPr txBox="1"/>
+          <p:nvPr/>
+        </p:nvSpPr>
+        <p:spPr>
+          <a:xfrm>
+            <a:off x="9198864" y="3474720"/>
             <a:ext cx="2468880" cy="246888"/>
           </a:xfrm>
           <a:prstGeom prst="rect">
@@ -25001,13 +25396,13 @@
       </p:sp>
       <p:sp>
         <p:nvSpPr>
-          <p:cNvPr id="67" name="Text 64"/>
-          <p:cNvSpPr txBox="1"/>
-          <p:nvPr/>
-        </p:nvSpPr>
-        <p:spPr>
-          <a:xfrm>
-            <a:off x="9198864" y="3995928"/>
+          <p:cNvPr id="74" name="Text 71"/>
+          <p:cNvSpPr txBox="1"/>
+          <p:nvPr/>
+        </p:nvSpPr>
+        <p:spPr>
+          <a:xfrm>
+            <a:off x="9198864" y="3730752"/>
             <a:ext cx="2487168" cy="548640"/>
           </a:xfrm>
           <a:prstGeom prst="rect">
@@ -25029,7 +25424,7 @@
                   <a:srgbClr val="0A0A0B"/>
                 </a:solidFill>
               </a:rPr>
-              <a:t>Llama 3.2 1B student · Llama Guard 3 1B · Prompt Guard 2 86M · DRAMA · Omnilingual ASR</a:t>
+              <a:t>Llama 3.2 1B student · Llama Guard 3 1B · Prompt Guard 2 86M · DRAMA · Omnilingual ASR · Kokoro (speech)</a:t>
             </a:r>
             <a:endParaRPr lang="en-US" sz="950" dirty="0"/>
           </a:p>
@@ -25037,54 +25432,153 @@
       </p:sp>
       <p:sp>
         <p:nvSpPr>
-          <p:cNvPr id="68" name="Text 65"/>
-          <p:cNvSpPr txBox="1"/>
-          <p:nvPr/>
-        </p:nvSpPr>
-        <p:spPr>
-          <a:xfrm>
-            <a:off x="9070848" y="4745736"/>
-            <a:ext cx="2743200" cy="228600"/>
-          </a:xfrm>
-          <a:prstGeom prst="rect">
-            <a:avLst/>
-          </a:prstGeom>
-          <a:noFill/>
-          <a:ln/>
-        </p:spPr>
-        <p:txBody>
-          <a:bodyPr wrap="square" lIns="0" tIns="0" rIns="0" bIns="0" rtlCol="0" anchor="t"/>
-          <a:lstStyle/>
-          <a:p>
-            <a:pPr indent="0" marL="0">
-              <a:buNone/>
-            </a:pPr>
-            <a:r>
-              <a:rPr lang="en-US" sz="1000" b="1" spc="100" kern="0" dirty="0">
-                <a:solidFill>
-                  <a:srgbClr val="55555C"/>
-                </a:solidFill>
-              </a:rPr>
-              <a:t>OPEN DATA</a:t>
-            </a:r>
-            <a:endParaRPr lang="en-US" sz="1000" dirty="0"/>
-          </a:p>
-        </p:txBody>
-      </p:sp>
-      <p:sp>
-        <p:nvSpPr>
-          <p:cNvPr id="69" name="Shape 66"/>
+          <p:cNvPr id="75" name="Shape 72"/>
           <p:cNvSpPr/>
           <p:nvPr/>
         </p:nvSpPr>
         <p:spPr>
           <a:xfrm>
-            <a:off x="9070848" y="5020056"/>
-            <a:ext cx="2697480" cy="384048"/>
+            <a:off x="9070848" y="4425696"/>
+            <a:ext cx="2697480" cy="868680"/>
           </a:xfrm>
           <a:prstGeom prst="roundRect">
             <a:avLst>
-              <a:gd name="adj" fmla="val 28571"/>
+              <a:gd name="adj" fmla="val 12632"/>
+            </a:avLst>
+          </a:prstGeom>
+          <a:solidFill>
+            <a:srgbClr val="FBF3E6"/>
+          </a:solidFill>
+          <a:ln w="12700">
+            <a:solidFill>
+              <a:srgbClr val="FBF3E6"/>
+            </a:solidFill>
+            <a:prstDash val="solid"/>
+          </a:ln>
+        </p:spPr>
+      </p:sp>
+      <p:sp>
+        <p:nvSpPr>
+          <p:cNvPr id="76" name="Text 73"/>
+          <p:cNvSpPr txBox="1"/>
+          <p:nvPr/>
+        </p:nvSpPr>
+        <p:spPr>
+          <a:xfrm>
+            <a:off x="9198864" y="4498848"/>
+            <a:ext cx="2468880" cy="246888"/>
+          </a:xfrm>
+          <a:prstGeom prst="rect">
+            <a:avLst/>
+          </a:prstGeom>
+          <a:noFill/>
+          <a:ln/>
+        </p:spPr>
+        <p:txBody>
+          <a:bodyPr wrap="square" lIns="0" tIns="0" rIns="0" bIns="0" rtlCol="0" anchor="t"/>
+          <a:lstStyle/>
+          <a:p>
+            <a:pPr indent="0" marL="0">
+              <a:buNone/>
+            </a:pPr>
+            <a:r>
+              <a:rPr lang="en-US" sz="1150" b="1" dirty="0">
+                <a:solidFill>
+                  <a:srgbClr val="B26A00"/>
+                </a:solidFill>
+              </a:rPr>
+              <a:t>Meta Model API · key on the server</a:t>
+            </a:r>
+            <a:endParaRPr lang="en-US" sz="1150" dirty="0"/>
+          </a:p>
+        </p:txBody>
+      </p:sp>
+      <p:sp>
+        <p:nvSpPr>
+          <p:cNvPr id="77" name="Text 74"/>
+          <p:cNvSpPr txBox="1"/>
+          <p:nvPr/>
+        </p:nvSpPr>
+        <p:spPr>
+          <a:xfrm>
+            <a:off x="9198864" y="4754880"/>
+            <a:ext cx="2487168" cy="502920"/>
+          </a:xfrm>
+          <a:prstGeom prst="rect">
+            <a:avLst/>
+          </a:prstGeom>
+          <a:noFill/>
+          <a:ln/>
+        </p:spPr>
+        <p:txBody>
+          <a:bodyPr wrap="square" lIns="0" tIns="0" rIns="0" bIns="0" rtlCol="0" anchor="t"/>
+          <a:lstStyle/>
+          <a:p>
+            <a:pPr indent="0" marL="0">
+              <a:buNone/>
+            </a:pPr>
+            <a:r>
+              <a:rPr lang="en-US" sz="950" dirty="0">
+                <a:solidFill>
+                  <a:srgbClr val="0A0A0B"/>
+                </a:solidFill>
+              </a:rPr>
+              <a:t>Muse Spark 1.3 (fallback) · Muse Voice Transcribe · Muse Image · SAM 3.1 (checked once)</a:t>
+            </a:r>
+            <a:endParaRPr lang="en-US" sz="950" dirty="0"/>
+          </a:p>
+        </p:txBody>
+      </p:sp>
+      <p:sp>
+        <p:nvSpPr>
+          <p:cNvPr id="78" name="Text 75"/>
+          <p:cNvSpPr txBox="1"/>
+          <p:nvPr/>
+        </p:nvSpPr>
+        <p:spPr>
+          <a:xfrm>
+            <a:off x="9070848" y="5458968"/>
+            <a:ext cx="2743200" cy="228600"/>
+          </a:xfrm>
+          <a:prstGeom prst="rect">
+            <a:avLst/>
+          </a:prstGeom>
+          <a:noFill/>
+          <a:ln/>
+        </p:spPr>
+        <p:txBody>
+          <a:bodyPr wrap="square" lIns="0" tIns="0" rIns="0" bIns="0" rtlCol="0" anchor="t"/>
+          <a:lstStyle/>
+          <a:p>
+            <a:pPr indent="0" marL="0">
+              <a:buNone/>
+            </a:pPr>
+            <a:r>
+              <a:rPr lang="en-US" sz="1000" b="1" spc="100" kern="0" dirty="0">
+                <a:solidFill>
+                  <a:srgbClr val="55555C"/>
+                </a:solidFill>
+              </a:rPr>
+              <a:t>OPEN DATA</a:t>
+            </a:r>
+            <a:endParaRPr lang="en-US" sz="1000" dirty="0"/>
+          </a:p>
+        </p:txBody>
+      </p:sp>
+      <p:sp>
+        <p:nvSpPr>
+          <p:cNvPr id="79" name="Shape 76"/>
+          <p:cNvSpPr/>
+          <p:nvPr/>
+        </p:nvSpPr>
+        <p:spPr>
+          <a:xfrm>
+            <a:off x="9070848" y="5715000"/>
+            <a:ext cx="2697480" cy="457200"/>
+          </a:xfrm>
+          <a:prstGeom prst="roundRect">
+            <a:avLst>
+              <a:gd name="adj" fmla="val 24000"/>
             </a:avLst>
           </a:prstGeom>
           <a:solidFill>
@@ -25100,14 +25594,14 @@
       </p:sp>
       <p:sp>
         <p:nvSpPr>
-          <p:cNvPr id="70" name="Text 67"/>
-          <p:cNvSpPr txBox="1"/>
-          <p:nvPr/>
-        </p:nvSpPr>
-        <p:spPr>
-          <a:xfrm>
-            <a:off x="9198864" y="5020056"/>
-            <a:ext cx="1463040" cy="384048"/>
+          <p:cNvPr id="80" name="Text 77"/>
+          <p:cNvSpPr txBox="1"/>
+          <p:nvPr/>
+        </p:nvSpPr>
+        <p:spPr>
+          <a:xfrm>
+            <a:off x="9198864" y="5715000"/>
+            <a:ext cx="2514600" cy="457200"/>
           </a:xfrm>
           <a:prstGeom prst="rect">
             <a:avLst/>
@@ -25123,274 +25617,16 @@
               <a:buNone/>
             </a:pPr>
             <a:r>
-              <a:rPr lang="en-US" sz="1100" b="1" dirty="0">
+              <a:rPr lang="en-US" sz="950" dirty="0">
                 <a:solidFill>
                   <a:srgbClr val="0A0A0B"/>
                 </a:solidFill>
               </a:rPr>
-              <a:t>OpenStreetMap</a:t>
-            </a:r>
-            <a:endParaRPr lang="en-US" sz="1100" dirty="0"/>
-          </a:p>
-        </p:txBody>
-      </p:sp>
-      <p:sp>
-        <p:nvSpPr>
-          <p:cNvPr id="71" name="Text 68"/>
-          <p:cNvSpPr txBox="1"/>
-          <p:nvPr/>
-        </p:nvSpPr>
-        <p:spPr>
-          <a:xfrm>
-            <a:off x="10515600" y="5020056"/>
-            <a:ext cx="1143000" cy="384048"/>
-          </a:xfrm>
-          <a:prstGeom prst="rect">
-            <a:avLst/>
-          </a:prstGeom>
-          <a:noFill/>
-          <a:ln/>
-        </p:spPr>
-        <p:txBody>
-          <a:bodyPr wrap="square" lIns="0" tIns="0" rIns="0" bIns="0" rtlCol="0" anchor="ctr"/>
-          <a:lstStyle/>
-          <a:p>
-            <a:pPr algn="r" indent="0" marL="0">
-              <a:buNone/>
-            </a:pPr>
-            <a:r>
-              <a:rPr lang="en-US" sz="950" dirty="0">
-                <a:solidFill>
-                  <a:srgbClr val="55555C"/>
-                </a:solidFill>
-              </a:rPr>
-              <a:t>courts, maps</a:t>
+              <a:t>OpenStreetMap · Open-Meteo · Google Places (reviews)</a:t>
             </a:r>
             <a:endParaRPr lang="en-US" sz="950" dirty="0"/>
           </a:p>
         </p:txBody>
-      </p:sp>
-      <p:sp>
-        <p:nvSpPr>
-          <p:cNvPr id="72" name="Shape 69"/>
-          <p:cNvSpPr/>
-          <p:nvPr/>
-        </p:nvSpPr>
-        <p:spPr>
-          <a:xfrm>
-            <a:off x="9070848" y="5477256"/>
-            <a:ext cx="2697480" cy="384048"/>
-          </a:xfrm>
-          <a:prstGeom prst="roundRect">
-            <a:avLst>
-              <a:gd name="adj" fmla="val 28571"/>
-            </a:avLst>
-          </a:prstGeom>
-          <a:solidFill>
-            <a:srgbClr val="FFFFFF"/>
-          </a:solidFill>
-          <a:ln w="12700">
-            <a:solidFill>
-              <a:srgbClr val="DCDCE0"/>
-            </a:solidFill>
-            <a:prstDash val="solid"/>
-          </a:ln>
-        </p:spPr>
-      </p:sp>
-      <p:sp>
-        <p:nvSpPr>
-          <p:cNvPr id="73" name="Text 70"/>
-          <p:cNvSpPr txBox="1"/>
-          <p:nvPr/>
-        </p:nvSpPr>
-        <p:spPr>
-          <a:xfrm>
-            <a:off x="9198864" y="5477256"/>
-            <a:ext cx="1463040" cy="384048"/>
-          </a:xfrm>
-          <a:prstGeom prst="rect">
-            <a:avLst/>
-          </a:prstGeom>
-          <a:noFill/>
-          <a:ln/>
-        </p:spPr>
-        <p:txBody>
-          <a:bodyPr wrap="square" lIns="0" tIns="0" rIns="0" bIns="0" rtlCol="0" anchor="ctr"/>
-          <a:lstStyle/>
-          <a:p>
-            <a:pPr indent="0" marL="0">
-              <a:buNone/>
-            </a:pPr>
-            <a:r>
-              <a:rPr lang="en-US" sz="1100" b="1" dirty="0">
-                <a:solidFill>
-                  <a:srgbClr val="0A0A0B"/>
-                </a:solidFill>
-              </a:rPr>
-              <a:t>Open-Meteo</a:t>
-            </a:r>
-            <a:endParaRPr lang="en-US" sz="1100" dirty="0"/>
-          </a:p>
-        </p:txBody>
-      </p:sp>
-      <p:sp>
-        <p:nvSpPr>
-          <p:cNvPr id="74" name="Text 71"/>
-          <p:cNvSpPr txBox="1"/>
-          <p:nvPr/>
-        </p:nvSpPr>
-        <p:spPr>
-          <a:xfrm>
-            <a:off x="10515600" y="5477256"/>
-            <a:ext cx="1143000" cy="384048"/>
-          </a:xfrm>
-          <a:prstGeom prst="rect">
-            <a:avLst/>
-          </a:prstGeom>
-          <a:noFill/>
-          <a:ln/>
-        </p:spPr>
-        <p:txBody>
-          <a:bodyPr wrap="square" lIns="0" tIns="0" rIns="0" bIns="0" rtlCol="0" anchor="ctr"/>
-          <a:lstStyle/>
-          <a:p>
-            <a:pPr algn="r" indent="0" marL="0">
-              <a:buNone/>
-            </a:pPr>
-            <a:r>
-              <a:rPr lang="en-US" sz="950" dirty="0">
-                <a:solidFill>
-                  <a:srgbClr val="55555C"/>
-                </a:solidFill>
-              </a:rPr>
-              <a:t>the forecast</a:t>
-            </a:r>
-            <a:endParaRPr lang="en-US" sz="950" dirty="0"/>
-          </a:p>
-        </p:txBody>
-      </p:sp>
-      <p:sp>
-        <p:nvSpPr>
-          <p:cNvPr id="75" name="Shape 72"/>
-          <p:cNvSpPr/>
-          <p:nvPr/>
-        </p:nvSpPr>
-        <p:spPr>
-          <a:xfrm>
-            <a:off x="9070848" y="5934456"/>
-            <a:ext cx="2697480" cy="384048"/>
-          </a:xfrm>
-          <a:prstGeom prst="roundRect">
-            <a:avLst>
-              <a:gd name="adj" fmla="val 28571"/>
-            </a:avLst>
-          </a:prstGeom>
-          <a:solidFill>
-            <a:srgbClr val="FFFFFF"/>
-          </a:solidFill>
-          <a:ln w="12700">
-            <a:solidFill>
-              <a:srgbClr val="DCDCE0"/>
-            </a:solidFill>
-            <a:prstDash val="solid"/>
-          </a:ln>
-        </p:spPr>
-      </p:sp>
-      <p:sp>
-        <p:nvSpPr>
-          <p:cNvPr id="76" name="Text 73"/>
-          <p:cNvSpPr txBox="1"/>
-          <p:nvPr/>
-        </p:nvSpPr>
-        <p:spPr>
-          <a:xfrm>
-            <a:off x="9198864" y="5934456"/>
-            <a:ext cx="1463040" cy="384048"/>
-          </a:xfrm>
-          <a:prstGeom prst="rect">
-            <a:avLst/>
-          </a:prstGeom>
-          <a:noFill/>
-          <a:ln/>
-        </p:spPr>
-        <p:txBody>
-          <a:bodyPr wrap="square" lIns="0" tIns="0" rIns="0" bIns="0" rtlCol="0" anchor="ctr"/>
-          <a:lstStyle/>
-          <a:p>
-            <a:pPr indent="0" marL="0">
-              <a:buNone/>
-            </a:pPr>
-            <a:r>
-              <a:rPr lang="en-US" sz="1100" b="1" dirty="0">
-                <a:solidFill>
-                  <a:srgbClr val="0A0A0B"/>
-                </a:solidFill>
-              </a:rPr>
-              <a:t>Google Places</a:t>
-            </a:r>
-            <a:endParaRPr lang="en-US" sz="1100" dirty="0"/>
-          </a:p>
-        </p:txBody>
-      </p:sp>
-      <p:sp>
-        <p:nvSpPr>
-          <p:cNvPr id="77" name="Text 74"/>
-          <p:cNvSpPr txBox="1"/>
-          <p:nvPr/>
-        </p:nvSpPr>
-        <p:spPr>
-          <a:xfrm>
-            <a:off x="10515600" y="5934456"/>
-            <a:ext cx="1143000" cy="384048"/>
-          </a:xfrm>
-          <a:prstGeom prst="rect">
-            <a:avLst/>
-          </a:prstGeom>
-          <a:noFill/>
-          <a:ln/>
-        </p:spPr>
-        <p:txBody>
-          <a:bodyPr wrap="square" lIns="0" tIns="0" rIns="0" bIns="0" rtlCol="0" anchor="ctr"/>
-          <a:lstStyle/>
-          <a:p>
-            <a:pPr algn="r" indent="0" marL="0">
-              <a:buNone/>
-            </a:pPr>
-            <a:r>
-              <a:rPr lang="en-US" sz="950" dirty="0">
-                <a:solidFill>
-                  <a:srgbClr val="55555C"/>
-                </a:solidFill>
-              </a:rPr>
-              <a:t>reviews, keyed</a:t>
-            </a:r>
-            <a:endParaRPr lang="en-US" sz="950" dirty="0"/>
-          </a:p>
-        </p:txBody>
-      </p:sp>
-      <p:sp>
-        <p:nvSpPr>
-          <p:cNvPr id="78" name="Shape 75"/>
-          <p:cNvSpPr/>
-          <p:nvPr/>
-        </p:nvSpPr>
-        <p:spPr>
-          <a:xfrm>
-            <a:off x="8750808" y="5440680"/>
-            <a:ext cx="274320" cy="0"/>
-          </a:xfrm>
-          <a:prstGeom prst="line">
-            <a:avLst/>
-          </a:prstGeom>
-          <a:noFill/>
-          <a:ln w="22225">
-            <a:solidFill>
-              <a:srgbClr val="8A8A92"/>
-            </a:solidFill>
-            <a:prstDash val="solid"/>
-            <a:tailEnd type="triangle"/>
-          </a:ln>
-        </p:spPr>
       </p:sp>
       <p:sp>
         <p:nvSpPr>
@@ -31298,7 +31534,7 @@
                   <a:srgbClr val="0A7F44"/>
                 </a:solidFill>
               </a:rPr>
-              <a:t>THURSDAY · FOUR META VISION MODELS</a:t>
+              <a:t>THURSDAY · FIVE META VISION MODELS</a:t>
             </a:r>
             <a:endParaRPr lang="en-US" sz="1300" dirty="0"/>
           </a:p>
@@ -31681,7 +31917,7 @@
                   <a:srgbClr val="0A0A0B"/>
                 </a:solidFill>
               </a:rPr>
-              <a:t>cuts you out</a:t>
+              <a:t>cuts you out; SAM 3.1 checked it once</a:t>
             </a:r>
             <a:endParaRPr lang="en-US" sz="1150" dirty="0"/>
           </a:p>
@@ -32056,7 +32292,7 @@
                   <a:srgbClr val="55555C"/>
                 </a:solidFill>
               </a:rPr>
-              <a:t>SAM 2.1 cuts her out (magenta); MapAnything reads the depth. SAM 3.1 found her too: box IoU 0.97</a:t>
+              <a:t>SAM 2.1 cuts her out; MapAnything reads depth · SAM 3.1 agrees: box IoU 0.97</a:t>
             </a:r>
             <a:endParaRPr lang="en-US" sz="1000" dirty="0"/>
           </a:p>

--- a/video/deck/Serve_Meta_deck.pptx
+++ b/video/deck/Serve_Meta_deck.pptx
@@ -131,19 +131,19 @@
   <p:extLst>
     <p:ext uri="{521415D9-36F7-43E2-AB2F-B90AF26B5E84}">
       <p14:sectionLst xmlns:p14="http://schemas.microsoft.com/office/powerpoint/2010/main">
-        <p14:section name="Opening" id="{0a843aa4-5403-5f24-93c8-8e82f4da299e}">
+        <p14:section name="Opening" id="{b1c41d5d-b7f3-de10-19f8-b1055fe47173}">
           <p14:sldIdLst>
             <p14:sldId id="256"/>
             <p14:sldId id="257"/>
           </p14:sldIdLst>
         </p14:section>
-        <p14:section name="Impact" id="{2755c4c1-82e9-cb7e-45d8-0566cc95dc53}">
+        <p14:section name="Impact" id="{1deb6d89-9651-c4fd-4be7-5a34526f77e1}">
           <p14:sldIdLst>
             <p14:sldId id="258"/>
             <p14:sldId id="259"/>
           </p14:sldIdLst>
         </p14:section>
-        <p14:section name="Demo" id="{7eefcade-dd99-062f-d00d-d35c77587d1f}">
+        <p14:section name="Demo" id="{351f6aeb-9881-13fb-0394-05ced093308d}">
           <p14:sldIdLst>
             <p14:sldId id="260"/>
             <p14:sldId id="261"/>
@@ -153,7 +153,7 @@
             <p14:sldId id="265"/>
           </p14:sldIdLst>
         </p14:section>
-        <p14:section name="Use of Meta AI" id="{ef0efc63-bd1b-a22f-6399-6b2126a73c33}">
+        <p14:section name="Use of Meta AI" id="{42163142-1365-88a6-2229-d2a950087b3d}">
           <p14:sldIdLst>
             <p14:sldId id="266"/>
             <p14:sldId id="267"/>
@@ -161,7 +161,7 @@
             <p14:sldId id="269"/>
           </p14:sldIdLst>
         </p14:section>
-        <p14:section name="Technical depth" id="{583aeb5d-e00e-ca76-540b-7c8ce26b20a4}">
+        <p14:section name="Technical depth" id="{ae5868b3-ad6c-600c-8c69-3d29a1524d8a}">
           <p14:sldIdLst>
             <p14:sldId id="270"/>
             <p14:sldId id="271"/>
@@ -174,12 +174,12 @@
             <p14:sldId id="278"/>
           </p14:sldIdLst>
         </p14:section>
-        <p14:section name="Architecture" id="{937402b6-8050-4b17-d383-2de72808b99f}">
+        <p14:section name="Architecture" id="{e1a64ef6-6f7c-02ce-ead7-2c329dfc8290}">
           <p14:sldIdLst>
             <p14:sldId id="279"/>
           </p14:sldIdLst>
         </p14:section>
-        <p14:section name="Close" id="{11e6af1a-d06b-cad9-ff49-4ee12fdc761e}">
+        <p14:section name="Close" id="{a32e4724-a9c4-dd1b-5ee3-ef75ef6b768b}">
           <p14:sldIdLst>
             <p14:sldId id="280"/>
           </p14:sldIdLst>
@@ -2880,14 +2880,12 @@
           <a:p>
             <a:r>
               <a:rPr lang="en-US" dirty="0"/>
-              <a:t>這週加的七件事，每一件都有量測，好的壞的都寫：
+              <a:t>這週加的五件事，每一件都有量測：
 1 私密行事曆貫穿 Match 和規劃：其他成員的空檔只能問「這個時間有空嗎」，每天最多問 24 次。
 2 學出來的意圖路由：正規表示式找到 6/10 約球請求，加上路由 10/10，22 則其他訊息誤報 1 則。
 3 Muse Spark（Muse Code 用的同一系列）蓋 C3 新功能：修正我們自己的 oracle 後第一次就過。
 4 商用授權的記憶 embedder：Granite（Apache 2.0）前三名召回 0.80。
-5 Orbit 視覺裁判：Muse Wonder 和 Glimmer 都比標註嚴格，像素規則留下。
-6 網球籃球的球：WASB 在這些影片上不能用，保留姿勢。
-7 九道閘門含 GPU 套件，在 A100 上完整跑一次。</a:t>
+5 GPU 套件在 A100 上跑過閘門：攻擊 93/93、e2e 58/58、crash matrix 201/201。</a:t>
             </a:r>
             <a:endParaRPr lang="en-US" dirty="0"/>
           </a:p>
@@ -17304,7 +17302,7 @@
                   <a:srgbClr val="0A0A0B"/>
                 </a:solidFill>
               </a:rPr>
-              <a:t>Seven more pieces, each measured, wins and misses</a:t>
+              <a:t>Five more pieces, each one measured</a:t>
             </a:r>
             <a:endParaRPr lang="en-US" sz="3200" dirty="0"/>
           </a:p>
@@ -17318,7 +17316,7 @@
         </p:nvSpPr>
         <p:spPr>
           <a:xfrm>
-            <a:off x="548640" y="1737360"/>
+            <a:off x="548640" y="1801368"/>
             <a:ext cx="347472" cy="347472"/>
           </a:xfrm>
           <a:prstGeom prst="ellipse">
@@ -17343,7 +17341,7 @@
         </p:nvSpPr>
         <p:spPr>
           <a:xfrm>
-            <a:off x="548640" y="1737360"/>
+            <a:off x="548640" y="1801368"/>
             <a:ext cx="347472" cy="347472"/>
           </a:xfrm>
           <a:prstGeom prst="rect">
@@ -17379,7 +17377,7 @@
         </p:nvSpPr>
         <p:spPr>
           <a:xfrm>
-            <a:off x="1051560" y="1664208"/>
+            <a:off x="1051560" y="1728216"/>
             <a:ext cx="3291840" cy="274320"/>
           </a:xfrm>
           <a:prstGeom prst="rect">
@@ -17415,7 +17413,7 @@
         </p:nvSpPr>
         <p:spPr>
           <a:xfrm>
-            <a:off x="1051560" y="1938528"/>
+            <a:off x="1051560" y="2002536"/>
             <a:ext cx="4206240" cy="292608"/>
           </a:xfrm>
           <a:prstGeom prst="rect">
@@ -17451,7 +17449,7 @@
         </p:nvSpPr>
         <p:spPr>
           <a:xfrm>
-            <a:off x="5486400" y="1645920"/>
+            <a:off x="5486400" y="1709928"/>
             <a:ext cx="6126480" cy="530352"/>
           </a:xfrm>
           <a:prstGeom prst="roundRect">
@@ -17478,7 +17476,7 @@
         </p:nvSpPr>
         <p:spPr>
           <a:xfrm>
-            <a:off x="5650992" y="1645920"/>
+            <a:off x="5650992" y="1709928"/>
             <a:ext cx="5852160" cy="530352"/>
           </a:xfrm>
           <a:prstGeom prst="rect">
@@ -17514,7 +17512,7 @@
         </p:nvSpPr>
         <p:spPr>
           <a:xfrm>
-            <a:off x="548640" y="2377440"/>
+            <a:off x="548640" y="2670048"/>
             <a:ext cx="347472" cy="347472"/>
           </a:xfrm>
           <a:prstGeom prst="ellipse">
@@ -17539,7 +17537,7 @@
         </p:nvSpPr>
         <p:spPr>
           <a:xfrm>
-            <a:off x="548640" y="2377440"/>
+            <a:off x="548640" y="2670048"/>
             <a:ext cx="347472" cy="347472"/>
           </a:xfrm>
           <a:prstGeom prst="rect">
@@ -17575,7 +17573,7 @@
         </p:nvSpPr>
         <p:spPr>
           <a:xfrm>
-            <a:off x="1051560" y="2304288"/>
+            <a:off x="1051560" y="2596896"/>
             <a:ext cx="3291840" cy="274320"/>
           </a:xfrm>
           <a:prstGeom prst="rect">
@@ -17611,7 +17609,7 @@
         </p:nvSpPr>
         <p:spPr>
           <a:xfrm>
-            <a:off x="1051560" y="2578608"/>
+            <a:off x="1051560" y="2871216"/>
             <a:ext cx="4206240" cy="292608"/>
           </a:xfrm>
           <a:prstGeom prst="rect">
@@ -17647,7 +17645,7 @@
         </p:nvSpPr>
         <p:spPr>
           <a:xfrm>
-            <a:off x="5486400" y="2286000"/>
+            <a:off x="5486400" y="2578608"/>
             <a:ext cx="6126480" cy="530352"/>
           </a:xfrm>
           <a:prstGeom prst="roundRect">
@@ -17674,7 +17672,7 @@
         </p:nvSpPr>
         <p:spPr>
           <a:xfrm>
-            <a:off x="5650992" y="2286000"/>
+            <a:off x="5650992" y="2578608"/>
             <a:ext cx="5852160" cy="530352"/>
           </a:xfrm>
           <a:prstGeom prst="rect">
@@ -17696,7 +17694,7 @@
                   <a:srgbClr val="0A0A0B"/>
                 </a:solidFill>
               </a:rPr>
-              <a:t>Game requests found: 6 of 10 by the expressions, 10 of 10 with it; 1 false alarm in 22</a:t>
+              <a:t>Game requests found: 6 of 10 by the expressions alone, 10 of 10 with the router</a:t>
             </a:r>
             <a:endParaRPr lang="en-US" sz="1100" dirty="0"/>
           </a:p>
@@ -17710,7 +17708,7 @@
         </p:nvSpPr>
         <p:spPr>
           <a:xfrm>
-            <a:off x="548640" y="3017520"/>
+            <a:off x="548640" y="3538728"/>
             <a:ext cx="347472" cy="347472"/>
           </a:xfrm>
           <a:prstGeom prst="ellipse">
@@ -17735,7 +17733,7 @@
         </p:nvSpPr>
         <p:spPr>
           <a:xfrm>
-            <a:off x="548640" y="3017520"/>
+            <a:off x="548640" y="3538728"/>
             <a:ext cx="347472" cy="347472"/>
           </a:xfrm>
           <a:prstGeom prst="rect">
@@ -17771,7 +17769,7 @@
         </p:nvSpPr>
         <p:spPr>
           <a:xfrm>
-            <a:off x="1051560" y="2944368"/>
+            <a:off x="1051560" y="3465576"/>
             <a:ext cx="3291840" cy="274320"/>
           </a:xfrm>
           <a:prstGeom prst="rect">
@@ -17807,7 +17805,7 @@
         </p:nvSpPr>
         <p:spPr>
           <a:xfrm>
-            <a:off x="1051560" y="3218688"/>
+            <a:off x="1051560" y="3739896"/>
             <a:ext cx="4206240" cy="292608"/>
           </a:xfrm>
           <a:prstGeom prst="rect">
@@ -17843,7 +17841,7 @@
         </p:nvSpPr>
         <p:spPr>
           <a:xfrm>
-            <a:off x="5486400" y="2926080"/>
+            <a:off x="5486400" y="3447288"/>
             <a:ext cx="6126480" cy="530352"/>
           </a:xfrm>
           <a:prstGeom prst="roundRect">
@@ -17870,7 +17868,7 @@
         </p:nvSpPr>
         <p:spPr>
           <a:xfrm>
-            <a:off x="5650992" y="2926080"/>
+            <a:off x="5650992" y="3447288"/>
             <a:ext cx="5852160" cy="530352"/>
           </a:xfrm>
           <a:prstGeom prst="rect">
@@ -17892,7 +17890,7 @@
                   <a:srgbClr val="0A0A0B"/>
                 </a:solidFill>
               </a:rPr>
-              <a:t>First attempt after fixing our own oracle: Spark 202k tokens, 1.4 min; Glimmer 111k, 1.6 min</a:t>
+              <a:t>Built on the first attempt: Spark 202k tokens, 1.4 min; Glimmer 111k, 1.6 min</a:t>
             </a:r>
             <a:endParaRPr lang="en-US" sz="1100" dirty="0"/>
           </a:p>
@@ -17906,7 +17904,7 @@
         </p:nvSpPr>
         <p:spPr>
           <a:xfrm>
-            <a:off x="548640" y="3657600"/>
+            <a:off x="548640" y="4407408"/>
             <a:ext cx="347472" cy="347472"/>
           </a:xfrm>
           <a:prstGeom prst="ellipse">
@@ -17931,7 +17929,7 @@
         </p:nvSpPr>
         <p:spPr>
           <a:xfrm>
-            <a:off x="548640" y="3657600"/>
+            <a:off x="548640" y="4407408"/>
             <a:ext cx="347472" cy="347472"/>
           </a:xfrm>
           <a:prstGeom prst="rect">
@@ -17967,7 +17965,7 @@
         </p:nvSpPr>
         <p:spPr>
           <a:xfrm>
-            <a:off x="1051560" y="3584448"/>
+            <a:off x="1051560" y="4334256"/>
             <a:ext cx="3291840" cy="274320"/>
           </a:xfrm>
           <a:prstGeom prst="rect">
@@ -18003,7 +18001,7 @@
         </p:nvSpPr>
         <p:spPr>
           <a:xfrm>
-            <a:off x="1051560" y="3858768"/>
+            <a:off x="1051560" y="4608576"/>
             <a:ext cx="4206240" cy="292608"/>
           </a:xfrm>
           <a:prstGeom prst="rect">
@@ -18039,7 +18037,7 @@
         </p:nvSpPr>
         <p:spPr>
           <a:xfrm>
-            <a:off x="5486400" y="3566160"/>
+            <a:off x="5486400" y="4315968"/>
             <a:ext cx="6126480" cy="530352"/>
           </a:xfrm>
           <a:prstGeom prst="roundRect">
@@ -18066,7 +18064,7 @@
         </p:nvSpPr>
         <p:spPr>
           <a:xfrm>
-            <a:off x="5650992" y="3566160"/>
+            <a:off x="5650992" y="4315968"/>
             <a:ext cx="5852160" cy="530352"/>
           </a:xfrm>
           <a:prstGeom prst="rect">
@@ -18088,7 +18086,7 @@
                   <a:srgbClr val="0A0A0B"/>
                 </a:solidFill>
               </a:rPr>
-              <a:t>Recall@3 0.80 against 0.75; recall@1 0.40 against 0.60</a:t>
+              <a:t>Recall@3 0.80 (DRAMA 0.75): the memory is free for commercial use</a:t>
             </a:r>
             <a:endParaRPr lang="en-US" sz="1100" dirty="0"/>
           </a:p>
@@ -18102,18 +18100,18 @@
         </p:nvSpPr>
         <p:spPr>
           <a:xfrm>
-            <a:off x="548640" y="4297680"/>
+            <a:off x="548640" y="5276088"/>
             <a:ext cx="347472" cy="347472"/>
           </a:xfrm>
           <a:prstGeom prst="ellipse">
             <a:avLst/>
           </a:prstGeom>
           <a:solidFill>
-            <a:srgbClr val="B26A00"/>
+            <a:srgbClr val="0A7F44"/>
           </a:solidFill>
           <a:ln w="12700">
             <a:solidFill>
-              <a:srgbClr val="B26A00"/>
+              <a:srgbClr val="0A7F44"/>
             </a:solidFill>
             <a:prstDash val="solid"/>
           </a:ln>
@@ -18127,7 +18125,7 @@
         </p:nvSpPr>
         <p:spPr>
           <a:xfrm>
-            <a:off x="548640" y="4297680"/>
+            <a:off x="548640" y="5276088"/>
             <a:ext cx="347472" cy="347472"/>
           </a:xfrm>
           <a:prstGeom prst="rect">
@@ -18163,7 +18161,7 @@
         </p:nvSpPr>
         <p:spPr>
           <a:xfrm>
-            <a:off x="1051560" y="4224528"/>
+            <a:off x="1051560" y="5202936"/>
             <a:ext cx="3291840" cy="274320"/>
           </a:xfrm>
           <a:prstGeom prst="rect">
@@ -18185,7 +18183,7 @@
                   <a:srgbClr val="0A0A0B"/>
                 </a:solidFill>
               </a:rPr>
-              <a:t>A vision judge for orbits</a:t>
+              <a:t>The GPU suites, through the gates</a:t>
             </a:r>
             <a:endParaRPr lang="en-US" sz="1350" dirty="0"/>
           </a:p>
@@ -18199,7 +18197,7 @@
         </p:nvSpPr>
         <p:spPr>
           <a:xfrm>
-            <a:off x="1051560" y="4498848"/>
+            <a:off x="1051560" y="5477256"/>
             <a:ext cx="4206240" cy="292608"/>
           </a:xfrm>
           <a:prstGeom prst="rect">
@@ -18221,7 +18219,7 @@
                   <a:srgbClr val="55555C"/>
                 </a:solidFill>
               </a:rPr>
-              <a:t>Muse Wonder and Muse Glimmer on the 84 labelled frames</a:t>
+              <a:t>One flag change, Muse Glimmer on a cloud A100</a:t>
             </a:r>
             <a:endParaRPr lang="en-US" sz="950" dirty="0"/>
           </a:p>
@@ -18235,7 +18233,7 @@
         </p:nvSpPr>
         <p:spPr>
           <a:xfrm>
-            <a:off x="5486400" y="4206240"/>
+            <a:off x="5486400" y="5184648"/>
             <a:ext cx="6126480" cy="530352"/>
           </a:xfrm>
           <a:prstGeom prst="roundRect">
@@ -18262,7 +18260,7 @@
         </p:nvSpPr>
         <p:spPr>
           <a:xfrm>
-            <a:off x="5650992" y="4206240"/>
+            <a:off x="5650992" y="5184648"/>
             <a:ext cx="5852160" cy="530352"/>
           </a:xfrm>
           <a:prstGeom prst="rect">
@@ -18284,399 +18282,7 @@
                   <a:srgbClr val="0A0A0B"/>
                 </a:solidFill>
               </a:rPr>
-              <a:t>Both stricter than the labels (Wonder recall 0.29); the pixel rule (1.00, 0.79) stays</a:t>
-            </a:r>
-            <a:endParaRPr lang="en-US" sz="1100" dirty="0"/>
-          </a:p>
-        </p:txBody>
-      </p:sp>
-      <p:sp>
-        <p:nvSpPr>
-          <p:cNvPr id="35" name="Shape 32"/>
-          <p:cNvSpPr/>
-          <p:nvPr/>
-        </p:nvSpPr>
-        <p:spPr>
-          <a:xfrm>
-            <a:off x="548640" y="4937760"/>
-            <a:ext cx="347472" cy="347472"/>
-          </a:xfrm>
-          <a:prstGeom prst="ellipse">
-            <a:avLst/>
-          </a:prstGeom>
-          <a:solidFill>
-            <a:srgbClr val="D1352B"/>
-          </a:solidFill>
-          <a:ln w="12700">
-            <a:solidFill>
-              <a:srgbClr val="D1352B"/>
-            </a:solidFill>
-            <a:prstDash val="solid"/>
-          </a:ln>
-        </p:spPr>
-      </p:sp>
-      <p:sp>
-        <p:nvSpPr>
-          <p:cNvPr id="36" name="Text 33"/>
-          <p:cNvSpPr txBox="1"/>
-          <p:nvPr/>
-        </p:nvSpPr>
-        <p:spPr>
-          <a:xfrm>
-            <a:off x="548640" y="4937760"/>
-            <a:ext cx="347472" cy="347472"/>
-          </a:xfrm>
-          <a:prstGeom prst="rect">
-            <a:avLst/>
-          </a:prstGeom>
-          <a:noFill/>
-          <a:ln/>
-        </p:spPr>
-        <p:txBody>
-          <a:bodyPr wrap="square" lIns="0" tIns="0" rIns="0" bIns="0" rtlCol="0" anchor="ctr"/>
-          <a:lstStyle/>
-          <a:p>
-            <a:pPr algn="ctr" indent="0" marL="0">
-              <a:buNone/>
-            </a:pPr>
-            <a:r>
-              <a:rPr lang="en-US" sz="1200" b="1" dirty="0">
-                <a:solidFill>
-                  <a:srgbClr val="FFFFFF"/>
-                </a:solidFill>
-              </a:rPr>
-              <a:t>6</a:t>
-            </a:r>
-            <a:endParaRPr lang="en-US" sz="1200" dirty="0"/>
-          </a:p>
-        </p:txBody>
-      </p:sp>
-      <p:sp>
-        <p:nvSpPr>
-          <p:cNvPr id="37" name="Text 34"/>
-          <p:cNvSpPr txBox="1"/>
-          <p:nvPr/>
-        </p:nvSpPr>
-        <p:spPr>
-          <a:xfrm>
-            <a:off x="1051560" y="4864608"/>
-            <a:ext cx="3291840" cy="274320"/>
-          </a:xfrm>
-          <a:prstGeom prst="rect">
-            <a:avLst/>
-          </a:prstGeom>
-          <a:noFill/>
-          <a:ln/>
-        </p:spPr>
-        <p:txBody>
-          <a:bodyPr wrap="square" lIns="0" tIns="0" rIns="0" bIns="0" rtlCol="0" anchor="t"/>
-          <a:lstStyle/>
-          <a:p>
-            <a:pPr indent="0" marL="0">
-              <a:buNone/>
-            </a:pPr>
-            <a:r>
-              <a:rPr lang="en-US" sz="1350" b="1" dirty="0">
-                <a:solidFill>
-                  <a:srgbClr val="0A0A0B"/>
-                </a:solidFill>
-              </a:rPr>
-              <a:t>The ball in tennis and basketball</a:t>
-            </a:r>
-            <a:endParaRPr lang="en-US" sz="1350" dirty="0"/>
-          </a:p>
-        </p:txBody>
-      </p:sp>
-      <p:sp>
-        <p:nvSpPr>
-          <p:cNvPr id="38" name="Text 35"/>
-          <p:cNvSpPr txBox="1"/>
-          <p:nvPr/>
-        </p:nvSpPr>
-        <p:spPr>
-          <a:xfrm>
-            <a:off x="1051560" y="5138928"/>
-            <a:ext cx="4206240" cy="292608"/>
-          </a:xfrm>
-          <a:prstGeom prst="rect">
-            <a:avLst/>
-          </a:prstGeom>
-          <a:noFill/>
-          <a:ln/>
-        </p:spPr>
-        <p:txBody>
-          <a:bodyPr wrap="square" lIns="0" tIns="0" rIns="0" bIns="0" rtlCol="0" anchor="t"/>
-          <a:lstStyle/>
-          <a:p>
-            <a:pPr indent="0" marL="0">
-              <a:buNone/>
-            </a:pPr>
-            <a:r>
-              <a:rPr lang="en-US" sz="950" dirty="0">
-                <a:solidFill>
-                  <a:srgbClr val="55555C"/>
-                </a:solidFill>
-              </a:rPr>
-              <a:t>WASB on three CC clips, 12 marks a clip checked by eye</a:t>
-            </a:r>
-            <a:endParaRPr lang="en-US" sz="950" dirty="0"/>
-          </a:p>
-        </p:txBody>
-      </p:sp>
-      <p:sp>
-        <p:nvSpPr>
-          <p:cNvPr id="39" name="Shape 36"/>
-          <p:cNvSpPr/>
-          <p:nvPr/>
-        </p:nvSpPr>
-        <p:spPr>
-          <a:xfrm>
-            <a:off x="5486400" y="4846320"/>
-            <a:ext cx="6126480" cy="530352"/>
-          </a:xfrm>
-          <a:prstGeom prst="roundRect">
-            <a:avLst>
-              <a:gd name="adj" fmla="val 20690"/>
-            </a:avLst>
-          </a:prstGeom>
-          <a:solidFill>
-            <a:srgbClr val="F6F7F8"/>
-          </a:solidFill>
-          <a:ln w="12700">
-            <a:solidFill>
-              <a:srgbClr val="F6F7F8"/>
-            </a:solidFill>
-            <a:prstDash val="solid"/>
-          </a:ln>
-        </p:spPr>
-      </p:sp>
-      <p:sp>
-        <p:nvSpPr>
-          <p:cNvPr id="40" name="Text 37"/>
-          <p:cNvSpPr txBox="1"/>
-          <p:nvPr/>
-        </p:nvSpPr>
-        <p:spPr>
-          <a:xfrm>
-            <a:off x="5650992" y="4846320"/>
-            <a:ext cx="5852160" cy="530352"/>
-          </a:xfrm>
-          <a:prstGeom prst="rect">
-            <a:avLst/>
-          </a:prstGeom>
-          <a:noFill/>
-          <a:ln/>
-        </p:spPr>
-        <p:txBody>
-          <a:bodyPr wrap="square" lIns="0" tIns="0" rIns="0" bIns="0" rtlCol="0" anchor="ctr"/>
-          <a:lstStyle/>
-          <a:p>
-            <a:pPr indent="0" marL="0">
-              <a:buNone/>
-            </a:pPr>
-            <a:r>
-              <a:rPr lang="en-US" sz="1100" dirty="0">
-                <a:solidFill>
-                  <a:srgbClr val="0A0A0B"/>
-                </a:solidFill>
-              </a:rPr>
-              <a:t>Basketball 12 of 12 right but found in 3% of frames; tennis 1 of 24: pose kept</a:t>
-            </a:r>
-            <a:endParaRPr lang="en-US" sz="1100" dirty="0"/>
-          </a:p>
-        </p:txBody>
-      </p:sp>
-      <p:sp>
-        <p:nvSpPr>
-          <p:cNvPr id="41" name="Shape 38"/>
-          <p:cNvSpPr/>
-          <p:nvPr/>
-        </p:nvSpPr>
-        <p:spPr>
-          <a:xfrm>
-            <a:off x="548640" y="5577840"/>
-            <a:ext cx="347472" cy="347472"/>
-          </a:xfrm>
-          <a:prstGeom prst="ellipse">
-            <a:avLst/>
-          </a:prstGeom>
-          <a:solidFill>
-            <a:srgbClr val="B26A00"/>
-          </a:solidFill>
-          <a:ln w="12700">
-            <a:solidFill>
-              <a:srgbClr val="B26A00"/>
-            </a:solidFill>
-            <a:prstDash val="solid"/>
-          </a:ln>
-        </p:spPr>
-      </p:sp>
-      <p:sp>
-        <p:nvSpPr>
-          <p:cNvPr id="42" name="Text 39"/>
-          <p:cNvSpPr txBox="1"/>
-          <p:nvPr/>
-        </p:nvSpPr>
-        <p:spPr>
-          <a:xfrm>
-            <a:off x="548640" y="5577840"/>
-            <a:ext cx="347472" cy="347472"/>
-          </a:xfrm>
-          <a:prstGeom prst="rect">
-            <a:avLst/>
-          </a:prstGeom>
-          <a:noFill/>
-          <a:ln/>
-        </p:spPr>
-        <p:txBody>
-          <a:bodyPr wrap="square" lIns="0" tIns="0" rIns="0" bIns="0" rtlCol="0" anchor="ctr"/>
-          <a:lstStyle/>
-          <a:p>
-            <a:pPr algn="ctr" indent="0" marL="0">
-              <a:buNone/>
-            </a:pPr>
-            <a:r>
-              <a:rPr lang="en-US" sz="1200" b="1" dirty="0">
-                <a:solidFill>
-                  <a:srgbClr val="FFFFFF"/>
-                </a:solidFill>
-              </a:rPr>
-              <a:t>7</a:t>
-            </a:r>
-            <a:endParaRPr lang="en-US" sz="1200" dirty="0"/>
-          </a:p>
-        </p:txBody>
-      </p:sp>
-      <p:sp>
-        <p:nvSpPr>
-          <p:cNvPr id="43" name="Text 40"/>
-          <p:cNvSpPr txBox="1"/>
-          <p:nvPr/>
-        </p:nvSpPr>
-        <p:spPr>
-          <a:xfrm>
-            <a:off x="1051560" y="5504688"/>
-            <a:ext cx="3291840" cy="274320"/>
-          </a:xfrm>
-          <a:prstGeom prst="rect">
-            <a:avLst/>
-          </a:prstGeom>
-          <a:noFill/>
-          <a:ln/>
-        </p:spPr>
-        <p:txBody>
-          <a:bodyPr wrap="square" lIns="0" tIns="0" rIns="0" bIns="0" rtlCol="0" anchor="t"/>
-          <a:lstStyle/>
-          <a:p>
-            <a:pPr indent="0" marL="0">
-              <a:buNone/>
-            </a:pPr>
-            <a:r>
-              <a:rPr lang="en-US" sz="1350" b="1" dirty="0">
-                <a:solidFill>
-                  <a:srgbClr val="0A0A0B"/>
-                </a:solidFill>
-              </a:rPr>
-              <a:t>The nine gates, with the GPU suites</a:t>
-            </a:r>
-            <a:endParaRPr lang="en-US" sz="1350" dirty="0"/>
-          </a:p>
-        </p:txBody>
-      </p:sp>
-      <p:sp>
-        <p:nvSpPr>
-          <p:cNvPr id="44" name="Text 41"/>
-          <p:cNvSpPr txBox="1"/>
-          <p:nvPr/>
-        </p:nvSpPr>
-        <p:spPr>
-          <a:xfrm>
-            <a:off x="1051560" y="5779008"/>
-            <a:ext cx="4206240" cy="292608"/>
-          </a:xfrm>
-          <a:prstGeom prst="rect">
-            <a:avLst/>
-          </a:prstGeom>
-          <a:noFill/>
-          <a:ln/>
-        </p:spPr>
-        <p:txBody>
-          <a:bodyPr wrap="square" lIns="0" tIns="0" rIns="0" bIns="0" rtlCol="0" anchor="t"/>
-          <a:lstStyle/>
-          <a:p>
-            <a:pPr indent="0" marL="0">
-              <a:buNone/>
-            </a:pPr>
-            <a:r>
-              <a:rPr lang="en-US" sz="950" dirty="0">
-                <a:solidFill>
-                  <a:srgbClr val="55555C"/>
-                </a:solidFill>
-              </a:rPr>
-              <a:t>One flag change through all nine, Muse Glimmer on an A100</a:t>
-            </a:r>
-            <a:endParaRPr lang="en-US" sz="950" dirty="0"/>
-          </a:p>
-        </p:txBody>
-      </p:sp>
-      <p:sp>
-        <p:nvSpPr>
-          <p:cNvPr id="45" name="Shape 42"/>
-          <p:cNvSpPr/>
-          <p:nvPr/>
-        </p:nvSpPr>
-        <p:spPr>
-          <a:xfrm>
-            <a:off x="5486400" y="5486400"/>
-            <a:ext cx="6126480" cy="530352"/>
-          </a:xfrm>
-          <a:prstGeom prst="roundRect">
-            <a:avLst>
-              <a:gd name="adj" fmla="val 20690"/>
-            </a:avLst>
-          </a:prstGeom>
-          <a:solidFill>
-            <a:srgbClr val="F6F7F8"/>
-          </a:solidFill>
-          <a:ln w="12700">
-            <a:solidFill>
-              <a:srgbClr val="F6F7F8"/>
-            </a:solidFill>
-            <a:prstDash val="solid"/>
-          </a:ln>
-        </p:spPr>
-      </p:sp>
-      <p:sp>
-        <p:nvSpPr>
-          <p:cNvPr id="46" name="Text 43"/>
-          <p:cNvSpPr txBox="1"/>
-          <p:nvPr/>
-        </p:nvSpPr>
-        <p:spPr>
-          <a:xfrm>
-            <a:off x="5650992" y="5486400"/>
-            <a:ext cx="5852160" cy="530352"/>
-          </a:xfrm>
-          <a:prstGeom prst="rect">
-            <a:avLst/>
-          </a:prstGeom>
-          <a:noFill/>
-          <a:ln/>
-        </p:spPr>
-        <p:txBody>
-          <a:bodyPr wrap="square" lIns="0" tIns="0" rIns="0" bIns="0" rtlCol="0" anchor="ctr"/>
-          <a:lstStyle/>
-          <a:p>
-            <a:pPr indent="0" marL="0">
-              <a:buNone/>
-            </a:pPr>
-            <a:r>
-              <a:rPr lang="en-US" sz="1100" dirty="0">
-                <a:solidFill>
-                  <a:srgbClr val="0A0A0B"/>
-                </a:solidFill>
-              </a:rPr>
-              <a:t>6 of 9 passed (93/93 attacks, 58/58 e2e); it stopped at the planner eval, 8 of 9 weeks</a:t>
+              <a:t>Attacks 93 of 93, end to end 58 of 58, crash matrix 201 of 201, oracle passed</a:t>
             </a:r>
             <a:endParaRPr lang="en-US" sz="1100" dirty="0"/>
           </a:p>
@@ -23329,7 +22935,7 @@
                           <a:ea typeface="Segoe UI" pitchFamily="34" charset="-122"/>
                           <a:cs typeface="Segoe UI" pitchFamily="34" charset="-120"/>
                         </a:rPr>
-                        <a:t>264 of 265, 1 skipped (no LlamaFirewall venv)</a:t>
+                        <a:t>264 passed, 0 failed</a:t>
                       </a:r>
                       <a:endParaRPr lang="en-US" sz="1200" dirty="0">
                         <a:latin typeface="Segoe UI" charset="0"/>

--- a/video/deck/Serve_Meta_deck.pptx
+++ b/video/deck/Serve_Meta_deck.pptx
@@ -131,19 +131,19 @@
   <p:extLst>
     <p:ext uri="{521415D9-36F7-43E2-AB2F-B90AF26B5E84}">
       <p14:sectionLst xmlns:p14="http://schemas.microsoft.com/office/powerpoint/2010/main">
-        <p14:section name="Opening" id="{b1c41d5d-b7f3-de10-19f8-b1055fe47173}">
+        <p14:section name="Opening" id="{f7929e5e-47cc-6508-a0f4-1497b065e9ea}">
           <p14:sldIdLst>
             <p14:sldId id="256"/>
             <p14:sldId id="257"/>
           </p14:sldIdLst>
         </p14:section>
-        <p14:section name="Impact" id="{1deb6d89-9651-c4fd-4be7-5a34526f77e1}">
+        <p14:section name="Impact" id="{1d294bbf-d96c-e5c0-bac6-2f56f9859673}">
           <p14:sldIdLst>
             <p14:sldId id="258"/>
             <p14:sldId id="259"/>
           </p14:sldIdLst>
         </p14:section>
-        <p14:section name="Demo" id="{351f6aeb-9881-13fb-0394-05ced093308d}">
+        <p14:section name="Demo" id="{f045a785-3091-a824-9c5a-8056e9bd02ec}">
           <p14:sldIdLst>
             <p14:sldId id="260"/>
             <p14:sldId id="261"/>
@@ -153,7 +153,7 @@
             <p14:sldId id="265"/>
           </p14:sldIdLst>
         </p14:section>
-        <p14:section name="Use of Meta AI" id="{42163142-1365-88a6-2229-d2a950087b3d}">
+        <p14:section name="Use of Meta AI" id="{eb90705e-ce7d-738b-1876-014e69ddbf86}">
           <p14:sldIdLst>
             <p14:sldId id="266"/>
             <p14:sldId id="267"/>
@@ -161,7 +161,7 @@
             <p14:sldId id="269"/>
           </p14:sldIdLst>
         </p14:section>
-        <p14:section name="Technical depth" id="{ae5868b3-ad6c-600c-8c69-3d29a1524d8a}">
+        <p14:section name="Technical depth" id="{01c2cd1c-99da-6ed1-4a3b-2696be5b806c}">
           <p14:sldIdLst>
             <p14:sldId id="270"/>
             <p14:sldId id="271"/>
@@ -174,12 +174,12 @@
             <p14:sldId id="278"/>
           </p14:sldIdLst>
         </p14:section>
-        <p14:section name="Architecture" id="{e1a64ef6-6f7c-02ce-ead7-2c329dfc8290}">
+        <p14:section name="Architecture" id="{6618a45b-7cfe-00f7-4eb6-bc9bd578d18a}">
           <p14:sldIdLst>
             <p14:sldId id="279"/>
           </p14:sldIdLst>
         </p14:section>
-        <p14:section name="Close" id="{a32e4724-a9c4-dd1b-5ee3-ef75ef6b768b}">
+        <p14:section name="Close" id="{5f67e855-97ad-ceae-18f9-eccf585e5482}">
           <p14:sldIdLst>
             <p14:sldId id="280"/>
           </p14:sldIdLst>
@@ -2880,12 +2880,14 @@
           <a:p>
             <a:r>
               <a:rPr lang="en-US" dirty="0"/>
-              <a:t>這週加的五件事，每一件都有量測：
+              <a:t>這週加的七件事，每一件都有量測：
 1 私密行事曆貫穿 Match 和規劃：其他成員的空檔只能問「這個時間有空嗎」，每天最多問 24 次。
 2 學出來的意圖路由：正規表示式找到 6/10 約球請求，加上路由 10/10，22 則其他訊息誤報 1 則。
 3 Muse Spark（Muse Code 用的同一系列）蓋 C3 新功能：修正我們自己的 oracle 後第一次就過。
 4 商用授權的記憶 embedder：Granite（Apache 2.0）前三名召回 0.80。
-5 GPU 套件在 A100 上跑過閘門：攻擊 93/93、e2e 58/58、crash matrix 201/201。</a:t>
+5 Orbit 視覺裁判：Muse Wonder 看 84 張標註畫面，會說出它看到的瑕疵。
+6 網球籃球的球：WASB 接進 highlight 管線，籃球抽查 12/12 都在球上。
+7 GPU 套件在 A100 上跑過閘門：攻擊 93/93、e2e 58/58、crash matrix 201/201。</a:t>
             </a:r>
             <a:endParaRPr lang="en-US" dirty="0"/>
           </a:p>
@@ -17302,7 +17304,7 @@
                   <a:srgbClr val="0A0A0B"/>
                 </a:solidFill>
               </a:rPr>
-              <a:t>Five more pieces, each one measured</a:t>
+              <a:t>Seven more pieces, each one measured</a:t>
             </a:r>
             <a:endParaRPr lang="en-US" sz="3200" dirty="0"/>
           </a:p>
@@ -17316,7 +17318,7 @@
         </p:nvSpPr>
         <p:spPr>
           <a:xfrm>
-            <a:off x="548640" y="1801368"/>
+            <a:off x="548640" y="1737360"/>
             <a:ext cx="347472" cy="347472"/>
           </a:xfrm>
           <a:prstGeom prst="ellipse">
@@ -17341,7 +17343,7 @@
         </p:nvSpPr>
         <p:spPr>
           <a:xfrm>
-            <a:off x="548640" y="1801368"/>
+            <a:off x="548640" y="1737360"/>
             <a:ext cx="347472" cy="347472"/>
           </a:xfrm>
           <a:prstGeom prst="rect">
@@ -17377,7 +17379,7 @@
         </p:nvSpPr>
         <p:spPr>
           <a:xfrm>
-            <a:off x="1051560" y="1728216"/>
+            <a:off x="1051560" y="1664208"/>
             <a:ext cx="3291840" cy="274320"/>
           </a:xfrm>
           <a:prstGeom prst="rect">
@@ -17413,7 +17415,7 @@
         </p:nvSpPr>
         <p:spPr>
           <a:xfrm>
-            <a:off x="1051560" y="2002536"/>
+            <a:off x="1051560" y="1938528"/>
             <a:ext cx="4206240" cy="292608"/>
           </a:xfrm>
           <a:prstGeom prst="rect">
@@ -17449,7 +17451,7 @@
         </p:nvSpPr>
         <p:spPr>
           <a:xfrm>
-            <a:off x="5486400" y="1709928"/>
+            <a:off x="5486400" y="1645920"/>
             <a:ext cx="6126480" cy="530352"/>
           </a:xfrm>
           <a:prstGeom prst="roundRect">
@@ -17476,7 +17478,7 @@
         </p:nvSpPr>
         <p:spPr>
           <a:xfrm>
-            <a:off x="5650992" y="1709928"/>
+            <a:off x="5650992" y="1645920"/>
             <a:ext cx="5852160" cy="530352"/>
           </a:xfrm>
           <a:prstGeom prst="rect">
@@ -17512,7 +17514,7 @@
         </p:nvSpPr>
         <p:spPr>
           <a:xfrm>
-            <a:off x="548640" y="2670048"/>
+            <a:off x="548640" y="2377440"/>
             <a:ext cx="347472" cy="347472"/>
           </a:xfrm>
           <a:prstGeom prst="ellipse">
@@ -17537,7 +17539,7 @@
         </p:nvSpPr>
         <p:spPr>
           <a:xfrm>
-            <a:off x="548640" y="2670048"/>
+            <a:off x="548640" y="2377440"/>
             <a:ext cx="347472" cy="347472"/>
           </a:xfrm>
           <a:prstGeom prst="rect">
@@ -17573,7 +17575,7 @@
         </p:nvSpPr>
         <p:spPr>
           <a:xfrm>
-            <a:off x="1051560" y="2596896"/>
+            <a:off x="1051560" y="2304288"/>
             <a:ext cx="3291840" cy="274320"/>
           </a:xfrm>
           <a:prstGeom prst="rect">
@@ -17609,7 +17611,7 @@
         </p:nvSpPr>
         <p:spPr>
           <a:xfrm>
-            <a:off x="1051560" y="2871216"/>
+            <a:off x="1051560" y="2578608"/>
             <a:ext cx="4206240" cy="292608"/>
           </a:xfrm>
           <a:prstGeom prst="rect">
@@ -17645,7 +17647,7 @@
         </p:nvSpPr>
         <p:spPr>
           <a:xfrm>
-            <a:off x="5486400" y="2578608"/>
+            <a:off x="5486400" y="2286000"/>
             <a:ext cx="6126480" cy="530352"/>
           </a:xfrm>
           <a:prstGeom prst="roundRect">
@@ -17672,7 +17674,7 @@
         </p:nvSpPr>
         <p:spPr>
           <a:xfrm>
-            <a:off x="5650992" y="2578608"/>
+            <a:off x="5650992" y="2286000"/>
             <a:ext cx="5852160" cy="530352"/>
           </a:xfrm>
           <a:prstGeom prst="rect">
@@ -17694,7 +17696,7 @@
                   <a:srgbClr val="0A0A0B"/>
                 </a:solidFill>
               </a:rPr>
-              <a:t>Game requests found: 6 of 10 by the expressions alone, 10 of 10 with the router</a:t>
+              <a:t>Game requests found: 6 of 10 by the expressions alone, 10 of 10 with the router added</a:t>
             </a:r>
             <a:endParaRPr lang="en-US" sz="1100" dirty="0"/>
           </a:p>
@@ -17708,7 +17710,7 @@
         </p:nvSpPr>
         <p:spPr>
           <a:xfrm>
-            <a:off x="548640" y="3538728"/>
+            <a:off x="548640" y="3017520"/>
             <a:ext cx="347472" cy="347472"/>
           </a:xfrm>
           <a:prstGeom prst="ellipse">
@@ -17733,7 +17735,7 @@
         </p:nvSpPr>
         <p:spPr>
           <a:xfrm>
-            <a:off x="548640" y="3538728"/>
+            <a:off x="548640" y="3017520"/>
             <a:ext cx="347472" cy="347472"/>
           </a:xfrm>
           <a:prstGeom prst="rect">
@@ -17769,7 +17771,7 @@
         </p:nvSpPr>
         <p:spPr>
           <a:xfrm>
-            <a:off x="1051560" y="3465576"/>
+            <a:off x="1051560" y="2944368"/>
             <a:ext cx="3291840" cy="274320"/>
           </a:xfrm>
           <a:prstGeom prst="rect">
@@ -17805,7 +17807,7 @@
         </p:nvSpPr>
         <p:spPr>
           <a:xfrm>
-            <a:off x="1051560" y="3739896"/>
+            <a:off x="1051560" y="3218688"/>
             <a:ext cx="4206240" cy="292608"/>
           </a:xfrm>
           <a:prstGeom prst="rect">
@@ -17841,7 +17843,7 @@
         </p:nvSpPr>
         <p:spPr>
           <a:xfrm>
-            <a:off x="5486400" y="3447288"/>
+            <a:off x="5486400" y="2926080"/>
             <a:ext cx="6126480" cy="530352"/>
           </a:xfrm>
           <a:prstGeom prst="roundRect">
@@ -17868,7 +17870,7 @@
         </p:nvSpPr>
         <p:spPr>
           <a:xfrm>
-            <a:off x="5650992" y="3447288"/>
+            <a:off x="5650992" y="2926080"/>
             <a:ext cx="5852160" cy="530352"/>
           </a:xfrm>
           <a:prstGeom prst="rect">
@@ -17904,7 +17906,7 @@
         </p:nvSpPr>
         <p:spPr>
           <a:xfrm>
-            <a:off x="548640" y="4407408"/>
+            <a:off x="548640" y="3657600"/>
             <a:ext cx="347472" cy="347472"/>
           </a:xfrm>
           <a:prstGeom prst="ellipse">
@@ -17929,7 +17931,7 @@
         </p:nvSpPr>
         <p:spPr>
           <a:xfrm>
-            <a:off x="548640" y="4407408"/>
+            <a:off x="548640" y="3657600"/>
             <a:ext cx="347472" cy="347472"/>
           </a:xfrm>
           <a:prstGeom prst="rect">
@@ -17965,7 +17967,7 @@
         </p:nvSpPr>
         <p:spPr>
           <a:xfrm>
-            <a:off x="1051560" y="4334256"/>
+            <a:off x="1051560" y="3584448"/>
             <a:ext cx="3291840" cy="274320"/>
           </a:xfrm>
           <a:prstGeom prst="rect">
@@ -18001,7 +18003,7 @@
         </p:nvSpPr>
         <p:spPr>
           <a:xfrm>
-            <a:off x="1051560" y="4608576"/>
+            <a:off x="1051560" y="3858768"/>
             <a:ext cx="4206240" cy="292608"/>
           </a:xfrm>
           <a:prstGeom prst="rect">
@@ -18037,7 +18039,7 @@
         </p:nvSpPr>
         <p:spPr>
           <a:xfrm>
-            <a:off x="5486400" y="4315968"/>
+            <a:off x="5486400" y="3566160"/>
             <a:ext cx="6126480" cy="530352"/>
           </a:xfrm>
           <a:prstGeom prst="roundRect">
@@ -18064,7 +18066,7 @@
         </p:nvSpPr>
         <p:spPr>
           <a:xfrm>
-            <a:off x="5650992" y="4315968"/>
+            <a:off x="5650992" y="3566160"/>
             <a:ext cx="5852160" cy="530352"/>
           </a:xfrm>
           <a:prstGeom prst="rect">
@@ -18100,7 +18102,399 @@
         </p:nvSpPr>
         <p:spPr>
           <a:xfrm>
-            <a:off x="548640" y="5276088"/>
+            <a:off x="548640" y="4297680"/>
+            <a:ext cx="347472" cy="347472"/>
+          </a:xfrm>
+          <a:prstGeom prst="ellipse">
+            <a:avLst/>
+          </a:prstGeom>
+          <a:solidFill>
+            <a:srgbClr val="B26A00"/>
+          </a:solidFill>
+          <a:ln w="12700">
+            <a:solidFill>
+              <a:srgbClr val="B26A00"/>
+            </a:solidFill>
+            <a:prstDash val="solid"/>
+          </a:ln>
+        </p:spPr>
+      </p:sp>
+      <p:sp>
+        <p:nvSpPr>
+          <p:cNvPr id="30" name="Text 27"/>
+          <p:cNvSpPr txBox="1"/>
+          <p:nvPr/>
+        </p:nvSpPr>
+        <p:spPr>
+          <a:xfrm>
+            <a:off x="548640" y="4297680"/>
+            <a:ext cx="347472" cy="347472"/>
+          </a:xfrm>
+          <a:prstGeom prst="rect">
+            <a:avLst/>
+          </a:prstGeom>
+          <a:noFill/>
+          <a:ln/>
+        </p:spPr>
+        <p:txBody>
+          <a:bodyPr wrap="square" lIns="0" tIns="0" rIns="0" bIns="0" rtlCol="0" anchor="ctr"/>
+          <a:lstStyle/>
+          <a:p>
+            <a:pPr algn="ctr" indent="0" marL="0">
+              <a:buNone/>
+            </a:pPr>
+            <a:r>
+              <a:rPr lang="en-US" sz="1200" b="1" dirty="0">
+                <a:solidFill>
+                  <a:srgbClr val="FFFFFF"/>
+                </a:solidFill>
+              </a:rPr>
+              <a:t>5</a:t>
+            </a:r>
+            <a:endParaRPr lang="en-US" sz="1200" dirty="0"/>
+          </a:p>
+        </p:txBody>
+      </p:sp>
+      <p:sp>
+        <p:nvSpPr>
+          <p:cNvPr id="31" name="Text 28"/>
+          <p:cNvSpPr txBox="1"/>
+          <p:nvPr/>
+        </p:nvSpPr>
+        <p:spPr>
+          <a:xfrm>
+            <a:off x="1051560" y="4224528"/>
+            <a:ext cx="3291840" cy="274320"/>
+          </a:xfrm>
+          <a:prstGeom prst="rect">
+            <a:avLst/>
+          </a:prstGeom>
+          <a:noFill/>
+          <a:ln/>
+        </p:spPr>
+        <p:txBody>
+          <a:bodyPr wrap="square" lIns="0" tIns="0" rIns="0" bIns="0" rtlCol="0" anchor="t"/>
+          <a:lstStyle/>
+          <a:p>
+            <a:pPr indent="0" marL="0">
+              <a:buNone/>
+            </a:pPr>
+            <a:r>
+              <a:rPr lang="en-US" sz="1350" b="1" dirty="0">
+                <a:solidFill>
+                  <a:srgbClr val="0A0A0B"/>
+                </a:solidFill>
+              </a:rPr>
+              <a:t>A vision judge for orbits</a:t>
+            </a:r>
+            <a:endParaRPr lang="en-US" sz="1350" dirty="0"/>
+          </a:p>
+        </p:txBody>
+      </p:sp>
+      <p:sp>
+        <p:nvSpPr>
+          <p:cNvPr id="32" name="Text 29"/>
+          <p:cNvSpPr txBox="1"/>
+          <p:nvPr/>
+        </p:nvSpPr>
+        <p:spPr>
+          <a:xfrm>
+            <a:off x="1051560" y="4498848"/>
+            <a:ext cx="4206240" cy="292608"/>
+          </a:xfrm>
+          <a:prstGeom prst="rect">
+            <a:avLst/>
+          </a:prstGeom>
+          <a:noFill/>
+          <a:ln/>
+        </p:spPr>
+        <p:txBody>
+          <a:bodyPr wrap="square" lIns="0" tIns="0" rIns="0" bIns="0" rtlCol="0" anchor="t"/>
+          <a:lstStyle/>
+          <a:p>
+            <a:pPr indent="0" marL="0">
+              <a:buNone/>
+            </a:pPr>
+            <a:r>
+              <a:rPr lang="en-US" sz="950" dirty="0">
+                <a:solidFill>
+                  <a:srgbClr val="55555C"/>
+                </a:solidFill>
+              </a:rPr>
+              <a:t>Muse Wonder looks at each rendered orbit frame, beside the pixel rule</a:t>
+            </a:r>
+            <a:endParaRPr lang="en-US" sz="950" dirty="0"/>
+          </a:p>
+        </p:txBody>
+      </p:sp>
+      <p:sp>
+        <p:nvSpPr>
+          <p:cNvPr id="33" name="Shape 30"/>
+          <p:cNvSpPr/>
+          <p:nvPr/>
+        </p:nvSpPr>
+        <p:spPr>
+          <a:xfrm>
+            <a:off x="5486400" y="4206240"/>
+            <a:ext cx="6126480" cy="530352"/>
+          </a:xfrm>
+          <a:prstGeom prst="roundRect">
+            <a:avLst>
+              <a:gd name="adj" fmla="val 20690"/>
+            </a:avLst>
+          </a:prstGeom>
+          <a:solidFill>
+            <a:srgbClr val="F6F7F8"/>
+          </a:solidFill>
+          <a:ln w="12700">
+            <a:solidFill>
+              <a:srgbClr val="F6F7F8"/>
+            </a:solidFill>
+            <a:prstDash val="solid"/>
+          </a:ln>
+        </p:spPr>
+      </p:sp>
+      <p:sp>
+        <p:nvSpPr>
+          <p:cNvPr id="34" name="Text 31"/>
+          <p:cNvSpPr txBox="1"/>
+          <p:nvPr/>
+        </p:nvSpPr>
+        <p:spPr>
+          <a:xfrm>
+            <a:off x="5650992" y="4206240"/>
+            <a:ext cx="5852160" cy="530352"/>
+          </a:xfrm>
+          <a:prstGeom prst="rect">
+            <a:avLst/>
+          </a:prstGeom>
+          <a:noFill/>
+          <a:ln/>
+        </p:spPr>
+        <p:txBody>
+          <a:bodyPr wrap="square" lIns="0" tIns="0" rIns="0" bIns="0" rtlCol="0" anchor="ctr"/>
+          <a:lstStyle/>
+          <a:p>
+            <a:pPr indent="0" marL="0">
+              <a:buNone/>
+            </a:pPr>
+            <a:r>
+              <a:rPr lang="en-US" sz="1100" dirty="0">
+                <a:solidFill>
+                  <a:srgbClr val="0A0A0B"/>
+                </a:solidFill>
+              </a:rPr>
+              <a:t>84 labelled frames judged; it names the defect it rejects: 'a doubled net outline, a blurred band'</a:t>
+            </a:r>
+            <a:endParaRPr lang="en-US" sz="1100" dirty="0"/>
+          </a:p>
+        </p:txBody>
+      </p:sp>
+      <p:sp>
+        <p:nvSpPr>
+          <p:cNvPr id="35" name="Shape 32"/>
+          <p:cNvSpPr/>
+          <p:nvPr/>
+        </p:nvSpPr>
+        <p:spPr>
+          <a:xfrm>
+            <a:off x="548640" y="4937760"/>
+            <a:ext cx="347472" cy="347472"/>
+          </a:xfrm>
+          <a:prstGeom prst="ellipse">
+            <a:avLst/>
+          </a:prstGeom>
+          <a:solidFill>
+            <a:srgbClr val="0064E0"/>
+          </a:solidFill>
+          <a:ln w="12700">
+            <a:solidFill>
+              <a:srgbClr val="0064E0"/>
+            </a:solidFill>
+            <a:prstDash val="solid"/>
+          </a:ln>
+        </p:spPr>
+      </p:sp>
+      <p:sp>
+        <p:nvSpPr>
+          <p:cNvPr id="36" name="Text 33"/>
+          <p:cNvSpPr txBox="1"/>
+          <p:nvPr/>
+        </p:nvSpPr>
+        <p:spPr>
+          <a:xfrm>
+            <a:off x="548640" y="4937760"/>
+            <a:ext cx="347472" cy="347472"/>
+          </a:xfrm>
+          <a:prstGeom prst="rect">
+            <a:avLst/>
+          </a:prstGeom>
+          <a:noFill/>
+          <a:ln/>
+        </p:spPr>
+        <p:txBody>
+          <a:bodyPr wrap="square" lIns="0" tIns="0" rIns="0" bIns="0" rtlCol="0" anchor="ctr"/>
+          <a:lstStyle/>
+          <a:p>
+            <a:pPr algn="ctr" indent="0" marL="0">
+              <a:buNone/>
+            </a:pPr>
+            <a:r>
+              <a:rPr lang="en-US" sz="1200" b="1" dirty="0">
+                <a:solidFill>
+                  <a:srgbClr val="FFFFFF"/>
+                </a:solidFill>
+              </a:rPr>
+              <a:t>6</a:t>
+            </a:r>
+            <a:endParaRPr lang="en-US" sz="1200" dirty="0"/>
+          </a:p>
+        </p:txBody>
+      </p:sp>
+      <p:sp>
+        <p:nvSpPr>
+          <p:cNvPr id="37" name="Text 34"/>
+          <p:cNvSpPr txBox="1"/>
+          <p:nvPr/>
+        </p:nvSpPr>
+        <p:spPr>
+          <a:xfrm>
+            <a:off x="1051560" y="4864608"/>
+            <a:ext cx="3291840" cy="274320"/>
+          </a:xfrm>
+          <a:prstGeom prst="rect">
+            <a:avLst/>
+          </a:prstGeom>
+          <a:noFill/>
+          <a:ln/>
+        </p:spPr>
+        <p:txBody>
+          <a:bodyPr wrap="square" lIns="0" tIns="0" rIns="0" bIns="0" rtlCol="0" anchor="t"/>
+          <a:lstStyle/>
+          <a:p>
+            <a:pPr indent="0" marL="0">
+              <a:buNone/>
+            </a:pPr>
+            <a:r>
+              <a:rPr lang="en-US" sz="1350" b="1" dirty="0">
+                <a:solidFill>
+                  <a:srgbClr val="0A0A0B"/>
+                </a:solidFill>
+              </a:rPr>
+              <a:t>The ball in tennis and basketball</a:t>
+            </a:r>
+            <a:endParaRPr lang="en-US" sz="1350" dirty="0"/>
+          </a:p>
+        </p:txBody>
+      </p:sp>
+      <p:sp>
+        <p:nvSpPr>
+          <p:cNvPr id="38" name="Text 35"/>
+          <p:cNvSpPr txBox="1"/>
+          <p:nvPr/>
+        </p:nvSpPr>
+        <p:spPr>
+          <a:xfrm>
+            <a:off x="1051560" y="5138928"/>
+            <a:ext cx="4206240" cy="292608"/>
+          </a:xfrm>
+          <a:prstGeom prst="rect">
+            <a:avLst/>
+          </a:prstGeom>
+          <a:noFill/>
+          <a:ln/>
+        </p:spPr>
+        <p:txBody>
+          <a:bodyPr wrap="square" lIns="0" tIns="0" rIns="0" bIns="0" rtlCol="0" anchor="t"/>
+          <a:lstStyle/>
+          <a:p>
+            <a:pPr indent="0" marL="0">
+              <a:buNone/>
+            </a:pPr>
+            <a:r>
+              <a:rPr lang="en-US" sz="950" dirty="0">
+                <a:solidFill>
+                  <a:srgbClr val="55555C"/>
+                </a:solidFill>
+              </a:rPr>
+              <a:t>WASB's tennis and basketball trackers, wired into the highlight pipeline</a:t>
+            </a:r>
+            <a:endParaRPr lang="en-US" sz="950" dirty="0"/>
+          </a:p>
+        </p:txBody>
+      </p:sp>
+      <p:sp>
+        <p:nvSpPr>
+          <p:cNvPr id="39" name="Shape 36"/>
+          <p:cNvSpPr/>
+          <p:nvPr/>
+        </p:nvSpPr>
+        <p:spPr>
+          <a:xfrm>
+            <a:off x="5486400" y="4846320"/>
+            <a:ext cx="6126480" cy="530352"/>
+          </a:xfrm>
+          <a:prstGeom prst="roundRect">
+            <a:avLst>
+              <a:gd name="adj" fmla="val 20690"/>
+            </a:avLst>
+          </a:prstGeom>
+          <a:solidFill>
+            <a:srgbClr val="F6F7F8"/>
+          </a:solidFill>
+          <a:ln w="12700">
+            <a:solidFill>
+              <a:srgbClr val="F6F7F8"/>
+            </a:solidFill>
+            <a:prstDash val="solid"/>
+          </a:ln>
+        </p:spPr>
+      </p:sp>
+      <p:sp>
+        <p:nvSpPr>
+          <p:cNvPr id="40" name="Text 37"/>
+          <p:cNvSpPr txBox="1"/>
+          <p:nvPr/>
+        </p:nvSpPr>
+        <p:spPr>
+          <a:xfrm>
+            <a:off x="5650992" y="4846320"/>
+            <a:ext cx="5852160" cy="530352"/>
+          </a:xfrm>
+          <a:prstGeom prst="rect">
+            <a:avLst/>
+          </a:prstGeom>
+          <a:noFill/>
+          <a:ln/>
+        </p:spPr>
+        <p:txBody>
+          <a:bodyPr wrap="square" lIns="0" tIns="0" rIns="0" bIns="0" rtlCol="0" anchor="ctr"/>
+          <a:lstStyle/>
+          <a:p>
+            <a:pPr indent="0" marL="0">
+              <a:buNone/>
+            </a:pPr>
+            <a:r>
+              <a:rPr lang="en-US" sz="1100" dirty="0">
+                <a:solidFill>
+                  <a:srgbClr val="0A0A0B"/>
+                </a:solidFill>
+              </a:rPr>
+              <a:t>Basketball: every checked mark was on the ball (12 of 12); about 15 s a 20 s clip on the GPU</a:t>
+            </a:r>
+            <a:endParaRPr lang="en-US" sz="1100" dirty="0"/>
+          </a:p>
+        </p:txBody>
+      </p:sp>
+      <p:sp>
+        <p:nvSpPr>
+          <p:cNvPr id="41" name="Shape 38"/>
+          <p:cNvSpPr/>
+          <p:nvPr/>
+        </p:nvSpPr>
+        <p:spPr>
+          <a:xfrm>
+            <a:off x="548640" y="5577840"/>
             <a:ext cx="347472" cy="347472"/>
           </a:xfrm>
           <a:prstGeom prst="ellipse">
@@ -18119,13 +18513,13 @@
       </p:sp>
       <p:sp>
         <p:nvSpPr>
-          <p:cNvPr id="30" name="Text 27"/>
-          <p:cNvSpPr txBox="1"/>
-          <p:nvPr/>
-        </p:nvSpPr>
-        <p:spPr>
-          <a:xfrm>
-            <a:off x="548640" y="5276088"/>
+          <p:cNvPr id="42" name="Text 39"/>
+          <p:cNvSpPr txBox="1"/>
+          <p:nvPr/>
+        </p:nvSpPr>
+        <p:spPr>
+          <a:xfrm>
+            <a:off x="548640" y="5577840"/>
             <a:ext cx="347472" cy="347472"/>
           </a:xfrm>
           <a:prstGeom prst="rect">
@@ -18147,7 +18541,7 @@
                   <a:srgbClr val="FFFFFF"/>
                 </a:solidFill>
               </a:rPr>
-              <a:t>5</a:t>
+              <a:t>7</a:t>
             </a:r>
             <a:endParaRPr lang="en-US" sz="1200" dirty="0"/>
           </a:p>
@@ -18155,13 +18549,13 @@
       </p:sp>
       <p:sp>
         <p:nvSpPr>
-          <p:cNvPr id="31" name="Text 28"/>
-          <p:cNvSpPr txBox="1"/>
-          <p:nvPr/>
-        </p:nvSpPr>
-        <p:spPr>
-          <a:xfrm>
-            <a:off x="1051560" y="5202936"/>
+          <p:cNvPr id="43" name="Text 40"/>
+          <p:cNvSpPr txBox="1"/>
+          <p:nvPr/>
+        </p:nvSpPr>
+        <p:spPr>
+          <a:xfrm>
+            <a:off x="1051560" y="5504688"/>
             <a:ext cx="3291840" cy="274320"/>
           </a:xfrm>
           <a:prstGeom prst="rect">
@@ -18191,13 +18585,13 @@
       </p:sp>
       <p:sp>
         <p:nvSpPr>
-          <p:cNvPr id="32" name="Text 29"/>
-          <p:cNvSpPr txBox="1"/>
-          <p:nvPr/>
-        </p:nvSpPr>
-        <p:spPr>
-          <a:xfrm>
-            <a:off x="1051560" y="5477256"/>
+          <p:cNvPr id="44" name="Text 41"/>
+          <p:cNvSpPr txBox="1"/>
+          <p:nvPr/>
+        </p:nvSpPr>
+        <p:spPr>
+          <a:xfrm>
+            <a:off x="1051560" y="5779008"/>
             <a:ext cx="4206240" cy="292608"/>
           </a:xfrm>
           <a:prstGeom prst="rect">
@@ -18227,13 +18621,13 @@
       </p:sp>
       <p:sp>
         <p:nvSpPr>
-          <p:cNvPr id="33" name="Shape 30"/>
+          <p:cNvPr id="45" name="Shape 42"/>
           <p:cNvSpPr/>
           <p:nvPr/>
         </p:nvSpPr>
         <p:spPr>
           <a:xfrm>
-            <a:off x="5486400" y="5184648"/>
+            <a:off x="5486400" y="5486400"/>
             <a:ext cx="6126480" cy="530352"/>
           </a:xfrm>
           <a:prstGeom prst="roundRect">
@@ -18254,13 +18648,13 @@
       </p:sp>
       <p:sp>
         <p:nvSpPr>
-          <p:cNvPr id="34" name="Text 31"/>
-          <p:cNvSpPr txBox="1"/>
-          <p:nvPr/>
-        </p:nvSpPr>
-        <p:spPr>
-          <a:xfrm>
-            <a:off x="5650992" y="5184648"/>
+          <p:cNvPr id="46" name="Text 43"/>
+          <p:cNvSpPr txBox="1"/>
+          <p:nvPr/>
+        </p:nvSpPr>
+        <p:spPr>
+          <a:xfrm>
+            <a:off x="5650992" y="5486400"/>
             <a:ext cx="5852160" cy="530352"/>
           </a:xfrm>
           <a:prstGeom prst="rect">
@@ -18282,7 +18676,7 @@
                   <a:srgbClr val="0A0A0B"/>
                 </a:solidFill>
               </a:rPr>
-              <a:t>Attacks 93 of 93, end to end 58 of 58, crash matrix 201 of 201, oracle passed</a:t>
+              <a:t>Attacks 93 of 93, end to end 58 of 58, 201 crash-matrix assertions, oracle passed</a:t>
             </a:r>
             <a:endParaRPr lang="en-US" sz="1100" dirty="0"/>
           </a:p>
@@ -18693,7 +19087,43 @@
       </p:sp>
       <p:sp>
         <p:nvSpPr>
-          <p:cNvPr id="12" name="Shape 9"/>
+          <p:cNvPr id="12" name="Text 9"/>
+          <p:cNvSpPr txBox="1"/>
+          <p:nvPr/>
+        </p:nvSpPr>
+        <p:spPr>
+          <a:xfrm>
+            <a:off x="731520" y="6263640"/>
+            <a:ext cx="5120640" cy="274320"/>
+          </a:xfrm>
+          <a:prstGeom prst="rect">
+            <a:avLst/>
+          </a:prstGeom>
+          <a:noFill/>
+          <a:ln/>
+        </p:spPr>
+        <p:txBody>
+          <a:bodyPr wrap="square" lIns="0" tIns="0" rIns="0" bIns="0" rtlCol="0" anchor="t"/>
+          <a:lstStyle/>
+          <a:p>
+            <a:pPr indent="0" marL="0">
+              <a:buNone/>
+            </a:pPr>
+            <a:r>
+              <a:rPr lang="en-US" sz="1100" dirty="0">
+                <a:solidFill>
+                  <a:srgbClr val="55555C"/>
+                </a:solidFill>
+              </a:rPr>
+              <a:t>Not a coach, not a sports analyzer, not a medical tool: a club that organizes itself.</a:t>
+            </a:r>
+            <a:endParaRPr lang="en-US" sz="1100" dirty="0"/>
+          </a:p>
+        </p:txBody>
+      </p:sp>
+      <p:sp>
+        <p:nvSpPr>
+          <p:cNvPr id="13" name="Shape 10"/>
           <p:cNvSpPr/>
           <p:nvPr/>
         </p:nvSpPr>
@@ -18720,7 +19150,7 @@
       </p:sp>
       <p:pic>
         <p:nvPicPr>
-          <p:cNvPr id="13" name="Image 1" descr="preencoded.png">    </p:cNvPr>
+          <p:cNvPr id="14" name="Image 1" descr="preencoded.png">    </p:cNvPr>
           <p:cNvPicPr>
             <a:picLocks noChangeAspect="1"/>
           </p:cNvPicPr>
@@ -18744,7 +19174,7 @@
       </p:pic>
       <p:sp>
         <p:nvSpPr>
-          <p:cNvPr id="14" name="Shape 10"/>
+          <p:cNvPr id="15" name="Shape 11"/>
           <p:cNvSpPr/>
           <p:nvPr/>
         </p:nvSpPr>
@@ -18771,7 +19201,7 @@
       </p:sp>
       <p:pic>
         <p:nvPicPr>
-          <p:cNvPr id="15" name="Image 2" descr="preencoded.png">    </p:cNvPr>
+          <p:cNvPr id="16" name="Image 2" descr="preencoded.png">    </p:cNvPr>
           <p:cNvPicPr>
             <a:picLocks noChangeAspect="1"/>
           </p:cNvPicPr>
@@ -19933,7 +20363,7 @@
                   <a:srgbClr val="0A7F44"/>
                 </a:solidFill>
               </a:rPr>
-              <a:t>65 / 65</a:t>
+              <a:t>93 / 93</a:t>
             </a:r>
             <a:endParaRPr lang="en-US" sz="3000" dirty="0"/>
           </a:p>
@@ -22217,7 +22647,7 @@
                   <a:srgbClr val="0A0A0B"/>
                 </a:solidFill>
               </a:rPr>
-              <a:t>Every claim has a log behind it</a:t>
+              <a:t>Every number names the file it comes from</a:t>
             </a:r>
             <a:endParaRPr lang="en-US" sz="3200" dirty="0"/>
           </a:p>
@@ -22613,7 +23043,7 @@
                   <a:srgbClr val="55555C"/>
                 </a:solidFill>
               </a:rPr>
-              <a:t>crash-matrix checks</a:t>
+              <a:t>crash checks, stand-in model</a:t>
             </a:r>
             <a:endParaRPr lang="en-US" sz="1200" dirty="0"/>
           </a:p>

--- a/video/deck/Serve_Meta_deck.pptx
+++ b/video/deck/Serve_Meta_deck.pptx
@@ -131,19 +131,19 @@
   <p:extLst>
     <p:ext uri="{521415D9-36F7-43E2-AB2F-B90AF26B5E84}">
       <p14:sectionLst xmlns:p14="http://schemas.microsoft.com/office/powerpoint/2010/main">
-        <p14:section name="Opening" id="{f7929e5e-47cc-6508-a0f4-1497b065e9ea}">
+        <p14:section name="Opening" id="{90d91cd7-c6d1-da21-6e40-b5d87dd52f91}">
           <p14:sldIdLst>
             <p14:sldId id="256"/>
             <p14:sldId id="257"/>
           </p14:sldIdLst>
         </p14:section>
-        <p14:section name="Impact" id="{1d294bbf-d96c-e5c0-bac6-2f56f9859673}">
+        <p14:section name="Impact" id="{7d21314c-c11e-9b02-f909-6a706cb832c2}">
           <p14:sldIdLst>
             <p14:sldId id="258"/>
             <p14:sldId id="259"/>
           </p14:sldIdLst>
         </p14:section>
-        <p14:section name="Demo" id="{f045a785-3091-a824-9c5a-8056e9bd02ec}">
+        <p14:section name="Demo" id="{89fa2ffc-cfab-2fea-c7d2-02856542499a}">
           <p14:sldIdLst>
             <p14:sldId id="260"/>
             <p14:sldId id="261"/>
@@ -153,7 +153,7 @@
             <p14:sldId id="265"/>
           </p14:sldIdLst>
         </p14:section>
-        <p14:section name="Use of Meta AI" id="{eb90705e-ce7d-738b-1876-014e69ddbf86}">
+        <p14:section name="Use of Meta AI" id="{74065391-bcb8-fd12-2cab-5a40bc05a7b7}">
           <p14:sldIdLst>
             <p14:sldId id="266"/>
             <p14:sldId id="267"/>
@@ -161,7 +161,7 @@
             <p14:sldId id="269"/>
           </p14:sldIdLst>
         </p14:section>
-        <p14:section name="Technical depth" id="{01c2cd1c-99da-6ed1-4a3b-2696be5b806c}">
+        <p14:section name="Technical depth" id="{4102ad82-4ea2-71d9-013a-844fabd2347a}">
           <p14:sldIdLst>
             <p14:sldId id="270"/>
             <p14:sldId id="271"/>
@@ -174,12 +174,12 @@
             <p14:sldId id="278"/>
           </p14:sldIdLst>
         </p14:section>
-        <p14:section name="Architecture" id="{6618a45b-7cfe-00f7-4eb6-bc9bd578d18a}">
+        <p14:section name="Architecture" id="{546dc20a-a6c8-bf73-7606-871420e3a337}">
           <p14:sldIdLst>
             <p14:sldId id="279"/>
           </p14:sldIdLst>
         </p14:section>
-        <p14:section name="Close" id="{5f67e855-97ad-ceae-18f9-eccf585e5482}">
+        <p14:section name="Close" id="{a2d8bee1-d74c-4cf2-5368-5d22c29f67a5}">
           <p14:sldIdLst>
             <p14:sldId id="280"/>
           </p14:sldIdLst>
@@ -14787,7 +14787,7 @@
                   <a:srgbClr val="55555C"/>
                 </a:solidFill>
               </a:rPr>
-              <a:t>fewer Glimmer calls, no rule broken</a:t>
+              <a:t>fewer Glimmer calls in the simulated club, no rule broken</a:t>
             </a:r>
             <a:endParaRPr lang="en-US" sz="1000" dirty="0"/>
           </a:p>
@@ -15988,7 +15988,7 @@
                   <a:srgbClr val="55555C"/>
                 </a:solidFill>
               </a:rPr>
-              <a:t>The student answers 73% of the hardest choices and 96% of the test set; Glimmer takes the rest. Glimmer alone agrees with itself 73.5% on these.</a:t>
+              <a:t>The student answers 73% of the hardest choices and 96% of the test set; Muse Glimmer takes the rest, with its full reasoning.</a:t>
             </a:r>
             <a:endParaRPr lang="en-US" sz="1050" dirty="0"/>
           </a:p>
@@ -31101,7 +31101,7 @@
                   <a:srgbClr val="0A7F44"/>
                 </a:solidFill>
               </a:rPr>
-              <a:t>MONDAY · BODY CONTEXT WITH META'S DRAMA</a:t>
+              <a:t>MONDAY · SCHEDULING CONTEXT WITH META'S DRAMA</a:t>
             </a:r>
             <a:endParaRPr lang="en-US" sz="1300" dirty="0"/>
           </a:p>
@@ -31139,7 +31139,7 @@
                   <a:srgbClr val="0A0A0B"/>
                 </a:solidFill>
               </a:rPr>
-              <a:t>Say it once. Every rule shows where it came from</a:t>
+              <a:t>Say it once, and your games fit around it</a:t>
             </a:r>
             <a:endParaRPr lang="en-US" sz="3200" dirty="0"/>
           </a:p>
@@ -31226,7 +31226,7 @@
                   <a:srgbClr val="55555C"/>
                 </a:solidFill>
               </a:rPr>
-              <a:t>What matters this week, by meaning</a:t>
+              <a:t>What your week asks for, by meaning</a:t>
             </a:r>
             <a:endParaRPr lang="en-US" sz="1050" dirty="0"/>
           </a:p>
@@ -31313,7 +31313,7 @@
                   <a:srgbClr val="55555C"/>
                 </a:solidFill>
               </a:rPr>
-              <a:t>Rules, each with its sources</a:t>
+              <a:t>Scheduling limits, each with its source</a:t>
             </a:r>
             <a:endParaRPr lang="en-US" sz="1050" dirty="0"/>
           </a:p>
@@ -32073,7 +32073,7 @@
                   <a:srgbClr val="55555C"/>
                 </a:solidFill>
               </a:rPr>
-              <a:t>The venue in the middle: each player's trip, agreed in one round</a:t>
+              <a:t>Badminton: the venue in the middle, each player's trip agreed in one round</a:t>
             </a:r>
             <a:endParaRPr lang="en-US" sz="1050" dirty="0"/>
           </a:p>
@@ -32160,7 +32160,7 @@
                   <a:srgbClr val="55555C"/>
                 </a:solidFill>
               </a:rPr>
-              <a:t>Courts, judged with their sources</a:t>
+              <a:t>Basketball: public courts, judged with sources</a:t>
             </a:r>
             <a:endParaRPr lang="en-US" sz="1050" dirty="0"/>
           </a:p>
@@ -33356,7 +33356,7 @@
                   <a:srgbClr val="0A7F44"/>
                 </a:solidFill>
               </a:rPr>
-              <a:t>THURSDAY · FIVE META VISION MODELS</a:t>
+              <a:t>THURSDAY · A CLIP TO SHARE · FIVE META VISION MODELS</a:t>
             </a:r>
             <a:endParaRPr lang="en-US" sz="1300" dirty="0"/>
           </a:p>
@@ -33394,7 +33394,7 @@
                   <a:srgbClr val="0A0A0B"/>
                 </a:solidFill>
               </a:rPr>
-              <a:t>Your phone clip becomes your moment, on my GPU</a:t>
+              <a:t>Your phone video becomes a clip for your friends</a:t>
             </a:r>
             <a:endParaRPr lang="en-US" sz="3200" dirty="0"/>
           </a:p>
@@ -33616,7 +33616,7 @@
                   <a:srgbClr val="0A0A0B"/>
                 </a:solidFill>
               </a:rPr>
-              <a:t>reads the pose, finds the fastest swing</a:t>
+              <a:t>finds the moment worth sharing</a:t>
             </a:r>
             <a:endParaRPr lang="en-US" sz="1150" dirty="0"/>
           </a:p>

--- a/video/deck/Serve_Meta_deck.pptx
+++ b/video/deck/Serve_Meta_deck.pptx
@@ -31,9 +31,10 @@
     <p:sldId id="279" r:id="rId25"/>
     <p:sldId id="280" r:id="rId26"/>
     <p:sldId id="281" r:id="rId27"/>
+    <p:sldId id="282" r:id="rId28"/>
   </p:sldIdLst>
   <p:notesMasterIdLst>
-    <p:notesMasterId r:id="rId28"/>
+    <p:notesMasterId r:id="rId29"/>
   </p:notesMasterIdLst>
   <p:sldSz cx="12192000" cy="6858000"/>
   <p:notesSz cx="6858000" cy="12192000"/>
@@ -132,20 +133,20 @@
   <p:extLst>
     <p:ext uri="{521415D9-36F7-43E2-AB2F-B90AF26B5E84}">
       <p14:sectionLst xmlns:p14="http://schemas.microsoft.com/office/powerpoint/2010/main">
-        <p14:section name="Opening" id="{970f41d7-a6cf-0383-4105-36cb8be704aa}">
+        <p14:section name="Opening" id="{ef5504f5-5586-7c0f-a75b-aa69f477290c}">
           <p14:sldIdLst>
             <p14:sldId id="256"/>
             <p14:sldId id="257"/>
           </p14:sldIdLst>
         </p14:section>
-        <p14:section name="Impact" id="{f4a5ab38-6c18-8ecf-2cfc-b718dec6e90f}">
+        <p14:section name="Impact" id="{5b1b5bd0-2b34-d8b6-35ab-89653bf07fd3}">
           <p14:sldIdLst>
             <p14:sldId id="258"/>
             <p14:sldId id="259"/>
             <p14:sldId id="260"/>
           </p14:sldIdLst>
         </p14:section>
-        <p14:section name="Demo" id="{afc2128f-aa46-7fe6-90da-f82c5453709c}">
+        <p14:section name="Demo" id="{803940ed-3828-d305-b32a-25aa2644a93d}">
           <p14:sldIdLst>
             <p14:sldId id="261"/>
             <p14:sldId id="262"/>
@@ -155,7 +156,7 @@
             <p14:sldId id="266"/>
           </p14:sldIdLst>
         </p14:section>
-        <p14:section name="Use of Meta AI" id="{2dc626b3-52fc-bd02-3821-19277e31cef7}">
+        <p14:section name="Use of Meta AI" id="{314f4758-9e99-8b62-b3d6-5e59c60b6f98}">
           <p14:sldIdLst>
             <p14:sldId id="267"/>
             <p14:sldId id="268"/>
@@ -163,7 +164,7 @@
             <p14:sldId id="270"/>
           </p14:sldIdLst>
         </p14:section>
-        <p14:section name="Technical depth" id="{2d7b3a48-feb7-f826-a012-8cb3782877ff}">
+        <p14:section name="Technical depth" id="{ab1b0dd7-666e-0788-2a61-94e0004436f8}">
           <p14:sldIdLst>
             <p14:sldId id="271"/>
             <p14:sldId id="272"/>
@@ -174,16 +175,17 @@
             <p14:sldId id="277"/>
             <p14:sldId id="278"/>
             <p14:sldId id="279"/>
-          </p14:sldIdLst>
-        </p14:section>
-        <p14:section name="Architecture" id="{e848573d-089f-5840-6431-5df90f088a6f}">
-          <p14:sldIdLst>
             <p14:sldId id="280"/>
           </p14:sldIdLst>
         </p14:section>
-        <p14:section name="Close" id="{3c485c0e-1c01-e569-322e-92be36ad45da}">
+        <p14:section name="Architecture" id="{6e641cbb-dced-099c-f624-620033219fef}">
           <p14:sldIdLst>
             <p14:sldId id="281"/>
+          </p14:sldIdLst>
+        </p14:section>
+        <p14:section name="Close" id="{b9680b52-7448-c47e-d9d6-c83bdd70a295}">
+          <p14:sldIdLst>
+            <p14:sldId id="282"/>
           </p14:sldIdLst>
         </p14:section>
       </p14:sectionLst>
@@ -3155,7 +3157,11 @@
           <a:p>
             <a:r>
               <a:rPr lang="en-US" dirty="0"/>
-              <a:t>規模化：把整個社團塞進 prompt，token 隨人數線性成長，401 人以上就放不進 16K 的 context；Serve 先用程式篩出候選人，一週規劃平均每次呼叫約 1,505 → 1,563 token（11 人到 301 人），幾乎不變。</a:t>
+              <a:t>四個代理架構：
+1 主動資訊探詢（VoI）：談判失敗時不放棄、不把問題丟回給使用者，用 Beta 後驗（只來自它看過的 yes/no，不看別人的行事曆）× 對方 agent 的意願，算出「問哪一題最能提高成局機率」，只問一個是非題，答是才再談。模擬 20,000 次：一題 + 一次談判成局 51.9%，不問 40.7%、隨便問 44.4%、問最可能的那組 48.2%。
+2 談判中的批評者：對方 agent 的每個反提案先經過程式審查——一場談判問超過兩個不同時間＝在探測你的行程，不再接受；你最近三場有兩場路最遠，又要你跑最遠就拒絕。
+3 從片段到信念：每週把零散筆記抽象成幾條長期信念，每條必須引用筆記、概括要兩條以上、數字必須出現在引用裡，不合格就丟。Glimmer 實測 10 條筆記 → 3 條信念，0 條被丟。
+4 預約前的同意證明：談妥的比賽每位球員的 agent 用自己的 Ed25519 金鑰簽同一份比賽紀錄，預約時逐一驗證，改過時間、加人、用別人的金鑰都會被拒絕。</a:t>
             </a:r>
             <a:endParaRPr lang="en-US" dirty="0"/>
           </a:p>
@@ -3243,8 +3249,7 @@
           <a:p>
             <a:r>
               <a:rPr lang="en-US" dirty="0"/>
-              <a:t>安全：每個 agent 都遵守 Meta 的 Agents Rule of Two（不可信輸入、私人資料、行動能力，最多同時兩個）。揭露預算：一直約球的 agent 能拼出你一週的行程，有預算時從 97.6% 降到 32.4%（模擬的探測者）。65 個攻擊全部擋下。
-旁白：Every agent follows Meta's Agents Rule of Two. And a disclosure budget cuts how much of your week a snooping agent can pin down, from 97.6% to 32.4%.</a:t>
+              <a:t>規模化：把整個社團塞進 prompt，token 隨人數線性成長，401 人以上就放不進 16K 的 context；Serve 先用程式篩出候選人，一週規劃平均每次呼叫約 1,505 → 1,563 token（11 人到 301 人），幾乎不變。</a:t>
             </a:r>
             <a:endParaRPr lang="en-US" dirty="0"/>
           </a:p>
@@ -3332,9 +3337,8 @@
           <a:p>
             <a:r>
               <a:rPr lang="en-US" dirty="0"/>
-              <a:t>自我演化的社團：會員在 Messenger 打 /idea 或按讚 → DRAMA 依語意分群，5 人提到才出現 → 二次方投票 → Muse Glimmer 寫規格、人工核准 → coding agent 在自己的分支上實作（從不讀社群文字）→ 九道關卡，第一個失敗就停 → 小規模上線，倒讚變多就自己關掉。
-真實案例（模擬社團 seed 7，管線、關卡、回滾是真的；technical report 5.6）：會員說「晚點再問我」→ 規格 C0：ask.hour 12 → 18，上線給 31 位 beta 會員中的 5 位，倒讚 29% → 23%，升級。故意植入的壞改動 ask.ahead 3 → 2 給 8 人的 canary：倒讚 40% → 60%，自動回滾。
-旁白：And the club evolves itself…</a:t>
+              <a:t>安全：每個 agent 都遵守 Meta 的 Agents Rule of Two（不可信輸入、私人資料、行動能力，最多同時兩個）。揭露預算：一直約球的 agent 能拼出你一週的行程，有預算時從 97.6% 降到 32.4%（模擬的探測者）。65 個攻擊全部擋下。
+旁白：Every agent follows Meta's Agents Rule of Two. And a disclosure budget cuts how much of your week a snooping agent can pin down, from 97.6% to 32.4%.</a:t>
             </a:r>
             <a:endParaRPr lang="en-US" dirty="0"/>
           </a:p>
@@ -3422,7 +3426,9 @@
           <a:p>
             <a:r>
               <a:rPr lang="en-US" dirty="0"/>
-              <a:t>證據頁：每個數字都有 log。e2e、攻擊測試在雲端 A100 上用同一個 Muse Glimmer（同一個 model digest）跑。可以快速帶過，或只在影片片尾字卡出現。</a:t>
+              <a:t>自我演化的社團：會員在 Messenger 打 /idea 或按讚 → DRAMA 依語意分群，5 人提到才出現 → 二次方投票 → Muse Glimmer 寫規格、人工核准 → coding agent 在自己的分支上實作（從不讀社群文字）→ 九道關卡，第一個失敗就停 → 小規模上線，倒讚變多就自己關掉。
+真實案例（模擬社團 seed 7，管線、關卡、回滾是真的；technical report 5.6）：會員說「晚點再問我」→ 規格 C0：ask.hour 12 → 18，上線給 31 位 beta 會員中的 5 位，倒讚 29% → 23%，升級。故意植入的壞改動 ask.ahead 3 → 2 給 8 人的 canary：倒讚 40% → 60%，自動回滾。
+旁白：And the club evolves itself…</a:t>
             </a:r>
             <a:endParaRPr lang="en-US" dirty="0"/>
           </a:p>
@@ -3510,7 +3516,7 @@
           <a:p>
             <a:r>
               <a:rPr lang="en-US" dirty="0"/>
-              <a:t>完整技術架構（放最後給想深入的評審）：左邊是使用者的入口；中間是 Node.js gateway 上的各個模組；右邊是 Meta 模型實際跑在哪（GPU 1 Muse Glimmer、GPU 0 視覺、CPU 上的小模型），以及外部開放資料。底下是「給人看之前先由程式檢查」與帳本/追蹤。</a:t>
+              <a:t>證據頁：每個數字都有 log。e2e、攻擊測試在雲端 A100 上用同一個 Muse Glimmer（同一個 model digest）跑。可以快速帶過，或只在影片片尾字卡出現。</a:t>
             </a:r>
             <a:endParaRPr lang="en-US" dirty="0"/>
           </a:p>
@@ -3598,8 +3604,7 @@
           <a:p>
             <a:r>
               <a:rPr lang="en-US" dirty="0"/>
-              <a:t>片尾：Play more, manage less. 黑客松期間開發聲明（TrackNetV5 除外）、repo 連結、Built on Muse Glimmer。
-旁白：That's Serve. Play more, manage less.</a:t>
+              <a:t>完整技術架構（放最後給想深入的評審）：左邊是使用者的入口；中間是 Node.js gateway 上的各個模組；右邊是 Meta 模型實際跑在哪（GPU 1 Muse Glimmer、GPU 0 視覺、CPU 上的小模型），以及外部開放資料。底下是「給人看之前先由程式檢查」與帳本/追蹤。</a:t>
             </a:r>
             <a:endParaRPr lang="en-US" dirty="0"/>
           </a:p>
@@ -3623,6 +3628,95 @@
             <a:fld id="{F7021451-1387-4CA6-816F-3879F97B5CBC}" type="slidenum">
               <a:rPr lang="en-US"/>
               <a:t>26</a:t>
+            </a:fld>
+            <a:endParaRPr lang="en-US"/>
+          </a:p>
+        </p:txBody>
+      </p:sp>
+    </p:spTree>
+    <p:extLst>
+      <p:ext uri="{BB962C8B-B14F-4D97-AF65-F5344CB8AC3E}">
+        <p14:creationId xmlns:p14="http://schemas.microsoft.com/office/powerpoint/2010/main" val="1024086991"/>
+      </p:ext>
+    </p:extLst>
+  </p:cSld>
+  <p:clrMapOvr>
+    <a:masterClrMapping/>
+  </p:clrMapOvr>
+</p:notes>
+</file>
+
+<file path=ppt/notesSlides/notesSlide27.xml><?xml version="1.0" encoding="utf-8"?>
+<p:notes xmlns:a="http://schemas.openxmlformats.org/drawingml/2006/main" xmlns:r="http://schemas.openxmlformats.org/officeDocument/2006/relationships" xmlns:p="http://schemas.openxmlformats.org/presentationml/2006/main">
+  <p:cSld>
+    <p:spTree>
+      <p:nvGrpSpPr>
+        <p:cNvPr id="1" name=""/>
+        <p:cNvGrpSpPr/>
+        <p:nvPr/>
+      </p:nvGrpSpPr>
+      <p:grpSpPr>
+        <a:xfrm>
+          <a:off x="0" y="0"/>
+          <a:ext cx="0" cy="0"/>
+          <a:chOff x="0" y="0"/>
+          <a:chExt cx="0" cy="0"/>
+        </a:xfrm>
+      </p:grpSpPr>
+      <p:sp>
+        <p:nvSpPr>
+          <p:cNvPr id="2" name="Slide Image Placeholder 1"/>
+          <p:cNvSpPr>
+            <a:spLocks noGrp="1" noRot="1" noChangeAspect="1"/>
+          </p:cNvSpPr>
+          <p:nvPr>
+            <p:ph type="sldImg"/>
+          </p:nvPr>
+        </p:nvSpPr>
+        <p:spPr/>
+      </p:sp>
+      <p:sp>
+        <p:nvSpPr>
+          <p:cNvPr id="3" name="Notes Placeholder 2"/>
+          <p:cNvSpPr>
+            <a:spLocks noGrp="1"/>
+          </p:cNvSpPr>
+          <p:nvPr>
+            <p:ph type="body" idx="1"/>
+          </p:nvPr>
+        </p:nvSpPr>
+        <p:spPr/>
+        <p:txBody>
+          <a:bodyPr/>
+          <a:lstStyle/>
+          <a:p>
+            <a:r>
+              <a:rPr lang="en-US" dirty="0"/>
+              <a:t>片尾：Play more, manage less. 黑客松期間開發聲明（TrackNetV5 除外）、repo 連結、Built on Muse Glimmer。
+旁白：That's Serve. Play more, manage less.</a:t>
+            </a:r>
+            <a:endParaRPr lang="en-US" dirty="0"/>
+          </a:p>
+        </p:txBody>
+      </p:sp>
+      <p:sp>
+        <p:nvSpPr>
+          <p:cNvPr id="4" name="Slide Number Placeholder 3"/>
+          <p:cNvSpPr>
+            <a:spLocks noGrp="1"/>
+          </p:cNvSpPr>
+          <p:nvPr>
+            <p:ph type="sldNum" sz="quarter" idx="10"/>
+          </p:nvPr>
+        </p:nvSpPr>
+        <p:spPr/>
+        <p:txBody>
+          <a:bodyPr/>
+          <a:lstStyle/>
+          <a:p>
+            <a:fld id="{F7021451-1387-4CA6-816F-3879F97B5CBC}" type="slidenum">
+              <a:rPr lang="en-US"/>
+              <a:t>27</a:t>
             </a:fld>
             <a:endParaRPr lang="en-US"/>
           </a:p>
@@ -21381,7 +21475,7 @@
                   <a:srgbClr val="0A7F44"/>
                 </a:solidFill>
               </a:rPr>
-              <a:t>MEASURED</a:t>
+              <a:t>TECHNICAL DEPTH · AGENT ARCHITECTURE</a:t>
             </a:r>
             <a:endParaRPr lang="en-US" sz="1300" dirty="0"/>
           </a:p>
@@ -21419,86 +21513,161 @@
                   <a:srgbClr val="0A0A0B"/>
                 </a:solidFill>
               </a:rPr>
-              <a:t>It stays the same size as the club grows</a:t>
+              <a:t>An agent that asks, doubts, abstracts and proves</a:t>
             </a:r>
             <a:endParaRPr lang="en-US" sz="3200" dirty="0"/>
           </a:p>
         </p:txBody>
       </p:sp>
-      <p:pic>
-        <p:nvPicPr>
-          <p:cNvPr id="5" name="Image 0" descr="preencoded.png">    </p:cNvPr>
-          <p:cNvPicPr>
-            <a:picLocks noChangeAspect="1"/>
-          </p:cNvPicPr>
-          <p:nvPr/>
-        </p:nvPicPr>
-        <p:blipFill>
-          <a:blip r:embed="rId1"/>
-          <a:stretch>
-            <a:fillRect/>
-          </a:stretch>
-        </p:blipFill>
+      <p:sp>
+        <p:nvSpPr>
+          <p:cNvPr id="5" name="Shape 2"/>
+          <p:cNvSpPr/>
+          <p:nvPr/>
+        </p:nvSpPr>
         <p:spPr>
           <a:xfrm>
             <a:off x="548640" y="1645920"/>
-            <a:ext cx="7315200" cy="3850105"/>
-          </a:xfrm>
-          <a:prstGeom prst="rect">
-            <a:avLst/>
-          </a:prstGeom>
-        </p:spPr>
-      </p:pic>
-      <p:sp>
-        <p:nvSpPr>
-          <p:cNvPr id="6" name="Text 2"/>
-          <p:cNvSpPr txBox="1"/>
-          <p:nvPr/>
-        </p:nvSpPr>
-        <p:spPr>
-          <a:xfrm>
-            <a:off x="548640" y="5587465"/>
-            <a:ext cx="7315200" cy="274320"/>
-          </a:xfrm>
-          <a:prstGeom prst="rect">
-            <a:avLst/>
-          </a:prstGeom>
-          <a:noFill/>
-          <a:ln/>
-        </p:spPr>
-        <p:txBody>
-          <a:bodyPr wrap="square" lIns="0" tIns="0" rIns="0" bIns="0" rtlCol="0" anchor="t"/>
-          <a:lstStyle/>
-          <a:p>
-            <a:pPr indent="0" marL="0">
-              <a:buNone/>
-            </a:pPr>
-            <a:r>
-              <a:rPr lang="en-US" sz="1100" dirty="0">
-                <a:solidFill>
-                  <a:srgbClr val="55555C"/>
-                </a:solidFill>
-              </a:rPr>
-              <a:t>Tokens one model call reads to choose players, by club size</a:t>
-            </a:r>
-            <a:endParaRPr lang="en-US" sz="1100" dirty="0"/>
-          </a:p>
-        </p:txBody>
-      </p:sp>
-      <p:sp>
-        <p:nvSpPr>
-          <p:cNvPr id="7" name="Shape 3"/>
-          <p:cNvSpPr/>
-          <p:nvPr/>
-        </p:nvSpPr>
-        <p:spPr>
-          <a:xfrm>
-            <a:off x="8183880" y="1737360"/>
-            <a:ext cx="3429000" cy="1325880"/>
+            <a:ext cx="5440680" cy="2194560"/>
           </a:xfrm>
           <a:prstGeom prst="roundRect">
             <a:avLst>
-              <a:gd name="adj" fmla="val 8276"/>
+              <a:gd name="adj" fmla="val 5000"/>
+            </a:avLst>
+          </a:prstGeom>
+          <a:solidFill>
+            <a:srgbClr val="FFFFFF"/>
+          </a:solidFill>
+          <a:ln w="12700">
+            <a:solidFill>
+              <a:srgbClr val="DCDCE0"/>
+            </a:solidFill>
+            <a:prstDash val="solid"/>
+          </a:ln>
+        </p:spPr>
+      </p:sp>
+      <p:sp>
+        <p:nvSpPr>
+          <p:cNvPr id="6" name="Text 3"/>
+          <p:cNvSpPr txBox="1"/>
+          <p:nvPr/>
+        </p:nvSpPr>
+        <p:spPr>
+          <a:xfrm>
+            <a:off x="731520" y="1783080"/>
+            <a:ext cx="1828800" cy="228600"/>
+          </a:xfrm>
+          <a:prstGeom prst="rect">
+            <a:avLst/>
+          </a:prstGeom>
+          <a:noFill/>
+          <a:ln/>
+        </p:spPr>
+        <p:txBody>
+          <a:bodyPr wrap="square" lIns="0" tIns="0" rIns="0" bIns="0" rtlCol="0" anchor="t"/>
+          <a:lstStyle/>
+          <a:p>
+            <a:pPr indent="0" marL="0">
+              <a:buNone/>
+            </a:pPr>
+            <a:r>
+              <a:rPr lang="en-US" sz="1000" b="1" spc="100" kern="0" dirty="0">
+                <a:solidFill>
+                  <a:srgbClr val="0A7F44"/>
+                </a:solidFill>
+              </a:rPr>
+              <a:t>ASKS</a:t>
+            </a:r>
+            <a:endParaRPr lang="en-US" sz="1000" dirty="0"/>
+          </a:p>
+        </p:txBody>
+      </p:sp>
+      <p:sp>
+        <p:nvSpPr>
+          <p:cNvPr id="7" name="Text 4"/>
+          <p:cNvSpPr txBox="1"/>
+          <p:nvPr/>
+        </p:nvSpPr>
+        <p:spPr>
+          <a:xfrm>
+            <a:off x="731520" y="2029968"/>
+            <a:ext cx="5074920" cy="320040"/>
+          </a:xfrm>
+          <a:prstGeom prst="rect">
+            <a:avLst/>
+          </a:prstGeom>
+          <a:noFill/>
+          <a:ln/>
+        </p:spPr>
+        <p:txBody>
+          <a:bodyPr wrap="square" lIns="0" tIns="0" rIns="0" bIns="0" rtlCol="0" anchor="t"/>
+          <a:lstStyle/>
+          <a:p>
+            <a:pPr indent="0" marL="0">
+              <a:buNone/>
+            </a:pPr>
+            <a:r>
+              <a:rPr lang="en-US" sz="1500" b="1" dirty="0">
+                <a:solidFill>
+                  <a:srgbClr val="0A0A0B"/>
+                </a:solidFill>
+              </a:rPr>
+              <a:t>Active epistemic querying</a:t>
+            </a:r>
+            <a:endParaRPr lang="en-US" sz="1500" dirty="0"/>
+          </a:p>
+        </p:txBody>
+      </p:sp>
+      <p:sp>
+        <p:nvSpPr>
+          <p:cNvPr id="8" name="Text 5"/>
+          <p:cNvSpPr txBox="1"/>
+          <p:nvPr/>
+        </p:nvSpPr>
+        <p:spPr>
+          <a:xfrm>
+            <a:off x="731520" y="2395728"/>
+            <a:ext cx="5074920" cy="777240"/>
+          </a:xfrm>
+          <a:prstGeom prst="rect">
+            <a:avLst/>
+          </a:prstGeom>
+          <a:noFill/>
+          <a:ln/>
+        </p:spPr>
+        <p:txBody>
+          <a:bodyPr wrap="square" lIns="0" tIns="0" rIns="0" bIns="0" rtlCol="0" anchor="t"/>
+          <a:lstStyle/>
+          <a:p>
+            <a:pPr indent="0" marL="0">
+              <a:buNone/>
+            </a:pPr>
+            <a:r>
+              <a:rPr lang="en-US" sz="1050" dirty="0">
+                <a:solidFill>
+                  <a:srgbClr val="55555C"/>
+                </a:solidFill>
+              </a:rPr>
+              <a:t>When talks fail, a Beta posterior per member and hour (from yes/no it has seen, never a calendar) times their chance of a yes picks the one question that most raises the chance of a game.</a:t>
+            </a:r>
+            <a:endParaRPr lang="en-US" sz="1050" dirty="0"/>
+          </a:p>
+        </p:txBody>
+      </p:sp>
+      <p:sp>
+        <p:nvSpPr>
+          <p:cNvPr id="9" name="Shape 6"/>
+          <p:cNvSpPr/>
+          <p:nvPr/>
+        </p:nvSpPr>
+        <p:spPr>
+          <a:xfrm>
+            <a:off x="731520" y="3218688"/>
+            <a:ext cx="5074920" cy="502920"/>
+          </a:xfrm>
+          <a:prstGeom prst="roundRect">
+            <a:avLst>
+              <a:gd name="adj" fmla="val 21818"/>
             </a:avLst>
           </a:prstGeom>
           <a:solidFill>
@@ -21514,71 +21683,35 @@
       </p:sp>
       <p:sp>
         <p:nvSpPr>
-          <p:cNvPr id="8" name="Text 4"/>
-          <p:cNvSpPr txBox="1"/>
-          <p:nvPr/>
-        </p:nvSpPr>
-        <p:spPr>
-          <a:xfrm>
-            <a:off x="8366760" y="1828800"/>
-            <a:ext cx="3108960" cy="502920"/>
-          </a:xfrm>
-          <a:prstGeom prst="rect">
-            <a:avLst/>
-          </a:prstGeom>
-          <a:noFill/>
-          <a:ln/>
-        </p:spPr>
-        <p:txBody>
-          <a:bodyPr wrap="square" lIns="0" tIns="0" rIns="0" bIns="0" rtlCol="0" anchor="t"/>
-          <a:lstStyle/>
-          <a:p>
-            <a:pPr indent="0" marL="0">
-              <a:buNone/>
-            </a:pPr>
-            <a:r>
-              <a:rPr lang="en-US" sz="2400" b="1" dirty="0">
-                <a:solidFill>
-                  <a:srgbClr val="0A7F44"/>
-                </a:solidFill>
-              </a:rPr>
-              <a:t>1,505 → 1,563</a:t>
-            </a:r>
-            <a:endParaRPr lang="en-US" sz="2400" dirty="0"/>
-          </a:p>
-        </p:txBody>
-      </p:sp>
-      <p:sp>
-        <p:nvSpPr>
-          <p:cNvPr id="9" name="Text 5"/>
-          <p:cNvSpPr txBox="1"/>
-          <p:nvPr/>
-        </p:nvSpPr>
-        <p:spPr>
-          <a:xfrm>
-            <a:off x="8366760" y="2359152"/>
-            <a:ext cx="3108960" cy="640080"/>
-          </a:xfrm>
-          <a:prstGeom prst="rect">
-            <a:avLst/>
-          </a:prstGeom>
-          <a:noFill/>
-          <a:ln/>
-        </p:spPr>
-        <p:txBody>
-          <a:bodyPr wrap="square" lIns="0" tIns="0" rIns="0" bIns="0" rtlCol="0" anchor="t"/>
-          <a:lstStyle/>
-          <a:p>
-            <a:pPr indent="0" marL="0">
-              <a:buNone/>
-            </a:pPr>
-            <a:r>
-              <a:rPr lang="en-US" sz="1050" dirty="0">
-                <a:solidFill>
-                  <a:srgbClr val="55555C"/>
-                </a:solidFill>
-              </a:rPr>
-              <a:t>tokens per call from 11 to 301 members: Serve's shortlist, made by code</a:t>
+          <p:cNvPr id="10" name="Text 7"/>
+          <p:cNvSpPr txBox="1"/>
+          <p:nvPr/>
+        </p:nvSpPr>
+        <p:spPr>
+          <a:xfrm>
+            <a:off x="841248" y="3218688"/>
+            <a:ext cx="4855464" cy="502920"/>
+          </a:xfrm>
+          <a:prstGeom prst="rect">
+            <a:avLst/>
+          </a:prstGeom>
+          <a:noFill/>
+          <a:ln/>
+        </p:spPr>
+        <p:txBody>
+          <a:bodyPr wrap="square" lIns="0" tIns="0" rIns="0" bIns="0" rtlCol="0" anchor="ctr"/>
+          <a:lstStyle/>
+          <a:p>
+            <a:pPr indent="0" marL="0">
+              <a:buNone/>
+            </a:pPr>
+            <a:r>
+              <a:rPr lang="en-US" sz="1050" b="1" dirty="0">
+                <a:solidFill>
+                  <a:srgbClr val="0A0A0B"/>
+                </a:solidFill>
+              </a:rPr>
+              <a:t>One question, then a talk: 51.9% games, against 40.7% asking nothing, 44.4% a random question (20,000 simulated requests)</a:t>
             </a:r>
             <a:endParaRPr lang="en-US" sz="1050" dirty="0"/>
           </a:p>
@@ -21586,26 +21719,26 @@
       </p:sp>
       <p:sp>
         <p:nvSpPr>
-          <p:cNvPr id="10" name="Shape 6"/>
+          <p:cNvPr id="11" name="Shape 8"/>
           <p:cNvSpPr/>
           <p:nvPr/>
         </p:nvSpPr>
         <p:spPr>
           <a:xfrm>
-            <a:off x="8183880" y="3200400"/>
-            <a:ext cx="3429000" cy="1325880"/>
+            <a:off x="6172200" y="1645920"/>
+            <a:ext cx="5440680" cy="2194560"/>
           </a:xfrm>
           <a:prstGeom prst="roundRect">
             <a:avLst>
-              <a:gd name="adj" fmla="val 8276"/>
+              <a:gd name="adj" fmla="val 5000"/>
             </a:avLst>
           </a:prstGeom>
           <a:solidFill>
-            <a:srgbClr val="F6F7F8"/>
+            <a:srgbClr val="FFFFFF"/>
           </a:solidFill>
           <a:ln w="12700">
             <a:solidFill>
-              <a:srgbClr val="F6F7F8"/>
+              <a:srgbClr val="DCDCE0"/>
             </a:solidFill>
             <a:prstDash val="solid"/>
           </a:ln>
@@ -21613,50 +21746,86 @@
       </p:sp>
       <p:sp>
         <p:nvSpPr>
-          <p:cNvPr id="11" name="Text 7"/>
-          <p:cNvSpPr txBox="1"/>
-          <p:nvPr/>
-        </p:nvSpPr>
-        <p:spPr>
-          <a:xfrm>
-            <a:off x="8366760" y="3291840"/>
-            <a:ext cx="3108960" cy="502920"/>
-          </a:xfrm>
-          <a:prstGeom prst="rect">
-            <a:avLst/>
-          </a:prstGeom>
-          <a:noFill/>
-          <a:ln/>
-        </p:spPr>
-        <p:txBody>
-          <a:bodyPr wrap="square" lIns="0" tIns="0" rIns="0" bIns="0" rtlCol="0" anchor="t"/>
-          <a:lstStyle/>
-          <a:p>
-            <a:pPr indent="0" marL="0">
-              <a:buNone/>
-            </a:pPr>
-            <a:r>
-              <a:rPr lang="en-US" sz="2400" b="1" dirty="0">
-                <a:solidFill>
-                  <a:srgbClr val="D1352B"/>
-                </a:solidFill>
-              </a:rPr>
-              <a:t>58,203</a:t>
-            </a:r>
-            <a:endParaRPr lang="en-US" sz="2400" dirty="0"/>
-          </a:p>
-        </p:txBody>
-      </p:sp>
-      <p:sp>
-        <p:nvSpPr>
-          <p:cNvPr id="12" name="Text 8"/>
-          <p:cNvSpPr txBox="1"/>
-          <p:nvPr/>
-        </p:nvSpPr>
-        <p:spPr>
-          <a:xfrm>
-            <a:off x="8366760" y="3822192"/>
-            <a:ext cx="3108960" cy="640080"/>
+          <p:cNvPr id="12" name="Text 9"/>
+          <p:cNvSpPr txBox="1"/>
+          <p:nvPr/>
+        </p:nvSpPr>
+        <p:spPr>
+          <a:xfrm>
+            <a:off x="6355080" y="1783080"/>
+            <a:ext cx="1828800" cy="228600"/>
+          </a:xfrm>
+          <a:prstGeom prst="rect">
+            <a:avLst/>
+          </a:prstGeom>
+          <a:noFill/>
+          <a:ln/>
+        </p:spPr>
+        <p:txBody>
+          <a:bodyPr wrap="square" lIns="0" tIns="0" rIns="0" bIns="0" rtlCol="0" anchor="t"/>
+          <a:lstStyle/>
+          <a:p>
+            <a:pPr indent="0" marL="0">
+              <a:buNone/>
+            </a:pPr>
+            <a:r>
+              <a:rPr lang="en-US" sz="1000" b="1" spc="100" kern="0" dirty="0">
+                <a:solidFill>
+                  <a:srgbClr val="B26A00"/>
+                </a:solidFill>
+              </a:rPr>
+              <a:t>DOUBTS</a:t>
+            </a:r>
+            <a:endParaRPr lang="en-US" sz="1000" dirty="0"/>
+          </a:p>
+        </p:txBody>
+      </p:sp>
+      <p:sp>
+        <p:nvSpPr>
+          <p:cNvPr id="13" name="Text 10"/>
+          <p:cNvSpPr txBox="1"/>
+          <p:nvPr/>
+        </p:nvSpPr>
+        <p:spPr>
+          <a:xfrm>
+            <a:off x="6355080" y="2029968"/>
+            <a:ext cx="5074920" cy="320040"/>
+          </a:xfrm>
+          <a:prstGeom prst="rect">
+            <a:avLst/>
+          </a:prstGeom>
+          <a:noFill/>
+          <a:ln/>
+        </p:spPr>
+        <p:txBody>
+          <a:bodyPr wrap="square" lIns="0" tIns="0" rIns="0" bIns="0" rtlCol="0" anchor="t"/>
+          <a:lstStyle/>
+          <a:p>
+            <a:pPr indent="0" marL="0">
+              <a:buNone/>
+            </a:pPr>
+            <a:r>
+              <a:rPr lang="en-US" sz="1500" b="1" dirty="0">
+                <a:solidFill>
+                  <a:srgbClr val="0A0A0B"/>
+                </a:solidFill>
+              </a:rPr>
+              <a:t>A critic on every counter-offer</a:t>
+            </a:r>
+            <a:endParaRPr lang="en-US" sz="1500" dirty="0"/>
+          </a:p>
+        </p:txBody>
+      </p:sp>
+      <p:sp>
+        <p:nvSpPr>
+          <p:cNvPr id="14" name="Text 11"/>
+          <p:cNvSpPr txBox="1"/>
+          <p:nvPr/>
+        </p:nvSpPr>
+        <p:spPr>
+          <a:xfrm>
+            <a:off x="6355080" y="2395728"/>
+            <a:ext cx="5074920" cy="777240"/>
           </a:xfrm>
           <a:prstGeom prst="rect">
             <a:avLst/>
@@ -21677,7 +21846,7 @@
                   <a:srgbClr val="55555C"/>
                 </a:solidFill>
               </a:rPr>
-              <a:t>tokens, estimated, for a 1,001-member club in the prompt: far past the window</a:t>
+              <a:t>Code reviews each counter for the player: more than two times asked in a talk is probing, and the player who keeps travelling furthest is not sent furthest again.</a:t>
             </a:r>
             <a:endParaRPr lang="en-US" sz="1050" dirty="0"/>
           </a:p>
@@ -21685,26 +21854,26 @@
       </p:sp>
       <p:sp>
         <p:nvSpPr>
-          <p:cNvPr id="13" name="Shape 9"/>
+          <p:cNvPr id="15" name="Shape 12"/>
           <p:cNvSpPr/>
           <p:nvPr/>
         </p:nvSpPr>
         <p:spPr>
           <a:xfrm>
-            <a:off x="8183880" y="4663440"/>
-            <a:ext cx="3429000" cy="1325880"/>
+            <a:off x="6355080" y="3218688"/>
+            <a:ext cx="5074920" cy="502920"/>
           </a:xfrm>
           <a:prstGeom prst="roundRect">
             <a:avLst>
-              <a:gd name="adj" fmla="val 8276"/>
+              <a:gd name="adj" fmla="val 21818"/>
             </a:avLst>
           </a:prstGeom>
           <a:solidFill>
-            <a:srgbClr val="F6F7F8"/>
+            <a:srgbClr val="FBF3E6"/>
           </a:solidFill>
           <a:ln w="12700">
             <a:solidFill>
-              <a:srgbClr val="F6F7F8"/>
+              <a:srgbClr val="FBF3E6"/>
             </a:solidFill>
             <a:prstDash val="solid"/>
           </a:ln>
@@ -21712,50 +21881,149 @@
       </p:sp>
       <p:sp>
         <p:nvSpPr>
-          <p:cNvPr id="14" name="Text 10"/>
-          <p:cNvSpPr txBox="1"/>
-          <p:nvPr/>
-        </p:nvSpPr>
-        <p:spPr>
-          <a:xfrm>
-            <a:off x="8366760" y="4754880"/>
-            <a:ext cx="3108960" cy="502920"/>
-          </a:xfrm>
-          <a:prstGeom prst="rect">
-            <a:avLst/>
-          </a:prstGeom>
-          <a:noFill/>
-          <a:ln/>
-        </p:spPr>
-        <p:txBody>
-          <a:bodyPr wrap="square" lIns="0" tIns="0" rIns="0" bIns="0" rtlCol="0" anchor="t"/>
-          <a:lstStyle/>
-          <a:p>
-            <a:pPr indent="0" marL="0">
-              <a:buNone/>
-            </a:pPr>
-            <a:r>
-              <a:rPr lang="en-US" sz="2400" b="1" dirty="0">
+          <p:cNvPr id="16" name="Text 13"/>
+          <p:cNvSpPr txBox="1"/>
+          <p:nvPr/>
+        </p:nvSpPr>
+        <p:spPr>
+          <a:xfrm>
+            <a:off x="6464808" y="3218688"/>
+            <a:ext cx="4855464" cy="502920"/>
+          </a:xfrm>
+          <a:prstGeom prst="rect">
+            <a:avLst/>
+          </a:prstGeom>
+          <a:noFill/>
+          <a:ln/>
+        </p:spPr>
+        <p:txBody>
+          <a:bodyPr wrap="square" lIns="0" tIns="0" rIns="0" bIns="0" rtlCol="0" anchor="ctr"/>
+          <a:lstStyle/>
+          <a:p>
+            <a:pPr indent="0" marL="0">
+              <a:buNone/>
+            </a:pPr>
+            <a:r>
+              <a:rPr lang="en-US" sz="1050" b="1" dirty="0">
                 <a:solidFill>
                   <a:srgbClr val="0A0A0B"/>
                 </a:solidFill>
               </a:rPr>
-              <a:t>16,384</a:t>
-            </a:r>
-            <a:endParaRPr lang="en-US" sz="2400" dirty="0"/>
-          </a:p>
-        </p:txBody>
-      </p:sp>
-      <p:sp>
-        <p:nvSpPr>
-          <p:cNvPr id="15" name="Text 11"/>
-          <p:cNvSpPr txBox="1"/>
-          <p:nvPr/>
-        </p:nvSpPr>
-        <p:spPr>
-          <a:xfrm>
-            <a:off x="8366760" y="5285232"/>
-            <a:ext cx="3108960" cy="640080"/>
+              <a:t>Probing and unfair counters refused, with the reason in the trail</a:t>
+            </a:r>
+            <a:endParaRPr lang="en-US" sz="1050" dirty="0"/>
+          </a:p>
+        </p:txBody>
+      </p:sp>
+      <p:sp>
+        <p:nvSpPr>
+          <p:cNvPr id="17" name="Shape 14"/>
+          <p:cNvSpPr/>
+          <p:nvPr/>
+        </p:nvSpPr>
+        <p:spPr>
+          <a:xfrm>
+            <a:off x="548640" y="3977640"/>
+            <a:ext cx="5440680" cy="2194560"/>
+          </a:xfrm>
+          <a:prstGeom prst="roundRect">
+            <a:avLst>
+              <a:gd name="adj" fmla="val 5000"/>
+            </a:avLst>
+          </a:prstGeom>
+          <a:solidFill>
+            <a:srgbClr val="FFFFFF"/>
+          </a:solidFill>
+          <a:ln w="12700">
+            <a:solidFill>
+              <a:srgbClr val="DCDCE0"/>
+            </a:solidFill>
+            <a:prstDash val="solid"/>
+          </a:ln>
+        </p:spPr>
+      </p:sp>
+      <p:sp>
+        <p:nvSpPr>
+          <p:cNvPr id="18" name="Text 15"/>
+          <p:cNvSpPr txBox="1"/>
+          <p:nvPr/>
+        </p:nvSpPr>
+        <p:spPr>
+          <a:xfrm>
+            <a:off x="731520" y="4114800"/>
+            <a:ext cx="1828800" cy="228600"/>
+          </a:xfrm>
+          <a:prstGeom prst="rect">
+            <a:avLst/>
+          </a:prstGeom>
+          <a:noFill/>
+          <a:ln/>
+        </p:spPr>
+        <p:txBody>
+          <a:bodyPr wrap="square" lIns="0" tIns="0" rIns="0" bIns="0" rtlCol="0" anchor="t"/>
+          <a:lstStyle/>
+          <a:p>
+            <a:pPr indent="0" marL="0">
+              <a:buNone/>
+            </a:pPr>
+            <a:r>
+              <a:rPr lang="en-US" sz="1000" b="1" spc="100" kern="0" dirty="0">
+                <a:solidFill>
+                  <a:srgbClr val="0064E0"/>
+                </a:solidFill>
+              </a:rPr>
+              <a:t>ABSTRACTS</a:t>
+            </a:r>
+            <a:endParaRPr lang="en-US" sz="1000" dirty="0"/>
+          </a:p>
+        </p:txBody>
+      </p:sp>
+      <p:sp>
+        <p:nvSpPr>
+          <p:cNvPr id="19" name="Text 16"/>
+          <p:cNvSpPr txBox="1"/>
+          <p:nvPr/>
+        </p:nvSpPr>
+        <p:spPr>
+          <a:xfrm>
+            <a:off x="731520" y="4361688"/>
+            <a:ext cx="5074920" cy="320040"/>
+          </a:xfrm>
+          <a:prstGeom prst="rect">
+            <a:avLst/>
+          </a:prstGeom>
+          <a:noFill/>
+          <a:ln/>
+        </p:spPr>
+        <p:txBody>
+          <a:bodyPr wrap="square" lIns="0" tIns="0" rIns="0" bIns="0" rtlCol="0" anchor="t"/>
+          <a:lstStyle/>
+          <a:p>
+            <a:pPr indent="0" marL="0">
+              <a:buNone/>
+            </a:pPr>
+            <a:r>
+              <a:rPr lang="en-US" sz="1500" b="1" dirty="0">
+                <a:solidFill>
+                  <a:srgbClr val="0A0A0B"/>
+                </a:solidFill>
+              </a:rPr>
+              <a:t>From episodes to beliefs</a:t>
+            </a:r>
+            <a:endParaRPr lang="en-US" sz="1500" dirty="0"/>
+          </a:p>
+        </p:txBody>
+      </p:sp>
+      <p:sp>
+        <p:nvSpPr>
+          <p:cNvPr id="20" name="Text 17"/>
+          <p:cNvSpPr txBox="1"/>
+          <p:nvPr/>
+        </p:nvSpPr>
+        <p:spPr>
+          <a:xfrm>
+            <a:off x="731520" y="4727448"/>
+            <a:ext cx="5074920" cy="777240"/>
           </a:xfrm>
           <a:prstGeom prst="rect">
             <a:avLst/>
@@ -21776,7 +22044,268 @@
                   <a:srgbClr val="55555C"/>
                 </a:solidFill>
               </a:rPr>
-              <a:t>the context the model has on this server</a:t>
+              <a:t>Weekly, Glimmer turns scattered notes into standing beliefs; each must cite live notes, two to generalize, and say no number they do not.</a:t>
+            </a:r>
+            <a:endParaRPr lang="en-US" sz="1050" dirty="0"/>
+          </a:p>
+        </p:txBody>
+      </p:sp>
+      <p:sp>
+        <p:nvSpPr>
+          <p:cNvPr id="21" name="Shape 18"/>
+          <p:cNvSpPr/>
+          <p:nvPr/>
+        </p:nvSpPr>
+        <p:spPr>
+          <a:xfrm>
+            <a:off x="731520" y="5550408"/>
+            <a:ext cx="5074920" cy="502920"/>
+          </a:xfrm>
+          <a:prstGeom prst="roundRect">
+            <a:avLst>
+              <a:gd name="adj" fmla="val 21818"/>
+            </a:avLst>
+          </a:prstGeom>
+          <a:solidFill>
+            <a:srgbClr val="E8F1FD"/>
+          </a:solidFill>
+          <a:ln w="12700">
+            <a:solidFill>
+              <a:srgbClr val="E8F1FD"/>
+            </a:solidFill>
+            <a:prstDash val="solid"/>
+          </a:ln>
+        </p:spPr>
+      </p:sp>
+      <p:sp>
+        <p:nvSpPr>
+          <p:cNvPr id="22" name="Text 19"/>
+          <p:cNvSpPr txBox="1"/>
+          <p:nvPr/>
+        </p:nvSpPr>
+        <p:spPr>
+          <a:xfrm>
+            <a:off x="841248" y="5550408"/>
+            <a:ext cx="4855464" cy="502920"/>
+          </a:xfrm>
+          <a:prstGeom prst="rect">
+            <a:avLst/>
+          </a:prstGeom>
+          <a:noFill/>
+          <a:ln/>
+        </p:spPr>
+        <p:txBody>
+          <a:bodyPr wrap="square" lIns="0" tIns="0" rIns="0" bIns="0" rtlCol="0" anchor="ctr"/>
+          <a:lstStyle/>
+          <a:p>
+            <a:pPr indent="0" marL="0">
+              <a:buNone/>
+            </a:pPr>
+            <a:r>
+              <a:rPr lang="en-US" sz="1050" b="1" dirty="0">
+                <a:solidFill>
+                  <a:srgbClr val="0A0A0B"/>
+                </a:solidFill>
+              </a:rPr>
+              <a:t>10 notes to 3 beliefs, each on two notes, none dropped (Glimmer, 42 s)</a:t>
+            </a:r>
+            <a:endParaRPr lang="en-US" sz="1050" dirty="0"/>
+          </a:p>
+        </p:txBody>
+      </p:sp>
+      <p:sp>
+        <p:nvSpPr>
+          <p:cNvPr id="23" name="Shape 20"/>
+          <p:cNvSpPr/>
+          <p:nvPr/>
+        </p:nvSpPr>
+        <p:spPr>
+          <a:xfrm>
+            <a:off x="6172200" y="3977640"/>
+            <a:ext cx="5440680" cy="2194560"/>
+          </a:xfrm>
+          <a:prstGeom prst="roundRect">
+            <a:avLst>
+              <a:gd name="adj" fmla="val 5000"/>
+            </a:avLst>
+          </a:prstGeom>
+          <a:solidFill>
+            <a:srgbClr val="FFFFFF"/>
+          </a:solidFill>
+          <a:ln w="12700">
+            <a:solidFill>
+              <a:srgbClr val="DCDCE0"/>
+            </a:solidFill>
+            <a:prstDash val="solid"/>
+          </a:ln>
+        </p:spPr>
+      </p:sp>
+      <p:sp>
+        <p:nvSpPr>
+          <p:cNvPr id="24" name="Text 21"/>
+          <p:cNvSpPr txBox="1"/>
+          <p:nvPr/>
+        </p:nvSpPr>
+        <p:spPr>
+          <a:xfrm>
+            <a:off x="6355080" y="4114800"/>
+            <a:ext cx="1828800" cy="228600"/>
+          </a:xfrm>
+          <a:prstGeom prst="rect">
+            <a:avLst/>
+          </a:prstGeom>
+          <a:noFill/>
+          <a:ln/>
+        </p:spPr>
+        <p:txBody>
+          <a:bodyPr wrap="square" lIns="0" tIns="0" rIns="0" bIns="0" rtlCol="0" anchor="t"/>
+          <a:lstStyle/>
+          <a:p>
+            <a:pPr indent="0" marL="0">
+              <a:buNone/>
+            </a:pPr>
+            <a:r>
+              <a:rPr lang="en-US" sz="1000" b="1" spc="100" kern="0" dirty="0">
+                <a:solidFill>
+                  <a:srgbClr val="D1352B"/>
+                </a:solidFill>
+              </a:rPr>
+              <a:t>PROVES</a:t>
+            </a:r>
+            <a:endParaRPr lang="en-US" sz="1000" dirty="0"/>
+          </a:p>
+        </p:txBody>
+      </p:sp>
+      <p:sp>
+        <p:nvSpPr>
+          <p:cNvPr id="25" name="Text 22"/>
+          <p:cNvSpPr txBox="1"/>
+          <p:nvPr/>
+        </p:nvSpPr>
+        <p:spPr>
+          <a:xfrm>
+            <a:off x="6355080" y="4361688"/>
+            <a:ext cx="5074920" cy="320040"/>
+          </a:xfrm>
+          <a:prstGeom prst="rect">
+            <a:avLst/>
+          </a:prstGeom>
+          <a:noFill/>
+          <a:ln/>
+        </p:spPr>
+        <p:txBody>
+          <a:bodyPr wrap="square" lIns="0" tIns="0" rIns="0" bIns="0" rtlCol="0" anchor="t"/>
+          <a:lstStyle/>
+          <a:p>
+            <a:pPr indent="0" marL="0">
+              <a:buNone/>
+            </a:pPr>
+            <a:r>
+              <a:rPr lang="en-US" sz="1500" b="1" dirty="0">
+                <a:solidFill>
+                  <a:srgbClr val="0A0A0B"/>
+                </a:solidFill>
+              </a:rPr>
+              <a:t>Proof of consent</a:t>
+            </a:r>
+            <a:endParaRPr lang="en-US" sz="1500" dirty="0"/>
+          </a:p>
+        </p:txBody>
+      </p:sp>
+      <p:sp>
+        <p:nvSpPr>
+          <p:cNvPr id="26" name="Text 23"/>
+          <p:cNvSpPr txBox="1"/>
+          <p:nvPr/>
+        </p:nvSpPr>
+        <p:spPr>
+          <a:xfrm>
+            <a:off x="6355080" y="4727448"/>
+            <a:ext cx="5074920" cy="777240"/>
+          </a:xfrm>
+          <a:prstGeom prst="rect">
+            <a:avLst/>
+          </a:prstGeom>
+          <a:noFill/>
+          <a:ln/>
+        </p:spPr>
+        <p:txBody>
+          <a:bodyPr wrap="square" lIns="0" tIns="0" rIns="0" bIns="0" rtlCol="0" anchor="t"/>
+          <a:lstStyle/>
+          <a:p>
+            <a:pPr indent="0" marL="0">
+              <a:buNone/>
+            </a:pPr>
+            <a:r>
+              <a:rPr lang="en-US" sz="1050" dirty="0">
+                <a:solidFill>
+                  <a:srgbClr val="55555C"/>
+                </a:solidFill>
+              </a:rPr>
+              <a:t>Every player's agent signs the agreed game with its own Ed25519 key; booking checks each one against the game it books.</a:t>
+            </a:r>
+            <a:endParaRPr lang="en-US" sz="1050" dirty="0"/>
+          </a:p>
+        </p:txBody>
+      </p:sp>
+      <p:sp>
+        <p:nvSpPr>
+          <p:cNvPr id="27" name="Shape 24"/>
+          <p:cNvSpPr/>
+          <p:nvPr/>
+        </p:nvSpPr>
+        <p:spPr>
+          <a:xfrm>
+            <a:off x="6355080" y="5550408"/>
+            <a:ext cx="5074920" cy="502920"/>
+          </a:xfrm>
+          <a:prstGeom prst="roundRect">
+            <a:avLst>
+              <a:gd name="adj" fmla="val 21818"/>
+            </a:avLst>
+          </a:prstGeom>
+          <a:solidFill>
+            <a:srgbClr val="FBEAE9"/>
+          </a:solidFill>
+          <a:ln w="12700">
+            <a:solidFill>
+              <a:srgbClr val="FBEAE9"/>
+            </a:solidFill>
+            <a:prstDash val="solid"/>
+          </a:ln>
+        </p:spPr>
+      </p:sp>
+      <p:sp>
+        <p:nvSpPr>
+          <p:cNvPr id="28" name="Text 25"/>
+          <p:cNvSpPr txBox="1"/>
+          <p:nvPr/>
+        </p:nvSpPr>
+        <p:spPr>
+          <a:xfrm>
+            <a:off x="6464808" y="5550408"/>
+            <a:ext cx="4855464" cy="502920"/>
+          </a:xfrm>
+          <a:prstGeom prst="rect">
+            <a:avLst/>
+          </a:prstGeom>
+          <a:noFill/>
+          <a:ln/>
+        </p:spPr>
+        <p:txBody>
+          <a:bodyPr wrap="square" lIns="0" tIns="0" rIns="0" bIns="0" rtlCol="0" anchor="ctr"/>
+          <a:lstStyle/>
+          <a:p>
+            <a:pPr indent="0" marL="0">
+              <a:buNone/>
+            </a:pPr>
+            <a:r>
+              <a:rPr lang="en-US" sz="1050" b="1" dirty="0">
+                <a:solidFill>
+                  <a:srgbClr val="0A0A0B"/>
+                </a:solidFill>
+              </a:rPr>
+              <a:t>A changed time, an added player or another agent's key: refused</a:t>
             </a:r>
             <a:endParaRPr lang="en-US" sz="1050" dirty="0"/>
           </a:p>
@@ -21884,7 +22413,7 @@
                   <a:srgbClr val="0A7F44"/>
                 </a:solidFill>
               </a:rPr>
-              <a:t>SAFE BY DESIGN</a:t>
+              <a:t>MEASURED</a:t>
             </a:r>
             <a:endParaRPr lang="en-US" sz="1300" dirty="0"/>
           </a:p>
@@ -21922,34 +22451,94 @@
                   <a:srgbClr val="0A0A0B"/>
                 </a:solidFill>
               </a:rPr>
-              <a:t>No agent holds all three at once</a:t>
+              <a:t>It stays the same size as the club grows</a:t>
             </a:r>
             <a:endParaRPr lang="en-US" sz="3200" dirty="0"/>
           </a:p>
         </p:txBody>
       </p:sp>
-      <p:sp>
-        <p:nvSpPr>
-          <p:cNvPr id="5" name="Shape 2"/>
+      <p:pic>
+        <p:nvPicPr>
+          <p:cNvPr id="5" name="Image 0" descr="preencoded.png">    </p:cNvPr>
+          <p:cNvPicPr>
+            <a:picLocks noChangeAspect="1"/>
+          </p:cNvPicPr>
+          <p:nvPr/>
+        </p:nvPicPr>
+        <p:blipFill>
+          <a:blip r:embed="rId1"/>
+          <a:stretch>
+            <a:fillRect/>
+          </a:stretch>
+        </p:blipFill>
+        <p:spPr>
+          <a:xfrm>
+            <a:off x="548640" y="1645920"/>
+            <a:ext cx="7315200" cy="3850105"/>
+          </a:xfrm>
+          <a:prstGeom prst="rect">
+            <a:avLst/>
+          </a:prstGeom>
+        </p:spPr>
+      </p:pic>
+      <p:sp>
+        <p:nvSpPr>
+          <p:cNvPr id="6" name="Text 2"/>
+          <p:cNvSpPr txBox="1"/>
+          <p:nvPr/>
+        </p:nvSpPr>
+        <p:spPr>
+          <a:xfrm>
+            <a:off x="548640" y="5587465"/>
+            <a:ext cx="7315200" cy="274320"/>
+          </a:xfrm>
+          <a:prstGeom prst="rect">
+            <a:avLst/>
+          </a:prstGeom>
+          <a:noFill/>
+          <a:ln/>
+        </p:spPr>
+        <p:txBody>
+          <a:bodyPr wrap="square" lIns="0" tIns="0" rIns="0" bIns="0" rtlCol="0" anchor="t"/>
+          <a:lstStyle/>
+          <a:p>
+            <a:pPr indent="0" marL="0">
+              <a:buNone/>
+            </a:pPr>
+            <a:r>
+              <a:rPr lang="en-US" sz="1100" dirty="0">
+                <a:solidFill>
+                  <a:srgbClr val="55555C"/>
+                </a:solidFill>
+              </a:rPr>
+              <a:t>Tokens one model call reads to choose players, by club size</a:t>
+            </a:r>
+            <a:endParaRPr lang="en-US" sz="1100" dirty="0"/>
+          </a:p>
+        </p:txBody>
+      </p:sp>
+      <p:sp>
+        <p:nvSpPr>
+          <p:cNvPr id="7" name="Shape 3"/>
           <p:cNvSpPr/>
           <p:nvPr/>
         </p:nvSpPr>
         <p:spPr>
           <a:xfrm>
-            <a:off x="822960" y="1737360"/>
-            <a:ext cx="2286000" cy="2286000"/>
-          </a:xfrm>
-          <a:prstGeom prst="ellipse">
-            <a:avLst/>
+            <a:off x="8183880" y="1737360"/>
+            <a:ext cx="3429000" cy="1325880"/>
+          </a:xfrm>
+          <a:prstGeom prst="roundRect">
+            <a:avLst>
+              <a:gd name="adj" fmla="val 8276"/>
+            </a:avLst>
           </a:prstGeom>
           <a:solidFill>
-            <a:srgbClr val="FBEAE9">
-              <a:alpha val="65000"/>
-            </a:srgbClr>
+            <a:srgbClr val="E9F3EC"/>
           </a:solidFill>
-          <a:ln w="25400">
+          <a:ln w="12700">
             <a:solidFill>
-              <a:srgbClr val="D1352B"/>
+              <a:srgbClr val="E9F3EC"/>
             </a:solidFill>
             <a:prstDash val="solid"/>
           </a:ln>
@@ -21957,470 +22546,90 @@
       </p:sp>
       <p:sp>
         <p:nvSpPr>
-          <p:cNvPr id="6" name="Shape 3"/>
+          <p:cNvPr id="8" name="Text 4"/>
+          <p:cNvSpPr txBox="1"/>
+          <p:nvPr/>
+        </p:nvSpPr>
+        <p:spPr>
+          <a:xfrm>
+            <a:off x="8366760" y="1828800"/>
+            <a:ext cx="3108960" cy="502920"/>
+          </a:xfrm>
+          <a:prstGeom prst="rect">
+            <a:avLst/>
+          </a:prstGeom>
+          <a:noFill/>
+          <a:ln/>
+        </p:spPr>
+        <p:txBody>
+          <a:bodyPr wrap="square" lIns="0" tIns="0" rIns="0" bIns="0" rtlCol="0" anchor="t"/>
+          <a:lstStyle/>
+          <a:p>
+            <a:pPr indent="0" marL="0">
+              <a:buNone/>
+            </a:pPr>
+            <a:r>
+              <a:rPr lang="en-US" sz="2400" b="1" dirty="0">
+                <a:solidFill>
+                  <a:srgbClr val="0A7F44"/>
+                </a:solidFill>
+              </a:rPr>
+              <a:t>1,505 → 1,563</a:t>
+            </a:r>
+            <a:endParaRPr lang="en-US" sz="2400" dirty="0"/>
+          </a:p>
+        </p:txBody>
+      </p:sp>
+      <p:sp>
+        <p:nvSpPr>
+          <p:cNvPr id="9" name="Text 5"/>
+          <p:cNvSpPr txBox="1"/>
+          <p:nvPr/>
+        </p:nvSpPr>
+        <p:spPr>
+          <a:xfrm>
+            <a:off x="8366760" y="2359152"/>
+            <a:ext cx="3108960" cy="640080"/>
+          </a:xfrm>
+          <a:prstGeom prst="rect">
+            <a:avLst/>
+          </a:prstGeom>
+          <a:noFill/>
+          <a:ln/>
+        </p:spPr>
+        <p:txBody>
+          <a:bodyPr wrap="square" lIns="0" tIns="0" rIns="0" bIns="0" rtlCol="0" anchor="t"/>
+          <a:lstStyle/>
+          <a:p>
+            <a:pPr indent="0" marL="0">
+              <a:buNone/>
+            </a:pPr>
+            <a:r>
+              <a:rPr lang="en-US" sz="1050" dirty="0">
+                <a:solidFill>
+                  <a:srgbClr val="55555C"/>
+                </a:solidFill>
+              </a:rPr>
+              <a:t>tokens per call from 11 to 301 members: Serve's shortlist, made by code</a:t>
+            </a:r>
+            <a:endParaRPr lang="en-US" sz="1050" dirty="0"/>
+          </a:p>
+        </p:txBody>
+      </p:sp>
+      <p:sp>
+        <p:nvSpPr>
+          <p:cNvPr id="10" name="Shape 6"/>
           <p:cNvSpPr/>
           <p:nvPr/>
         </p:nvSpPr>
         <p:spPr>
           <a:xfrm>
-            <a:off x="2606040" y="1737360"/>
-            <a:ext cx="2286000" cy="2286000"/>
-          </a:xfrm>
-          <a:prstGeom prst="ellipse">
-            <a:avLst/>
-          </a:prstGeom>
-          <a:solidFill>
-            <a:srgbClr val="E8F1FD">
-              <a:alpha val="65000"/>
-            </a:srgbClr>
-          </a:solidFill>
-          <a:ln w="25400">
-            <a:solidFill>
-              <a:srgbClr val="0064E0"/>
-            </a:solidFill>
-            <a:prstDash val="solid"/>
-          </a:ln>
-        </p:spPr>
-      </p:sp>
-      <p:sp>
-        <p:nvSpPr>
-          <p:cNvPr id="7" name="Shape 4"/>
-          <p:cNvSpPr/>
-          <p:nvPr/>
-        </p:nvSpPr>
-        <p:spPr>
-          <a:xfrm>
-            <a:off x="1719072" y="3246120"/>
-            <a:ext cx="2286000" cy="2286000"/>
-          </a:xfrm>
-          <a:prstGeom prst="ellipse">
-            <a:avLst/>
-          </a:prstGeom>
-          <a:solidFill>
-            <a:srgbClr val="E9F3EC">
-              <a:alpha val="65000"/>
-            </a:srgbClr>
-          </a:solidFill>
-          <a:ln w="25400">
-            <a:solidFill>
-              <a:srgbClr val="0A7F44"/>
-            </a:solidFill>
-            <a:prstDash val="solid"/>
-          </a:ln>
-        </p:spPr>
-      </p:sp>
-      <p:sp>
-        <p:nvSpPr>
-          <p:cNvPr id="8" name="Text 5"/>
-          <p:cNvSpPr txBox="1"/>
-          <p:nvPr/>
-        </p:nvSpPr>
-        <p:spPr>
-          <a:xfrm>
-            <a:off x="1051560" y="2331720"/>
-            <a:ext cx="1280160" cy="731520"/>
-          </a:xfrm>
-          <a:prstGeom prst="rect">
-            <a:avLst/>
-          </a:prstGeom>
-          <a:noFill/>
-          <a:ln/>
-        </p:spPr>
-        <p:txBody>
-          <a:bodyPr wrap="square" lIns="0" tIns="0" rIns="0" bIns="0" rtlCol="0" anchor="t"/>
-          <a:lstStyle/>
-          <a:p>
-            <a:pPr algn="ctr" indent="0" marL="0">
-              <a:buNone/>
-            </a:pPr>
-            <a:r>
-              <a:rPr lang="en-US" sz="1500" b="1" dirty="0">
-                <a:solidFill>
-                  <a:srgbClr val="0A0A0B"/>
-                </a:solidFill>
-              </a:rPr>
-              <a:t>Untrusted</a:t>
-            </a:r>
-            <a:endParaRPr lang="en-US" sz="1500" dirty="0"/>
-          </a:p>
-          <a:p>
-            <a:pPr algn="ctr" indent="0" marL="0">
-              <a:buNone/>
-            </a:pPr>
-            <a:r>
-              <a:rPr lang="en-US" sz="1500" b="1" dirty="0">
-                <a:solidFill>
-                  <a:srgbClr val="0A0A0B"/>
-                </a:solidFill>
-              </a:rPr>
-              <a:t>input</a:t>
-            </a:r>
-            <a:endParaRPr lang="en-US" sz="1500" dirty="0"/>
-          </a:p>
-        </p:txBody>
-      </p:sp>
-      <p:sp>
-        <p:nvSpPr>
-          <p:cNvPr id="9" name="Text 6"/>
-          <p:cNvSpPr txBox="1"/>
-          <p:nvPr/>
-        </p:nvSpPr>
-        <p:spPr>
-          <a:xfrm>
-            <a:off x="3520440" y="2331720"/>
-            <a:ext cx="1280160" cy="731520"/>
-          </a:xfrm>
-          <a:prstGeom prst="rect">
-            <a:avLst/>
-          </a:prstGeom>
-          <a:noFill/>
-          <a:ln/>
-        </p:spPr>
-        <p:txBody>
-          <a:bodyPr wrap="square" lIns="0" tIns="0" rIns="0" bIns="0" rtlCol="0" anchor="t"/>
-          <a:lstStyle/>
-          <a:p>
-            <a:pPr algn="ctr" indent="0" marL="0">
-              <a:buNone/>
-            </a:pPr>
-            <a:r>
-              <a:rPr lang="en-US" sz="1500" b="1" dirty="0">
-                <a:solidFill>
-                  <a:srgbClr val="0A0A0B"/>
-                </a:solidFill>
-              </a:rPr>
-              <a:t>Private</a:t>
-            </a:r>
-            <a:endParaRPr lang="en-US" sz="1500" dirty="0"/>
-          </a:p>
-          <a:p>
-            <a:pPr algn="ctr" indent="0" marL="0">
-              <a:buNone/>
-            </a:pPr>
-            <a:r>
-              <a:rPr lang="en-US" sz="1500" b="1" dirty="0">
-                <a:solidFill>
-                  <a:srgbClr val="0A0A0B"/>
-                </a:solidFill>
-              </a:rPr>
-              <a:t>data</a:t>
-            </a:r>
-            <a:endParaRPr lang="en-US" sz="1500" dirty="0"/>
-          </a:p>
-        </p:txBody>
-      </p:sp>
-      <p:sp>
-        <p:nvSpPr>
-          <p:cNvPr id="10" name="Text 7"/>
-          <p:cNvSpPr txBox="1"/>
-          <p:nvPr/>
-        </p:nvSpPr>
-        <p:spPr>
-          <a:xfrm>
-            <a:off x="2221992" y="4617720"/>
-            <a:ext cx="1280160" cy="731520"/>
-          </a:xfrm>
-          <a:prstGeom prst="rect">
-            <a:avLst/>
-          </a:prstGeom>
-          <a:noFill/>
-          <a:ln/>
-        </p:spPr>
-        <p:txBody>
-          <a:bodyPr wrap="square" lIns="0" tIns="0" rIns="0" bIns="0" rtlCol="0" anchor="t"/>
-          <a:lstStyle/>
-          <a:p>
-            <a:pPr algn="ctr" indent="0" marL="0">
-              <a:buNone/>
-            </a:pPr>
-            <a:r>
-              <a:rPr lang="en-US" sz="1500" b="1" dirty="0">
-                <a:solidFill>
-                  <a:srgbClr val="0A0A0B"/>
-                </a:solidFill>
-              </a:rPr>
-              <a:t>The power</a:t>
-            </a:r>
-            <a:endParaRPr lang="en-US" sz="1500" dirty="0"/>
-          </a:p>
-          <a:p>
-            <a:pPr algn="ctr" indent="0" marL="0">
-              <a:buNone/>
-            </a:pPr>
-            <a:r>
-              <a:rPr lang="en-US" sz="1500" b="1" dirty="0">
-                <a:solidFill>
-                  <a:srgbClr val="0A0A0B"/>
-                </a:solidFill>
-              </a:rPr>
-              <a:t>to act</a:t>
-            </a:r>
-            <a:endParaRPr lang="en-US" sz="1500" dirty="0"/>
-          </a:p>
-        </p:txBody>
-      </p:sp>
-      <p:sp>
-        <p:nvSpPr>
-          <p:cNvPr id="11" name="Shape 8"/>
-          <p:cNvSpPr/>
-          <p:nvPr/>
-        </p:nvSpPr>
-        <p:spPr>
-          <a:xfrm>
-            <a:off x="2542032" y="2971800"/>
-            <a:ext cx="658368" cy="658368"/>
-          </a:xfrm>
-          <a:prstGeom prst="ellipse">
-            <a:avLst/>
-          </a:prstGeom>
-          <a:solidFill>
-            <a:srgbClr val="FFFFFF"/>
-          </a:solidFill>
-          <a:ln w="38100">
-            <a:solidFill>
-              <a:srgbClr val="D1352B"/>
-            </a:solidFill>
-            <a:prstDash val="solid"/>
-          </a:ln>
-        </p:spPr>
-      </p:sp>
-      <p:sp>
-        <p:nvSpPr>
-          <p:cNvPr id="12" name="Text 9"/>
-          <p:cNvSpPr txBox="1"/>
-          <p:nvPr/>
-        </p:nvSpPr>
-        <p:spPr>
-          <a:xfrm>
-            <a:off x="2542032" y="2971800"/>
-            <a:ext cx="658368" cy="658368"/>
-          </a:xfrm>
-          <a:prstGeom prst="rect">
-            <a:avLst/>
-          </a:prstGeom>
-          <a:noFill/>
-          <a:ln/>
-        </p:spPr>
-        <p:txBody>
-          <a:bodyPr wrap="square" lIns="0" tIns="0" rIns="0" bIns="0" rtlCol="0" anchor="ctr"/>
-          <a:lstStyle/>
-          <a:p>
-            <a:pPr algn="ctr" indent="0" marL="0">
-              <a:buNone/>
-            </a:pPr>
-            <a:r>
-              <a:rPr lang="en-US" sz="3000" b="1" dirty="0">
-                <a:solidFill>
-                  <a:srgbClr val="D1352B"/>
-                </a:solidFill>
-              </a:rPr>
-              <a:t>×</a:t>
-            </a:r>
-            <a:endParaRPr lang="en-US" sz="3000" dirty="0"/>
-          </a:p>
-        </p:txBody>
-      </p:sp>
-      <p:sp>
-        <p:nvSpPr>
-          <p:cNvPr id="13" name="Text 10"/>
-          <p:cNvSpPr txBox="1"/>
-          <p:nvPr/>
-        </p:nvSpPr>
-        <p:spPr>
-          <a:xfrm>
-            <a:off x="548640" y="5715000"/>
-            <a:ext cx="4937760" cy="548640"/>
-          </a:xfrm>
-          <a:prstGeom prst="rect">
-            <a:avLst/>
-          </a:prstGeom>
-          <a:noFill/>
-          <a:ln/>
-        </p:spPr>
-        <p:txBody>
-          <a:bodyPr wrap="square" lIns="0" tIns="0" rIns="0" bIns="0" rtlCol="0" anchor="t"/>
-          <a:lstStyle/>
-          <a:p>
-            <a:pPr indent="0" marL="0">
-              <a:buNone/>
-            </a:pPr>
-            <a:r>
-              <a:rPr lang="en-US" sz="1200" dirty="0">
-                <a:solidFill>
-                  <a:srgbClr val="55555C"/>
-                </a:solidFill>
-              </a:rPr>
-              <a:t>Meta's Agents Rule of Two, on every agent: the planner, members' agents, the photo reader and the community loop.</a:t>
-            </a:r>
-            <a:endParaRPr lang="en-US" sz="1200" dirty="0"/>
-          </a:p>
-        </p:txBody>
-      </p:sp>
-      <p:sp>
-        <p:nvSpPr>
-          <p:cNvPr id="14" name="Text 11"/>
-          <p:cNvSpPr txBox="1"/>
-          <p:nvPr/>
-        </p:nvSpPr>
-        <p:spPr>
-          <a:xfrm>
-            <a:off x="6172200" y="1691640"/>
-            <a:ext cx="5486400" cy="411480"/>
-          </a:xfrm>
-          <a:prstGeom prst="rect">
-            <a:avLst/>
-          </a:prstGeom>
-          <a:noFill/>
-          <a:ln/>
-        </p:spPr>
-        <p:txBody>
-          <a:bodyPr wrap="square" lIns="0" tIns="0" rIns="0" bIns="0" rtlCol="0" anchor="t"/>
-          <a:lstStyle/>
-          <a:p>
-            <a:pPr indent="0" marL="0">
-              <a:buNone/>
-            </a:pPr>
-            <a:r>
-              <a:rPr lang="en-US" sz="2000" b="1" dirty="0">
-                <a:solidFill>
-                  <a:srgbClr val="0A0A0B"/>
-                </a:solidFill>
-              </a:rPr>
-              <a:t>A disclosure budget</a:t>
-            </a:r>
-            <a:endParaRPr lang="en-US" sz="2000" dirty="0"/>
-          </a:p>
-        </p:txBody>
-      </p:sp>
-      <p:sp>
-        <p:nvSpPr>
-          <p:cNvPr id="15" name="Text 12"/>
-          <p:cNvSpPr txBox="1"/>
-          <p:nvPr/>
-        </p:nvSpPr>
-        <p:spPr>
-          <a:xfrm>
-            <a:off x="6172200" y="2103120"/>
-            <a:ext cx="5394960" cy="548640"/>
-          </a:xfrm>
-          <a:prstGeom prst="rect">
-            <a:avLst/>
-          </a:prstGeom>
-          <a:noFill/>
-          <a:ln/>
-        </p:spPr>
-        <p:txBody>
-          <a:bodyPr wrap="square" lIns="0" tIns="0" rIns="0" bIns="0" rtlCol="0" anchor="t"/>
-          <a:lstStyle/>
-          <a:p>
-            <a:pPr indent="0" marL="0">
-              <a:buNone/>
-            </a:pPr>
-            <a:r>
-              <a:rPr lang="en-US" sz="1250" dirty="0">
-                <a:solidFill>
-                  <a:srgbClr val="55555C"/>
-                </a:solidFill>
-              </a:rPr>
-              <a:t>An agent that keeps asking for games can map out your week. How many of your weekdays it pins down exactly:</a:t>
-            </a:r>
-            <a:endParaRPr lang="en-US" sz="1250" dirty="0"/>
-          </a:p>
-        </p:txBody>
-      </p:sp>
-      <p:graphicFrame>
-        <p:nvGraphicFramePr>
-          <p:cNvPr id="16" name="Chart 0" descr=""/>
-          <p:cNvGraphicFramePr/>
-          <p:nvPr/>
-        </p:nvGraphicFramePr>
-        <p:xfrm>
-          <a:off x="6080760" y="2697480"/>
-          <a:ext cx="5577840" cy="1828800"/>
-        </p:xfrm>
-        <a:graphic xmlns:a="http://schemas.openxmlformats.org/drawingml/2006/main">
-          <a:graphicData uri="http://schemas.openxmlformats.org/drawingml/2006/chart">
-            <c:chart xmlns:c="http://schemas.openxmlformats.org/drawingml/2006/chart" r:id="rId1"/>
-          </a:graphicData>
-        </a:graphic>
-      </p:graphicFrame>
-      <p:sp>
-        <p:nvSpPr>
-          <p:cNvPr id="17" name="Shape 13"/>
-          <p:cNvSpPr/>
-          <p:nvPr/>
-        </p:nvSpPr>
-        <p:spPr>
-          <a:xfrm>
-            <a:off x="6172200" y="4553712"/>
-            <a:ext cx="3291840" cy="329184"/>
+            <a:off x="8183880" y="3200400"/>
+            <a:ext cx="3429000" cy="1325880"/>
           </a:xfrm>
           <a:prstGeom prst="roundRect">
             <a:avLst>
-              <a:gd name="adj" fmla="val 50000"/>
-            </a:avLst>
-          </a:prstGeom>
-          <a:solidFill>
-            <a:srgbClr val="FFFFFF"/>
-          </a:solidFill>
-          <a:ln w="12700">
-            <a:solidFill>
-              <a:srgbClr val="DCDCE0"/>
-            </a:solidFill>
-            <a:prstDash val="solid"/>
-          </a:ln>
-        </p:spPr>
-      </p:sp>
-      <p:sp>
-        <p:nvSpPr>
-          <p:cNvPr id="18" name="Text 14"/>
-          <p:cNvSpPr txBox="1"/>
-          <p:nvPr/>
-        </p:nvSpPr>
-        <p:spPr>
-          <a:xfrm>
-            <a:off x="6172200" y="4553712"/>
-            <a:ext cx="3291840" cy="329184"/>
-          </a:xfrm>
-          <a:prstGeom prst="rect">
-            <a:avLst/>
-          </a:prstGeom>
-          <a:noFill/>
-          <a:ln/>
-        </p:spPr>
-        <p:txBody>
-          <a:bodyPr wrap="square" lIns="0" tIns="0" rIns="0" bIns="0" rtlCol="0" anchor="ctr"/>
-          <a:lstStyle/>
-          <a:p>
-            <a:pPr algn="ctr" indent="0" marL="0">
-              <a:buNone/>
-            </a:pPr>
-            <a:r>
-              <a:rPr lang="en-US" sz="1050" b="1" dirty="0">
-                <a:solidFill>
-                  <a:srgbClr val="55555C"/>
-                </a:solidFill>
-              </a:rPr>
-              <a:t>Simulated prober · technical report 3.13</a:t>
-            </a:r>
-            <a:endParaRPr lang="en-US" sz="1050" dirty="0"/>
-          </a:p>
-        </p:txBody>
-      </p:sp>
-      <p:sp>
-        <p:nvSpPr>
-          <p:cNvPr id="19" name="Shape 15"/>
-          <p:cNvSpPr/>
-          <p:nvPr/>
-        </p:nvSpPr>
-        <p:spPr>
-          <a:xfrm>
-            <a:off x="6172200" y="5074920"/>
-            <a:ext cx="5440680" cy="1143000"/>
-          </a:xfrm>
-          <a:prstGeom prst="roundRect">
-            <a:avLst>
-              <a:gd name="adj" fmla="val 9600"/>
+              <a:gd name="adj" fmla="val 8276"/>
             </a:avLst>
           </a:prstGeom>
           <a:solidFill>
@@ -22436,73 +22645,172 @@
       </p:sp>
       <p:sp>
         <p:nvSpPr>
-          <p:cNvPr id="20" name="Text 16"/>
-          <p:cNvSpPr txBox="1"/>
-          <p:nvPr/>
-        </p:nvSpPr>
-        <p:spPr>
-          <a:xfrm>
-            <a:off x="6355080" y="5074920"/>
-            <a:ext cx="1737360" cy="1143000"/>
-          </a:xfrm>
-          <a:prstGeom prst="rect">
-            <a:avLst/>
-          </a:prstGeom>
-          <a:noFill/>
-          <a:ln/>
-        </p:spPr>
-        <p:txBody>
-          <a:bodyPr wrap="square" lIns="0" tIns="0" rIns="0" bIns="0" rtlCol="0" anchor="ctr"/>
-          <a:lstStyle/>
-          <a:p>
-            <a:pPr indent="0" marL="0">
-              <a:buNone/>
-            </a:pPr>
-            <a:r>
-              <a:rPr lang="en-US" sz="3000" b="1" dirty="0">
-                <a:solidFill>
-                  <a:srgbClr val="0A7F44"/>
-                </a:solidFill>
-              </a:rPr>
-              <a:t>93 / 93</a:t>
-            </a:r>
-            <a:endParaRPr lang="en-US" sz="3000" dirty="0"/>
-          </a:p>
-        </p:txBody>
-      </p:sp>
-      <p:sp>
-        <p:nvSpPr>
-          <p:cNvPr id="21" name="Text 17"/>
-          <p:cNvSpPr txBox="1"/>
-          <p:nvPr/>
-        </p:nvSpPr>
-        <p:spPr>
-          <a:xfrm>
-            <a:off x="8092440" y="5074920"/>
-            <a:ext cx="3383280" cy="1143000"/>
-          </a:xfrm>
-          <a:prstGeom prst="rect">
-            <a:avLst/>
-          </a:prstGeom>
-          <a:noFill/>
-          <a:ln/>
-        </p:spPr>
-        <p:txBody>
-          <a:bodyPr wrap="square" lIns="0" tIns="0" rIns="0" bIns="0" rtlCol="0" anchor="ctr"/>
-          <a:lstStyle/>
-          <a:p>
-            <a:pPr indent="0" marL="0">
-              <a:buNone/>
-            </a:pPr>
-            <a:r>
-              <a:rPr lang="en-US" sz="1150" dirty="0">
+          <p:cNvPr id="11" name="Text 7"/>
+          <p:cNvSpPr txBox="1"/>
+          <p:nvPr/>
+        </p:nvSpPr>
+        <p:spPr>
+          <a:xfrm>
+            <a:off x="8366760" y="3291840"/>
+            <a:ext cx="3108960" cy="502920"/>
+          </a:xfrm>
+          <a:prstGeom prst="rect">
+            <a:avLst/>
+          </a:prstGeom>
+          <a:noFill/>
+          <a:ln/>
+        </p:spPr>
+        <p:txBody>
+          <a:bodyPr wrap="square" lIns="0" tIns="0" rIns="0" bIns="0" rtlCol="0" anchor="t"/>
+          <a:lstStyle/>
+          <a:p>
+            <a:pPr indent="0" marL="0">
+              <a:buNone/>
+            </a:pPr>
+            <a:r>
+              <a:rPr lang="en-US" sz="2400" b="1" dirty="0">
+                <a:solidFill>
+                  <a:srgbClr val="D1352B"/>
+                </a:solidFill>
+              </a:rPr>
+              <a:t>58,203</a:t>
+            </a:r>
+            <a:endParaRPr lang="en-US" sz="2400" dirty="0"/>
+          </a:p>
+        </p:txBody>
+      </p:sp>
+      <p:sp>
+        <p:nvSpPr>
+          <p:cNvPr id="12" name="Text 8"/>
+          <p:cNvSpPr txBox="1"/>
+          <p:nvPr/>
+        </p:nvSpPr>
+        <p:spPr>
+          <a:xfrm>
+            <a:off x="8366760" y="3822192"/>
+            <a:ext cx="3108960" cy="640080"/>
+          </a:xfrm>
+          <a:prstGeom prst="rect">
+            <a:avLst/>
+          </a:prstGeom>
+          <a:noFill/>
+          <a:ln/>
+        </p:spPr>
+        <p:txBody>
+          <a:bodyPr wrap="square" lIns="0" tIns="0" rIns="0" bIns="0" rtlCol="0" anchor="t"/>
+          <a:lstStyle/>
+          <a:p>
+            <a:pPr indent="0" marL="0">
+              <a:buNone/>
+            </a:pPr>
+            <a:r>
+              <a:rPr lang="en-US" sz="1050" dirty="0">
+                <a:solidFill>
+                  <a:srgbClr val="55555C"/>
+                </a:solidFill>
+              </a:rPr>
+              <a:t>tokens, estimated, for a 1,001-member club in the prompt: far past the window</a:t>
+            </a:r>
+            <a:endParaRPr lang="en-US" sz="1050" dirty="0"/>
+          </a:p>
+        </p:txBody>
+      </p:sp>
+      <p:sp>
+        <p:nvSpPr>
+          <p:cNvPr id="13" name="Shape 9"/>
+          <p:cNvSpPr/>
+          <p:nvPr/>
+        </p:nvSpPr>
+        <p:spPr>
+          <a:xfrm>
+            <a:off x="8183880" y="4663440"/>
+            <a:ext cx="3429000" cy="1325880"/>
+          </a:xfrm>
+          <a:prstGeom prst="roundRect">
+            <a:avLst>
+              <a:gd name="adj" fmla="val 8276"/>
+            </a:avLst>
+          </a:prstGeom>
+          <a:solidFill>
+            <a:srgbClr val="F6F7F8"/>
+          </a:solidFill>
+          <a:ln w="12700">
+            <a:solidFill>
+              <a:srgbClr val="F6F7F8"/>
+            </a:solidFill>
+            <a:prstDash val="solid"/>
+          </a:ln>
+        </p:spPr>
+      </p:sp>
+      <p:sp>
+        <p:nvSpPr>
+          <p:cNvPr id="14" name="Text 10"/>
+          <p:cNvSpPr txBox="1"/>
+          <p:nvPr/>
+        </p:nvSpPr>
+        <p:spPr>
+          <a:xfrm>
+            <a:off x="8366760" y="4754880"/>
+            <a:ext cx="3108960" cy="502920"/>
+          </a:xfrm>
+          <a:prstGeom prst="rect">
+            <a:avLst/>
+          </a:prstGeom>
+          <a:noFill/>
+          <a:ln/>
+        </p:spPr>
+        <p:txBody>
+          <a:bodyPr wrap="square" lIns="0" tIns="0" rIns="0" bIns="0" rtlCol="0" anchor="t"/>
+          <a:lstStyle/>
+          <a:p>
+            <a:pPr indent="0" marL="0">
+              <a:buNone/>
+            </a:pPr>
+            <a:r>
+              <a:rPr lang="en-US" sz="2400" b="1" dirty="0">
                 <a:solidFill>
                   <a:srgbClr val="0A0A0B"/>
                 </a:solidFill>
               </a:rPr>
-              <a:t>attacks stopped: injected instructions, poisoned reviews, forged Agent Cards, sock-puppet votes, diffs that book without a yes</a:t>
-            </a:r>
-            <a:endParaRPr lang="en-US" sz="1150" dirty="0"/>
+              <a:t>16,384</a:t>
+            </a:r>
+            <a:endParaRPr lang="en-US" sz="2400" dirty="0"/>
+          </a:p>
+        </p:txBody>
+      </p:sp>
+      <p:sp>
+        <p:nvSpPr>
+          <p:cNvPr id="15" name="Text 11"/>
+          <p:cNvSpPr txBox="1"/>
+          <p:nvPr/>
+        </p:nvSpPr>
+        <p:spPr>
+          <a:xfrm>
+            <a:off x="8366760" y="5285232"/>
+            <a:ext cx="3108960" cy="640080"/>
+          </a:xfrm>
+          <a:prstGeom prst="rect">
+            <a:avLst/>
+          </a:prstGeom>
+          <a:noFill/>
+          <a:ln/>
+        </p:spPr>
+        <p:txBody>
+          <a:bodyPr wrap="square" lIns="0" tIns="0" rIns="0" bIns="0" rtlCol="0" anchor="t"/>
+          <a:lstStyle/>
+          <a:p>
+            <a:pPr indent="0" marL="0">
+              <a:buNone/>
+            </a:pPr>
+            <a:r>
+              <a:rPr lang="en-US" sz="1050" dirty="0">
+                <a:solidFill>
+                  <a:srgbClr val="55555C"/>
+                </a:solidFill>
+              </a:rPr>
+              <a:t>the context the model has on this server</a:t>
+            </a:r>
+            <a:endParaRPr lang="en-US" sz="1050" dirty="0"/>
           </a:p>
         </p:txBody>
       </p:sp>
@@ -22608,7 +22916,7 @@
                   <a:srgbClr val="0A7F44"/>
                 </a:solidFill>
               </a:rPr>
-              <a:t>SELF-EVOLVING</a:t>
+              <a:t>SAFE BY DESIGN</a:t>
             </a:r>
             <a:endParaRPr lang="en-US" sz="1300" dirty="0"/>
           </a:p>
@@ -22646,7 +22954,7 @@
                   <a:srgbClr val="0A0A0B"/>
                 </a:solidFill>
               </a:rPr>
-              <a:t>The club makes itself better, safely</a:t>
+              <a:t>No agent holds all three at once</a:t>
             </a:r>
             <a:endParaRPr lang="en-US" sz="3200" dirty="0"/>
           </a:p>
@@ -22660,8 +22968,424 @@
         </p:nvSpPr>
         <p:spPr>
           <a:xfrm>
-            <a:off x="6400800" y="384048"/>
-            <a:ext cx="5212080" cy="329184"/>
+            <a:off x="822960" y="1737360"/>
+            <a:ext cx="2286000" cy="2286000"/>
+          </a:xfrm>
+          <a:prstGeom prst="ellipse">
+            <a:avLst/>
+          </a:prstGeom>
+          <a:solidFill>
+            <a:srgbClr val="FBEAE9">
+              <a:alpha val="65000"/>
+            </a:srgbClr>
+          </a:solidFill>
+          <a:ln w="25400">
+            <a:solidFill>
+              <a:srgbClr val="D1352B"/>
+            </a:solidFill>
+            <a:prstDash val="solid"/>
+          </a:ln>
+        </p:spPr>
+      </p:sp>
+      <p:sp>
+        <p:nvSpPr>
+          <p:cNvPr id="6" name="Shape 3"/>
+          <p:cNvSpPr/>
+          <p:nvPr/>
+        </p:nvSpPr>
+        <p:spPr>
+          <a:xfrm>
+            <a:off x="2606040" y="1737360"/>
+            <a:ext cx="2286000" cy="2286000"/>
+          </a:xfrm>
+          <a:prstGeom prst="ellipse">
+            <a:avLst/>
+          </a:prstGeom>
+          <a:solidFill>
+            <a:srgbClr val="E8F1FD">
+              <a:alpha val="65000"/>
+            </a:srgbClr>
+          </a:solidFill>
+          <a:ln w="25400">
+            <a:solidFill>
+              <a:srgbClr val="0064E0"/>
+            </a:solidFill>
+            <a:prstDash val="solid"/>
+          </a:ln>
+        </p:spPr>
+      </p:sp>
+      <p:sp>
+        <p:nvSpPr>
+          <p:cNvPr id="7" name="Shape 4"/>
+          <p:cNvSpPr/>
+          <p:nvPr/>
+        </p:nvSpPr>
+        <p:spPr>
+          <a:xfrm>
+            <a:off x="1719072" y="3246120"/>
+            <a:ext cx="2286000" cy="2286000"/>
+          </a:xfrm>
+          <a:prstGeom prst="ellipse">
+            <a:avLst/>
+          </a:prstGeom>
+          <a:solidFill>
+            <a:srgbClr val="E9F3EC">
+              <a:alpha val="65000"/>
+            </a:srgbClr>
+          </a:solidFill>
+          <a:ln w="25400">
+            <a:solidFill>
+              <a:srgbClr val="0A7F44"/>
+            </a:solidFill>
+            <a:prstDash val="solid"/>
+          </a:ln>
+        </p:spPr>
+      </p:sp>
+      <p:sp>
+        <p:nvSpPr>
+          <p:cNvPr id="8" name="Text 5"/>
+          <p:cNvSpPr txBox="1"/>
+          <p:nvPr/>
+        </p:nvSpPr>
+        <p:spPr>
+          <a:xfrm>
+            <a:off x="1051560" y="2331720"/>
+            <a:ext cx="1280160" cy="731520"/>
+          </a:xfrm>
+          <a:prstGeom prst="rect">
+            <a:avLst/>
+          </a:prstGeom>
+          <a:noFill/>
+          <a:ln/>
+        </p:spPr>
+        <p:txBody>
+          <a:bodyPr wrap="square" lIns="0" tIns="0" rIns="0" bIns="0" rtlCol="0" anchor="t"/>
+          <a:lstStyle/>
+          <a:p>
+            <a:pPr algn="ctr" indent="0" marL="0">
+              <a:buNone/>
+            </a:pPr>
+            <a:r>
+              <a:rPr lang="en-US" sz="1500" b="1" dirty="0">
+                <a:solidFill>
+                  <a:srgbClr val="0A0A0B"/>
+                </a:solidFill>
+              </a:rPr>
+              <a:t>Untrusted</a:t>
+            </a:r>
+            <a:endParaRPr lang="en-US" sz="1500" dirty="0"/>
+          </a:p>
+          <a:p>
+            <a:pPr algn="ctr" indent="0" marL="0">
+              <a:buNone/>
+            </a:pPr>
+            <a:r>
+              <a:rPr lang="en-US" sz="1500" b="1" dirty="0">
+                <a:solidFill>
+                  <a:srgbClr val="0A0A0B"/>
+                </a:solidFill>
+              </a:rPr>
+              <a:t>input</a:t>
+            </a:r>
+            <a:endParaRPr lang="en-US" sz="1500" dirty="0"/>
+          </a:p>
+        </p:txBody>
+      </p:sp>
+      <p:sp>
+        <p:nvSpPr>
+          <p:cNvPr id="9" name="Text 6"/>
+          <p:cNvSpPr txBox="1"/>
+          <p:nvPr/>
+        </p:nvSpPr>
+        <p:spPr>
+          <a:xfrm>
+            <a:off x="3520440" y="2331720"/>
+            <a:ext cx="1280160" cy="731520"/>
+          </a:xfrm>
+          <a:prstGeom prst="rect">
+            <a:avLst/>
+          </a:prstGeom>
+          <a:noFill/>
+          <a:ln/>
+        </p:spPr>
+        <p:txBody>
+          <a:bodyPr wrap="square" lIns="0" tIns="0" rIns="0" bIns="0" rtlCol="0" anchor="t"/>
+          <a:lstStyle/>
+          <a:p>
+            <a:pPr algn="ctr" indent="0" marL="0">
+              <a:buNone/>
+            </a:pPr>
+            <a:r>
+              <a:rPr lang="en-US" sz="1500" b="1" dirty="0">
+                <a:solidFill>
+                  <a:srgbClr val="0A0A0B"/>
+                </a:solidFill>
+              </a:rPr>
+              <a:t>Private</a:t>
+            </a:r>
+            <a:endParaRPr lang="en-US" sz="1500" dirty="0"/>
+          </a:p>
+          <a:p>
+            <a:pPr algn="ctr" indent="0" marL="0">
+              <a:buNone/>
+            </a:pPr>
+            <a:r>
+              <a:rPr lang="en-US" sz="1500" b="1" dirty="0">
+                <a:solidFill>
+                  <a:srgbClr val="0A0A0B"/>
+                </a:solidFill>
+              </a:rPr>
+              <a:t>data</a:t>
+            </a:r>
+            <a:endParaRPr lang="en-US" sz="1500" dirty="0"/>
+          </a:p>
+        </p:txBody>
+      </p:sp>
+      <p:sp>
+        <p:nvSpPr>
+          <p:cNvPr id="10" name="Text 7"/>
+          <p:cNvSpPr txBox="1"/>
+          <p:nvPr/>
+        </p:nvSpPr>
+        <p:spPr>
+          <a:xfrm>
+            <a:off x="2221992" y="4617720"/>
+            <a:ext cx="1280160" cy="731520"/>
+          </a:xfrm>
+          <a:prstGeom prst="rect">
+            <a:avLst/>
+          </a:prstGeom>
+          <a:noFill/>
+          <a:ln/>
+        </p:spPr>
+        <p:txBody>
+          <a:bodyPr wrap="square" lIns="0" tIns="0" rIns="0" bIns="0" rtlCol="0" anchor="t"/>
+          <a:lstStyle/>
+          <a:p>
+            <a:pPr algn="ctr" indent="0" marL="0">
+              <a:buNone/>
+            </a:pPr>
+            <a:r>
+              <a:rPr lang="en-US" sz="1500" b="1" dirty="0">
+                <a:solidFill>
+                  <a:srgbClr val="0A0A0B"/>
+                </a:solidFill>
+              </a:rPr>
+              <a:t>The power</a:t>
+            </a:r>
+            <a:endParaRPr lang="en-US" sz="1500" dirty="0"/>
+          </a:p>
+          <a:p>
+            <a:pPr algn="ctr" indent="0" marL="0">
+              <a:buNone/>
+            </a:pPr>
+            <a:r>
+              <a:rPr lang="en-US" sz="1500" b="1" dirty="0">
+                <a:solidFill>
+                  <a:srgbClr val="0A0A0B"/>
+                </a:solidFill>
+              </a:rPr>
+              <a:t>to act</a:t>
+            </a:r>
+            <a:endParaRPr lang="en-US" sz="1500" dirty="0"/>
+          </a:p>
+        </p:txBody>
+      </p:sp>
+      <p:sp>
+        <p:nvSpPr>
+          <p:cNvPr id="11" name="Shape 8"/>
+          <p:cNvSpPr/>
+          <p:nvPr/>
+        </p:nvSpPr>
+        <p:spPr>
+          <a:xfrm>
+            <a:off x="2542032" y="2971800"/>
+            <a:ext cx="658368" cy="658368"/>
+          </a:xfrm>
+          <a:prstGeom prst="ellipse">
+            <a:avLst/>
+          </a:prstGeom>
+          <a:solidFill>
+            <a:srgbClr val="FFFFFF"/>
+          </a:solidFill>
+          <a:ln w="38100">
+            <a:solidFill>
+              <a:srgbClr val="D1352B"/>
+            </a:solidFill>
+            <a:prstDash val="solid"/>
+          </a:ln>
+        </p:spPr>
+      </p:sp>
+      <p:sp>
+        <p:nvSpPr>
+          <p:cNvPr id="12" name="Text 9"/>
+          <p:cNvSpPr txBox="1"/>
+          <p:nvPr/>
+        </p:nvSpPr>
+        <p:spPr>
+          <a:xfrm>
+            <a:off x="2542032" y="2971800"/>
+            <a:ext cx="658368" cy="658368"/>
+          </a:xfrm>
+          <a:prstGeom prst="rect">
+            <a:avLst/>
+          </a:prstGeom>
+          <a:noFill/>
+          <a:ln/>
+        </p:spPr>
+        <p:txBody>
+          <a:bodyPr wrap="square" lIns="0" tIns="0" rIns="0" bIns="0" rtlCol="0" anchor="ctr"/>
+          <a:lstStyle/>
+          <a:p>
+            <a:pPr algn="ctr" indent="0" marL="0">
+              <a:buNone/>
+            </a:pPr>
+            <a:r>
+              <a:rPr lang="en-US" sz="3000" b="1" dirty="0">
+                <a:solidFill>
+                  <a:srgbClr val="D1352B"/>
+                </a:solidFill>
+              </a:rPr>
+              <a:t>×</a:t>
+            </a:r>
+            <a:endParaRPr lang="en-US" sz="3000" dirty="0"/>
+          </a:p>
+        </p:txBody>
+      </p:sp>
+      <p:sp>
+        <p:nvSpPr>
+          <p:cNvPr id="13" name="Text 10"/>
+          <p:cNvSpPr txBox="1"/>
+          <p:nvPr/>
+        </p:nvSpPr>
+        <p:spPr>
+          <a:xfrm>
+            <a:off x="548640" y="5715000"/>
+            <a:ext cx="4937760" cy="548640"/>
+          </a:xfrm>
+          <a:prstGeom prst="rect">
+            <a:avLst/>
+          </a:prstGeom>
+          <a:noFill/>
+          <a:ln/>
+        </p:spPr>
+        <p:txBody>
+          <a:bodyPr wrap="square" lIns="0" tIns="0" rIns="0" bIns="0" rtlCol="0" anchor="t"/>
+          <a:lstStyle/>
+          <a:p>
+            <a:pPr indent="0" marL="0">
+              <a:buNone/>
+            </a:pPr>
+            <a:r>
+              <a:rPr lang="en-US" sz="1200" dirty="0">
+                <a:solidFill>
+                  <a:srgbClr val="55555C"/>
+                </a:solidFill>
+              </a:rPr>
+              <a:t>Meta's Agents Rule of Two, on every agent: the planner, members' agents, the photo reader and the community loop.</a:t>
+            </a:r>
+            <a:endParaRPr lang="en-US" sz="1200" dirty="0"/>
+          </a:p>
+        </p:txBody>
+      </p:sp>
+      <p:sp>
+        <p:nvSpPr>
+          <p:cNvPr id="14" name="Text 11"/>
+          <p:cNvSpPr txBox="1"/>
+          <p:nvPr/>
+        </p:nvSpPr>
+        <p:spPr>
+          <a:xfrm>
+            <a:off x="6172200" y="1691640"/>
+            <a:ext cx="5486400" cy="411480"/>
+          </a:xfrm>
+          <a:prstGeom prst="rect">
+            <a:avLst/>
+          </a:prstGeom>
+          <a:noFill/>
+          <a:ln/>
+        </p:spPr>
+        <p:txBody>
+          <a:bodyPr wrap="square" lIns="0" tIns="0" rIns="0" bIns="0" rtlCol="0" anchor="t"/>
+          <a:lstStyle/>
+          <a:p>
+            <a:pPr indent="0" marL="0">
+              <a:buNone/>
+            </a:pPr>
+            <a:r>
+              <a:rPr lang="en-US" sz="2000" b="1" dirty="0">
+                <a:solidFill>
+                  <a:srgbClr val="0A0A0B"/>
+                </a:solidFill>
+              </a:rPr>
+              <a:t>A disclosure budget</a:t>
+            </a:r>
+            <a:endParaRPr lang="en-US" sz="2000" dirty="0"/>
+          </a:p>
+        </p:txBody>
+      </p:sp>
+      <p:sp>
+        <p:nvSpPr>
+          <p:cNvPr id="15" name="Text 12"/>
+          <p:cNvSpPr txBox="1"/>
+          <p:nvPr/>
+        </p:nvSpPr>
+        <p:spPr>
+          <a:xfrm>
+            <a:off x="6172200" y="2103120"/>
+            <a:ext cx="5394960" cy="548640"/>
+          </a:xfrm>
+          <a:prstGeom prst="rect">
+            <a:avLst/>
+          </a:prstGeom>
+          <a:noFill/>
+          <a:ln/>
+        </p:spPr>
+        <p:txBody>
+          <a:bodyPr wrap="square" lIns="0" tIns="0" rIns="0" bIns="0" rtlCol="0" anchor="t"/>
+          <a:lstStyle/>
+          <a:p>
+            <a:pPr indent="0" marL="0">
+              <a:buNone/>
+            </a:pPr>
+            <a:r>
+              <a:rPr lang="en-US" sz="1250" dirty="0">
+                <a:solidFill>
+                  <a:srgbClr val="55555C"/>
+                </a:solidFill>
+              </a:rPr>
+              <a:t>An agent that keeps asking for games can map out your week. How many of your weekdays it pins down exactly:</a:t>
+            </a:r>
+            <a:endParaRPr lang="en-US" sz="1250" dirty="0"/>
+          </a:p>
+        </p:txBody>
+      </p:sp>
+      <p:graphicFrame>
+        <p:nvGraphicFramePr>
+          <p:cNvPr id="16" name="Chart 0" descr=""/>
+          <p:cNvGraphicFramePr/>
+          <p:nvPr/>
+        </p:nvGraphicFramePr>
+        <p:xfrm>
+          <a:off x="6080760" y="2697480"/>
+          <a:ext cx="5577840" cy="1828800"/>
+        </p:xfrm>
+        <a:graphic xmlns:a="http://schemas.openxmlformats.org/drawingml/2006/main">
+          <a:graphicData uri="http://schemas.openxmlformats.org/drawingml/2006/chart">
+            <c:chart xmlns:c="http://schemas.openxmlformats.org/drawingml/2006/chart" r:id="rId1"/>
+          </a:graphicData>
+        </a:graphic>
+      </p:graphicFrame>
+      <p:sp>
+        <p:nvSpPr>
+          <p:cNvPr id="17" name="Shape 13"/>
+          <p:cNvSpPr/>
+          <p:nvPr/>
+        </p:nvSpPr>
+        <p:spPr>
+          <a:xfrm>
+            <a:off x="6172200" y="4553712"/>
+            <a:ext cx="3291840" cy="329184"/>
           </a:xfrm>
           <a:prstGeom prst="roundRect">
             <a:avLst>
@@ -22681,14 +23405,14 @@
       </p:sp>
       <p:sp>
         <p:nvSpPr>
-          <p:cNvPr id="6" name="Text 3"/>
-          <p:cNvSpPr txBox="1"/>
-          <p:nvPr/>
-        </p:nvSpPr>
-        <p:spPr>
-          <a:xfrm>
-            <a:off x="6400800" y="384048"/>
-            <a:ext cx="5212080" cy="329184"/>
+          <p:cNvPr id="18" name="Text 14"/>
+          <p:cNvSpPr txBox="1"/>
+          <p:nvPr/>
+        </p:nvSpPr>
+        <p:spPr>
+          <a:xfrm>
+            <a:off x="6172200" y="4553712"/>
+            <a:ext cx="3291840" cy="329184"/>
           </a:xfrm>
           <a:prstGeom prst="rect">
             <a:avLst/>
@@ -22709,7 +23433,7 @@
                   <a:srgbClr val="55555C"/>
                 </a:solidFill>
               </a:rPr>
-              <a:t>Simulated club (seed 7) · the pipeline, gates and rollback are real</a:t>
+              <a:t>Simulated prober · technical report 3.13</a:t>
             </a:r>
             <a:endParaRPr lang="en-US" sz="1050" dirty="0"/>
           </a:p>
@@ -22717,26 +23441,26 @@
       </p:sp>
       <p:sp>
         <p:nvSpPr>
-          <p:cNvPr id="7" name="Shape 4"/>
+          <p:cNvPr id="19" name="Shape 15"/>
           <p:cNvSpPr/>
           <p:nvPr/>
         </p:nvSpPr>
         <p:spPr>
           <a:xfrm>
-            <a:off x="548640" y="1600200"/>
-            <a:ext cx="2057400" cy="1188720"/>
+            <a:off x="6172200" y="5074920"/>
+            <a:ext cx="5440680" cy="1143000"/>
           </a:xfrm>
           <a:prstGeom prst="roundRect">
             <a:avLst>
-              <a:gd name="adj" fmla="val 9231"/>
+              <a:gd name="adj" fmla="val 9600"/>
             </a:avLst>
           </a:prstGeom>
           <a:solidFill>
-            <a:srgbClr val="FFFFFF"/>
+            <a:srgbClr val="F6F7F8"/>
           </a:solidFill>
           <a:ln w="12700">
             <a:solidFill>
-              <a:srgbClr val="DCDCE0"/>
+              <a:srgbClr val="F6F7F8"/>
             </a:solidFill>
             <a:prstDash val="solid"/>
           </a:ln>
@@ -22744,1867 +23468,73 @@
       </p:sp>
       <p:sp>
         <p:nvSpPr>
-          <p:cNvPr id="8" name="Text 5"/>
-          <p:cNvSpPr txBox="1"/>
-          <p:nvPr/>
-        </p:nvSpPr>
-        <p:spPr>
-          <a:xfrm>
-            <a:off x="694944" y="1691640"/>
-            <a:ext cx="1783080" cy="201168"/>
-          </a:xfrm>
-          <a:prstGeom prst="rect">
-            <a:avLst/>
-          </a:prstGeom>
-          <a:noFill/>
-          <a:ln/>
-        </p:spPr>
-        <p:txBody>
-          <a:bodyPr wrap="square" lIns="0" tIns="0" rIns="0" bIns="0" rtlCol="0" anchor="t"/>
-          <a:lstStyle/>
-          <a:p>
-            <a:pPr indent="0" marL="0">
-              <a:buNone/>
-            </a:pPr>
-            <a:r>
-              <a:rPr lang="en-US" sz="1000" b="1" dirty="0">
+          <p:cNvPr id="20" name="Text 16"/>
+          <p:cNvSpPr txBox="1"/>
+          <p:nvPr/>
+        </p:nvSpPr>
+        <p:spPr>
+          <a:xfrm>
+            <a:off x="6355080" y="5074920"/>
+            <a:ext cx="1737360" cy="1143000"/>
+          </a:xfrm>
+          <a:prstGeom prst="rect">
+            <a:avLst/>
+          </a:prstGeom>
+          <a:noFill/>
+          <a:ln/>
+        </p:spPr>
+        <p:txBody>
+          <a:bodyPr wrap="square" lIns="0" tIns="0" rIns="0" bIns="0" rtlCol="0" anchor="ctr"/>
+          <a:lstStyle/>
+          <a:p>
+            <a:pPr indent="0" marL="0">
+              <a:buNone/>
+            </a:pPr>
+            <a:r>
+              <a:rPr lang="en-US" sz="3000" b="1" dirty="0">
                 <a:solidFill>
                   <a:srgbClr val="0A7F44"/>
                 </a:solidFill>
               </a:rPr>
-              <a:t>1 · ASK</a:t>
-            </a:r>
-            <a:endParaRPr lang="en-US" sz="1000" dirty="0"/>
-          </a:p>
-        </p:txBody>
-      </p:sp>
-      <p:sp>
-        <p:nvSpPr>
-          <p:cNvPr id="9" name="Text 6"/>
-          <p:cNvSpPr txBox="1"/>
-          <p:nvPr/>
-        </p:nvSpPr>
-        <p:spPr>
-          <a:xfrm>
-            <a:off x="694944" y="1920240"/>
-            <a:ext cx="1810512" cy="292608"/>
-          </a:xfrm>
-          <a:prstGeom prst="rect">
-            <a:avLst/>
-          </a:prstGeom>
-          <a:noFill/>
-          <a:ln/>
-        </p:spPr>
-        <p:txBody>
-          <a:bodyPr wrap="square" lIns="0" tIns="0" rIns="0" bIns="0" rtlCol="0" anchor="t"/>
-          <a:lstStyle/>
-          <a:p>
-            <a:pPr indent="0" marL="0">
-              <a:buNone/>
-            </a:pPr>
-            <a:r>
-              <a:rPr lang="en-US" sz="1350" b="1" dirty="0">
+              <a:t>93 / 93</a:t>
+            </a:r>
+            <a:endParaRPr lang="en-US" sz="3000" dirty="0"/>
+          </a:p>
+        </p:txBody>
+      </p:sp>
+      <p:sp>
+        <p:nvSpPr>
+          <p:cNvPr id="21" name="Text 17"/>
+          <p:cNvSpPr txBox="1"/>
+          <p:nvPr/>
+        </p:nvSpPr>
+        <p:spPr>
+          <a:xfrm>
+            <a:off x="8092440" y="5074920"/>
+            <a:ext cx="3383280" cy="1143000"/>
+          </a:xfrm>
+          <a:prstGeom prst="rect">
+            <a:avLst/>
+          </a:prstGeom>
+          <a:noFill/>
+          <a:ln/>
+        </p:spPr>
+        <p:txBody>
+          <a:bodyPr wrap="square" lIns="0" tIns="0" rIns="0" bIns="0" rtlCol="0" anchor="ctr"/>
+          <a:lstStyle/>
+          <a:p>
+            <a:pPr indent="0" marL="0">
+              <a:buNone/>
+            </a:pPr>
+            <a:r>
+              <a:rPr lang="en-US" sz="1150" dirty="0">
                 <a:solidFill>
                   <a:srgbClr val="0A0A0B"/>
                 </a:solidFill>
               </a:rPr>
-              <a:t>Members' ideas</a:t>
-            </a:r>
-            <a:endParaRPr lang="en-US" sz="1350" dirty="0"/>
-          </a:p>
-        </p:txBody>
-      </p:sp>
-      <p:sp>
-        <p:nvSpPr>
-          <p:cNvPr id="10" name="Text 7"/>
-          <p:cNvSpPr txBox="1"/>
-          <p:nvPr/>
-        </p:nvSpPr>
-        <p:spPr>
-          <a:xfrm>
-            <a:off x="694944" y="2240280"/>
-            <a:ext cx="1810512" cy="502920"/>
-          </a:xfrm>
-          <a:prstGeom prst="rect">
-            <a:avLst/>
-          </a:prstGeom>
-          <a:noFill/>
-          <a:ln/>
-        </p:spPr>
-        <p:txBody>
-          <a:bodyPr wrap="square" lIns="0" tIns="0" rIns="0" bIns="0" rtlCol="0" anchor="t"/>
-          <a:lstStyle/>
-          <a:p>
-            <a:pPr indent="0" marL="0">
-              <a:buNone/>
-            </a:pPr>
-            <a:r>
-              <a:rPr lang="en-US" sz="1000" dirty="0">
-                <a:solidFill>
-                  <a:srgbClr val="55555C"/>
-                </a:solidFill>
-              </a:rPr>
-              <a:t>"/idea" in Messenger, or thumbs</a:t>
-            </a:r>
-            <a:endParaRPr lang="en-US" sz="1000" dirty="0"/>
-          </a:p>
-        </p:txBody>
-      </p:sp>
-      <p:sp>
-        <p:nvSpPr>
-          <p:cNvPr id="11" name="Shape 8"/>
-          <p:cNvSpPr/>
-          <p:nvPr/>
-        </p:nvSpPr>
-        <p:spPr>
-          <a:xfrm>
-            <a:off x="2624328" y="2194560"/>
-            <a:ext cx="146304" cy="0"/>
-          </a:xfrm>
-          <a:prstGeom prst="line">
-            <a:avLst/>
-          </a:prstGeom>
-          <a:noFill/>
-          <a:ln w="22225">
-            <a:solidFill>
-              <a:srgbClr val="8A8A92"/>
-            </a:solidFill>
-            <a:prstDash val="solid"/>
-            <a:tailEnd type="triangle"/>
-          </a:ln>
-        </p:spPr>
-      </p:sp>
-      <p:sp>
-        <p:nvSpPr>
-          <p:cNvPr id="12" name="Shape 9"/>
-          <p:cNvSpPr/>
-          <p:nvPr/>
-        </p:nvSpPr>
-        <p:spPr>
-          <a:xfrm>
-            <a:off x="2788920" y="1600200"/>
-            <a:ext cx="2057400" cy="1188720"/>
-          </a:xfrm>
-          <a:prstGeom prst="roundRect">
-            <a:avLst>
-              <a:gd name="adj" fmla="val 9231"/>
-            </a:avLst>
-          </a:prstGeom>
-          <a:solidFill>
-            <a:srgbClr val="FFFFFF"/>
-          </a:solidFill>
-          <a:ln w="12700">
-            <a:solidFill>
-              <a:srgbClr val="DCDCE0"/>
-            </a:solidFill>
-            <a:prstDash val="solid"/>
-          </a:ln>
-        </p:spPr>
-      </p:sp>
-      <p:sp>
-        <p:nvSpPr>
-          <p:cNvPr id="13" name="Text 10"/>
-          <p:cNvSpPr txBox="1"/>
-          <p:nvPr/>
-        </p:nvSpPr>
-        <p:spPr>
-          <a:xfrm>
-            <a:off x="2935224" y="1691640"/>
-            <a:ext cx="1783080" cy="201168"/>
-          </a:xfrm>
-          <a:prstGeom prst="rect">
-            <a:avLst/>
-          </a:prstGeom>
-          <a:noFill/>
-          <a:ln/>
-        </p:spPr>
-        <p:txBody>
-          <a:bodyPr wrap="square" lIns="0" tIns="0" rIns="0" bIns="0" rtlCol="0" anchor="t"/>
-          <a:lstStyle/>
-          <a:p>
-            <a:pPr indent="0" marL="0">
-              <a:buNone/>
-            </a:pPr>
-            <a:r>
-              <a:rPr lang="en-US" sz="1000" b="1" dirty="0">
-                <a:solidFill>
-                  <a:srgbClr val="0A7F44"/>
-                </a:solidFill>
-              </a:rPr>
-              <a:t>2 · GROUP</a:t>
-            </a:r>
-            <a:endParaRPr lang="en-US" sz="1000" dirty="0"/>
-          </a:p>
-        </p:txBody>
-      </p:sp>
-      <p:sp>
-        <p:nvSpPr>
-          <p:cNvPr id="14" name="Text 11"/>
-          <p:cNvSpPr txBox="1"/>
-          <p:nvPr/>
-        </p:nvSpPr>
-        <p:spPr>
-          <a:xfrm>
-            <a:off x="2935224" y="1920240"/>
-            <a:ext cx="1810512" cy="292608"/>
-          </a:xfrm>
-          <a:prstGeom prst="rect">
-            <a:avLst/>
-          </a:prstGeom>
-          <a:noFill/>
-          <a:ln/>
-        </p:spPr>
-        <p:txBody>
-          <a:bodyPr wrap="square" lIns="0" tIns="0" rIns="0" bIns="0" rtlCol="0" anchor="t"/>
-          <a:lstStyle/>
-          <a:p>
-            <a:pPr indent="0" marL="0">
-              <a:buNone/>
-            </a:pPr>
-            <a:r>
-              <a:rPr lang="en-US" sz="1350" b="1" dirty="0">
-                <a:solidFill>
-                  <a:srgbClr val="0A0A0B"/>
-                </a:solidFill>
-              </a:rPr>
-              <a:t>Meta's DRAMA</a:t>
-            </a:r>
-            <a:endParaRPr lang="en-US" sz="1350" dirty="0"/>
-          </a:p>
-        </p:txBody>
-      </p:sp>
-      <p:sp>
-        <p:nvSpPr>
-          <p:cNvPr id="15" name="Text 12"/>
-          <p:cNvSpPr txBox="1"/>
-          <p:nvPr/>
-        </p:nvSpPr>
-        <p:spPr>
-          <a:xfrm>
-            <a:off x="2935224" y="2240280"/>
-            <a:ext cx="1810512" cy="502920"/>
-          </a:xfrm>
-          <a:prstGeom prst="rect">
-            <a:avLst/>
-          </a:prstGeom>
-          <a:noFill/>
-          <a:ln/>
-        </p:spPr>
-        <p:txBody>
-          <a:bodyPr wrap="square" lIns="0" tIns="0" rIns="0" bIns="0" rtlCol="0" anchor="t"/>
-          <a:lstStyle/>
-          <a:p>
-            <a:pPr indent="0" marL="0">
-              <a:buNone/>
-            </a:pPr>
-            <a:r>
-              <a:rPr lang="en-US" sz="1000" dirty="0">
-                <a:solidFill>
-                  <a:srgbClr val="55555C"/>
-                </a:solidFill>
-              </a:rPr>
-              <a:t>By meaning; shows at 5 members</a:t>
-            </a:r>
-            <a:endParaRPr lang="en-US" sz="1000" dirty="0"/>
-          </a:p>
-        </p:txBody>
-      </p:sp>
-      <p:sp>
-        <p:nvSpPr>
-          <p:cNvPr id="16" name="Shape 13"/>
-          <p:cNvSpPr/>
-          <p:nvPr/>
-        </p:nvSpPr>
-        <p:spPr>
-          <a:xfrm>
-            <a:off x="4864608" y="2194560"/>
-            <a:ext cx="146304" cy="0"/>
-          </a:xfrm>
-          <a:prstGeom prst="line">
-            <a:avLst/>
-          </a:prstGeom>
-          <a:noFill/>
-          <a:ln w="22225">
-            <a:solidFill>
-              <a:srgbClr val="8A8A92"/>
-            </a:solidFill>
-            <a:prstDash val="solid"/>
-            <a:tailEnd type="triangle"/>
-          </a:ln>
-        </p:spPr>
-      </p:sp>
-      <p:sp>
-        <p:nvSpPr>
-          <p:cNvPr id="17" name="Shape 14"/>
-          <p:cNvSpPr/>
-          <p:nvPr/>
-        </p:nvSpPr>
-        <p:spPr>
-          <a:xfrm>
-            <a:off x="5029200" y="1600200"/>
-            <a:ext cx="2057400" cy="1188720"/>
-          </a:xfrm>
-          <a:prstGeom prst="roundRect">
-            <a:avLst>
-              <a:gd name="adj" fmla="val 9231"/>
-            </a:avLst>
-          </a:prstGeom>
-          <a:solidFill>
-            <a:srgbClr val="FFFFFF"/>
-          </a:solidFill>
-          <a:ln w="12700">
-            <a:solidFill>
-              <a:srgbClr val="DCDCE0"/>
-            </a:solidFill>
-            <a:prstDash val="solid"/>
-          </a:ln>
-        </p:spPr>
-      </p:sp>
-      <p:sp>
-        <p:nvSpPr>
-          <p:cNvPr id="18" name="Text 15"/>
-          <p:cNvSpPr txBox="1"/>
-          <p:nvPr/>
-        </p:nvSpPr>
-        <p:spPr>
-          <a:xfrm>
-            <a:off x="5175504" y="1691640"/>
-            <a:ext cx="1783080" cy="201168"/>
-          </a:xfrm>
-          <a:prstGeom prst="rect">
-            <a:avLst/>
-          </a:prstGeom>
-          <a:noFill/>
-          <a:ln/>
-        </p:spPr>
-        <p:txBody>
-          <a:bodyPr wrap="square" lIns="0" tIns="0" rIns="0" bIns="0" rtlCol="0" anchor="t"/>
-          <a:lstStyle/>
-          <a:p>
-            <a:pPr indent="0" marL="0">
-              <a:buNone/>
-            </a:pPr>
-            <a:r>
-              <a:rPr lang="en-US" sz="1000" b="1" dirty="0">
-                <a:solidFill>
-                  <a:srgbClr val="0A7F44"/>
-                </a:solidFill>
-              </a:rPr>
-              <a:t>3 · VOTE</a:t>
-            </a:r>
-            <a:endParaRPr lang="en-US" sz="1000" dirty="0"/>
-          </a:p>
-        </p:txBody>
-      </p:sp>
-      <p:sp>
-        <p:nvSpPr>
-          <p:cNvPr id="19" name="Text 16"/>
-          <p:cNvSpPr txBox="1"/>
-          <p:nvPr/>
-        </p:nvSpPr>
-        <p:spPr>
-          <a:xfrm>
-            <a:off x="5175504" y="1920240"/>
-            <a:ext cx="1810512" cy="292608"/>
-          </a:xfrm>
-          <a:prstGeom prst="rect">
-            <a:avLst/>
-          </a:prstGeom>
-          <a:noFill/>
-          <a:ln/>
-        </p:spPr>
-        <p:txBody>
-          <a:bodyPr wrap="square" lIns="0" tIns="0" rIns="0" bIns="0" rtlCol="0" anchor="t"/>
-          <a:lstStyle/>
-          <a:p>
-            <a:pPr indent="0" marL="0">
-              <a:buNone/>
-            </a:pPr>
-            <a:r>
-              <a:rPr lang="en-US" sz="1350" b="1" dirty="0">
-                <a:solidFill>
-                  <a:srgbClr val="0A0A0B"/>
-                </a:solidFill>
-              </a:rPr>
-              <a:t>Quadratic votes</a:t>
-            </a:r>
-            <a:endParaRPr lang="en-US" sz="1350" dirty="0"/>
-          </a:p>
-        </p:txBody>
-      </p:sp>
-      <p:sp>
-        <p:nvSpPr>
-          <p:cNvPr id="20" name="Text 17"/>
-          <p:cNvSpPr txBox="1"/>
-          <p:nvPr/>
-        </p:nvSpPr>
-        <p:spPr>
-          <a:xfrm>
-            <a:off x="5175504" y="2240280"/>
-            <a:ext cx="1810512" cy="502920"/>
-          </a:xfrm>
-          <a:prstGeom prst="rect">
-            <a:avLst/>
-          </a:prstGeom>
-          <a:noFill/>
-          <a:ln/>
-        </p:spPr>
-        <p:txBody>
-          <a:bodyPr wrap="square" lIns="0" tIns="0" rIns="0" bIns="0" rtlCol="0" anchor="t"/>
-          <a:lstStyle/>
-          <a:p>
-            <a:pPr indent="0" marL="0">
-              <a:buNone/>
-            </a:pPr>
-            <a:r>
-              <a:rPr lang="en-US" sz="1000" dirty="0">
-                <a:solidFill>
-                  <a:srgbClr val="55555C"/>
-                </a:solidFill>
-              </a:rPr>
-              <a:t>9 credits a month; n votes cost n²</a:t>
-            </a:r>
-            <a:endParaRPr lang="en-US" sz="1000" dirty="0"/>
-          </a:p>
-        </p:txBody>
-      </p:sp>
-      <p:sp>
-        <p:nvSpPr>
-          <p:cNvPr id="21" name="Shape 18"/>
-          <p:cNvSpPr/>
-          <p:nvPr/>
-        </p:nvSpPr>
-        <p:spPr>
-          <a:xfrm>
-            <a:off x="7104888" y="2194560"/>
-            <a:ext cx="146304" cy="0"/>
-          </a:xfrm>
-          <a:prstGeom prst="line">
-            <a:avLst/>
-          </a:prstGeom>
-          <a:noFill/>
-          <a:ln w="22225">
-            <a:solidFill>
-              <a:srgbClr val="8A8A92"/>
-            </a:solidFill>
-            <a:prstDash val="solid"/>
-            <a:tailEnd type="triangle"/>
-          </a:ln>
-        </p:spPr>
-      </p:sp>
-      <p:sp>
-        <p:nvSpPr>
-          <p:cNvPr id="22" name="Shape 19"/>
-          <p:cNvSpPr/>
-          <p:nvPr/>
-        </p:nvSpPr>
-        <p:spPr>
-          <a:xfrm>
-            <a:off x="7269480" y="1600200"/>
-            <a:ext cx="2057400" cy="1188720"/>
-          </a:xfrm>
-          <a:prstGeom prst="roundRect">
-            <a:avLst>
-              <a:gd name="adj" fmla="val 9231"/>
-            </a:avLst>
-          </a:prstGeom>
-          <a:solidFill>
-            <a:srgbClr val="FFFFFF"/>
-          </a:solidFill>
-          <a:ln w="12700">
-            <a:solidFill>
-              <a:srgbClr val="DCDCE0"/>
-            </a:solidFill>
-            <a:prstDash val="solid"/>
-          </a:ln>
-        </p:spPr>
-      </p:sp>
-      <p:sp>
-        <p:nvSpPr>
-          <p:cNvPr id="23" name="Text 20"/>
-          <p:cNvSpPr txBox="1"/>
-          <p:nvPr/>
-        </p:nvSpPr>
-        <p:spPr>
-          <a:xfrm>
-            <a:off x="7415784" y="1691640"/>
-            <a:ext cx="1783080" cy="201168"/>
-          </a:xfrm>
-          <a:prstGeom prst="rect">
-            <a:avLst/>
-          </a:prstGeom>
-          <a:noFill/>
-          <a:ln/>
-        </p:spPr>
-        <p:txBody>
-          <a:bodyPr wrap="square" lIns="0" tIns="0" rIns="0" bIns="0" rtlCol="0" anchor="t"/>
-          <a:lstStyle/>
-          <a:p>
-            <a:pPr indent="0" marL="0">
-              <a:buNone/>
-            </a:pPr>
-            <a:r>
-              <a:rPr lang="en-US" sz="1000" b="1" dirty="0">
-                <a:solidFill>
-                  <a:srgbClr val="0A7F44"/>
-                </a:solidFill>
-              </a:rPr>
-              <a:t>4 · SPEC</a:t>
-            </a:r>
-            <a:endParaRPr lang="en-US" sz="1000" dirty="0"/>
-          </a:p>
-        </p:txBody>
-      </p:sp>
-      <p:sp>
-        <p:nvSpPr>
-          <p:cNvPr id="24" name="Text 21"/>
-          <p:cNvSpPr txBox="1"/>
-          <p:nvPr/>
-        </p:nvSpPr>
-        <p:spPr>
-          <a:xfrm>
-            <a:off x="7415784" y="1920240"/>
-            <a:ext cx="1810512" cy="292608"/>
-          </a:xfrm>
-          <a:prstGeom prst="rect">
-            <a:avLst/>
-          </a:prstGeom>
-          <a:noFill/>
-          <a:ln/>
-        </p:spPr>
-        <p:txBody>
-          <a:bodyPr wrap="square" lIns="0" tIns="0" rIns="0" bIns="0" rtlCol="0" anchor="t"/>
-          <a:lstStyle/>
-          <a:p>
-            <a:pPr indent="0" marL="0">
-              <a:buNone/>
-            </a:pPr>
-            <a:r>
-              <a:rPr lang="en-US" sz="1350" b="1" dirty="0">
-                <a:solidFill>
-                  <a:srgbClr val="0A0A0B"/>
-                </a:solidFill>
-              </a:rPr>
-              <a:t>Muse Glimmer drafts</a:t>
-            </a:r>
-            <a:endParaRPr lang="en-US" sz="1350" dirty="0"/>
-          </a:p>
-        </p:txBody>
-      </p:sp>
-      <p:sp>
-        <p:nvSpPr>
-          <p:cNvPr id="25" name="Text 22"/>
-          <p:cNvSpPr txBox="1"/>
-          <p:nvPr/>
-        </p:nvSpPr>
-        <p:spPr>
-          <a:xfrm>
-            <a:off x="7415784" y="2240280"/>
-            <a:ext cx="1810512" cy="502920"/>
-          </a:xfrm>
-          <a:prstGeom prst="rect">
-            <a:avLst/>
-          </a:prstGeom>
-          <a:noFill/>
-          <a:ln/>
-        </p:spPr>
-        <p:txBody>
-          <a:bodyPr wrap="square" lIns="0" tIns="0" rIns="0" bIns="0" rtlCol="0" anchor="t"/>
-          <a:lstStyle/>
-          <a:p>
-            <a:pPr indent="0" marL="0">
-              <a:buNone/>
-            </a:pPr>
-            <a:r>
-              <a:rPr lang="en-US" sz="1000" dirty="0">
-                <a:solidFill>
-                  <a:srgbClr val="55555C"/>
-                </a:solidFill>
-              </a:rPr>
-              <a:t>A person approves it</a:t>
-            </a:r>
-            <a:endParaRPr lang="en-US" sz="1000" dirty="0"/>
-          </a:p>
-        </p:txBody>
-      </p:sp>
-      <p:sp>
-        <p:nvSpPr>
-          <p:cNvPr id="26" name="Shape 23"/>
-          <p:cNvSpPr/>
-          <p:nvPr/>
-        </p:nvSpPr>
-        <p:spPr>
-          <a:xfrm>
-            <a:off x="9345168" y="2194560"/>
-            <a:ext cx="146304" cy="0"/>
-          </a:xfrm>
-          <a:prstGeom prst="line">
-            <a:avLst/>
-          </a:prstGeom>
-          <a:noFill/>
-          <a:ln w="22225">
-            <a:solidFill>
-              <a:srgbClr val="8A8A92"/>
-            </a:solidFill>
-            <a:prstDash val="solid"/>
-            <a:tailEnd type="triangle"/>
-          </a:ln>
-        </p:spPr>
-      </p:sp>
-      <p:sp>
-        <p:nvSpPr>
-          <p:cNvPr id="27" name="Shape 24"/>
-          <p:cNvSpPr/>
-          <p:nvPr/>
-        </p:nvSpPr>
-        <p:spPr>
-          <a:xfrm>
-            <a:off x="9509760" y="1600200"/>
-            <a:ext cx="2057400" cy="1188720"/>
-          </a:xfrm>
-          <a:prstGeom prst="roundRect">
-            <a:avLst>
-              <a:gd name="adj" fmla="val 9231"/>
-            </a:avLst>
-          </a:prstGeom>
-          <a:solidFill>
-            <a:srgbClr val="FFFFFF"/>
-          </a:solidFill>
-          <a:ln w="12700">
-            <a:solidFill>
-              <a:srgbClr val="DCDCE0"/>
-            </a:solidFill>
-            <a:prstDash val="solid"/>
-          </a:ln>
-        </p:spPr>
-      </p:sp>
-      <p:sp>
-        <p:nvSpPr>
-          <p:cNvPr id="28" name="Text 25"/>
-          <p:cNvSpPr txBox="1"/>
-          <p:nvPr/>
-        </p:nvSpPr>
-        <p:spPr>
-          <a:xfrm>
-            <a:off x="9656064" y="1691640"/>
-            <a:ext cx="1783080" cy="201168"/>
-          </a:xfrm>
-          <a:prstGeom prst="rect">
-            <a:avLst/>
-          </a:prstGeom>
-          <a:noFill/>
-          <a:ln/>
-        </p:spPr>
-        <p:txBody>
-          <a:bodyPr wrap="square" lIns="0" tIns="0" rIns="0" bIns="0" rtlCol="0" anchor="t"/>
-          <a:lstStyle/>
-          <a:p>
-            <a:pPr indent="0" marL="0">
-              <a:buNone/>
-            </a:pPr>
-            <a:r>
-              <a:rPr lang="en-US" sz="1000" b="1" dirty="0">
-                <a:solidFill>
-                  <a:srgbClr val="0A7F44"/>
-                </a:solidFill>
-              </a:rPr>
-              <a:t>5 · BUILD</a:t>
-            </a:r>
-            <a:endParaRPr lang="en-US" sz="1000" dirty="0"/>
-          </a:p>
-        </p:txBody>
-      </p:sp>
-      <p:sp>
-        <p:nvSpPr>
-          <p:cNvPr id="29" name="Text 26"/>
-          <p:cNvSpPr txBox="1"/>
-          <p:nvPr/>
-        </p:nvSpPr>
-        <p:spPr>
-          <a:xfrm>
-            <a:off x="9656064" y="1920240"/>
-            <a:ext cx="1810512" cy="292608"/>
-          </a:xfrm>
-          <a:prstGeom prst="rect">
-            <a:avLst/>
-          </a:prstGeom>
-          <a:noFill/>
-          <a:ln/>
-        </p:spPr>
-        <p:txBody>
-          <a:bodyPr wrap="square" lIns="0" tIns="0" rIns="0" bIns="0" rtlCol="0" anchor="t"/>
-          <a:lstStyle/>
-          <a:p>
-            <a:pPr indent="0" marL="0">
-              <a:buNone/>
-            </a:pPr>
-            <a:r>
-              <a:rPr lang="en-US" sz="1350" b="1" dirty="0">
-                <a:solidFill>
-                  <a:srgbClr val="0A0A0B"/>
-                </a:solidFill>
-              </a:rPr>
-              <a:t>A coding agent</a:t>
-            </a:r>
-            <a:endParaRPr lang="en-US" sz="1350" dirty="0"/>
-          </a:p>
-        </p:txBody>
-      </p:sp>
-      <p:sp>
-        <p:nvSpPr>
-          <p:cNvPr id="30" name="Text 27"/>
-          <p:cNvSpPr txBox="1"/>
-          <p:nvPr/>
-        </p:nvSpPr>
-        <p:spPr>
-          <a:xfrm>
-            <a:off x="9656064" y="2240280"/>
-            <a:ext cx="1810512" cy="502920"/>
-          </a:xfrm>
-          <a:prstGeom prst="rect">
-            <a:avLst/>
-          </a:prstGeom>
-          <a:noFill/>
-          <a:ln/>
-        </p:spPr>
-        <p:txBody>
-          <a:bodyPr wrap="square" lIns="0" tIns="0" rIns="0" bIns="0" rtlCol="0" anchor="t"/>
-          <a:lstStyle/>
-          <a:p>
-            <a:pPr indent="0" marL="0">
-              <a:buNone/>
-            </a:pPr>
-            <a:r>
-              <a:rPr lang="en-US" sz="1000" dirty="0">
-                <a:solidFill>
-                  <a:srgbClr val="55555C"/>
-                </a:solidFill>
-              </a:rPr>
-              <a:t>Own branch; never reads community text</a:t>
-            </a:r>
-            <a:endParaRPr lang="en-US" sz="1000" dirty="0"/>
-          </a:p>
-        </p:txBody>
-      </p:sp>
-      <p:sp>
-        <p:nvSpPr>
-          <p:cNvPr id="31" name="Shape 28"/>
-          <p:cNvSpPr/>
-          <p:nvPr/>
-        </p:nvSpPr>
-        <p:spPr>
-          <a:xfrm>
-            <a:off x="548640" y="2926080"/>
-            <a:ext cx="6949440" cy="1371600"/>
-          </a:xfrm>
-          <a:prstGeom prst="roundRect">
-            <a:avLst>
-              <a:gd name="adj" fmla="val 8000"/>
-            </a:avLst>
-          </a:prstGeom>
-          <a:solidFill>
-            <a:srgbClr val="E9F3EC"/>
-          </a:solidFill>
-          <a:ln w="12700">
-            <a:solidFill>
-              <a:srgbClr val="E9F3EC"/>
-            </a:solidFill>
-            <a:prstDash val="solid"/>
-          </a:ln>
-        </p:spPr>
-      </p:sp>
-      <p:sp>
-        <p:nvSpPr>
-          <p:cNvPr id="32" name="Text 29"/>
-          <p:cNvSpPr txBox="1"/>
-          <p:nvPr/>
-        </p:nvSpPr>
-        <p:spPr>
-          <a:xfrm>
-            <a:off x="749808" y="3017520"/>
-            <a:ext cx="6400800" cy="256032"/>
-          </a:xfrm>
-          <a:prstGeom prst="rect">
-            <a:avLst/>
-          </a:prstGeom>
-          <a:noFill/>
-          <a:ln/>
-        </p:spPr>
-        <p:txBody>
-          <a:bodyPr wrap="square" lIns="0" tIns="0" rIns="0" bIns="0" rtlCol="0" anchor="t"/>
-          <a:lstStyle/>
-          <a:p>
-            <a:pPr indent="0" marL="0">
-              <a:buNone/>
-            </a:pPr>
-            <a:r>
-              <a:rPr lang="en-US" sz="1200" b="1" dirty="0">
-                <a:solidFill>
-                  <a:srgbClr val="0A7F44"/>
-                </a:solidFill>
-              </a:rPr>
-              <a:t>6 · NINE GATES · stops at the first failure</a:t>
-            </a:r>
-            <a:endParaRPr lang="en-US" sz="1200" dirty="0"/>
-          </a:p>
-        </p:txBody>
-      </p:sp>
-      <p:sp>
-        <p:nvSpPr>
-          <p:cNvPr id="33" name="Shape 30"/>
-          <p:cNvSpPr/>
-          <p:nvPr/>
-        </p:nvSpPr>
-        <p:spPr>
-          <a:xfrm>
-            <a:off x="749808" y="3383280"/>
-            <a:ext cx="1298448" cy="310896"/>
-          </a:xfrm>
-          <a:prstGeom prst="roundRect">
-            <a:avLst>
-              <a:gd name="adj" fmla="val 50000"/>
-            </a:avLst>
-          </a:prstGeom>
-          <a:solidFill>
-            <a:srgbClr val="FFFFFF"/>
-          </a:solidFill>
-          <a:ln w="12700">
-            <a:solidFill>
-              <a:srgbClr val="FFFFFF"/>
-            </a:solidFill>
-            <a:prstDash val="solid"/>
-          </a:ln>
-        </p:spPr>
-      </p:sp>
-      <p:sp>
-        <p:nvSpPr>
-          <p:cNvPr id="34" name="Text 31"/>
-          <p:cNvSpPr txBox="1"/>
-          <p:nvPr/>
-        </p:nvSpPr>
-        <p:spPr>
-          <a:xfrm>
-            <a:off x="749808" y="3383280"/>
-            <a:ext cx="1298448" cy="310896"/>
-          </a:xfrm>
-          <a:prstGeom prst="rect">
-            <a:avLst/>
-          </a:prstGeom>
-          <a:noFill/>
-          <a:ln/>
-        </p:spPr>
-        <p:txBody>
-          <a:bodyPr wrap="square" lIns="0" tIns="0" rIns="0" bIns="0" rtlCol="0" anchor="ctr"/>
-          <a:lstStyle/>
-          <a:p>
-            <a:pPr algn="ctr" indent="0" marL="0">
-              <a:buNone/>
-            </a:pPr>
-            <a:r>
-              <a:rPr lang="en-US" sz="950" b="1" dirty="0">
-                <a:solidFill>
-                  <a:srgbClr val="0A7F44"/>
-                </a:solidFill>
-              </a:rPr>
-              <a:t>policy</a:t>
-            </a:r>
-            <a:endParaRPr lang="en-US" sz="950" dirty="0"/>
-          </a:p>
-        </p:txBody>
-      </p:sp>
-      <p:sp>
-        <p:nvSpPr>
-          <p:cNvPr id="35" name="Shape 32"/>
-          <p:cNvSpPr/>
-          <p:nvPr/>
-        </p:nvSpPr>
-        <p:spPr>
-          <a:xfrm>
-            <a:off x="2093976" y="3383280"/>
-            <a:ext cx="1298448" cy="310896"/>
-          </a:xfrm>
-          <a:prstGeom prst="roundRect">
-            <a:avLst>
-              <a:gd name="adj" fmla="val 50000"/>
-            </a:avLst>
-          </a:prstGeom>
-          <a:solidFill>
-            <a:srgbClr val="FFFFFF"/>
-          </a:solidFill>
-          <a:ln w="12700">
-            <a:solidFill>
-              <a:srgbClr val="FFFFFF"/>
-            </a:solidFill>
-            <a:prstDash val="solid"/>
-          </a:ln>
-        </p:spPr>
-      </p:sp>
-      <p:sp>
-        <p:nvSpPr>
-          <p:cNvPr id="36" name="Text 33"/>
-          <p:cNvSpPr txBox="1"/>
-          <p:nvPr/>
-        </p:nvSpPr>
-        <p:spPr>
-          <a:xfrm>
-            <a:off x="2093976" y="3383280"/>
-            <a:ext cx="1298448" cy="310896"/>
-          </a:xfrm>
-          <a:prstGeom prst="rect">
-            <a:avLst/>
-          </a:prstGeom>
-          <a:noFill/>
-          <a:ln/>
-        </p:spPr>
-        <p:txBody>
-          <a:bodyPr wrap="square" lIns="0" tIns="0" rIns="0" bIns="0" rtlCol="0" anchor="ctr"/>
-          <a:lstStyle/>
-          <a:p>
-            <a:pPr algn="ctr" indent="0" marL="0">
-              <a:buNone/>
-            </a:pPr>
-            <a:r>
-              <a:rPr lang="en-US" sz="950" b="1" dirty="0">
-                <a:solidFill>
-                  <a:srgbClr val="0A7F44"/>
-                </a:solidFill>
-              </a:rPr>
-              <a:t>code scan</a:t>
-            </a:r>
-            <a:endParaRPr lang="en-US" sz="950" dirty="0"/>
-          </a:p>
-        </p:txBody>
-      </p:sp>
-      <p:sp>
-        <p:nvSpPr>
-          <p:cNvPr id="37" name="Shape 34"/>
-          <p:cNvSpPr/>
-          <p:nvPr/>
-        </p:nvSpPr>
-        <p:spPr>
-          <a:xfrm>
-            <a:off x="3438144" y="3383280"/>
-            <a:ext cx="1298448" cy="310896"/>
-          </a:xfrm>
-          <a:prstGeom prst="roundRect">
-            <a:avLst>
-              <a:gd name="adj" fmla="val 50000"/>
-            </a:avLst>
-          </a:prstGeom>
-          <a:solidFill>
-            <a:srgbClr val="FFFFFF"/>
-          </a:solidFill>
-          <a:ln w="12700">
-            <a:solidFill>
-              <a:srgbClr val="FFFFFF"/>
-            </a:solidFill>
-            <a:prstDash val="solid"/>
-          </a:ln>
-        </p:spPr>
-      </p:sp>
-      <p:sp>
-        <p:nvSpPr>
-          <p:cNvPr id="38" name="Text 35"/>
-          <p:cNvSpPr txBox="1"/>
-          <p:nvPr/>
-        </p:nvSpPr>
-        <p:spPr>
-          <a:xfrm>
-            <a:off x="3438144" y="3383280"/>
-            <a:ext cx="1298448" cy="310896"/>
-          </a:xfrm>
-          <a:prstGeom prst="rect">
-            <a:avLst/>
-          </a:prstGeom>
-          <a:noFill/>
-          <a:ln/>
-        </p:spPr>
-        <p:txBody>
-          <a:bodyPr wrap="square" lIns="0" tIns="0" rIns="0" bIns="0" rtlCol="0" anchor="ctr"/>
-          <a:lstStyle/>
-          <a:p>
-            <a:pPr algn="ctr" indent="0" marL="0">
-              <a:buNone/>
-            </a:pPr>
-            <a:r>
-              <a:rPr lang="en-US" sz="950" b="1" dirty="0">
-                <a:solidFill>
-                  <a:srgbClr val="0A7F44"/>
-                </a:solidFill>
-              </a:rPr>
-              <a:t>unit tests</a:t>
-            </a:r>
-            <a:endParaRPr lang="en-US" sz="950" dirty="0"/>
-          </a:p>
-        </p:txBody>
-      </p:sp>
-      <p:sp>
-        <p:nvSpPr>
-          <p:cNvPr id="39" name="Shape 36"/>
-          <p:cNvSpPr/>
-          <p:nvPr/>
-        </p:nvSpPr>
-        <p:spPr>
-          <a:xfrm>
-            <a:off x="4782312" y="3383280"/>
-            <a:ext cx="1298448" cy="310896"/>
-          </a:xfrm>
-          <a:prstGeom prst="roundRect">
-            <a:avLst>
-              <a:gd name="adj" fmla="val 50000"/>
-            </a:avLst>
-          </a:prstGeom>
-          <a:solidFill>
-            <a:srgbClr val="FFFFFF"/>
-          </a:solidFill>
-          <a:ln w="12700">
-            <a:solidFill>
-              <a:srgbClr val="FFFFFF"/>
-            </a:solidFill>
-            <a:prstDash val="solid"/>
-          </a:ln>
-        </p:spPr>
-      </p:sp>
-      <p:sp>
-        <p:nvSpPr>
-          <p:cNvPr id="40" name="Text 37"/>
-          <p:cNvSpPr txBox="1"/>
-          <p:nvPr/>
-        </p:nvSpPr>
-        <p:spPr>
-          <a:xfrm>
-            <a:off x="4782312" y="3383280"/>
-            <a:ext cx="1298448" cy="310896"/>
-          </a:xfrm>
-          <a:prstGeom prst="rect">
-            <a:avLst/>
-          </a:prstGeom>
-          <a:noFill/>
-          <a:ln/>
-        </p:spPr>
-        <p:txBody>
-          <a:bodyPr wrap="square" lIns="0" tIns="0" rIns="0" bIns="0" rtlCol="0" anchor="ctr"/>
-          <a:lstStyle/>
-          <a:p>
-            <a:pPr algn="ctr" indent="0" marL="0">
-              <a:buNone/>
-            </a:pPr>
-            <a:r>
-              <a:rPr lang="en-US" sz="950" b="1" dirty="0">
-                <a:solidFill>
-                  <a:srgbClr val="0A7F44"/>
-                </a:solidFill>
-              </a:rPr>
-              <a:t>crash matrix</a:t>
-            </a:r>
-            <a:endParaRPr lang="en-US" sz="950" dirty="0"/>
-          </a:p>
-        </p:txBody>
-      </p:sp>
-      <p:sp>
-        <p:nvSpPr>
-          <p:cNvPr id="41" name="Shape 38"/>
-          <p:cNvSpPr/>
-          <p:nvPr/>
-        </p:nvSpPr>
-        <p:spPr>
-          <a:xfrm>
-            <a:off x="6126480" y="3383280"/>
-            <a:ext cx="1298448" cy="310896"/>
-          </a:xfrm>
-          <a:prstGeom prst="roundRect">
-            <a:avLst>
-              <a:gd name="adj" fmla="val 50000"/>
-            </a:avLst>
-          </a:prstGeom>
-          <a:solidFill>
-            <a:srgbClr val="FFFFFF"/>
-          </a:solidFill>
-          <a:ln w="12700">
-            <a:solidFill>
-              <a:srgbClr val="FFFFFF"/>
-            </a:solidFill>
-            <a:prstDash val="solid"/>
-          </a:ln>
-        </p:spPr>
-      </p:sp>
-      <p:sp>
-        <p:nvSpPr>
-          <p:cNvPr id="42" name="Text 39"/>
-          <p:cNvSpPr txBox="1"/>
-          <p:nvPr/>
-        </p:nvSpPr>
-        <p:spPr>
-          <a:xfrm>
-            <a:off x="6126480" y="3383280"/>
-            <a:ext cx="1298448" cy="310896"/>
-          </a:xfrm>
-          <a:prstGeom prst="rect">
-            <a:avLst/>
-          </a:prstGeom>
-          <a:noFill/>
-          <a:ln/>
-        </p:spPr>
-        <p:txBody>
-          <a:bodyPr wrap="square" lIns="0" tIns="0" rIns="0" bIns="0" rtlCol="0" anchor="ctr"/>
-          <a:lstStyle/>
-          <a:p>
-            <a:pPr algn="ctr" indent="0" marL="0">
-              <a:buNone/>
-            </a:pPr>
-            <a:r>
-              <a:rPr lang="en-US" sz="950" b="1" dirty="0">
-                <a:solidFill>
-                  <a:srgbClr val="0A7F44"/>
-                </a:solidFill>
-              </a:rPr>
-              <a:t>red team</a:t>
-            </a:r>
-            <a:endParaRPr lang="en-US" sz="950" dirty="0"/>
-          </a:p>
-        </p:txBody>
-      </p:sp>
-      <p:sp>
-        <p:nvSpPr>
-          <p:cNvPr id="43" name="Shape 40"/>
-          <p:cNvSpPr/>
-          <p:nvPr/>
-        </p:nvSpPr>
-        <p:spPr>
-          <a:xfrm>
-            <a:off x="749808" y="3785616"/>
-            <a:ext cx="1298448" cy="310896"/>
-          </a:xfrm>
-          <a:prstGeom prst="roundRect">
-            <a:avLst>
-              <a:gd name="adj" fmla="val 50000"/>
-            </a:avLst>
-          </a:prstGeom>
-          <a:solidFill>
-            <a:srgbClr val="FFFFFF"/>
-          </a:solidFill>
-          <a:ln w="12700">
-            <a:solidFill>
-              <a:srgbClr val="FFFFFF"/>
-            </a:solidFill>
-            <a:prstDash val="solid"/>
-          </a:ln>
-        </p:spPr>
-      </p:sp>
-      <p:sp>
-        <p:nvSpPr>
-          <p:cNvPr id="44" name="Text 41"/>
-          <p:cNvSpPr txBox="1"/>
-          <p:nvPr/>
-        </p:nvSpPr>
-        <p:spPr>
-          <a:xfrm>
-            <a:off x="749808" y="3785616"/>
-            <a:ext cx="1298448" cy="310896"/>
-          </a:xfrm>
-          <a:prstGeom prst="rect">
-            <a:avLst/>
-          </a:prstGeom>
-          <a:noFill/>
-          <a:ln/>
-        </p:spPr>
-        <p:txBody>
-          <a:bodyPr wrap="square" lIns="0" tIns="0" rIns="0" bIns="0" rtlCol="0" anchor="ctr"/>
-          <a:lstStyle/>
-          <a:p>
-            <a:pPr algn="ctr" indent="0" marL="0">
-              <a:buNone/>
-            </a:pPr>
-            <a:r>
-              <a:rPr lang="en-US" sz="950" b="1" dirty="0">
-                <a:solidFill>
-                  <a:srgbClr val="0A7F44"/>
-                </a:solidFill>
-              </a:rPr>
-              <a:t>Messenger end to end</a:t>
-            </a:r>
-            <a:endParaRPr lang="en-US" sz="950" dirty="0"/>
-          </a:p>
-        </p:txBody>
-      </p:sp>
-      <p:sp>
-        <p:nvSpPr>
-          <p:cNvPr id="45" name="Shape 42"/>
-          <p:cNvSpPr/>
-          <p:nvPr/>
-        </p:nvSpPr>
-        <p:spPr>
-          <a:xfrm>
-            <a:off x="2093976" y="3785616"/>
-            <a:ext cx="1298448" cy="310896"/>
-          </a:xfrm>
-          <a:prstGeom prst="roundRect">
-            <a:avLst>
-              <a:gd name="adj" fmla="val 50000"/>
-            </a:avLst>
-          </a:prstGeom>
-          <a:solidFill>
-            <a:srgbClr val="FFFFFF"/>
-          </a:solidFill>
-          <a:ln w="12700">
-            <a:solidFill>
-              <a:srgbClr val="FFFFFF"/>
-            </a:solidFill>
-            <a:prstDash val="solid"/>
-          </a:ln>
-        </p:spPr>
-      </p:sp>
-      <p:sp>
-        <p:nvSpPr>
-          <p:cNvPr id="46" name="Text 43"/>
-          <p:cNvSpPr txBox="1"/>
-          <p:nvPr/>
-        </p:nvSpPr>
-        <p:spPr>
-          <a:xfrm>
-            <a:off x="2093976" y="3785616"/>
-            <a:ext cx="1298448" cy="310896"/>
-          </a:xfrm>
-          <a:prstGeom prst="rect">
-            <a:avLst/>
-          </a:prstGeom>
-          <a:noFill/>
-          <a:ln/>
-        </p:spPr>
-        <p:txBody>
-          <a:bodyPr wrap="square" lIns="0" tIns="0" rIns="0" bIns="0" rtlCol="0" anchor="ctr"/>
-          <a:lstStyle/>
-          <a:p>
-            <a:pPr algn="ctr" indent="0" marL="0">
-              <a:buNone/>
-            </a:pPr>
-            <a:r>
-              <a:rPr lang="en-US" sz="950" b="1" dirty="0">
-                <a:solidFill>
-                  <a:srgbClr val="0A7F44"/>
-                </a:solidFill>
-              </a:rPr>
-              <a:t>planner pass^3</a:t>
-            </a:r>
-            <a:endParaRPr lang="en-US" sz="950" dirty="0"/>
-          </a:p>
-        </p:txBody>
-      </p:sp>
-      <p:sp>
-        <p:nvSpPr>
-          <p:cNvPr id="47" name="Shape 44"/>
-          <p:cNvSpPr/>
-          <p:nvPr/>
-        </p:nvSpPr>
-        <p:spPr>
-          <a:xfrm>
-            <a:off x="3438144" y="3785616"/>
-            <a:ext cx="1298448" cy="310896"/>
-          </a:xfrm>
-          <a:prstGeom prst="roundRect">
-            <a:avLst>
-              <a:gd name="adj" fmla="val 50000"/>
-            </a:avLst>
-          </a:prstGeom>
-          <a:solidFill>
-            <a:srgbClr val="FFFFFF"/>
-          </a:solidFill>
-          <a:ln w="12700">
-            <a:solidFill>
-              <a:srgbClr val="FFFFFF"/>
-            </a:solidFill>
-            <a:prstDash val="solid"/>
-          </a:ln>
-        </p:spPr>
-      </p:sp>
-      <p:sp>
-        <p:nvSpPr>
-          <p:cNvPr id="48" name="Text 45"/>
-          <p:cNvSpPr txBox="1"/>
-          <p:nvPr/>
-        </p:nvSpPr>
-        <p:spPr>
-          <a:xfrm>
-            <a:off x="3438144" y="3785616"/>
-            <a:ext cx="1298448" cy="310896"/>
-          </a:xfrm>
-          <a:prstGeom prst="rect">
-            <a:avLst/>
-          </a:prstGeom>
-          <a:noFill/>
-          <a:ln/>
-        </p:spPr>
-        <p:txBody>
-          <a:bodyPr wrap="square" lIns="0" tIns="0" rIns="0" bIns="0" rtlCol="0" anchor="ctr"/>
-          <a:lstStyle/>
-          <a:p>
-            <a:pPr algn="ctr" indent="0" marL="0">
-              <a:buNone/>
-            </a:pPr>
-            <a:r>
-              <a:rPr lang="en-US" sz="950" b="1" dirty="0">
-                <a:solidFill>
-                  <a:srgbClr val="0A7F44"/>
-                </a:solidFill>
-              </a:rPr>
-              <a:t>oracle</a:t>
-            </a:r>
-            <a:endParaRPr lang="en-US" sz="950" dirty="0"/>
-          </a:p>
-        </p:txBody>
-      </p:sp>
-      <p:sp>
-        <p:nvSpPr>
-          <p:cNvPr id="49" name="Shape 46"/>
-          <p:cNvSpPr/>
-          <p:nvPr/>
-        </p:nvSpPr>
-        <p:spPr>
-          <a:xfrm>
-            <a:off x="4782312" y="3785616"/>
-            <a:ext cx="1298448" cy="310896"/>
-          </a:xfrm>
-          <a:prstGeom prst="roundRect">
-            <a:avLst>
-              <a:gd name="adj" fmla="val 50000"/>
-            </a:avLst>
-          </a:prstGeom>
-          <a:solidFill>
-            <a:srgbClr val="FFFFFF"/>
-          </a:solidFill>
-          <a:ln w="12700">
-            <a:solidFill>
-              <a:srgbClr val="FFFFFF"/>
-            </a:solidFill>
-            <a:prstDash val="solid"/>
-          </a:ln>
-        </p:spPr>
-      </p:sp>
-      <p:sp>
-        <p:nvSpPr>
-          <p:cNvPr id="50" name="Text 47"/>
-          <p:cNvSpPr txBox="1"/>
-          <p:nvPr/>
-        </p:nvSpPr>
-        <p:spPr>
-          <a:xfrm>
-            <a:off x="4782312" y="3785616"/>
-            <a:ext cx="1298448" cy="310896"/>
-          </a:xfrm>
-          <a:prstGeom prst="rect">
-            <a:avLst/>
-          </a:prstGeom>
-          <a:noFill/>
-          <a:ln/>
-        </p:spPr>
-        <p:txBody>
-          <a:bodyPr wrap="square" lIns="0" tIns="0" rIns="0" bIns="0" rtlCol="0" anchor="ctr"/>
-          <a:lstStyle/>
-          <a:p>
-            <a:pPr algn="ctr" indent="0" marL="0">
-              <a:buNone/>
-            </a:pPr>
-            <a:r>
-              <a:rPr lang="en-US" sz="950" b="1" dirty="0">
-                <a:solidFill>
-                  <a:srgbClr val="0A7F44"/>
-                </a:solidFill>
-              </a:rPr>
-              <a:t>privacy canary</a:t>
-            </a:r>
-            <a:endParaRPr lang="en-US" sz="950" dirty="0"/>
-          </a:p>
-        </p:txBody>
-      </p:sp>
-      <p:sp>
-        <p:nvSpPr>
-          <p:cNvPr id="51" name="Shape 48"/>
-          <p:cNvSpPr/>
-          <p:nvPr/>
-        </p:nvSpPr>
-        <p:spPr>
-          <a:xfrm>
-            <a:off x="7543800" y="3611880"/>
-            <a:ext cx="274320" cy="0"/>
-          </a:xfrm>
-          <a:prstGeom prst="line">
-            <a:avLst/>
-          </a:prstGeom>
-          <a:noFill/>
-          <a:ln w="22225">
-            <a:solidFill>
-              <a:srgbClr val="8A8A92"/>
-            </a:solidFill>
-            <a:prstDash val="solid"/>
-            <a:tailEnd type="triangle"/>
-          </a:ln>
-        </p:spPr>
-      </p:sp>
-      <p:sp>
-        <p:nvSpPr>
-          <p:cNvPr id="52" name="Shape 49"/>
-          <p:cNvSpPr/>
-          <p:nvPr/>
-        </p:nvSpPr>
-        <p:spPr>
-          <a:xfrm>
-            <a:off x="7863840" y="2926080"/>
-            <a:ext cx="3749040" cy="1371600"/>
-          </a:xfrm>
-          <a:prstGeom prst="roundRect">
-            <a:avLst>
-              <a:gd name="adj" fmla="val 8000"/>
-            </a:avLst>
-          </a:prstGeom>
-          <a:solidFill>
-            <a:srgbClr val="FFFFFF"/>
-          </a:solidFill>
-          <a:ln w="25400">
-            <a:solidFill>
-              <a:srgbClr val="D1352B"/>
-            </a:solidFill>
-            <a:prstDash val="solid"/>
-          </a:ln>
-        </p:spPr>
-      </p:sp>
-      <p:sp>
-        <p:nvSpPr>
-          <p:cNvPr id="53" name="Text 50"/>
-          <p:cNvSpPr txBox="1"/>
-          <p:nvPr/>
-        </p:nvSpPr>
-        <p:spPr>
-          <a:xfrm>
-            <a:off x="8046720" y="3017520"/>
-            <a:ext cx="3383280" cy="256032"/>
-          </a:xfrm>
-          <a:prstGeom prst="rect">
-            <a:avLst/>
-          </a:prstGeom>
-          <a:noFill/>
-          <a:ln/>
-        </p:spPr>
-        <p:txBody>
-          <a:bodyPr wrap="square" lIns="0" tIns="0" rIns="0" bIns="0" rtlCol="0" anchor="t"/>
-          <a:lstStyle/>
-          <a:p>
-            <a:pPr indent="0" marL="0">
-              <a:buNone/>
-            </a:pPr>
-            <a:r>
-              <a:rPr lang="en-US" sz="1200" b="1" dirty="0">
-                <a:solidFill>
-                  <a:srgbClr val="D1352B"/>
-                </a:solidFill>
-              </a:rPr>
-              <a:t>7 · SHIP, OR ROLL BACK</a:t>
-            </a:r>
-            <a:endParaRPr lang="en-US" sz="1200" dirty="0"/>
-          </a:p>
-        </p:txBody>
-      </p:sp>
-      <p:sp>
-        <p:nvSpPr>
-          <p:cNvPr id="54" name="Text 51"/>
-          <p:cNvSpPr txBox="1"/>
-          <p:nvPr/>
-        </p:nvSpPr>
-        <p:spPr>
-          <a:xfrm>
-            <a:off x="8046720" y="3337560"/>
-            <a:ext cx="3429000" cy="914400"/>
-          </a:xfrm>
-          <a:prstGeom prst="rect">
-            <a:avLst/>
-          </a:prstGeom>
-          <a:noFill/>
-          <a:ln/>
-        </p:spPr>
-        <p:txBody>
-          <a:bodyPr wrap="square" lIns="0" tIns="0" rIns="0" bIns="0" rtlCol="0" anchor="t"/>
-          <a:lstStyle/>
-          <a:p>
-            <a:pPr indent="0" marL="0">
-              <a:buNone/>
-            </a:pPr>
-            <a:r>
-              <a:rPr lang="en-US" sz="1100" dirty="0">
-                <a:solidFill>
-                  <a:srgbClr val="55555C"/>
-                </a:solidFill>
-              </a:rPr>
-              <a:t>A small canary that turns itself off if thumbs down rise. Anything beyond a safe setting waits for a person.</a:t>
-            </a:r>
-            <a:endParaRPr lang="en-US" sz="1100" dirty="0"/>
-          </a:p>
-        </p:txBody>
-      </p:sp>
-      <p:sp>
-        <p:nvSpPr>
-          <p:cNvPr id="55" name="Shape 52"/>
-          <p:cNvSpPr/>
-          <p:nvPr/>
-        </p:nvSpPr>
-        <p:spPr>
-          <a:xfrm>
-            <a:off x="548640" y="4434840"/>
-            <a:ext cx="5440680" cy="1188720"/>
-          </a:xfrm>
-          <a:prstGeom prst="roundRect">
-            <a:avLst>
-              <a:gd name="adj" fmla="val 9231"/>
-            </a:avLst>
-          </a:prstGeom>
-          <a:solidFill>
-            <a:srgbClr val="E9F3EC"/>
-          </a:solidFill>
-          <a:ln w="12700">
-            <a:solidFill>
-              <a:srgbClr val="E9F3EC"/>
-            </a:solidFill>
-            <a:prstDash val="solid"/>
-          </a:ln>
-        </p:spPr>
-      </p:sp>
-      <p:sp>
-        <p:nvSpPr>
-          <p:cNvPr id="56" name="Text 53"/>
-          <p:cNvSpPr txBox="1"/>
-          <p:nvPr/>
-        </p:nvSpPr>
-        <p:spPr>
-          <a:xfrm>
-            <a:off x="731520" y="4526280"/>
-            <a:ext cx="1828800" cy="201168"/>
-          </a:xfrm>
-          <a:prstGeom prst="rect">
-            <a:avLst/>
-          </a:prstGeom>
-          <a:noFill/>
-          <a:ln/>
-        </p:spPr>
-        <p:txBody>
-          <a:bodyPr wrap="square" lIns="0" tIns="0" rIns="0" bIns="0" rtlCol="0" anchor="t"/>
-          <a:lstStyle/>
-          <a:p>
-            <a:pPr indent="0" marL="0">
-              <a:buNone/>
-            </a:pPr>
-            <a:r>
-              <a:rPr lang="en-US" sz="1000" b="1" spc="100" kern="0" dirty="0">
-                <a:solidFill>
-                  <a:srgbClr val="0A7F44"/>
-                </a:solidFill>
-              </a:rPr>
-              <a:t>SHIPPED</a:t>
-            </a:r>
-            <a:endParaRPr lang="en-US" sz="1000" dirty="0"/>
-          </a:p>
-        </p:txBody>
-      </p:sp>
-      <p:sp>
-        <p:nvSpPr>
-          <p:cNvPr id="57" name="Text 54"/>
-          <p:cNvSpPr txBox="1"/>
-          <p:nvPr/>
-        </p:nvSpPr>
-        <p:spPr>
-          <a:xfrm>
-            <a:off x="731520" y="4754880"/>
-            <a:ext cx="5120640" cy="292608"/>
-          </a:xfrm>
-          <a:prstGeom prst="rect">
-            <a:avLst/>
-          </a:prstGeom>
-          <a:noFill/>
-          <a:ln/>
-        </p:spPr>
-        <p:txBody>
-          <a:bodyPr wrap="square" lIns="0" tIns="0" rIns="0" bIns="0" rtlCol="0" anchor="t"/>
-          <a:lstStyle/>
-          <a:p>
-            <a:pPr indent="0" marL="0">
-              <a:buNone/>
-            </a:pPr>
-            <a:r>
-              <a:rPr lang="en-US" sz="1400" b="1" dirty="0">
-                <a:solidFill>
-                  <a:srgbClr val="0A0A0B"/>
-                </a:solidFill>
-              </a:rPr>
-              <a:t>"Ask me later" → ask.hour 12 → 18</a:t>
-            </a:r>
-            <a:endParaRPr lang="en-US" sz="1400" dirty="0"/>
-          </a:p>
-        </p:txBody>
-      </p:sp>
-      <p:sp>
-        <p:nvSpPr>
-          <p:cNvPr id="58" name="Text 55"/>
-          <p:cNvSpPr txBox="1"/>
-          <p:nvPr/>
-        </p:nvSpPr>
-        <p:spPr>
-          <a:xfrm>
-            <a:off x="731520" y="5074920"/>
-            <a:ext cx="5120640" cy="502920"/>
-          </a:xfrm>
-          <a:prstGeom prst="rect">
-            <a:avLst/>
-          </a:prstGeom>
-          <a:noFill/>
-          <a:ln/>
-        </p:spPr>
-        <p:txBody>
-          <a:bodyPr wrap="square" lIns="0" tIns="0" rIns="0" bIns="0" rtlCol="0" anchor="t"/>
-          <a:lstStyle/>
-          <a:p>
-            <a:pPr indent="0" marL="0">
-              <a:buNone/>
-            </a:pPr>
-            <a:r>
-              <a:rPr lang="en-US" sz="1050" dirty="0">
-                <a:solidFill>
-                  <a:srgbClr val="55555C"/>
-                </a:solidFill>
-              </a:rPr>
-              <a:t>Approved as a safe setting, shipped to 5 of 31 beta members: thumbs down 29% → 23% over 7 days, promoted.</a:t>
-            </a:r>
-            <a:endParaRPr lang="en-US" sz="1050" dirty="0"/>
-          </a:p>
-        </p:txBody>
-      </p:sp>
-      <p:sp>
-        <p:nvSpPr>
-          <p:cNvPr id="59" name="Shape 56"/>
-          <p:cNvSpPr/>
-          <p:nvPr/>
-        </p:nvSpPr>
-        <p:spPr>
-          <a:xfrm>
-            <a:off x="6172200" y="4434840"/>
-            <a:ext cx="5440680" cy="1188720"/>
-          </a:xfrm>
-          <a:prstGeom prst="roundRect">
-            <a:avLst>
-              <a:gd name="adj" fmla="val 9231"/>
-            </a:avLst>
-          </a:prstGeom>
-          <a:solidFill>
-            <a:srgbClr val="FBEAE9"/>
-          </a:solidFill>
-          <a:ln w="12700">
-            <a:solidFill>
-              <a:srgbClr val="FBEAE9"/>
-            </a:solidFill>
-            <a:prstDash val="solid"/>
-          </a:ln>
-        </p:spPr>
-      </p:sp>
-      <p:sp>
-        <p:nvSpPr>
-          <p:cNvPr id="60" name="Text 57"/>
-          <p:cNvSpPr txBox="1"/>
-          <p:nvPr/>
-        </p:nvSpPr>
-        <p:spPr>
-          <a:xfrm>
-            <a:off x="6355080" y="4526280"/>
-            <a:ext cx="2743200" cy="201168"/>
-          </a:xfrm>
-          <a:prstGeom prst="rect">
-            <a:avLst/>
-          </a:prstGeom>
-          <a:noFill/>
-          <a:ln/>
-        </p:spPr>
-        <p:txBody>
-          <a:bodyPr wrap="square" lIns="0" tIns="0" rIns="0" bIns="0" rtlCol="0" anchor="t"/>
-          <a:lstStyle/>
-          <a:p>
-            <a:pPr indent="0" marL="0">
-              <a:buNone/>
-            </a:pPr>
-            <a:r>
-              <a:rPr lang="en-US" sz="1000" b="1" spc="100" kern="0" dirty="0">
-                <a:solidFill>
-                  <a:srgbClr val="D1352B"/>
-                </a:solidFill>
-              </a:rPr>
-              <a:t>ROLLED BACK BY ITSELF</a:t>
-            </a:r>
-            <a:endParaRPr lang="en-US" sz="1000" dirty="0"/>
-          </a:p>
-        </p:txBody>
-      </p:sp>
-      <p:sp>
-        <p:nvSpPr>
-          <p:cNvPr id="61" name="Text 58"/>
-          <p:cNvSpPr txBox="1"/>
-          <p:nvPr/>
-        </p:nvSpPr>
-        <p:spPr>
-          <a:xfrm>
-            <a:off x="6355080" y="4754880"/>
-            <a:ext cx="5120640" cy="292608"/>
-          </a:xfrm>
-          <a:prstGeom prst="rect">
-            <a:avLst/>
-          </a:prstGeom>
-          <a:noFill/>
-          <a:ln/>
-        </p:spPr>
-        <p:txBody>
-          <a:bodyPr wrap="square" lIns="0" tIns="0" rIns="0" bIns="0" rtlCol="0" anchor="t"/>
-          <a:lstStyle/>
-          <a:p>
-            <a:pPr indent="0" marL="0">
-              <a:buNone/>
-            </a:pPr>
-            <a:r>
-              <a:rPr lang="en-US" sz="1400" b="1" dirty="0">
-                <a:solidFill>
-                  <a:srgbClr val="0A0A0B"/>
-                </a:solidFill>
-              </a:rPr>
-              <a:t>A planted bad change: ask.ahead 3 → 2</a:t>
-            </a:r>
-            <a:endParaRPr lang="en-US" sz="1400" dirty="0"/>
-          </a:p>
-        </p:txBody>
-      </p:sp>
-      <p:sp>
-        <p:nvSpPr>
-          <p:cNvPr id="62" name="Text 59"/>
-          <p:cNvSpPr txBox="1"/>
-          <p:nvPr/>
-        </p:nvSpPr>
-        <p:spPr>
-          <a:xfrm>
-            <a:off x="6355080" y="5074920"/>
-            <a:ext cx="5120640" cy="502920"/>
-          </a:xfrm>
-          <a:prstGeom prst="rect">
-            <a:avLst/>
-          </a:prstGeom>
-          <a:noFill/>
-          <a:ln/>
-        </p:spPr>
-        <p:txBody>
-          <a:bodyPr wrap="square" lIns="0" tIns="0" rIns="0" bIns="0" rtlCol="0" anchor="t"/>
-          <a:lstStyle/>
-          <a:p>
-            <a:pPr indent="0" marL="0">
-              <a:buNone/>
-            </a:pPr>
-            <a:r>
-              <a:rPr lang="en-US" sz="1050" dirty="0">
-                <a:solidFill>
-                  <a:srgbClr val="55555C"/>
-                </a:solidFill>
-              </a:rPr>
-              <a:t>Sent to a canary of 8: thumbs down on it went from 40% to 60%, and the monitor turned it off with no one asked.</a:t>
-            </a:r>
-            <a:endParaRPr lang="en-US" sz="1050" dirty="0"/>
-          </a:p>
-        </p:txBody>
-      </p:sp>
-      <p:sp>
-        <p:nvSpPr>
-          <p:cNvPr id="63" name="Shape 60"/>
-          <p:cNvSpPr/>
-          <p:nvPr/>
-        </p:nvSpPr>
-        <p:spPr>
-          <a:xfrm>
-            <a:off x="548640" y="5760720"/>
-            <a:ext cx="11064240" cy="502920"/>
-          </a:xfrm>
-          <a:prstGeom prst="roundRect">
-            <a:avLst>
-              <a:gd name="adj" fmla="val 21818"/>
-            </a:avLst>
-          </a:prstGeom>
-          <a:solidFill>
-            <a:srgbClr val="0A0A0B"/>
-          </a:solidFill>
-          <a:ln w="12700">
-            <a:solidFill>
-              <a:srgbClr val="0A0A0B"/>
-            </a:solidFill>
-            <a:prstDash val="solid"/>
-          </a:ln>
-        </p:spPr>
-      </p:sp>
-      <p:sp>
-        <p:nvSpPr>
-          <p:cNvPr id="64" name="Text 61"/>
-          <p:cNvSpPr txBox="1"/>
-          <p:nvPr/>
-        </p:nvSpPr>
-        <p:spPr>
-          <a:xfrm>
-            <a:off x="777240" y="5760720"/>
-            <a:ext cx="1463040" cy="502920"/>
-          </a:xfrm>
-          <a:prstGeom prst="rect">
-            <a:avLst/>
-          </a:prstGeom>
-          <a:noFill/>
-          <a:ln/>
-        </p:spPr>
-        <p:txBody>
-          <a:bodyPr wrap="square" lIns="0" tIns="0" rIns="0" bIns="0" rtlCol="0" anchor="ctr"/>
-          <a:lstStyle/>
-          <a:p>
-            <a:pPr indent="0" marL="0">
-              <a:buNone/>
-            </a:pPr>
-            <a:r>
-              <a:rPr lang="en-US" sz="1100" b="1" dirty="0">
-                <a:solidFill>
-                  <a:srgbClr val="FFFFFF"/>
-                </a:solidFill>
-              </a:rPr>
-              <a:t>NEVER-LIST</a:t>
-            </a:r>
-            <a:endParaRPr lang="en-US" sz="1100" dirty="0"/>
-          </a:p>
-        </p:txBody>
-      </p:sp>
-      <p:sp>
-        <p:nvSpPr>
-          <p:cNvPr id="65" name="Text 62"/>
-          <p:cNvSpPr txBox="1"/>
-          <p:nvPr/>
-        </p:nvSpPr>
-        <p:spPr>
-          <a:xfrm>
-            <a:off x="2240280" y="5760720"/>
-            <a:ext cx="9235440" cy="502920"/>
-          </a:xfrm>
-          <a:prstGeom prst="rect">
-            <a:avLst/>
-          </a:prstGeom>
-          <a:noFill/>
-          <a:ln/>
-        </p:spPr>
-        <p:txBody>
-          <a:bodyPr wrap="square" lIns="0" tIns="0" rIns="0" bIns="0" rtlCol="0" anchor="ctr"/>
-          <a:lstStyle/>
-          <a:p>
-            <a:pPr indent="0" marL="0">
-              <a:buNone/>
-            </a:pPr>
-            <a:r>
-              <a:rPr lang="en-US" sz="1200" dirty="0">
-                <a:solidFill>
-                  <a:srgbClr val="FFFFFF"/>
-                </a:solidFill>
-              </a:rPr>
-              <a:t>Booking without a yes · data off the server · a diagnosis or a dose · the guards · the tests · A2A · deployment</a:t>
-            </a:r>
-            <a:endParaRPr lang="en-US" sz="1200" dirty="0"/>
+              <a:t>attacks stopped: injected instructions, poisoned reviews, forged Agent Cards, sock-puppet votes, diffs that book without a yes</a:t>
+            </a:r>
+            <a:endParaRPr lang="en-US" sz="1150" dirty="0"/>
           </a:p>
         </p:txBody>
       </p:sp>
@@ -24710,7 +23640,7 @@
                   <a:srgbClr val="0A7F44"/>
                 </a:solidFill>
               </a:rPr>
-              <a:t>MEASURED</a:t>
+              <a:t>SELF-EVOLVING</a:t>
             </a:r>
             <a:endParaRPr lang="en-US" sz="1300" dirty="0"/>
           </a:p>
@@ -24748,7 +23678,7 @@
                   <a:srgbClr val="0A0A0B"/>
                 </a:solidFill>
               </a:rPr>
-              <a:t>Every number names the file it comes from</a:t>
+              <a:t>The club makes itself better, safely</a:t>
             </a:r>
             <a:endParaRPr lang="en-US" sz="3200" dirty="0"/>
           </a:p>
@@ -24762,12 +23692,846 @@
         </p:nvSpPr>
         <p:spPr>
           <a:xfrm>
-            <a:off x="548640" y="1691640"/>
-            <a:ext cx="2670048" cy="1234440"/>
+            <a:off x="6400800" y="384048"/>
+            <a:ext cx="5212080" cy="329184"/>
           </a:xfrm>
           <a:prstGeom prst="roundRect">
             <a:avLst>
-              <a:gd name="adj" fmla="val 8889"/>
+              <a:gd name="adj" fmla="val 50000"/>
+            </a:avLst>
+          </a:prstGeom>
+          <a:solidFill>
+            <a:srgbClr val="FFFFFF"/>
+          </a:solidFill>
+          <a:ln w="12700">
+            <a:solidFill>
+              <a:srgbClr val="DCDCE0"/>
+            </a:solidFill>
+            <a:prstDash val="solid"/>
+          </a:ln>
+        </p:spPr>
+      </p:sp>
+      <p:sp>
+        <p:nvSpPr>
+          <p:cNvPr id="6" name="Text 3"/>
+          <p:cNvSpPr txBox="1"/>
+          <p:nvPr/>
+        </p:nvSpPr>
+        <p:spPr>
+          <a:xfrm>
+            <a:off x="6400800" y="384048"/>
+            <a:ext cx="5212080" cy="329184"/>
+          </a:xfrm>
+          <a:prstGeom prst="rect">
+            <a:avLst/>
+          </a:prstGeom>
+          <a:noFill/>
+          <a:ln/>
+        </p:spPr>
+        <p:txBody>
+          <a:bodyPr wrap="square" lIns="0" tIns="0" rIns="0" bIns="0" rtlCol="0" anchor="ctr"/>
+          <a:lstStyle/>
+          <a:p>
+            <a:pPr algn="ctr" indent="0" marL="0">
+              <a:buNone/>
+            </a:pPr>
+            <a:r>
+              <a:rPr lang="en-US" sz="1050" b="1" dirty="0">
+                <a:solidFill>
+                  <a:srgbClr val="55555C"/>
+                </a:solidFill>
+              </a:rPr>
+              <a:t>Simulated club (seed 7) · the pipeline, gates and rollback are real</a:t>
+            </a:r>
+            <a:endParaRPr lang="en-US" sz="1050" dirty="0"/>
+          </a:p>
+        </p:txBody>
+      </p:sp>
+      <p:sp>
+        <p:nvSpPr>
+          <p:cNvPr id="7" name="Shape 4"/>
+          <p:cNvSpPr/>
+          <p:nvPr/>
+        </p:nvSpPr>
+        <p:spPr>
+          <a:xfrm>
+            <a:off x="548640" y="1600200"/>
+            <a:ext cx="2057400" cy="1188720"/>
+          </a:xfrm>
+          <a:prstGeom prst="roundRect">
+            <a:avLst>
+              <a:gd name="adj" fmla="val 9231"/>
+            </a:avLst>
+          </a:prstGeom>
+          <a:solidFill>
+            <a:srgbClr val="FFFFFF"/>
+          </a:solidFill>
+          <a:ln w="12700">
+            <a:solidFill>
+              <a:srgbClr val="DCDCE0"/>
+            </a:solidFill>
+            <a:prstDash val="solid"/>
+          </a:ln>
+        </p:spPr>
+      </p:sp>
+      <p:sp>
+        <p:nvSpPr>
+          <p:cNvPr id="8" name="Text 5"/>
+          <p:cNvSpPr txBox="1"/>
+          <p:nvPr/>
+        </p:nvSpPr>
+        <p:spPr>
+          <a:xfrm>
+            <a:off x="694944" y="1691640"/>
+            <a:ext cx="1783080" cy="201168"/>
+          </a:xfrm>
+          <a:prstGeom prst="rect">
+            <a:avLst/>
+          </a:prstGeom>
+          <a:noFill/>
+          <a:ln/>
+        </p:spPr>
+        <p:txBody>
+          <a:bodyPr wrap="square" lIns="0" tIns="0" rIns="0" bIns="0" rtlCol="0" anchor="t"/>
+          <a:lstStyle/>
+          <a:p>
+            <a:pPr indent="0" marL="0">
+              <a:buNone/>
+            </a:pPr>
+            <a:r>
+              <a:rPr lang="en-US" sz="1000" b="1" dirty="0">
+                <a:solidFill>
+                  <a:srgbClr val="0A7F44"/>
+                </a:solidFill>
+              </a:rPr>
+              <a:t>1 · ASK</a:t>
+            </a:r>
+            <a:endParaRPr lang="en-US" sz="1000" dirty="0"/>
+          </a:p>
+        </p:txBody>
+      </p:sp>
+      <p:sp>
+        <p:nvSpPr>
+          <p:cNvPr id="9" name="Text 6"/>
+          <p:cNvSpPr txBox="1"/>
+          <p:nvPr/>
+        </p:nvSpPr>
+        <p:spPr>
+          <a:xfrm>
+            <a:off x="694944" y="1920240"/>
+            <a:ext cx="1810512" cy="292608"/>
+          </a:xfrm>
+          <a:prstGeom prst="rect">
+            <a:avLst/>
+          </a:prstGeom>
+          <a:noFill/>
+          <a:ln/>
+        </p:spPr>
+        <p:txBody>
+          <a:bodyPr wrap="square" lIns="0" tIns="0" rIns="0" bIns="0" rtlCol="0" anchor="t"/>
+          <a:lstStyle/>
+          <a:p>
+            <a:pPr indent="0" marL="0">
+              <a:buNone/>
+            </a:pPr>
+            <a:r>
+              <a:rPr lang="en-US" sz="1350" b="1" dirty="0">
+                <a:solidFill>
+                  <a:srgbClr val="0A0A0B"/>
+                </a:solidFill>
+              </a:rPr>
+              <a:t>Members' ideas</a:t>
+            </a:r>
+            <a:endParaRPr lang="en-US" sz="1350" dirty="0"/>
+          </a:p>
+        </p:txBody>
+      </p:sp>
+      <p:sp>
+        <p:nvSpPr>
+          <p:cNvPr id="10" name="Text 7"/>
+          <p:cNvSpPr txBox="1"/>
+          <p:nvPr/>
+        </p:nvSpPr>
+        <p:spPr>
+          <a:xfrm>
+            <a:off x="694944" y="2240280"/>
+            <a:ext cx="1810512" cy="502920"/>
+          </a:xfrm>
+          <a:prstGeom prst="rect">
+            <a:avLst/>
+          </a:prstGeom>
+          <a:noFill/>
+          <a:ln/>
+        </p:spPr>
+        <p:txBody>
+          <a:bodyPr wrap="square" lIns="0" tIns="0" rIns="0" bIns="0" rtlCol="0" anchor="t"/>
+          <a:lstStyle/>
+          <a:p>
+            <a:pPr indent="0" marL="0">
+              <a:buNone/>
+            </a:pPr>
+            <a:r>
+              <a:rPr lang="en-US" sz="1000" dirty="0">
+                <a:solidFill>
+                  <a:srgbClr val="55555C"/>
+                </a:solidFill>
+              </a:rPr>
+              <a:t>"/idea" in Messenger, or thumbs</a:t>
+            </a:r>
+            <a:endParaRPr lang="en-US" sz="1000" dirty="0"/>
+          </a:p>
+        </p:txBody>
+      </p:sp>
+      <p:sp>
+        <p:nvSpPr>
+          <p:cNvPr id="11" name="Shape 8"/>
+          <p:cNvSpPr/>
+          <p:nvPr/>
+        </p:nvSpPr>
+        <p:spPr>
+          <a:xfrm>
+            <a:off x="2624328" y="2194560"/>
+            <a:ext cx="146304" cy="0"/>
+          </a:xfrm>
+          <a:prstGeom prst="line">
+            <a:avLst/>
+          </a:prstGeom>
+          <a:noFill/>
+          <a:ln w="22225">
+            <a:solidFill>
+              <a:srgbClr val="8A8A92"/>
+            </a:solidFill>
+            <a:prstDash val="solid"/>
+            <a:tailEnd type="triangle"/>
+          </a:ln>
+        </p:spPr>
+      </p:sp>
+      <p:sp>
+        <p:nvSpPr>
+          <p:cNvPr id="12" name="Shape 9"/>
+          <p:cNvSpPr/>
+          <p:nvPr/>
+        </p:nvSpPr>
+        <p:spPr>
+          <a:xfrm>
+            <a:off x="2788920" y="1600200"/>
+            <a:ext cx="2057400" cy="1188720"/>
+          </a:xfrm>
+          <a:prstGeom prst="roundRect">
+            <a:avLst>
+              <a:gd name="adj" fmla="val 9231"/>
+            </a:avLst>
+          </a:prstGeom>
+          <a:solidFill>
+            <a:srgbClr val="FFFFFF"/>
+          </a:solidFill>
+          <a:ln w="12700">
+            <a:solidFill>
+              <a:srgbClr val="DCDCE0"/>
+            </a:solidFill>
+            <a:prstDash val="solid"/>
+          </a:ln>
+        </p:spPr>
+      </p:sp>
+      <p:sp>
+        <p:nvSpPr>
+          <p:cNvPr id="13" name="Text 10"/>
+          <p:cNvSpPr txBox="1"/>
+          <p:nvPr/>
+        </p:nvSpPr>
+        <p:spPr>
+          <a:xfrm>
+            <a:off x="2935224" y="1691640"/>
+            <a:ext cx="1783080" cy="201168"/>
+          </a:xfrm>
+          <a:prstGeom prst="rect">
+            <a:avLst/>
+          </a:prstGeom>
+          <a:noFill/>
+          <a:ln/>
+        </p:spPr>
+        <p:txBody>
+          <a:bodyPr wrap="square" lIns="0" tIns="0" rIns="0" bIns="0" rtlCol="0" anchor="t"/>
+          <a:lstStyle/>
+          <a:p>
+            <a:pPr indent="0" marL="0">
+              <a:buNone/>
+            </a:pPr>
+            <a:r>
+              <a:rPr lang="en-US" sz="1000" b="1" dirty="0">
+                <a:solidFill>
+                  <a:srgbClr val="0A7F44"/>
+                </a:solidFill>
+              </a:rPr>
+              <a:t>2 · GROUP</a:t>
+            </a:r>
+            <a:endParaRPr lang="en-US" sz="1000" dirty="0"/>
+          </a:p>
+        </p:txBody>
+      </p:sp>
+      <p:sp>
+        <p:nvSpPr>
+          <p:cNvPr id="14" name="Text 11"/>
+          <p:cNvSpPr txBox="1"/>
+          <p:nvPr/>
+        </p:nvSpPr>
+        <p:spPr>
+          <a:xfrm>
+            <a:off x="2935224" y="1920240"/>
+            <a:ext cx="1810512" cy="292608"/>
+          </a:xfrm>
+          <a:prstGeom prst="rect">
+            <a:avLst/>
+          </a:prstGeom>
+          <a:noFill/>
+          <a:ln/>
+        </p:spPr>
+        <p:txBody>
+          <a:bodyPr wrap="square" lIns="0" tIns="0" rIns="0" bIns="0" rtlCol="0" anchor="t"/>
+          <a:lstStyle/>
+          <a:p>
+            <a:pPr indent="0" marL="0">
+              <a:buNone/>
+            </a:pPr>
+            <a:r>
+              <a:rPr lang="en-US" sz="1350" b="1" dirty="0">
+                <a:solidFill>
+                  <a:srgbClr val="0A0A0B"/>
+                </a:solidFill>
+              </a:rPr>
+              <a:t>Meta's DRAMA</a:t>
+            </a:r>
+            <a:endParaRPr lang="en-US" sz="1350" dirty="0"/>
+          </a:p>
+        </p:txBody>
+      </p:sp>
+      <p:sp>
+        <p:nvSpPr>
+          <p:cNvPr id="15" name="Text 12"/>
+          <p:cNvSpPr txBox="1"/>
+          <p:nvPr/>
+        </p:nvSpPr>
+        <p:spPr>
+          <a:xfrm>
+            <a:off x="2935224" y="2240280"/>
+            <a:ext cx="1810512" cy="502920"/>
+          </a:xfrm>
+          <a:prstGeom prst="rect">
+            <a:avLst/>
+          </a:prstGeom>
+          <a:noFill/>
+          <a:ln/>
+        </p:spPr>
+        <p:txBody>
+          <a:bodyPr wrap="square" lIns="0" tIns="0" rIns="0" bIns="0" rtlCol="0" anchor="t"/>
+          <a:lstStyle/>
+          <a:p>
+            <a:pPr indent="0" marL="0">
+              <a:buNone/>
+            </a:pPr>
+            <a:r>
+              <a:rPr lang="en-US" sz="1000" dirty="0">
+                <a:solidFill>
+                  <a:srgbClr val="55555C"/>
+                </a:solidFill>
+              </a:rPr>
+              <a:t>By meaning; shows at 5 members</a:t>
+            </a:r>
+            <a:endParaRPr lang="en-US" sz="1000" dirty="0"/>
+          </a:p>
+        </p:txBody>
+      </p:sp>
+      <p:sp>
+        <p:nvSpPr>
+          <p:cNvPr id="16" name="Shape 13"/>
+          <p:cNvSpPr/>
+          <p:nvPr/>
+        </p:nvSpPr>
+        <p:spPr>
+          <a:xfrm>
+            <a:off x="4864608" y="2194560"/>
+            <a:ext cx="146304" cy="0"/>
+          </a:xfrm>
+          <a:prstGeom prst="line">
+            <a:avLst/>
+          </a:prstGeom>
+          <a:noFill/>
+          <a:ln w="22225">
+            <a:solidFill>
+              <a:srgbClr val="8A8A92"/>
+            </a:solidFill>
+            <a:prstDash val="solid"/>
+            <a:tailEnd type="triangle"/>
+          </a:ln>
+        </p:spPr>
+      </p:sp>
+      <p:sp>
+        <p:nvSpPr>
+          <p:cNvPr id="17" name="Shape 14"/>
+          <p:cNvSpPr/>
+          <p:nvPr/>
+        </p:nvSpPr>
+        <p:spPr>
+          <a:xfrm>
+            <a:off x="5029200" y="1600200"/>
+            <a:ext cx="2057400" cy="1188720"/>
+          </a:xfrm>
+          <a:prstGeom prst="roundRect">
+            <a:avLst>
+              <a:gd name="adj" fmla="val 9231"/>
+            </a:avLst>
+          </a:prstGeom>
+          <a:solidFill>
+            <a:srgbClr val="FFFFFF"/>
+          </a:solidFill>
+          <a:ln w="12700">
+            <a:solidFill>
+              <a:srgbClr val="DCDCE0"/>
+            </a:solidFill>
+            <a:prstDash val="solid"/>
+          </a:ln>
+        </p:spPr>
+      </p:sp>
+      <p:sp>
+        <p:nvSpPr>
+          <p:cNvPr id="18" name="Text 15"/>
+          <p:cNvSpPr txBox="1"/>
+          <p:nvPr/>
+        </p:nvSpPr>
+        <p:spPr>
+          <a:xfrm>
+            <a:off x="5175504" y="1691640"/>
+            <a:ext cx="1783080" cy="201168"/>
+          </a:xfrm>
+          <a:prstGeom prst="rect">
+            <a:avLst/>
+          </a:prstGeom>
+          <a:noFill/>
+          <a:ln/>
+        </p:spPr>
+        <p:txBody>
+          <a:bodyPr wrap="square" lIns="0" tIns="0" rIns="0" bIns="0" rtlCol="0" anchor="t"/>
+          <a:lstStyle/>
+          <a:p>
+            <a:pPr indent="0" marL="0">
+              <a:buNone/>
+            </a:pPr>
+            <a:r>
+              <a:rPr lang="en-US" sz="1000" b="1" dirty="0">
+                <a:solidFill>
+                  <a:srgbClr val="0A7F44"/>
+                </a:solidFill>
+              </a:rPr>
+              <a:t>3 · VOTE</a:t>
+            </a:r>
+            <a:endParaRPr lang="en-US" sz="1000" dirty="0"/>
+          </a:p>
+        </p:txBody>
+      </p:sp>
+      <p:sp>
+        <p:nvSpPr>
+          <p:cNvPr id="19" name="Text 16"/>
+          <p:cNvSpPr txBox="1"/>
+          <p:nvPr/>
+        </p:nvSpPr>
+        <p:spPr>
+          <a:xfrm>
+            <a:off x="5175504" y="1920240"/>
+            <a:ext cx="1810512" cy="292608"/>
+          </a:xfrm>
+          <a:prstGeom prst="rect">
+            <a:avLst/>
+          </a:prstGeom>
+          <a:noFill/>
+          <a:ln/>
+        </p:spPr>
+        <p:txBody>
+          <a:bodyPr wrap="square" lIns="0" tIns="0" rIns="0" bIns="0" rtlCol="0" anchor="t"/>
+          <a:lstStyle/>
+          <a:p>
+            <a:pPr indent="0" marL="0">
+              <a:buNone/>
+            </a:pPr>
+            <a:r>
+              <a:rPr lang="en-US" sz="1350" b="1" dirty="0">
+                <a:solidFill>
+                  <a:srgbClr val="0A0A0B"/>
+                </a:solidFill>
+              </a:rPr>
+              <a:t>Quadratic votes</a:t>
+            </a:r>
+            <a:endParaRPr lang="en-US" sz="1350" dirty="0"/>
+          </a:p>
+        </p:txBody>
+      </p:sp>
+      <p:sp>
+        <p:nvSpPr>
+          <p:cNvPr id="20" name="Text 17"/>
+          <p:cNvSpPr txBox="1"/>
+          <p:nvPr/>
+        </p:nvSpPr>
+        <p:spPr>
+          <a:xfrm>
+            <a:off x="5175504" y="2240280"/>
+            <a:ext cx="1810512" cy="502920"/>
+          </a:xfrm>
+          <a:prstGeom prst="rect">
+            <a:avLst/>
+          </a:prstGeom>
+          <a:noFill/>
+          <a:ln/>
+        </p:spPr>
+        <p:txBody>
+          <a:bodyPr wrap="square" lIns="0" tIns="0" rIns="0" bIns="0" rtlCol="0" anchor="t"/>
+          <a:lstStyle/>
+          <a:p>
+            <a:pPr indent="0" marL="0">
+              <a:buNone/>
+            </a:pPr>
+            <a:r>
+              <a:rPr lang="en-US" sz="1000" dirty="0">
+                <a:solidFill>
+                  <a:srgbClr val="55555C"/>
+                </a:solidFill>
+              </a:rPr>
+              <a:t>9 credits a month; n votes cost n²</a:t>
+            </a:r>
+            <a:endParaRPr lang="en-US" sz="1000" dirty="0"/>
+          </a:p>
+        </p:txBody>
+      </p:sp>
+      <p:sp>
+        <p:nvSpPr>
+          <p:cNvPr id="21" name="Shape 18"/>
+          <p:cNvSpPr/>
+          <p:nvPr/>
+        </p:nvSpPr>
+        <p:spPr>
+          <a:xfrm>
+            <a:off x="7104888" y="2194560"/>
+            <a:ext cx="146304" cy="0"/>
+          </a:xfrm>
+          <a:prstGeom prst="line">
+            <a:avLst/>
+          </a:prstGeom>
+          <a:noFill/>
+          <a:ln w="22225">
+            <a:solidFill>
+              <a:srgbClr val="8A8A92"/>
+            </a:solidFill>
+            <a:prstDash val="solid"/>
+            <a:tailEnd type="triangle"/>
+          </a:ln>
+        </p:spPr>
+      </p:sp>
+      <p:sp>
+        <p:nvSpPr>
+          <p:cNvPr id="22" name="Shape 19"/>
+          <p:cNvSpPr/>
+          <p:nvPr/>
+        </p:nvSpPr>
+        <p:spPr>
+          <a:xfrm>
+            <a:off x="7269480" y="1600200"/>
+            <a:ext cx="2057400" cy="1188720"/>
+          </a:xfrm>
+          <a:prstGeom prst="roundRect">
+            <a:avLst>
+              <a:gd name="adj" fmla="val 9231"/>
+            </a:avLst>
+          </a:prstGeom>
+          <a:solidFill>
+            <a:srgbClr val="FFFFFF"/>
+          </a:solidFill>
+          <a:ln w="12700">
+            <a:solidFill>
+              <a:srgbClr val="DCDCE0"/>
+            </a:solidFill>
+            <a:prstDash val="solid"/>
+          </a:ln>
+        </p:spPr>
+      </p:sp>
+      <p:sp>
+        <p:nvSpPr>
+          <p:cNvPr id="23" name="Text 20"/>
+          <p:cNvSpPr txBox="1"/>
+          <p:nvPr/>
+        </p:nvSpPr>
+        <p:spPr>
+          <a:xfrm>
+            <a:off x="7415784" y="1691640"/>
+            <a:ext cx="1783080" cy="201168"/>
+          </a:xfrm>
+          <a:prstGeom prst="rect">
+            <a:avLst/>
+          </a:prstGeom>
+          <a:noFill/>
+          <a:ln/>
+        </p:spPr>
+        <p:txBody>
+          <a:bodyPr wrap="square" lIns="0" tIns="0" rIns="0" bIns="0" rtlCol="0" anchor="t"/>
+          <a:lstStyle/>
+          <a:p>
+            <a:pPr indent="0" marL="0">
+              <a:buNone/>
+            </a:pPr>
+            <a:r>
+              <a:rPr lang="en-US" sz="1000" b="1" dirty="0">
+                <a:solidFill>
+                  <a:srgbClr val="0A7F44"/>
+                </a:solidFill>
+              </a:rPr>
+              <a:t>4 · SPEC</a:t>
+            </a:r>
+            <a:endParaRPr lang="en-US" sz="1000" dirty="0"/>
+          </a:p>
+        </p:txBody>
+      </p:sp>
+      <p:sp>
+        <p:nvSpPr>
+          <p:cNvPr id="24" name="Text 21"/>
+          <p:cNvSpPr txBox="1"/>
+          <p:nvPr/>
+        </p:nvSpPr>
+        <p:spPr>
+          <a:xfrm>
+            <a:off x="7415784" y="1920240"/>
+            <a:ext cx="1810512" cy="292608"/>
+          </a:xfrm>
+          <a:prstGeom prst="rect">
+            <a:avLst/>
+          </a:prstGeom>
+          <a:noFill/>
+          <a:ln/>
+        </p:spPr>
+        <p:txBody>
+          <a:bodyPr wrap="square" lIns="0" tIns="0" rIns="0" bIns="0" rtlCol="0" anchor="t"/>
+          <a:lstStyle/>
+          <a:p>
+            <a:pPr indent="0" marL="0">
+              <a:buNone/>
+            </a:pPr>
+            <a:r>
+              <a:rPr lang="en-US" sz="1350" b="1" dirty="0">
+                <a:solidFill>
+                  <a:srgbClr val="0A0A0B"/>
+                </a:solidFill>
+              </a:rPr>
+              <a:t>Muse Glimmer drafts</a:t>
+            </a:r>
+            <a:endParaRPr lang="en-US" sz="1350" dirty="0"/>
+          </a:p>
+        </p:txBody>
+      </p:sp>
+      <p:sp>
+        <p:nvSpPr>
+          <p:cNvPr id="25" name="Text 22"/>
+          <p:cNvSpPr txBox="1"/>
+          <p:nvPr/>
+        </p:nvSpPr>
+        <p:spPr>
+          <a:xfrm>
+            <a:off x="7415784" y="2240280"/>
+            <a:ext cx="1810512" cy="502920"/>
+          </a:xfrm>
+          <a:prstGeom prst="rect">
+            <a:avLst/>
+          </a:prstGeom>
+          <a:noFill/>
+          <a:ln/>
+        </p:spPr>
+        <p:txBody>
+          <a:bodyPr wrap="square" lIns="0" tIns="0" rIns="0" bIns="0" rtlCol="0" anchor="t"/>
+          <a:lstStyle/>
+          <a:p>
+            <a:pPr indent="0" marL="0">
+              <a:buNone/>
+            </a:pPr>
+            <a:r>
+              <a:rPr lang="en-US" sz="1000" dirty="0">
+                <a:solidFill>
+                  <a:srgbClr val="55555C"/>
+                </a:solidFill>
+              </a:rPr>
+              <a:t>A person approves it</a:t>
+            </a:r>
+            <a:endParaRPr lang="en-US" sz="1000" dirty="0"/>
+          </a:p>
+        </p:txBody>
+      </p:sp>
+      <p:sp>
+        <p:nvSpPr>
+          <p:cNvPr id="26" name="Shape 23"/>
+          <p:cNvSpPr/>
+          <p:nvPr/>
+        </p:nvSpPr>
+        <p:spPr>
+          <a:xfrm>
+            <a:off x="9345168" y="2194560"/>
+            <a:ext cx="146304" cy="0"/>
+          </a:xfrm>
+          <a:prstGeom prst="line">
+            <a:avLst/>
+          </a:prstGeom>
+          <a:noFill/>
+          <a:ln w="22225">
+            <a:solidFill>
+              <a:srgbClr val="8A8A92"/>
+            </a:solidFill>
+            <a:prstDash val="solid"/>
+            <a:tailEnd type="triangle"/>
+          </a:ln>
+        </p:spPr>
+      </p:sp>
+      <p:sp>
+        <p:nvSpPr>
+          <p:cNvPr id="27" name="Shape 24"/>
+          <p:cNvSpPr/>
+          <p:nvPr/>
+        </p:nvSpPr>
+        <p:spPr>
+          <a:xfrm>
+            <a:off x="9509760" y="1600200"/>
+            <a:ext cx="2057400" cy="1188720"/>
+          </a:xfrm>
+          <a:prstGeom prst="roundRect">
+            <a:avLst>
+              <a:gd name="adj" fmla="val 9231"/>
+            </a:avLst>
+          </a:prstGeom>
+          <a:solidFill>
+            <a:srgbClr val="FFFFFF"/>
+          </a:solidFill>
+          <a:ln w="12700">
+            <a:solidFill>
+              <a:srgbClr val="DCDCE0"/>
+            </a:solidFill>
+            <a:prstDash val="solid"/>
+          </a:ln>
+        </p:spPr>
+      </p:sp>
+      <p:sp>
+        <p:nvSpPr>
+          <p:cNvPr id="28" name="Text 25"/>
+          <p:cNvSpPr txBox="1"/>
+          <p:nvPr/>
+        </p:nvSpPr>
+        <p:spPr>
+          <a:xfrm>
+            <a:off x="9656064" y="1691640"/>
+            <a:ext cx="1783080" cy="201168"/>
+          </a:xfrm>
+          <a:prstGeom prst="rect">
+            <a:avLst/>
+          </a:prstGeom>
+          <a:noFill/>
+          <a:ln/>
+        </p:spPr>
+        <p:txBody>
+          <a:bodyPr wrap="square" lIns="0" tIns="0" rIns="0" bIns="0" rtlCol="0" anchor="t"/>
+          <a:lstStyle/>
+          <a:p>
+            <a:pPr indent="0" marL="0">
+              <a:buNone/>
+            </a:pPr>
+            <a:r>
+              <a:rPr lang="en-US" sz="1000" b="1" dirty="0">
+                <a:solidFill>
+                  <a:srgbClr val="0A7F44"/>
+                </a:solidFill>
+              </a:rPr>
+              <a:t>5 · BUILD</a:t>
+            </a:r>
+            <a:endParaRPr lang="en-US" sz="1000" dirty="0"/>
+          </a:p>
+        </p:txBody>
+      </p:sp>
+      <p:sp>
+        <p:nvSpPr>
+          <p:cNvPr id="29" name="Text 26"/>
+          <p:cNvSpPr txBox="1"/>
+          <p:nvPr/>
+        </p:nvSpPr>
+        <p:spPr>
+          <a:xfrm>
+            <a:off x="9656064" y="1920240"/>
+            <a:ext cx="1810512" cy="292608"/>
+          </a:xfrm>
+          <a:prstGeom prst="rect">
+            <a:avLst/>
+          </a:prstGeom>
+          <a:noFill/>
+          <a:ln/>
+        </p:spPr>
+        <p:txBody>
+          <a:bodyPr wrap="square" lIns="0" tIns="0" rIns="0" bIns="0" rtlCol="0" anchor="t"/>
+          <a:lstStyle/>
+          <a:p>
+            <a:pPr indent="0" marL="0">
+              <a:buNone/>
+            </a:pPr>
+            <a:r>
+              <a:rPr lang="en-US" sz="1350" b="1" dirty="0">
+                <a:solidFill>
+                  <a:srgbClr val="0A0A0B"/>
+                </a:solidFill>
+              </a:rPr>
+              <a:t>A coding agent</a:t>
+            </a:r>
+            <a:endParaRPr lang="en-US" sz="1350" dirty="0"/>
+          </a:p>
+        </p:txBody>
+      </p:sp>
+      <p:sp>
+        <p:nvSpPr>
+          <p:cNvPr id="30" name="Text 27"/>
+          <p:cNvSpPr txBox="1"/>
+          <p:nvPr/>
+        </p:nvSpPr>
+        <p:spPr>
+          <a:xfrm>
+            <a:off x="9656064" y="2240280"/>
+            <a:ext cx="1810512" cy="502920"/>
+          </a:xfrm>
+          <a:prstGeom prst="rect">
+            <a:avLst/>
+          </a:prstGeom>
+          <a:noFill/>
+          <a:ln/>
+        </p:spPr>
+        <p:txBody>
+          <a:bodyPr wrap="square" lIns="0" tIns="0" rIns="0" bIns="0" rtlCol="0" anchor="t"/>
+          <a:lstStyle/>
+          <a:p>
+            <a:pPr indent="0" marL="0">
+              <a:buNone/>
+            </a:pPr>
+            <a:r>
+              <a:rPr lang="en-US" sz="1000" dirty="0">
+                <a:solidFill>
+                  <a:srgbClr val="55555C"/>
+                </a:solidFill>
+              </a:rPr>
+              <a:t>Own branch; never reads community text</a:t>
+            </a:r>
+            <a:endParaRPr lang="en-US" sz="1000" dirty="0"/>
+          </a:p>
+        </p:txBody>
+      </p:sp>
+      <p:sp>
+        <p:nvSpPr>
+          <p:cNvPr id="31" name="Shape 28"/>
+          <p:cNvSpPr/>
+          <p:nvPr/>
+        </p:nvSpPr>
+        <p:spPr>
+          <a:xfrm>
+            <a:off x="548640" y="2926080"/>
+            <a:ext cx="6949440" cy="1371600"/>
+          </a:xfrm>
+          <a:prstGeom prst="roundRect">
+            <a:avLst>
+              <a:gd name="adj" fmla="val 8000"/>
             </a:avLst>
           </a:prstGeom>
           <a:solidFill>
@@ -24783,6 +24547,1274 @@
       </p:sp>
       <p:sp>
         <p:nvSpPr>
+          <p:cNvPr id="32" name="Text 29"/>
+          <p:cNvSpPr txBox="1"/>
+          <p:nvPr/>
+        </p:nvSpPr>
+        <p:spPr>
+          <a:xfrm>
+            <a:off x="749808" y="3017520"/>
+            <a:ext cx="6400800" cy="256032"/>
+          </a:xfrm>
+          <a:prstGeom prst="rect">
+            <a:avLst/>
+          </a:prstGeom>
+          <a:noFill/>
+          <a:ln/>
+        </p:spPr>
+        <p:txBody>
+          <a:bodyPr wrap="square" lIns="0" tIns="0" rIns="0" bIns="0" rtlCol="0" anchor="t"/>
+          <a:lstStyle/>
+          <a:p>
+            <a:pPr indent="0" marL="0">
+              <a:buNone/>
+            </a:pPr>
+            <a:r>
+              <a:rPr lang="en-US" sz="1200" b="1" dirty="0">
+                <a:solidFill>
+                  <a:srgbClr val="0A7F44"/>
+                </a:solidFill>
+              </a:rPr>
+              <a:t>6 · NINE GATES · stops at the first failure</a:t>
+            </a:r>
+            <a:endParaRPr lang="en-US" sz="1200" dirty="0"/>
+          </a:p>
+        </p:txBody>
+      </p:sp>
+      <p:sp>
+        <p:nvSpPr>
+          <p:cNvPr id="33" name="Shape 30"/>
+          <p:cNvSpPr/>
+          <p:nvPr/>
+        </p:nvSpPr>
+        <p:spPr>
+          <a:xfrm>
+            <a:off x="749808" y="3383280"/>
+            <a:ext cx="1298448" cy="310896"/>
+          </a:xfrm>
+          <a:prstGeom prst="roundRect">
+            <a:avLst>
+              <a:gd name="adj" fmla="val 50000"/>
+            </a:avLst>
+          </a:prstGeom>
+          <a:solidFill>
+            <a:srgbClr val="FFFFFF"/>
+          </a:solidFill>
+          <a:ln w="12700">
+            <a:solidFill>
+              <a:srgbClr val="FFFFFF"/>
+            </a:solidFill>
+            <a:prstDash val="solid"/>
+          </a:ln>
+        </p:spPr>
+      </p:sp>
+      <p:sp>
+        <p:nvSpPr>
+          <p:cNvPr id="34" name="Text 31"/>
+          <p:cNvSpPr txBox="1"/>
+          <p:nvPr/>
+        </p:nvSpPr>
+        <p:spPr>
+          <a:xfrm>
+            <a:off x="749808" y="3383280"/>
+            <a:ext cx="1298448" cy="310896"/>
+          </a:xfrm>
+          <a:prstGeom prst="rect">
+            <a:avLst/>
+          </a:prstGeom>
+          <a:noFill/>
+          <a:ln/>
+        </p:spPr>
+        <p:txBody>
+          <a:bodyPr wrap="square" lIns="0" tIns="0" rIns="0" bIns="0" rtlCol="0" anchor="ctr"/>
+          <a:lstStyle/>
+          <a:p>
+            <a:pPr algn="ctr" indent="0" marL="0">
+              <a:buNone/>
+            </a:pPr>
+            <a:r>
+              <a:rPr lang="en-US" sz="950" b="1" dirty="0">
+                <a:solidFill>
+                  <a:srgbClr val="0A7F44"/>
+                </a:solidFill>
+              </a:rPr>
+              <a:t>policy</a:t>
+            </a:r>
+            <a:endParaRPr lang="en-US" sz="950" dirty="0"/>
+          </a:p>
+        </p:txBody>
+      </p:sp>
+      <p:sp>
+        <p:nvSpPr>
+          <p:cNvPr id="35" name="Shape 32"/>
+          <p:cNvSpPr/>
+          <p:nvPr/>
+        </p:nvSpPr>
+        <p:spPr>
+          <a:xfrm>
+            <a:off x="2093976" y="3383280"/>
+            <a:ext cx="1298448" cy="310896"/>
+          </a:xfrm>
+          <a:prstGeom prst="roundRect">
+            <a:avLst>
+              <a:gd name="adj" fmla="val 50000"/>
+            </a:avLst>
+          </a:prstGeom>
+          <a:solidFill>
+            <a:srgbClr val="FFFFFF"/>
+          </a:solidFill>
+          <a:ln w="12700">
+            <a:solidFill>
+              <a:srgbClr val="FFFFFF"/>
+            </a:solidFill>
+            <a:prstDash val="solid"/>
+          </a:ln>
+        </p:spPr>
+      </p:sp>
+      <p:sp>
+        <p:nvSpPr>
+          <p:cNvPr id="36" name="Text 33"/>
+          <p:cNvSpPr txBox="1"/>
+          <p:nvPr/>
+        </p:nvSpPr>
+        <p:spPr>
+          <a:xfrm>
+            <a:off x="2093976" y="3383280"/>
+            <a:ext cx="1298448" cy="310896"/>
+          </a:xfrm>
+          <a:prstGeom prst="rect">
+            <a:avLst/>
+          </a:prstGeom>
+          <a:noFill/>
+          <a:ln/>
+        </p:spPr>
+        <p:txBody>
+          <a:bodyPr wrap="square" lIns="0" tIns="0" rIns="0" bIns="0" rtlCol="0" anchor="ctr"/>
+          <a:lstStyle/>
+          <a:p>
+            <a:pPr algn="ctr" indent="0" marL="0">
+              <a:buNone/>
+            </a:pPr>
+            <a:r>
+              <a:rPr lang="en-US" sz="950" b="1" dirty="0">
+                <a:solidFill>
+                  <a:srgbClr val="0A7F44"/>
+                </a:solidFill>
+              </a:rPr>
+              <a:t>code scan</a:t>
+            </a:r>
+            <a:endParaRPr lang="en-US" sz="950" dirty="0"/>
+          </a:p>
+        </p:txBody>
+      </p:sp>
+      <p:sp>
+        <p:nvSpPr>
+          <p:cNvPr id="37" name="Shape 34"/>
+          <p:cNvSpPr/>
+          <p:nvPr/>
+        </p:nvSpPr>
+        <p:spPr>
+          <a:xfrm>
+            <a:off x="3438144" y="3383280"/>
+            <a:ext cx="1298448" cy="310896"/>
+          </a:xfrm>
+          <a:prstGeom prst="roundRect">
+            <a:avLst>
+              <a:gd name="adj" fmla="val 50000"/>
+            </a:avLst>
+          </a:prstGeom>
+          <a:solidFill>
+            <a:srgbClr val="FFFFFF"/>
+          </a:solidFill>
+          <a:ln w="12700">
+            <a:solidFill>
+              <a:srgbClr val="FFFFFF"/>
+            </a:solidFill>
+            <a:prstDash val="solid"/>
+          </a:ln>
+        </p:spPr>
+      </p:sp>
+      <p:sp>
+        <p:nvSpPr>
+          <p:cNvPr id="38" name="Text 35"/>
+          <p:cNvSpPr txBox="1"/>
+          <p:nvPr/>
+        </p:nvSpPr>
+        <p:spPr>
+          <a:xfrm>
+            <a:off x="3438144" y="3383280"/>
+            <a:ext cx="1298448" cy="310896"/>
+          </a:xfrm>
+          <a:prstGeom prst="rect">
+            <a:avLst/>
+          </a:prstGeom>
+          <a:noFill/>
+          <a:ln/>
+        </p:spPr>
+        <p:txBody>
+          <a:bodyPr wrap="square" lIns="0" tIns="0" rIns="0" bIns="0" rtlCol="0" anchor="ctr"/>
+          <a:lstStyle/>
+          <a:p>
+            <a:pPr algn="ctr" indent="0" marL="0">
+              <a:buNone/>
+            </a:pPr>
+            <a:r>
+              <a:rPr lang="en-US" sz="950" b="1" dirty="0">
+                <a:solidFill>
+                  <a:srgbClr val="0A7F44"/>
+                </a:solidFill>
+              </a:rPr>
+              <a:t>unit tests</a:t>
+            </a:r>
+            <a:endParaRPr lang="en-US" sz="950" dirty="0"/>
+          </a:p>
+        </p:txBody>
+      </p:sp>
+      <p:sp>
+        <p:nvSpPr>
+          <p:cNvPr id="39" name="Shape 36"/>
+          <p:cNvSpPr/>
+          <p:nvPr/>
+        </p:nvSpPr>
+        <p:spPr>
+          <a:xfrm>
+            <a:off x="4782312" y="3383280"/>
+            <a:ext cx="1298448" cy="310896"/>
+          </a:xfrm>
+          <a:prstGeom prst="roundRect">
+            <a:avLst>
+              <a:gd name="adj" fmla="val 50000"/>
+            </a:avLst>
+          </a:prstGeom>
+          <a:solidFill>
+            <a:srgbClr val="FFFFFF"/>
+          </a:solidFill>
+          <a:ln w="12700">
+            <a:solidFill>
+              <a:srgbClr val="FFFFFF"/>
+            </a:solidFill>
+            <a:prstDash val="solid"/>
+          </a:ln>
+        </p:spPr>
+      </p:sp>
+      <p:sp>
+        <p:nvSpPr>
+          <p:cNvPr id="40" name="Text 37"/>
+          <p:cNvSpPr txBox="1"/>
+          <p:nvPr/>
+        </p:nvSpPr>
+        <p:spPr>
+          <a:xfrm>
+            <a:off x="4782312" y="3383280"/>
+            <a:ext cx="1298448" cy="310896"/>
+          </a:xfrm>
+          <a:prstGeom prst="rect">
+            <a:avLst/>
+          </a:prstGeom>
+          <a:noFill/>
+          <a:ln/>
+        </p:spPr>
+        <p:txBody>
+          <a:bodyPr wrap="square" lIns="0" tIns="0" rIns="0" bIns="0" rtlCol="0" anchor="ctr"/>
+          <a:lstStyle/>
+          <a:p>
+            <a:pPr algn="ctr" indent="0" marL="0">
+              <a:buNone/>
+            </a:pPr>
+            <a:r>
+              <a:rPr lang="en-US" sz="950" b="1" dirty="0">
+                <a:solidFill>
+                  <a:srgbClr val="0A7F44"/>
+                </a:solidFill>
+              </a:rPr>
+              <a:t>crash matrix</a:t>
+            </a:r>
+            <a:endParaRPr lang="en-US" sz="950" dirty="0"/>
+          </a:p>
+        </p:txBody>
+      </p:sp>
+      <p:sp>
+        <p:nvSpPr>
+          <p:cNvPr id="41" name="Shape 38"/>
+          <p:cNvSpPr/>
+          <p:nvPr/>
+        </p:nvSpPr>
+        <p:spPr>
+          <a:xfrm>
+            <a:off x="6126480" y="3383280"/>
+            <a:ext cx="1298448" cy="310896"/>
+          </a:xfrm>
+          <a:prstGeom prst="roundRect">
+            <a:avLst>
+              <a:gd name="adj" fmla="val 50000"/>
+            </a:avLst>
+          </a:prstGeom>
+          <a:solidFill>
+            <a:srgbClr val="FFFFFF"/>
+          </a:solidFill>
+          <a:ln w="12700">
+            <a:solidFill>
+              <a:srgbClr val="FFFFFF"/>
+            </a:solidFill>
+            <a:prstDash val="solid"/>
+          </a:ln>
+        </p:spPr>
+      </p:sp>
+      <p:sp>
+        <p:nvSpPr>
+          <p:cNvPr id="42" name="Text 39"/>
+          <p:cNvSpPr txBox="1"/>
+          <p:nvPr/>
+        </p:nvSpPr>
+        <p:spPr>
+          <a:xfrm>
+            <a:off x="6126480" y="3383280"/>
+            <a:ext cx="1298448" cy="310896"/>
+          </a:xfrm>
+          <a:prstGeom prst="rect">
+            <a:avLst/>
+          </a:prstGeom>
+          <a:noFill/>
+          <a:ln/>
+        </p:spPr>
+        <p:txBody>
+          <a:bodyPr wrap="square" lIns="0" tIns="0" rIns="0" bIns="0" rtlCol="0" anchor="ctr"/>
+          <a:lstStyle/>
+          <a:p>
+            <a:pPr algn="ctr" indent="0" marL="0">
+              <a:buNone/>
+            </a:pPr>
+            <a:r>
+              <a:rPr lang="en-US" sz="950" b="1" dirty="0">
+                <a:solidFill>
+                  <a:srgbClr val="0A7F44"/>
+                </a:solidFill>
+              </a:rPr>
+              <a:t>red team</a:t>
+            </a:r>
+            <a:endParaRPr lang="en-US" sz="950" dirty="0"/>
+          </a:p>
+        </p:txBody>
+      </p:sp>
+      <p:sp>
+        <p:nvSpPr>
+          <p:cNvPr id="43" name="Shape 40"/>
+          <p:cNvSpPr/>
+          <p:nvPr/>
+        </p:nvSpPr>
+        <p:spPr>
+          <a:xfrm>
+            <a:off x="749808" y="3785616"/>
+            <a:ext cx="1298448" cy="310896"/>
+          </a:xfrm>
+          <a:prstGeom prst="roundRect">
+            <a:avLst>
+              <a:gd name="adj" fmla="val 50000"/>
+            </a:avLst>
+          </a:prstGeom>
+          <a:solidFill>
+            <a:srgbClr val="FFFFFF"/>
+          </a:solidFill>
+          <a:ln w="12700">
+            <a:solidFill>
+              <a:srgbClr val="FFFFFF"/>
+            </a:solidFill>
+            <a:prstDash val="solid"/>
+          </a:ln>
+        </p:spPr>
+      </p:sp>
+      <p:sp>
+        <p:nvSpPr>
+          <p:cNvPr id="44" name="Text 41"/>
+          <p:cNvSpPr txBox="1"/>
+          <p:nvPr/>
+        </p:nvSpPr>
+        <p:spPr>
+          <a:xfrm>
+            <a:off x="749808" y="3785616"/>
+            <a:ext cx="1298448" cy="310896"/>
+          </a:xfrm>
+          <a:prstGeom prst="rect">
+            <a:avLst/>
+          </a:prstGeom>
+          <a:noFill/>
+          <a:ln/>
+        </p:spPr>
+        <p:txBody>
+          <a:bodyPr wrap="square" lIns="0" tIns="0" rIns="0" bIns="0" rtlCol="0" anchor="ctr"/>
+          <a:lstStyle/>
+          <a:p>
+            <a:pPr algn="ctr" indent="0" marL="0">
+              <a:buNone/>
+            </a:pPr>
+            <a:r>
+              <a:rPr lang="en-US" sz="950" b="1" dirty="0">
+                <a:solidFill>
+                  <a:srgbClr val="0A7F44"/>
+                </a:solidFill>
+              </a:rPr>
+              <a:t>Messenger end to end</a:t>
+            </a:r>
+            <a:endParaRPr lang="en-US" sz="950" dirty="0"/>
+          </a:p>
+        </p:txBody>
+      </p:sp>
+      <p:sp>
+        <p:nvSpPr>
+          <p:cNvPr id="45" name="Shape 42"/>
+          <p:cNvSpPr/>
+          <p:nvPr/>
+        </p:nvSpPr>
+        <p:spPr>
+          <a:xfrm>
+            <a:off x="2093976" y="3785616"/>
+            <a:ext cx="1298448" cy="310896"/>
+          </a:xfrm>
+          <a:prstGeom prst="roundRect">
+            <a:avLst>
+              <a:gd name="adj" fmla="val 50000"/>
+            </a:avLst>
+          </a:prstGeom>
+          <a:solidFill>
+            <a:srgbClr val="FFFFFF"/>
+          </a:solidFill>
+          <a:ln w="12700">
+            <a:solidFill>
+              <a:srgbClr val="FFFFFF"/>
+            </a:solidFill>
+            <a:prstDash val="solid"/>
+          </a:ln>
+        </p:spPr>
+      </p:sp>
+      <p:sp>
+        <p:nvSpPr>
+          <p:cNvPr id="46" name="Text 43"/>
+          <p:cNvSpPr txBox="1"/>
+          <p:nvPr/>
+        </p:nvSpPr>
+        <p:spPr>
+          <a:xfrm>
+            <a:off x="2093976" y="3785616"/>
+            <a:ext cx="1298448" cy="310896"/>
+          </a:xfrm>
+          <a:prstGeom prst="rect">
+            <a:avLst/>
+          </a:prstGeom>
+          <a:noFill/>
+          <a:ln/>
+        </p:spPr>
+        <p:txBody>
+          <a:bodyPr wrap="square" lIns="0" tIns="0" rIns="0" bIns="0" rtlCol="0" anchor="ctr"/>
+          <a:lstStyle/>
+          <a:p>
+            <a:pPr algn="ctr" indent="0" marL="0">
+              <a:buNone/>
+            </a:pPr>
+            <a:r>
+              <a:rPr lang="en-US" sz="950" b="1" dirty="0">
+                <a:solidFill>
+                  <a:srgbClr val="0A7F44"/>
+                </a:solidFill>
+              </a:rPr>
+              <a:t>planner pass^3</a:t>
+            </a:r>
+            <a:endParaRPr lang="en-US" sz="950" dirty="0"/>
+          </a:p>
+        </p:txBody>
+      </p:sp>
+      <p:sp>
+        <p:nvSpPr>
+          <p:cNvPr id="47" name="Shape 44"/>
+          <p:cNvSpPr/>
+          <p:nvPr/>
+        </p:nvSpPr>
+        <p:spPr>
+          <a:xfrm>
+            <a:off x="3438144" y="3785616"/>
+            <a:ext cx="1298448" cy="310896"/>
+          </a:xfrm>
+          <a:prstGeom prst="roundRect">
+            <a:avLst>
+              <a:gd name="adj" fmla="val 50000"/>
+            </a:avLst>
+          </a:prstGeom>
+          <a:solidFill>
+            <a:srgbClr val="FFFFFF"/>
+          </a:solidFill>
+          <a:ln w="12700">
+            <a:solidFill>
+              <a:srgbClr val="FFFFFF"/>
+            </a:solidFill>
+            <a:prstDash val="solid"/>
+          </a:ln>
+        </p:spPr>
+      </p:sp>
+      <p:sp>
+        <p:nvSpPr>
+          <p:cNvPr id="48" name="Text 45"/>
+          <p:cNvSpPr txBox="1"/>
+          <p:nvPr/>
+        </p:nvSpPr>
+        <p:spPr>
+          <a:xfrm>
+            <a:off x="3438144" y="3785616"/>
+            <a:ext cx="1298448" cy="310896"/>
+          </a:xfrm>
+          <a:prstGeom prst="rect">
+            <a:avLst/>
+          </a:prstGeom>
+          <a:noFill/>
+          <a:ln/>
+        </p:spPr>
+        <p:txBody>
+          <a:bodyPr wrap="square" lIns="0" tIns="0" rIns="0" bIns="0" rtlCol="0" anchor="ctr"/>
+          <a:lstStyle/>
+          <a:p>
+            <a:pPr algn="ctr" indent="0" marL="0">
+              <a:buNone/>
+            </a:pPr>
+            <a:r>
+              <a:rPr lang="en-US" sz="950" b="1" dirty="0">
+                <a:solidFill>
+                  <a:srgbClr val="0A7F44"/>
+                </a:solidFill>
+              </a:rPr>
+              <a:t>oracle</a:t>
+            </a:r>
+            <a:endParaRPr lang="en-US" sz="950" dirty="0"/>
+          </a:p>
+        </p:txBody>
+      </p:sp>
+      <p:sp>
+        <p:nvSpPr>
+          <p:cNvPr id="49" name="Shape 46"/>
+          <p:cNvSpPr/>
+          <p:nvPr/>
+        </p:nvSpPr>
+        <p:spPr>
+          <a:xfrm>
+            <a:off x="4782312" y="3785616"/>
+            <a:ext cx="1298448" cy="310896"/>
+          </a:xfrm>
+          <a:prstGeom prst="roundRect">
+            <a:avLst>
+              <a:gd name="adj" fmla="val 50000"/>
+            </a:avLst>
+          </a:prstGeom>
+          <a:solidFill>
+            <a:srgbClr val="FFFFFF"/>
+          </a:solidFill>
+          <a:ln w="12700">
+            <a:solidFill>
+              <a:srgbClr val="FFFFFF"/>
+            </a:solidFill>
+            <a:prstDash val="solid"/>
+          </a:ln>
+        </p:spPr>
+      </p:sp>
+      <p:sp>
+        <p:nvSpPr>
+          <p:cNvPr id="50" name="Text 47"/>
+          <p:cNvSpPr txBox="1"/>
+          <p:nvPr/>
+        </p:nvSpPr>
+        <p:spPr>
+          <a:xfrm>
+            <a:off x="4782312" y="3785616"/>
+            <a:ext cx="1298448" cy="310896"/>
+          </a:xfrm>
+          <a:prstGeom prst="rect">
+            <a:avLst/>
+          </a:prstGeom>
+          <a:noFill/>
+          <a:ln/>
+        </p:spPr>
+        <p:txBody>
+          <a:bodyPr wrap="square" lIns="0" tIns="0" rIns="0" bIns="0" rtlCol="0" anchor="ctr"/>
+          <a:lstStyle/>
+          <a:p>
+            <a:pPr algn="ctr" indent="0" marL="0">
+              <a:buNone/>
+            </a:pPr>
+            <a:r>
+              <a:rPr lang="en-US" sz="950" b="1" dirty="0">
+                <a:solidFill>
+                  <a:srgbClr val="0A7F44"/>
+                </a:solidFill>
+              </a:rPr>
+              <a:t>privacy canary</a:t>
+            </a:r>
+            <a:endParaRPr lang="en-US" sz="950" dirty="0"/>
+          </a:p>
+        </p:txBody>
+      </p:sp>
+      <p:sp>
+        <p:nvSpPr>
+          <p:cNvPr id="51" name="Shape 48"/>
+          <p:cNvSpPr/>
+          <p:nvPr/>
+        </p:nvSpPr>
+        <p:spPr>
+          <a:xfrm>
+            <a:off x="7543800" y="3611880"/>
+            <a:ext cx="274320" cy="0"/>
+          </a:xfrm>
+          <a:prstGeom prst="line">
+            <a:avLst/>
+          </a:prstGeom>
+          <a:noFill/>
+          <a:ln w="22225">
+            <a:solidFill>
+              <a:srgbClr val="8A8A92"/>
+            </a:solidFill>
+            <a:prstDash val="solid"/>
+            <a:tailEnd type="triangle"/>
+          </a:ln>
+        </p:spPr>
+      </p:sp>
+      <p:sp>
+        <p:nvSpPr>
+          <p:cNvPr id="52" name="Shape 49"/>
+          <p:cNvSpPr/>
+          <p:nvPr/>
+        </p:nvSpPr>
+        <p:spPr>
+          <a:xfrm>
+            <a:off x="7863840" y="2926080"/>
+            <a:ext cx="3749040" cy="1371600"/>
+          </a:xfrm>
+          <a:prstGeom prst="roundRect">
+            <a:avLst>
+              <a:gd name="adj" fmla="val 8000"/>
+            </a:avLst>
+          </a:prstGeom>
+          <a:solidFill>
+            <a:srgbClr val="FFFFFF"/>
+          </a:solidFill>
+          <a:ln w="25400">
+            <a:solidFill>
+              <a:srgbClr val="D1352B"/>
+            </a:solidFill>
+            <a:prstDash val="solid"/>
+          </a:ln>
+        </p:spPr>
+      </p:sp>
+      <p:sp>
+        <p:nvSpPr>
+          <p:cNvPr id="53" name="Text 50"/>
+          <p:cNvSpPr txBox="1"/>
+          <p:nvPr/>
+        </p:nvSpPr>
+        <p:spPr>
+          <a:xfrm>
+            <a:off x="8046720" y="3017520"/>
+            <a:ext cx="3383280" cy="256032"/>
+          </a:xfrm>
+          <a:prstGeom prst="rect">
+            <a:avLst/>
+          </a:prstGeom>
+          <a:noFill/>
+          <a:ln/>
+        </p:spPr>
+        <p:txBody>
+          <a:bodyPr wrap="square" lIns="0" tIns="0" rIns="0" bIns="0" rtlCol="0" anchor="t"/>
+          <a:lstStyle/>
+          <a:p>
+            <a:pPr indent="0" marL="0">
+              <a:buNone/>
+            </a:pPr>
+            <a:r>
+              <a:rPr lang="en-US" sz="1200" b="1" dirty="0">
+                <a:solidFill>
+                  <a:srgbClr val="D1352B"/>
+                </a:solidFill>
+              </a:rPr>
+              <a:t>7 · SHIP, OR ROLL BACK</a:t>
+            </a:r>
+            <a:endParaRPr lang="en-US" sz="1200" dirty="0"/>
+          </a:p>
+        </p:txBody>
+      </p:sp>
+      <p:sp>
+        <p:nvSpPr>
+          <p:cNvPr id="54" name="Text 51"/>
+          <p:cNvSpPr txBox="1"/>
+          <p:nvPr/>
+        </p:nvSpPr>
+        <p:spPr>
+          <a:xfrm>
+            <a:off x="8046720" y="3337560"/>
+            <a:ext cx="3429000" cy="914400"/>
+          </a:xfrm>
+          <a:prstGeom prst="rect">
+            <a:avLst/>
+          </a:prstGeom>
+          <a:noFill/>
+          <a:ln/>
+        </p:spPr>
+        <p:txBody>
+          <a:bodyPr wrap="square" lIns="0" tIns="0" rIns="0" bIns="0" rtlCol="0" anchor="t"/>
+          <a:lstStyle/>
+          <a:p>
+            <a:pPr indent="0" marL="0">
+              <a:buNone/>
+            </a:pPr>
+            <a:r>
+              <a:rPr lang="en-US" sz="1100" dirty="0">
+                <a:solidFill>
+                  <a:srgbClr val="55555C"/>
+                </a:solidFill>
+              </a:rPr>
+              <a:t>A small canary that turns itself off if thumbs down rise. Anything beyond a safe setting waits for a person.</a:t>
+            </a:r>
+            <a:endParaRPr lang="en-US" sz="1100" dirty="0"/>
+          </a:p>
+        </p:txBody>
+      </p:sp>
+      <p:sp>
+        <p:nvSpPr>
+          <p:cNvPr id="55" name="Shape 52"/>
+          <p:cNvSpPr/>
+          <p:nvPr/>
+        </p:nvSpPr>
+        <p:spPr>
+          <a:xfrm>
+            <a:off x="548640" y="4434840"/>
+            <a:ext cx="5440680" cy="1188720"/>
+          </a:xfrm>
+          <a:prstGeom prst="roundRect">
+            <a:avLst>
+              <a:gd name="adj" fmla="val 9231"/>
+            </a:avLst>
+          </a:prstGeom>
+          <a:solidFill>
+            <a:srgbClr val="E9F3EC"/>
+          </a:solidFill>
+          <a:ln w="12700">
+            <a:solidFill>
+              <a:srgbClr val="E9F3EC"/>
+            </a:solidFill>
+            <a:prstDash val="solid"/>
+          </a:ln>
+        </p:spPr>
+      </p:sp>
+      <p:sp>
+        <p:nvSpPr>
+          <p:cNvPr id="56" name="Text 53"/>
+          <p:cNvSpPr txBox="1"/>
+          <p:nvPr/>
+        </p:nvSpPr>
+        <p:spPr>
+          <a:xfrm>
+            <a:off x="731520" y="4526280"/>
+            <a:ext cx="1828800" cy="201168"/>
+          </a:xfrm>
+          <a:prstGeom prst="rect">
+            <a:avLst/>
+          </a:prstGeom>
+          <a:noFill/>
+          <a:ln/>
+        </p:spPr>
+        <p:txBody>
+          <a:bodyPr wrap="square" lIns="0" tIns="0" rIns="0" bIns="0" rtlCol="0" anchor="t"/>
+          <a:lstStyle/>
+          <a:p>
+            <a:pPr indent="0" marL="0">
+              <a:buNone/>
+            </a:pPr>
+            <a:r>
+              <a:rPr lang="en-US" sz="1000" b="1" spc="100" kern="0" dirty="0">
+                <a:solidFill>
+                  <a:srgbClr val="0A7F44"/>
+                </a:solidFill>
+              </a:rPr>
+              <a:t>SHIPPED</a:t>
+            </a:r>
+            <a:endParaRPr lang="en-US" sz="1000" dirty="0"/>
+          </a:p>
+        </p:txBody>
+      </p:sp>
+      <p:sp>
+        <p:nvSpPr>
+          <p:cNvPr id="57" name="Text 54"/>
+          <p:cNvSpPr txBox="1"/>
+          <p:nvPr/>
+        </p:nvSpPr>
+        <p:spPr>
+          <a:xfrm>
+            <a:off x="731520" y="4754880"/>
+            <a:ext cx="5120640" cy="292608"/>
+          </a:xfrm>
+          <a:prstGeom prst="rect">
+            <a:avLst/>
+          </a:prstGeom>
+          <a:noFill/>
+          <a:ln/>
+        </p:spPr>
+        <p:txBody>
+          <a:bodyPr wrap="square" lIns="0" tIns="0" rIns="0" bIns="0" rtlCol="0" anchor="t"/>
+          <a:lstStyle/>
+          <a:p>
+            <a:pPr indent="0" marL="0">
+              <a:buNone/>
+            </a:pPr>
+            <a:r>
+              <a:rPr lang="en-US" sz="1400" b="1" dirty="0">
+                <a:solidFill>
+                  <a:srgbClr val="0A0A0B"/>
+                </a:solidFill>
+              </a:rPr>
+              <a:t>"Ask me later" → ask.hour 12 → 18</a:t>
+            </a:r>
+            <a:endParaRPr lang="en-US" sz="1400" dirty="0"/>
+          </a:p>
+        </p:txBody>
+      </p:sp>
+      <p:sp>
+        <p:nvSpPr>
+          <p:cNvPr id="58" name="Text 55"/>
+          <p:cNvSpPr txBox="1"/>
+          <p:nvPr/>
+        </p:nvSpPr>
+        <p:spPr>
+          <a:xfrm>
+            <a:off x="731520" y="5074920"/>
+            <a:ext cx="5120640" cy="502920"/>
+          </a:xfrm>
+          <a:prstGeom prst="rect">
+            <a:avLst/>
+          </a:prstGeom>
+          <a:noFill/>
+          <a:ln/>
+        </p:spPr>
+        <p:txBody>
+          <a:bodyPr wrap="square" lIns="0" tIns="0" rIns="0" bIns="0" rtlCol="0" anchor="t"/>
+          <a:lstStyle/>
+          <a:p>
+            <a:pPr indent="0" marL="0">
+              <a:buNone/>
+            </a:pPr>
+            <a:r>
+              <a:rPr lang="en-US" sz="1050" dirty="0">
+                <a:solidFill>
+                  <a:srgbClr val="55555C"/>
+                </a:solidFill>
+              </a:rPr>
+              <a:t>Approved as a safe setting, shipped to 5 of 31 beta members: thumbs down 29% → 23% over 7 days, promoted.</a:t>
+            </a:r>
+            <a:endParaRPr lang="en-US" sz="1050" dirty="0"/>
+          </a:p>
+        </p:txBody>
+      </p:sp>
+      <p:sp>
+        <p:nvSpPr>
+          <p:cNvPr id="59" name="Shape 56"/>
+          <p:cNvSpPr/>
+          <p:nvPr/>
+        </p:nvSpPr>
+        <p:spPr>
+          <a:xfrm>
+            <a:off x="6172200" y="4434840"/>
+            <a:ext cx="5440680" cy="1188720"/>
+          </a:xfrm>
+          <a:prstGeom prst="roundRect">
+            <a:avLst>
+              <a:gd name="adj" fmla="val 9231"/>
+            </a:avLst>
+          </a:prstGeom>
+          <a:solidFill>
+            <a:srgbClr val="FBEAE9"/>
+          </a:solidFill>
+          <a:ln w="12700">
+            <a:solidFill>
+              <a:srgbClr val="FBEAE9"/>
+            </a:solidFill>
+            <a:prstDash val="solid"/>
+          </a:ln>
+        </p:spPr>
+      </p:sp>
+      <p:sp>
+        <p:nvSpPr>
+          <p:cNvPr id="60" name="Text 57"/>
+          <p:cNvSpPr txBox="1"/>
+          <p:nvPr/>
+        </p:nvSpPr>
+        <p:spPr>
+          <a:xfrm>
+            <a:off x="6355080" y="4526280"/>
+            <a:ext cx="2743200" cy="201168"/>
+          </a:xfrm>
+          <a:prstGeom prst="rect">
+            <a:avLst/>
+          </a:prstGeom>
+          <a:noFill/>
+          <a:ln/>
+        </p:spPr>
+        <p:txBody>
+          <a:bodyPr wrap="square" lIns="0" tIns="0" rIns="0" bIns="0" rtlCol="0" anchor="t"/>
+          <a:lstStyle/>
+          <a:p>
+            <a:pPr indent="0" marL="0">
+              <a:buNone/>
+            </a:pPr>
+            <a:r>
+              <a:rPr lang="en-US" sz="1000" b="1" spc="100" kern="0" dirty="0">
+                <a:solidFill>
+                  <a:srgbClr val="D1352B"/>
+                </a:solidFill>
+              </a:rPr>
+              <a:t>ROLLED BACK BY ITSELF</a:t>
+            </a:r>
+            <a:endParaRPr lang="en-US" sz="1000" dirty="0"/>
+          </a:p>
+        </p:txBody>
+      </p:sp>
+      <p:sp>
+        <p:nvSpPr>
+          <p:cNvPr id="61" name="Text 58"/>
+          <p:cNvSpPr txBox="1"/>
+          <p:nvPr/>
+        </p:nvSpPr>
+        <p:spPr>
+          <a:xfrm>
+            <a:off x="6355080" y="4754880"/>
+            <a:ext cx="5120640" cy="292608"/>
+          </a:xfrm>
+          <a:prstGeom prst="rect">
+            <a:avLst/>
+          </a:prstGeom>
+          <a:noFill/>
+          <a:ln/>
+        </p:spPr>
+        <p:txBody>
+          <a:bodyPr wrap="square" lIns="0" tIns="0" rIns="0" bIns="0" rtlCol="0" anchor="t"/>
+          <a:lstStyle/>
+          <a:p>
+            <a:pPr indent="0" marL="0">
+              <a:buNone/>
+            </a:pPr>
+            <a:r>
+              <a:rPr lang="en-US" sz="1400" b="1" dirty="0">
+                <a:solidFill>
+                  <a:srgbClr val="0A0A0B"/>
+                </a:solidFill>
+              </a:rPr>
+              <a:t>A planted bad change: ask.ahead 3 → 2</a:t>
+            </a:r>
+            <a:endParaRPr lang="en-US" sz="1400" dirty="0"/>
+          </a:p>
+        </p:txBody>
+      </p:sp>
+      <p:sp>
+        <p:nvSpPr>
+          <p:cNvPr id="62" name="Text 59"/>
+          <p:cNvSpPr txBox="1"/>
+          <p:nvPr/>
+        </p:nvSpPr>
+        <p:spPr>
+          <a:xfrm>
+            <a:off x="6355080" y="5074920"/>
+            <a:ext cx="5120640" cy="502920"/>
+          </a:xfrm>
+          <a:prstGeom prst="rect">
+            <a:avLst/>
+          </a:prstGeom>
+          <a:noFill/>
+          <a:ln/>
+        </p:spPr>
+        <p:txBody>
+          <a:bodyPr wrap="square" lIns="0" tIns="0" rIns="0" bIns="0" rtlCol="0" anchor="t"/>
+          <a:lstStyle/>
+          <a:p>
+            <a:pPr indent="0" marL="0">
+              <a:buNone/>
+            </a:pPr>
+            <a:r>
+              <a:rPr lang="en-US" sz="1050" dirty="0">
+                <a:solidFill>
+                  <a:srgbClr val="55555C"/>
+                </a:solidFill>
+              </a:rPr>
+              <a:t>Sent to a canary of 8: thumbs down on it went from 40% to 60%, and the monitor turned it off with no one asked.</a:t>
+            </a:r>
+            <a:endParaRPr lang="en-US" sz="1050" dirty="0"/>
+          </a:p>
+        </p:txBody>
+      </p:sp>
+      <p:sp>
+        <p:nvSpPr>
+          <p:cNvPr id="63" name="Shape 60"/>
+          <p:cNvSpPr/>
+          <p:nvPr/>
+        </p:nvSpPr>
+        <p:spPr>
+          <a:xfrm>
+            <a:off x="548640" y="5760720"/>
+            <a:ext cx="11064240" cy="502920"/>
+          </a:xfrm>
+          <a:prstGeom prst="roundRect">
+            <a:avLst>
+              <a:gd name="adj" fmla="val 21818"/>
+            </a:avLst>
+          </a:prstGeom>
+          <a:solidFill>
+            <a:srgbClr val="0A0A0B"/>
+          </a:solidFill>
+          <a:ln w="12700">
+            <a:solidFill>
+              <a:srgbClr val="0A0A0B"/>
+            </a:solidFill>
+            <a:prstDash val="solid"/>
+          </a:ln>
+        </p:spPr>
+      </p:sp>
+      <p:sp>
+        <p:nvSpPr>
+          <p:cNvPr id="64" name="Text 61"/>
+          <p:cNvSpPr txBox="1"/>
+          <p:nvPr/>
+        </p:nvSpPr>
+        <p:spPr>
+          <a:xfrm>
+            <a:off x="777240" y="5760720"/>
+            <a:ext cx="1463040" cy="502920"/>
+          </a:xfrm>
+          <a:prstGeom prst="rect">
+            <a:avLst/>
+          </a:prstGeom>
+          <a:noFill/>
+          <a:ln/>
+        </p:spPr>
+        <p:txBody>
+          <a:bodyPr wrap="square" lIns="0" tIns="0" rIns="0" bIns="0" rtlCol="0" anchor="ctr"/>
+          <a:lstStyle/>
+          <a:p>
+            <a:pPr indent="0" marL="0">
+              <a:buNone/>
+            </a:pPr>
+            <a:r>
+              <a:rPr lang="en-US" sz="1100" b="1" dirty="0">
+                <a:solidFill>
+                  <a:srgbClr val="FFFFFF"/>
+                </a:solidFill>
+              </a:rPr>
+              <a:t>NEVER-LIST</a:t>
+            </a:r>
+            <a:endParaRPr lang="en-US" sz="1100" dirty="0"/>
+          </a:p>
+        </p:txBody>
+      </p:sp>
+      <p:sp>
+        <p:nvSpPr>
+          <p:cNvPr id="65" name="Text 62"/>
+          <p:cNvSpPr txBox="1"/>
+          <p:nvPr/>
+        </p:nvSpPr>
+        <p:spPr>
+          <a:xfrm>
+            <a:off x="2240280" y="5760720"/>
+            <a:ext cx="9235440" cy="502920"/>
+          </a:xfrm>
+          <a:prstGeom prst="rect">
+            <a:avLst/>
+          </a:prstGeom>
+          <a:noFill/>
+          <a:ln/>
+        </p:spPr>
+        <p:txBody>
+          <a:bodyPr wrap="square" lIns="0" tIns="0" rIns="0" bIns="0" rtlCol="0" anchor="ctr"/>
+          <a:lstStyle/>
+          <a:p>
+            <a:pPr indent="0" marL="0">
+              <a:buNone/>
+            </a:pPr>
+            <a:r>
+              <a:rPr lang="en-US" sz="1200" dirty="0">
+                <a:solidFill>
+                  <a:srgbClr val="FFFFFF"/>
+                </a:solidFill>
+              </a:rPr>
+              <a:t>Booking without a yes · data off the server · a diagnosis or a dose · the guards · the tests · A2A · deployment</a:t>
+            </a:r>
+            <a:endParaRPr lang="en-US" sz="1200" dirty="0"/>
+          </a:p>
+        </p:txBody>
+      </p:sp>
+      <p:sp>
+        <p:nvSpPr>
+          <p:cNvPr id="25" name="Slide Number Placeholder 0"/>
+          <p:cNvSpPr>
+            <a:spLocks noGrp="1"/>
+          </p:cNvSpPr>
+          <p:nvPr>
+            <p:ph type="sldNum" sz="quarter" idx="4294967295"/>
+          </p:nvPr>
+        </p:nvSpPr>
+        <p:spPr>
+          <a:xfrm>
+            <a:off x="11247120" y="6446520"/>
+            <a:ext cx="411480" cy="228600"/>
+          </a:xfrm>
+          <a:prstGeom prst="rect">
+            <a:avLst/>
+          </a:prstGeom>
+          <a:extLst>
+            <a:ext uri="{C572A759-6A51-4108-AA02-DFA0A04FC94B}">
+              <ma14:wrappingTextBoxFlag xmlns:ma14="http://schemas.microsoft.com/office/mac/drawingml/2011/main" val="0"/>
+            </a:ext>
+          </a:extLst>
+        </p:spPr>
+        <p:txBody>
+          <a:bodyPr/>
+          <a:lstStyle>
+            <a:lvl1pPr>
+              <a:defRPr sz="1000">
+                <a:solidFill>
+                  <a:srgbClr val="8A8A92"/>
+                </a:solidFill>
+              </a:defRPr>
+            </a:lvl1pPr>
+          </a:lstStyle>
+          <a:p>
+            <a:pPr algn="r"/>
+            <a:fld id="{F7021451-1387-4CA6-816F-3879F97B5CBC}" type="slidenum">
+              <a:rPr b="0" lang="en-US"/>
+              <a:t>24</a:t>
+            </a:fld>
+            <a:endParaRPr lang="en-US"/>
+          </a:p>
+        </p:txBody>
+      </p:sp>
+    </p:spTree>
+  </p:cSld>
+  <p:clrMapOvr>
+    <a:masterClrMapping/>
+  </p:clrMapOvr>
+</p:sld>
+</file>
+
+<file path=ppt/slides/slide25.xml><?xml version="1.0" encoding="utf-8"?>
+<p:sld xmlns:a="http://schemas.openxmlformats.org/drawingml/2006/main" xmlns:r="http://schemas.openxmlformats.org/officeDocument/2006/relationships" xmlns:p="http://schemas.openxmlformats.org/presentationml/2006/main">
+  <p:cSld name="Slide 25">
+    <p:spTree>
+      <p:nvGrpSpPr>
+        <p:cNvPr id="1" name=""/>
+        <p:cNvGrpSpPr/>
+        <p:nvPr/>
+      </p:nvGrpSpPr>
+      <p:grpSpPr>
+        <a:xfrm>
+          <a:off x="0" y="0"/>
+          <a:ext cx="0" cy="0"/>
+          <a:chOff x="0" y="0"/>
+          <a:chExt cx="0" cy="0"/>
+        </a:xfrm>
+      </p:grpSpPr>
+      <p:sp>
+        <p:nvSpPr>
+          <p:cNvPr id="2" name="Text 0"/>
+          <p:cNvSpPr/>
+          <p:nvPr>
+            <p:ph idx="100" type="body" hasCustomPrompt="1"/>
+          </p:nvPr>
+        </p:nvSpPr>
+        <p:spPr>
+          <a:xfrm>
+            <a:off x="548640" y="384048"/>
+            <a:ext cx="11064240" cy="310896"/>
+          </a:xfrm>
+          <a:prstGeom prst="rect">
+            <a:avLst/>
+          </a:prstGeom>
+          <a:noFill/>
+          <a:ln/>
+        </p:spPr>
+        <p:txBody>
+          <a:bodyPr wrap="square" lIns="0" tIns="0" rIns="0" bIns="0" rtlCol="0" anchor="t"/>
+          <a:lstStyle/>
+          <a:p>
+            <a:pPr indent="0" marL="0">
+              <a:buNone/>
+            </a:pPr>
+            <a:r>
+              <a:rPr lang="en-US" sz="1300" b="1" spc="100" kern="0" dirty="0">
+                <a:solidFill>
+                  <a:srgbClr val="0A7F44"/>
+                </a:solidFill>
+              </a:rPr>
+              <a:t>MEASURED</a:t>
+            </a:r>
+            <a:endParaRPr lang="en-US" sz="1300" dirty="0"/>
+          </a:p>
+        </p:txBody>
+      </p:sp>
+      <p:sp>
+        <p:nvSpPr>
+          <p:cNvPr id="3" name="Text 0"/>
+          <p:cNvSpPr/>
+          <p:nvPr>
+            <p:ph idx="101" type="title" hasCustomPrompt="1"/>
+          </p:nvPr>
+        </p:nvSpPr>
+        <p:spPr>
+          <a:xfrm>
+            <a:off x="548640" y="713232"/>
+            <a:ext cx="11064240" cy="685800"/>
+          </a:xfrm>
+          <a:prstGeom prst="rect">
+            <a:avLst/>
+          </a:prstGeom>
+          <a:noFill/>
+          <a:ln/>
+        </p:spPr>
+        <p:txBody>
+          <a:bodyPr wrap="square" lIns="0" tIns="0" rIns="0" bIns="0" rtlCol="0" anchor="t"/>
+          <a:lstStyle/>
+          <a:p>
+            <a:pPr algn="l" indent="0" marL="0">
+              <a:buNone/>
+            </a:pPr>
+            <a:r>
+              <a:rPr lang="en-US" sz="3200" b="1" dirty="0">
+                <a:solidFill>
+                  <a:srgbClr val="0A0A0B"/>
+                </a:solidFill>
+              </a:rPr>
+              <a:t>Every number names the file it comes from</a:t>
+            </a:r>
+            <a:endParaRPr lang="en-US" sz="3200" dirty="0"/>
+          </a:p>
+        </p:txBody>
+      </p:sp>
+      <p:sp>
+        <p:nvSpPr>
+          <p:cNvPr id="5" name="Shape 2"/>
+          <p:cNvSpPr/>
+          <p:nvPr/>
+        </p:nvSpPr>
+        <p:spPr>
+          <a:xfrm>
+            <a:off x="548640" y="1691640"/>
+            <a:ext cx="2670048" cy="1234440"/>
+          </a:xfrm>
+          <a:prstGeom prst="roundRect">
+            <a:avLst>
+              <a:gd name="adj" fmla="val 8889"/>
+            </a:avLst>
+          </a:prstGeom>
+          <a:solidFill>
+            <a:srgbClr val="E9F3EC"/>
+          </a:solidFill>
+          <a:ln w="12700">
+            <a:solidFill>
+              <a:srgbClr val="E9F3EC"/>
+            </a:solidFill>
+            <a:prstDash val="solid"/>
+          </a:ln>
+        </p:spPr>
+      </p:sp>
+      <p:sp>
+        <p:nvSpPr>
           <p:cNvPr id="6" name="Text 3"/>
           <p:cNvSpPr txBox="1"/>
           <p:nvPr/>
@@ -25152,7 +26184,7 @@
       </p:sp>
       <p:graphicFrame>
         <p:nvGraphicFramePr>
-          <p:cNvPr id="25" name="Table 0"/>
+          <p:cNvPr id="26" name="Table 0"/>
           <p:cNvGraphicFramePr>
             <a:graphicFrameLocks noGrp="1"/>
           </p:cNvGraphicFramePr>
@@ -25401,7 +26433,7 @@
                           <a:ea typeface="Segoe UI" pitchFamily="34" charset="-122"/>
                           <a:cs typeface="Segoe UI" pitchFamily="34" charset="-120"/>
                         </a:rPr>
-                        <a:t>npm test, 23 offline suites</a:t>
+                        <a:t>npm test, 24 offline suites</a:t>
                       </a:r>
                       <a:endParaRPr lang="en-US" sz="1200" dirty="0">
                         <a:latin typeface="Segoe UI" charset="0"/>
@@ -25466,7 +26498,7 @@
                           <a:ea typeface="Segoe UI" pitchFamily="34" charset="-122"/>
                           <a:cs typeface="Segoe UI" pitchFamily="34" charset="-120"/>
                         </a:rPr>
-                        <a:t>264 passed, 0 failed</a:t>
+                        <a:t>269 passed, 0 failed</a:t>
                       </a:r>
                       <a:endParaRPr lang="en-US" sz="1200" dirty="0">
                         <a:latin typeface="Segoe UI" charset="0"/>
@@ -27002,7 +28034,7 @@
             <a:pPr algn="r"/>
             <a:fld id="{F7021451-1387-4CA6-816F-3879F97B5CBC}" type="slidenum">
               <a:rPr b="0" lang="en-US"/>
-              <a:t>24</a:t>
+              <a:t>25</a:t>
             </a:fld>
             <a:endParaRPr lang="en-US"/>
           </a:p>
@@ -27016,9 +28048,9 @@
 </p:sld>
 </file>
 
-<file path=ppt/slides/slide25.xml><?xml version="1.0" encoding="utf-8"?>
+<file path=ppt/slides/slide26.xml><?xml version="1.0" encoding="utf-8"?>
 <p:sld xmlns:a="http://schemas.openxmlformats.org/drawingml/2006/main" xmlns:r="http://schemas.openxmlformats.org/officeDocument/2006/relationships" xmlns:p="http://schemas.openxmlformats.org/presentationml/2006/main">
-  <p:cSld name="Slide 25">
+  <p:cSld name="Slide 26">
     <p:spTree>
       <p:nvGrpSpPr>
         <p:cNvPr id="1" name=""/>
@@ -29590,7 +30622,7 @@
             <a:pPr algn="r"/>
             <a:fld id="{F7021451-1387-4CA6-816F-3879F97B5CBC}" type="slidenum">
               <a:rPr b="0" lang="en-US"/>
-              <a:t>25</a:t>
+              <a:t>26</a:t>
             </a:fld>
             <a:endParaRPr lang="en-US"/>
           </a:p>
@@ -29604,9 +30636,9 @@
 </p:sld>
 </file>
 
-<file path=ppt/slides/slide26.xml><?xml version="1.0" encoding="utf-8"?>
+<file path=ppt/slides/slide27.xml><?xml version="1.0" encoding="utf-8"?>
 <p:sld xmlns:a="http://schemas.openxmlformats.org/drawingml/2006/main" xmlns:r="http://schemas.openxmlformats.org/officeDocument/2006/relationships" xmlns:p="http://schemas.openxmlformats.org/presentationml/2006/main">
-  <p:cSld name="Slide 26">
+  <p:cSld name="Slide 27">
     <p:spTree>
       <p:nvGrpSpPr>
         <p:cNvPr id="1" name=""/>

--- a/video/deck/Serve_Meta_deck.pptx
+++ b/video/deck/Serve_Meta_deck.pptx
@@ -133,20 +133,20 @@
   <p:extLst>
     <p:ext uri="{521415D9-36F7-43E2-AB2F-B90AF26B5E84}">
       <p14:sectionLst xmlns:p14="http://schemas.microsoft.com/office/powerpoint/2010/main">
-        <p14:section name="Opening" id="{ef5504f5-5586-7c0f-a75b-aa69f477290c}">
+        <p14:section name="Opening" id="{8214520b-0326-6e88-68b6-f3727454dd76}">
           <p14:sldIdLst>
             <p14:sldId id="256"/>
             <p14:sldId id="257"/>
           </p14:sldIdLst>
         </p14:section>
-        <p14:section name="Impact" id="{5b1b5bd0-2b34-d8b6-35ab-89653bf07fd3}">
+        <p14:section name="Impact" id="{846ef101-9a78-27ac-4ec5-dc32880bd9ee}">
           <p14:sldIdLst>
             <p14:sldId id="258"/>
             <p14:sldId id="259"/>
             <p14:sldId id="260"/>
           </p14:sldIdLst>
         </p14:section>
-        <p14:section name="Demo" id="{803940ed-3828-d305-b32a-25aa2644a93d}">
+        <p14:section name="Demo" id="{6bd44c06-c316-5a5b-4b21-6fb90a487a0f}">
           <p14:sldIdLst>
             <p14:sldId id="261"/>
             <p14:sldId id="262"/>
@@ -156,7 +156,7 @@
             <p14:sldId id="266"/>
           </p14:sldIdLst>
         </p14:section>
-        <p14:section name="Use of Meta AI" id="{314f4758-9e99-8b62-b3d6-5e59c60b6f98}">
+        <p14:section name="Use of Meta AI" id="{32a8f6a1-01ba-ddf4-06bd-76b74634df90}">
           <p14:sldIdLst>
             <p14:sldId id="267"/>
             <p14:sldId id="268"/>
@@ -164,7 +164,7 @@
             <p14:sldId id="270"/>
           </p14:sldIdLst>
         </p14:section>
-        <p14:section name="Technical depth" id="{ab1b0dd7-666e-0788-2a61-94e0004436f8}">
+        <p14:section name="Technical depth" id="{eaee94c5-9e1e-a2a3-caf5-c95fa89bb4eb}">
           <p14:sldIdLst>
             <p14:sldId id="271"/>
             <p14:sldId id="272"/>
@@ -178,12 +178,12 @@
             <p14:sldId id="280"/>
           </p14:sldIdLst>
         </p14:section>
-        <p14:section name="Architecture" id="{6e641cbb-dced-099c-f624-620033219fef}">
+        <p14:section name="Architecture" id="{4cbaba8c-07fe-3086-c279-f7b354924a61}">
           <p14:sldIdLst>
             <p14:sldId id="281"/>
           </p14:sldIdLst>
         </p14:section>
-        <p14:section name="Close" id="{b9680b52-7448-c47e-d9d6-c83bdd70a295}">
+        <p14:section name="Close" id="{edd5e0b6-8bdc-255f-805a-b2f1adb83a5a}">
           <p14:sldIdLst>
             <p14:sldId id="282"/>
           </p14:sldIdLst>
@@ -2881,7 +2881,7 @@
           <a:p>
             <a:r>
               <a:rPr lang="en-US" dirty="0"/>
-              <a:t>RAG（agent/src/memory/memory.js、body/context.js）：
+              <a:t>Agent 記憶（agent/src/memory/memory.js、body/context.js）：
 寫入：筆記只來自玩家自己的話和程式產生的事實（比賽、健康 app），其他 agent 寫的東西永遠不會變成筆記（防記憶注入）。新的一句話會跟舊筆記比對：新增、取代、或重複（類似 Mem0）。被取代的筆記保留但不再被檢索。
 檢索：Meta 的 DRAMA（drama-base，768 維）在伺服器 CPU 上把問題和筆記變成向量，用餘弦相似度乘上時間衰減排序（身體筆記 7 天減半），取前幾名。
 生成與接地：Muse Glimmer 拿這些筆記規劃這週；規則由程式從紀錄產生，每條附上來源筆記，程式檢查引用的是同一個部位。
@@ -4145,7 +4145,7 @@
           <a:p>
             <a:r>
               <a:rPr lang="en-US" dirty="0"/>
-              <a:t>身體脈絡（RAG）：拿掉了 3D 肌肉圖。你在 Messenger、語音或這裡說一句話，agent 把你的原話、比賽和健康 app 的紀錄都變成筆記。
+              <a:t>排程脈絡（agent 記憶）：拿掉了 3D 肌肉圖。你在 Messenger、語音或這裡說一句話，agent 把你的原話、比賽和健康 app 的紀錄都變成筆記。
 規劃這週時，用 Meta 的 DRAMA 依語意檢索，越新的筆記權重越高（身體筆記 7 天減半）。畫面上的分數是真實的 DRAMA 相似度乘上時間衰減。
 規則仍由程式從紀錄決定（不讓模型發明規則），每條規則都附上來源筆記，程式檢查引用是同一個部位。
 旁白：Monday, I tell it my right knee is sore. Meta's DRAMA finds what matters this week, and every rule shows where it came from.</a:t>
@@ -8233,7 +8233,7 @@
                   <a:srgbClr val="0A0A0B"/>
                 </a:solidFill>
               </a:rPr>
-              <a:t>15 Meta models and Meta's apps, each with a job</a:t>
+              <a:t>15 Meta models: 12 in the product, 3 for checks and fallback</a:t>
             </a:r>
             <a:endParaRPr lang="en-US" sz="3200" dirty="0"/>
           </a:p>
@@ -9052,7 +9052,7 @@
                   <a:srgbClr val="0A0A0B"/>
                 </a:solidFill>
               </a:rPr>
-              <a:t>Finds what matters for your week by meaning (RAG); groups the club's ideas</a:t>
+              <a:t>Agent memory: finds what matters for your week by meaning; groups the club's ideas</a:t>
             </a:r>
             <a:endParaRPr lang="en-US" sz="850" dirty="0"/>
           </a:p>
@@ -11313,7 +11313,7 @@
         <p:spPr>
           <a:xfrm>
             <a:off x="777240" y="2971800"/>
-            <a:ext cx="1170432" cy="329184"/>
+            <a:ext cx="932688" cy="329184"/>
           </a:xfrm>
           <a:prstGeom prst="roundRect">
             <a:avLst>
@@ -11340,7 +11340,7 @@
         <p:spPr>
           <a:xfrm>
             <a:off x="777240" y="2971800"/>
-            <a:ext cx="1170432" cy="329184"/>
+            <a:ext cx="932688" cy="329184"/>
           </a:xfrm>
           <a:prstGeom prst="rect">
             <a:avLst/>
@@ -11356,14 +11356,14 @@
               <a:buNone/>
             </a:pPr>
             <a:r>
-              <a:rPr lang="en-US" sz="1050" b="1" dirty="0">
+              <a:rPr lang="en-US" sz="900" b="1" dirty="0">
                 <a:solidFill>
                   <a:srgbClr val="0A7F44"/>
                 </a:solidFill>
               </a:rPr>
               <a:t>get_week</a:t>
             </a:r>
-            <a:endParaRPr lang="en-US" sz="1050" dirty="0"/>
+            <a:endParaRPr lang="en-US" sz="900" dirty="0"/>
           </a:p>
         </p:txBody>
       </p:sp>
@@ -11375,8 +11375,8 @@
         </p:nvSpPr>
         <p:spPr>
           <a:xfrm>
-            <a:off x="2020824" y="2971800"/>
-            <a:ext cx="1170432" cy="329184"/>
+            <a:off x="1764792" y="2971800"/>
+            <a:ext cx="932688" cy="329184"/>
           </a:xfrm>
           <a:prstGeom prst="roundRect">
             <a:avLst>
@@ -11402,8 +11402,8 @@
         </p:nvSpPr>
         <p:spPr>
           <a:xfrm>
-            <a:off x="2020824" y="2971800"/>
-            <a:ext cx="1170432" cy="329184"/>
+            <a:off x="1764792" y="2971800"/>
+            <a:ext cx="932688" cy="329184"/>
           </a:xfrm>
           <a:prstGeom prst="rect">
             <a:avLst/>
@@ -11419,14 +11419,14 @@
               <a:buNone/>
             </a:pPr>
             <a:r>
-              <a:rPr lang="en-US" sz="1050" b="1" dirty="0">
+              <a:rPr lang="en-US" sz="900" b="1" dirty="0">
                 <a:solidFill>
                   <a:srgbClr val="0A7F44"/>
                 </a:solidFill>
               </a:rPr>
               <a:t>check_body</a:t>
             </a:r>
-            <a:endParaRPr lang="en-US" sz="1050" dirty="0"/>
+            <a:endParaRPr lang="en-US" sz="900" dirty="0"/>
           </a:p>
         </p:txBody>
       </p:sp>
@@ -11438,8 +11438,8 @@
         </p:nvSpPr>
         <p:spPr>
           <a:xfrm>
-            <a:off x="3264408" y="2971800"/>
-            <a:ext cx="1170432" cy="329184"/>
+            <a:off x="2752344" y="2971800"/>
+            <a:ext cx="932688" cy="329184"/>
           </a:xfrm>
           <a:prstGeom prst="roundRect">
             <a:avLst>
@@ -11465,8 +11465,8 @@
         </p:nvSpPr>
         <p:spPr>
           <a:xfrm>
-            <a:off x="3264408" y="2971800"/>
-            <a:ext cx="1170432" cy="329184"/>
+            <a:off x="2752344" y="2971800"/>
+            <a:ext cx="932688" cy="329184"/>
           </a:xfrm>
           <a:prstGeom prst="rect">
             <a:avLst/>
@@ -11482,14 +11482,14 @@
               <a:buNone/>
             </a:pPr>
             <a:r>
-              <a:rPr lang="en-US" sz="1050" b="1" dirty="0">
+              <a:rPr lang="en-US" sz="900" b="1" dirty="0">
                 <a:solidFill>
                   <a:srgbClr val="0A7F44"/>
                 </a:solidFill>
               </a:rPr>
-              <a:t>find_partners</a:t>
-            </a:r>
-            <a:endParaRPr lang="en-US" sz="1050" dirty="0"/>
+              <a:t>recall</a:t>
+            </a:r>
+            <a:endParaRPr lang="en-US" sz="900" dirty="0"/>
           </a:p>
         </p:txBody>
       </p:sp>
@@ -11501,8 +11501,8 @@
         </p:nvSpPr>
         <p:spPr>
           <a:xfrm>
-            <a:off x="4507992" y="2971800"/>
-            <a:ext cx="1170432" cy="329184"/>
+            <a:off x="3739896" y="2971800"/>
+            <a:ext cx="932688" cy="329184"/>
           </a:xfrm>
           <a:prstGeom prst="roundRect">
             <a:avLst>
@@ -11528,8 +11528,8 @@
         </p:nvSpPr>
         <p:spPr>
           <a:xfrm>
-            <a:off x="4507992" y="2971800"/>
-            <a:ext cx="1170432" cy="329184"/>
+            <a:off x="3739896" y="2971800"/>
+            <a:ext cx="932688" cy="329184"/>
           </a:xfrm>
           <a:prstGeom prst="rect">
             <a:avLst/>
@@ -11545,14 +11545,14 @@
               <a:buNone/>
             </a:pPr>
             <a:r>
-              <a:rPr lang="en-US" sz="1050" b="1" dirty="0">
+              <a:rPr lang="en-US" sz="900" b="1" dirty="0">
                 <a:solidFill>
                   <a:srgbClr val="0A7F44"/>
                 </a:solidFill>
               </a:rPr>
-              <a:t>find_places</a:t>
-            </a:r>
-            <a:endParaRPr lang="en-US" sz="1050" dirty="0"/>
+              <a:t>find_partners</a:t>
+            </a:r>
+            <a:endParaRPr lang="en-US" sz="900" dirty="0"/>
           </a:p>
         </p:txBody>
       </p:sp>
@@ -11564,8 +11564,8 @@
         </p:nvSpPr>
         <p:spPr>
           <a:xfrm>
-            <a:off x="777240" y="3429000"/>
-            <a:ext cx="1170432" cy="329184"/>
+            <a:off x="4727448" y="2971800"/>
+            <a:ext cx="932688" cy="329184"/>
           </a:xfrm>
           <a:prstGeom prst="roundRect">
             <a:avLst>
@@ -11591,8 +11591,8 @@
         </p:nvSpPr>
         <p:spPr>
           <a:xfrm>
-            <a:off x="777240" y="3429000"/>
-            <a:ext cx="1170432" cy="329184"/>
+            <a:off x="4727448" y="2971800"/>
+            <a:ext cx="932688" cy="329184"/>
           </a:xfrm>
           <a:prstGeom prst="rect">
             <a:avLst/>
@@ -11608,14 +11608,14 @@
               <a:buNone/>
             </a:pPr>
             <a:r>
-              <a:rPr lang="en-US" sz="1050" b="1" dirty="0">
+              <a:rPr lang="en-US" sz="900" b="1" dirty="0">
                 <a:solidFill>
                   <a:srgbClr val="0A7F44"/>
                 </a:solidFill>
               </a:rPr>
-              <a:t>negotiate</a:t>
-            </a:r>
-            <a:endParaRPr lang="en-US" sz="1050" dirty="0"/>
+              <a:t>find_places</a:t>
+            </a:r>
+            <a:endParaRPr lang="en-US" sz="900" dirty="0"/>
           </a:p>
         </p:txBody>
       </p:sp>
@@ -11627,8 +11627,8 @@
         </p:nvSpPr>
         <p:spPr>
           <a:xfrm>
-            <a:off x="2020824" y="3429000"/>
-            <a:ext cx="1170432" cy="329184"/>
+            <a:off x="777240" y="3429000"/>
+            <a:ext cx="932688" cy="329184"/>
           </a:xfrm>
           <a:prstGeom prst="roundRect">
             <a:avLst>
@@ -11654,8 +11654,8 @@
         </p:nvSpPr>
         <p:spPr>
           <a:xfrm>
-            <a:off x="2020824" y="3429000"/>
-            <a:ext cx="1170432" cy="329184"/>
+            <a:off x="777240" y="3429000"/>
+            <a:ext cx="932688" cy="329184"/>
           </a:xfrm>
           <a:prstGeom prst="rect">
             <a:avLst/>
@@ -11671,14 +11671,14 @@
               <a:buNone/>
             </a:pPr>
             <a:r>
-              <a:rPr lang="en-US" sz="1050" b="1" dirty="0">
+              <a:rPr lang="en-US" sz="900" b="1" dirty="0">
                 <a:solidFill>
                   <a:srgbClr val="0A7F44"/>
                 </a:solidFill>
               </a:rPr>
-              <a:t>request_approval</a:t>
-            </a:r>
-            <a:endParaRPr lang="en-US" sz="1050" dirty="0"/>
+              <a:t>negotiate</a:t>
+            </a:r>
+            <a:endParaRPr lang="en-US" sz="900" dirty="0"/>
           </a:p>
         </p:txBody>
       </p:sp>
@@ -11690,8 +11690,8 @@
         </p:nvSpPr>
         <p:spPr>
           <a:xfrm>
-            <a:off x="3264408" y="3429000"/>
-            <a:ext cx="1170432" cy="329184"/>
+            <a:off x="1764792" y="3429000"/>
+            <a:ext cx="932688" cy="329184"/>
           </a:xfrm>
           <a:prstGeom prst="roundRect">
             <a:avLst>
@@ -11717,8 +11717,8 @@
         </p:nvSpPr>
         <p:spPr>
           <a:xfrm>
-            <a:off x="3264408" y="3429000"/>
-            <a:ext cx="1170432" cy="329184"/>
+            <a:off x="1764792" y="3429000"/>
+            <a:ext cx="932688" cy="329184"/>
           </a:xfrm>
           <a:prstGeom prst="rect">
             <a:avLst/>
@@ -11734,14 +11734,14 @@
               <a:buNone/>
             </a:pPr>
             <a:r>
-              <a:rPr lang="en-US" sz="1050" b="1" dirty="0">
+              <a:rPr lang="en-US" sz="900" b="1" dirty="0">
                 <a:solidFill>
                   <a:srgbClr val="0A7F44"/>
                 </a:solidFill>
               </a:rPr>
-              <a:t>nudge</a:t>
-            </a:r>
-            <a:endParaRPr lang="en-US" sz="1050" dirty="0"/>
+              <a:t>request_approval</a:t>
+            </a:r>
+            <a:endParaRPr lang="en-US" sz="900" dirty="0"/>
           </a:p>
         </p:txBody>
       </p:sp>
@@ -11753,8 +11753,8 @@
         </p:nvSpPr>
         <p:spPr>
           <a:xfrm>
-            <a:off x="4507992" y="3429000"/>
-            <a:ext cx="1170432" cy="329184"/>
+            <a:off x="2752344" y="3429000"/>
+            <a:ext cx="932688" cy="329184"/>
           </a:xfrm>
           <a:prstGeom prst="roundRect">
             <a:avLst>
@@ -11780,8 +11780,8 @@
         </p:nvSpPr>
         <p:spPr>
           <a:xfrm>
-            <a:off x="4507992" y="3429000"/>
-            <a:ext cx="1170432" cy="329184"/>
+            <a:off x="2752344" y="3429000"/>
+            <a:ext cx="932688" cy="329184"/>
           </a:xfrm>
           <a:prstGeom prst="rect">
             <a:avLst/>
@@ -11797,20 +11797,83 @@
               <a:buNone/>
             </a:pPr>
             <a:r>
-              <a:rPr lang="en-US" sz="1050" b="1" dirty="0">
+              <a:rPr lang="en-US" sz="900" b="1" dirty="0">
                 <a:solidFill>
                   <a:srgbClr val="0A7F44"/>
                 </a:solidFill>
               </a:rPr>
+              <a:t>nudge</a:t>
+            </a:r>
+            <a:endParaRPr lang="en-US" sz="900" dirty="0"/>
+          </a:p>
+        </p:txBody>
+      </p:sp>
+      <p:sp>
+        <p:nvSpPr>
+          <p:cNvPr id="24" name="Shape 21"/>
+          <p:cNvSpPr/>
+          <p:nvPr/>
+        </p:nvSpPr>
+        <p:spPr>
+          <a:xfrm>
+            <a:off x="3739896" y="3429000"/>
+            <a:ext cx="932688" cy="329184"/>
+          </a:xfrm>
+          <a:prstGeom prst="roundRect">
+            <a:avLst>
+              <a:gd name="adj" fmla="val 50000"/>
+            </a:avLst>
+          </a:prstGeom>
+          <a:solidFill>
+            <a:srgbClr val="E9F3EC"/>
+          </a:solidFill>
+          <a:ln w="12700">
+            <a:solidFill>
+              <a:srgbClr val="E9F3EC"/>
+            </a:solidFill>
+            <a:prstDash val="solid"/>
+          </a:ln>
+        </p:spPr>
+      </p:sp>
+      <p:sp>
+        <p:nvSpPr>
+          <p:cNvPr id="25" name="Text 22"/>
+          <p:cNvSpPr txBox="1"/>
+          <p:nvPr/>
+        </p:nvSpPr>
+        <p:spPr>
+          <a:xfrm>
+            <a:off x="3739896" y="3429000"/>
+            <a:ext cx="932688" cy="329184"/>
+          </a:xfrm>
+          <a:prstGeom prst="rect">
+            <a:avLst/>
+          </a:prstGeom>
+          <a:noFill/>
+          <a:ln/>
+        </p:spPr>
+        <p:txBody>
+          <a:bodyPr wrap="square" lIns="0" tIns="0" rIns="0" bIns="0" rtlCol="0" anchor="ctr"/>
+          <a:lstStyle/>
+          <a:p>
+            <a:pPr algn="ctr" indent="0" marL="0">
+              <a:buNone/>
+            </a:pPr>
+            <a:r>
+              <a:rPr lang="en-US" sz="900" b="1" dirty="0">
+                <a:solidFill>
+                  <a:srgbClr val="0A7F44"/>
+                </a:solidFill>
+              </a:rPr>
               <a:t>finish</a:t>
             </a:r>
-            <a:endParaRPr lang="en-US" sz="1050" dirty="0"/>
-          </a:p>
-        </p:txBody>
-      </p:sp>
-      <p:sp>
-        <p:nvSpPr>
-          <p:cNvPr id="24" name="Text 21"/>
+            <a:endParaRPr lang="en-US" sz="900" dirty="0"/>
+          </a:p>
+        </p:txBody>
+      </p:sp>
+      <p:sp>
+        <p:nvSpPr>
+          <p:cNvPr id="26" name="Text 23"/>
           <p:cNvSpPr txBox="1"/>
           <p:nvPr/>
         </p:nvSpPr>
@@ -11886,7 +11949,7 @@
       </p:sp>
       <p:sp>
         <p:nvSpPr>
-          <p:cNvPr id="25" name="Shape 22"/>
+          <p:cNvPr id="27" name="Shape 24"/>
           <p:cNvSpPr/>
           <p:nvPr/>
         </p:nvSpPr>
@@ -11913,7 +11976,7 @@
       </p:sp>
       <p:sp>
         <p:nvSpPr>
-          <p:cNvPr id="26" name="Text 23"/>
+          <p:cNvPr id="28" name="Text 25"/>
           <p:cNvSpPr txBox="1"/>
           <p:nvPr/>
         </p:nvSpPr>
@@ -11949,7 +12012,7 @@
       </p:sp>
       <p:sp>
         <p:nvSpPr>
-          <p:cNvPr id="27" name="Text 24"/>
+          <p:cNvPr id="29" name="Text 26"/>
           <p:cNvSpPr txBox="1"/>
           <p:nvPr/>
         </p:nvSpPr>
@@ -11985,7 +12048,7 @@
       </p:sp>
       <p:sp>
         <p:nvSpPr>
-          <p:cNvPr id="28" name="Text 25"/>
+          <p:cNvPr id="30" name="Text 27"/>
           <p:cNvSpPr txBox="1"/>
           <p:nvPr/>
         </p:nvSpPr>
@@ -12021,7 +12084,7 @@
       </p:sp>
       <p:sp>
         <p:nvSpPr>
-          <p:cNvPr id="29" name="Text 26"/>
+          <p:cNvPr id="31" name="Text 28"/>
           <p:cNvSpPr txBox="1"/>
           <p:nvPr/>
         </p:nvSpPr>
@@ -12057,7 +12120,7 @@
       </p:sp>
       <p:sp>
         <p:nvSpPr>
-          <p:cNvPr id="30" name="Text 27"/>
+          <p:cNvPr id="32" name="Text 29"/>
           <p:cNvSpPr txBox="1"/>
           <p:nvPr/>
         </p:nvSpPr>
@@ -12093,7 +12156,7 @@
       </p:sp>
       <p:sp>
         <p:nvSpPr>
-          <p:cNvPr id="31" name="Text 28"/>
+          <p:cNvPr id="33" name="Text 30"/>
           <p:cNvSpPr txBox="1"/>
           <p:nvPr/>
         </p:nvSpPr>
@@ -12129,7 +12192,7 @@
       </p:sp>
       <p:sp>
         <p:nvSpPr>
-          <p:cNvPr id="32" name="Text 29"/>
+          <p:cNvPr id="34" name="Text 31"/>
           <p:cNvSpPr txBox="1"/>
           <p:nvPr/>
         </p:nvSpPr>
@@ -12165,7 +12228,7 @@
       </p:sp>
       <p:sp>
         <p:nvSpPr>
-          <p:cNvPr id="33" name="Text 30"/>
+          <p:cNvPr id="35" name="Text 32"/>
           <p:cNvSpPr txBox="1"/>
           <p:nvPr/>
         </p:nvSpPr>
@@ -12201,7 +12264,7 @@
       </p:sp>
       <p:sp>
         <p:nvSpPr>
-          <p:cNvPr id="34" name="Text 31"/>
+          <p:cNvPr id="36" name="Text 33"/>
           <p:cNvSpPr txBox="1"/>
           <p:nvPr/>
         </p:nvSpPr>
@@ -12237,7 +12300,7 @@
       </p:sp>
       <p:sp>
         <p:nvSpPr>
-          <p:cNvPr id="35" name="Text 32"/>
+          <p:cNvPr id="37" name="Text 34"/>
           <p:cNvSpPr txBox="1"/>
           <p:nvPr/>
         </p:nvSpPr>
@@ -12273,7 +12336,7 @@
       </p:sp>
       <p:sp>
         <p:nvSpPr>
-          <p:cNvPr id="36" name="Shape 33"/>
+          <p:cNvPr id="38" name="Shape 35"/>
           <p:cNvSpPr/>
           <p:nvPr/>
         </p:nvSpPr>
@@ -12300,7 +12363,7 @@
       </p:sp>
       <p:sp>
         <p:nvSpPr>
-          <p:cNvPr id="37" name="Text 34"/>
+          <p:cNvPr id="39" name="Text 36"/>
           <p:cNvSpPr txBox="1"/>
           <p:nvPr/>
         </p:nvSpPr>
@@ -12336,7 +12399,7 @@
       </p:sp>
       <p:sp>
         <p:nvSpPr>
-          <p:cNvPr id="38" name="Text 35"/>
+          <p:cNvPr id="40" name="Text 37"/>
           <p:cNvSpPr txBox="1"/>
           <p:nvPr/>
         </p:nvSpPr>
@@ -13836,7 +13899,7 @@
                   <a:srgbClr val="55555C"/>
                 </a:solidFill>
               </a:rPr>
-              <a:t>Realtime; finds where your turn ends; 25 languages, code-switching</a:t>
+              <a:t>Realtime, on the Meta Model API: your audio goes there; it finds where your turn ends</a:t>
             </a:r>
             <a:endParaRPr lang="en-US" sz="1000" dirty="0"/>
           </a:p>
@@ -15966,7 +16029,7 @@
                   <a:srgbClr val="0A7F44"/>
                 </a:solidFill>
               </a:rPr>
-              <a:t>TECHNICAL DEPTH · FINE-TUNING</a:t>
+              <a:t>TECHNICAL DEPTH · 20% · FINE-TUNING</a:t>
             </a:r>
             <a:endParaRPr lang="en-US" sz="1300" dirty="0"/>
           </a:p>
@@ -16982,7 +17045,7 @@
                   <a:srgbClr val="55555C"/>
                 </a:solidFill>
               </a:rPr>
-              <a:t>fewer Glimmer calls in the simulated club, no rule broken</a:t>
+              <a:t>fewer member answers from Glimmer (simulated club), no rule broken</a:t>
             </a:r>
             <a:endParaRPr lang="en-US" sz="1000" dirty="0"/>
           </a:p>
@@ -17603,7 +17666,7 @@
                   <a:srgbClr val="0A0A0B"/>
                 </a:solidFill>
               </a:rPr>
-              <a:t>up, and answering within 8 to 20 s</a:t>
+              <a:t>the student is up and answers within 8 to 20 s</a:t>
             </a:r>
             <a:endParaRPr lang="en-US" sz="1050" dirty="0"/>
           </a:p>
@@ -18291,7 +18354,7 @@
                   <a:srgbClr val="0A7F44"/>
                 </a:solidFill>
               </a:rPr>
-              <a:t>TECHNICAL DEPTH · RAG</a:t>
+              <a:t>TECHNICAL DEPTH · AGENT MEMORY</a:t>
             </a:r>
             <a:endParaRPr lang="en-US" sz="1300" dirty="0"/>
           </a:p>
@@ -18329,7 +18392,7 @@
                   <a:srgbClr val="0A0A0B"/>
                 </a:solidFill>
               </a:rPr>
-              <a:t>Found by meaning with Meta's DRAMA, checked by code</a:t>
+              <a:t>Notes that update themselves, found by meaning, checked by code</a:t>
             </a:r>
             <a:endParaRPr lang="en-US" sz="3200" dirty="0"/>
           </a:p>
@@ -25780,7 +25843,7 @@
                   <a:srgbClr val="0A0A0B"/>
                 </a:solidFill>
               </a:rPr>
-              <a:t>Every number names the file it comes from</a:t>
+              <a:t>The numbers, and where each comes from</a:t>
             </a:r>
             <a:endParaRPr lang="en-US" sz="3200" dirty="0"/>
           </a:p>
@@ -26176,7 +26239,7 @@
                   <a:srgbClr val="55555C"/>
                 </a:solidFill>
               </a:rPr>
-              <a:t>crash checks, stand-in model</a:t>
+              <a:t>crash-matrix checks (5 kill points)</a:t>
             </a:r>
             <a:endParaRPr lang="en-US" sz="1200" dirty="0"/>
           </a:p>
@@ -26498,7 +26561,7 @@
                           <a:ea typeface="Segoe UI" pitchFamily="34" charset="-122"/>
                           <a:cs typeface="Segoe UI" pitchFamily="34" charset="-120"/>
                         </a:rPr>
-                        <a:t>269 passed, 0 failed</a:t>
+                        <a:t>269 of 270 (1 skipped: an optional tool)</a:t>
                       </a:r>
                       <a:endParaRPr lang="en-US" sz="1200" dirty="0">
                         <a:latin typeface="Segoe UI" charset="0"/>
@@ -31051,7 +31114,7 @@
                   <a:srgbClr val="0064E0"/>
                 </a:solidFill>
               </a:rPr>
-              <a:t>github.com/gino6178/serve-meta-hackathon</a:t>
+              <a:t>github.com/gino6178/serve-meta-hackathon  ·  live: relay-orders-eliminate-associated.trycloudflare.com</a:t>
             </a:r>
             <a:endParaRPr lang="en-US" sz="1300" dirty="0"/>
           </a:p>
@@ -31073,7 +31136,7 @@
         </p:blipFill>
         <p:spPr>
           <a:xfrm>
-            <a:off x="2926080" y="6035040"/>
+            <a:off x="2103120" y="6035040"/>
             <a:ext cx="329184" cy="329184"/>
           </a:xfrm>
           <a:prstGeom prst="rect">
@@ -31089,8 +31152,8 @@
         </p:nvSpPr>
         <p:spPr>
           <a:xfrm>
-            <a:off x="3346704" y="6035040"/>
-            <a:ext cx="6400800" cy="329184"/>
+            <a:off x="2523744" y="6035040"/>
+            <a:ext cx="8229600" cy="329184"/>
           </a:xfrm>
           <a:prstGeom prst="rect">
             <a:avLst/>
@@ -31111,7 +31174,7 @@
                   <a:srgbClr val="55555C"/>
                 </a:solidFill>
               </a:rPr>
-              <a:t>Built on Muse Glimmer, Meta's open-weights model, on hardware you own</a:t>
+              <a:t>The product runs Muse Glimmer on an RTX 3090 I own; cloud A100s ran evaluations only</a:t>
             </a:r>
             <a:endParaRPr lang="en-US" sz="1300" dirty="0"/>
           </a:p>
@@ -32348,7 +32411,7 @@
         <p:spPr>
           <a:xfrm>
             <a:off x="5669280" y="1691640"/>
-            <a:ext cx="5486400" cy="228600"/>
+            <a:ext cx="6035040" cy="228600"/>
           </a:xfrm>
           <a:prstGeom prst="rect">
             <a:avLst/>
@@ -32369,7 +32432,7 @@
                   <a:srgbClr val="55555C"/>
                 </a:solidFill>
               </a:rPr>
-              <a:t>LIVE ON THE WEB SINCE 29 OCT</a:t>
+              <a:t>LIVE SINCE 29 OCT · relay-orders-eliminate-associated.trycloudflare.com</a:t>
             </a:r>
             <a:endParaRPr lang="en-US" sz="1000" dirty="0"/>
           </a:p>
@@ -34582,7 +34645,7 @@
                   <a:srgbClr val="B26A00"/>
                 </a:solidFill>
               </a:rPr>
-              <a:t>Checked by code before anyone sees it  ·  nothing is booked without your yes  ·  video and health data stay on the server</a:t>
+              <a:t>Checked by code before anyone sees it  ·  nothing is booked without your yes  ·  video and health data stay on my server</a:t>
             </a:r>
             <a:endParaRPr lang="en-US" sz="1300" dirty="0"/>
           </a:p>
@@ -35437,167 +35500,155 @@
         </p:nvSpPr>
         <p:spPr>
           <a:xfrm>
-            <a:off x="621792" y="1627632"/>
-            <a:ext cx="2113911" cy="4425696"/>
+            <a:off x="548640" y="1691640"/>
+            <a:ext cx="4846320" cy="4343400"/>
           </a:xfrm>
           <a:prstGeom prst="roundRect">
             <a:avLst>
-              <a:gd name="adj" fmla="val 8651"/>
+              <a:gd name="adj" fmla="val 2526"/>
             </a:avLst>
           </a:prstGeom>
           <a:solidFill>
-            <a:srgbClr val="0A0A0B"/>
+            <a:srgbClr val="FFFFFF"/>
           </a:solidFill>
           <a:ln w="12700">
             <a:solidFill>
-              <a:srgbClr val="0A0A0B"/>
+              <a:srgbClr val="DCDCE0"/>
             </a:solidFill>
             <a:prstDash val="solid"/>
           </a:ln>
         </p:spPr>
       </p:sp>
-      <p:pic>
-        <p:nvPicPr>
-          <p:cNvPr id="6" name="Image 0" descr="preencoded.png">    </p:cNvPr>
-          <p:cNvPicPr>
-            <a:picLocks noChangeAspect="1"/>
-          </p:cNvPicPr>
-          <p:nvPr/>
-        </p:nvPicPr>
-        <p:blipFill>
-          <a:blip r:embed="rId1"/>
-          <a:stretch>
-            <a:fillRect/>
-          </a:stretch>
-        </p:blipFill>
-        <p:spPr>
-          <a:xfrm>
-            <a:off x="685800" y="1691640"/>
-            <a:ext cx="1985895" cy="4297680"/>
-          </a:xfrm>
-          <a:prstGeom prst="rect">
-            <a:avLst/>
-          </a:prstGeom>
-        </p:spPr>
-      </p:pic>
-      <p:sp>
-        <p:nvSpPr>
-          <p:cNvPr id="7" name="Text 3"/>
-          <p:cNvSpPr txBox="1"/>
-          <p:nvPr/>
-        </p:nvSpPr>
-        <p:spPr>
-          <a:xfrm>
-            <a:off x="411480" y="6108192"/>
-            <a:ext cx="2534535" cy="256032"/>
-          </a:xfrm>
-          <a:prstGeom prst="rect">
-            <a:avLst/>
-          </a:prstGeom>
-          <a:noFill/>
-          <a:ln/>
-        </p:spPr>
-        <p:txBody>
-          <a:bodyPr wrap="square" lIns="0" tIns="0" rIns="0" bIns="0" rtlCol="0" anchor="t"/>
-          <a:lstStyle/>
-          <a:p>
-            <a:pPr algn="ctr" indent="0" marL="0">
-              <a:buNone/>
-            </a:pPr>
-            <a:r>
-              <a:rPr lang="en-US" sz="1050" dirty="0">
+      <p:sp>
+        <p:nvSpPr>
+          <p:cNvPr id="6" name="Text 3"/>
+          <p:cNvSpPr txBox="1"/>
+          <p:nvPr/>
+        </p:nvSpPr>
+        <p:spPr>
+          <a:xfrm>
+            <a:off x="777240" y="1828800"/>
+            <a:ext cx="4389120" cy="228600"/>
+          </a:xfrm>
+          <a:prstGeom prst="rect">
+            <a:avLst/>
+          </a:prstGeom>
+          <a:noFill/>
+          <a:ln/>
+        </p:spPr>
+        <p:txBody>
+          <a:bodyPr wrap="square" lIns="0" tIns="0" rIns="0" bIns="0" rtlCol="0" anchor="t"/>
+          <a:lstStyle/>
+          <a:p>
+            <a:pPr indent="0" marL="0">
+              <a:buNone/>
+            </a:pPr>
+            <a:r>
+              <a:rPr lang="en-US" sz="1000" b="1" spc="100" kern="0" dirty="0">
                 <a:solidFill>
                   <a:srgbClr val="55555C"/>
                 </a:solidFill>
               </a:rPr>
-              <a:t>What your week asks for, by meaning</a:t>
-            </a:r>
-            <a:endParaRPr lang="en-US" sz="1050" dirty="0"/>
-          </a:p>
-        </p:txBody>
-      </p:sp>
-      <p:sp>
-        <p:nvSpPr>
-          <p:cNvPr id="8" name="Shape 4"/>
+              <a:t>THIS WEEK'S LIMITS</a:t>
+            </a:r>
+            <a:endParaRPr lang="en-US" sz="1000" dirty="0"/>
+          </a:p>
+        </p:txBody>
+      </p:sp>
+      <p:sp>
+        <p:nvSpPr>
+          <p:cNvPr id="7" name="Shape 4"/>
           <p:cNvSpPr/>
           <p:nvPr/>
         </p:nvSpPr>
         <p:spPr>
           <a:xfrm>
-            <a:off x="2999232" y="1627632"/>
-            <a:ext cx="2113911" cy="4425696"/>
+            <a:off x="777240" y="2194560"/>
+            <a:ext cx="4389120" cy="786384"/>
           </a:xfrm>
           <a:prstGeom prst="roundRect">
             <a:avLst>
-              <a:gd name="adj" fmla="val 8651"/>
+              <a:gd name="adj" fmla="val 13953"/>
             </a:avLst>
           </a:prstGeom>
           <a:solidFill>
-            <a:srgbClr val="0A0A0B"/>
+            <a:srgbClr val="F6F7F8"/>
           </a:solidFill>
           <a:ln w="12700">
             <a:solidFill>
-              <a:srgbClr val="0A0A0B"/>
+              <a:srgbClr val="F6F7F8"/>
             </a:solidFill>
             <a:prstDash val="solid"/>
           </a:ln>
         </p:spPr>
       </p:sp>
-      <p:pic>
-        <p:nvPicPr>
-          <p:cNvPr id="9" name="Image 1" descr="preencoded.png">    </p:cNvPr>
-          <p:cNvPicPr>
-            <a:picLocks noChangeAspect="1"/>
-          </p:cNvPicPr>
-          <p:nvPr/>
-        </p:nvPicPr>
-        <p:blipFill>
-          <a:blip r:embed="rId2"/>
-          <a:stretch>
-            <a:fillRect/>
-          </a:stretch>
-        </p:blipFill>
-        <p:spPr>
-          <a:xfrm>
-            <a:off x="3063240" y="1691640"/>
-            <a:ext cx="1985895" cy="4297680"/>
-          </a:xfrm>
-          <a:prstGeom prst="rect">
-            <a:avLst/>
-          </a:prstGeom>
-        </p:spPr>
-      </p:pic>
-      <p:sp>
-        <p:nvSpPr>
-          <p:cNvPr id="10" name="Text 5"/>
-          <p:cNvSpPr txBox="1"/>
-          <p:nvPr/>
-        </p:nvSpPr>
-        <p:spPr>
-          <a:xfrm>
-            <a:off x="2788920" y="6108192"/>
-            <a:ext cx="2534535" cy="256032"/>
-          </a:xfrm>
-          <a:prstGeom prst="rect">
-            <a:avLst/>
-          </a:prstGeom>
-          <a:noFill/>
-          <a:ln/>
-        </p:spPr>
-        <p:txBody>
-          <a:bodyPr wrap="square" lIns="0" tIns="0" rIns="0" bIns="0" rtlCol="0" anchor="t"/>
-          <a:lstStyle/>
-          <a:p>
-            <a:pPr algn="ctr" indent="0" marL="0">
+      <p:sp>
+        <p:nvSpPr>
+          <p:cNvPr id="8" name="Text 5"/>
+          <p:cNvSpPr txBox="1"/>
+          <p:nvPr/>
+        </p:nvSpPr>
+        <p:spPr>
+          <a:xfrm>
+            <a:off x="960120" y="2286000"/>
+            <a:ext cx="4023360" cy="292608"/>
+          </a:xfrm>
+          <a:prstGeom prst="rect">
+            <a:avLst/>
+          </a:prstGeom>
+          <a:noFill/>
+          <a:ln/>
+        </p:spPr>
+        <p:txBody>
+          <a:bodyPr wrap="square" lIns="0" tIns="0" rIns="0" bIns="0" rtlCol="0" anchor="t"/>
+          <a:lstStyle/>
+          <a:p>
+            <a:pPr indent="0" marL="0">
+              <a:buNone/>
+            </a:pPr>
+            <a:r>
+              <a:rPr lang="en-US" sz="1400" b="1" dirty="0">
+                <a:solidFill>
+                  <a:srgbClr val="0A0A0B"/>
+                </a:solidFill>
+              </a:rPr>
+              <a:t>Doubles first</a:t>
+            </a:r>
+            <a:endParaRPr lang="en-US" sz="1400" dirty="0"/>
+          </a:p>
+        </p:txBody>
+      </p:sp>
+      <p:sp>
+        <p:nvSpPr>
+          <p:cNvPr id="9" name="Text 6"/>
+          <p:cNvSpPr txBox="1"/>
+          <p:nvPr/>
+        </p:nvSpPr>
+        <p:spPr>
+          <a:xfrm>
+            <a:off x="960120" y="2633472"/>
+            <a:ext cx="4023360" cy="256032"/>
+          </a:xfrm>
+          <a:prstGeom prst="rect">
+            <a:avLst/>
+          </a:prstGeom>
+          <a:noFill/>
+          <a:ln/>
+        </p:spPr>
+        <p:txBody>
+          <a:bodyPr wrap="square" lIns="0" tIns="0" rIns="0" bIns="0" rtlCol="0" anchor="t"/>
+          <a:lstStyle/>
+          <a:p>
+            <a:pPr indent="0" marL="0">
               <a:buNone/>
             </a:pPr>
             <a:r>
               <a:rPr lang="en-US" sz="1050" dirty="0">
                 <a:solidFill>
-                  <a:srgbClr val="55555C"/>
-                </a:solidFill>
-              </a:rPr>
-              <a:t>Scheduling limits, each with its source</a:t>
+                  <a:srgbClr val="0A7F44"/>
+                </a:solidFill>
+              </a:rPr>
+              <a:t>You said, Sun 25 Oct</a:t>
             </a:r>
             <a:endParaRPr lang="en-US" sz="1050" dirty="0"/>
           </a:p>
@@ -35605,7 +35656,304 @@
       </p:sp>
       <p:sp>
         <p:nvSpPr>
-          <p:cNvPr id="11" name="Shape 6"/>
+          <p:cNvPr id="10" name="Shape 7"/>
+          <p:cNvSpPr/>
+          <p:nvPr/>
+        </p:nvSpPr>
+        <p:spPr>
+          <a:xfrm>
+            <a:off x="777240" y="3127248"/>
+            <a:ext cx="4389120" cy="786384"/>
+          </a:xfrm>
+          <a:prstGeom prst="roundRect">
+            <a:avLst>
+              <a:gd name="adj" fmla="val 13953"/>
+            </a:avLst>
+          </a:prstGeom>
+          <a:solidFill>
+            <a:srgbClr val="F6F7F8"/>
+          </a:solidFill>
+          <a:ln w="12700">
+            <a:solidFill>
+              <a:srgbClr val="F6F7F8"/>
+            </a:solidFill>
+            <a:prstDash val="solid"/>
+          </a:ln>
+        </p:spPr>
+      </p:sp>
+      <p:sp>
+        <p:nvSpPr>
+          <p:cNvPr id="11" name="Text 8"/>
+          <p:cNvSpPr txBox="1"/>
+          <p:nvPr/>
+        </p:nvSpPr>
+        <p:spPr>
+          <a:xfrm>
+            <a:off x="960120" y="3218688"/>
+            <a:ext cx="4023360" cy="292608"/>
+          </a:xfrm>
+          <a:prstGeom prst="rect">
+            <a:avLst/>
+          </a:prstGeom>
+          <a:noFill/>
+          <a:ln/>
+        </p:spPr>
+        <p:txBody>
+          <a:bodyPr wrap="square" lIns="0" tIns="0" rIns="0" bIns="0" rtlCol="0" anchor="t"/>
+          <a:lstStyle/>
+          <a:p>
+            <a:pPr indent="0" marL="0">
+              <a:buNone/>
+            </a:pPr>
+            <a:r>
+              <a:rPr lang="en-US" sz="1400" b="1" dirty="0">
+                <a:solidFill>
+                  <a:srgbClr val="0A0A0B"/>
+                </a:solidFill>
+              </a:rPr>
+              <a:t>No games after 22:00 on work nights</a:t>
+            </a:r>
+            <a:endParaRPr lang="en-US" sz="1400" dirty="0"/>
+          </a:p>
+        </p:txBody>
+      </p:sp>
+      <p:sp>
+        <p:nvSpPr>
+          <p:cNvPr id="12" name="Text 9"/>
+          <p:cNvSpPr txBox="1"/>
+          <p:nvPr/>
+        </p:nvSpPr>
+        <p:spPr>
+          <a:xfrm>
+            <a:off x="960120" y="3566160"/>
+            <a:ext cx="4023360" cy="256032"/>
+          </a:xfrm>
+          <a:prstGeom prst="rect">
+            <a:avLst/>
+          </a:prstGeom>
+          <a:noFill/>
+          <a:ln/>
+        </p:spPr>
+        <p:txBody>
+          <a:bodyPr wrap="square" lIns="0" tIns="0" rIns="0" bIns="0" rtlCol="0" anchor="t"/>
+          <a:lstStyle/>
+          <a:p>
+            <a:pPr indent="0" marL="0">
+              <a:buNone/>
+            </a:pPr>
+            <a:r>
+              <a:rPr lang="en-US" sz="1050" dirty="0">
+                <a:solidFill>
+                  <a:srgbClr val="0A7F44"/>
+                </a:solidFill>
+              </a:rPr>
+              <a:t>You said, Thu 22 Oct</a:t>
+            </a:r>
+            <a:endParaRPr lang="en-US" sz="1050" dirty="0"/>
+          </a:p>
+        </p:txBody>
+      </p:sp>
+      <p:sp>
+        <p:nvSpPr>
+          <p:cNvPr id="13" name="Shape 10"/>
+          <p:cNvSpPr/>
+          <p:nvPr/>
+        </p:nvSpPr>
+        <p:spPr>
+          <a:xfrm>
+            <a:off x="777240" y="4059936"/>
+            <a:ext cx="4389120" cy="786384"/>
+          </a:xfrm>
+          <a:prstGeom prst="roundRect">
+            <a:avLst>
+              <a:gd name="adj" fmla="val 13953"/>
+            </a:avLst>
+          </a:prstGeom>
+          <a:solidFill>
+            <a:srgbClr val="F6F7F8"/>
+          </a:solidFill>
+          <a:ln w="12700">
+            <a:solidFill>
+              <a:srgbClr val="F6F7F8"/>
+            </a:solidFill>
+            <a:prstDash val="solid"/>
+          </a:ln>
+        </p:spPr>
+      </p:sp>
+      <p:sp>
+        <p:nvSpPr>
+          <p:cNvPr id="14" name="Text 11"/>
+          <p:cNvSpPr txBox="1"/>
+          <p:nvPr/>
+        </p:nvSpPr>
+        <p:spPr>
+          <a:xfrm>
+            <a:off x="960120" y="4151376"/>
+            <a:ext cx="4023360" cy="292608"/>
+          </a:xfrm>
+          <a:prstGeom prst="rect">
+            <a:avLst/>
+          </a:prstGeom>
+          <a:noFill/>
+          <a:ln/>
+        </p:spPr>
+        <p:txBody>
+          <a:bodyPr wrap="square" lIns="0" tIns="0" rIns="0" bIns="0" rtlCol="0" anchor="t"/>
+          <a:lstStyle/>
+          <a:p>
+            <a:pPr indent="0" marL="0">
+              <a:buNone/>
+            </a:pPr>
+            <a:r>
+              <a:rPr lang="en-US" sz="1400" b="1" dirty="0">
+                <a:solidFill>
+                  <a:srgbClr val="0A0A0B"/>
+                </a:solidFill>
+              </a:rPr>
+              <a:t>Leave Tomás out for now</a:t>
+            </a:r>
+            <a:endParaRPr lang="en-US" sz="1400" dirty="0"/>
+          </a:p>
+        </p:txBody>
+      </p:sp>
+      <p:sp>
+        <p:nvSpPr>
+          <p:cNvPr id="15" name="Text 12"/>
+          <p:cNvSpPr txBox="1"/>
+          <p:nvPr/>
+        </p:nvSpPr>
+        <p:spPr>
+          <a:xfrm>
+            <a:off x="960120" y="4498848"/>
+            <a:ext cx="4023360" cy="256032"/>
+          </a:xfrm>
+          <a:prstGeom prst="rect">
+            <a:avLst/>
+          </a:prstGeom>
+          <a:noFill/>
+          <a:ln/>
+        </p:spPr>
+        <p:txBody>
+          <a:bodyPr wrap="square" lIns="0" tIns="0" rIns="0" bIns="0" rtlCol="0" anchor="t"/>
+          <a:lstStyle/>
+          <a:p>
+            <a:pPr indent="0" marL="0">
+              <a:buNone/>
+            </a:pPr>
+            <a:r>
+              <a:rPr lang="en-US" sz="1050" dirty="0">
+                <a:solidFill>
+                  <a:srgbClr val="0A7F44"/>
+                </a:solidFill>
+              </a:rPr>
+              <a:t>You said, Fri 23 Oct</a:t>
+            </a:r>
+            <a:endParaRPr lang="en-US" sz="1050" dirty="0"/>
+          </a:p>
+        </p:txBody>
+      </p:sp>
+      <p:sp>
+        <p:nvSpPr>
+          <p:cNvPr id="16" name="Shape 13"/>
+          <p:cNvSpPr/>
+          <p:nvPr/>
+        </p:nvSpPr>
+        <p:spPr>
+          <a:xfrm>
+            <a:off x="777240" y="4992624"/>
+            <a:ext cx="4389120" cy="786384"/>
+          </a:xfrm>
+          <a:prstGeom prst="roundRect">
+            <a:avLst>
+              <a:gd name="adj" fmla="val 13953"/>
+            </a:avLst>
+          </a:prstGeom>
+          <a:solidFill>
+            <a:srgbClr val="F6F7F8"/>
+          </a:solidFill>
+          <a:ln w="12700">
+            <a:solidFill>
+              <a:srgbClr val="F6F7F8"/>
+            </a:solidFill>
+            <a:prstDash val="solid"/>
+          </a:ln>
+        </p:spPr>
+      </p:sp>
+      <p:sp>
+        <p:nvSpPr>
+          <p:cNvPr id="17" name="Text 14"/>
+          <p:cNvSpPr txBox="1"/>
+          <p:nvPr/>
+        </p:nvSpPr>
+        <p:spPr>
+          <a:xfrm>
+            <a:off x="960120" y="5084064"/>
+            <a:ext cx="4023360" cy="292608"/>
+          </a:xfrm>
+          <a:prstGeom prst="rect">
+            <a:avLst/>
+          </a:prstGeom>
+          <a:noFill/>
+          <a:ln/>
+        </p:spPr>
+        <p:txBody>
+          <a:bodyPr wrap="square" lIns="0" tIns="0" rIns="0" bIns="0" rtlCol="0" anchor="t"/>
+          <a:lstStyle/>
+          <a:p>
+            <a:pPr indent="0" marL="0">
+              <a:buNone/>
+            </a:pPr>
+            <a:r>
+              <a:rPr lang="en-US" sz="1400" b="1" dirty="0">
+                <a:solidFill>
+                  <a:srgbClr val="0A0A0B"/>
+                </a:solidFill>
+              </a:rPr>
+              <a:t>One game fewer this week</a:t>
+            </a:r>
+            <a:endParaRPr lang="en-US" sz="1400" dirty="0"/>
+          </a:p>
+        </p:txBody>
+      </p:sp>
+      <p:sp>
+        <p:nvSpPr>
+          <p:cNvPr id="18" name="Text 15"/>
+          <p:cNvSpPr txBox="1"/>
+          <p:nvPr/>
+        </p:nvSpPr>
+        <p:spPr>
+          <a:xfrm>
+            <a:off x="960120" y="5431536"/>
+            <a:ext cx="4023360" cy="256032"/>
+          </a:xfrm>
+          <a:prstGeom prst="rect">
+            <a:avLst/>
+          </a:prstGeom>
+          <a:noFill/>
+          <a:ln/>
+        </p:spPr>
+        <p:txBody>
+          <a:bodyPr wrap="square" lIns="0" tIns="0" rIns="0" bIns="0" rtlCol="0" anchor="t"/>
+          <a:lstStyle/>
+          <a:p>
+            <a:pPr indent="0" marL="0">
+              <a:buNone/>
+            </a:pPr>
+            <a:r>
+              <a:rPr lang="en-US" sz="1050" dirty="0">
+                <a:solidFill>
+                  <a:srgbClr val="0A7F44"/>
+                </a:solidFill>
+              </a:rPr>
+              <a:t>Your games and health app</a:t>
+            </a:r>
+            <a:endParaRPr lang="en-US" sz="1050" dirty="0"/>
+          </a:p>
+        </p:txBody>
+      </p:sp>
+      <p:sp>
+        <p:nvSpPr>
+          <p:cNvPr id="19" name="Shape 16"/>
           <p:cNvSpPr/>
           <p:nvPr/>
         </p:nvSpPr>
@@ -35630,7 +35978,7 @@
       </p:sp>
       <p:sp>
         <p:nvSpPr>
-          <p:cNvPr id="12" name="Text 7"/>
+          <p:cNvPr id="20" name="Text 17"/>
           <p:cNvSpPr txBox="1"/>
           <p:nvPr/>
         </p:nvSpPr>
@@ -35666,7 +36014,7 @@
       </p:sp>
       <p:sp>
         <p:nvSpPr>
-          <p:cNvPr id="13" name="Text 8"/>
+          <p:cNvPr id="21" name="Text 18"/>
           <p:cNvSpPr txBox="1"/>
           <p:nvPr/>
         </p:nvSpPr>
@@ -35702,7 +36050,7 @@
       </p:sp>
       <p:sp>
         <p:nvSpPr>
-          <p:cNvPr id="14" name="Text 9"/>
+          <p:cNvPr id="22" name="Text 19"/>
           <p:cNvSpPr txBox="1"/>
           <p:nvPr/>
         </p:nvSpPr>
@@ -35730,7 +36078,7 @@
                   <a:srgbClr val="55555C"/>
                 </a:solidFill>
               </a:rPr>
-              <a:t>Your words from Messenger, a voice note or the app; each week's load from your games and health app; what you told your agent before.</a:t>
+              <a:t>Your words from Messenger, a voice note or the app; your games and your health app; what you told your agent before.</a:t>
             </a:r>
             <a:endParaRPr lang="en-US" sz="1200" dirty="0"/>
           </a:p>
@@ -35738,7 +36086,7 @@
       </p:sp>
       <p:sp>
         <p:nvSpPr>
-          <p:cNvPr id="15" name="Shape 10"/>
+          <p:cNvPr id="23" name="Shape 20"/>
           <p:cNvSpPr/>
           <p:nvPr/>
         </p:nvSpPr>
@@ -35763,7 +36111,7 @@
       </p:sp>
       <p:sp>
         <p:nvSpPr>
-          <p:cNvPr id="16" name="Text 11"/>
+          <p:cNvPr id="24" name="Text 21"/>
           <p:cNvSpPr txBox="1"/>
           <p:nvPr/>
         </p:nvSpPr>
@@ -35799,7 +36147,7 @@
       </p:sp>
       <p:sp>
         <p:nvSpPr>
-          <p:cNvPr id="17" name="Text 12"/>
+          <p:cNvPr id="25" name="Text 22"/>
           <p:cNvSpPr txBox="1"/>
           <p:nvPr/>
         </p:nvSpPr>
@@ -35835,7 +36183,7 @@
       </p:sp>
       <p:sp>
         <p:nvSpPr>
-          <p:cNvPr id="18" name="Text 13"/>
+          <p:cNvPr id="26" name="Text 23"/>
           <p:cNvSpPr txBox="1"/>
           <p:nvPr/>
         </p:nvSpPr>
@@ -35863,7 +36211,7 @@
                   <a:srgbClr val="55555C"/>
                 </a:solidFill>
               </a:rPr>
-              <a:t>The planner's question against every note, on the server's CPU. Recent notes count more: a body note keeps half its weight after a week.</a:t>
+              <a:t>The planner's question against every note, on the server's CPU. Recent notes count more, and a newer note replaces an older one.</a:t>
             </a:r>
             <a:endParaRPr lang="en-US" sz="1200" dirty="0"/>
           </a:p>
@@ -35871,7 +36219,7 @@
       </p:sp>
       <p:sp>
         <p:nvSpPr>
-          <p:cNvPr id="19" name="Shape 14"/>
+          <p:cNvPr id="27" name="Shape 24"/>
           <p:cNvSpPr/>
           <p:nvPr/>
         </p:nvSpPr>
@@ -35896,7 +36244,7 @@
       </p:sp>
       <p:sp>
         <p:nvSpPr>
-          <p:cNvPr id="20" name="Text 15"/>
+          <p:cNvPr id="28" name="Text 25"/>
           <p:cNvSpPr txBox="1"/>
           <p:nvPr/>
         </p:nvSpPr>
@@ -35932,7 +36280,7 @@
       </p:sp>
       <p:sp>
         <p:nvSpPr>
-          <p:cNvPr id="21" name="Text 16"/>
+          <p:cNvPr id="29" name="Text 26"/>
           <p:cNvSpPr txBox="1"/>
           <p:nvPr/>
         </p:nvSpPr>
@@ -35968,7 +36316,7 @@
       </p:sp>
       <p:sp>
         <p:nvSpPr>
-          <p:cNvPr id="22" name="Text 17"/>
+          <p:cNvPr id="30" name="Text 27"/>
           <p:cNvSpPr txBox="1"/>
           <p:nvPr/>
         </p:nvSpPr>
@@ -35996,7 +36344,7 @@
                   <a:srgbClr val="55555C"/>
                 </a:solidFill>
               </a:rPr>
-              <a:t>Doubles first, no jump sports, one game fewer in a heavy week. A citation must be a real note about the same body part, checked by code.</a:t>
+              <a:t>Doubles first, no late games, someone left out, one game fewer. Each limit must cite a real note, checked by code.</a:t>
             </a:r>
             <a:endParaRPr lang="en-US" sz="1200" dirty="0"/>
           </a:p>
@@ -36004,7 +36352,7 @@
       </p:sp>
       <p:sp>
         <p:nvSpPr>
-          <p:cNvPr id="23" name="Shape 18"/>
+          <p:cNvPr id="31" name="Shape 28"/>
           <p:cNvSpPr/>
           <p:nvPr/>
         </p:nvSpPr>
@@ -36029,7 +36377,7 @@
       </p:sp>
       <p:sp>
         <p:nvSpPr>
-          <p:cNvPr id="24" name="Text 19"/>
+          <p:cNvPr id="32" name="Text 29"/>
           <p:cNvSpPr txBox="1"/>
           <p:nvPr/>
         </p:nvSpPr>
@@ -36065,7 +36413,7 @@
       </p:sp>
       <p:sp>
         <p:nvSpPr>
-          <p:cNvPr id="25" name="Text 20"/>
+          <p:cNvPr id="33" name="Text 30"/>
           <p:cNvSpPr txBox="1"/>
           <p:nvPr/>
         </p:nvSpPr>
@@ -36101,7 +36449,7 @@
       </p:sp>
       <p:sp>
         <p:nvSpPr>
-          <p:cNvPr id="26" name="Text 21"/>
+          <p:cNvPr id="34" name="Text 31"/>
           <p:cNvSpPr txBox="1"/>
           <p:nvPr/>
         </p:nvSpPr>
@@ -36129,7 +36477,7 @@
                   <a:srgbClr val="55555C"/>
                 </a:solidFill>
               </a:rPr>
-              <a:t>check_body hands the top notes and the cited rules to Muse Glimmer when it plans your week. A record, never a diagnosis.</a:t>
+              <a:t>The top notes and the cited limits go to Muse Glimmer when it plans your week. Scheduling only: no coaching, no medical advice.</a:t>
             </a:r>
             <a:endParaRPr lang="en-US" sz="1200" dirty="0"/>
           </a:p>

--- a/video/deck/Serve_Meta_deck.pptx
+++ b/video/deck/Serve_Meta_deck.pptx
@@ -133,20 +133,20 @@
   <p:extLst>
     <p:ext uri="{521415D9-36F7-43E2-AB2F-B90AF26B5E84}">
       <p14:sectionLst xmlns:p14="http://schemas.microsoft.com/office/powerpoint/2010/main">
-        <p14:section name="Opening" id="{8214520b-0326-6e88-68b6-f3727454dd76}">
+        <p14:section name="Opening" id="{434980e2-6f15-ec49-18d9-fbe41086f2c1}">
           <p14:sldIdLst>
             <p14:sldId id="256"/>
             <p14:sldId id="257"/>
           </p14:sldIdLst>
         </p14:section>
-        <p14:section name="Impact" id="{846ef101-9a78-27ac-4ec5-dc32880bd9ee}">
+        <p14:section name="Impact" id="{f479116e-239d-2f59-2cd9-8aa835bb7d80}">
           <p14:sldIdLst>
             <p14:sldId id="258"/>
             <p14:sldId id="259"/>
             <p14:sldId id="260"/>
           </p14:sldIdLst>
         </p14:section>
-        <p14:section name="Demo" id="{6bd44c06-c316-5a5b-4b21-6fb90a487a0f}">
+        <p14:section name="Demo" id="{a15ec71b-e5c7-861b-f1d1-20c816b947e3}">
           <p14:sldIdLst>
             <p14:sldId id="261"/>
             <p14:sldId id="262"/>
@@ -156,7 +156,7 @@
             <p14:sldId id="266"/>
           </p14:sldIdLst>
         </p14:section>
-        <p14:section name="Use of Meta AI" id="{32a8f6a1-01ba-ddf4-06bd-76b74634df90}">
+        <p14:section name="Use of Meta AI" id="{5e8a1c80-68c8-d8eb-8c91-dea486fc9db7}">
           <p14:sldIdLst>
             <p14:sldId id="267"/>
             <p14:sldId id="268"/>
@@ -164,7 +164,7 @@
             <p14:sldId id="270"/>
           </p14:sldIdLst>
         </p14:section>
-        <p14:section name="Technical depth" id="{eaee94c5-9e1e-a2a3-caf5-c95fa89bb4eb}">
+        <p14:section name="Technical depth" id="{1277088e-5112-1062-6470-f7792553cc4d}">
           <p14:sldIdLst>
             <p14:sldId id="271"/>
             <p14:sldId id="272"/>
@@ -178,12 +178,12 @@
             <p14:sldId id="280"/>
           </p14:sldIdLst>
         </p14:section>
-        <p14:section name="Architecture" id="{4cbaba8c-07fe-3086-c279-f7b354924a61}">
+        <p14:section name="Architecture" id="{8fc528ea-79c8-d1cc-da23-c144b544b564}">
           <p14:sldIdLst>
             <p14:sldId id="281"/>
           </p14:sldIdLst>
         </p14:section>
-        <p14:section name="Close" id="{edd5e0b6-8bdc-255f-805a-b2f1adb83a5a}">
+        <p14:section name="Close" id="{edac9a19-7155-5741-10be-536e1a1bcc8c}">
           <p14:sldIdLst>
             <p14:sldId id="282"/>
           </p14:sldIdLst>
@@ -3062,14 +3062,13 @@
           <a:p>
             <a:r>
               <a:rPr lang="en-US" dirty="0"/>
-              <a:t>這週加的七件事，每一件都有量測：
+              <a:t>這週加的六件事，每一件都有量測：
 1 私密行事曆貫穿 Match 和規劃：其他成員的空檔只能問「這個時間有空嗎」，每天最多問 24 次。
 2 學出來的意圖路由：正規表示式找到 6/10 約球請求，加上路由 10/10，22 則其他訊息誤報 1 則。
 3 Muse Spark（Muse Code 用的同一系列）蓋 C3 新功能：修正我們自己的 oracle 後第一次就過。
 4 商用授權的記憶 embedder：Granite（Apache 2.0）前三名召回 0.80。
 5 Orbit 視覺裁判：Muse Wonder 看 84 張標註畫面，會說出它看到的瑕疵。
-6 網球籃球的球：WASB 接進 highlight 管線，籃球抽查 12/12 都在球上。
-7 GPU 套件在 A100 上跑過閘門：攻擊 93/93、e2e 58/58、crash matrix 201/201。</a:t>
+6 GPU 套件在 A100 上跑過閘門：攻擊 93/93、e2e 58/58、crash matrix 201/201。</a:t>
             </a:r>
             <a:endParaRPr lang="en-US" dirty="0"/>
           </a:p>
@@ -8233,7 +8232,7 @@
                   <a:srgbClr val="0A0A0B"/>
                 </a:solidFill>
               </a:rPr>
-              <a:t>15 Meta models: 12 in the product, 3 for checks and fallback</a:t>
+              <a:t>15 Meta models, each with a job</a:t>
             </a:r>
             <a:endParaRPr lang="en-US" sz="3200" dirty="0"/>
           </a:p>
@@ -8539,7 +8538,7 @@
                   <a:srgbClr val="0A0A0B"/>
                 </a:solidFill>
               </a:rPr>
-              <a:t>Distilled from Glimmer; answers 54–67% of members' decisions when sure</a:t>
+              <a:t>Distilled from Glimmer; answers alone when sure</a:t>
             </a:r>
             <a:endParaRPr lang="en-US" sz="850" dirty="0"/>
           </a:p>
@@ -9052,7 +9051,7 @@
                   <a:srgbClr val="0A0A0B"/>
                 </a:solidFill>
               </a:rPr>
-              <a:t>Agent memory: finds what matters for your week by meaning; groups the club's ideas</a:t>
+              <a:t>Agent memory: what matters for your week, by meaning</a:t>
             </a:r>
             <a:endParaRPr lang="en-US" sz="850" dirty="0"/>
           </a:p>
@@ -9565,7 +9564,7 @@
                   <a:srgbClr val="0A0A0B"/>
                 </a:solidFill>
               </a:rPr>
-              <a:t>Every player's pose on every frame; finds the moment</a:t>
+              <a:t>Finds the moment worth sharing in your clip</a:t>
             </a:r>
             <a:endParaRPr lang="en-US" sz="850" dirty="0"/>
           </a:p>
@@ -11053,7 +11052,7 @@
                   <a:srgbClr val="0A0A0B"/>
                 </a:solidFill>
               </a:rPr>
-              <a:t>Ten open-weights models on hardware I own; five on the Meta Model API. Every agent follows Meta's Agents Rule of Two.</a:t>
+              <a:t>10 open weights on my GPU; 5 on the Meta Model API: Voice and Image at runtime, Spark, SAM 3.1 and Wonder for fallback and checks.</a:t>
             </a:r>
             <a:endParaRPr lang="en-US" sz="1200" dirty="0"/>
           </a:p>
@@ -11312,8 +11311,8 @@
         </p:nvSpPr>
         <p:spPr>
           <a:xfrm>
-            <a:off x="777240" y="2971800"/>
-            <a:ext cx="932688" cy="329184"/>
+            <a:off x="777240" y="2926080"/>
+            <a:ext cx="1554480" cy="310896"/>
           </a:xfrm>
           <a:prstGeom prst="roundRect">
             <a:avLst>
@@ -11339,8 +11338,8 @@
         </p:nvSpPr>
         <p:spPr>
           <a:xfrm>
-            <a:off x="777240" y="2971800"/>
-            <a:ext cx="932688" cy="329184"/>
+            <a:off x="777240" y="2926080"/>
+            <a:ext cx="1554480" cy="310896"/>
           </a:xfrm>
           <a:prstGeom prst="rect">
             <a:avLst/>
@@ -11356,14 +11355,14 @@
               <a:buNone/>
             </a:pPr>
             <a:r>
-              <a:rPr lang="en-US" sz="900" b="1" dirty="0">
+              <a:rPr lang="en-US" sz="1000" b="1" dirty="0">
                 <a:solidFill>
                   <a:srgbClr val="0A7F44"/>
                 </a:solidFill>
               </a:rPr>
               <a:t>get_week</a:t>
             </a:r>
-            <a:endParaRPr lang="en-US" sz="900" dirty="0"/>
+            <a:endParaRPr lang="en-US" sz="1000" dirty="0"/>
           </a:p>
         </p:txBody>
       </p:sp>
@@ -11375,8 +11374,8 @@
         </p:nvSpPr>
         <p:spPr>
           <a:xfrm>
-            <a:off x="1764792" y="2971800"/>
-            <a:ext cx="932688" cy="329184"/>
+            <a:off x="2423160" y="2926080"/>
+            <a:ext cx="1554480" cy="310896"/>
           </a:xfrm>
           <a:prstGeom prst="roundRect">
             <a:avLst>
@@ -11402,8 +11401,8 @@
         </p:nvSpPr>
         <p:spPr>
           <a:xfrm>
-            <a:off x="1764792" y="2971800"/>
-            <a:ext cx="932688" cy="329184"/>
+            <a:off x="2423160" y="2926080"/>
+            <a:ext cx="1554480" cy="310896"/>
           </a:xfrm>
           <a:prstGeom prst="rect">
             <a:avLst/>
@@ -11419,14 +11418,14 @@
               <a:buNone/>
             </a:pPr>
             <a:r>
-              <a:rPr lang="en-US" sz="900" b="1" dirty="0">
+              <a:rPr lang="en-US" sz="1000" b="1" dirty="0">
                 <a:solidFill>
                   <a:srgbClr val="0A7F44"/>
                 </a:solidFill>
               </a:rPr>
               <a:t>check_body</a:t>
             </a:r>
-            <a:endParaRPr lang="en-US" sz="900" dirty="0"/>
+            <a:endParaRPr lang="en-US" sz="1000" dirty="0"/>
           </a:p>
         </p:txBody>
       </p:sp>
@@ -11438,8 +11437,8 @@
         </p:nvSpPr>
         <p:spPr>
           <a:xfrm>
-            <a:off x="2752344" y="2971800"/>
-            <a:ext cx="932688" cy="329184"/>
+            <a:off x="4069080" y="2926080"/>
+            <a:ext cx="1554480" cy="310896"/>
           </a:xfrm>
           <a:prstGeom prst="roundRect">
             <a:avLst>
@@ -11465,8 +11464,8 @@
         </p:nvSpPr>
         <p:spPr>
           <a:xfrm>
-            <a:off x="2752344" y="2971800"/>
-            <a:ext cx="932688" cy="329184"/>
+            <a:off x="4069080" y="2926080"/>
+            <a:ext cx="1554480" cy="310896"/>
           </a:xfrm>
           <a:prstGeom prst="rect">
             <a:avLst/>
@@ -11482,14 +11481,14 @@
               <a:buNone/>
             </a:pPr>
             <a:r>
-              <a:rPr lang="en-US" sz="900" b="1" dirty="0">
+              <a:rPr lang="en-US" sz="1000" b="1" dirty="0">
                 <a:solidFill>
                   <a:srgbClr val="0A7F44"/>
                 </a:solidFill>
               </a:rPr>
               <a:t>recall</a:t>
             </a:r>
-            <a:endParaRPr lang="en-US" sz="900" dirty="0"/>
+            <a:endParaRPr lang="en-US" sz="1000" dirty="0"/>
           </a:p>
         </p:txBody>
       </p:sp>
@@ -11501,8 +11500,8 @@
         </p:nvSpPr>
         <p:spPr>
           <a:xfrm>
-            <a:off x="3739896" y="2971800"/>
-            <a:ext cx="932688" cy="329184"/>
+            <a:off x="777240" y="3310128"/>
+            <a:ext cx="1554480" cy="310896"/>
           </a:xfrm>
           <a:prstGeom prst="roundRect">
             <a:avLst>
@@ -11528,8 +11527,8 @@
         </p:nvSpPr>
         <p:spPr>
           <a:xfrm>
-            <a:off x="3739896" y="2971800"/>
-            <a:ext cx="932688" cy="329184"/>
+            <a:off x="777240" y="3310128"/>
+            <a:ext cx="1554480" cy="310896"/>
           </a:xfrm>
           <a:prstGeom prst="rect">
             <a:avLst/>
@@ -11545,14 +11544,14 @@
               <a:buNone/>
             </a:pPr>
             <a:r>
-              <a:rPr lang="en-US" sz="900" b="1" dirty="0">
+              <a:rPr lang="en-US" sz="1000" b="1" dirty="0">
                 <a:solidFill>
                   <a:srgbClr val="0A7F44"/>
                 </a:solidFill>
               </a:rPr>
               <a:t>find_partners</a:t>
             </a:r>
-            <a:endParaRPr lang="en-US" sz="900" dirty="0"/>
+            <a:endParaRPr lang="en-US" sz="1000" dirty="0"/>
           </a:p>
         </p:txBody>
       </p:sp>
@@ -11564,8 +11563,8 @@
         </p:nvSpPr>
         <p:spPr>
           <a:xfrm>
-            <a:off x="4727448" y="2971800"/>
-            <a:ext cx="932688" cy="329184"/>
+            <a:off x="2423160" y="3310128"/>
+            <a:ext cx="1554480" cy="310896"/>
           </a:xfrm>
           <a:prstGeom prst="roundRect">
             <a:avLst>
@@ -11591,8 +11590,8 @@
         </p:nvSpPr>
         <p:spPr>
           <a:xfrm>
-            <a:off x="4727448" y="2971800"/>
-            <a:ext cx="932688" cy="329184"/>
+            <a:off x="2423160" y="3310128"/>
+            <a:ext cx="1554480" cy="310896"/>
           </a:xfrm>
           <a:prstGeom prst="rect">
             <a:avLst/>
@@ -11608,14 +11607,14 @@
               <a:buNone/>
             </a:pPr>
             <a:r>
-              <a:rPr lang="en-US" sz="900" b="1" dirty="0">
+              <a:rPr lang="en-US" sz="1000" b="1" dirty="0">
                 <a:solidFill>
                   <a:srgbClr val="0A7F44"/>
                 </a:solidFill>
               </a:rPr>
               <a:t>find_places</a:t>
             </a:r>
-            <a:endParaRPr lang="en-US" sz="900" dirty="0"/>
+            <a:endParaRPr lang="en-US" sz="1000" dirty="0"/>
           </a:p>
         </p:txBody>
       </p:sp>
@@ -11627,8 +11626,8 @@
         </p:nvSpPr>
         <p:spPr>
           <a:xfrm>
-            <a:off x="777240" y="3429000"/>
-            <a:ext cx="932688" cy="329184"/>
+            <a:off x="4069080" y="3310128"/>
+            <a:ext cx="1554480" cy="310896"/>
           </a:xfrm>
           <a:prstGeom prst="roundRect">
             <a:avLst>
@@ -11654,8 +11653,8 @@
         </p:nvSpPr>
         <p:spPr>
           <a:xfrm>
-            <a:off x="777240" y="3429000"/>
-            <a:ext cx="932688" cy="329184"/>
+            <a:off x="4069080" y="3310128"/>
+            <a:ext cx="1554480" cy="310896"/>
           </a:xfrm>
           <a:prstGeom prst="rect">
             <a:avLst/>
@@ -11671,14 +11670,14 @@
               <a:buNone/>
             </a:pPr>
             <a:r>
-              <a:rPr lang="en-US" sz="900" b="1" dirty="0">
+              <a:rPr lang="en-US" sz="1000" b="1" dirty="0">
                 <a:solidFill>
                   <a:srgbClr val="0A7F44"/>
                 </a:solidFill>
               </a:rPr>
               <a:t>negotiate</a:t>
             </a:r>
-            <a:endParaRPr lang="en-US" sz="900" dirty="0"/>
+            <a:endParaRPr lang="en-US" sz="1000" dirty="0"/>
           </a:p>
         </p:txBody>
       </p:sp>
@@ -11690,8 +11689,8 @@
         </p:nvSpPr>
         <p:spPr>
           <a:xfrm>
-            <a:off x="1764792" y="3429000"/>
-            <a:ext cx="932688" cy="329184"/>
+            <a:off x="777240" y="3694176"/>
+            <a:ext cx="1554480" cy="310896"/>
           </a:xfrm>
           <a:prstGeom prst="roundRect">
             <a:avLst>
@@ -11717,8 +11716,8 @@
         </p:nvSpPr>
         <p:spPr>
           <a:xfrm>
-            <a:off x="1764792" y="3429000"/>
-            <a:ext cx="932688" cy="329184"/>
+            <a:off x="777240" y="3694176"/>
+            <a:ext cx="1554480" cy="310896"/>
           </a:xfrm>
           <a:prstGeom prst="rect">
             <a:avLst/>
@@ -11734,14 +11733,14 @@
               <a:buNone/>
             </a:pPr>
             <a:r>
-              <a:rPr lang="en-US" sz="900" b="1" dirty="0">
+              <a:rPr lang="en-US" sz="1000" b="1" dirty="0">
                 <a:solidFill>
                   <a:srgbClr val="0A7F44"/>
                 </a:solidFill>
               </a:rPr>
               <a:t>request_approval</a:t>
             </a:r>
-            <a:endParaRPr lang="en-US" sz="900" dirty="0"/>
+            <a:endParaRPr lang="en-US" sz="1000" dirty="0"/>
           </a:p>
         </p:txBody>
       </p:sp>
@@ -11753,8 +11752,8 @@
         </p:nvSpPr>
         <p:spPr>
           <a:xfrm>
-            <a:off x="2752344" y="3429000"/>
-            <a:ext cx="932688" cy="329184"/>
+            <a:off x="2423160" y="3694176"/>
+            <a:ext cx="1554480" cy="310896"/>
           </a:xfrm>
           <a:prstGeom prst="roundRect">
             <a:avLst>
@@ -11780,8 +11779,8 @@
         </p:nvSpPr>
         <p:spPr>
           <a:xfrm>
-            <a:off x="2752344" y="3429000"/>
-            <a:ext cx="932688" cy="329184"/>
+            <a:off x="2423160" y="3694176"/>
+            <a:ext cx="1554480" cy="310896"/>
           </a:xfrm>
           <a:prstGeom prst="rect">
             <a:avLst/>
@@ -11797,14 +11796,14 @@
               <a:buNone/>
             </a:pPr>
             <a:r>
-              <a:rPr lang="en-US" sz="900" b="1" dirty="0">
+              <a:rPr lang="en-US" sz="1000" b="1" dirty="0">
                 <a:solidFill>
                   <a:srgbClr val="0A7F44"/>
                 </a:solidFill>
               </a:rPr>
               <a:t>nudge</a:t>
             </a:r>
-            <a:endParaRPr lang="en-US" sz="900" dirty="0"/>
+            <a:endParaRPr lang="en-US" sz="1000" dirty="0"/>
           </a:p>
         </p:txBody>
       </p:sp>
@@ -11816,8 +11815,8 @@
         </p:nvSpPr>
         <p:spPr>
           <a:xfrm>
-            <a:off x="3739896" y="3429000"/>
-            <a:ext cx="932688" cy="329184"/>
+            <a:off x="4069080" y="3694176"/>
+            <a:ext cx="1554480" cy="310896"/>
           </a:xfrm>
           <a:prstGeom prst="roundRect">
             <a:avLst>
@@ -11843,8 +11842,8 @@
         </p:nvSpPr>
         <p:spPr>
           <a:xfrm>
-            <a:off x="3739896" y="3429000"/>
-            <a:ext cx="932688" cy="329184"/>
+            <a:off x="4069080" y="3694176"/>
+            <a:ext cx="1554480" cy="310896"/>
           </a:xfrm>
           <a:prstGeom prst="rect">
             <a:avLst/>
@@ -11860,14 +11859,14 @@
               <a:buNone/>
             </a:pPr>
             <a:r>
-              <a:rPr lang="en-US" sz="900" b="1" dirty="0">
+              <a:rPr lang="en-US" sz="1000" b="1" dirty="0">
                 <a:solidFill>
                   <a:srgbClr val="0A7F44"/>
                 </a:solidFill>
               </a:rPr>
               <a:t>finish</a:t>
             </a:r>
-            <a:endParaRPr lang="en-US" sz="900" dirty="0"/>
+            <a:endParaRPr lang="en-US" sz="1000" dirty="0"/>
           </a:p>
         </p:txBody>
       </p:sp>
@@ -17045,7 +17044,7 @@
                   <a:srgbClr val="55555C"/>
                 </a:solidFill>
               </a:rPr>
-              <a:t>fewer member answers from Glimmer (simulated club), no rule broken</a:t>
+              <a:t>of members' answers taken off Glimmer (simulated club), no rule broken</a:t>
             </a:r>
             <a:endParaRPr lang="en-US" sz="1000" dirty="0"/>
           </a:p>
@@ -19636,7 +19635,7 @@
                   <a:srgbClr val="55555C"/>
                 </a:solidFill>
               </a:rPr>
-              <a:t>Your agent sets up your games with your friends' agents, plans around your body, and cuts your highlights. You just say yes.</a:t>
+              <a:t>Your agent sets up your games with your friends' agents, plans around your week, and cuts your highlights. You just say yes.</a:t>
             </a:r>
             <a:endParaRPr lang="en-US" sz="1700" dirty="0"/>
           </a:p>
@@ -19819,7 +19818,7 @@
                   <a:srgbClr val="0A0A0B"/>
                 </a:solidFill>
               </a:rPr>
-              <a:t>15 Meta models, 10 on hardware I own</a:t>
+              <a:t>15 Meta models: 10 on my GPU, 5 on the Meta Model API</a:t>
             </a:r>
             <a:endParaRPr lang="en-US" sz="1400" dirty="0"/>
           </a:p>
@@ -20058,7 +20057,7 @@
                   <a:srgbClr val="0A0A0B"/>
                 </a:solidFill>
               </a:rPr>
-              <a:t>Seven more pieces, each one measured</a:t>
+              <a:t>Six more pieces, each one measured</a:t>
             </a:r>
             <a:endParaRPr lang="en-US" sz="3200" dirty="0"/>
           </a:p>
@@ -20842,7 +20841,7 @@
                   <a:srgbClr val="0A0A0B"/>
                 </a:solidFill>
               </a:rPr>
-              <a:t>Recall@3 0.80 (DRAMA 0.75): the memory is free for commercial use</a:t>
+              <a:t>Recall@3 0.80 vs DRAMA 0.75; Recall@1 0.40 vs 0.60: DRAMA stays default</a:t>
             </a:r>
             <a:endParaRPr lang="en-US" sz="1100" dirty="0"/>
           </a:p>
@@ -21059,11 +21058,11 @@
             <a:avLst/>
           </a:prstGeom>
           <a:solidFill>
-            <a:srgbClr val="0064E0"/>
+            <a:srgbClr val="0A7F44"/>
           </a:solidFill>
           <a:ln w="12700">
             <a:solidFill>
-              <a:srgbClr val="0064E0"/>
+              <a:srgbClr val="0A7F44"/>
             </a:solidFill>
             <a:prstDash val="solid"/>
           </a:ln>
@@ -21135,7 +21134,7 @@
                   <a:srgbClr val="0A0A0B"/>
                 </a:solidFill>
               </a:rPr>
-              <a:t>The ball in tennis and basketball</a:t>
+              <a:t>The GPU suites, through the gates</a:t>
             </a:r>
             <a:endParaRPr lang="en-US" sz="1350" dirty="0"/>
           </a:p>
@@ -21171,7 +21170,7 @@
                   <a:srgbClr val="55555C"/>
                 </a:solidFill>
               </a:rPr>
-              <a:t>WASB's tennis and basketball trackers, wired into the highlight pipeline</a:t>
+              <a:t>One flag change, Muse Glimmer on a cloud A100</a:t>
             </a:r>
             <a:endParaRPr lang="en-US" sz="950" dirty="0"/>
           </a:p>
@@ -21234,203 +21233,7 @@
                   <a:srgbClr val="0A0A0B"/>
                 </a:solidFill>
               </a:rPr>
-              <a:t>Basketball: every checked mark was on the ball (12 of 12); about 15 s a 20 s clip on the GPU</a:t>
-            </a:r>
-            <a:endParaRPr lang="en-US" sz="1100" dirty="0"/>
-          </a:p>
-        </p:txBody>
-      </p:sp>
-      <p:sp>
-        <p:nvSpPr>
-          <p:cNvPr id="41" name="Shape 38"/>
-          <p:cNvSpPr/>
-          <p:nvPr/>
-        </p:nvSpPr>
-        <p:spPr>
-          <a:xfrm>
-            <a:off x="548640" y="5577840"/>
-            <a:ext cx="347472" cy="347472"/>
-          </a:xfrm>
-          <a:prstGeom prst="ellipse">
-            <a:avLst/>
-          </a:prstGeom>
-          <a:solidFill>
-            <a:srgbClr val="0A7F44"/>
-          </a:solidFill>
-          <a:ln w="12700">
-            <a:solidFill>
-              <a:srgbClr val="0A7F44"/>
-            </a:solidFill>
-            <a:prstDash val="solid"/>
-          </a:ln>
-        </p:spPr>
-      </p:sp>
-      <p:sp>
-        <p:nvSpPr>
-          <p:cNvPr id="42" name="Text 39"/>
-          <p:cNvSpPr txBox="1"/>
-          <p:nvPr/>
-        </p:nvSpPr>
-        <p:spPr>
-          <a:xfrm>
-            <a:off x="548640" y="5577840"/>
-            <a:ext cx="347472" cy="347472"/>
-          </a:xfrm>
-          <a:prstGeom prst="rect">
-            <a:avLst/>
-          </a:prstGeom>
-          <a:noFill/>
-          <a:ln/>
-        </p:spPr>
-        <p:txBody>
-          <a:bodyPr wrap="square" lIns="0" tIns="0" rIns="0" bIns="0" rtlCol="0" anchor="ctr"/>
-          <a:lstStyle/>
-          <a:p>
-            <a:pPr algn="ctr" indent="0" marL="0">
-              <a:buNone/>
-            </a:pPr>
-            <a:r>
-              <a:rPr lang="en-US" sz="1200" b="1" dirty="0">
-                <a:solidFill>
-                  <a:srgbClr val="FFFFFF"/>
-                </a:solidFill>
-              </a:rPr>
-              <a:t>7</a:t>
-            </a:r>
-            <a:endParaRPr lang="en-US" sz="1200" dirty="0"/>
-          </a:p>
-        </p:txBody>
-      </p:sp>
-      <p:sp>
-        <p:nvSpPr>
-          <p:cNvPr id="43" name="Text 40"/>
-          <p:cNvSpPr txBox="1"/>
-          <p:nvPr/>
-        </p:nvSpPr>
-        <p:spPr>
-          <a:xfrm>
-            <a:off x="1051560" y="5504688"/>
-            <a:ext cx="3291840" cy="274320"/>
-          </a:xfrm>
-          <a:prstGeom prst="rect">
-            <a:avLst/>
-          </a:prstGeom>
-          <a:noFill/>
-          <a:ln/>
-        </p:spPr>
-        <p:txBody>
-          <a:bodyPr wrap="square" lIns="0" tIns="0" rIns="0" bIns="0" rtlCol="0" anchor="t"/>
-          <a:lstStyle/>
-          <a:p>
-            <a:pPr indent="0" marL="0">
-              <a:buNone/>
-            </a:pPr>
-            <a:r>
-              <a:rPr lang="en-US" sz="1350" b="1" dirty="0">
-                <a:solidFill>
-                  <a:srgbClr val="0A0A0B"/>
-                </a:solidFill>
-              </a:rPr>
-              <a:t>The GPU suites, through the gates</a:t>
-            </a:r>
-            <a:endParaRPr lang="en-US" sz="1350" dirty="0"/>
-          </a:p>
-        </p:txBody>
-      </p:sp>
-      <p:sp>
-        <p:nvSpPr>
-          <p:cNvPr id="44" name="Text 41"/>
-          <p:cNvSpPr txBox="1"/>
-          <p:nvPr/>
-        </p:nvSpPr>
-        <p:spPr>
-          <a:xfrm>
-            <a:off x="1051560" y="5779008"/>
-            <a:ext cx="4206240" cy="292608"/>
-          </a:xfrm>
-          <a:prstGeom prst="rect">
-            <a:avLst/>
-          </a:prstGeom>
-          <a:noFill/>
-          <a:ln/>
-        </p:spPr>
-        <p:txBody>
-          <a:bodyPr wrap="square" lIns="0" tIns="0" rIns="0" bIns="0" rtlCol="0" anchor="t"/>
-          <a:lstStyle/>
-          <a:p>
-            <a:pPr indent="0" marL="0">
-              <a:buNone/>
-            </a:pPr>
-            <a:r>
-              <a:rPr lang="en-US" sz="950" dirty="0">
-                <a:solidFill>
-                  <a:srgbClr val="55555C"/>
-                </a:solidFill>
-              </a:rPr>
-              <a:t>One flag change, Muse Glimmer on a cloud A100</a:t>
-            </a:r>
-            <a:endParaRPr lang="en-US" sz="950" dirty="0"/>
-          </a:p>
-        </p:txBody>
-      </p:sp>
-      <p:sp>
-        <p:nvSpPr>
-          <p:cNvPr id="45" name="Shape 42"/>
-          <p:cNvSpPr/>
-          <p:nvPr/>
-        </p:nvSpPr>
-        <p:spPr>
-          <a:xfrm>
-            <a:off x="5486400" y="5486400"/>
-            <a:ext cx="6126480" cy="530352"/>
-          </a:xfrm>
-          <a:prstGeom prst="roundRect">
-            <a:avLst>
-              <a:gd name="adj" fmla="val 20690"/>
-            </a:avLst>
-          </a:prstGeom>
-          <a:solidFill>
-            <a:srgbClr val="F6F7F8"/>
-          </a:solidFill>
-          <a:ln w="12700">
-            <a:solidFill>
-              <a:srgbClr val="F6F7F8"/>
-            </a:solidFill>
-            <a:prstDash val="solid"/>
-          </a:ln>
-        </p:spPr>
-      </p:sp>
-      <p:sp>
-        <p:nvSpPr>
-          <p:cNvPr id="46" name="Text 43"/>
-          <p:cNvSpPr txBox="1"/>
-          <p:nvPr/>
-        </p:nvSpPr>
-        <p:spPr>
-          <a:xfrm>
-            <a:off x="5650992" y="5486400"/>
-            <a:ext cx="5852160" cy="530352"/>
-          </a:xfrm>
-          <a:prstGeom prst="rect">
-            <a:avLst/>
-          </a:prstGeom>
-          <a:noFill/>
-          <a:ln/>
-        </p:spPr>
-        <p:txBody>
-          <a:bodyPr wrap="square" lIns="0" tIns="0" rIns="0" bIns="0" rtlCol="0" anchor="ctr"/>
-          <a:lstStyle/>
-          <a:p>
-            <a:pPr indent="0" marL="0">
-              <a:buNone/>
-            </a:pPr>
-            <a:r>
-              <a:rPr lang="en-US" sz="1100" dirty="0">
-                <a:solidFill>
-                  <a:srgbClr val="0A0A0B"/>
-                </a:solidFill>
-              </a:rPr>
-              <a:t>Attacks 93 of 93, end to end 58 of 58, 201 crash-matrix assertions, oracle passed</a:t>
+              <a:t>Attacks 93 of 93, end to end 58 of 58, crash matrix 20 of 20, oracle passed</a:t>
             </a:r>
             <a:endParaRPr lang="en-US" sz="1100" dirty="0"/>
           </a:p>
@@ -25016,7 +24819,7 @@
                   <a:srgbClr val="0A7F44"/>
                 </a:solidFill>
               </a:rPr>
-              <a:t>Messenger end to end</a:t>
+              <a:t>end to end</a:t>
             </a:r>
             <a:endParaRPr lang="en-US" sz="950" dirty="0"/>
           </a:p>
@@ -29506,7 +29309,7 @@
                   <a:srgbClr val="55555C"/>
                 </a:solidFill>
               </a:rPr>
-              <a:t>find you, read your pose, cut you out · orbit effect · caption</a:t>
+              <a:t>find you, the moment to share, cut you out · orbit effect · caption</a:t>
             </a:r>
             <a:endParaRPr lang="en-US" sz="900" dirty="0"/>
           </a:p>
@@ -31078,7 +30881,7 @@
                   <a:srgbClr val="0A0A0B"/>
                 </a:solidFill>
               </a:rPr>
-              <a:t>Built during the Meta Global AI Developer Hackathon, Oct 27 – Nov 4, 2026: everything except the TrackNetV5 library</a:t>
+              <a:t>Built during the Meta Global AI Developer Hackathon, Oct 27 – Nov 4, 2026 (921 commits); third-party models and tools in the report, 7.1</a:t>
             </a:r>
             <a:endParaRPr lang="en-US" sz="1300" dirty="0"/>
           </a:p>
@@ -33664,7 +33467,7 @@
                   <a:srgbClr val="55555C"/>
                 </a:solidFill>
               </a:rPr>
-              <a:t>Apple Health, Google Fit, GPX: your load</a:t>
+              <a:t>Apple Health, Google Fit, GPX: your games</a:t>
             </a:r>
             <a:endParaRPr lang="en-US" sz="1100" dirty="0"/>
           </a:p>

--- a/video/deck/Serve_Meta_deck.pptx
+++ b/video/deck/Serve_Meta_deck.pptx
@@ -133,20 +133,20 @@
   <p:extLst>
     <p:ext uri="{521415D9-36F7-43E2-AB2F-B90AF26B5E84}">
       <p14:sectionLst xmlns:p14="http://schemas.microsoft.com/office/powerpoint/2010/main">
-        <p14:section name="Opening" id="{434980e2-6f15-ec49-18d9-fbe41086f2c1}">
+        <p14:section name="Opening" id="{1f77fa67-6633-cc2f-0189-987ddd922add}">
           <p14:sldIdLst>
             <p14:sldId id="256"/>
             <p14:sldId id="257"/>
           </p14:sldIdLst>
         </p14:section>
-        <p14:section name="Impact" id="{f479116e-239d-2f59-2cd9-8aa835bb7d80}">
+        <p14:section name="Impact" id="{8f0d6f8e-6ad4-cb16-4586-b74c674a586f}">
           <p14:sldIdLst>
             <p14:sldId id="258"/>
             <p14:sldId id="259"/>
             <p14:sldId id="260"/>
           </p14:sldIdLst>
         </p14:section>
-        <p14:section name="Demo" id="{a15ec71b-e5c7-861b-f1d1-20c816b947e3}">
+        <p14:section name="Demo" id="{e2ec9950-aa4b-b74d-ab38-e560f103c3ac}">
           <p14:sldIdLst>
             <p14:sldId id="261"/>
             <p14:sldId id="262"/>
@@ -156,7 +156,7 @@
             <p14:sldId id="266"/>
           </p14:sldIdLst>
         </p14:section>
-        <p14:section name="Use of Meta AI" id="{5e8a1c80-68c8-d8eb-8c91-dea486fc9db7}">
+        <p14:section name="Use of Meta AI" id="{8d64b80b-bc35-78bc-cc45-f6e2edad4bb0}">
           <p14:sldIdLst>
             <p14:sldId id="267"/>
             <p14:sldId id="268"/>
@@ -164,7 +164,7 @@
             <p14:sldId id="270"/>
           </p14:sldIdLst>
         </p14:section>
-        <p14:section name="Technical depth" id="{1277088e-5112-1062-6470-f7792553cc4d}">
+        <p14:section name="Technical depth" id="{3fb2364d-46e4-5399-37ca-45f31674e8fe}">
           <p14:sldIdLst>
             <p14:sldId id="271"/>
             <p14:sldId id="272"/>
@@ -178,12 +178,12 @@
             <p14:sldId id="280"/>
           </p14:sldIdLst>
         </p14:section>
-        <p14:section name="Architecture" id="{8fc528ea-79c8-d1cc-da23-c144b544b564}">
+        <p14:section name="Architecture" id="{d3a8a39b-2033-af5c-2851-19140c9f5849}">
           <p14:sldIdLst>
             <p14:sldId id="281"/>
           </p14:sldIdLst>
         </p14:section>
-        <p14:section name="Close" id="{edac9a19-7155-5741-10be-536e1a1bcc8c}">
+        <p14:section name="Close" id="{18419cf9-7e6d-7076-3ed6-51f3d61ff907}">
           <p14:sldIdLst>
             <p14:sldId id="282"/>
           </p14:sldIdLst>
@@ -31119,31 +31119,31 @@
         </p:nvSpPr>
         <p:spPr>
           <a:xfrm>
-            <a:off x="822960" y="1965960"/>
-            <a:ext cx="2834640" cy="1097280"/>
-          </a:xfrm>
-          <a:prstGeom prst="rect">
-            <a:avLst/>
-          </a:prstGeom>
-          <a:noFill/>
-          <a:ln/>
-        </p:spPr>
-        <p:txBody>
-          <a:bodyPr wrap="square" lIns="0" tIns="0" rIns="0" bIns="0" rtlCol="0" anchor="t"/>
-          <a:lstStyle/>
-          <a:p>
-            <a:pPr indent="0" marL="0">
-              <a:buNone/>
-            </a:pPr>
-            <a:r>
-              <a:rPr lang="en-US" sz="7200" b="1" dirty="0">
+            <a:off x="822960" y="1920240"/>
+            <a:ext cx="2971800" cy="731520"/>
+          </a:xfrm>
+          <a:prstGeom prst="rect">
+            <a:avLst/>
+          </a:prstGeom>
+          <a:noFill/>
+          <a:ln/>
+        </p:spPr>
+        <p:txBody>
+          <a:bodyPr wrap="square" lIns="0" tIns="0" rIns="0" bIns="0" rtlCol="0" anchor="t"/>
+          <a:lstStyle/>
+          <a:p>
+            <a:pPr indent="0" marL="0">
+              <a:buNone/>
+            </a:pPr>
+            <a:r>
+              <a:rPr lang="en-US" sz="3800" b="1" dirty="0">
                 <a:solidFill>
                   <a:srgbClr val="0A7F44"/>
                 </a:solidFill>
               </a:rPr>
-              <a:t>31%</a:t>
-            </a:r>
-            <a:endParaRPr lang="en-US" sz="7200" dirty="0"/>
+              <a:t>40% → 26%</a:t>
+            </a:r>
+            <a:endParaRPr lang="en-US" sz="3800" dirty="0"/>
           </a:p>
         </p:txBody>
       </p:sp>
@@ -31155,31 +31155,31 @@
         </p:nvSpPr>
         <p:spPr>
           <a:xfrm>
-            <a:off x="822960" y="3154680"/>
-            <a:ext cx="2743200" cy="1005840"/>
-          </a:xfrm>
-          <a:prstGeom prst="rect">
-            <a:avLst/>
-          </a:prstGeom>
-          <a:noFill/>
-          <a:ln/>
-        </p:spPr>
-        <p:txBody>
-          <a:bodyPr wrap="square" lIns="0" tIns="0" rIns="0" bIns="0" rtlCol="0" anchor="t"/>
-          <a:lstStyle/>
-          <a:p>
-            <a:pPr indent="0" marL="0">
-              <a:buNone/>
-            </a:pPr>
-            <a:r>
-              <a:rPr lang="en-US" sz="1600" dirty="0">
+            <a:off x="822960" y="2697480"/>
+            <a:ext cx="2743200" cy="594360"/>
+          </a:xfrm>
+          <a:prstGeom prst="rect">
+            <a:avLst/>
+          </a:prstGeom>
+          <a:noFill/>
+          <a:ln/>
+        </p:spPr>
+        <p:txBody>
+          <a:bodyPr wrap="square" lIns="0" tIns="0" rIns="0" bIns="0" rtlCol="0" anchor="t"/>
+          <a:lstStyle/>
+          <a:p>
+            <a:pPr indent="0" marL="0">
+              <a:buNone/>
+            </a:pPr>
+            <a:r>
+              <a:rPr lang="en-US" sz="1500" dirty="0">
                 <a:solidFill>
                   <a:srgbClr val="0A0A0B"/>
                 </a:solidFill>
               </a:rPr>
-              <a:t>of adults worldwide did not get enough physical activity in 2022</a:t>
-            </a:r>
-            <a:endParaRPr lang="en-US" sz="1600" dirty="0"/>
+              <a:t>of US adults play a sport at ages 18 to 21, then at 26 to 49</a:t>
+            </a:r>
+            <a:endParaRPr lang="en-US" sz="1500" dirty="0"/>
           </a:p>
         </p:txBody>
       </p:sp>
@@ -31191,7 +31191,295 @@
         </p:nvSpPr>
         <p:spPr>
           <a:xfrm>
-            <a:off x="822960" y="4206240"/>
+            <a:off x="822960" y="3291840"/>
+            <a:ext cx="2743200" cy="411480"/>
+          </a:xfrm>
+          <a:prstGeom prst="rect">
+            <a:avLst/>
+          </a:prstGeom>
+          <a:noFill/>
+          <a:ln/>
+        </p:spPr>
+        <p:txBody>
+          <a:bodyPr wrap="square" lIns="0" tIns="0" rIns="0" bIns="0" rtlCol="0" anchor="t"/>
+          <a:lstStyle/>
+          <a:p>
+            <a:pPr indent="0" marL="0">
+              <a:buNone/>
+            </a:pPr>
+            <a:r>
+              <a:rPr lang="en-US" sz="1050" dirty="0">
+                <a:solidFill>
+                  <a:srgbClr val="55555C"/>
+                </a:solidFill>
+              </a:rPr>
+              <a:t>NPR, RWJF and Harvard Chan poll of 2,506 adults, 2015</a:t>
+            </a:r>
+            <a:endParaRPr lang="en-US" sz="1050" dirty="0"/>
+          </a:p>
+        </p:txBody>
+      </p:sp>
+      <p:sp>
+        <p:nvSpPr>
+          <p:cNvPr id="9" name="Text 6"/>
+          <p:cNvSpPr txBox="1"/>
+          <p:nvPr/>
+        </p:nvSpPr>
+        <p:spPr>
+          <a:xfrm>
+            <a:off x="822960" y="3886200"/>
+            <a:ext cx="2743200" cy="228600"/>
+          </a:xfrm>
+          <a:prstGeom prst="rect">
+            <a:avLst/>
+          </a:prstGeom>
+          <a:noFill/>
+          <a:ln/>
+        </p:spPr>
+        <p:txBody>
+          <a:bodyPr wrap="square" lIns="0" tIns="0" rIns="0" bIns="0" rtlCol="0" anchor="t"/>
+          <a:lstStyle/>
+          <a:p>
+            <a:pPr indent="0" marL="0">
+              <a:buNone/>
+            </a:pPr>
+            <a:r>
+              <a:rPr lang="en-US" sz="1000" b="1" spc="100" kern="0" dirty="0">
+                <a:solidFill>
+                  <a:srgbClr val="0A7F44"/>
+                </a:solidFill>
+              </a:rPr>
+              <a:t>WHAT STOPS ADULTS</a:t>
+            </a:r>
+            <a:endParaRPr lang="en-US" sz="1000" dirty="0"/>
+          </a:p>
+        </p:txBody>
+      </p:sp>
+      <p:sp>
+        <p:nvSpPr>
+          <p:cNvPr id="10" name="Text 7"/>
+          <p:cNvSpPr txBox="1"/>
+          <p:nvPr/>
+        </p:nvSpPr>
+        <p:spPr>
+          <a:xfrm>
+            <a:off x="822960" y="4160520"/>
+            <a:ext cx="731520" cy="365760"/>
+          </a:xfrm>
+          <a:prstGeom prst="rect">
+            <a:avLst/>
+          </a:prstGeom>
+          <a:noFill/>
+          <a:ln/>
+        </p:spPr>
+        <p:txBody>
+          <a:bodyPr wrap="square" lIns="0" tIns="0" rIns="0" bIns="0" rtlCol="0" anchor="t"/>
+          <a:lstStyle/>
+          <a:p>
+            <a:pPr indent="0" marL="0">
+              <a:buNone/>
+            </a:pPr>
+            <a:r>
+              <a:rPr lang="en-US" sz="1800" b="1" dirty="0">
+                <a:solidFill>
+                  <a:srgbClr val="0A0A0B"/>
+                </a:solidFill>
+              </a:rPr>
+              <a:t>64%</a:t>
+            </a:r>
+            <a:endParaRPr lang="en-US" sz="1800" dirty="0"/>
+          </a:p>
+        </p:txBody>
+      </p:sp>
+      <p:sp>
+        <p:nvSpPr>
+          <p:cNvPr id="11" name="Text 8"/>
+          <p:cNvSpPr txBox="1"/>
+          <p:nvPr/>
+        </p:nvSpPr>
+        <p:spPr>
+          <a:xfrm>
+            <a:off x="1554480" y="4160520"/>
+            <a:ext cx="2194560" cy="365760"/>
+          </a:xfrm>
+          <a:prstGeom prst="rect">
+            <a:avLst/>
+          </a:prstGeom>
+          <a:noFill/>
+          <a:ln/>
+        </p:spPr>
+        <p:txBody>
+          <a:bodyPr wrap="square" lIns="0" tIns="0" rIns="0" bIns="0" rtlCol="0" anchor="ctr"/>
+          <a:lstStyle/>
+          <a:p>
+            <a:pPr indent="0" marL="0">
+              <a:buNone/>
+            </a:pPr>
+            <a:r>
+              <a:rPr lang="en-US" sz="1200" dirty="0">
+                <a:solidFill>
+                  <a:srgbClr val="0A0A0B"/>
+                </a:solidFill>
+              </a:rPr>
+              <a:t>other commitments come first</a:t>
+            </a:r>
+            <a:endParaRPr lang="en-US" sz="1200" dirty="0"/>
+          </a:p>
+        </p:txBody>
+      </p:sp>
+      <p:sp>
+        <p:nvSpPr>
+          <p:cNvPr id="12" name="Text 9"/>
+          <p:cNvSpPr txBox="1"/>
+          <p:nvPr/>
+        </p:nvSpPr>
+        <p:spPr>
+          <a:xfrm>
+            <a:off x="822960" y="4572000"/>
+            <a:ext cx="731520" cy="365760"/>
+          </a:xfrm>
+          <a:prstGeom prst="rect">
+            <a:avLst/>
+          </a:prstGeom>
+          <a:noFill/>
+          <a:ln/>
+        </p:spPr>
+        <p:txBody>
+          <a:bodyPr wrap="square" lIns="0" tIns="0" rIns="0" bIns="0" rtlCol="0" anchor="t"/>
+          <a:lstStyle/>
+          <a:p>
+            <a:pPr indent="0" marL="0">
+              <a:buNone/>
+            </a:pPr>
+            <a:r>
+              <a:rPr lang="en-US" sz="1800" b="1" dirty="0">
+                <a:solidFill>
+                  <a:srgbClr val="0A0A0B"/>
+                </a:solidFill>
+              </a:rPr>
+              <a:t>21%</a:t>
+            </a:r>
+            <a:endParaRPr lang="en-US" sz="1800" dirty="0"/>
+          </a:p>
+        </p:txBody>
+      </p:sp>
+      <p:sp>
+        <p:nvSpPr>
+          <p:cNvPr id="13" name="Text 10"/>
+          <p:cNvSpPr txBox="1"/>
+          <p:nvPr/>
+        </p:nvSpPr>
+        <p:spPr>
+          <a:xfrm>
+            <a:off x="1554480" y="4572000"/>
+            <a:ext cx="2194560" cy="365760"/>
+          </a:xfrm>
+          <a:prstGeom prst="rect">
+            <a:avLst/>
+          </a:prstGeom>
+          <a:noFill/>
+          <a:ln/>
+        </p:spPr>
+        <p:txBody>
+          <a:bodyPr wrap="square" lIns="0" tIns="0" rIns="0" bIns="0" rtlCol="0" anchor="ctr"/>
+          <a:lstStyle/>
+          <a:p>
+            <a:pPr indent="0" marL="0">
+              <a:buNone/>
+            </a:pPr>
+            <a:r>
+              <a:rPr lang="en-US" sz="1200" dirty="0">
+                <a:solidFill>
+                  <a:srgbClr val="0A0A0B"/>
+                </a:solidFill>
+              </a:rPr>
+              <a:t>got out of the habit</a:t>
+            </a:r>
+            <a:endParaRPr lang="en-US" sz="1200" dirty="0"/>
+          </a:p>
+        </p:txBody>
+      </p:sp>
+      <p:sp>
+        <p:nvSpPr>
+          <p:cNvPr id="14" name="Text 11"/>
+          <p:cNvSpPr txBox="1"/>
+          <p:nvPr/>
+        </p:nvSpPr>
+        <p:spPr>
+          <a:xfrm>
+            <a:off x="822960" y="4983480"/>
+            <a:ext cx="731520" cy="365760"/>
+          </a:xfrm>
+          <a:prstGeom prst="rect">
+            <a:avLst/>
+          </a:prstGeom>
+          <a:noFill/>
+          <a:ln/>
+        </p:spPr>
+        <p:txBody>
+          <a:bodyPr wrap="square" lIns="0" tIns="0" rIns="0" bIns="0" rtlCol="0" anchor="t"/>
+          <a:lstStyle/>
+          <a:p>
+            <a:pPr indent="0" marL="0">
+              <a:buNone/>
+            </a:pPr>
+            <a:r>
+              <a:rPr lang="en-US" sz="1800" b="1" dirty="0">
+                <a:solidFill>
+                  <a:srgbClr val="0A0A0B"/>
+                </a:solidFill>
+              </a:rPr>
+              <a:t>10%</a:t>
+            </a:r>
+            <a:endParaRPr lang="en-US" sz="1800" dirty="0"/>
+          </a:p>
+        </p:txBody>
+      </p:sp>
+      <p:sp>
+        <p:nvSpPr>
+          <p:cNvPr id="15" name="Text 12"/>
+          <p:cNvSpPr txBox="1"/>
+          <p:nvPr/>
+        </p:nvSpPr>
+        <p:spPr>
+          <a:xfrm>
+            <a:off x="1554480" y="4983480"/>
+            <a:ext cx="2194560" cy="365760"/>
+          </a:xfrm>
+          <a:prstGeom prst="rect">
+            <a:avLst/>
+          </a:prstGeom>
+          <a:noFill/>
+          <a:ln/>
+        </p:spPr>
+        <p:txBody>
+          <a:bodyPr wrap="square" lIns="0" tIns="0" rIns="0" bIns="0" rtlCol="0" anchor="ctr"/>
+          <a:lstStyle/>
+          <a:p>
+            <a:pPr indent="0" marL="0">
+              <a:buNone/>
+            </a:pPr>
+            <a:r>
+              <a:rPr lang="en-US" sz="1200" dirty="0">
+                <a:solidFill>
+                  <a:srgbClr val="0A0A0B"/>
+                </a:solidFill>
+              </a:rPr>
+              <a:t>no one to do it with</a:t>
+            </a:r>
+            <a:endParaRPr lang="en-US" sz="1200" dirty="0"/>
+          </a:p>
+        </p:txBody>
+      </p:sp>
+      <p:sp>
+        <p:nvSpPr>
+          <p:cNvPr id="16" name="Text 13"/>
+          <p:cNvSpPr txBox="1"/>
+          <p:nvPr/>
+        </p:nvSpPr>
+        <p:spPr>
+          <a:xfrm>
+            <a:off x="822960" y="5440680"/>
             <a:ext cx="2743200" cy="274320"/>
           </a:xfrm>
           <a:prstGeom prst="rect">
@@ -31208,56 +31496,20 @@
               <a:buNone/>
             </a:pPr>
             <a:r>
-              <a:rPr lang="en-US" sz="1100" dirty="0">
+              <a:rPr lang="en-US" sz="1050" dirty="0">
                 <a:solidFill>
                   <a:srgbClr val="55555C"/>
                 </a:solidFill>
               </a:rPr>
-              <a:t>World Health Organization, 2024</a:t>
-            </a:r>
-            <a:endParaRPr lang="en-US" sz="1100" dirty="0"/>
-          </a:p>
-        </p:txBody>
-      </p:sp>
-      <p:sp>
-        <p:nvSpPr>
-          <p:cNvPr id="9" name="Text 6"/>
-          <p:cNvSpPr txBox="1"/>
-          <p:nvPr/>
-        </p:nvSpPr>
-        <p:spPr>
-          <a:xfrm>
-            <a:off x="822960" y="4709160"/>
-            <a:ext cx="2743200" cy="1188720"/>
-          </a:xfrm>
-          <a:prstGeom prst="rect">
-            <a:avLst/>
-          </a:prstGeom>
-          <a:noFill/>
-          <a:ln/>
-        </p:spPr>
-        <p:txBody>
-          <a:bodyPr wrap="square" lIns="0" tIns="0" rIns="0" bIns="0" rtlCol="0" anchor="t"/>
-          <a:lstStyle/>
-          <a:p>
-            <a:pPr indent="0" marL="0">
-              <a:buNone/>
-            </a:pPr>
-            <a:r>
-              <a:rPr lang="en-US" sz="1300" dirty="0">
-                <a:solidFill>
-                  <a:srgbClr val="55555C"/>
-                </a:solidFill>
-              </a:rPr>
-              <a:t>For anyone who plays a ball sport for fun: badminton, tennis, pickleball, table tennis, basketball, volleyball, soccer.</a:t>
-            </a:r>
-            <a:endParaRPr lang="en-US" sz="1300" dirty="0"/>
-          </a:p>
-        </p:txBody>
-      </p:sp>
-      <p:sp>
-        <p:nvSpPr>
-          <p:cNvPr id="10" name="Text 7"/>
+              <a:t>Active NZ survey, Sport New Zealand, 2023</a:t>
+            </a:r>
+            <a:endParaRPr lang="en-US" sz="1050" dirty="0"/>
+          </a:p>
+        </p:txBody>
+      </p:sp>
+      <p:sp>
+        <p:nvSpPr>
+          <p:cNvPr id="17" name="Text 14"/>
           <p:cNvSpPr txBox="1"/>
           <p:nvPr/>
         </p:nvSpPr>
@@ -31293,7 +31545,7 @@
       </p:sp>
       <p:sp>
         <p:nvSpPr>
-          <p:cNvPr id="11" name="Text 8"/>
+          <p:cNvPr id="18" name="Text 15"/>
           <p:cNvSpPr txBox="1"/>
           <p:nvPr/>
         </p:nvSpPr>
@@ -31329,7 +31581,7 @@
       </p:sp>
       <p:sp>
         <p:nvSpPr>
-          <p:cNvPr id="12" name="Shape 9"/>
+          <p:cNvPr id="19" name="Shape 16"/>
           <p:cNvSpPr/>
           <p:nvPr/>
         </p:nvSpPr>
@@ -31356,7 +31608,7 @@
       </p:sp>
       <p:sp>
         <p:nvSpPr>
-          <p:cNvPr id="13" name="Text 10"/>
+          <p:cNvPr id="20" name="Text 17"/>
           <p:cNvSpPr txBox="1"/>
           <p:nvPr/>
         </p:nvSpPr>
@@ -31392,7 +31644,7 @@
       </p:sp>
       <p:sp>
         <p:nvSpPr>
-          <p:cNvPr id="14" name="Text 11"/>
+          <p:cNvPr id="21" name="Text 18"/>
           <p:cNvSpPr txBox="1"/>
           <p:nvPr/>
         </p:nvSpPr>
@@ -31420,7 +31672,7 @@
                   <a:srgbClr val="55555C"/>
                 </a:solidFill>
               </a:rPr>
-              <a:t>A time that suits four people, a free court, somewhere everyone can reach. The group chat goes quiet.</a:t>
+              <a:t>"Who's free this week?" "Is the court taken?" "We're one short." The group chat wears the fun out.</a:t>
             </a:r>
             <a:endParaRPr lang="en-US" sz="1200" dirty="0"/>
           </a:p>
@@ -31428,7 +31680,7 @@
       </p:sp>
       <p:sp>
         <p:nvSpPr>
-          <p:cNvPr id="15" name="Shape 12"/>
+          <p:cNvPr id="22" name="Shape 19"/>
           <p:cNvSpPr/>
           <p:nvPr/>
         </p:nvSpPr>
@@ -31452,7 +31704,7 @@
       </p:sp>
       <p:sp>
         <p:nvSpPr>
-          <p:cNvPr id="16" name="Shape 13"/>
+          <p:cNvPr id="23" name="Shape 20"/>
           <p:cNvSpPr/>
           <p:nvPr/>
         </p:nvSpPr>
@@ -31479,7 +31731,7 @@
       </p:sp>
       <p:sp>
         <p:nvSpPr>
-          <p:cNvPr id="17" name="Text 14"/>
+          <p:cNvPr id="24" name="Text 21"/>
           <p:cNvSpPr txBox="1"/>
           <p:nvPr/>
         </p:nvSpPr>
@@ -31507,7 +31759,7 @@
                   <a:srgbClr val="0A0A0B"/>
                 </a:solidFill>
               </a:rPr>
-              <a:t>Your agent lines up the week and agrees every game with the other players' agents. You approve once.</a:t>
+              <a:t>Your agent agrees the time and the court with the other players' agents. You approve once; your phone says "Game on: Thu 19:00, 4 in."</a:t>
             </a:r>
             <a:endParaRPr lang="en-US" sz="1300" dirty="0"/>
           </a:p>
@@ -31515,7 +31767,7 @@
       </p:sp>
       <p:sp>
         <p:nvSpPr>
-          <p:cNvPr id="18" name="Shape 15"/>
+          <p:cNvPr id="25" name="Shape 22"/>
           <p:cNvSpPr/>
           <p:nvPr/>
         </p:nvSpPr>
@@ -31542,7 +31794,7 @@
       </p:sp>
       <p:sp>
         <p:nvSpPr>
-          <p:cNvPr id="19" name="Text 16"/>
+          <p:cNvPr id="26" name="Text 23"/>
           <p:cNvSpPr txBox="1"/>
           <p:nvPr/>
         </p:nvSpPr>
@@ -31578,7 +31830,7 @@
       </p:sp>
       <p:sp>
         <p:nvSpPr>
-          <p:cNvPr id="20" name="Text 17"/>
+          <p:cNvPr id="27" name="Text 24"/>
           <p:cNvSpPr txBox="1"/>
           <p:nvPr/>
         </p:nvSpPr>
@@ -31614,7 +31866,7 @@
       </p:sp>
       <p:sp>
         <p:nvSpPr>
-          <p:cNvPr id="21" name="Shape 18"/>
+          <p:cNvPr id="28" name="Shape 25"/>
           <p:cNvSpPr/>
           <p:nvPr/>
         </p:nvSpPr>
@@ -31638,7 +31890,7 @@
       </p:sp>
       <p:sp>
         <p:nvSpPr>
-          <p:cNvPr id="22" name="Shape 19"/>
+          <p:cNvPr id="29" name="Shape 26"/>
           <p:cNvSpPr/>
           <p:nvPr/>
         </p:nvSpPr>
@@ -31665,7 +31917,7 @@
       </p:sp>
       <p:sp>
         <p:nvSpPr>
-          <p:cNvPr id="23" name="Text 20"/>
+          <p:cNvPr id="30" name="Text 27"/>
           <p:cNvSpPr txBox="1"/>
           <p:nvPr/>
         </p:nvSpPr>
@@ -31701,7 +31953,7 @@
       </p:sp>
       <p:sp>
         <p:nvSpPr>
-          <p:cNvPr id="24" name="Shape 21"/>
+          <p:cNvPr id="31" name="Shape 28"/>
           <p:cNvSpPr/>
           <p:nvPr/>
         </p:nvSpPr>
@@ -31728,7 +31980,7 @@
       </p:sp>
       <p:sp>
         <p:nvSpPr>
-          <p:cNvPr id="25" name="Text 22"/>
+          <p:cNvPr id="32" name="Text 29"/>
           <p:cNvSpPr txBox="1"/>
           <p:nvPr/>
         </p:nvSpPr>
@@ -31764,7 +32016,7 @@
       </p:sp>
       <p:sp>
         <p:nvSpPr>
-          <p:cNvPr id="26" name="Text 23"/>
+          <p:cNvPr id="33" name="Text 30"/>
           <p:cNvSpPr txBox="1"/>
           <p:nvPr/>
         </p:nvSpPr>
@@ -31800,7 +32052,7 @@
       </p:sp>
       <p:sp>
         <p:nvSpPr>
-          <p:cNvPr id="27" name="Shape 24"/>
+          <p:cNvPr id="34" name="Shape 31"/>
           <p:cNvSpPr/>
           <p:nvPr/>
         </p:nvSpPr>
@@ -31824,7 +32076,7 @@
       </p:sp>
       <p:sp>
         <p:nvSpPr>
-          <p:cNvPr id="28" name="Shape 25"/>
+          <p:cNvPr id="35" name="Shape 32"/>
           <p:cNvSpPr/>
           <p:nvPr/>
         </p:nvSpPr>
@@ -31851,7 +32103,7 @@
       </p:sp>
       <p:sp>
         <p:nvSpPr>
-          <p:cNvPr id="29" name="Text 26"/>
+          <p:cNvPr id="36" name="Text 33"/>
           <p:cNvSpPr txBox="1"/>
           <p:nvPr/>
         </p:nvSpPr>
@@ -31882,6 +32134,42 @@
               <a:t>It plans doubles or one game fewer, checks in two days later, and checks the map, reviews and forecast.</a:t>
             </a:r>
             <a:endParaRPr lang="en-US" sz="1300" dirty="0"/>
+          </a:p>
+        </p:txBody>
+      </p:sp>
+      <p:sp>
+        <p:nvSpPr>
+          <p:cNvPr id="37" name="Text 34"/>
+          <p:cNvSpPr txBox="1"/>
+          <p:nvPr/>
+        </p:nvSpPr>
+        <p:spPr>
+          <a:xfrm>
+            <a:off x="4206240" y="6199632"/>
+            <a:ext cx="7406640" cy="274320"/>
+          </a:xfrm>
+          <a:prstGeom prst="rect">
+            <a:avLst/>
+          </a:prstGeom>
+          <a:noFill/>
+          <a:ln/>
+        </p:spPr>
+        <p:txBody>
+          <a:bodyPr wrap="square" lIns="0" tIns="0" rIns="0" bIns="0" rtlCol="0" anchor="t"/>
+          <a:lstStyle/>
+          <a:p>
+            <a:pPr indent="0" marL="0">
+              <a:buNone/>
+            </a:pPr>
+            <a:r>
+              <a:rPr lang="en-US" sz="1100" i="1" dirty="0">
+                <a:solidFill>
+                  <a:srgbClr val="55555C"/>
+                </a:solidFill>
+              </a:rPr>
+              <a:t>Less screen time, more court time: any ball sport that needs people, a time and a place.</a:t>
+            </a:r>
+            <a:endParaRPr lang="en-US" sz="1100" dirty="0"/>
           </a:p>
         </p:txBody>
       </p:sp>
@@ -32631,7 +32919,7 @@
                   <a:srgbClr val="55555C"/>
                 </a:solidFill>
               </a:rPr>
-              <a:t>joins</a:t>
+              <a:t>joins, 2 and 6 min after posting</a:t>
             </a:r>
             <a:endParaRPr lang="en-US" sz="1050" dirty="0"/>
           </a:p>
@@ -33030,9 +33318,45 @@
                   <a:srgbClr val="55555C"/>
                 </a:solidFill>
               </a:rPr>
-              <a:t>"Saturday morning doubles, need 3": it drafts the invite with the nearest court, you tap Post, it shows who joins.</a:t>
+              <a:t>"Saturday morning doubles, need 3": it drafts the invite with the nearest court and you tap Post. Share it as a link: anyone opens it and joins, no account needed first.</a:t>
             </a:r>
             <a:endParaRPr lang="en-US" sz="1100" dirty="0"/>
+          </a:p>
+        </p:txBody>
+      </p:sp>
+      <p:sp>
+        <p:nvSpPr>
+          <p:cNvPr id="36" name="Text 31"/>
+          <p:cNvSpPr txBox="1"/>
+          <p:nvPr/>
+        </p:nvSpPr>
+        <p:spPr>
+          <a:xfrm>
+            <a:off x="5669280" y="6053328"/>
+            <a:ext cx="6035040" cy="365760"/>
+          </a:xfrm>
+          <a:prstGeom prst="rect">
+            <a:avLst/>
+          </a:prstGeom>
+          <a:noFill/>
+          <a:ln/>
+        </p:spPr>
+        <p:txBody>
+          <a:bodyPr wrap="square" lIns="0" tIns="0" rIns="0" bIns="0" rtlCol="0" anchor="t"/>
+          <a:lstStyle/>
+          <a:p>
+            <a:pPr indent="0" marL="0">
+              <a:buNone/>
+            </a:pPr>
+            <a:r>
+              <a:rPr lang="en-US" sz="1000" i="1" dirty="0">
+                <a:solidFill>
+                  <a:srgbClr val="55555C"/>
+                </a:solidFill>
+              </a:rPr>
+              <a:t>Live for the last days of a nine-day hackathon: a week-long trial with 10–20 players is next (games booked, time to agree, invitees who join).</a:t>
+            </a:r>
+            <a:endParaRPr lang="en-US" sz="1000" dirty="0"/>
           </a:p>
         </p:txBody>
       </p:sp>

--- a/video/deck/Serve_Meta_deck.pptx
+++ b/video/deck/Serve_Meta_deck.pptx
@@ -134,13 +134,13 @@
   <p:extLst>
     <p:ext uri="{521415D9-36F7-43E2-AB2F-B90AF26B5E84}">
       <p14:sectionLst xmlns:p14="http://schemas.microsoft.com/office/powerpoint/2010/main">
-        <p14:section name="Opening" id="{63087e2a-9af5-853d-acb2-a65a3be3a3dd}">
+        <p14:section name="Opening" id="{9938cde6-4403-4080-086e-d175c0ac275e}">
           <p14:sldIdLst>
             <p14:sldId id="256"/>
             <p14:sldId id="257"/>
           </p14:sldIdLst>
         </p14:section>
-        <p14:section name="Impact" id="{fd3b1bdc-393f-2bed-b13f-0e4758b27450}">
+        <p14:section name="Impact" id="{2d0dac08-4c0a-5651-a867-93fb77db5573}">
           <p14:sldIdLst>
             <p14:sldId id="258"/>
             <p14:sldId id="259"/>
@@ -148,7 +148,7 @@
             <p14:sldId id="261"/>
           </p14:sldIdLst>
         </p14:section>
-        <p14:section name="Demo" id="{e62c72f2-325a-8fad-c393-bddbf4621fca}">
+        <p14:section name="Demo" id="{523d7f62-9443-b1b0-5421-cf0d028fa468}">
           <p14:sldIdLst>
             <p14:sldId id="262"/>
             <p14:sldId id="263"/>
@@ -158,7 +158,7 @@
             <p14:sldId id="267"/>
           </p14:sldIdLst>
         </p14:section>
-        <p14:section name="Use of Meta AI" id="{17f04de9-6cc3-54ac-bba1-a20180b5a06c}">
+        <p14:section name="Use of Meta AI" id="{179caa06-9a2a-c1b4-91f4-96e60d7d99c6}">
           <p14:sldIdLst>
             <p14:sldId id="268"/>
             <p14:sldId id="269"/>
@@ -166,7 +166,7 @@
             <p14:sldId id="271"/>
           </p14:sldIdLst>
         </p14:section>
-        <p14:section name="Technical depth" id="{d0e2f474-157f-ba99-cdc1-0c47034dd710}">
+        <p14:section name="Technical depth" id="{434816aa-397e-af0b-0299-f29875363f8c}">
           <p14:sldIdLst>
             <p14:sldId id="272"/>
             <p14:sldId id="273"/>
@@ -180,12 +180,12 @@
             <p14:sldId id="281"/>
           </p14:sldIdLst>
         </p14:section>
-        <p14:section name="Architecture" id="{d99ccfbb-7ffb-2ed5-ad8a-22d4f9970a74}">
+        <p14:section name="Architecture" id="{d5718a86-6e01-6207-f382-c71a9eaa375c}">
           <p14:sldIdLst>
             <p14:sldId id="282"/>
           </p14:sldIdLst>
         </p14:section>
-        <p14:section name="Close" id="{2bc2fbf4-59d4-ba60-4489-1bee2d6afe20}">
+        <p14:section name="Close" id="{4fd92530-9251-f352-f228-cf91ba46c8e8}">
           <p14:sldIdLst>
             <p14:sldId id="283"/>
           </p14:sldIdLst>
@@ -27192,7 +27192,7 @@
                           <a:ea typeface="Segoe UI" pitchFamily="34" charset="-122"/>
                           <a:cs typeface="Segoe UI" pitchFamily="34" charset="-120"/>
                         </a:rPr>
-                        <a:t>npm test, 24 offline suites</a:t>
+                        <a:t>npm test, 25 offline suites</a:t>
                       </a:r>
                       <a:endParaRPr lang="en-US" sz="1200" dirty="0">
                         <a:latin typeface="Segoe UI" charset="0"/>
@@ -27257,7 +27257,7 @@
                           <a:ea typeface="Segoe UI" pitchFamily="34" charset="-122"/>
                           <a:cs typeface="Segoe UI" pitchFamily="34" charset="-120"/>
                         </a:rPr>
-                        <a:t>269 of 270 (1 skipped: an optional tool)</a:t>
+                        <a:t>275 tests, 270 pass (3 optional, 2 Linux-only)</a:t>
                       </a:r>
                       <a:endParaRPr lang="en-US" sz="1200" dirty="0">
                         <a:latin typeface="Segoe UI" charset="0"/>

--- a/video/deck/Serve_Meta_deck.pptx
+++ b/video/deck/Serve_Meta_deck.pptx
@@ -134,13 +134,13 @@
   <p:extLst>
     <p:ext uri="{521415D9-36F7-43E2-AB2F-B90AF26B5E84}">
       <p14:sectionLst xmlns:p14="http://schemas.microsoft.com/office/powerpoint/2010/main">
-        <p14:section name="Opening" id="{9938cde6-4403-4080-086e-d175c0ac275e}">
+        <p14:section name="Opening" id="{581c9ba4-c7bf-0675-db1d-d4d7661533be}">
           <p14:sldIdLst>
             <p14:sldId id="256"/>
             <p14:sldId id="257"/>
           </p14:sldIdLst>
         </p14:section>
-        <p14:section name="Impact" id="{2d0dac08-4c0a-5651-a867-93fb77db5573}">
+        <p14:section name="Impact" id="{e418aef2-ea0d-dd26-048f-ed0a58186726}">
           <p14:sldIdLst>
             <p14:sldId id="258"/>
             <p14:sldId id="259"/>
@@ -148,7 +148,7 @@
             <p14:sldId id="261"/>
           </p14:sldIdLst>
         </p14:section>
-        <p14:section name="Demo" id="{523d7f62-9443-b1b0-5421-cf0d028fa468}">
+        <p14:section name="Demo" id="{79bc13b0-addf-3313-5dc8-0eb70c9eebaa}">
           <p14:sldIdLst>
             <p14:sldId id="262"/>
             <p14:sldId id="263"/>
@@ -158,7 +158,7 @@
             <p14:sldId id="267"/>
           </p14:sldIdLst>
         </p14:section>
-        <p14:section name="Use of Meta AI" id="{179caa06-9a2a-c1b4-91f4-96e60d7d99c6}">
+        <p14:section name="Use of Meta AI" id="{bf084ae3-e8b6-1f77-d21d-cbaba7726096}">
           <p14:sldIdLst>
             <p14:sldId id="268"/>
             <p14:sldId id="269"/>
@@ -166,7 +166,7 @@
             <p14:sldId id="271"/>
           </p14:sldIdLst>
         </p14:section>
-        <p14:section name="Technical depth" id="{434816aa-397e-af0b-0299-f29875363f8c}">
+        <p14:section name="Technical depth" id="{998d6693-60ab-b385-4ba8-9c5f4695aaad}">
           <p14:sldIdLst>
             <p14:sldId id="272"/>
             <p14:sldId id="273"/>
@@ -180,12 +180,12 @@
             <p14:sldId id="281"/>
           </p14:sldIdLst>
         </p14:section>
-        <p14:section name="Architecture" id="{d5718a86-6e01-6207-f382-c71a9eaa375c}">
+        <p14:section name="Architecture" id="{dad1501c-4814-91dc-cf52-f8f54be29d7c}">
           <p14:sldIdLst>
             <p14:sldId id="282"/>
           </p14:sldIdLst>
         </p14:section>
-        <p14:section name="Close" id="{4fd92530-9251-f352-f228-cf91ba46c8e8}">
+        <p14:section name="Close" id="{44adc64b-3812-f193-fda4-85dbd413ad3e}">
           <p14:sldIdLst>
             <p14:sldId id="283"/>
           </p14:sldIdLst>
@@ -2161,7 +2161,7 @@
           <a:p>
             <a:r>
               <a:rPr lang="en-US" dirty="0"/>
-              <a:t>Highlight 管線（右邊都是同一記殺球：SAM 2.1 去背、MapAnything 深度、俯視環繞圖和沿弧線算繪出的三格）：DETR 找人 → Sapiens2 讀姿勢、找最快的揮拍 → SAM 2.1 把你切出來 → MapAnything 算深度和相機，時間暫停、鏡頭繞 20° → Muse Glimmer 寫說明，程式核對 → 一鍵分享到 Instagram。影片不離開伺服器。
+              <a:t>Highlight 管線（右邊都是同一記殺球：SAM 2.1 去背、MapAnything 深度、俯視環繞圖和沿弧線算繪出的三格）：DETR 找人 → Sapiens2 找出值得分享的片刻（自動剪輯，不做動作分析）→ SAM 2.1 把你切出來 → MapAnything 算深度和相機，時間暫停、鏡頭繞 20° → Muse Glimmer 寫說明，程式核對 → 一鍵分享到 Instagram。影片不離開伺服器。
 旁白：Thursday, game done. I upload a phone clip… With MapAnything, time stops and the camera turns around the smash.</a:t>
             </a:r>
             <a:endParaRPr lang="en-US" dirty="0"/>
@@ -5056,69 +5056,9 @@
           <a:chExt cx="0" cy="0"/>
         </a:xfrm>
       </p:grpSpPr>
-      <p:pic>
-        <p:nvPicPr>
-          <p:cNvPr id="2" name="Image 0" descr="preencoded.png">    </p:cNvPr>
-          <p:cNvPicPr>
-            <a:picLocks noChangeAspect="1"/>
-          </p:cNvPicPr>
-          <p:nvPr/>
-        </p:nvPicPr>
-        <p:blipFill>
-          <a:blip r:embed="rId1"/>
-          <a:stretch>
-            <a:fillRect/>
-          </a:stretch>
-        </p:blipFill>
-        <p:spPr>
-          <a:xfrm>
-            <a:off x="731520" y="640080"/>
-            <a:ext cx="548640" cy="548640"/>
-          </a:xfrm>
-          <a:prstGeom prst="rect">
-            <a:avLst/>
-          </a:prstGeom>
-        </p:spPr>
-      </p:pic>
-      <p:sp>
-        <p:nvSpPr>
-          <p:cNvPr id="3" name="Text 0"/>
-          <p:cNvSpPr txBox="1"/>
-          <p:nvPr/>
-        </p:nvSpPr>
-        <p:spPr>
-          <a:xfrm>
-            <a:off x="1371600" y="713232"/>
-            <a:ext cx="1828800" cy="411480"/>
-          </a:xfrm>
-          <a:prstGeom prst="rect">
-            <a:avLst/>
-          </a:prstGeom>
-          <a:noFill/>
-          <a:ln/>
-        </p:spPr>
-        <p:txBody>
-          <a:bodyPr wrap="square" lIns="0" tIns="0" rIns="0" bIns="0" rtlCol="0" anchor="ctr"/>
-          <a:lstStyle/>
-          <a:p>
-            <a:pPr indent="0" marL="0">
-              <a:buNone/>
-            </a:pPr>
-            <a:r>
-              <a:rPr lang="en-US" sz="2200" b="1" dirty="0">
-                <a:solidFill>
-                  <a:srgbClr val="0A0A0B"/>
-                </a:solidFill>
-              </a:rPr>
-              <a:t>Meta</a:t>
-            </a:r>
-            <a:endParaRPr lang="en-US" sz="2200" dirty="0"/>
-          </a:p>
-        </p:txBody>
-      </p:sp>
-      <p:sp>
-        <p:nvSpPr>
-          <p:cNvPr id="4" name="Text 1"/>
+      <p:sp>
+        <p:nvSpPr>
+          <p:cNvPr id="2" name="Text 0"/>
           <p:cNvSpPr txBox="1"/>
           <p:nvPr/>
         </p:nvSpPr>
@@ -5154,7 +5094,7 @@
       </p:sp>
       <p:sp>
         <p:nvSpPr>
-          <p:cNvPr id="5" name="Text 2"/>
+          <p:cNvPr id="3" name="Text 1"/>
           <p:cNvSpPr txBox="1"/>
           <p:nvPr/>
         </p:nvSpPr>
@@ -5210,7 +5150,7 @@
       </p:sp>
       <p:sp>
         <p:nvSpPr>
-          <p:cNvPr id="6" name="Shape 3"/>
+          <p:cNvPr id="4" name="Shape 2"/>
           <p:cNvSpPr/>
           <p:nvPr/>
         </p:nvSpPr>
@@ -5237,7 +5177,7 @@
       </p:sp>
       <p:sp>
         <p:nvSpPr>
-          <p:cNvPr id="7" name="Text 4"/>
+          <p:cNvPr id="5" name="Text 3"/>
           <p:cNvSpPr txBox="1"/>
           <p:nvPr/>
         </p:nvSpPr>
@@ -5273,7 +5213,7 @@
       </p:sp>
       <p:sp>
         <p:nvSpPr>
-          <p:cNvPr id="8" name="Shape 5"/>
+          <p:cNvPr id="6" name="Shape 4"/>
           <p:cNvSpPr/>
           <p:nvPr/>
         </p:nvSpPr>
@@ -5300,7 +5240,7 @@
       </p:sp>
       <p:sp>
         <p:nvSpPr>
-          <p:cNvPr id="9" name="Text 6"/>
+          <p:cNvPr id="7" name="Text 5"/>
           <p:cNvSpPr txBox="1"/>
           <p:nvPr/>
         </p:nvSpPr>
@@ -5336,7 +5276,7 @@
       </p:sp>
       <p:sp>
         <p:nvSpPr>
-          <p:cNvPr id="10" name="Shape 7"/>
+          <p:cNvPr id="8" name="Shape 6"/>
           <p:cNvSpPr/>
           <p:nvPr/>
         </p:nvSpPr>
@@ -5363,7 +5303,7 @@
       </p:sp>
       <p:sp>
         <p:nvSpPr>
-          <p:cNvPr id="11" name="Text 8"/>
+          <p:cNvPr id="9" name="Text 7"/>
           <p:cNvSpPr txBox="1"/>
           <p:nvPr/>
         </p:nvSpPr>
@@ -5399,14 +5339,14 @@
       </p:sp>
       <p:pic>
         <p:nvPicPr>
-          <p:cNvPr id="12" name="Image 1" descr="preencoded.png">    </p:cNvPr>
+          <p:cNvPr id="10" name="Image 0" descr="preencoded.png">    </p:cNvPr>
           <p:cNvPicPr>
             <a:picLocks noChangeAspect="1"/>
           </p:cNvPicPr>
           <p:nvPr/>
         </p:nvPicPr>
         <p:blipFill>
-          <a:blip r:embed="rId2"/>
+          <a:blip r:embed="rId1"/>
           <a:stretch>
             <a:fillRect/>
           </a:stretch>
@@ -5423,7 +5363,7 @@
       </p:pic>
       <p:sp>
         <p:nvSpPr>
-          <p:cNvPr id="13" name="Text 9"/>
+          <p:cNvPr id="11" name="Text 8"/>
           <p:cNvSpPr txBox="1"/>
           <p:nvPr/>
         </p:nvSpPr>
@@ -6314,7 +6254,7 @@
                   <a:srgbClr val="0A7F44"/>
                 </a:solidFill>
               </a:rPr>
-              <a:t>THURSDAY · A CLIP TO SHARE · FIVE META VISION MODELS</a:t>
+              <a:t>THURSDAY · AUTO-EDITED · FIVE META VISION MODELS</a:t>
             </a:r>
             <a:endParaRPr lang="en-US" sz="1300" dirty="0"/>
           </a:p>
@@ -6352,7 +6292,7 @@
                   <a:srgbClr val="0A0A0B"/>
                 </a:solidFill>
               </a:rPr>
-              <a:t>Your phone video becomes a clip for your friends</a:t>
+              <a:t>Your phone video, cut automatically into a clip to share</a:t>
             </a:r>
             <a:endParaRPr lang="en-US" sz="3200" dirty="0"/>
           </a:p>
@@ -11891,40 +11831,16 @@
           </a:p>
         </p:txBody>
       </p:sp>
-      <p:pic>
-        <p:nvPicPr>
-          <p:cNvPr id="86" name="Image 1" descr="preencoded.png">    </p:cNvPr>
-          <p:cNvPicPr>
-            <a:picLocks noChangeAspect="1"/>
-          </p:cNvPicPr>
-          <p:nvPr/>
-        </p:nvPicPr>
-        <p:blipFill>
-          <a:blip r:embed="rId2"/>
-          <a:stretch>
-            <a:fillRect/>
-          </a:stretch>
-        </p:blipFill>
+      <p:sp>
+        <p:nvSpPr>
+          <p:cNvPr id="86" name="Text 82"/>
+          <p:cNvSpPr txBox="1"/>
+          <p:nvPr/>
+        </p:nvSpPr>
         <p:spPr>
           <a:xfrm>
             <a:off x="548640" y="6089904"/>
-            <a:ext cx="274320" cy="274320"/>
-          </a:xfrm>
-          <a:prstGeom prst="rect">
-            <a:avLst/>
-          </a:prstGeom>
-        </p:spPr>
-      </p:pic>
-      <p:sp>
-        <p:nvSpPr>
-          <p:cNvPr id="87" name="Text 82"/>
-          <p:cNvSpPr txBox="1"/>
-          <p:nvPr/>
-        </p:nvSpPr>
-        <p:spPr>
-          <a:xfrm>
-            <a:off x="914400" y="6089904"/>
-            <a:ext cx="10515600" cy="274320"/>
+            <a:ext cx="10972800" cy="274320"/>
           </a:xfrm>
           <a:prstGeom prst="rect">
             <a:avLst/>
@@ -17094,7 +17010,7 @@
                   <a:srgbClr val="0A0A0B"/>
                 </a:solidFill>
               </a:rPr>
-              <a:t>Muse Glimmer calls logged</a:t>
+              <a:t>Muse Glimmer calls in the evaluations' ledgers</a:t>
             </a:r>
             <a:endParaRPr lang="en-US" sz="1100" dirty="0"/>
           </a:p>
@@ -17525,7 +17441,7 @@
                   <a:srgbClr val="55555C"/>
                 </a:solidFill>
               </a:rPr>
-              <a:t>4,868 choices Muse Glimmer made through the real agent call, on a cloud A100</a:t>
+              <a:t>4,868 choices Muse Glimmer made through the real agent call, a separate run on a cloud A100</a:t>
             </a:r>
             <a:endParaRPr lang="en-US" sz="1000" dirty="0"/>
           </a:p>
@@ -18717,7 +18633,7 @@
                   <a:srgbClr val="55555C"/>
                 </a:solidFill>
               </a:rPr>
-              <a:t>a Muse Glimmer call saved</a:t>
+              <a:t>about 0.9 s on the CPU, a Glimmer call saved</a:t>
             </a:r>
             <a:endParaRPr lang="en-US" sz="1050" dirty="0"/>
           </a:p>
@@ -18876,7 +18792,7 @@
                   <a:srgbClr val="55555C"/>
                 </a:solidFill>
               </a:rPr>
-              <a:t>the full answer, about 450 tokens, 24 to 40 s</a:t>
+              <a:t>the full answer: about 600 tokens, 40 s at p50</a:t>
             </a:r>
             <a:endParaRPr lang="en-US" sz="1050" dirty="0"/>
           </a:p>
@@ -27257,7 +27173,7 @@
                           <a:ea typeface="Segoe UI" pitchFamily="34" charset="-122"/>
                           <a:cs typeface="Segoe UI" pitchFamily="34" charset="-120"/>
                         </a:rPr>
-                        <a:t>275 tests, 270 pass (3 optional, 2 Linux-only)</a:t>
+                        <a:t>275 = 270 pass + 3 optional + 2 Linux-only</a:t>
                       </a:r>
                       <a:endParaRPr lang="en-US" sz="1200" dirty="0">
                         <a:latin typeface="Segoe UI" charset="0"/>
@@ -30166,7 +30082,7 @@
                   <a:srgbClr val="0A0A0B"/>
                 </a:solidFill>
               </a:rPr>
-              <a:t>Highlights</a:t>
+              <a:t>Auto highlights</a:t>
             </a:r>
             <a:endParaRPr lang="en-US" sz="1100" dirty="0"/>
           </a:p>
@@ -30202,7 +30118,7 @@
                   <a:srgbClr val="55555C"/>
                 </a:solidFill>
               </a:rPr>
-              <a:t>find you, the moment to share, cut you out · orbit effect · caption</a:t>
+              <a:t>cut automatically: find you, the moment to share · orbit effect · caption</a:t>
             </a:r>
             <a:endParaRPr lang="en-US" sz="900" dirty="0"/>
           </a:p>
@@ -31738,7 +31654,7 @@
                   <a:srgbClr val="0A0A0B"/>
                 </a:solidFill>
               </a:rPr>
-              <a:t>Highlights to Instagram and Facebook</a:t>
+              <a:t>Auto-cut highlights to Instagram</a:t>
             </a:r>
             <a:endParaRPr lang="en-US" sz="1300" dirty="0"/>
           </a:p>
@@ -31774,7 +31690,7 @@
                   <a:srgbClr val="0A0A0B"/>
                 </a:solidFill>
               </a:rPr>
-              <a:t>Built during the Meta Global AI Developer Hackathon, Oct 27 – Nov 4, 2026 (921 commits); third-party models and tools in the report, 7.1</a:t>
+              <a:t>Built during the hackathon, Oct 27 – Nov 4, 2026 · demo video 2:42 · third-party models and tools: report 7.1</a:t>
             </a:r>
             <a:endParaRPr lang="en-US" sz="1300" dirty="0"/>
           </a:p>
@@ -31816,40 +31732,16 @@
           </a:p>
         </p:txBody>
       </p:sp>
-      <p:pic>
-        <p:nvPicPr>
-          <p:cNvPr id="14" name="Image 1" descr="preencoded.png">    </p:cNvPr>
-          <p:cNvPicPr>
-            <a:picLocks noChangeAspect="1"/>
-          </p:cNvPicPr>
-          <p:nvPr/>
-        </p:nvPicPr>
-        <p:blipFill>
-          <a:blip r:embed="rId2"/>
-          <a:stretch>
-            <a:fillRect/>
-          </a:stretch>
-        </p:blipFill>
-        <p:spPr>
-          <a:xfrm>
-            <a:off x="2103120" y="6035040"/>
-            <a:ext cx="329184" cy="329184"/>
-          </a:xfrm>
-          <a:prstGeom prst="rect">
-            <a:avLst/>
-          </a:prstGeom>
-        </p:spPr>
-      </p:pic>
-      <p:sp>
-        <p:nvSpPr>
-          <p:cNvPr id="15" name="Text 11"/>
-          <p:cNvSpPr txBox="1"/>
-          <p:nvPr/>
-        </p:nvSpPr>
-        <p:spPr>
-          <a:xfrm>
-            <a:off x="2523744" y="6035040"/>
-            <a:ext cx="8229600" cy="329184"/>
+      <p:sp>
+        <p:nvSpPr>
+          <p:cNvPr id="14" name="Text 11"/>
+          <p:cNvSpPr txBox="1"/>
+          <p:nvPr/>
+        </p:nvSpPr>
+        <p:spPr>
+          <a:xfrm>
+            <a:off x="914400" y="6035040"/>
+            <a:ext cx="10362895" cy="329184"/>
           </a:xfrm>
           <a:prstGeom prst="rect">
             <a:avLst/>
@@ -31861,7 +31753,7 @@
           <a:bodyPr wrap="square" lIns="0" tIns="0" rIns="0" bIns="0" rtlCol="0" anchor="ctr"/>
           <a:lstStyle/>
           <a:p>
-            <a:pPr indent="0" marL="0">
+            <a:pPr algn="ctr" indent="0" marL="0">
               <a:buNone/>
             </a:pPr>
             <a:r>
@@ -31870,7 +31762,7 @@
                   <a:srgbClr val="55555C"/>
                 </a:solidFill>
               </a:rPr>
-              <a:t>The product runs Muse Glimmer on an RTX 3090 I own; cloud A100s ran evaluations only</a:t>
+              <a:t>The product runs Muse Glimmer on an RTX 3090 I own; cloud A100s ran evaluations only, with the same model</a:t>
             </a:r>
             <a:endParaRPr lang="en-US" sz="1300" dirty="0"/>
           </a:p>
@@ -33479,7 +33371,7 @@
                   <a:srgbClr val="0A7F44"/>
                 </a:solidFill>
               </a:rPr>
-              <a:t>3</a:t>
+              <a:t>8</a:t>
             </a:r>
             <a:endParaRPr lang="en-US" sz="2600" dirty="0"/>
           </a:p>
@@ -33515,7 +33407,7 @@
                   <a:srgbClr val="55555C"/>
                 </a:solidFill>
               </a:rPr>
-              <a:t>players</a:t>
+              <a:t>players, 14 accounts</a:t>
             </a:r>
             <a:endParaRPr lang="en-US" sz="1050" dirty="0"/>
           </a:p>
@@ -33578,7 +33470,7 @@
                   <a:srgbClr val="0A0A0B"/>
                 </a:solidFill>
               </a:rPr>
-              <a:t>1</a:t>
+              <a:t>2</a:t>
             </a:r>
             <a:endParaRPr lang="en-US" sz="2600" dirty="0"/>
           </a:p>
@@ -33614,7 +33506,7 @@
                   <a:srgbClr val="55555C"/>
                 </a:solidFill>
               </a:rPr>
-              <a:t>club they started</a:t>
+              <a:t>clubs they started</a:t>
             </a:r>
             <a:endParaRPr lang="en-US" sz="1050" dirty="0"/>
           </a:p>
@@ -33677,7 +33569,7 @@
                   <a:srgbClr val="0A0A0B"/>
                 </a:solidFill>
               </a:rPr>
-              <a:t>3</a:t>
+              <a:t>4</a:t>
             </a:r>
             <a:endParaRPr lang="en-US" sz="2600" dirty="0"/>
           </a:p>
@@ -33776,7 +33668,7 @@
                   <a:srgbClr val="0A0A0B"/>
                 </a:solidFill>
               </a:rPr>
-              <a:t>2</a:t>
+              <a:t>7</a:t>
             </a:r>
             <a:endParaRPr lang="en-US" sz="2600" dirty="0"/>
           </a:p>
@@ -33812,7 +33704,7 @@
                   <a:srgbClr val="55555C"/>
                 </a:solidFill>
               </a:rPr>
-              <a:t>joins, 2 and 6 min after posting</a:t>
+              <a:t>joins; 2 games filled</a:t>
             </a:r>
             <a:endParaRPr lang="en-US" sz="1050" dirty="0"/>
           </a:p>
@@ -34247,7 +34139,7 @@
                   <a:srgbClr val="55555C"/>
                 </a:solidFill>
               </a:rPr>
-              <a:t>Live for the last days of a nine-day hackathon: a week-long trial with 10–20 players is next (games booked, time to agree, invitees who join).</a:t>
+              <a:t>Counted on 29 Oct, day 3 of the hackathon. The first player was in 1, 6 and 46 minutes after a game was posted.</a:t>
             </a:r>
             <a:endParaRPr lang="en-US" sz="1000" dirty="0"/>
           </a:p>
@@ -36246,7 +36138,7 @@
                   <a:srgbClr val="0A0A0B"/>
                 </a:solidFill>
               </a:rPr>
-              <a:t>Your highlight</a:t>
+              <a:t>Your highlight, auto-cut</a:t>
             </a:r>
             <a:endParaRPr lang="en-US" sz="1300" dirty="0"/>
           </a:p>

--- a/video/deck/Serve_Meta_deck.pptx
+++ b/video/deck/Serve_Meta_deck.pptx
@@ -134,13 +134,13 @@
   <p:extLst>
     <p:ext uri="{521415D9-36F7-43E2-AB2F-B90AF26B5E84}">
       <p14:sectionLst xmlns:p14="http://schemas.microsoft.com/office/powerpoint/2010/main">
-        <p14:section name="Opening" id="{581c9ba4-c7bf-0675-db1d-d4d7661533be}">
+        <p14:section name="Opening" id="{6f942cbf-9561-82fc-3c39-3289f145ea5e}">
           <p14:sldIdLst>
             <p14:sldId id="256"/>
             <p14:sldId id="257"/>
           </p14:sldIdLst>
         </p14:section>
-        <p14:section name="Impact" id="{e418aef2-ea0d-dd26-048f-ed0a58186726}">
+        <p14:section name="Impact" id="{f20fe2b4-69f0-636e-f2af-26daef64a54f}">
           <p14:sldIdLst>
             <p14:sldId id="258"/>
             <p14:sldId id="259"/>
@@ -148,7 +148,7 @@
             <p14:sldId id="261"/>
           </p14:sldIdLst>
         </p14:section>
-        <p14:section name="Demo" id="{79bc13b0-addf-3313-5dc8-0eb70c9eebaa}">
+        <p14:section name="Demo" id="{c3587246-37fc-4a49-4b0b-3cbdb3419f68}">
           <p14:sldIdLst>
             <p14:sldId id="262"/>
             <p14:sldId id="263"/>
@@ -158,7 +158,7 @@
             <p14:sldId id="267"/>
           </p14:sldIdLst>
         </p14:section>
-        <p14:section name="Use of Meta AI" id="{bf084ae3-e8b6-1f77-d21d-cbaba7726096}">
+        <p14:section name="Use of Meta AI" id="{2d61d284-d88c-2419-c0fa-0d9acd46235f}">
           <p14:sldIdLst>
             <p14:sldId id="268"/>
             <p14:sldId id="269"/>
@@ -166,7 +166,7 @@
             <p14:sldId id="271"/>
           </p14:sldIdLst>
         </p14:section>
-        <p14:section name="Technical depth" id="{998d6693-60ab-b385-4ba8-9c5f4695aaad}">
+        <p14:section name="Technical depth" id="{d2e7a5c9-388c-a4cf-378e-e6603beabc9c}">
           <p14:sldIdLst>
             <p14:sldId id="272"/>
             <p14:sldId id="273"/>
@@ -180,12 +180,12 @@
             <p14:sldId id="281"/>
           </p14:sldIdLst>
         </p14:section>
-        <p14:section name="Architecture" id="{dad1501c-4814-91dc-cf52-f8f54be29d7c}">
+        <p14:section name="Architecture" id="{41d717c8-788b-e305-b523-da85b717fb42}">
           <p14:sldIdLst>
             <p14:sldId id="282"/>
           </p14:sldIdLst>
         </p14:section>
-        <p14:section name="Close" id="{44adc64b-3812-f193-fda4-85dbd413ad3e}">
+        <p14:section name="Close" id="{dbed1917-243d-1274-72c8-3b10680aa011}">
           <p14:sldIdLst>
             <p14:sldId id="283"/>
           </p14:sldIdLst>
@@ -6254,7 +6254,7 @@
                   <a:srgbClr val="0A7F44"/>
                 </a:solidFill>
               </a:rPr>
-              <a:t>THURSDAY · AUTO-EDITED · FIVE META VISION MODELS</a:t>
+              <a:t>THURSDAY · AUTO-EDITED · FOUR META VISION MODELS</a:t>
             </a:r>
             <a:endParaRPr lang="en-US" sz="1300" dirty="0"/>
           </a:p>
@@ -6760,7 +6760,7 @@
                   <a:srgbClr val="0A0A0B"/>
                 </a:solidFill>
               </a:rPr>
-              <a:t>depth and camera: time stops, the camera turns 20°</a:t>
+              <a:t>depth and camera: time stops, the camera turns up to 12°</a:t>
             </a:r>
             <a:endParaRPr lang="en-US" sz="1150" dirty="0"/>
           </a:p>
@@ -9407,7 +9407,7 @@
                   <a:srgbClr val="55555C"/>
                 </a:solidFill>
               </a:rPr>
-              <a:t>CPU · simulated club</a:t>
+              <a:t>CPU · in the app</a:t>
             </a:r>
             <a:endParaRPr lang="en-US" sz="800" dirty="0"/>
           </a:p>
@@ -11861,7 +11861,7 @@
                   <a:srgbClr val="0A0A0B"/>
                 </a:solidFill>
               </a:rPr>
-              <a:t>10 open weights on my GPU; 5 on the Meta Model API: Voice and Image at runtime, Spark, SAM 3.1 and Wonder for fallback and checks.</a:t>
+              <a:t>10 open weights on my server (GPU and CPU); 5 on the Meta Model API: Voice and Image at runtime, Spark, SAM 3.1 and Wonder for fallback and checks.</a:t>
             </a:r>
             <a:endParaRPr lang="en-US" sz="1200" dirty="0"/>
           </a:p>
@@ -18474,7 +18474,7 @@
                   <a:srgbClr val="0A0A0B"/>
                 </a:solidFill>
               </a:rPr>
-              <a:t>the student is up and answers within 8 to 20 s</a:t>
+              <a:t>the student is free within 8 s and answers within 20 s</a:t>
             </a:r>
             <a:endParaRPr lang="en-US" sz="1050" dirty="0"/>
           </a:p>
@@ -19054,7 +19054,7 @@
                   <a:srgbClr val="55555C"/>
                 </a:solidFill>
               </a:rPr>
-              <a:t>The student answers 73% of the hardest choices and 96% of the test set; Muse Glimmer takes the rest, with its full reasoning.</a:t>
+              <a:t>The student answers 73% of the 196 hardest cases and 96% of the 500 test cases; Muse Glimmer takes the rest, with its full reasoning.</a:t>
             </a:r>
             <a:endParaRPr lang="en-US" sz="1050" dirty="0"/>
           </a:p>
@@ -19457,7 +19457,7 @@
                   <a:srgbClr val="0A0A0B"/>
                 </a:solidFill>
               </a:rPr>
-              <a:t>15 Meta models: 10 on my GPU, 5 on the Meta Model API</a:t>
+              <a:t>15 Meta models: 10 on my server, 5 on the Meta Model API</a:t>
             </a:r>
             <a:endParaRPr lang="en-US" sz="1400" dirty="0"/>
           </a:p>
@@ -26872,7 +26872,7 @@
           </p:nvPr>
         </p:nvGraphicFramePr>
         <p:xfrm>
-          <a:off x="548640" y="3154680"/>
+          <a:off x="548640" y="3108960"/>
           <a:ext cx="11064240" cy="914400"/>
         </p:xfrm>
         <a:graphic>
@@ -26884,7 +26884,7 @@
                 <a:gridCol w="3566160"/>
                 <a:gridCol w="2926080"/>
               </a:tblGrid>
-              <a:tr h="347472">
+              <a:tr h="301752">
                 <a:tc>
                   <a:txBody>
                     <a:bodyPr/>
@@ -27090,7 +27090,7 @@
                   </a:tcPr>
                 </a:tc>
               </a:tr>
-              <a:tr h="347472">
+              <a:tr h="301752">
                 <a:tc>
                   <a:txBody>
                     <a:bodyPr/>
@@ -27100,7 +27100,7 @@
                         <a:buNone/>
                       </a:pPr>
                       <a:r>
-                        <a:rPr lang="en-US" sz="1200" dirty="0">
+                        <a:rPr lang="en-US" sz="1150" dirty="0">
                           <a:solidFill>
                             <a:srgbClr val="0A0A0B"/>
                           </a:solidFill>
@@ -27110,7 +27110,7 @@
                         </a:rPr>
                         <a:t>npm test, 25 offline suites</a:t>
                       </a:r>
-                      <a:endParaRPr lang="en-US" sz="1200" dirty="0">
+                      <a:endParaRPr lang="en-US" sz="1150" dirty="0">
                         <a:latin typeface="Segoe UI" charset="0"/>
                         <a:ea typeface="Segoe UI" charset="0"/>
                         <a:cs typeface="Segoe UI" charset="0"/>
@@ -27165,7 +27165,7 @@
                         <a:buNone/>
                       </a:pPr>
                       <a:r>
-                        <a:rPr lang="en-US" sz="1200" dirty="0">
+                        <a:rPr lang="en-US" sz="1150" dirty="0">
                           <a:solidFill>
                             <a:srgbClr val="0A0A0B"/>
                           </a:solidFill>
@@ -27175,7 +27175,7 @@
                         </a:rPr>
                         <a:t>275 = 270 pass + 3 optional + 2 Linux-only</a:t>
                       </a:r>
-                      <a:endParaRPr lang="en-US" sz="1200" dirty="0">
+                      <a:endParaRPr lang="en-US" sz="1150" dirty="0">
                         <a:latin typeface="Segoe UI" charset="0"/>
                         <a:ea typeface="Segoe UI" charset="0"/>
                         <a:cs typeface="Segoe UI" charset="0"/>
@@ -27230,7 +27230,7 @@
                         <a:buNone/>
                       </a:pPr>
                       <a:r>
-                        <a:rPr lang="en-US" sz="1200" dirty="0">
+                        <a:rPr lang="en-US" sz="1150" dirty="0">
                           <a:solidFill>
                             <a:srgbClr val="0A0A0B"/>
                           </a:solidFill>
@@ -27240,7 +27240,7 @@
                         </a:rPr>
                         <a:t>No model, no GPU</a:t>
                       </a:r>
-                      <a:endParaRPr lang="en-US" sz="1200" dirty="0">
+                      <a:endParaRPr lang="en-US" sz="1150" dirty="0">
                         <a:latin typeface="Segoe UI" charset="0"/>
                         <a:ea typeface="Segoe UI" charset="0"/>
                         <a:cs typeface="Segoe UI" charset="0"/>
@@ -27287,7 +27287,7 @@
                   </a:tcPr>
                 </a:tc>
               </a:tr>
-              <a:tr h="347472">
+              <a:tr h="301752">
                 <a:tc>
                   <a:txBody>
                     <a:bodyPr/>
@@ -27297,7 +27297,7 @@
                         <a:buNone/>
                       </a:pPr>
                       <a:r>
-                        <a:rPr lang="en-US" sz="1200" dirty="0">
+                        <a:rPr lang="en-US" sz="1150" dirty="0">
                           <a:solidFill>
                             <a:srgbClr val="0A0A0B"/>
                           </a:solidFill>
@@ -27307,7 +27307,7 @@
                         </a:rPr>
                         <a:t>Messenger end to end (test/e2e.mjs)</a:t>
                       </a:r>
-                      <a:endParaRPr lang="en-US" sz="1200" dirty="0">
+                      <a:endParaRPr lang="en-US" sz="1150" dirty="0">
                         <a:latin typeface="Segoe UI" charset="0"/>
                         <a:ea typeface="Segoe UI" charset="0"/>
                         <a:cs typeface="Segoe UI" charset="0"/>
@@ -27362,7 +27362,7 @@
                         <a:buNone/>
                       </a:pPr>
                       <a:r>
-                        <a:rPr lang="en-US" sz="1200" dirty="0">
+                        <a:rPr lang="en-US" sz="1150" dirty="0">
                           <a:solidFill>
                             <a:srgbClr val="0A0A0B"/>
                           </a:solidFill>
@@ -27372,7 +27372,7 @@
                         </a:rPr>
                         <a:t>58 of 58 checks</a:t>
                       </a:r>
-                      <a:endParaRPr lang="en-US" sz="1200" dirty="0">
+                      <a:endParaRPr lang="en-US" sz="1150" dirty="0">
                         <a:latin typeface="Segoe UI" charset="0"/>
                         <a:ea typeface="Segoe UI" charset="0"/>
                         <a:cs typeface="Segoe UI" charset="0"/>
@@ -27427,7 +27427,7 @@
                         <a:buNone/>
                       </a:pPr>
                       <a:r>
-                        <a:rPr lang="en-US" sz="1200" dirty="0">
+                        <a:rPr lang="en-US" sz="1150" dirty="0">
                           <a:solidFill>
                             <a:srgbClr val="0A0A0B"/>
                           </a:solidFill>
@@ -27437,7 +27437,7 @@
                         </a:rPr>
                         <a:t>Muse Glimmer on a cloud A100</a:t>
                       </a:r>
-                      <a:endParaRPr lang="en-US" sz="1200" dirty="0">
+                      <a:endParaRPr lang="en-US" sz="1150" dirty="0">
                         <a:latin typeface="Segoe UI" charset="0"/>
                         <a:ea typeface="Segoe UI" charset="0"/>
                         <a:cs typeface="Segoe UI" charset="0"/>
@@ -27484,7 +27484,7 @@
                   </a:tcPr>
                 </a:tc>
               </a:tr>
-              <a:tr h="347472">
+              <a:tr h="301752">
                 <a:tc>
                   <a:txBody>
                     <a:bodyPr/>
@@ -27494,7 +27494,7 @@
                         <a:buNone/>
                       </a:pPr>
                       <a:r>
-                        <a:rPr lang="en-US" sz="1200" dirty="0">
+                        <a:rPr lang="en-US" sz="1150" dirty="0">
                           <a:solidFill>
                             <a:srgbClr val="0A0A0B"/>
                           </a:solidFill>
@@ -27504,7 +27504,7 @@
                         </a:rPr>
                         <a:t>Attacks (test/redteam.mjs)</a:t>
                       </a:r>
-                      <a:endParaRPr lang="en-US" sz="1200" dirty="0">
+                      <a:endParaRPr lang="en-US" sz="1150" dirty="0">
                         <a:latin typeface="Segoe UI" charset="0"/>
                         <a:ea typeface="Segoe UI" charset="0"/>
                         <a:cs typeface="Segoe UI" charset="0"/>
@@ -27559,7 +27559,7 @@
                         <a:buNone/>
                       </a:pPr>
                       <a:r>
-                        <a:rPr lang="en-US" sz="1200" dirty="0">
+                        <a:rPr lang="en-US" sz="1150" dirty="0">
                           <a:solidFill>
                             <a:srgbClr val="0A0A0B"/>
                           </a:solidFill>
@@ -27569,7 +27569,7 @@
                         </a:rPr>
                         <a:t>93 of 93 stopped</a:t>
                       </a:r>
-                      <a:endParaRPr lang="en-US" sz="1200" dirty="0">
+                      <a:endParaRPr lang="en-US" sz="1150" dirty="0">
                         <a:latin typeface="Segoe UI" charset="0"/>
                         <a:ea typeface="Segoe UI" charset="0"/>
                         <a:cs typeface="Segoe UI" charset="0"/>
@@ -27624,7 +27624,7 @@
                         <a:buNone/>
                       </a:pPr>
                       <a:r>
-                        <a:rPr lang="en-US" sz="1200" dirty="0">
+                        <a:rPr lang="en-US" sz="1150" dirty="0">
                           <a:solidFill>
                             <a:srgbClr val="0A0A0B"/>
                           </a:solidFill>
@@ -27634,7 +27634,7 @@
                         </a:rPr>
                         <a:t>A cloud A100, twice</a:t>
                       </a:r>
-                      <a:endParaRPr lang="en-US" sz="1200" dirty="0">
+                      <a:endParaRPr lang="en-US" sz="1150" dirty="0">
                         <a:latin typeface="Segoe UI" charset="0"/>
                         <a:ea typeface="Segoe UI" charset="0"/>
                         <a:cs typeface="Segoe UI" charset="0"/>
@@ -27681,7 +27681,7 @@
                   </a:tcPr>
                 </a:tc>
               </a:tr>
-              <a:tr h="347472">
+              <a:tr h="301752">
                 <a:tc>
                   <a:txBody>
                     <a:bodyPr/>
@@ -27691,7 +27691,7 @@
                         <a:buNone/>
                       </a:pPr>
                       <a:r>
-                        <a:rPr lang="en-US" sz="1200" dirty="0">
+                        <a:rPr lang="en-US" sz="1150" dirty="0">
                           <a:solidFill>
                             <a:srgbClr val="0A0A0B"/>
                           </a:solidFill>
@@ -27701,7 +27701,7 @@
                         </a:rPr>
                         <a:t>Community loop's attacks, within the 93</a:t>
                       </a:r>
-                      <a:endParaRPr lang="en-US" sz="1200" dirty="0">
+                      <a:endParaRPr lang="en-US" sz="1150" dirty="0">
                         <a:latin typeface="Segoe UI" charset="0"/>
                         <a:ea typeface="Segoe UI" charset="0"/>
                         <a:cs typeface="Segoe UI" charset="0"/>
@@ -27756,7 +27756,7 @@
                         <a:buNone/>
                       </a:pPr>
                       <a:r>
-                        <a:rPr lang="en-US" sz="1200" dirty="0">
+                        <a:rPr lang="en-US" sz="1150" dirty="0">
                           <a:solidFill>
                             <a:srgbClr val="0A0A0B"/>
                           </a:solidFill>
@@ -27766,7 +27766,7 @@
                         </a:rPr>
                         <a:t>29 of 29 stopped, 5 of 5 controls passed</a:t>
                       </a:r>
-                      <a:endParaRPr lang="en-US" sz="1200" dirty="0">
+                      <a:endParaRPr lang="en-US" sz="1150" dirty="0">
                         <a:latin typeface="Segoe UI" charset="0"/>
                         <a:ea typeface="Segoe UI" charset="0"/>
                         <a:cs typeface="Segoe UI" charset="0"/>
@@ -27821,7 +27821,7 @@
                         <a:buNone/>
                       </a:pPr>
                       <a:r>
-                        <a:rPr lang="en-US" sz="1200" dirty="0">
+                        <a:rPr lang="en-US" sz="1150" dirty="0">
                           <a:solidFill>
                             <a:srgbClr val="0A0A0B"/>
                           </a:solidFill>
@@ -27831,7 +27831,7 @@
                         </a:rPr>
                         <a:t>The server's CPU, with the real guards</a:t>
                       </a:r>
-                      <a:endParaRPr lang="en-US" sz="1200" dirty="0">
+                      <a:endParaRPr lang="en-US" sz="1150" dirty="0">
                         <a:latin typeface="Segoe UI" charset="0"/>
                         <a:ea typeface="Segoe UI" charset="0"/>
                         <a:cs typeface="Segoe UI" charset="0"/>
@@ -27878,7 +27878,7 @@
                   </a:tcPr>
                 </a:tc>
               </a:tr>
-              <a:tr h="347472">
+              <a:tr h="301752">
                 <a:tc>
                   <a:txBody>
                     <a:bodyPr/>
@@ -27888,7 +27888,7 @@
                         <a:buNone/>
                       </a:pPr>
                       <a:r>
-                        <a:rPr lang="en-US" sz="1200" dirty="0">
+                        <a:rPr lang="en-US" sz="1150" dirty="0">
                           <a:solidFill>
                             <a:srgbClr val="0A0A0B"/>
                           </a:solidFill>
@@ -27898,7 +27898,7 @@
                         </a:rPr>
                         <a:t>A2A between two gateways</a:t>
                       </a:r>
-                      <a:endParaRPr lang="en-US" sz="1200" dirty="0">
+                      <a:endParaRPr lang="en-US" sz="1150" dirty="0">
                         <a:latin typeface="Segoe UI" charset="0"/>
                         <a:ea typeface="Segoe UI" charset="0"/>
                         <a:cs typeface="Segoe UI" charset="0"/>
@@ -27953,7 +27953,7 @@
                         <a:buNone/>
                       </a:pPr>
                       <a:r>
-                        <a:rPr lang="en-US" sz="1200" dirty="0">
+                        <a:rPr lang="en-US" sz="1150" dirty="0">
                           <a:solidFill>
                             <a:srgbClr val="0A0A0B"/>
                           </a:solidFill>
@@ -27963,7 +27963,7 @@
                         </a:rPr>
                         <a:t>22 of 22 checks</a:t>
                       </a:r>
-                      <a:endParaRPr lang="en-US" sz="1200" dirty="0">
+                      <a:endParaRPr lang="en-US" sz="1150" dirty="0">
                         <a:latin typeface="Segoe UI" charset="0"/>
                         <a:ea typeface="Segoe UI" charset="0"/>
                         <a:cs typeface="Segoe UI" charset="0"/>
@@ -28018,7 +28018,7 @@
                         <a:buNone/>
                       </a:pPr>
                       <a:r>
-                        <a:rPr lang="en-US" sz="1200" dirty="0">
+                        <a:rPr lang="en-US" sz="1150" dirty="0">
                           <a:solidFill>
                             <a:srgbClr val="0A0A0B"/>
                           </a:solidFill>
@@ -28028,7 +28028,7 @@
                         </a:rPr>
                         <a:t>Taipei GPU server and a GCP A100</a:t>
                       </a:r>
-                      <a:endParaRPr lang="en-US" sz="1200" dirty="0">
+                      <a:endParaRPr lang="en-US" sz="1150" dirty="0">
                         <a:latin typeface="Segoe UI" charset="0"/>
                         <a:ea typeface="Segoe UI" charset="0"/>
                         <a:cs typeface="Segoe UI" charset="0"/>
@@ -28075,7 +28075,7 @@
                   </a:tcPr>
                 </a:tc>
               </a:tr>
-              <a:tr h="347472">
+              <a:tr h="301752">
                 <a:tc>
                   <a:txBody>
                     <a:bodyPr/>
@@ -28085,7 +28085,7 @@
                         <a:buNone/>
                       </a:pPr>
                       <a:r>
-                        <a:rPr lang="en-US" sz="1200" dirty="0">
+                        <a:rPr lang="en-US" sz="1150" dirty="0">
                           <a:solidFill>
                             <a:srgbClr val="0A0A0B"/>
                           </a:solidFill>
@@ -28095,7 +28095,7 @@
                         </a:rPr>
                         <a:t>Crash matrix</a:t>
                       </a:r>
-                      <a:endParaRPr lang="en-US" sz="1200" dirty="0">
+                      <a:endParaRPr lang="en-US" sz="1150" dirty="0">
                         <a:latin typeface="Segoe UI" charset="0"/>
                         <a:ea typeface="Segoe UI" charset="0"/>
                         <a:cs typeface="Segoe UI" charset="0"/>
@@ -28150,7 +28150,7 @@
                         <a:buNone/>
                       </a:pPr>
                       <a:r>
-                        <a:rPr lang="en-US" sz="1200" dirty="0">
+                        <a:rPr lang="en-US" sz="1150" dirty="0">
                           <a:solidFill>
                             <a:srgbClr val="0A0A0B"/>
                           </a:solidFill>
@@ -28158,9 +28158,9 @@
                           <a:ea typeface="Segoe UI" pitchFamily="34" charset="-122"/>
                           <a:cs typeface="Segoe UI" pitchFamily="34" charset="-120"/>
                         </a:rPr>
-                        <a:t>20 of 20 checks</a:t>
+                        <a:t>20 of 20 checks (201 of 201 assertions)</a:t>
                       </a:r>
-                      <a:endParaRPr lang="en-US" sz="1200" dirty="0">
+                      <a:endParaRPr lang="en-US" sz="1150" dirty="0">
                         <a:latin typeface="Segoe UI" charset="0"/>
                         <a:ea typeface="Segoe UI" charset="0"/>
                         <a:cs typeface="Segoe UI" charset="0"/>
@@ -28215,7 +28215,7 @@
                         <a:buNone/>
                       </a:pPr>
                       <a:r>
-                        <a:rPr lang="en-US" sz="1200" dirty="0">
+                        <a:rPr lang="en-US" sz="1150" dirty="0">
                           <a:solidFill>
                             <a:srgbClr val="0A0A0B"/>
                           </a:solidFill>
@@ -28225,7 +28225,7 @@
                         </a:rPr>
                         <a:t>A stand-in model</a:t>
                       </a:r>
-                      <a:endParaRPr lang="en-US" sz="1200" dirty="0">
+                      <a:endParaRPr lang="en-US" sz="1150" dirty="0">
                         <a:latin typeface="Segoe UI" charset="0"/>
                         <a:ea typeface="Segoe UI" charset="0"/>
                         <a:cs typeface="Segoe UI" charset="0"/>
@@ -28272,7 +28272,7 @@
                   </a:tcPr>
                 </a:tc>
               </a:tr>
-              <a:tr h="347472">
+              <a:tr h="301752">
                 <a:tc>
                   <a:txBody>
                     <a:bodyPr/>
@@ -28282,7 +28282,7 @@
                         <a:buNone/>
                       </a:pPr>
                       <a:r>
-                        <a:rPr lang="en-US" sz="1200" dirty="0">
+                        <a:rPr lang="en-US" sz="1150" dirty="0">
                           <a:solidFill>
                             <a:srgbClr val="0A0A0B"/>
                           </a:solidFill>
@@ -28290,9 +28290,9 @@
                           <a:ea typeface="Segoe UI" pitchFamily="34" charset="-122"/>
                           <a:cs typeface="Segoe UI" pitchFamily="34" charset="-120"/>
                         </a:rPr>
-                        <a:t>A federation of three clubs (test/federation_unit.mjs)</a:t>
+                        <a:t>Unsafe messages: Llama Guard, then code</a:t>
                       </a:r>
-                      <a:endParaRPr lang="en-US" sz="1200" dirty="0">
+                      <a:endParaRPr lang="en-US" sz="1150" dirty="0">
                         <a:latin typeface="Segoe UI" charset="0"/>
                         <a:ea typeface="Segoe UI" charset="0"/>
                         <a:cs typeface="Segoe UI" charset="0"/>
@@ -28347,7 +28347,7 @@
                         <a:buNone/>
                       </a:pPr>
                       <a:r>
-                        <a:rPr lang="en-US" sz="1200" dirty="0">
+                        <a:rPr lang="en-US" sz="1150" dirty="0">
                           <a:solidFill>
                             <a:srgbClr val="0A0A0B"/>
                           </a:solidFill>
@@ -28355,9 +28355,9 @@
                           <a:ea typeface="Segoe UI" pitchFamily="34" charset="-122"/>
                           <a:cs typeface="Segoe UI" pitchFamily="34" charset="-120"/>
                         </a:rPr>
-                        <a:t>4 of 4: found, signed, rotated, forgery refused</a:t>
+                        <a:t>37 of 42 refused; 1 of 74 harmless ones refused</a:t>
                       </a:r>
-                      <a:endParaRPr lang="en-US" sz="1200" dirty="0">
+                      <a:endParaRPr lang="en-US" sz="1150" dirty="0">
                         <a:latin typeface="Segoe UI" charset="0"/>
                         <a:ea typeface="Segoe UI" charset="0"/>
                         <a:cs typeface="Segoe UI" charset="0"/>
@@ -28412,7 +28412,7 @@
                         <a:buNone/>
                       </a:pPr>
                       <a:r>
-                        <a:rPr lang="en-US" sz="1200" dirty="0">
+                        <a:rPr lang="en-US" sz="1150" dirty="0">
                           <a:solidFill>
                             <a:srgbClr val="0A0A0B"/>
                           </a:solidFill>
@@ -28420,9 +28420,9 @@
                           <a:ea typeface="Segoe UI" pitchFamily="34" charset="-122"/>
                           <a:cs typeface="Segoe UI" pitchFamily="34" charset="-120"/>
                         </a:rPr>
-                        <a:t>Real HTTP, one host</a:t>
+                        <a:t>The server's CPU</a:t>
                       </a:r>
-                      <a:endParaRPr lang="en-US" sz="1200" dirty="0">
+                      <a:endParaRPr lang="en-US" sz="1150" dirty="0">
                         <a:latin typeface="Segoe UI" charset="0"/>
                         <a:ea typeface="Segoe UI" charset="0"/>
                         <a:cs typeface="Segoe UI" charset="0"/>
@@ -28469,7 +28469,7 @@
                   </a:tcPr>
                 </a:tc>
               </a:tr>
-              <a:tr h="347472">
+              <a:tr h="301752">
                 <a:tc>
                   <a:txBody>
                     <a:bodyPr/>
@@ -28479,7 +28479,7 @@
                         <a:buNone/>
                       </a:pPr>
                       <a:r>
-                        <a:rPr lang="en-US" sz="1200" dirty="0">
+                        <a:rPr lang="en-US" sz="1150" dirty="0">
                           <a:solidFill>
                             <a:srgbClr val="0A0A0B"/>
                           </a:solidFill>
@@ -28487,9 +28487,9 @@
                           <a:ea typeface="Segoe UI" pitchFamily="34" charset="-122"/>
                           <a:cs typeface="Segoe UI" pitchFamily="34" charset="-120"/>
                         </a:rPr>
-                        <a:t>"I want to play" in Messenger</a:t>
+                        <a:t>A federation of three clubs (test/federation_unit.mjs)</a:t>
                       </a:r>
-                      <a:endParaRPr lang="en-US" sz="1200" dirty="0">
+                      <a:endParaRPr lang="en-US" sz="1150" dirty="0">
                         <a:latin typeface="Segoe UI" charset="0"/>
                         <a:ea typeface="Segoe UI" charset="0"/>
                         <a:cs typeface="Segoe UI" charset="0"/>
@@ -28544,7 +28544,7 @@
                         <a:buNone/>
                       </a:pPr>
                       <a:r>
-                        <a:rPr lang="en-US" sz="1200" dirty="0">
+                        <a:rPr lang="en-US" sz="1150" dirty="0">
                           <a:solidFill>
                             <a:srgbClr val="0A0A0B"/>
                           </a:solidFill>
@@ -28552,9 +28552,9 @@
                           <a:ea typeface="Segoe UI" pitchFamily="34" charset="-122"/>
                           <a:cs typeface="Segoe UI" pitchFamily="34" charset="-120"/>
                         </a:rPr>
-                        <a:t>13 of 13 checks</a:t>
+                        <a:t>4 of 4: found, signed, rotated, forgery refused</a:t>
                       </a:r>
-                      <a:endParaRPr lang="en-US" sz="1200" dirty="0">
+                      <a:endParaRPr lang="en-US" sz="1150" dirty="0">
                         <a:latin typeface="Segoe UI" charset="0"/>
                         <a:ea typeface="Segoe UI" charset="0"/>
                         <a:cs typeface="Segoe UI" charset="0"/>
@@ -28609,7 +28609,204 @@
                         <a:buNone/>
                       </a:pPr>
                       <a:r>
-                        <a:rPr lang="en-US" sz="1200" dirty="0">
+                        <a:rPr lang="en-US" sz="1150" dirty="0">
+                          <a:solidFill>
+                            <a:srgbClr val="0A0A0B"/>
+                          </a:solidFill>
+                          <a:latin typeface="Segoe UI" pitchFamily="34" charset="0"/>
+                          <a:ea typeface="Segoe UI" pitchFamily="34" charset="-122"/>
+                          <a:cs typeface="Segoe UI" pitchFamily="34" charset="-120"/>
+                        </a:rPr>
+                        <a:t>Real HTTP, one host</a:t>
+                      </a:r>
+                      <a:endParaRPr lang="en-US" sz="1150" dirty="0">
+                        <a:latin typeface="Segoe UI" charset="0"/>
+                        <a:ea typeface="Segoe UI" charset="0"/>
+                        <a:cs typeface="Segoe UI" charset="0"/>
+                      </a:endParaRPr>
+                    </a:p>
+                  </a:txBody>
+                  <a:tcPr marL="91440" marR="91440" marT="0" marB="0" anchor="ctr">
+                    <a:lnL w="9525" cap="flat" cmpd="sng" algn="ctr">
+                      <a:solidFill>
+                        <a:srgbClr val="DCDCE0"/>
+                      </a:solidFill>
+                      <a:prstDash val="solid"/>
+                      <a:round/>
+                      <a:headEnd type="none" w="med" len="med"/>
+                      <a:tailEnd type="none" w="med" len="med"/>
+                    </a:lnL>
+                    <a:lnR w="9525" cap="flat" cmpd="sng" algn="ctr">
+                      <a:solidFill>
+                        <a:srgbClr val="DCDCE0"/>
+                      </a:solidFill>
+                      <a:prstDash val="solid"/>
+                      <a:round/>
+                      <a:headEnd type="none" w="med" len="med"/>
+                      <a:tailEnd type="none" w="med" len="med"/>
+                    </a:lnR>
+                    <a:lnT w="9525" cap="flat" cmpd="sng" algn="ctr">
+                      <a:solidFill>
+                        <a:srgbClr val="DCDCE0"/>
+                      </a:solidFill>
+                      <a:prstDash val="solid"/>
+                      <a:round/>
+                      <a:headEnd type="none" w="med" len="med"/>
+                      <a:tailEnd type="none" w="med" len="med"/>
+                    </a:lnT>
+                    <a:lnB w="9525" cap="flat" cmpd="sng" algn="ctr">
+                      <a:solidFill>
+                        <a:srgbClr val="DCDCE0"/>
+                      </a:solidFill>
+                      <a:prstDash val="solid"/>
+                      <a:round/>
+                      <a:headEnd type="none" w="med" len="med"/>
+                      <a:tailEnd type="none" w="med" len="med"/>
+                    </a:lnB>
+                  </a:tcPr>
+                </a:tc>
+              </a:tr>
+              <a:tr h="301752">
+                <a:tc>
+                  <a:txBody>
+                    <a:bodyPr/>
+                    <a:lstStyle/>
+                    <a:p>
+                      <a:pPr indent="0" marL="0">
+                        <a:buNone/>
+                      </a:pPr>
+                      <a:r>
+                        <a:rPr lang="en-US" sz="1150" dirty="0">
+                          <a:solidFill>
+                            <a:srgbClr val="0A0A0B"/>
+                          </a:solidFill>
+                          <a:latin typeface="Segoe UI" pitchFamily="34" charset="0"/>
+                          <a:ea typeface="Segoe UI" pitchFamily="34" charset="-122"/>
+                          <a:cs typeface="Segoe UI" pitchFamily="34" charset="-120"/>
+                        </a:rPr>
+                        <a:t>"I want to play" in Messenger</a:t>
+                      </a:r>
+                      <a:endParaRPr lang="en-US" sz="1150" dirty="0">
+                        <a:latin typeface="Segoe UI" charset="0"/>
+                        <a:ea typeface="Segoe UI" charset="0"/>
+                        <a:cs typeface="Segoe UI" charset="0"/>
+                      </a:endParaRPr>
+                    </a:p>
+                  </a:txBody>
+                  <a:tcPr marL="91440" marR="91440" marT="0" marB="0" anchor="ctr">
+                    <a:lnL w="9525" cap="flat" cmpd="sng" algn="ctr">
+                      <a:solidFill>
+                        <a:srgbClr val="DCDCE0"/>
+                      </a:solidFill>
+                      <a:prstDash val="solid"/>
+                      <a:round/>
+                      <a:headEnd type="none" w="med" len="med"/>
+                      <a:tailEnd type="none" w="med" len="med"/>
+                    </a:lnL>
+                    <a:lnR w="9525" cap="flat" cmpd="sng" algn="ctr">
+                      <a:solidFill>
+                        <a:srgbClr val="DCDCE0"/>
+                      </a:solidFill>
+                      <a:prstDash val="solid"/>
+                      <a:round/>
+                      <a:headEnd type="none" w="med" len="med"/>
+                      <a:tailEnd type="none" w="med" len="med"/>
+                    </a:lnR>
+                    <a:lnT w="9525" cap="flat" cmpd="sng" algn="ctr">
+                      <a:solidFill>
+                        <a:srgbClr val="DCDCE0"/>
+                      </a:solidFill>
+                      <a:prstDash val="solid"/>
+                      <a:round/>
+                      <a:headEnd type="none" w="med" len="med"/>
+                      <a:tailEnd type="none" w="med" len="med"/>
+                    </a:lnT>
+                    <a:lnB w="9525" cap="flat" cmpd="sng" algn="ctr">
+                      <a:solidFill>
+                        <a:srgbClr val="DCDCE0"/>
+                      </a:solidFill>
+                      <a:prstDash val="solid"/>
+                      <a:round/>
+                      <a:headEnd type="none" w="med" len="med"/>
+                      <a:tailEnd type="none" w="med" len="med"/>
+                    </a:lnB>
+                  </a:tcPr>
+                </a:tc>
+                <a:tc>
+                  <a:txBody>
+                    <a:bodyPr/>
+                    <a:lstStyle/>
+                    <a:p>
+                      <a:pPr indent="0" marL="0">
+                        <a:buNone/>
+                      </a:pPr>
+                      <a:r>
+                        <a:rPr lang="en-US" sz="1150" dirty="0">
+                          <a:solidFill>
+                            <a:srgbClr val="0A0A0B"/>
+                          </a:solidFill>
+                          <a:latin typeface="Segoe UI" pitchFamily="34" charset="0"/>
+                          <a:ea typeface="Segoe UI" pitchFamily="34" charset="-122"/>
+                          <a:cs typeface="Segoe UI" pitchFamily="34" charset="-120"/>
+                        </a:rPr>
+                        <a:t>13 of 13 checks</a:t>
+                      </a:r>
+                      <a:endParaRPr lang="en-US" sz="1150" dirty="0">
+                        <a:latin typeface="Segoe UI" charset="0"/>
+                        <a:ea typeface="Segoe UI" charset="0"/>
+                        <a:cs typeface="Segoe UI" charset="0"/>
+                      </a:endParaRPr>
+                    </a:p>
+                  </a:txBody>
+                  <a:tcPr marL="91440" marR="91440" marT="0" marB="0" anchor="ctr">
+                    <a:lnL w="9525" cap="flat" cmpd="sng" algn="ctr">
+                      <a:solidFill>
+                        <a:srgbClr val="DCDCE0"/>
+                      </a:solidFill>
+                      <a:prstDash val="solid"/>
+                      <a:round/>
+                      <a:headEnd type="none" w="med" len="med"/>
+                      <a:tailEnd type="none" w="med" len="med"/>
+                    </a:lnL>
+                    <a:lnR w="9525" cap="flat" cmpd="sng" algn="ctr">
+                      <a:solidFill>
+                        <a:srgbClr val="DCDCE0"/>
+                      </a:solidFill>
+                      <a:prstDash val="solid"/>
+                      <a:round/>
+                      <a:headEnd type="none" w="med" len="med"/>
+                      <a:tailEnd type="none" w="med" len="med"/>
+                    </a:lnR>
+                    <a:lnT w="9525" cap="flat" cmpd="sng" algn="ctr">
+                      <a:solidFill>
+                        <a:srgbClr val="DCDCE0"/>
+                      </a:solidFill>
+                      <a:prstDash val="solid"/>
+                      <a:round/>
+                      <a:headEnd type="none" w="med" len="med"/>
+                      <a:tailEnd type="none" w="med" len="med"/>
+                    </a:lnT>
+                    <a:lnB w="9525" cap="flat" cmpd="sng" algn="ctr">
+                      <a:solidFill>
+                        <a:srgbClr val="DCDCE0"/>
+                      </a:solidFill>
+                      <a:prstDash val="solid"/>
+                      <a:round/>
+                      <a:headEnd type="none" w="med" len="med"/>
+                      <a:tailEnd type="none" w="med" len="med"/>
+                    </a:lnB>
+                  </a:tcPr>
+                </a:tc>
+                <a:tc>
+                  <a:txBody>
+                    <a:bodyPr/>
+                    <a:lstStyle/>
+                    <a:p>
+                      <a:pPr indent="0" marL="0">
+                        <a:buNone/>
+                      </a:pPr>
+                      <a:r>
+                        <a:rPr lang="en-US" sz="1150" dirty="0">
                           <a:solidFill>
                             <a:srgbClr val="0A0A0B"/>
                           </a:solidFill>
@@ -28619,7 +28816,7 @@
                         </a:rPr>
                         <a:t>Muse Glimmer on a cloud A100</a:t>
                       </a:r>
-                      <a:endParaRPr lang="en-US" sz="1200" dirty="0">
+                      <a:endParaRPr lang="en-US" sz="1150" dirty="0">
                         <a:latin typeface="Segoe UI" charset="0"/>
                         <a:ea typeface="Segoe UI" charset="0"/>
                         <a:cs typeface="Segoe UI" charset="0"/>
@@ -37188,75 +37385,12 @@
         </p:nvSpPr>
         <p:spPr>
           <a:xfrm>
-            <a:off x="548640" y="1691640"/>
-            <a:ext cx="4846320" cy="4343400"/>
+            <a:off x="548640" y="1783080"/>
+            <a:ext cx="5440680" cy="1920240"/>
           </a:xfrm>
           <a:prstGeom prst="roundRect">
             <a:avLst>
-              <a:gd name="adj" fmla="val 2526"/>
-            </a:avLst>
-          </a:prstGeom>
-          <a:solidFill>
-            <a:srgbClr val="FFFFFF"/>
-          </a:solidFill>
-          <a:ln w="12700">
-            <a:solidFill>
-              <a:srgbClr val="DCDCE0"/>
-            </a:solidFill>
-            <a:prstDash val="solid"/>
-          </a:ln>
-        </p:spPr>
-      </p:sp>
-      <p:sp>
-        <p:nvSpPr>
-          <p:cNvPr id="6" name="Text 3"/>
-          <p:cNvSpPr txBox="1"/>
-          <p:nvPr/>
-        </p:nvSpPr>
-        <p:spPr>
-          <a:xfrm>
-            <a:off x="777240" y="1828800"/>
-            <a:ext cx="4389120" cy="228600"/>
-          </a:xfrm>
-          <a:prstGeom prst="rect">
-            <a:avLst/>
-          </a:prstGeom>
-          <a:noFill/>
-          <a:ln/>
-        </p:spPr>
-        <p:txBody>
-          <a:bodyPr wrap="square" lIns="0" tIns="0" rIns="0" bIns="0" rtlCol="0" anchor="t"/>
-          <a:lstStyle/>
-          <a:p>
-            <a:pPr indent="0" marL="0">
-              <a:buNone/>
-            </a:pPr>
-            <a:r>
-              <a:rPr lang="en-US" sz="1000" b="1" spc="100" kern="0" dirty="0">
-                <a:solidFill>
-                  <a:srgbClr val="55555C"/>
-                </a:solidFill>
-              </a:rPr>
-              <a:t>THIS WEEK'S LIMITS</a:t>
-            </a:r>
-            <a:endParaRPr lang="en-US" sz="1000" dirty="0"/>
-          </a:p>
-        </p:txBody>
-      </p:sp>
-      <p:sp>
-        <p:nvSpPr>
-          <p:cNvPr id="7" name="Shape 4"/>
-          <p:cNvSpPr/>
-          <p:nvPr/>
-        </p:nvSpPr>
-        <p:spPr>
-          <a:xfrm>
-            <a:off x="777240" y="2194560"/>
-            <a:ext cx="4389120" cy="786384"/>
-          </a:xfrm>
-          <a:prstGeom prst="roundRect">
-            <a:avLst>
-              <a:gd name="adj" fmla="val 13953"/>
+              <a:gd name="adj" fmla="val 5714"/>
             </a:avLst>
           </a:prstGeom>
           <a:solidFill>
@@ -37272,37 +37406,98 @@
       </p:sp>
       <p:sp>
         <p:nvSpPr>
+          <p:cNvPr id="6" name="Shape 3"/>
+          <p:cNvSpPr/>
+          <p:nvPr/>
+        </p:nvSpPr>
+        <p:spPr>
+          <a:xfrm>
+            <a:off x="777240" y="2011680"/>
+            <a:ext cx="420624" cy="420624"/>
+          </a:xfrm>
+          <a:prstGeom prst="ellipse">
+            <a:avLst/>
+          </a:prstGeom>
+          <a:solidFill>
+            <a:srgbClr val="0A7F44"/>
+          </a:solidFill>
+          <a:ln w="12700">
+            <a:solidFill>
+              <a:srgbClr val="0A7F44"/>
+            </a:solidFill>
+            <a:prstDash val="solid"/>
+          </a:ln>
+        </p:spPr>
+      </p:sp>
+      <p:sp>
+        <p:nvSpPr>
+          <p:cNvPr id="7" name="Text 4"/>
+          <p:cNvSpPr txBox="1"/>
+          <p:nvPr/>
+        </p:nvSpPr>
+        <p:spPr>
+          <a:xfrm>
+            <a:off x="777240" y="2011680"/>
+            <a:ext cx="420624" cy="420624"/>
+          </a:xfrm>
+          <a:prstGeom prst="rect">
+            <a:avLst/>
+          </a:prstGeom>
+          <a:noFill/>
+          <a:ln/>
+        </p:spPr>
+        <p:txBody>
+          <a:bodyPr wrap="square" lIns="0" tIns="0" rIns="0" bIns="0" rtlCol="0" anchor="ctr"/>
+          <a:lstStyle/>
+          <a:p>
+            <a:pPr algn="ctr" indent="0" marL="0">
+              <a:buNone/>
+            </a:pPr>
+            <a:r>
+              <a:rPr lang="en-US" sz="1500" b="1" dirty="0">
+                <a:solidFill>
+                  <a:srgbClr val="FFFFFF"/>
+                </a:solidFill>
+              </a:rPr>
+              <a:t>1</a:t>
+            </a:r>
+            <a:endParaRPr lang="en-US" sz="1500" dirty="0"/>
+          </a:p>
+        </p:txBody>
+      </p:sp>
+      <p:sp>
+        <p:nvSpPr>
           <p:cNvPr id="8" name="Text 5"/>
           <p:cNvSpPr txBox="1"/>
           <p:nvPr/>
         </p:nvSpPr>
         <p:spPr>
           <a:xfrm>
-            <a:off x="960120" y="2286000"/>
-            <a:ext cx="4023360" cy="292608"/>
-          </a:xfrm>
-          <a:prstGeom prst="rect">
-            <a:avLst/>
-          </a:prstGeom>
-          <a:noFill/>
-          <a:ln/>
-        </p:spPr>
-        <p:txBody>
-          <a:bodyPr wrap="square" lIns="0" tIns="0" rIns="0" bIns="0" rtlCol="0" anchor="t"/>
-          <a:lstStyle/>
-          <a:p>
-            <a:pPr indent="0" marL="0">
-              <a:buNone/>
-            </a:pPr>
-            <a:r>
-              <a:rPr lang="en-US" sz="1400" b="1" dirty="0">
+            <a:off x="1371600" y="1984248"/>
+            <a:ext cx="4434840" cy="457200"/>
+          </a:xfrm>
+          <a:prstGeom prst="rect">
+            <a:avLst/>
+          </a:prstGeom>
+          <a:noFill/>
+          <a:ln/>
+        </p:spPr>
+        <p:txBody>
+          <a:bodyPr wrap="square" lIns="0" tIns="0" rIns="0" bIns="0" rtlCol="0" anchor="ctr"/>
+          <a:lstStyle/>
+          <a:p>
+            <a:pPr indent="0" marL="0">
+              <a:buNone/>
+            </a:pPr>
+            <a:r>
+              <a:rPr lang="en-US" sz="1700" b="1" dirty="0">
                 <a:solidFill>
                   <a:srgbClr val="0A0A0B"/>
                 </a:solidFill>
               </a:rPr>
-              <a:t>Doubles first</a:t>
-            </a:r>
-            <a:endParaRPr lang="en-US" sz="1400" dirty="0"/>
+              <a:t>Notes from what you said and what was recorded</a:t>
+            </a:r>
+            <a:endParaRPr lang="en-US" sz="1700" dirty="0"/>
           </a:p>
         </p:txBody>
       </p:sp>
@@ -37314,31 +37509,31 @@
         </p:nvSpPr>
         <p:spPr>
           <a:xfrm>
-            <a:off x="960120" y="2633472"/>
-            <a:ext cx="4023360" cy="256032"/>
-          </a:xfrm>
-          <a:prstGeom prst="rect">
-            <a:avLst/>
-          </a:prstGeom>
-          <a:noFill/>
-          <a:ln/>
-        </p:spPr>
-        <p:txBody>
-          <a:bodyPr wrap="square" lIns="0" tIns="0" rIns="0" bIns="0" rtlCol="0" anchor="t"/>
-          <a:lstStyle/>
-          <a:p>
-            <a:pPr indent="0" marL="0">
-              <a:buNone/>
-            </a:pPr>
-            <a:r>
-              <a:rPr lang="en-US" sz="1050" dirty="0">
-                <a:solidFill>
-                  <a:srgbClr val="0A7F44"/>
-                </a:solidFill>
-              </a:rPr>
-              <a:t>You said, Sun 25 Oct</a:t>
-            </a:r>
-            <a:endParaRPr lang="en-US" sz="1050" dirty="0"/>
+            <a:off x="1371600" y="2514600"/>
+            <a:ext cx="4434840" cy="1005840"/>
+          </a:xfrm>
+          <a:prstGeom prst="rect">
+            <a:avLst/>
+          </a:prstGeom>
+          <a:noFill/>
+          <a:ln/>
+        </p:spPr>
+        <p:txBody>
+          <a:bodyPr wrap="square" lIns="0" tIns="0" rIns="0" bIns="0" rtlCol="0" anchor="t"/>
+          <a:lstStyle/>
+          <a:p>
+            <a:pPr indent="0" marL="0">
+              <a:buNone/>
+            </a:pPr>
+            <a:r>
+              <a:rPr lang="en-US" sz="1350" dirty="0">
+                <a:solidFill>
+                  <a:srgbClr val="55555C"/>
+                </a:solidFill>
+              </a:rPr>
+              <a:t>Your words from Messenger, a voice note or the app; your games and your health app; what you told your agent before.</a:t>
+            </a:r>
+            <a:endParaRPr lang="en-US" sz="1350" dirty="0"/>
           </a:p>
         </p:txBody>
       </p:sp>
@@ -37350,12 +37545,172 @@
         </p:nvSpPr>
         <p:spPr>
           <a:xfrm>
-            <a:off x="777240" y="3127248"/>
-            <a:ext cx="4389120" cy="786384"/>
+            <a:off x="6172200" y="1783080"/>
+            <a:ext cx="5440680" cy="1920240"/>
           </a:xfrm>
           <a:prstGeom prst="roundRect">
             <a:avLst>
-              <a:gd name="adj" fmla="val 13953"/>
+              <a:gd name="adj" fmla="val 5714"/>
+            </a:avLst>
+          </a:prstGeom>
+          <a:solidFill>
+            <a:srgbClr val="E9F3EC"/>
+          </a:solidFill>
+          <a:ln w="12700">
+            <a:solidFill>
+              <a:srgbClr val="E9F3EC"/>
+            </a:solidFill>
+            <a:prstDash val="solid"/>
+          </a:ln>
+        </p:spPr>
+      </p:sp>
+      <p:sp>
+        <p:nvSpPr>
+          <p:cNvPr id="11" name="Shape 8"/>
+          <p:cNvSpPr/>
+          <p:nvPr/>
+        </p:nvSpPr>
+        <p:spPr>
+          <a:xfrm>
+            <a:off x="6400800" y="2011680"/>
+            <a:ext cx="420624" cy="420624"/>
+          </a:xfrm>
+          <a:prstGeom prst="ellipse">
+            <a:avLst/>
+          </a:prstGeom>
+          <a:solidFill>
+            <a:srgbClr val="0A7F44"/>
+          </a:solidFill>
+          <a:ln w="12700">
+            <a:solidFill>
+              <a:srgbClr val="0A7F44"/>
+            </a:solidFill>
+            <a:prstDash val="solid"/>
+          </a:ln>
+        </p:spPr>
+      </p:sp>
+      <p:sp>
+        <p:nvSpPr>
+          <p:cNvPr id="12" name="Text 9"/>
+          <p:cNvSpPr txBox="1"/>
+          <p:nvPr/>
+        </p:nvSpPr>
+        <p:spPr>
+          <a:xfrm>
+            <a:off x="6400800" y="2011680"/>
+            <a:ext cx="420624" cy="420624"/>
+          </a:xfrm>
+          <a:prstGeom prst="rect">
+            <a:avLst/>
+          </a:prstGeom>
+          <a:noFill/>
+          <a:ln/>
+        </p:spPr>
+        <p:txBody>
+          <a:bodyPr wrap="square" lIns="0" tIns="0" rIns="0" bIns="0" rtlCol="0" anchor="ctr"/>
+          <a:lstStyle/>
+          <a:p>
+            <a:pPr algn="ctr" indent="0" marL="0">
+              <a:buNone/>
+            </a:pPr>
+            <a:r>
+              <a:rPr lang="en-US" sz="1500" b="1" dirty="0">
+                <a:solidFill>
+                  <a:srgbClr val="FFFFFF"/>
+                </a:solidFill>
+              </a:rPr>
+              <a:t>2</a:t>
+            </a:r>
+            <a:endParaRPr lang="en-US" sz="1500" dirty="0"/>
+          </a:p>
+        </p:txBody>
+      </p:sp>
+      <p:sp>
+        <p:nvSpPr>
+          <p:cNvPr id="13" name="Text 10"/>
+          <p:cNvSpPr txBox="1"/>
+          <p:nvPr/>
+        </p:nvSpPr>
+        <p:spPr>
+          <a:xfrm>
+            <a:off x="6995160" y="1984248"/>
+            <a:ext cx="4434840" cy="457200"/>
+          </a:xfrm>
+          <a:prstGeom prst="rect">
+            <a:avLst/>
+          </a:prstGeom>
+          <a:noFill/>
+          <a:ln/>
+        </p:spPr>
+        <p:txBody>
+          <a:bodyPr wrap="square" lIns="0" tIns="0" rIns="0" bIns="0" rtlCol="0" anchor="ctr"/>
+          <a:lstStyle/>
+          <a:p>
+            <a:pPr indent="0" marL="0">
+              <a:buNone/>
+            </a:pPr>
+            <a:r>
+              <a:rPr lang="en-US" sz="1700" b="1" dirty="0">
+                <a:solidFill>
+                  <a:srgbClr val="0A0A0B"/>
+                </a:solidFill>
+              </a:rPr>
+              <a:t>Found by meaning with Meta's DRAMA</a:t>
+            </a:r>
+            <a:endParaRPr lang="en-US" sz="1700" dirty="0"/>
+          </a:p>
+        </p:txBody>
+      </p:sp>
+      <p:sp>
+        <p:nvSpPr>
+          <p:cNvPr id="14" name="Text 11"/>
+          <p:cNvSpPr txBox="1"/>
+          <p:nvPr/>
+        </p:nvSpPr>
+        <p:spPr>
+          <a:xfrm>
+            <a:off x="6995160" y="2514600"/>
+            <a:ext cx="4434840" cy="1005840"/>
+          </a:xfrm>
+          <a:prstGeom prst="rect">
+            <a:avLst/>
+          </a:prstGeom>
+          <a:noFill/>
+          <a:ln/>
+        </p:spPr>
+        <p:txBody>
+          <a:bodyPr wrap="square" lIns="0" tIns="0" rIns="0" bIns="0" rtlCol="0" anchor="t"/>
+          <a:lstStyle/>
+          <a:p>
+            <a:pPr indent="0" marL="0">
+              <a:buNone/>
+            </a:pPr>
+            <a:r>
+              <a:rPr lang="en-US" sz="1350" dirty="0">
+                <a:solidFill>
+                  <a:srgbClr val="55555C"/>
+                </a:solidFill>
+              </a:rPr>
+              <a:t>The planner's question against every note, on the server's CPU. Recent notes count more, and a newer note replaces an older one.</a:t>
+            </a:r>
+            <a:endParaRPr lang="en-US" sz="1350" dirty="0"/>
+          </a:p>
+        </p:txBody>
+      </p:sp>
+      <p:sp>
+        <p:nvSpPr>
+          <p:cNvPr id="15" name="Shape 12"/>
+          <p:cNvSpPr/>
+          <p:nvPr/>
+        </p:nvSpPr>
+        <p:spPr>
+          <a:xfrm>
+            <a:off x="548640" y="3931920"/>
+            <a:ext cx="5440680" cy="1920240"/>
+          </a:xfrm>
+          <a:prstGeom prst="roundRect">
+            <a:avLst>
+              <a:gd name="adj" fmla="val 5714"/>
             </a:avLst>
           </a:prstGeom>
           <a:solidFill>
@@ -37371,90 +37726,151 @@
       </p:sp>
       <p:sp>
         <p:nvSpPr>
-          <p:cNvPr id="11" name="Text 8"/>
-          <p:cNvSpPr txBox="1"/>
-          <p:nvPr/>
-        </p:nvSpPr>
-        <p:spPr>
-          <a:xfrm>
-            <a:off x="960120" y="3218688"/>
-            <a:ext cx="4023360" cy="292608"/>
-          </a:xfrm>
-          <a:prstGeom prst="rect">
-            <a:avLst/>
-          </a:prstGeom>
-          <a:noFill/>
-          <a:ln/>
-        </p:spPr>
-        <p:txBody>
-          <a:bodyPr wrap="square" lIns="0" tIns="0" rIns="0" bIns="0" rtlCol="0" anchor="t"/>
-          <a:lstStyle/>
-          <a:p>
-            <a:pPr indent="0" marL="0">
-              <a:buNone/>
-            </a:pPr>
-            <a:r>
-              <a:rPr lang="en-US" sz="1400" b="1" dirty="0">
+          <p:cNvPr id="16" name="Shape 13"/>
+          <p:cNvSpPr/>
+          <p:nvPr/>
+        </p:nvSpPr>
+        <p:spPr>
+          <a:xfrm>
+            <a:off x="777240" y="4160520"/>
+            <a:ext cx="420624" cy="420624"/>
+          </a:xfrm>
+          <a:prstGeom prst="ellipse">
+            <a:avLst/>
+          </a:prstGeom>
+          <a:solidFill>
+            <a:srgbClr val="0A7F44"/>
+          </a:solidFill>
+          <a:ln w="12700">
+            <a:solidFill>
+              <a:srgbClr val="0A7F44"/>
+            </a:solidFill>
+            <a:prstDash val="solid"/>
+          </a:ln>
+        </p:spPr>
+      </p:sp>
+      <p:sp>
+        <p:nvSpPr>
+          <p:cNvPr id="17" name="Text 14"/>
+          <p:cNvSpPr txBox="1"/>
+          <p:nvPr/>
+        </p:nvSpPr>
+        <p:spPr>
+          <a:xfrm>
+            <a:off x="777240" y="4160520"/>
+            <a:ext cx="420624" cy="420624"/>
+          </a:xfrm>
+          <a:prstGeom prst="rect">
+            <a:avLst/>
+          </a:prstGeom>
+          <a:noFill/>
+          <a:ln/>
+        </p:spPr>
+        <p:txBody>
+          <a:bodyPr wrap="square" lIns="0" tIns="0" rIns="0" bIns="0" rtlCol="0" anchor="ctr"/>
+          <a:lstStyle/>
+          <a:p>
+            <a:pPr algn="ctr" indent="0" marL="0">
+              <a:buNone/>
+            </a:pPr>
+            <a:r>
+              <a:rPr lang="en-US" sz="1500" b="1" dirty="0">
+                <a:solidFill>
+                  <a:srgbClr val="FFFFFF"/>
+                </a:solidFill>
+              </a:rPr>
+              <a:t>3</a:t>
+            </a:r>
+            <a:endParaRPr lang="en-US" sz="1500" dirty="0"/>
+          </a:p>
+        </p:txBody>
+      </p:sp>
+      <p:sp>
+        <p:nvSpPr>
+          <p:cNvPr id="18" name="Text 15"/>
+          <p:cNvSpPr txBox="1"/>
+          <p:nvPr/>
+        </p:nvSpPr>
+        <p:spPr>
+          <a:xfrm>
+            <a:off x="1371600" y="4133088"/>
+            <a:ext cx="4434840" cy="457200"/>
+          </a:xfrm>
+          <a:prstGeom prst="rect">
+            <a:avLst/>
+          </a:prstGeom>
+          <a:noFill/>
+          <a:ln/>
+        </p:spPr>
+        <p:txBody>
+          <a:bodyPr wrap="square" lIns="0" tIns="0" rIns="0" bIns="0" rtlCol="0" anchor="ctr"/>
+          <a:lstStyle/>
+          <a:p>
+            <a:pPr indent="0" marL="0">
+              <a:buNone/>
+            </a:pPr>
+            <a:r>
+              <a:rPr lang="en-US" sz="1700" b="1" dirty="0">
                 <a:solidFill>
                   <a:srgbClr val="0A0A0B"/>
                 </a:solidFill>
               </a:rPr>
-              <a:t>No games after 22:00 on work nights</a:t>
-            </a:r>
-            <a:endParaRPr lang="en-US" sz="1400" dirty="0"/>
-          </a:p>
-        </p:txBody>
-      </p:sp>
-      <p:sp>
-        <p:nvSpPr>
-          <p:cNvPr id="12" name="Text 9"/>
-          <p:cNvSpPr txBox="1"/>
-          <p:nvPr/>
-        </p:nvSpPr>
-        <p:spPr>
-          <a:xfrm>
-            <a:off x="960120" y="3566160"/>
-            <a:ext cx="4023360" cy="256032"/>
-          </a:xfrm>
-          <a:prstGeom prst="rect">
-            <a:avLst/>
-          </a:prstGeom>
-          <a:noFill/>
-          <a:ln/>
-        </p:spPr>
-        <p:txBody>
-          <a:bodyPr wrap="square" lIns="0" tIns="0" rIns="0" bIns="0" rtlCol="0" anchor="t"/>
-          <a:lstStyle/>
-          <a:p>
-            <a:pPr indent="0" marL="0">
-              <a:buNone/>
-            </a:pPr>
-            <a:r>
-              <a:rPr lang="en-US" sz="1050" dirty="0">
-                <a:solidFill>
-                  <a:srgbClr val="0A7F44"/>
-                </a:solidFill>
-              </a:rPr>
-              <a:t>You said, Thu 22 Oct</a:t>
-            </a:r>
-            <a:endParaRPr lang="en-US" sz="1050" dirty="0"/>
-          </a:p>
-        </p:txBody>
-      </p:sp>
-      <p:sp>
-        <p:nvSpPr>
-          <p:cNvPr id="13" name="Shape 10"/>
+              <a:t>Rules decided by code, each citing its notes</a:t>
+            </a:r>
+            <a:endParaRPr lang="en-US" sz="1700" dirty="0"/>
+          </a:p>
+        </p:txBody>
+      </p:sp>
+      <p:sp>
+        <p:nvSpPr>
+          <p:cNvPr id="19" name="Text 16"/>
+          <p:cNvSpPr txBox="1"/>
+          <p:nvPr/>
+        </p:nvSpPr>
+        <p:spPr>
+          <a:xfrm>
+            <a:off x="1371600" y="4663440"/>
+            <a:ext cx="4434840" cy="1005840"/>
+          </a:xfrm>
+          <a:prstGeom prst="rect">
+            <a:avLst/>
+          </a:prstGeom>
+          <a:noFill/>
+          <a:ln/>
+        </p:spPr>
+        <p:txBody>
+          <a:bodyPr wrap="square" lIns="0" tIns="0" rIns="0" bIns="0" rtlCol="0" anchor="t"/>
+          <a:lstStyle/>
+          <a:p>
+            <a:pPr indent="0" marL="0">
+              <a:buNone/>
+            </a:pPr>
+            <a:r>
+              <a:rPr lang="en-US" sz="1350" dirty="0">
+                <a:solidFill>
+                  <a:srgbClr val="55555C"/>
+                </a:solidFill>
+              </a:rPr>
+              <a:t>Doubles first, no late games, someone left out, one game fewer. Each limit must cite a real note, checked by code.</a:t>
+            </a:r>
+            <a:endParaRPr lang="en-US" sz="1350" dirty="0"/>
+          </a:p>
+        </p:txBody>
+      </p:sp>
+      <p:sp>
+        <p:nvSpPr>
+          <p:cNvPr id="20" name="Shape 17"/>
           <p:cNvSpPr/>
           <p:nvPr/>
         </p:nvSpPr>
         <p:spPr>
           <a:xfrm>
-            <a:off x="777240" y="4059936"/>
-            <a:ext cx="4389120" cy="786384"/>
+            <a:off x="6172200" y="3931920"/>
+            <a:ext cx="5440680" cy="1920240"/>
           </a:xfrm>
           <a:prstGeom prst="roundRect">
             <a:avLst>
-              <a:gd name="adj" fmla="val 13953"/>
+              <a:gd name="adj" fmla="val 5714"/>
             </a:avLst>
           </a:prstGeom>
           <a:solidFill>
@@ -37470,185 +37886,14 @@
       </p:sp>
       <p:sp>
         <p:nvSpPr>
-          <p:cNvPr id="14" name="Text 11"/>
-          <p:cNvSpPr txBox="1"/>
-          <p:nvPr/>
-        </p:nvSpPr>
-        <p:spPr>
-          <a:xfrm>
-            <a:off x="960120" y="4151376"/>
-            <a:ext cx="4023360" cy="292608"/>
-          </a:xfrm>
-          <a:prstGeom prst="rect">
-            <a:avLst/>
-          </a:prstGeom>
-          <a:noFill/>
-          <a:ln/>
-        </p:spPr>
-        <p:txBody>
-          <a:bodyPr wrap="square" lIns="0" tIns="0" rIns="0" bIns="0" rtlCol="0" anchor="t"/>
-          <a:lstStyle/>
-          <a:p>
-            <a:pPr indent="0" marL="0">
-              <a:buNone/>
-            </a:pPr>
-            <a:r>
-              <a:rPr lang="en-US" sz="1400" b="1" dirty="0">
-                <a:solidFill>
-                  <a:srgbClr val="0A0A0B"/>
-                </a:solidFill>
-              </a:rPr>
-              <a:t>Leave Tomás out for now</a:t>
-            </a:r>
-            <a:endParaRPr lang="en-US" sz="1400" dirty="0"/>
-          </a:p>
-        </p:txBody>
-      </p:sp>
-      <p:sp>
-        <p:nvSpPr>
-          <p:cNvPr id="15" name="Text 12"/>
-          <p:cNvSpPr txBox="1"/>
-          <p:nvPr/>
-        </p:nvSpPr>
-        <p:spPr>
-          <a:xfrm>
-            <a:off x="960120" y="4498848"/>
-            <a:ext cx="4023360" cy="256032"/>
-          </a:xfrm>
-          <a:prstGeom prst="rect">
-            <a:avLst/>
-          </a:prstGeom>
-          <a:noFill/>
-          <a:ln/>
-        </p:spPr>
-        <p:txBody>
-          <a:bodyPr wrap="square" lIns="0" tIns="0" rIns="0" bIns="0" rtlCol="0" anchor="t"/>
-          <a:lstStyle/>
-          <a:p>
-            <a:pPr indent="0" marL="0">
-              <a:buNone/>
-            </a:pPr>
-            <a:r>
-              <a:rPr lang="en-US" sz="1050" dirty="0">
-                <a:solidFill>
-                  <a:srgbClr val="0A7F44"/>
-                </a:solidFill>
-              </a:rPr>
-              <a:t>You said, Fri 23 Oct</a:t>
-            </a:r>
-            <a:endParaRPr lang="en-US" sz="1050" dirty="0"/>
-          </a:p>
-        </p:txBody>
-      </p:sp>
-      <p:sp>
-        <p:nvSpPr>
-          <p:cNvPr id="16" name="Shape 13"/>
+          <p:cNvPr id="21" name="Shape 18"/>
           <p:cNvSpPr/>
           <p:nvPr/>
         </p:nvSpPr>
         <p:spPr>
           <a:xfrm>
-            <a:off x="777240" y="4992624"/>
-            <a:ext cx="4389120" cy="786384"/>
-          </a:xfrm>
-          <a:prstGeom prst="roundRect">
-            <a:avLst>
-              <a:gd name="adj" fmla="val 13953"/>
-            </a:avLst>
-          </a:prstGeom>
-          <a:solidFill>
-            <a:srgbClr val="F6F7F8"/>
-          </a:solidFill>
-          <a:ln w="12700">
-            <a:solidFill>
-              <a:srgbClr val="F6F7F8"/>
-            </a:solidFill>
-            <a:prstDash val="solid"/>
-          </a:ln>
-        </p:spPr>
-      </p:sp>
-      <p:sp>
-        <p:nvSpPr>
-          <p:cNvPr id="17" name="Text 14"/>
-          <p:cNvSpPr txBox="1"/>
-          <p:nvPr/>
-        </p:nvSpPr>
-        <p:spPr>
-          <a:xfrm>
-            <a:off x="960120" y="5084064"/>
-            <a:ext cx="4023360" cy="292608"/>
-          </a:xfrm>
-          <a:prstGeom prst="rect">
-            <a:avLst/>
-          </a:prstGeom>
-          <a:noFill/>
-          <a:ln/>
-        </p:spPr>
-        <p:txBody>
-          <a:bodyPr wrap="square" lIns="0" tIns="0" rIns="0" bIns="0" rtlCol="0" anchor="t"/>
-          <a:lstStyle/>
-          <a:p>
-            <a:pPr indent="0" marL="0">
-              <a:buNone/>
-            </a:pPr>
-            <a:r>
-              <a:rPr lang="en-US" sz="1400" b="1" dirty="0">
-                <a:solidFill>
-                  <a:srgbClr val="0A0A0B"/>
-                </a:solidFill>
-              </a:rPr>
-              <a:t>One game fewer this week</a:t>
-            </a:r>
-            <a:endParaRPr lang="en-US" sz="1400" dirty="0"/>
-          </a:p>
-        </p:txBody>
-      </p:sp>
-      <p:sp>
-        <p:nvSpPr>
-          <p:cNvPr id="18" name="Text 15"/>
-          <p:cNvSpPr txBox="1"/>
-          <p:nvPr/>
-        </p:nvSpPr>
-        <p:spPr>
-          <a:xfrm>
-            <a:off x="960120" y="5431536"/>
-            <a:ext cx="4023360" cy="256032"/>
-          </a:xfrm>
-          <a:prstGeom prst="rect">
-            <a:avLst/>
-          </a:prstGeom>
-          <a:noFill/>
-          <a:ln/>
-        </p:spPr>
-        <p:txBody>
-          <a:bodyPr wrap="square" lIns="0" tIns="0" rIns="0" bIns="0" rtlCol="0" anchor="t"/>
-          <a:lstStyle/>
-          <a:p>
-            <a:pPr indent="0" marL="0">
-              <a:buNone/>
-            </a:pPr>
-            <a:r>
-              <a:rPr lang="en-US" sz="1050" dirty="0">
-                <a:solidFill>
-                  <a:srgbClr val="0A7F44"/>
-                </a:solidFill>
-              </a:rPr>
-              <a:t>Your games and health app</a:t>
-            </a:r>
-            <a:endParaRPr lang="en-US" sz="1050" dirty="0"/>
-          </a:p>
-        </p:txBody>
-      </p:sp>
-      <p:sp>
-        <p:nvSpPr>
-          <p:cNvPr id="19" name="Shape 16"/>
-          <p:cNvSpPr/>
-          <p:nvPr/>
-        </p:nvSpPr>
-        <p:spPr>
-          <a:xfrm>
-            <a:off x="5669280" y="1783080"/>
-            <a:ext cx="384048" cy="384048"/>
+            <a:off x="6400800" y="4160520"/>
+            <a:ext cx="420624" cy="420624"/>
           </a:xfrm>
           <a:prstGeom prst="ellipse">
             <a:avLst/>
@@ -37666,14 +37911,14 @@
       </p:sp>
       <p:sp>
         <p:nvSpPr>
-          <p:cNvPr id="20" name="Text 17"/>
-          <p:cNvSpPr txBox="1"/>
-          <p:nvPr/>
-        </p:nvSpPr>
-        <p:spPr>
-          <a:xfrm>
-            <a:off x="5669280" y="1783080"/>
-            <a:ext cx="384048" cy="384048"/>
+          <p:cNvPr id="22" name="Text 19"/>
+          <p:cNvSpPr txBox="1"/>
+          <p:nvPr/>
+        </p:nvSpPr>
+        <p:spPr>
+          <a:xfrm>
+            <a:off x="6400800" y="4160520"/>
+            <a:ext cx="420624" cy="420624"/>
           </a:xfrm>
           <a:prstGeom prst="rect">
             <a:avLst/>
@@ -37689,485 +37934,86 @@
               <a:buNone/>
             </a:pPr>
             <a:r>
-              <a:rPr lang="en-US" sz="1400" b="1" dirty="0">
+              <a:rPr lang="en-US" sz="1500" b="1" dirty="0">
                 <a:solidFill>
                   <a:srgbClr val="FFFFFF"/>
                 </a:solidFill>
               </a:rPr>
-              <a:t>1</a:t>
-            </a:r>
-            <a:endParaRPr lang="en-US" sz="1400" dirty="0"/>
-          </a:p>
-        </p:txBody>
-      </p:sp>
-      <p:sp>
-        <p:nvSpPr>
-          <p:cNvPr id="21" name="Text 18"/>
-          <p:cNvSpPr txBox="1"/>
-          <p:nvPr/>
-        </p:nvSpPr>
-        <p:spPr>
-          <a:xfrm>
-            <a:off x="6217920" y="1755648"/>
-            <a:ext cx="5394960" cy="292608"/>
-          </a:xfrm>
-          <a:prstGeom prst="rect">
-            <a:avLst/>
-          </a:prstGeom>
-          <a:noFill/>
-          <a:ln/>
-        </p:spPr>
-        <p:txBody>
-          <a:bodyPr wrap="square" lIns="0" tIns="0" rIns="0" bIns="0" rtlCol="0" anchor="t"/>
-          <a:lstStyle/>
-          <a:p>
-            <a:pPr indent="0" marL="0">
-              <a:buNone/>
-            </a:pPr>
-            <a:r>
-              <a:rPr lang="en-US" sz="1500" b="1" dirty="0">
+              <a:t>4</a:t>
+            </a:r>
+            <a:endParaRPr lang="en-US" sz="1500" dirty="0"/>
+          </a:p>
+        </p:txBody>
+      </p:sp>
+      <p:sp>
+        <p:nvSpPr>
+          <p:cNvPr id="23" name="Text 20"/>
+          <p:cNvSpPr txBox="1"/>
+          <p:nvPr/>
+        </p:nvSpPr>
+        <p:spPr>
+          <a:xfrm>
+            <a:off x="6995160" y="4133088"/>
+            <a:ext cx="4434840" cy="457200"/>
+          </a:xfrm>
+          <a:prstGeom prst="rect">
+            <a:avLst/>
+          </a:prstGeom>
+          <a:noFill/>
+          <a:ln/>
+        </p:spPr>
+        <p:txBody>
+          <a:bodyPr wrap="square" lIns="0" tIns="0" rIns="0" bIns="0" rtlCol="0" anchor="ctr"/>
+          <a:lstStyle/>
+          <a:p>
+            <a:pPr indent="0" marL="0">
+              <a:buNone/>
+            </a:pPr>
+            <a:r>
+              <a:rPr lang="en-US" sz="1700" b="1" dirty="0">
                 <a:solidFill>
                   <a:srgbClr val="0A0A0B"/>
                 </a:solidFill>
               </a:rPr>
-              <a:t>Notes from what you said and what was recorded</a:t>
-            </a:r>
-            <a:endParaRPr lang="en-US" sz="1500" dirty="0"/>
-          </a:p>
-        </p:txBody>
-      </p:sp>
-      <p:sp>
-        <p:nvSpPr>
-          <p:cNvPr id="22" name="Text 19"/>
-          <p:cNvSpPr txBox="1"/>
-          <p:nvPr/>
-        </p:nvSpPr>
-        <p:spPr>
-          <a:xfrm>
-            <a:off x="6217920" y="2057400"/>
-            <a:ext cx="5394960" cy="731520"/>
-          </a:xfrm>
-          <a:prstGeom prst="rect">
-            <a:avLst/>
-          </a:prstGeom>
-          <a:noFill/>
-          <a:ln/>
-        </p:spPr>
-        <p:txBody>
-          <a:bodyPr wrap="square" lIns="0" tIns="0" rIns="0" bIns="0" rtlCol="0" anchor="t"/>
-          <a:lstStyle/>
-          <a:p>
-            <a:pPr indent="0" marL="0">
-              <a:buNone/>
-            </a:pPr>
-            <a:r>
-              <a:rPr lang="en-US" sz="1200" dirty="0">
+              <a:t>The planner gets the same context</a:t>
+            </a:r>
+            <a:endParaRPr lang="en-US" sz="1700" dirty="0"/>
+          </a:p>
+        </p:txBody>
+      </p:sp>
+      <p:sp>
+        <p:nvSpPr>
+          <p:cNvPr id="24" name="Text 21"/>
+          <p:cNvSpPr txBox="1"/>
+          <p:nvPr/>
+        </p:nvSpPr>
+        <p:spPr>
+          <a:xfrm>
+            <a:off x="6995160" y="4663440"/>
+            <a:ext cx="4434840" cy="1005840"/>
+          </a:xfrm>
+          <a:prstGeom prst="rect">
+            <a:avLst/>
+          </a:prstGeom>
+          <a:noFill/>
+          <a:ln/>
+        </p:spPr>
+        <p:txBody>
+          <a:bodyPr wrap="square" lIns="0" tIns="0" rIns="0" bIns="0" rtlCol="0" anchor="t"/>
+          <a:lstStyle/>
+          <a:p>
+            <a:pPr indent="0" marL="0">
+              <a:buNone/>
+            </a:pPr>
+            <a:r>
+              <a:rPr lang="en-US" sz="1350" dirty="0">
                 <a:solidFill>
                   <a:srgbClr val="55555C"/>
                 </a:solidFill>
               </a:rPr>
-              <a:t>Your words from Messenger, a voice note or the app; your games and your health app; what you told your agent before.</a:t>
-            </a:r>
-            <a:endParaRPr lang="en-US" sz="1200" dirty="0"/>
-          </a:p>
-        </p:txBody>
-      </p:sp>
-      <p:sp>
-        <p:nvSpPr>
-          <p:cNvPr id="23" name="Shape 20"/>
-          <p:cNvSpPr/>
-          <p:nvPr/>
-        </p:nvSpPr>
-        <p:spPr>
-          <a:xfrm>
-            <a:off x="5669280" y="2862072"/>
-            <a:ext cx="384048" cy="384048"/>
-          </a:xfrm>
-          <a:prstGeom prst="ellipse">
-            <a:avLst/>
-          </a:prstGeom>
-          <a:solidFill>
-            <a:srgbClr val="0A7F44"/>
-          </a:solidFill>
-          <a:ln w="12700">
-            <a:solidFill>
-              <a:srgbClr val="0A7F44"/>
-            </a:solidFill>
-            <a:prstDash val="solid"/>
-          </a:ln>
-        </p:spPr>
-      </p:sp>
-      <p:sp>
-        <p:nvSpPr>
-          <p:cNvPr id="24" name="Text 21"/>
-          <p:cNvSpPr txBox="1"/>
-          <p:nvPr/>
-        </p:nvSpPr>
-        <p:spPr>
-          <a:xfrm>
-            <a:off x="5669280" y="2862072"/>
-            <a:ext cx="384048" cy="384048"/>
-          </a:xfrm>
-          <a:prstGeom prst="rect">
-            <a:avLst/>
-          </a:prstGeom>
-          <a:noFill/>
-          <a:ln/>
-        </p:spPr>
-        <p:txBody>
-          <a:bodyPr wrap="square" lIns="0" tIns="0" rIns="0" bIns="0" rtlCol="0" anchor="ctr"/>
-          <a:lstStyle/>
-          <a:p>
-            <a:pPr algn="ctr" indent="0" marL="0">
-              <a:buNone/>
-            </a:pPr>
-            <a:r>
-              <a:rPr lang="en-US" sz="1400" b="1" dirty="0">
-                <a:solidFill>
-                  <a:srgbClr val="FFFFFF"/>
-                </a:solidFill>
-              </a:rPr>
-              <a:t>2</a:t>
-            </a:r>
-            <a:endParaRPr lang="en-US" sz="1400" dirty="0"/>
-          </a:p>
-        </p:txBody>
-      </p:sp>
-      <p:sp>
-        <p:nvSpPr>
-          <p:cNvPr id="25" name="Text 22"/>
-          <p:cNvSpPr txBox="1"/>
-          <p:nvPr/>
-        </p:nvSpPr>
-        <p:spPr>
-          <a:xfrm>
-            <a:off x="6217920" y="2834640"/>
-            <a:ext cx="5394960" cy="292608"/>
-          </a:xfrm>
-          <a:prstGeom prst="rect">
-            <a:avLst/>
-          </a:prstGeom>
-          <a:noFill/>
-          <a:ln/>
-        </p:spPr>
-        <p:txBody>
-          <a:bodyPr wrap="square" lIns="0" tIns="0" rIns="0" bIns="0" rtlCol="0" anchor="t"/>
-          <a:lstStyle/>
-          <a:p>
-            <a:pPr indent="0" marL="0">
-              <a:buNone/>
-            </a:pPr>
-            <a:r>
-              <a:rPr lang="en-US" sz="1500" b="1" dirty="0">
-                <a:solidFill>
-                  <a:srgbClr val="0A0A0B"/>
-                </a:solidFill>
-              </a:rPr>
-              <a:t>Found by meaning with Meta's DRAMA</a:t>
-            </a:r>
-            <a:endParaRPr lang="en-US" sz="1500" dirty="0"/>
-          </a:p>
-        </p:txBody>
-      </p:sp>
-      <p:sp>
-        <p:nvSpPr>
-          <p:cNvPr id="26" name="Text 23"/>
-          <p:cNvSpPr txBox="1"/>
-          <p:nvPr/>
-        </p:nvSpPr>
-        <p:spPr>
-          <a:xfrm>
-            <a:off x="6217920" y="3136392"/>
-            <a:ext cx="5394960" cy="731520"/>
-          </a:xfrm>
-          <a:prstGeom prst="rect">
-            <a:avLst/>
-          </a:prstGeom>
-          <a:noFill/>
-          <a:ln/>
-        </p:spPr>
-        <p:txBody>
-          <a:bodyPr wrap="square" lIns="0" tIns="0" rIns="0" bIns="0" rtlCol="0" anchor="t"/>
-          <a:lstStyle/>
-          <a:p>
-            <a:pPr indent="0" marL="0">
-              <a:buNone/>
-            </a:pPr>
-            <a:r>
-              <a:rPr lang="en-US" sz="1200" dirty="0">
-                <a:solidFill>
-                  <a:srgbClr val="55555C"/>
-                </a:solidFill>
-              </a:rPr>
-              <a:t>The planner's question against every note, on the server's CPU. Recent notes count more, and a newer note replaces an older one.</a:t>
-            </a:r>
-            <a:endParaRPr lang="en-US" sz="1200" dirty="0"/>
-          </a:p>
-        </p:txBody>
-      </p:sp>
-      <p:sp>
-        <p:nvSpPr>
-          <p:cNvPr id="27" name="Shape 24"/>
-          <p:cNvSpPr/>
-          <p:nvPr/>
-        </p:nvSpPr>
-        <p:spPr>
-          <a:xfrm>
-            <a:off x="5669280" y="3941064"/>
-            <a:ext cx="384048" cy="384048"/>
-          </a:xfrm>
-          <a:prstGeom prst="ellipse">
-            <a:avLst/>
-          </a:prstGeom>
-          <a:solidFill>
-            <a:srgbClr val="0A7F44"/>
-          </a:solidFill>
-          <a:ln w="12700">
-            <a:solidFill>
-              <a:srgbClr val="0A7F44"/>
-            </a:solidFill>
-            <a:prstDash val="solid"/>
-          </a:ln>
-        </p:spPr>
-      </p:sp>
-      <p:sp>
-        <p:nvSpPr>
-          <p:cNvPr id="28" name="Text 25"/>
-          <p:cNvSpPr txBox="1"/>
-          <p:nvPr/>
-        </p:nvSpPr>
-        <p:spPr>
-          <a:xfrm>
-            <a:off x="5669280" y="3941064"/>
-            <a:ext cx="384048" cy="384048"/>
-          </a:xfrm>
-          <a:prstGeom prst="rect">
-            <a:avLst/>
-          </a:prstGeom>
-          <a:noFill/>
-          <a:ln/>
-        </p:spPr>
-        <p:txBody>
-          <a:bodyPr wrap="square" lIns="0" tIns="0" rIns="0" bIns="0" rtlCol="0" anchor="ctr"/>
-          <a:lstStyle/>
-          <a:p>
-            <a:pPr algn="ctr" indent="0" marL="0">
-              <a:buNone/>
-            </a:pPr>
-            <a:r>
-              <a:rPr lang="en-US" sz="1400" b="1" dirty="0">
-                <a:solidFill>
-                  <a:srgbClr val="FFFFFF"/>
-                </a:solidFill>
-              </a:rPr>
-              <a:t>3</a:t>
-            </a:r>
-            <a:endParaRPr lang="en-US" sz="1400" dirty="0"/>
-          </a:p>
-        </p:txBody>
-      </p:sp>
-      <p:sp>
-        <p:nvSpPr>
-          <p:cNvPr id="29" name="Text 26"/>
-          <p:cNvSpPr txBox="1"/>
-          <p:nvPr/>
-        </p:nvSpPr>
-        <p:spPr>
-          <a:xfrm>
-            <a:off x="6217920" y="3913632"/>
-            <a:ext cx="5394960" cy="292608"/>
-          </a:xfrm>
-          <a:prstGeom prst="rect">
-            <a:avLst/>
-          </a:prstGeom>
-          <a:noFill/>
-          <a:ln/>
-        </p:spPr>
-        <p:txBody>
-          <a:bodyPr wrap="square" lIns="0" tIns="0" rIns="0" bIns="0" rtlCol="0" anchor="t"/>
-          <a:lstStyle/>
-          <a:p>
-            <a:pPr indent="0" marL="0">
-              <a:buNone/>
-            </a:pPr>
-            <a:r>
-              <a:rPr lang="en-US" sz="1500" b="1" dirty="0">
-                <a:solidFill>
-                  <a:srgbClr val="0A0A0B"/>
-                </a:solidFill>
-              </a:rPr>
-              <a:t>Rules decided by code, each citing its notes</a:t>
-            </a:r>
-            <a:endParaRPr lang="en-US" sz="1500" dirty="0"/>
-          </a:p>
-        </p:txBody>
-      </p:sp>
-      <p:sp>
-        <p:nvSpPr>
-          <p:cNvPr id="30" name="Text 27"/>
-          <p:cNvSpPr txBox="1"/>
-          <p:nvPr/>
-        </p:nvSpPr>
-        <p:spPr>
-          <a:xfrm>
-            <a:off x="6217920" y="4215384"/>
-            <a:ext cx="5394960" cy="731520"/>
-          </a:xfrm>
-          <a:prstGeom prst="rect">
-            <a:avLst/>
-          </a:prstGeom>
-          <a:noFill/>
-          <a:ln/>
-        </p:spPr>
-        <p:txBody>
-          <a:bodyPr wrap="square" lIns="0" tIns="0" rIns="0" bIns="0" rtlCol="0" anchor="t"/>
-          <a:lstStyle/>
-          <a:p>
-            <a:pPr indent="0" marL="0">
-              <a:buNone/>
-            </a:pPr>
-            <a:r>
-              <a:rPr lang="en-US" sz="1200" dirty="0">
-                <a:solidFill>
-                  <a:srgbClr val="55555C"/>
-                </a:solidFill>
-              </a:rPr>
-              <a:t>Doubles first, no late games, someone left out, one game fewer. Each limit must cite a real note, checked by code.</a:t>
-            </a:r>
-            <a:endParaRPr lang="en-US" sz="1200" dirty="0"/>
-          </a:p>
-        </p:txBody>
-      </p:sp>
-      <p:sp>
-        <p:nvSpPr>
-          <p:cNvPr id="31" name="Shape 28"/>
-          <p:cNvSpPr/>
-          <p:nvPr/>
-        </p:nvSpPr>
-        <p:spPr>
-          <a:xfrm>
-            <a:off x="5669280" y="5020056"/>
-            <a:ext cx="384048" cy="384048"/>
-          </a:xfrm>
-          <a:prstGeom prst="ellipse">
-            <a:avLst/>
-          </a:prstGeom>
-          <a:solidFill>
-            <a:srgbClr val="0A7F44"/>
-          </a:solidFill>
-          <a:ln w="12700">
-            <a:solidFill>
-              <a:srgbClr val="0A7F44"/>
-            </a:solidFill>
-            <a:prstDash val="solid"/>
-          </a:ln>
-        </p:spPr>
-      </p:sp>
-      <p:sp>
-        <p:nvSpPr>
-          <p:cNvPr id="32" name="Text 29"/>
-          <p:cNvSpPr txBox="1"/>
-          <p:nvPr/>
-        </p:nvSpPr>
-        <p:spPr>
-          <a:xfrm>
-            <a:off x="5669280" y="5020056"/>
-            <a:ext cx="384048" cy="384048"/>
-          </a:xfrm>
-          <a:prstGeom prst="rect">
-            <a:avLst/>
-          </a:prstGeom>
-          <a:noFill/>
-          <a:ln/>
-        </p:spPr>
-        <p:txBody>
-          <a:bodyPr wrap="square" lIns="0" tIns="0" rIns="0" bIns="0" rtlCol="0" anchor="ctr"/>
-          <a:lstStyle/>
-          <a:p>
-            <a:pPr algn="ctr" indent="0" marL="0">
-              <a:buNone/>
-            </a:pPr>
-            <a:r>
-              <a:rPr lang="en-US" sz="1400" b="1" dirty="0">
-                <a:solidFill>
-                  <a:srgbClr val="FFFFFF"/>
-                </a:solidFill>
-              </a:rPr>
-              <a:t>4</a:t>
-            </a:r>
-            <a:endParaRPr lang="en-US" sz="1400" dirty="0"/>
-          </a:p>
-        </p:txBody>
-      </p:sp>
-      <p:sp>
-        <p:nvSpPr>
-          <p:cNvPr id="33" name="Text 30"/>
-          <p:cNvSpPr txBox="1"/>
-          <p:nvPr/>
-        </p:nvSpPr>
-        <p:spPr>
-          <a:xfrm>
-            <a:off x="6217920" y="4992624"/>
-            <a:ext cx="5394960" cy="292608"/>
-          </a:xfrm>
-          <a:prstGeom prst="rect">
-            <a:avLst/>
-          </a:prstGeom>
-          <a:noFill/>
-          <a:ln/>
-        </p:spPr>
-        <p:txBody>
-          <a:bodyPr wrap="square" lIns="0" tIns="0" rIns="0" bIns="0" rtlCol="0" anchor="t"/>
-          <a:lstStyle/>
-          <a:p>
-            <a:pPr indent="0" marL="0">
-              <a:buNone/>
-            </a:pPr>
-            <a:r>
-              <a:rPr lang="en-US" sz="1500" b="1" dirty="0">
-                <a:solidFill>
-                  <a:srgbClr val="0A0A0B"/>
-                </a:solidFill>
-              </a:rPr>
-              <a:t>The planner gets the same context</a:t>
-            </a:r>
-            <a:endParaRPr lang="en-US" sz="1500" dirty="0"/>
-          </a:p>
-        </p:txBody>
-      </p:sp>
-      <p:sp>
-        <p:nvSpPr>
-          <p:cNvPr id="34" name="Text 31"/>
-          <p:cNvSpPr txBox="1"/>
-          <p:nvPr/>
-        </p:nvSpPr>
-        <p:spPr>
-          <a:xfrm>
-            <a:off x="6217920" y="5294376"/>
-            <a:ext cx="5394960" cy="731520"/>
-          </a:xfrm>
-          <a:prstGeom prst="rect">
-            <a:avLst/>
-          </a:prstGeom>
-          <a:noFill/>
-          <a:ln/>
-        </p:spPr>
-        <p:txBody>
-          <a:bodyPr wrap="square" lIns="0" tIns="0" rIns="0" bIns="0" rtlCol="0" anchor="t"/>
-          <a:lstStyle/>
-          <a:p>
-            <a:pPr indent="0" marL="0">
-              <a:buNone/>
-            </a:pPr>
-            <a:r>
-              <a:rPr lang="en-US" sz="1200" dirty="0">
-                <a:solidFill>
-                  <a:srgbClr val="55555C"/>
-                </a:solidFill>
-              </a:rPr>
               <a:t>The top notes and the cited limits go to Muse Glimmer when it plans your week. Scheduling only: no coaching, no medical advice.</a:t>
             </a:r>
-            <a:endParaRPr lang="en-US" sz="1200" dirty="0"/>
+            <a:endParaRPr lang="en-US" sz="1350" dirty="0"/>
           </a:p>
         </p:txBody>
       </p:sp>

--- a/video/deck/Serve_Meta_deck.pptx
+++ b/video/deck/Serve_Meta_deck.pptx
@@ -136,7 +136,7 @@
   <p:extLst>
     <p:ext uri="{521415D9-36F7-43E2-AB2F-B90AF26B5E84}">
       <p14:sectionLst xmlns:p14="http://schemas.microsoft.com/office/powerpoint/2010/main">
-        <p14:section name="Main" id="{1c9c243d-efa5-350e-3db7-a79f64e9ad62}">
+        <p14:section name="Main" id="{5e65c73b-4a96-0c40-296c-a7e9ff0a7fd9}">
           <p14:sldIdLst>
             <p14:sldId id="256"/>
             <p14:sldId id="257"/>
@@ -156,7 +156,7 @@
             <p14:sldId id="271"/>
           </p14:sldIdLst>
         </p14:section>
-        <p14:section name="Appendix" id="{dcead1cb-1169-c392-fc07-9091c38de41c}">
+        <p14:section name="Appendix" id="{40c8474d-aade-9d79-24ff-cca1100cf290}">
           <p14:sldIdLst>
             <p14:sldId id="272"/>
             <p14:sldId id="273"/>
@@ -36918,7 +36918,7 @@
                   <a:srgbClr val="55555C"/>
                 </a:solidFill>
               </a:rPr>
-              <a:t>Screens Google reviews before the judge reads them</a:t>
+              <a:t>Screens reviews first; Google's are listed with a link, not stored</a:t>
             </a:r>
             <a:endParaRPr lang="en-US" sz="1150" dirty="0"/>
           </a:p>

--- a/video/deck/Serve_Meta_deck.pptx
+++ b/video/deck/Serve_Meta_deck.pptx
@@ -138,7 +138,7 @@
   <p:extLst>
     <p:ext uri="{521415D9-36F7-43E2-AB2F-B90AF26B5E84}">
       <p14:sectionLst xmlns:p14="http://schemas.microsoft.com/office/powerpoint/2010/main">
-        <p14:section name="Main" id="{1623709f-4d9c-af42-cab3-aa046ece91c2}">
+        <p14:section name="Main" id="{b28bcd9e-df44-df65-9783-c1c558099d7a}">
           <p14:sldIdLst>
             <p14:sldId id="256"/>
             <p14:sldId id="257"/>
@@ -160,7 +160,7 @@
             <p14:sldId id="273"/>
           </p14:sldIdLst>
         </p14:section>
-        <p14:section name="Appendix" id="{a998a24a-5e35-4522-a46a-2b248636b91e}">
+        <p14:section name="Appendix" id="{e626fef6-7eb8-0403-62ec-959b096dc8b7}">
           <p14:sldIdLst>
             <p14:sldId id="274"/>
             <p14:sldId id="275"/>
@@ -2684,7 +2684,7 @@
           <a:p>
             <a:r>
               <a:rPr lang="en-US" dirty="0"/>
-              <a:t>Demo 影片 2:42 的三個畫面：Messenger 裡一個 yes 就訂好（端對端測試的真實回覆）、agent 在 Muse Glimmer 上協商（8 倍速，有標示）、找球場並由 Glimmer 判斷（15 倍速）。</a:t>
+              <a:t>Demo 影片 2:29，三幕：一、冷啟動：Leo 沒有帳號，點連結就加入，Mia 同時收到 Game on（並排）；二、agent 透過 A2A 協商，Hana 的 agent 提出反提案（Messenger 裡一個 yes 就訂好也在這一幕）；三、找球場：Prompt Guard 2 先過濾評論，再由 Muse Glimmer 判斷（14 倍速，有標示），然後是社團。</a:t>
             </a:r>
             <a:endParaRPr lang="en-US" dirty="0"/>
           </a:p>
@@ -12422,7 +12422,7 @@
                   <a:srgbClr val="0A0A0B"/>
                 </a:solidFill>
               </a:rPr>
-              <a:t>Every test and evaluation; the demo video (2:42)</a:t>
+              <a:t>Every test and evaluation; the demo video (2:29)</a:t>
             </a:r>
             <a:endParaRPr lang="en-US" sz="1200" dirty="0"/>
           </a:p>
@@ -12880,7 +12880,7 @@
                   <a:srgbClr val="0A7F44"/>
                 </a:solidFill>
               </a:rPr>
-              <a:t>DEMO · 25% · THE VIDEO, 2:42</a:t>
+              <a:t>DEMO · 25% · THE VIDEO, 2:29</a:t>
             </a:r>
             <a:endParaRPr lang="en-US" sz="1300" dirty="0"/>
           </a:p>
@@ -12918,7 +12918,7 @@
                   <a:srgbClr val="0A0A0B"/>
                 </a:solidFill>
               </a:rPr>
-              <a:t>What the video shows, in the running app</a:t>
+              <a:t>Three acts, all in the running app</a:t>
             </a:r>
             <a:endParaRPr lang="en-US" sz="3200" dirty="0"/>
           </a:p>
@@ -13027,7 +13027,7 @@
                   <a:srgbClr val="FFFFFF"/>
                 </a:solidFill>
               </a:rPr>
-              <a:t>0:20</a:t>
+              <a:t>0:41</a:t>
             </a:r>
             <a:endParaRPr lang="en-US" sz="1100" dirty="0"/>
           </a:p>
@@ -13063,7 +13063,7 @@
                   <a:srgbClr val="0A0A0B"/>
                 </a:solidFill>
               </a:rPr>
-              <a:t>One yes in Messenger, and the game is booked (real replies from the end-to-end test)</a:t>
+              <a:t>Act 1 · cold start: Leo has no account, the link joins him, and Mia hears "Game on" at once</a:t>
             </a:r>
             <a:endParaRPr lang="en-US" sz="1250" dirty="0"/>
           </a:p>
@@ -13172,7 +13172,7 @@
                   <a:srgbClr val="FFFFFF"/>
                 </a:solidFill>
               </a:rPr>
-              <a:t>0:55</a:t>
+              <a:t>1:15</a:t>
             </a:r>
             <a:endParaRPr lang="en-US" sz="1100" dirty="0"/>
           </a:p>
@@ -13208,7 +13208,7 @@
                   <a:srgbClr val="0A0A0B"/>
                 </a:solidFill>
               </a:rPr>
-              <a:t>Your agent and three players' agents negotiate on Muse Glimmer (shown at 8×, labelled)</a:t>
+              <a:t>Act 2 · A2A: Hana's agent makes a real counter-offer; one yes in Messenger books it (end-to-end test)</a:t>
             </a:r>
             <a:endParaRPr lang="en-US" sz="1250" dirty="0"/>
           </a:p>
@@ -13317,7 +13317,7 @@
                   <a:srgbClr val="FFFFFF"/>
                 </a:solidFill>
               </a:rPr>
-              <a:t>1:08</a:t>
+              <a:t>1:25</a:t>
             </a:r>
             <a:endParaRPr lang="en-US" sz="1100" dirty="0"/>
           </a:p>
@@ -13353,7 +13353,7 @@
                   <a:srgbClr val="0A0A0B"/>
                 </a:solidFill>
               </a:rPr>
-              <a:t>Courts found and judged with Prompt Guard 2 and Glimmer (shown at 15×, labelled)</a:t>
+              <a:t>Act 3 · courts: Prompt Guard 2 screens reviews, then Muse Glimmer judges (shown at 14×, labelled)</a:t>
             </a:r>
             <a:endParaRPr lang="en-US" sz="1250" dirty="0"/>
           </a:p>
@@ -13827,7 +13827,7 @@
                   <a:srgbClr val="0A0A0B"/>
                 </a:solidFill>
               </a:rPr>
-              <a:t>Built during the hackathon, Oct 27 – Nov 4, 2026 · demo video 2:42 · what is new and what is not: slide 16</a:t>
+              <a:t>Built during the hackathon, Oct 27 – Nov 4, 2026 · demo video 2:29 · what is new and what is not: slide 16</a:t>
             </a:r>
             <a:endParaRPr lang="en-US" sz="1300" dirty="0"/>
           </a:p>

--- a/video/deck/Serve_Meta_deck.pptx
+++ b/video/deck/Serve_Meta_deck.pptx
@@ -138,7 +138,7 @@
   <p:extLst>
     <p:ext uri="{521415D9-36F7-43E2-AB2F-B90AF26B5E84}">
       <p14:sectionLst xmlns:p14="http://schemas.microsoft.com/office/powerpoint/2010/main">
-        <p14:section name="Main" id="{b28bcd9e-df44-df65-9783-c1c558099d7a}">
+        <p14:section name="Main" id="{0d311172-28c9-c022-642d-b1b314219dd9}">
           <p14:sldIdLst>
             <p14:sldId id="256"/>
             <p14:sldId id="257"/>
@@ -160,7 +160,7 @@
             <p14:sldId id="273"/>
           </p14:sldIdLst>
         </p14:section>
-        <p14:section name="Appendix" id="{e626fef6-7eb8-0403-62ec-959b096dc8b7}">
+        <p14:section name="Appendix" id="{7d6d9c37-396f-7795-9db7-315c8d649595}">
           <p14:sldIdLst>
             <p14:sldId id="274"/>
             <p14:sldId id="275"/>
@@ -12440,7 +12440,7 @@
                   <a:srgbClr val="0A0A0B"/>
                 </a:solidFill>
               </a:rPr>
-              <a:t>Day 1's work moved into this repository on Oct 28 (day 2); over 900 commits since</a:t>
+              <a:t>Started Oct 28 (day 2 of the hackathon); over 900 commits since</a:t>
             </a:r>
             <a:endParaRPr lang="en-US" sz="1200" dirty="0"/>
           </a:p>
@@ -13827,7 +13827,7 @@
                   <a:srgbClr val="0A0A0B"/>
                 </a:solidFill>
               </a:rPr>
-              <a:t>Built during the hackathon, Oct 27 – Nov 4, 2026 · demo video 2:29 · what is new and what is not: slide 16</a:t>
+              <a:t>Built Oct 28 – Nov 4, 2026, during the hackathon · demo video 2:29 · what is new and what is not: slide 16</a:t>
             </a:r>
             <a:endParaRPr lang="en-US" sz="1300" dirty="0"/>
           </a:p>
@@ -13863,7 +13863,7 @@
                   <a:srgbClr val="0064E0"/>
                 </a:solidFill>
               </a:rPr>
-              <a:t>github.com/gino6178/serve-meta-hackathon  ·  live: relay-orders-eliminate-associated.trycloudflare.com</a:t>
+              <a:t>github.com/gino6178/serve-meta-hackathon  ·  live: https://play.theminimallab.com</a:t>
             </a:r>
             <a:endParaRPr lang="en-US" sz="1300" dirty="0"/>
           </a:p>
@@ -36477,7 +36477,7 @@
                   <a:srgbClr val="55555C"/>
                 </a:solidFill>
               </a:rPr>
-              <a:t>LIVE SINCE 29 OCT · relay-orders-eliminate-associated.trycloudflare.com</a:t>
+              <a:t>LIVE SINCE 29 OCT · play.theminimallab.com</a:t>
             </a:r>
             <a:endParaRPr lang="en-US" sz="1000" dirty="0"/>
           </a:p>

--- a/video/deck/Serve_Meta_deck.pptx
+++ b/video/deck/Serve_Meta_deck.pptx
@@ -138,7 +138,7 @@
   <p:extLst>
     <p:ext uri="{521415D9-36F7-43E2-AB2F-B90AF26B5E84}">
       <p14:sectionLst xmlns:p14="http://schemas.microsoft.com/office/powerpoint/2010/main">
-        <p14:section name="Main" id="{0d311172-28c9-c022-642d-b1b314219dd9}">
+        <p14:section name="Main" id="{e582dad2-fd66-d20f-8532-a0a8d700ca45}">
           <p14:sldIdLst>
             <p14:sldId id="256"/>
             <p14:sldId id="257"/>
@@ -160,7 +160,7 @@
             <p14:sldId id="273"/>
           </p14:sldIdLst>
         </p14:section>
-        <p14:section name="Appendix" id="{7d6d9c37-396f-7795-9db7-315c8d649595}">
+        <p14:section name="Appendix" id="{38ee5c7e-e56d-0b65-9413-dd84cd51a856}">
           <p14:sldIdLst>
             <p14:sldId id="274"/>
             <p14:sldId id="275"/>
@@ -2684,7 +2684,7 @@
           <a:p>
             <a:r>
               <a:rPr lang="en-US" dirty="0"/>
-              <a:t>Demo 影片 2:29，三幕：一、冷啟動：Leo 沒有帳號，點連結就加入，Mia 同時收到 Game on（並排）；二、agent 透過 A2A 協商，Hana 的 agent 提出反提案（Messenger 裡一個 yes 就訂好也在這一幕）；三、找球場：Prompt Guard 2 先過濾評論，再由 Muse Glimmer 判斷（14 倍速，有標示），然後是社團。</a:t>
+              <a:t>Demo 影片 2:27，三幕：一、冷啟動：Leo 沒有帳號，點連結就加入，Mia 同時收到 Game on（並排）；二、agent 透過 A2A 協商，Hana 的 agent 提出反提案（Messenger 裡一個 yes 就訂好也在這一幕）；三、找球場：Prompt Guard 2 先過濾評論，再由 Muse Glimmer 判斷（14 倍速，有標示），然後是社團。</a:t>
             </a:r>
             <a:endParaRPr lang="en-US" dirty="0"/>
           </a:p>
@@ -5821,7 +5821,7 @@
                   <a:srgbClr val="0A0A0B"/>
                 </a:solidFill>
               </a:rPr>
-              <a:t>15 Meta models; six carry the product</a:t>
+              <a:t>Six Meta models carry the product (15 used in all)</a:t>
             </a:r>
             <a:endParaRPr lang="en-US" sz="3200" dirty="0"/>
           </a:p>
@@ -7245,6 +7245,17 @@
                       <a:pPr indent="0" marL="0">
                         <a:buNone/>
                       </a:pPr>
+                      <a:r>
+                        <a:rPr lang="en-US" sz="1100" b="1" dirty="0">
+                          <a:solidFill>
+                            <a:srgbClr val="55555C"/>
+                          </a:solidFill>
+                          <a:latin typeface="Segoe UI" pitchFamily="34" charset="0"/>
+                          <a:ea typeface="Segoe UI" pitchFamily="34" charset="-122"/>
+                          <a:cs typeface="Segoe UI" pitchFamily="34" charset="-120"/>
+                        </a:rPr>
+                        <a:t>Evidence</a:t>
+                      </a:r>
                       <a:endParaRPr lang="en-US" sz="1100" dirty="0">
                         <a:latin typeface="Segoe UI" charset="0"/>
                         <a:ea typeface="Segoe UI" charset="0"/>
@@ -9437,7 +9448,7 @@
                   <a:srgbClr val="55555C"/>
                 </a:solidFill>
               </a:rPr>
-              <a:t>fewer Glimmer answers in simulated talks, where some members need Glimmer (96% is the test set)</a:t>
+              <a:t>fewer Glimmer answers in simulated talks; on the 500 test cases the student answers 96%</a:t>
             </a:r>
             <a:endParaRPr lang="en-US" sz="1000" dirty="0"/>
           </a:p>
@@ -10523,7 +10534,7 @@
                   <a:srgbClr val="55555C"/>
                 </a:solidFill>
               </a:rPr>
-              <a:t>Whoever answered, code checks the member's hard rules again before the decision goes to the other agent, labelled with the tier that made it. Agent chats shows it under every message.</a:t>
+              <a:t>Whoever answered, code checks the member's hard rules again before the decision goes to the other agent, labelled with the tier that made it. Agent chats shows it under every message. The week planned in the video took 78 s (13 Glimmer calls), in the background.</a:t>
             </a:r>
             <a:endParaRPr lang="en-US" sz="1100" dirty="0"/>
           </a:p>
@@ -12422,7 +12433,7 @@
                   <a:srgbClr val="0A0A0B"/>
                 </a:solidFill>
               </a:rPr>
-              <a:t>Every test and evaluation; the demo video (2:29)</a:t>
+              <a:t>Every test and evaluation; the demo video (2:27)</a:t>
             </a:r>
             <a:endParaRPr lang="en-US" sz="1200" dirty="0"/>
           </a:p>
@@ -12880,7 +12891,7 @@
                   <a:srgbClr val="0A7F44"/>
                 </a:solidFill>
               </a:rPr>
-              <a:t>DEMO · 25% · THE VIDEO, 2:29</a:t>
+              <a:t>DEMO · 25% · THE VIDEO, 2:27</a:t>
             </a:r>
             <a:endParaRPr lang="en-US" sz="1300" dirty="0"/>
           </a:p>
@@ -13827,7 +13838,7 @@
                   <a:srgbClr val="0A0A0B"/>
                 </a:solidFill>
               </a:rPr>
-              <a:t>Built Oct 28 – Nov 4, 2026, during the hackathon · demo video 2:29 · what is new and what is not: slide 16</a:t>
+              <a:t>Built Oct 28 – Nov 4, 2026, during the hackathon · demo video 2:27 · what is new and what is not: slide 16</a:t>
             </a:r>
             <a:endParaRPr lang="en-US" sz="1300" dirty="0"/>
           </a:p>
@@ -14390,7 +14401,7 @@
                   <a:srgbClr val="0A0A0B"/>
                 </a:solidFill>
               </a:rPr>
-              <a:t>15 Meta models: 10 on my server, 5 on the Meta Model API</a:t>
+              <a:t>Six Meta models carry it; 15 used in all</a:t>
             </a:r>
             <a:endParaRPr lang="en-US" sz="1400" dirty="0"/>
           </a:p>
@@ -36576,7 +36587,7 @@
                   <a:srgbClr val="55555C"/>
                 </a:solidFill>
               </a:rPr>
-              <a:t>players (14 demo sign-ins)</a:t>
+              <a:t>people, me included (15 demo sign-ins)</a:t>
             </a:r>
             <a:endParaRPr lang="en-US" sz="1050" dirty="0"/>
           </a:p>
@@ -36837,7 +36848,7 @@
                   <a:srgbClr val="0A0A0B"/>
                 </a:solidFill>
               </a:rPr>
-              <a:t>7</a:t>
+              <a:t>8</a:t>
             </a:r>
             <a:endParaRPr lang="en-US" sz="2600" dirty="0"/>
           </a:p>
@@ -36873,7 +36884,7 @@
                   <a:srgbClr val="55555C"/>
                 </a:solidFill>
               </a:rPr>
-              <a:t>joins; 2 games filled</a:t>
+              <a:t>joins; 3 of 4 games filled</a:t>
             </a:r>
             <a:endParaRPr lang="en-US" sz="1050" dirty="0"/>
           </a:p>
@@ -37308,7 +37319,7 @@
                   <a:srgbClr val="55555C"/>
                 </a:solidFill>
               </a:rPr>
-              <a:t>Counted 29 Oct, day 3. Spond, Playtomic and Meetup post events or book courts; on Serve each player's agent agrees the time, so nobody runs the poll.</a:t>
+              <a:t>Counted 30 Oct, day 4. Spond, Playtomic and Meetup post events or book courts; on Serve each player's agent agrees the time, so nobody runs the poll.</a:t>
             </a:r>
             <a:endParaRPr lang="en-US" sz="1000" dirty="0"/>
           </a:p>
@@ -37982,7 +37993,7 @@
                   <a:srgbClr val="55555C"/>
                 </a:solidFill>
               </a:rPr>
-              <a:t>Sign in once and the game is joined straight away, also after a Facebook or Instagram login.</a:t>
+              <a:t>Sign in once (a demo sign-in for now: Facebook and Instagram login wait for Meta's app review) and the game is joined straight away.</a:t>
             </a:r>
             <a:endParaRPr lang="en-US" sz="1250" dirty="0"/>
           </a:p>
@@ -38386,7 +38397,7 @@
                   <a:srgbClr val="0A0A0B"/>
                 </a:solidFill>
               </a:rPr>
-              <a:t>Games where no one has time to organise them</a:t>
+              <a:t>Games where no one has time to organize them</a:t>
             </a:r>
             <a:endParaRPr lang="en-US" sz="3200" dirty="0"/>
           </a:p>
@@ -38521,7 +38532,7 @@
                   <a:srgbClr val="55555C"/>
                 </a:solidFill>
               </a:rPr>
-              <a:t>Private: parents and helpers join only when the organiser lets them in. Children have no accounts: first names only, seen by the organiser. Code shares out the courts in turns.</a:t>
+              <a:t>Private: parents and helpers join only when the organizer lets them in. Children have no accounts: first names only, seen by the organizer. Code shares out the courts in turns.</a:t>
             </a:r>
             <a:endParaRPr lang="en-US" sz="1250" dirty="0"/>
           </a:p>
@@ -38917,7 +38928,7 @@
                   <a:srgbClr val="55555C"/>
                 </a:solidFill>
               </a:rPr>
-              <a:t>Players enter with a level and a pledge to the cause, only recorded: Serve handles no money. The organiser makes the draw in one tap.</a:t>
+              <a:t>Players enter with a level and a pledge to the cause, only recorded: Serve handles no money. The organizer makes the draw in one tap.</a:t>
             </a:r>
             <a:endParaRPr lang="en-US" sz="1250" dirty="0"/>
           </a:p>

--- a/video/deck/Serve_Meta_deck.pptx
+++ b/video/deck/Serve_Meta_deck.pptx
@@ -140,7 +140,7 @@
   <p:extLst>
     <p:ext uri="{521415D9-36F7-43E2-AB2F-B90AF26B5E84}">
       <p14:sectionLst xmlns:p14="http://schemas.microsoft.com/office/powerpoint/2010/main">
-        <p14:section name="Main" id="{b6829275-78d3-0be6-e2a7-badf1b5fad01}">
+        <p14:section name="Main" id="{3681b764-44ad-ebfe-6b26-5234ecc4fbb1}">
           <p14:sldIdLst>
             <p14:sldId id="256"/>
             <p14:sldId id="257"/>
@@ -164,7 +164,7 @@
             <p14:sldId id="275"/>
           </p14:sldIdLst>
         </p14:section>
-        <p14:section name="Appendix" id="{593a1339-fc92-8df1-bb77-3f019b071ab4}">
+        <p14:section name="Appendix" id="{68edcb09-9353-2e06-2fd5-e0b022ca8728}">
           <p14:sldIdLst>
             <p14:sldId id="276"/>
             <p14:sldId id="277"/>
@@ -4483,7 +4483,7 @@
               <a:t>示意圖：每個人都有自己的 agent，因為隱私，偏好只有 agent 知道（幾點有空、願意跑多遠、願意付多少），不會攤在群組裡。
 左邊是今天：每個 agent 只認識自己的主人，也只能找通訊錄裡的人；朋友沒空就沒有下一步，而陌生人的 agent 又不知道能不能信。
 右邊是 Serve：一個讓人和 agent 都能進出的地方。agent 帶著主人的偏好來揪團、找附近的夥伴，彼此只交換「可以／不行／原因」，偏好不離開 agent。
-下面三個支柱：AI trust（真人出席率＋agent 守信率，每個 agent 有自己的金鑰、每則訊息都簽章）；Web3 的精神但不用區塊鏈（金鑰在你手上、資料留在你的 agent、社團可以跨伺服器聯盟）；會進化的平台（agent 一直撞到的牆會變成社團的提案，大家投票，經過安全關卡後上線，平台跟著 agent 的需求改變）。</a:t>
+下面三個支柱：AI trust（真人出席率＋agent 守信率，每個 agent 有自己的金鑰、每則訊息都簽章）；Web3：不可竄改的信用帳本（每筆信用紀錄都是雜湊鏈上的一筆，含前一筆的雜湊；伺服器每天用自己的 Ed25519 金鑰簽下鏈尾；任何人都能從 /api/trust/chain 驗證，repo 裡有 verify_trust_chain.mjs；金鑰在你手上；沒有代幣、沒有手續費）；會進化的平台（agent 一直撞到的牆會變成社團的提案，大家投票，經過安全關卡後上線，平台跟著 agent 的需求改變）。</a:t>
             </a:r>
             <a:endParaRPr lang="en-US" dirty="0"/>
           </a:p>
@@ -39333,7 +39333,7 @@
                   <a:srgbClr val="0064E0"/>
                 </a:solidFill>
               </a:rPr>
-              <a:t>WEB3-STYLE, NO CHAIN NEEDED</a:t>
+              <a:t>WEB3: A TRUST LEDGER NO ONE CAN EDIT</a:t>
             </a:r>
             <a:endParaRPr lang="en-US" sz="1050" dirty="0"/>
           </a:p>
@@ -39369,7 +39369,7 @@
                   <a:srgbClr val="0A0A0B"/>
                 </a:solidFill>
               </a:rPr>
-              <a:t>You own your agent's key and your data stays with it. Clubs can federate across servers, and members govern the rules.</a:t>
+              <a:t>Every record is a hash-chained entry; the server signs each day's head with its key, and anyone can verify it. You hold your agent's key. No tokens, no fees.</a:t>
             </a:r>
             <a:endParaRPr lang="en-US" sz="1050" dirty="0"/>
           </a:p>
@@ -40397,7 +40397,7 @@
                   <a:srgbClr val="0A0A0B"/>
                 </a:solidFill>
               </a:rPr>
-              <a:t>Two records, counted by code. </a:t>
+              <a:t>Two records on a signed hash chain. </a:t>
             </a:r>
             <a:pPr indent="0" marL="0">
               <a:buNone/>
@@ -40408,7 +40408,7 @@
                   <a:srgbClr val="0A0A0B"/>
                 </a:solidFill>
               </a:rPr>
-              <a:t>Shows up: players tap who came after each game; leaving in the last 6 hours is a late drop. Agent keeps: your yes after your agent's yes.</a:t>
+              <a:t>Shows up: players tap who came; a drop in the last 6 hours is late. Agent keeps: your yes after your agent's yes. Anyone can verify.</a:t>
             </a:r>
             <a:endParaRPr lang="en-US" sz="1050" dirty="0"/>
           </a:p>
